--- a/docs/Deliverables/Orderly_Slides.pptx
+++ b/docs/Deliverables/Orderly_Slides.pptx
@@ -277,6 +277,13 @@
           </p:nvPr>
         </p:nvSpPr>
         <p:spPr/>
+        <p:txBody>
+          <a:bodyPr/>
+          <a:lstStyle/>
+          <a:p>
+            <a:endParaRPr lang="en-US"/>
+          </a:p>
+        </p:txBody>
       </p:sp>
       <p:sp>
         <p:nvSpPr>
@@ -361,6 +368,13 @@
           </p:nvPr>
         </p:nvSpPr>
         <p:spPr/>
+        <p:txBody>
+          <a:bodyPr/>
+          <a:lstStyle/>
+          <a:p>
+            <a:endParaRPr lang="en-US"/>
+          </a:p>
+        </p:txBody>
       </p:sp>
       <p:sp>
         <p:nvSpPr>
@@ -377,7 +391,10 @@
           <a:bodyPr/>
           <a:lstStyle/>
           <a:p>
-            <a:endParaRPr lang="en-US" dirty="0"/>
+            <a:r>
+              <a:rPr lang="en-US" dirty="0"/>
+              <a:t>Caleb</a:t>
+            </a:r>
           </a:p>
         </p:txBody>
       </p:sp>
@@ -445,6 +462,13 @@
           </p:nvPr>
         </p:nvSpPr>
         <p:spPr/>
+        <p:txBody>
+          <a:bodyPr/>
+          <a:lstStyle/>
+          <a:p>
+            <a:endParaRPr lang="en-US"/>
+          </a:p>
+        </p:txBody>
       </p:sp>
       <p:sp>
         <p:nvSpPr>
@@ -461,7 +485,10 @@
           <a:bodyPr/>
           <a:lstStyle/>
           <a:p>
-            <a:endParaRPr lang="en-US" dirty="0"/>
+            <a:r>
+              <a:rPr lang="en-US" dirty="0"/>
+              <a:t>Rachel</a:t>
+            </a:r>
           </a:p>
         </p:txBody>
       </p:sp>
@@ -529,6 +556,13 @@
           </p:nvPr>
         </p:nvSpPr>
         <p:spPr/>
+        <p:txBody>
+          <a:bodyPr/>
+          <a:lstStyle/>
+          <a:p>
+            <a:endParaRPr lang="en-US"/>
+          </a:p>
+        </p:txBody>
       </p:sp>
       <p:sp>
         <p:nvSpPr>
@@ -545,7 +579,10 @@
           <a:bodyPr/>
           <a:lstStyle/>
           <a:p>
-            <a:endParaRPr lang="en-US" dirty="0"/>
+            <a:r>
+              <a:rPr lang="en-US" dirty="0"/>
+              <a:t>Serina</a:t>
+            </a:r>
           </a:p>
         </p:txBody>
       </p:sp>
@@ -613,6 +650,13 @@
           </p:nvPr>
         </p:nvSpPr>
         <p:spPr/>
+        <p:txBody>
+          <a:bodyPr/>
+          <a:lstStyle/>
+          <a:p>
+            <a:endParaRPr lang="en-US"/>
+          </a:p>
+        </p:txBody>
       </p:sp>
       <p:sp>
         <p:nvSpPr>
@@ -629,7 +673,10 @@
           <a:bodyPr/>
           <a:lstStyle/>
           <a:p>
-            <a:endParaRPr lang="en-US" dirty="0"/>
+            <a:r>
+              <a:rPr lang="en-US" dirty="0"/>
+              <a:t>Serina</a:t>
+            </a:r>
           </a:p>
         </p:txBody>
       </p:sp>
@@ -697,6 +744,13 @@
           </p:nvPr>
         </p:nvSpPr>
         <p:spPr/>
+        <p:txBody>
+          <a:bodyPr/>
+          <a:lstStyle/>
+          <a:p>
+            <a:endParaRPr lang="en-US"/>
+          </a:p>
+        </p:txBody>
       </p:sp>
       <p:sp>
         <p:nvSpPr>
@@ -712,6 +766,465 @@
         <p:txBody>
           <a:bodyPr/>
           <a:lstStyle/>
+          <a:p>
+            <a:r>
+              <a:rPr lang="en-US" sz="1200" b="1" i="0" kern="1200" dirty="0">
+                <a:solidFill>
+                  <a:schemeClr val="tx1"/>
+                </a:solidFill>
+                <a:effectLst/>
+                <a:latin typeface="+mn-lt"/>
+                <a:ea typeface="+mn-ea"/>
+                <a:cs typeface="+mn-cs"/>
+              </a:rPr>
+              <a:t>"15 features delivered”</a:t>
+            </a:r>
+            <a:r>
+              <a:rPr lang="en-US" sz="1200" b="0" i="0" kern="1200" dirty="0">
+                <a:solidFill>
+                  <a:schemeClr val="tx1"/>
+                </a:solidFill>
+                <a:effectLst/>
+                <a:latin typeface="+mn-lt"/>
+                <a:ea typeface="+mn-ea"/>
+                <a:cs typeface="+mn-cs"/>
+              </a:rPr>
+              <a:t>: counting by user-facing feature area rather than individual Trello cards </a:t>
+            </a:r>
+            <a:br>
+              <a:rPr lang="en-US" sz="1200" b="0" i="0" kern="1200" dirty="0">
+                <a:solidFill>
+                  <a:schemeClr val="tx1"/>
+                </a:solidFill>
+                <a:effectLst/>
+                <a:latin typeface="+mn-lt"/>
+                <a:ea typeface="+mn-ea"/>
+                <a:cs typeface="+mn-cs"/>
+              </a:rPr>
+            </a:br>
+            <a:r>
+              <a:rPr lang="en-US" sz="1200" b="0" i="0" kern="1200" dirty="0">
+                <a:solidFill>
+                  <a:schemeClr val="tx1"/>
+                </a:solidFill>
+                <a:effectLst/>
+                <a:latin typeface="+mn-lt"/>
+                <a:ea typeface="+mn-ea"/>
+                <a:cs typeface="+mn-cs"/>
+              </a:rPr>
+              <a:t>(which split each feature into UX/Frontend/Backend). </a:t>
+            </a:r>
+            <a:br>
+              <a:rPr lang="en-US" sz="1200" b="0" i="0" kern="1200" dirty="0">
+                <a:solidFill>
+                  <a:schemeClr val="tx1"/>
+                </a:solidFill>
+                <a:effectLst/>
+                <a:latin typeface="+mn-lt"/>
+                <a:ea typeface="+mn-ea"/>
+                <a:cs typeface="+mn-cs"/>
+              </a:rPr>
+            </a:br>
+            <a:endParaRPr lang="en-US" sz="1200" b="0" i="0" kern="1200" dirty="0">
+              <a:solidFill>
+                <a:schemeClr val="tx1"/>
+              </a:solidFill>
+              <a:effectLst/>
+              <a:latin typeface="+mn-lt"/>
+              <a:ea typeface="+mn-ea"/>
+              <a:cs typeface="+mn-cs"/>
+            </a:endParaRPr>
+          </a:p>
+          <a:p>
+            <a:r>
+              <a:rPr lang="en-US" sz="1200" b="1" i="0" kern="1200" dirty="0">
+                <a:solidFill>
+                  <a:schemeClr val="tx1"/>
+                </a:solidFill>
+                <a:effectLst/>
+                <a:latin typeface="+mn-lt"/>
+                <a:ea typeface="+mn-ea"/>
+                <a:cs typeface="+mn-cs"/>
+              </a:rPr>
+              <a:t>1. Product Browsing</a:t>
+            </a:r>
+            <a:r>
+              <a:rPr lang="en-US" sz="1200" b="0" i="0" kern="1200" dirty="0">
+                <a:solidFill>
+                  <a:schemeClr val="tx1"/>
+                </a:solidFill>
+                <a:effectLst/>
+                <a:latin typeface="+mn-lt"/>
+                <a:ea typeface="+mn-ea"/>
+                <a:cs typeface="+mn-cs"/>
+              </a:rPr>
+              <a:t> — browse the menu catalog</a:t>
+            </a:r>
+          </a:p>
+          <a:p>
+            <a:r>
+              <a:rPr lang="en-US" sz="1200" b="1" i="0" kern="1200" dirty="0">
+                <a:solidFill>
+                  <a:schemeClr val="tx1"/>
+                </a:solidFill>
+                <a:effectLst/>
+                <a:latin typeface="+mn-lt"/>
+                <a:ea typeface="+mn-ea"/>
+                <a:cs typeface="+mn-cs"/>
+              </a:rPr>
+              <a:t>2. Shopping Cart</a:t>
+            </a:r>
+            <a:r>
+              <a:rPr lang="en-US" sz="1200" b="0" i="0" kern="1200" dirty="0">
+                <a:solidFill>
+                  <a:schemeClr val="tx1"/>
+                </a:solidFill>
+                <a:effectLst/>
+                <a:latin typeface="+mn-lt"/>
+                <a:ea typeface="+mn-ea"/>
+                <a:cs typeface="+mn-cs"/>
+              </a:rPr>
+              <a:t> — persistent cart with customization display</a:t>
+            </a:r>
+          </a:p>
+          <a:p>
+            <a:r>
+              <a:rPr lang="en-US" sz="1200" b="1" i="0" kern="1200" dirty="0">
+                <a:solidFill>
+                  <a:schemeClr val="tx1"/>
+                </a:solidFill>
+                <a:effectLst/>
+                <a:latin typeface="+mn-lt"/>
+                <a:ea typeface="+mn-ea"/>
+                <a:cs typeface="+mn-cs"/>
+              </a:rPr>
+              <a:t>3. Item Customization</a:t>
+            </a:r>
+            <a:r>
+              <a:rPr lang="en-US" sz="1200" b="0" i="0" kern="1200" dirty="0">
+                <a:solidFill>
+                  <a:schemeClr val="tx1"/>
+                </a:solidFill>
+                <a:effectLst/>
+                <a:latin typeface="+mn-lt"/>
+                <a:ea typeface="+mn-ea"/>
+                <a:cs typeface="+mn-cs"/>
+              </a:rPr>
+              <a:t> — modifier selection with live price updates</a:t>
+            </a:r>
+          </a:p>
+          <a:p>
+            <a:r>
+              <a:rPr lang="en-US" sz="1200" b="1" i="0" kern="1200" dirty="0">
+                <a:solidFill>
+                  <a:schemeClr val="tx1"/>
+                </a:solidFill>
+                <a:effectLst/>
+                <a:latin typeface="+mn-lt"/>
+                <a:ea typeface="+mn-ea"/>
+                <a:cs typeface="+mn-cs"/>
+              </a:rPr>
+              <a:t>4. Checkout</a:t>
+            </a:r>
+            <a:r>
+              <a:rPr lang="en-US" sz="1200" b="0" i="0" kern="1200" dirty="0">
+                <a:solidFill>
+                  <a:schemeClr val="tx1"/>
+                </a:solidFill>
+                <a:effectLst/>
+                <a:latin typeface="+mn-lt"/>
+                <a:ea typeface="+mn-ea"/>
+                <a:cs typeface="+mn-cs"/>
+              </a:rPr>
+              <a:t> — submit an order</a:t>
+            </a:r>
+          </a:p>
+          <a:p>
+            <a:r>
+              <a:rPr lang="en-US" sz="1200" b="1" i="0" kern="1200" dirty="0">
+                <a:solidFill>
+                  <a:schemeClr val="tx1"/>
+                </a:solidFill>
+                <a:effectLst/>
+                <a:latin typeface="+mn-lt"/>
+                <a:ea typeface="+mn-ea"/>
+                <a:cs typeface="+mn-cs"/>
+              </a:rPr>
+              <a:t>5. Order Confirmation</a:t>
+            </a:r>
+            <a:r>
+              <a:rPr lang="en-US" sz="1200" b="0" i="0" kern="1200" dirty="0">
+                <a:solidFill>
+                  <a:schemeClr val="tx1"/>
+                </a:solidFill>
+                <a:effectLst/>
+                <a:latin typeface="+mn-lt"/>
+                <a:ea typeface="+mn-ea"/>
+                <a:cs typeface="+mn-cs"/>
+              </a:rPr>
+              <a:t> — receipt after placing an order</a:t>
+            </a:r>
+          </a:p>
+          <a:p>
+            <a:r>
+              <a:rPr lang="en-US" sz="1200" b="1" i="0" kern="1200" dirty="0">
+                <a:solidFill>
+                  <a:schemeClr val="tx1"/>
+                </a:solidFill>
+                <a:effectLst/>
+                <a:latin typeface="+mn-lt"/>
+                <a:ea typeface="+mn-ea"/>
+                <a:cs typeface="+mn-cs"/>
+              </a:rPr>
+              <a:t>6. Order History</a:t>
+            </a:r>
+            <a:r>
+              <a:rPr lang="en-US" sz="1200" b="0" i="0" kern="1200" dirty="0">
+                <a:solidFill>
+                  <a:schemeClr val="tx1"/>
+                </a:solidFill>
+                <a:effectLst/>
+                <a:latin typeface="+mn-lt"/>
+                <a:ea typeface="+mn-ea"/>
+                <a:cs typeface="+mn-cs"/>
+              </a:rPr>
+              <a:t> — customer view of past orders</a:t>
+            </a:r>
+          </a:p>
+          <a:p>
+            <a:r>
+              <a:rPr lang="en-US" sz="1200" b="1" i="0" kern="1200" dirty="0">
+                <a:solidFill>
+                  <a:schemeClr val="tx1"/>
+                </a:solidFill>
+                <a:effectLst/>
+                <a:latin typeface="+mn-lt"/>
+                <a:ea typeface="+mn-ea"/>
+                <a:cs typeface="+mn-cs"/>
+              </a:rPr>
+              <a:t>7. Customer Order Cancellation</a:t>
+            </a:r>
+            <a:r>
+              <a:rPr lang="en-US" sz="1200" b="0" i="0" kern="1200" dirty="0">
+                <a:solidFill>
+                  <a:schemeClr val="tx1"/>
+                </a:solidFill>
+                <a:effectLst/>
+                <a:latin typeface="+mn-lt"/>
+                <a:ea typeface="+mn-ea"/>
+                <a:cs typeface="+mn-cs"/>
+              </a:rPr>
+              <a:t> — cancel a placed order</a:t>
+            </a:r>
+          </a:p>
+          <a:p>
+            <a:r>
+              <a:rPr lang="en-US" sz="1200" b="1" i="0" kern="1200" dirty="0">
+                <a:solidFill>
+                  <a:schemeClr val="tx1"/>
+                </a:solidFill>
+                <a:effectLst/>
+                <a:latin typeface="+mn-lt"/>
+                <a:ea typeface="+mn-ea"/>
+                <a:cs typeface="+mn-cs"/>
+              </a:rPr>
+              <a:t>8. Admin Dashboard Navigation</a:t>
+            </a:r>
+            <a:r>
+              <a:rPr lang="en-US" sz="1200" b="0" i="0" kern="1200" dirty="0">
+                <a:solidFill>
+                  <a:schemeClr val="tx1"/>
+                </a:solidFill>
+                <a:effectLst/>
+                <a:latin typeface="+mn-lt"/>
+                <a:ea typeface="+mn-ea"/>
+                <a:cs typeface="+mn-cs"/>
+              </a:rPr>
+              <a:t> — unified admin hub</a:t>
+            </a:r>
+          </a:p>
+          <a:p>
+            <a:r>
+              <a:rPr lang="en-US" sz="1200" b="1" i="0" kern="1200" dirty="0">
+                <a:solidFill>
+                  <a:schemeClr val="tx1"/>
+                </a:solidFill>
+                <a:effectLst/>
+                <a:latin typeface="+mn-lt"/>
+                <a:ea typeface="+mn-ea"/>
+                <a:cs typeface="+mn-cs"/>
+              </a:rPr>
+              <a:t>9. Product &amp; Variant Management</a:t>
+            </a:r>
+            <a:r>
+              <a:rPr lang="en-US" sz="1200" b="0" i="0" kern="1200" dirty="0">
+                <a:solidFill>
+                  <a:schemeClr val="tx1"/>
+                </a:solidFill>
+                <a:effectLst/>
+                <a:latin typeface="+mn-lt"/>
+                <a:ea typeface="+mn-ea"/>
+                <a:cs typeface="+mn-cs"/>
+              </a:rPr>
+              <a:t> — full CRUD for products</a:t>
+            </a:r>
+          </a:p>
+          <a:p>
+            <a:r>
+              <a:rPr lang="en-US" sz="1200" b="1" i="0" kern="1200" dirty="0">
+                <a:solidFill>
+                  <a:schemeClr val="tx1"/>
+                </a:solidFill>
+                <a:effectLst/>
+                <a:latin typeface="+mn-lt"/>
+                <a:ea typeface="+mn-ea"/>
+                <a:cs typeface="+mn-cs"/>
+              </a:rPr>
+              <a:t>10. Inventory Management</a:t>
+            </a:r>
+            <a:r>
+              <a:rPr lang="en-US" sz="1200" b="0" i="0" kern="1200" dirty="0">
+                <a:solidFill>
+                  <a:schemeClr val="tx1"/>
+                </a:solidFill>
+                <a:effectLst/>
+                <a:latin typeface="+mn-lt"/>
+                <a:ea typeface="+mn-ea"/>
+                <a:cs typeface="+mn-cs"/>
+              </a:rPr>
+              <a:t> — stock tracking and adjustments</a:t>
+            </a:r>
+          </a:p>
+          <a:p>
+            <a:r>
+              <a:rPr lang="en-US" sz="1200" b="1" i="0" kern="1200" dirty="0">
+                <a:solidFill>
+                  <a:schemeClr val="tx1"/>
+                </a:solidFill>
+                <a:effectLst/>
+                <a:latin typeface="+mn-lt"/>
+                <a:ea typeface="+mn-ea"/>
+                <a:cs typeface="+mn-cs"/>
+              </a:rPr>
+              <a:t>11. Sales Summary Dashboard</a:t>
+            </a:r>
+            <a:r>
+              <a:rPr lang="en-US" sz="1200" b="0" i="0" kern="1200" dirty="0">
+                <a:solidFill>
+                  <a:schemeClr val="tx1"/>
+                </a:solidFill>
+                <a:effectLst/>
+                <a:latin typeface="+mn-lt"/>
+                <a:ea typeface="+mn-ea"/>
+                <a:cs typeface="+mn-cs"/>
+              </a:rPr>
+              <a:t> — revenue trends and analytics</a:t>
+            </a:r>
+          </a:p>
+          <a:p>
+            <a:r>
+              <a:rPr lang="en-US" sz="1200" b="1" i="0" kern="1200" dirty="0">
+                <a:solidFill>
+                  <a:schemeClr val="tx1"/>
+                </a:solidFill>
+                <a:effectLst/>
+                <a:latin typeface="+mn-lt"/>
+                <a:ea typeface="+mn-ea"/>
+                <a:cs typeface="+mn-cs"/>
+              </a:rPr>
+              <a:t>12. Low Stock Indicators</a:t>
+            </a:r>
+            <a:r>
+              <a:rPr lang="en-US" sz="1200" b="0" i="0" kern="1200" dirty="0">
+                <a:solidFill>
+                  <a:schemeClr val="tx1"/>
+                </a:solidFill>
+                <a:effectLst/>
+                <a:latin typeface="+mn-lt"/>
+                <a:ea typeface="+mn-ea"/>
+                <a:cs typeface="+mn-cs"/>
+              </a:rPr>
+              <a:t> — real-time stock alerts</a:t>
+            </a:r>
+          </a:p>
+          <a:p>
+            <a:r>
+              <a:rPr lang="en-US" sz="1200" b="1" i="0" kern="1200" dirty="0">
+                <a:solidFill>
+                  <a:schemeClr val="tx1"/>
+                </a:solidFill>
+                <a:effectLst/>
+                <a:latin typeface="+mn-lt"/>
+                <a:ea typeface="+mn-ea"/>
+                <a:cs typeface="+mn-cs"/>
+              </a:rPr>
+              <a:t>13. Admin Orders Management</a:t>
+            </a:r>
+            <a:r>
+              <a:rPr lang="en-US" sz="1200" b="0" i="0" kern="1200" dirty="0">
+                <a:solidFill>
+                  <a:schemeClr val="tx1"/>
+                </a:solidFill>
+                <a:effectLst/>
+                <a:latin typeface="+mn-lt"/>
+                <a:ea typeface="+mn-ea"/>
+                <a:cs typeface="+mn-cs"/>
+              </a:rPr>
+              <a:t> — view and manage all orders</a:t>
+            </a:r>
+          </a:p>
+          <a:p>
+            <a:r>
+              <a:rPr lang="en-US" sz="1200" b="1" i="0" kern="1200" dirty="0">
+                <a:solidFill>
+                  <a:schemeClr val="tx1"/>
+                </a:solidFill>
+                <a:effectLst/>
+                <a:latin typeface="+mn-lt"/>
+                <a:ea typeface="+mn-ea"/>
+                <a:cs typeface="+mn-cs"/>
+              </a:rPr>
+              <a:t>14. Settings</a:t>
+            </a:r>
+            <a:r>
+              <a:rPr lang="en-US" sz="1200" b="0" i="0" kern="1200" dirty="0">
+                <a:solidFill>
+                  <a:schemeClr val="tx1"/>
+                </a:solidFill>
+                <a:effectLst/>
+                <a:latin typeface="+mn-lt"/>
+                <a:ea typeface="+mn-ea"/>
+                <a:cs typeface="+mn-cs"/>
+              </a:rPr>
+              <a:t> — business profile and preference config</a:t>
+            </a:r>
+          </a:p>
+          <a:p>
+            <a:r>
+              <a:rPr lang="en-US" sz="1200" b="1" i="0" kern="1200" dirty="0">
+                <a:solidFill>
+                  <a:schemeClr val="tx1"/>
+                </a:solidFill>
+                <a:effectLst/>
+                <a:latin typeface="+mn-lt"/>
+                <a:ea typeface="+mn-ea"/>
+                <a:cs typeface="+mn-cs"/>
+              </a:rPr>
+              <a:t>15. Profile Page</a:t>
+            </a:r>
+            <a:r>
+              <a:rPr lang="en-US" sz="1200" b="0" i="0" kern="1200" dirty="0">
+                <a:solidFill>
+                  <a:schemeClr val="tx1"/>
+                </a:solidFill>
+                <a:effectLst/>
+                <a:latin typeface="+mn-lt"/>
+                <a:ea typeface="+mn-ea"/>
+                <a:cs typeface="+mn-cs"/>
+              </a:rPr>
+              <a:t> — customer profile management</a:t>
+            </a:r>
+          </a:p>
           <a:p>
             <a:endParaRPr lang="en-US" dirty="0"/>
           </a:p>
@@ -781,6 +1294,13 @@
           </p:nvPr>
         </p:nvSpPr>
         <p:spPr/>
+        <p:txBody>
+          <a:bodyPr/>
+          <a:lstStyle/>
+          <a:p>
+            <a:endParaRPr lang="en-US"/>
+          </a:p>
+        </p:txBody>
       </p:sp>
       <p:sp>
         <p:nvSpPr>
@@ -797,7 +1317,10 @@
           <a:bodyPr/>
           <a:lstStyle/>
           <a:p>
-            <a:endParaRPr lang="en-US" dirty="0"/>
+            <a:r>
+              <a:rPr lang="en-US" dirty="0"/>
+              <a:t>KIM!</a:t>
+            </a:r>
           </a:p>
         </p:txBody>
       </p:sp>
@@ -865,6 +1388,13 @@
           </p:nvPr>
         </p:nvSpPr>
         <p:spPr/>
+        <p:txBody>
+          <a:bodyPr/>
+          <a:lstStyle/>
+          <a:p>
+            <a:endParaRPr lang="en-US"/>
+          </a:p>
+        </p:txBody>
       </p:sp>
       <p:sp>
         <p:nvSpPr>
@@ -881,6 +1411,74 @@
           <a:bodyPr/>
           <a:lstStyle/>
           <a:p>
+            <a:r>
+              <a:rPr lang="en-US" dirty="0"/>
+              <a:t>SERINA!</a:t>
+            </a:r>
+          </a:p>
+          <a:p>
+            <a:r>
+              <a:rPr lang="en-US" sz="1200" b="1" i="0" kern="1200" dirty="0">
+                <a:solidFill>
+                  <a:schemeClr val="tx1"/>
+                </a:solidFill>
+                <a:effectLst/>
+                <a:latin typeface="+mn-lt"/>
+                <a:ea typeface="+mn-ea"/>
+                <a:cs typeface="+mn-cs"/>
+              </a:rPr>
+              <a:t>DRF stands for Django REST Framework</a:t>
+            </a:r>
+            <a:r>
+              <a:rPr lang="en-US" sz="1200" b="0" i="0" kern="1200" dirty="0">
+                <a:solidFill>
+                  <a:schemeClr val="tx1"/>
+                </a:solidFill>
+                <a:effectLst/>
+                <a:latin typeface="+mn-lt"/>
+                <a:ea typeface="+mn-ea"/>
+                <a:cs typeface="+mn-cs"/>
+              </a:rPr>
+              <a:t>. It's the library that sits on top of Django and makes it easy to build REST APIs </a:t>
+            </a:r>
+          </a:p>
+          <a:p>
+            <a:r>
+              <a:rPr lang="en-US" sz="1200" b="0" i="0" u="none" strike="noStrike" kern="1200" dirty="0">
+                <a:solidFill>
+                  <a:schemeClr val="tx1"/>
+                </a:solidFill>
+                <a:effectLst/>
+                <a:latin typeface="+mn-lt"/>
+                <a:ea typeface="+mn-ea"/>
+                <a:cs typeface="+mn-cs"/>
+              </a:rPr>
+              <a:t>— it handles things like serializers (converting database models to JSON), </a:t>
+            </a:r>
+            <a:r>
+              <a:rPr lang="en-US" sz="1200" b="0" i="0" u="none" strike="noStrike" kern="1200" dirty="0" err="1">
+                <a:solidFill>
+                  <a:schemeClr val="tx1"/>
+                </a:solidFill>
+                <a:effectLst/>
+                <a:latin typeface="+mn-lt"/>
+                <a:ea typeface="+mn-ea"/>
+                <a:cs typeface="+mn-cs"/>
+              </a:rPr>
+              <a:t>viewsets</a:t>
+            </a:r>
+            <a:r>
+              <a:rPr lang="en-US" sz="1200" b="0" i="0" u="none" strike="noStrike" kern="1200" dirty="0">
+                <a:solidFill>
+                  <a:schemeClr val="tx1"/>
+                </a:solidFill>
+                <a:effectLst/>
+                <a:latin typeface="+mn-lt"/>
+                <a:ea typeface="+mn-ea"/>
+                <a:cs typeface="+mn-cs"/>
+              </a:rPr>
+              <a:t>, authentication, and permission classes. </a:t>
+            </a:r>
             <a:endParaRPr lang="en-US" dirty="0"/>
           </a:p>
         </p:txBody>
@@ -949,6 +1547,13 @@
           </p:nvPr>
         </p:nvSpPr>
         <p:spPr/>
+        <p:txBody>
+          <a:bodyPr/>
+          <a:lstStyle/>
+          <a:p>
+            <a:endParaRPr lang="en-US"/>
+          </a:p>
+        </p:txBody>
       </p:sp>
       <p:sp>
         <p:nvSpPr>
@@ -965,7 +1570,10 @@
           <a:bodyPr/>
           <a:lstStyle/>
           <a:p>
-            <a:endParaRPr lang="en-US" dirty="0"/>
+            <a:r>
+              <a:rPr lang="en-US" dirty="0"/>
+              <a:t>TRISTIN</a:t>
+            </a:r>
           </a:p>
         </p:txBody>
       </p:sp>
@@ -1033,6 +1641,13 @@
           </p:nvPr>
         </p:nvSpPr>
         <p:spPr/>
+        <p:txBody>
+          <a:bodyPr/>
+          <a:lstStyle/>
+          <a:p>
+            <a:endParaRPr lang="en-US"/>
+          </a:p>
+        </p:txBody>
       </p:sp>
       <p:sp>
         <p:nvSpPr>
@@ -1049,7 +1664,10 @@
           <a:bodyPr/>
           <a:lstStyle/>
           <a:p>
-            <a:endParaRPr lang="en-US" dirty="0"/>
+            <a:r>
+              <a:rPr lang="en-US" dirty="0"/>
+              <a:t>Rachel</a:t>
+            </a:r>
           </a:p>
         </p:txBody>
       </p:sp>
@@ -1117,6 +1735,13 @@
           </p:nvPr>
         </p:nvSpPr>
         <p:spPr/>
+        <p:txBody>
+          <a:bodyPr/>
+          <a:lstStyle/>
+          <a:p>
+            <a:endParaRPr lang="en-US"/>
+          </a:p>
+        </p:txBody>
       </p:sp>
       <p:sp>
         <p:nvSpPr>
@@ -1133,7 +1758,10 @@
           <a:bodyPr/>
           <a:lstStyle/>
           <a:p>
-            <a:endParaRPr lang="en-US" dirty="0"/>
+            <a:r>
+              <a:rPr lang="en-US" dirty="0"/>
+              <a:t>Kim</a:t>
+            </a:r>
           </a:p>
         </p:txBody>
       </p:sp>
@@ -1201,6 +1829,13 @@
           </p:nvPr>
         </p:nvSpPr>
         <p:spPr/>
+        <p:txBody>
+          <a:bodyPr/>
+          <a:lstStyle/>
+          <a:p>
+            <a:endParaRPr lang="en-US"/>
+          </a:p>
+        </p:txBody>
       </p:sp>
       <p:sp>
         <p:nvSpPr>
@@ -1217,7 +1852,10 @@
           <a:bodyPr/>
           <a:lstStyle/>
           <a:p>
-            <a:endParaRPr lang="en-US" dirty="0"/>
+            <a:r>
+              <a:rPr lang="en-US" dirty="0"/>
+              <a:t>Kenny</a:t>
+            </a:r>
           </a:p>
         </p:txBody>
       </p:sp>
@@ -1285,6 +1923,13 @@
           </p:nvPr>
         </p:nvSpPr>
         <p:spPr/>
+        <p:txBody>
+          <a:bodyPr/>
+          <a:lstStyle/>
+          <a:p>
+            <a:endParaRPr lang="en-US"/>
+          </a:p>
+        </p:txBody>
       </p:sp>
       <p:sp>
         <p:nvSpPr>
@@ -1301,7 +1946,10 @@
           <a:bodyPr/>
           <a:lstStyle/>
           <a:p>
-            <a:endParaRPr lang="en-US" dirty="0"/>
+            <a:r>
+              <a:rPr lang="en-US" dirty="0"/>
+              <a:t>Tristin</a:t>
+            </a:r>
           </a:p>
         </p:txBody>
       </p:sp>
@@ -1877,14 +2525,33 @@
                 <a:ea typeface="Calibri" pitchFamily="34" charset="-122"/>
                 <a:cs typeface="Calibri" pitchFamily="34" charset="-120"/>
               </a:rPr>
-              <a:t>Team 7 |  Programming Capstone Project | CSC 289.0001 | April 2026 </a:t>
+              <a:t>Team 7 |  Programming Capstone Project | CSC 289.0001 | April 30</a:t>
+            </a:r>
+            <a:r>
+              <a:rPr lang="en-US" sz="1100" baseline="30000" dirty="0">
+                <a:solidFill>
+                  <a:srgbClr val="CADCFC"/>
+                </a:solidFill>
+                <a:latin typeface="Calibri" pitchFamily="34" charset="0"/>
+                <a:ea typeface="Calibri" pitchFamily="34" charset="-122"/>
+                <a:cs typeface="Calibri" pitchFamily="34" charset="-120"/>
+              </a:rPr>
+              <a:t>th</a:t>
+            </a:r>
+            <a:r>
+              <a:rPr lang="en-US" sz="1100" dirty="0">
+                <a:solidFill>
+                  <a:srgbClr val="CADCFC"/>
+                </a:solidFill>
+                <a:latin typeface="Calibri" pitchFamily="34" charset="0"/>
+                <a:ea typeface="Calibri" pitchFamily="34" charset="-122"/>
+                <a:cs typeface="Calibri" pitchFamily="34" charset="-120"/>
+              </a:rPr>
+              <a:t>, 2026 </a:t>
             </a:r>
             <a:endParaRPr lang="en-US" sz="1100" dirty="0"/>
           </a:p>
           <a:p>
-            <a:pPr marL="0" indent="0" algn="l">
-              <a:buNone/>
-            </a:pPr>
             <a:r>
               <a:rPr lang="en-US" sz="1100" dirty="0">
                 <a:solidFill>
@@ -1894,7 +2561,7 @@
                 <a:ea typeface="Calibri" pitchFamily="34" charset="-122"/>
                 <a:cs typeface="Calibri" pitchFamily="34" charset="-120"/>
               </a:rPr>
-              <a:t>Serina Rodriguez · Kim Mayo · Kenny Bacdayan · Rachel Mizer · Tristin Gatt · Caleb Fowlkes</a:t>
+              <a:t>Kim Mayo · Kenny Bacdayan · Rachel Mizer · Tristin Gatt · Caleb Fowlkes · Serina Rodriguez (PM/SCRUM Master) </a:t>
             </a:r>
             <a:endParaRPr lang="en-US" sz="1100" dirty="0"/>
           </a:p>
@@ -2005,7 +2672,7 @@
                 <a:ea typeface="Calibri" pitchFamily="34" charset="-122"/>
                 <a:cs typeface="Calibri" pitchFamily="34" charset="-120"/>
               </a:rPr>
-              <a:t>[Slide Title — e.g. Sprint Reviews &amp; Usability Observations]</a:t>
+              <a:t>How Feedback Shaped the Product</a:t>
             </a:r>
             <a:endParaRPr lang="en-US" sz="3200" dirty="0"/>
           </a:p>
@@ -2103,9 +2770,6 @@
           <a:bodyPr wrap="square" lIns="0" tIns="0" rIns="0" bIns="0" rtlCol="0" anchor="ctr"/>
           <a:lstStyle/>
           <a:p>
-            <a:pPr marL="0" indent="0">
-              <a:buNone/>
-            </a:pPr>
             <a:r>
               <a:rPr lang="en-US" sz="1000" b="1" dirty="0">
                 <a:solidFill>
@@ -2115,7 +2779,7 @@
                 <a:ea typeface="Calibri" pitchFamily="34" charset="-122"/>
                 <a:cs typeface="Calibri" pitchFamily="34" charset="-120"/>
               </a:rPr>
-              <a:t>[Sprint / Source 1]</a:t>
+              <a:t>Sprint 3 Review</a:t>
             </a:r>
             <a:endParaRPr lang="en-US" sz="1000" dirty="0"/>
           </a:p>
@@ -2142,9 +2806,6 @@
           <a:bodyPr wrap="square" lIns="0" tIns="0" rIns="0" bIns="0" rtlCol="0" anchor="ctr"/>
           <a:lstStyle/>
           <a:p>
-            <a:pPr marL="0" indent="0">
-              <a:buNone/>
-            </a:pPr>
             <a:r>
               <a:rPr lang="en-US" sz="1000" dirty="0">
                 <a:solidFill>
@@ -2154,7 +2815,7 @@
                 <a:ea typeface="Calibri" pitchFamily="34" charset="-122"/>
                 <a:cs typeface="Calibri" pitchFamily="34" charset="-120"/>
               </a:rPr>
-              <a:t>[Feedback observation or quote. What did reviewers notice or say?]</a:t>
+              <a:t>Customer ordering flow was intuitive — testers completed orders without instruction. Confirmed the UX approach was on track; no changes needed.</a:t>
             </a:r>
             <a:endParaRPr lang="en-US" sz="1000" dirty="0"/>
           </a:p>
@@ -2252,9 +2913,6 @@
           <a:bodyPr wrap="square" lIns="0" tIns="0" rIns="0" bIns="0" rtlCol="0" anchor="ctr"/>
           <a:lstStyle/>
           <a:p>
-            <a:pPr marL="0" indent="0">
-              <a:buNone/>
-            </a:pPr>
             <a:r>
               <a:rPr lang="en-US" sz="1000" b="1" dirty="0">
                 <a:solidFill>
@@ -2264,7 +2922,7 @@
                 <a:ea typeface="Calibri" pitchFamily="34" charset="-122"/>
                 <a:cs typeface="Calibri" pitchFamily="34" charset="-120"/>
               </a:rPr>
-              <a:t>[Sprint / Source 2]</a:t>
+              <a:t>Sprint 4 Review → Sprint 5 Action</a:t>
             </a:r>
             <a:endParaRPr lang="en-US" sz="1000" dirty="0"/>
           </a:p>
@@ -2291,9 +2949,6 @@
           <a:bodyPr wrap="square" lIns="0" tIns="0" rIns="0" bIns="0" rtlCol="0" anchor="ctr"/>
           <a:lstStyle/>
           <a:p>
-            <a:pPr marL="0" indent="0">
-              <a:buNone/>
-            </a:pPr>
             <a:r>
               <a:rPr lang="en-US" sz="1000" dirty="0">
                 <a:solidFill>
@@ -2303,7 +2958,7 @@
                 <a:ea typeface="Calibri" pitchFamily="34" charset="-122"/>
                 <a:cs typeface="Calibri" pitchFamily="34" charset="-120"/>
               </a:rPr>
-              <a:t>[Feedback observation or quote. What needed improvement?]</a:t>
+              <a:t>Admin dashboard navigation needed clearer labeling. Feedback was logged as Sprint 5 UX cards and resolved before code freeze.</a:t>
             </a:r>
             <a:endParaRPr lang="en-US" sz="1000" dirty="0"/>
           </a:p>
@@ -2401,9 +3056,6 @@
           <a:bodyPr wrap="square" lIns="0" tIns="0" rIns="0" bIns="0" rtlCol="0" anchor="ctr"/>
           <a:lstStyle/>
           <a:p>
-            <a:pPr marL="0" indent="0">
-              <a:buNone/>
-            </a:pPr>
             <a:r>
               <a:rPr lang="en-US" sz="1000" b="1" dirty="0">
                 <a:solidFill>
@@ -2413,7 +3065,7 @@
                 <a:ea typeface="Calibri" pitchFamily="34" charset="-122"/>
                 <a:cs typeface="Calibri" pitchFamily="34" charset="-120"/>
               </a:rPr>
-              <a:t>[Sprint / Source 3]</a:t>
+              <a:t>Sprint 4 Review</a:t>
             </a:r>
             <a:endParaRPr lang="en-US" sz="1000" dirty="0"/>
           </a:p>
@@ -2440,9 +3092,6 @@
           <a:bodyPr wrap="square" lIns="0" tIns="0" rIns="0" bIns="0" rtlCol="0" anchor="ctr"/>
           <a:lstStyle/>
           <a:p>
-            <a:pPr marL="0" indent="0">
-              <a:buNone/>
-            </a:pPr>
             <a:r>
               <a:rPr lang="en-US" sz="1000" dirty="0">
                 <a:solidFill>
@@ -2452,7 +3101,7 @@
                 <a:ea typeface="Calibri" pitchFamily="34" charset="-122"/>
                 <a:cs typeface="Calibri" pitchFamily="34" charset="-120"/>
               </a:rPr>
-              <a:t>[Feedback observation or quote. Positive finding.]</a:t>
+              <a:t>Product management CRUD performed consistently across create, edit, and delete. Confirmed feature was production-ready with no iteration needed.</a:t>
             </a:r>
             <a:endParaRPr lang="en-US" sz="1000" dirty="0"/>
           </a:p>
@@ -2550,9 +3199,6 @@
           <a:bodyPr wrap="square" lIns="0" tIns="0" rIns="0" bIns="0" rtlCol="0" anchor="ctr"/>
           <a:lstStyle/>
           <a:p>
-            <a:pPr marL="0" indent="0">
-              <a:buNone/>
-            </a:pPr>
             <a:r>
               <a:rPr lang="en-US" sz="1000" b="1" dirty="0">
                 <a:solidFill>
@@ -2562,7 +3208,7 @@
                 <a:ea typeface="Calibri" pitchFamily="34" charset="-122"/>
                 <a:cs typeface="Calibri" pitchFamily="34" charset="-120"/>
               </a:rPr>
-              <a:t>[Sprint / Source 4]</a:t>
+              <a:t>Sprint 5 Review</a:t>
             </a:r>
             <a:endParaRPr lang="en-US" sz="1000" dirty="0"/>
           </a:p>
@@ -2589,9 +3235,6 @@
           <a:bodyPr wrap="square" lIns="0" tIns="0" rIns="0" bIns="0" rtlCol="0" anchor="ctr"/>
           <a:lstStyle/>
           <a:p>
-            <a:pPr marL="0" indent="0">
-              <a:buNone/>
-            </a:pPr>
             <a:r>
               <a:rPr lang="en-US" sz="1000" dirty="0">
                 <a:solidFill>
@@ -2601,7 +3244,7 @@
                 <a:ea typeface="Calibri" pitchFamily="34" charset="-122"/>
                 <a:cs typeface="Calibri" pitchFamily="34" charset="-120"/>
               </a:rPr>
-              <a:t>[Feedback observation or quote. Positive finding.]</a:t>
+              <a:t>Low stock indicators surfaced inventory visibility in a practical, immediately useful way. Positive reaction confirmed the feature met the original intent.</a:t>
             </a:r>
             <a:endParaRPr lang="en-US" sz="1000" dirty="0"/>
           </a:p>
@@ -2699,9 +3342,6 @@
           <a:bodyPr wrap="square" lIns="0" tIns="0" rIns="0" bIns="0" rtlCol="0" anchor="ctr"/>
           <a:lstStyle/>
           <a:p>
-            <a:pPr marL="0" indent="0">
-              <a:buNone/>
-            </a:pPr>
             <a:r>
               <a:rPr lang="en-US" sz="1000" b="1" dirty="0">
                 <a:solidFill>
@@ -2711,7 +3351,7 @@
                 <a:ea typeface="Calibri" pitchFamily="34" charset="-122"/>
                 <a:cs typeface="Calibri" pitchFamily="34" charset="-120"/>
               </a:rPr>
-              <a:t>[Sprint / Source 5]</a:t>
+              <a:t>Sprint 5 Review</a:t>
             </a:r>
             <a:endParaRPr lang="en-US" sz="1000" dirty="0"/>
           </a:p>
@@ -2738,9 +3378,6 @@
           <a:bodyPr wrap="square" lIns="0" tIns="0" rIns="0" bIns="0" rtlCol="0" anchor="ctr"/>
           <a:lstStyle/>
           <a:p>
-            <a:pPr marL="0" indent="0">
-              <a:buNone/>
-            </a:pPr>
             <a:r>
               <a:rPr lang="en-US" sz="1000" dirty="0">
                 <a:solidFill>
@@ -2750,7 +3387,7 @@
                 <a:ea typeface="Calibri" pitchFamily="34" charset="-122"/>
                 <a:cs typeface="Calibri" pitchFamily="34" charset="-120"/>
               </a:rPr>
-              <a:t>[Feedback observation or quote. Positive finding.]</a:t>
+              <a:t>Sales dashboard charts and date filtering were praised as genuinely practical for non-technical business owners. No changes requested.</a:t>
             </a:r>
             <a:endParaRPr lang="en-US" sz="1000" dirty="0"/>
           </a:p>
@@ -2848,9 +3485,6 @@
           <a:bodyPr wrap="square" lIns="0" tIns="0" rIns="0" bIns="0" rtlCol="0" anchor="ctr"/>
           <a:lstStyle/>
           <a:p>
-            <a:pPr marL="0" indent="0">
-              <a:buNone/>
-            </a:pPr>
             <a:r>
               <a:rPr lang="en-US" sz="1000" b="1" dirty="0">
                 <a:solidFill>
@@ -2860,7 +3494,7 @@
                 <a:ea typeface="Calibri" pitchFamily="34" charset="-122"/>
                 <a:cs typeface="Calibri" pitchFamily="34" charset="-120"/>
               </a:rPr>
-              <a:t>[PM / Team Note]</a:t>
+              <a:t>Sprint 5 PM Decision → Scope Action</a:t>
             </a:r>
             <a:endParaRPr lang="en-US" sz="1000" dirty="0"/>
           </a:p>
@@ -2887,9 +3521,6 @@
           <a:bodyPr wrap="square" lIns="0" tIns="0" rIns="0" bIns="0" rtlCol="0" anchor="ctr"/>
           <a:lstStyle/>
           <a:p>
-            <a:pPr marL="0" indent="0">
-              <a:buNone/>
-            </a:pPr>
             <a:r>
               <a:rPr lang="en-US" sz="1000" dirty="0">
                 <a:solidFill>
@@ -2899,7 +3530,7 @@
                 <a:ea typeface="Calibri" pitchFamily="34" charset="-122"/>
                 <a:cs typeface="Calibri" pitchFamily="34" charset="-120"/>
               </a:rPr>
-              <a:t>[A notable PM or team decision, tradeoff, or process note worth highlighting.]</a:t>
+              <a:t>Three</a:t>
             </a:r>
             <a:endParaRPr lang="en-US" sz="1000" dirty="0"/>
           </a:p>
@@ -3010,7 +3641,7 @@
                 <a:ea typeface="Calibri" pitchFamily="34" charset="-122"/>
                 <a:cs typeface="Calibri" pitchFamily="34" charset="-120"/>
               </a:rPr>
-              <a:t>[Slide Title — e.g. What Would v1.1 Look Like?]</a:t>
+              <a:t>What Would v1.1 Look Like?</a:t>
             </a:r>
             <a:endParaRPr lang="en-US" sz="3200" dirty="0"/>
           </a:p>
@@ -3109,10 +3740,9 @@
                   <a:srgbClr val="1B2B5E"/>
                 </a:solidFill>
                 <a:latin typeface="Calibri" pitchFamily="34" charset="0"/>
-                <a:ea typeface="Calibri" pitchFamily="34" charset="-122"/>
-                <a:cs typeface="Calibri" pitchFamily="34" charset="-120"/>
-              </a:rPr>
-              <a:t>[Future Feature 1]</a:t>
+                <a:cs typeface="Calibri" pitchFamily="34" charset="-120"/>
+              </a:rPr>
+              <a:t>Loyalty Programs</a:t>
             </a:r>
             <a:endParaRPr lang="en-US" sz="1100" dirty="0"/>
           </a:p>
@@ -3139,9 +3769,6 @@
           <a:bodyPr wrap="square" lIns="0" tIns="0" rIns="0" bIns="0" rtlCol="0" anchor="ctr"/>
           <a:lstStyle/>
           <a:p>
-            <a:pPr marL="0" indent="0">
-              <a:buNone/>
-            </a:pPr>
             <a:r>
               <a:rPr lang="en-US" sz="950" dirty="0">
                 <a:solidFill>
@@ -3151,7 +3778,7 @@
                 <a:ea typeface="Calibri" pitchFamily="34" charset="-122"/>
                 <a:cs typeface="Calibri" pitchFamily="34" charset="-120"/>
               </a:rPr>
-              <a:t>[One to two sentences describing why this was deferred and what it would add.]</a:t>
+              <a:t>Points, discounts, and perks tied to order history. High-value retention tool for small businesses.</a:t>
             </a:r>
             <a:endParaRPr lang="en-US" sz="950" dirty="0"/>
           </a:p>
@@ -3253,7 +3880,7 @@
                 <a:ea typeface="Calibri" pitchFamily="34" charset="-122"/>
                 <a:cs typeface="Calibri" pitchFamily="34" charset="-120"/>
               </a:rPr>
-              <a:t>[Future Feature 2]</a:t>
+              <a:t>Modifier Management</a:t>
             </a:r>
             <a:endParaRPr lang="en-US" sz="1100" dirty="0"/>
           </a:p>
@@ -3292,7 +3919,7 @@
                 <a:ea typeface="Calibri" pitchFamily="34" charset="-122"/>
                 <a:cs typeface="Calibri" pitchFamily="34" charset="-120"/>
               </a:rPr>
-              <a:t>[One to two sentences describing why this was deferred and what it would add.]</a:t>
+              <a:t>Admin product add-ons and customizations. Formally scoped out – the clearest candidate for v1.1.</a:t>
             </a:r>
             <a:endParaRPr lang="en-US" sz="950" dirty="0"/>
           </a:p>
@@ -3394,7 +4021,7 @@
                 <a:ea typeface="Calibri" pitchFamily="34" charset="-122"/>
                 <a:cs typeface="Calibri" pitchFamily="34" charset="-120"/>
               </a:rPr>
-              <a:t>[Future Feature 3]</a:t>
+              <a:t>Advanced Analytics</a:t>
             </a:r>
             <a:endParaRPr lang="en-US" sz="1100" dirty="0"/>
           </a:p>
@@ -3430,10 +4057,9 @@
                   <a:srgbClr val="6B7280"/>
                 </a:solidFill>
                 <a:latin typeface="Calibri" pitchFamily="34" charset="0"/>
-                <a:ea typeface="Calibri" pitchFamily="34" charset="-122"/>
-                <a:cs typeface="Calibri" pitchFamily="34" charset="-120"/>
-              </a:rPr>
-              <a:t>[One to two sentences describing why this was deferred and what it would add.]</a:t>
+                <a:cs typeface="Calibri" pitchFamily="34" charset="-120"/>
+              </a:rPr>
+              <a:t>Forecasting, trend analysis, and AI-driven recommendations for business owners.</a:t>
             </a:r>
             <a:endParaRPr lang="en-US" sz="950" dirty="0"/>
           </a:p>
@@ -3535,7 +4161,7 @@
                 <a:ea typeface="Calibri" pitchFamily="34" charset="-122"/>
                 <a:cs typeface="Calibri" pitchFamily="34" charset="-120"/>
               </a:rPr>
-              <a:t>[Future Feature 4]</a:t>
+              <a:t>Integration with Payment Gateways</a:t>
             </a:r>
             <a:endParaRPr lang="en-US" sz="1100" dirty="0"/>
           </a:p>
@@ -3562,9 +4188,6 @@
           <a:bodyPr wrap="square" lIns="0" tIns="0" rIns="0" bIns="0" rtlCol="0" anchor="ctr"/>
           <a:lstStyle/>
           <a:p>
-            <a:pPr marL="0" indent="0">
-              <a:buNone/>
-            </a:pPr>
             <a:r>
               <a:rPr lang="en-US" sz="950" dirty="0">
                 <a:solidFill>
@@ -3574,7 +4197,7 @@
                 <a:ea typeface="Calibri" pitchFamily="34" charset="-122"/>
                 <a:cs typeface="Calibri" pitchFamily="34" charset="-120"/>
               </a:rPr>
-              <a:t>[One to two sentences describing why this was deferred and what it would add.]</a:t>
+              <a:t>Stripe, Square, and external POS hardware integration for end-to-end transaction handling.</a:t>
             </a:r>
             <a:endParaRPr lang="en-US" sz="950" dirty="0"/>
           </a:p>
@@ -3676,7 +4299,7 @@
                 <a:ea typeface="Calibri" pitchFamily="34" charset="-122"/>
                 <a:cs typeface="Calibri" pitchFamily="34" charset="-120"/>
               </a:rPr>
-              <a:t>[Future Feature 5]</a:t>
+              <a:t>Continuous Improvement</a:t>
             </a:r>
             <a:endParaRPr lang="en-US" sz="1100" dirty="0"/>
           </a:p>
@@ -3703,9 +4326,6 @@
           <a:bodyPr wrap="square" lIns="0" tIns="0" rIns="0" bIns="0" rtlCol="0" anchor="ctr"/>
           <a:lstStyle/>
           <a:p>
-            <a:pPr marL="0" indent="0">
-              <a:buNone/>
-            </a:pPr>
             <a:r>
               <a:rPr lang="en-US" sz="950" dirty="0">
                 <a:solidFill>
@@ -3715,7 +4335,7 @@
                 <a:ea typeface="Calibri" pitchFamily="34" charset="-122"/>
                 <a:cs typeface="Calibri" pitchFamily="34" charset="-120"/>
               </a:rPr>
-              <a:t>[One to two sentences describing why this was deferred and what it would add.]</a:t>
+              <a:t>Performance tuning, accessibility, and full mobile responsiveness across devices.</a:t>
             </a:r>
             <a:endParaRPr lang="en-US" sz="950" dirty="0"/>
           </a:p>
@@ -3817,7 +4437,7 @@
                 <a:ea typeface="Calibri" pitchFamily="34" charset="-122"/>
                 <a:cs typeface="Calibri" pitchFamily="34" charset="-120"/>
               </a:rPr>
-              <a:t>[Future Feature 6]</a:t>
+              <a:t>Multi-Language and Multi-Currency Support</a:t>
             </a:r>
             <a:endParaRPr lang="en-US" sz="1100" dirty="0"/>
           </a:p>
@@ -3856,7 +4476,7 @@
                 <a:ea typeface="Calibri" pitchFamily="34" charset="-122"/>
                 <a:cs typeface="Calibri" pitchFamily="34" charset="-120"/>
               </a:rPr>
-              <a:t>[One to two sentences describing why this was deferred and what it would add.]</a:t>
+              <a:t>Support to enable Orderly to serve businesses operating in diverse regions and markets.</a:t>
             </a:r>
             <a:endParaRPr lang="en-US" sz="950" dirty="0"/>
           </a:p>
@@ -4070,7 +4690,29 @@
                 <a:ea typeface="Calibri" pitchFamily="34" charset="-122"/>
                 <a:cs typeface="Calibri" pitchFamily="34" charset="-120"/>
               </a:rPr>
-              <a:t>[Closing point 1 — e.g. what you delivered at the highest level]</a:t>
+              <a:t>Delivered a fully functional full-stack ordering and business management platform across 5 Agile sprints, on schedule, deployed to AWS on April 25</a:t>
+            </a:r>
+            <a:r>
+              <a:rPr lang="en-US" sz="1200" baseline="30000" dirty="0">
+                <a:solidFill>
+                  <a:srgbClr val="CADCFC"/>
+                </a:solidFill>
+                <a:latin typeface="Calibri" pitchFamily="34" charset="0"/>
+                <a:ea typeface="Calibri" pitchFamily="34" charset="-122"/>
+                <a:cs typeface="Calibri" pitchFamily="34" charset="-120"/>
+              </a:rPr>
+              <a:t>th</a:t>
+            </a:r>
+            <a:r>
+              <a:rPr lang="en-US" sz="1200" dirty="0">
+                <a:solidFill>
+                  <a:srgbClr val="CADCFC"/>
+                </a:solidFill>
+                <a:latin typeface="Calibri" pitchFamily="34" charset="0"/>
+                <a:ea typeface="Calibri" pitchFamily="34" charset="-122"/>
+                <a:cs typeface="Calibri" pitchFamily="34" charset="-120"/>
+              </a:rPr>
+              <a:t>.</a:t>
             </a:r>
             <a:endParaRPr lang="en-US" sz="1200" dirty="0"/>
           </a:p>
@@ -4129,9 +4771,6 @@
           <a:bodyPr wrap="square" lIns="0" tIns="0" rIns="0" bIns="0" rtlCol="0" anchor="ctr"/>
           <a:lstStyle/>
           <a:p>
-            <a:pPr marL="0" indent="0">
-              <a:buNone/>
-            </a:pPr>
             <a:r>
               <a:rPr lang="en-US" sz="1200" dirty="0">
                 <a:solidFill>
@@ -4141,7 +4780,7 @@
                 <a:ea typeface="Calibri" pitchFamily="34" charset="-122"/>
                 <a:cs typeface="Calibri" pitchFamily="34" charset="-120"/>
               </a:rPr>
-              <a:t>[Closing point 2 — e.g. a key engineering or process practice you applied]</a:t>
+              <a:t>Agile execution kept scope, capacity, and delivery in sync across a 6-person cross-functional team for the full semester</a:t>
             </a:r>
             <a:endParaRPr lang="en-US" sz="1200" dirty="0"/>
           </a:p>
@@ -4212,7 +4851,7 @@
                 <a:ea typeface="Calibri" pitchFamily="34" charset="-122"/>
                 <a:cs typeface="Calibri" pitchFamily="34" charset="-120"/>
               </a:rPr>
-              <a:t>[Closing point 3 — e.g. what your sprint execution model enabled]</a:t>
+              <a:t>What we learned: Hear from each of our team members!</a:t>
             </a:r>
             <a:endParaRPr lang="en-US" sz="1200" dirty="0"/>
           </a:p>
@@ -4271,9 +4910,6 @@
           <a:bodyPr wrap="square" lIns="0" tIns="0" rIns="0" bIns="0" rtlCol="0" anchor="ctr"/>
           <a:lstStyle/>
           <a:p>
-            <a:pPr marL="0" indent="0">
-              <a:buNone/>
-            </a:pPr>
             <a:r>
               <a:rPr lang="en-US" sz="1200" dirty="0">
                 <a:solidFill>
@@ -4283,7 +4919,7 @@
                 <a:ea typeface="Calibri" pitchFamily="34" charset="-122"/>
                 <a:cs typeface="Calibri" pitchFamily="34" charset="-120"/>
               </a:rPr>
-              <a:t>[Closing point 4 — e.g. a hard call you made as a PM or team]</a:t>
+              <a:t>We are confident Orderly delivers a clean, functional, and extensible platform that reflects what professional software development looks like in practice</a:t>
             </a:r>
             <a:endParaRPr lang="en-US" sz="1200" dirty="0"/>
           </a:p>
@@ -4342,11 +4978,8 @@
           <a:bodyPr wrap="square" lIns="0" tIns="0" rIns="0" bIns="0" rtlCol="0" anchor="ctr"/>
           <a:lstStyle/>
           <a:p>
-            <a:pPr marL="0" indent="0">
-              <a:buNone/>
-            </a:pPr>
-            <a:r>
-              <a:rPr lang="en-US" sz="1200" dirty="0">
+            <a:r>
+              <a:rPr lang="en-US" dirty="0">
                 <a:solidFill>
                   <a:srgbClr val="CADCFC"/>
                 </a:solidFill>
@@ -4354,9 +4987,9 @@
                 <a:ea typeface="Calibri" pitchFamily="34" charset="-122"/>
                 <a:cs typeface="Calibri" pitchFamily="34" charset="-120"/>
               </a:rPr>
-              <a:t>[Closing point 5 — e.g. a reflection on what the project meant]</a:t>
-            </a:r>
-            <a:endParaRPr lang="en-US" sz="1200" dirty="0"/>
+              <a:t>Thank you for your time and attention. We welcome any questions.</a:t>
+            </a:r>
+            <a:endParaRPr lang="en-US" dirty="0"/>
           </a:p>
         </p:txBody>
       </p:sp>
@@ -4393,7 +5026,7 @@
                 <a:ea typeface="Calibri" pitchFamily="34" charset="-122"/>
                 <a:cs typeface="Calibri" pitchFamily="34" charset="-120"/>
               </a:rPr>
-              <a:t>[Team Name]  ·  [Course]  ·  [Institution]  ·  [Date]</a:t>
+              <a:t>Team 7  ·  CSC 289.001  ·  WTCC  ·  April 30, 2026</a:t>
             </a:r>
             <a:endParaRPr lang="en-US" sz="900" dirty="0"/>
           </a:p>
@@ -4560,7 +5193,7 @@
                 <a:ea typeface="Calibri" pitchFamily="34" charset="-122"/>
                 <a:cs typeface="Calibri" pitchFamily="34" charset="-120"/>
               </a:rPr>
-              <a:t>[Optional closing line — e.g. We'd love to walk you through a demo or answer any questions.]</a:t>
+              <a:t>We'd love to walk you through a demo or answer any questions.</a:t>
             </a:r>
             <a:endParaRPr lang="en-US" sz="1600" dirty="0"/>
           </a:p>
@@ -4776,7 +5409,7 @@
                 <a:ea typeface="Calibri" pitchFamily="34" charset="-122"/>
                 <a:cs typeface="Calibri" pitchFamily="34" charset="-120"/>
               </a:rPr>
-              <a:t>[Slide Title — e.g. What is [Project Name]?]</a:t>
+              <a:t>What is Orderly?</a:t>
             </a:r>
             <a:endParaRPr lang="en-US" sz="3200" dirty="0"/>
           </a:p>
@@ -4817,7 +5450,7 @@
           <a:bodyPr/>
           <a:lstStyle/>
           <a:p>
-            <a:endParaRPr lang="en-US"/>
+            <a:endParaRPr lang="en-US" dirty="0"/>
           </a:p>
         </p:txBody>
       </p:sp>
@@ -4829,7 +5462,7 @@
         </p:nvSpPr>
         <p:spPr>
           <a:xfrm>
-            <a:off x="594360" y="1463040"/>
+            <a:off x="594360" y="2035263"/>
             <a:ext cx="3474720" cy="320040"/>
           </a:xfrm>
           <a:prstGeom prst="rect">
@@ -4868,8 +5501,8 @@
         </p:nvSpPr>
         <p:spPr>
           <a:xfrm>
-            <a:off x="594360" y="1847088"/>
-            <a:ext cx="3474720" cy="1463040"/>
+            <a:off x="594360" y="2346160"/>
+            <a:ext cx="3474720" cy="1069848"/>
           </a:xfrm>
           <a:prstGeom prst="rect">
             <a:avLst/>
@@ -4893,33 +5526,37 @@
                 <a:ea typeface="Calibri" pitchFamily="34" charset="-122"/>
                 <a:cs typeface="Calibri" pitchFamily="34" charset="-120"/>
               </a:rPr>
-              <a:t>[Describe the problem your project solves. What pain point exists? Who experiences it?]</a:t>
+              <a:t>Small and mid-sized businesses lack affordable, efficient, and unified tools for managing orders, inventory, and customer-facing menus. </a:t>
+            </a:r>
+          </a:p>
+          <a:p>
+            <a:pPr marL="0" indent="0">
+              <a:buNone/>
+            </a:pPr>
+            <a:endParaRPr lang="en-US" sz="1200" dirty="0">
+              <a:solidFill>
+                <a:srgbClr val="374151"/>
+              </a:solidFill>
+              <a:latin typeface="Calibri" pitchFamily="34" charset="0"/>
+              <a:cs typeface="Calibri" pitchFamily="34" charset="-120"/>
+            </a:endParaRPr>
+          </a:p>
+          <a:p>
+            <a:pPr marL="0" indent="0">
+              <a:buNone/>
+            </a:pPr>
+            <a:r>
+              <a:rPr lang="en-US" sz="1200" dirty="0">
+                <a:solidFill>
+                  <a:srgbClr val="374151"/>
+                </a:solidFill>
+                <a:latin typeface="Calibri" pitchFamily="34" charset="0"/>
+                <a:cs typeface="Calibri" pitchFamily="34" charset="-120"/>
+              </a:rPr>
+              <a:t>The result: manual processes, spreadsheet chaos, and no real-time visibility.</a:t>
             </a:r>
             <a:endParaRPr lang="en-US" sz="1200" dirty="0"/>
           </a:p>
-          <a:p>
-            <a:pPr marL="0" indent="0">
-              <a:buNone/>
-            </a:pPr>
-            <a:endParaRPr lang="en-US" sz="1200" dirty="0"/>
-          </a:p>
-          <a:p>
-            <a:pPr marL="0" indent="0">
-              <a:buNone/>
-            </a:pPr>
-            <a:r>
-              <a:rPr lang="en-US" sz="1200" dirty="0">
-                <a:solidFill>
-                  <a:srgbClr val="374151"/>
-                </a:solidFill>
-                <a:latin typeface="Calibri" pitchFamily="34" charset="0"/>
-                <a:ea typeface="Calibri" pitchFamily="34" charset="-122"/>
-                <a:cs typeface="Calibri" pitchFamily="34" charset="-120"/>
-              </a:rPr>
-              <a:t>[Add a second sentence with impact or consequence if helpful.]</a:t>
-            </a:r>
-            <a:endParaRPr lang="en-US" sz="1200" dirty="0"/>
-          </a:p>
         </p:txBody>
       </p:sp>
       <p:sp>
@@ -4930,7 +5567,7 @@
         </p:nvSpPr>
         <p:spPr>
           <a:xfrm>
-            <a:off x="594360" y="3401568"/>
+            <a:off x="594360" y="3520440"/>
             <a:ext cx="3474720" cy="36576"/>
           </a:xfrm>
           <a:prstGeom prst="rect">
@@ -4962,7 +5599,7 @@
         </p:nvSpPr>
         <p:spPr>
           <a:xfrm>
-            <a:off x="594360" y="3520440"/>
+            <a:off x="594360" y="3630168"/>
             <a:ext cx="3474720" cy="320040"/>
           </a:xfrm>
           <a:prstGeom prst="rect">
@@ -5023,10 +5660,9 @@
                   <a:srgbClr val="374151"/>
                 </a:solidFill>
                 <a:latin typeface="Calibri" pitchFamily="34" charset="0"/>
-                <a:ea typeface="Calibri" pitchFamily="34" charset="-122"/>
-                <a:cs typeface="Calibri" pitchFamily="34" charset="-120"/>
-              </a:rPr>
-              <a:t>[One or two sentences describing your solution at a high level. What does it do and for whom?]</a:t>
+                <a:cs typeface="Calibri" pitchFamily="34" charset="-120"/>
+              </a:rPr>
+              <a:t>A customizable full-stack self-service ordering and business management platform – built for real businesses, by a team of student developers. </a:t>
             </a:r>
             <a:endParaRPr lang="en-US" sz="1200" dirty="0"/>
           </a:p>
@@ -5101,10 +5737,9 @@
                   <a:srgbClr val="3BB77E"/>
                 </a:solidFill>
                 <a:latin typeface="Calibri" pitchFamily="34" charset="0"/>
-                <a:ea typeface="Calibri" pitchFamily="34" charset="-122"/>
-                <a:cs typeface="Calibri" pitchFamily="34" charset="-120"/>
-              </a:rPr>
-              <a:t>#</a:t>
+                <a:cs typeface="Calibri" pitchFamily="34" charset="-120"/>
+              </a:rPr>
+              <a:t>5</a:t>
             </a:r>
             <a:endParaRPr lang="en-US" sz="4800" dirty="0"/>
           </a:p>
@@ -5140,10 +5775,9 @@
                   <a:srgbClr val="1B2B5E"/>
                 </a:solidFill>
                 <a:latin typeface="Calibri" pitchFamily="34" charset="0"/>
-                <a:ea typeface="Calibri" pitchFamily="34" charset="-122"/>
-                <a:cs typeface="Calibri" pitchFamily="34" charset="-120"/>
-              </a:rPr>
-              <a:t>[Stat Label 1]</a:t>
+                <a:cs typeface="Calibri" pitchFamily="34" charset="-120"/>
+              </a:rPr>
+              <a:t>Agile Sprints</a:t>
             </a:r>
             <a:endParaRPr lang="en-US" sz="1600" dirty="0"/>
           </a:p>
@@ -5221,7 +5855,7 @@
                 <a:ea typeface="Calibri" pitchFamily="34" charset="-122"/>
                 <a:cs typeface="Calibri" pitchFamily="34" charset="-120"/>
               </a:rPr>
-              <a:t>#</a:t>
+              <a:t>6</a:t>
             </a:r>
             <a:endParaRPr lang="en-US" sz="4800" dirty="0"/>
           </a:p>
@@ -5260,7 +5894,7 @@
                 <a:ea typeface="Calibri" pitchFamily="34" charset="-122"/>
                 <a:cs typeface="Calibri" pitchFamily="34" charset="-120"/>
               </a:rPr>
-              <a:t>[Stat Label 2]</a:t>
+              <a:t>Team Members</a:t>
             </a:r>
             <a:endParaRPr lang="en-US" sz="1600" dirty="0"/>
           </a:p>
@@ -5335,10 +5969,9 @@
                   <a:srgbClr val="3BB77E"/>
                 </a:solidFill>
                 <a:latin typeface="Calibri" pitchFamily="34" charset="0"/>
-                <a:ea typeface="Calibri" pitchFamily="34" charset="-122"/>
-                <a:cs typeface="Calibri" pitchFamily="34" charset="-120"/>
-              </a:rPr>
-              <a:t>#</a:t>
+                <a:cs typeface="Calibri" pitchFamily="34" charset="-120"/>
+              </a:rPr>
+              <a:t>15</a:t>
             </a:r>
             <a:endParaRPr lang="en-US" sz="4800" dirty="0"/>
           </a:p>
@@ -5374,12 +6007,56 @@
                   <a:srgbClr val="1B2B5E"/>
                 </a:solidFill>
                 <a:latin typeface="Calibri" pitchFamily="34" charset="0"/>
-                <a:ea typeface="Calibri" pitchFamily="34" charset="-122"/>
-                <a:cs typeface="Calibri" pitchFamily="34" charset="-120"/>
-              </a:rPr>
-              <a:t>[Stat Label 3]</a:t>
+                <a:cs typeface="Calibri" pitchFamily="34" charset="-120"/>
+              </a:rPr>
+              <a:t>User Features Done 🎉</a:t>
             </a:r>
             <a:endParaRPr lang="en-US" sz="1600" dirty="0"/>
+          </a:p>
+        </p:txBody>
+      </p:sp>
+      <p:sp>
+        <p:nvSpPr>
+          <p:cNvPr id="19" name="Text 4">
+            <a:extLst>
+              <a:ext uri="{FF2B5EF4-FFF2-40B4-BE49-F238E27FC236}">
+                <a16:creationId xmlns:a16="http://schemas.microsoft.com/office/drawing/2014/main" id="{E6A7EF37-E701-B089-536B-846DD2F90B82}"/>
+              </a:ext>
+            </a:extLst>
+          </p:cNvPr>
+          <p:cNvSpPr/>
+          <p:nvPr/>
+        </p:nvSpPr>
+        <p:spPr>
+          <a:xfrm>
+            <a:off x="548640" y="1389889"/>
+            <a:ext cx="3474720" cy="736092"/>
+          </a:xfrm>
+          <a:prstGeom prst="rect">
+            <a:avLst/>
+          </a:prstGeom>
+          <a:noFill/>
+          <a:ln/>
+        </p:spPr>
+        <p:txBody>
+          <a:bodyPr wrap="square" lIns="0" tIns="0" rIns="0" bIns="0" rtlCol="0" anchor="ctr"/>
+          <a:lstStyle/>
+          <a:p>
+            <a:pPr marL="0" indent="0">
+              <a:buNone/>
+            </a:pPr>
+            <a:r>
+              <a:rPr lang="en-US" sz="1200" dirty="0">
+                <a:solidFill>
+                  <a:srgbClr val="374151"/>
+                </a:solidFill>
+                <a:latin typeface="Calibri" pitchFamily="34" charset="0"/>
+                <a:ea typeface="Calibri" pitchFamily="34" charset="-122"/>
+                <a:cs typeface="Calibri" pitchFamily="34" charset="-120"/>
+              </a:rPr>
+              <a:t>A centralized web application designed to streamline operations for small to mid-sized businesses.</a:t>
+            </a:r>
+            <a:endParaRPr lang="en-US" sz="1200" dirty="0"/>
           </a:p>
         </p:txBody>
       </p:sp>
@@ -5488,7 +6165,7 @@
                 <a:ea typeface="Calibri" pitchFamily="34" charset="-122"/>
                 <a:cs typeface="Calibri" pitchFamily="34" charset="-120"/>
               </a:rPr>
-              <a:t>[Slide Title — e.g. Scope, Goals &amp; Feature Summary]</a:t>
+              <a:t>Scope, Goals &amp; Feature Summary</a:t>
             </a:r>
             <a:endParaRPr lang="en-US" sz="3200" dirty="0"/>
           </a:p>
@@ -5590,7 +6267,7 @@
                 <a:ea typeface="Calibri" pitchFamily="34" charset="-122"/>
                 <a:cs typeface="Calibri" pitchFamily="34" charset="-120"/>
               </a:rPr>
-              <a:t>[Feature 1]</a:t>
+              <a:t>Customer Ordering</a:t>
             </a:r>
             <a:endParaRPr lang="en-US" sz="1200" dirty="0"/>
           </a:p>
@@ -5629,7 +6306,7 @@
                 <a:ea typeface="Calibri" pitchFamily="34" charset="-122"/>
                 <a:cs typeface="Calibri" pitchFamily="34" charset="-120"/>
               </a:rPr>
-              <a:t>[Brief description of feature 1]</a:t>
+              <a:t>Browse menu, place &amp; cancel orders</a:t>
             </a:r>
             <a:endParaRPr lang="en-US" sz="1000" dirty="0"/>
           </a:p>
@@ -5731,7 +6408,7 @@
                 <a:ea typeface="Calibri" pitchFamily="34" charset="-122"/>
                 <a:cs typeface="Calibri" pitchFamily="34" charset="-120"/>
               </a:rPr>
-              <a:t>[Feature 2]</a:t>
+              <a:t>Admin Dashboard</a:t>
             </a:r>
             <a:endParaRPr lang="en-US" sz="1200" dirty="0"/>
           </a:p>
@@ -5770,7 +6447,7 @@
                 <a:ea typeface="Calibri" pitchFamily="34" charset="-122"/>
                 <a:cs typeface="Calibri" pitchFamily="34" charset="-120"/>
               </a:rPr>
-              <a:t>[Brief description of feature 2]</a:t>
+              <a:t>Unified view of business operations</a:t>
             </a:r>
             <a:endParaRPr lang="en-US" sz="1000" dirty="0"/>
           </a:p>
@@ -5872,7 +6549,7 @@
                 <a:ea typeface="Calibri" pitchFamily="34" charset="-122"/>
                 <a:cs typeface="Calibri" pitchFamily="34" charset="-120"/>
               </a:rPr>
-              <a:t>[Feature 3]</a:t>
+              <a:t>Product Management</a:t>
             </a:r>
             <a:endParaRPr lang="en-US" sz="1200" dirty="0"/>
           </a:p>
@@ -5911,7 +6588,7 @@
                 <a:ea typeface="Calibri" pitchFamily="34" charset="-122"/>
                 <a:cs typeface="Calibri" pitchFamily="34" charset="-120"/>
               </a:rPr>
-              <a:t>[Brief description of feature 3]</a:t>
+              <a:t>Add, edit, and organize products</a:t>
             </a:r>
             <a:endParaRPr lang="en-US" sz="1000" dirty="0"/>
           </a:p>
@@ -6013,7 +6690,7 @@
                 <a:ea typeface="Calibri" pitchFamily="34" charset="-122"/>
                 <a:cs typeface="Calibri" pitchFamily="34" charset="-120"/>
               </a:rPr>
-              <a:t>[Feature 4]</a:t>
+              <a:t>Inventory Tracking</a:t>
             </a:r>
             <a:endParaRPr lang="en-US" sz="1200" dirty="0"/>
           </a:p>
@@ -6052,7 +6729,7 @@
                 <a:ea typeface="Calibri" pitchFamily="34" charset="-122"/>
                 <a:cs typeface="Calibri" pitchFamily="34" charset="-120"/>
               </a:rPr>
-              <a:t>[Brief description of feature 4]</a:t>
+              <a:t>Real-time stock &amp; low-stock alerts</a:t>
             </a:r>
             <a:endParaRPr lang="en-US" sz="1000" dirty="0"/>
           </a:p>
@@ -6154,7 +6831,7 @@
                 <a:ea typeface="Calibri" pitchFamily="34" charset="-122"/>
                 <a:cs typeface="Calibri" pitchFamily="34" charset="-120"/>
               </a:rPr>
-              <a:t>[Feature 5]</a:t>
+              <a:t>Sales Dashboard</a:t>
             </a:r>
             <a:endParaRPr lang="en-US" sz="1200" dirty="0"/>
           </a:p>
@@ -6193,7 +6870,7 @@
                 <a:ea typeface="Calibri" pitchFamily="34" charset="-122"/>
                 <a:cs typeface="Calibri" pitchFamily="34" charset="-120"/>
               </a:rPr>
-              <a:t>[Brief description of feature 5]</a:t>
+              <a:t>Revenue, order trends, analytics</a:t>
             </a:r>
             <a:endParaRPr lang="en-US" sz="1000" dirty="0"/>
           </a:p>
@@ -6295,7 +6972,7 @@
                 <a:ea typeface="Calibri" pitchFamily="34" charset="-122"/>
                 <a:cs typeface="Calibri" pitchFamily="34" charset="-120"/>
               </a:rPr>
-              <a:t>[Feature 6]</a:t>
+              <a:t>Settings &amp; Admin</a:t>
             </a:r>
             <a:endParaRPr lang="en-US" sz="1200" dirty="0"/>
           </a:p>
@@ -6334,7 +7011,7 @@
                 <a:ea typeface="Calibri" pitchFamily="34" charset="-122"/>
                 <a:cs typeface="Calibri" pitchFamily="34" charset="-120"/>
               </a:rPr>
-              <a:t>[Brief description of feature 6]</a:t>
+              <a:t>Business configuration &amp; user management</a:t>
             </a:r>
             <a:endParaRPr lang="en-US" sz="1000" dirty="0"/>
           </a:p>
@@ -6445,7 +7122,7 @@
                 <a:ea typeface="Calibri" pitchFamily="34" charset="-122"/>
                 <a:cs typeface="Calibri" pitchFamily="34" charset="-120"/>
               </a:rPr>
-              <a:t>[Slide Title — e.g. Agile Workflow &amp; Sprint Structure]</a:t>
+              <a:t>Agile Workflow &amp; Sprint Structure</a:t>
             </a:r>
             <a:endParaRPr lang="en-US" sz="3200" dirty="0"/>
           </a:p>
@@ -6555,7 +7232,7 @@
                 <a:ea typeface="Calibri" pitchFamily="34" charset="-122"/>
                 <a:cs typeface="Calibri" pitchFamily="34" charset="-120"/>
               </a:rPr>
-              <a:t>[Sprint 1 Name]</a:t>
+              <a:t>Foundation</a:t>
             </a:r>
             <a:endParaRPr lang="en-US" sz="1100" dirty="0"/>
           </a:p>
@@ -6591,10 +7268,9 @@
                   <a:srgbClr val="6B7280"/>
                 </a:solidFill>
                 <a:latin typeface="Calibri" pitchFamily="34" charset="0"/>
-                <a:ea typeface="Calibri" pitchFamily="34" charset="-122"/>
-                <a:cs typeface="Calibri" pitchFamily="34" charset="-120"/>
-              </a:rPr>
-              <a:t>[Key theme or deliverable]</a:t>
+                <a:cs typeface="Calibri" pitchFamily="34" charset="-120"/>
+              </a:rPr>
+              <a:t>Architecture, Planning, Standards, Development Environment</a:t>
             </a:r>
             <a:endParaRPr lang="en-US" sz="900" dirty="0"/>
           </a:p>
@@ -6736,7 +7412,7 @@
                 <a:ea typeface="Calibri" pitchFamily="34" charset="-122"/>
                 <a:cs typeface="Calibri" pitchFamily="34" charset="-120"/>
               </a:rPr>
-              <a:t>[Sprint 2 Name]</a:t>
+              <a:t>Infrastructure &amp; Data Layer</a:t>
             </a:r>
             <a:endParaRPr lang="en-US" sz="1100" dirty="0"/>
           </a:p>
@@ -6775,7 +7451,7 @@
                 <a:ea typeface="Calibri" pitchFamily="34" charset="-122"/>
                 <a:cs typeface="Calibri" pitchFamily="34" charset="-120"/>
               </a:rPr>
-              <a:t>[Key theme or deliverable]</a:t>
+              <a:t>Authentication, Database Management, UI shell</a:t>
             </a:r>
             <a:endParaRPr lang="en-US" sz="900" dirty="0"/>
           </a:p>
@@ -6917,7 +7593,7 @@
                 <a:ea typeface="Calibri" pitchFamily="34" charset="-122"/>
                 <a:cs typeface="Calibri" pitchFamily="34" charset="-120"/>
               </a:rPr>
-              <a:t>[Sprint 3 Name]</a:t>
+              <a:t>Engineering Backbone</a:t>
             </a:r>
             <a:endParaRPr lang="en-US" sz="1100" dirty="0"/>
           </a:p>
@@ -6953,10 +7629,9 @@
                   <a:srgbClr val="6B7280"/>
                 </a:solidFill>
                 <a:latin typeface="Calibri" pitchFamily="34" charset="0"/>
-                <a:ea typeface="Calibri" pitchFamily="34" charset="-122"/>
-                <a:cs typeface="Calibri" pitchFamily="34" charset="-120"/>
-              </a:rPr>
-              <a:t>[Key theme or deliverable]</a:t>
+                <a:cs typeface="Calibri" pitchFamily="34" charset="-120"/>
+              </a:rPr>
+              <a:t>APIs, Authentication, Process Improvements &amp; CI Pipeline</a:t>
             </a:r>
             <a:endParaRPr lang="en-US" sz="900" dirty="0"/>
           </a:p>
@@ -7095,10 +7770,9 @@
                   <a:srgbClr val="1B2B5E"/>
                 </a:solidFill>
                 <a:latin typeface="Calibri" pitchFamily="34" charset="0"/>
-                <a:ea typeface="Calibri" pitchFamily="34" charset="-122"/>
-                <a:cs typeface="Calibri" pitchFamily="34" charset="-120"/>
-              </a:rPr>
-              <a:t>[Sprint 4 Name]</a:t>
+                <a:cs typeface="Calibri" pitchFamily="34" charset="-120"/>
+              </a:rPr>
+              <a:t>Customer Experience</a:t>
             </a:r>
             <a:endParaRPr lang="en-US" sz="1100" dirty="0"/>
           </a:p>
@@ -7134,10 +7808,9 @@
                   <a:srgbClr val="6B7280"/>
                 </a:solidFill>
                 <a:latin typeface="Calibri" pitchFamily="34" charset="0"/>
-                <a:ea typeface="Calibri" pitchFamily="34" charset="-122"/>
-                <a:cs typeface="Calibri" pitchFamily="34" charset="-120"/>
-              </a:rPr>
-              <a:t>[Key theme or deliverable]</a:t>
+                <a:cs typeface="Calibri" pitchFamily="34" charset="-120"/>
+              </a:rPr>
+              <a:t>Storefront Page, Customer Order Flow, RBAC</a:t>
             </a:r>
             <a:endParaRPr lang="en-US" sz="900" dirty="0"/>
           </a:p>
@@ -7276,10 +7949,9 @@
                   <a:srgbClr val="1B2B5E"/>
                 </a:solidFill>
                 <a:latin typeface="Calibri" pitchFamily="34" charset="0"/>
-                <a:ea typeface="Calibri" pitchFamily="34" charset="-122"/>
-                <a:cs typeface="Calibri" pitchFamily="34" charset="-120"/>
-              </a:rPr>
-              <a:t>[Sprint 5 Name]</a:t>
+                <a:cs typeface="Calibri" pitchFamily="34" charset="-120"/>
+              </a:rPr>
+              <a:t>Business Admin</a:t>
             </a:r>
             <a:endParaRPr lang="en-US" sz="1100" dirty="0"/>
           </a:p>
@@ -7294,7 +7966,7 @@
         <p:spPr>
           <a:xfrm>
             <a:off x="7196328" y="2404872"/>
-            <a:ext cx="1645920" cy="457200"/>
+            <a:ext cx="1730696" cy="457200"/>
           </a:xfrm>
           <a:prstGeom prst="rect">
             <a:avLst/>
@@ -7318,557 +7990,49 @@
                 <a:ea typeface="Calibri" pitchFamily="34" charset="-122"/>
                 <a:cs typeface="Calibri" pitchFamily="34" charset="-120"/>
               </a:rPr>
-              <a:t>[Key theme or deliverable]</a:t>
-            </a:r>
-            <a:endParaRPr lang="en-US" sz="900" dirty="0"/>
-          </a:p>
-        </p:txBody>
-      </p:sp>
-      <p:sp>
-        <p:nvSpPr>
-          <p:cNvPr id="28" name="Text 26"/>
-          <p:cNvSpPr/>
-          <p:nvPr/>
-        </p:nvSpPr>
-        <p:spPr>
-          <a:xfrm>
-            <a:off x="365760" y="3063240"/>
-            <a:ext cx="2743200" cy="274320"/>
-          </a:xfrm>
-          <a:prstGeom prst="rect">
-            <a:avLst/>
-          </a:prstGeom>
-          <a:noFill/>
-          <a:ln/>
-        </p:spPr>
-        <p:txBody>
-          <a:bodyPr wrap="square" lIns="0" tIns="0" rIns="0" bIns="0" rtlCol="0" anchor="ctr"/>
-          <a:lstStyle/>
-          <a:p>
-            <a:pPr marL="0" indent="0">
-              <a:buNone/>
-            </a:pPr>
-            <a:r>
-              <a:rPr lang="en-US" sz="1200" b="1" dirty="0">
-                <a:solidFill>
-                  <a:srgbClr val="1B2B5E"/>
-                </a:solidFill>
-                <a:latin typeface="Calibri" pitchFamily="34" charset="0"/>
-                <a:ea typeface="Calibri" pitchFamily="34" charset="-122"/>
-                <a:cs typeface="Calibri" pitchFamily="34" charset="-120"/>
-              </a:rPr>
-              <a:t>Tools &amp; Stack</a:t>
-            </a:r>
-            <a:endParaRPr lang="en-US" sz="1200" dirty="0"/>
-          </a:p>
-        </p:txBody>
-      </p:sp>
-      <p:sp>
-        <p:nvSpPr>
-          <p:cNvPr id="29" name="Shape 27"/>
-          <p:cNvSpPr/>
-          <p:nvPr/>
-        </p:nvSpPr>
-        <p:spPr>
-          <a:xfrm>
-            <a:off x="365760" y="3429000"/>
-            <a:ext cx="1143000" cy="384048"/>
-          </a:xfrm>
-          <a:prstGeom prst="roundRect">
-            <a:avLst>
-              <a:gd name="adj" fmla="val 19048"/>
-            </a:avLst>
-          </a:prstGeom>
-          <a:solidFill>
-            <a:srgbClr val="0EA5E9"/>
-          </a:solidFill>
-          <a:ln w="12700">
-            <a:solidFill>
-              <a:srgbClr val="0EA5E9"/>
-            </a:solidFill>
-            <a:prstDash val="solid"/>
-          </a:ln>
-        </p:spPr>
-        <p:txBody>
-          <a:bodyPr/>
-          <a:lstStyle/>
-          <a:p>
-            <a:endParaRPr lang="en-US"/>
-          </a:p>
-        </p:txBody>
-      </p:sp>
-      <p:sp>
-        <p:nvSpPr>
-          <p:cNvPr id="30" name="Text 28"/>
-          <p:cNvSpPr/>
-          <p:nvPr/>
-        </p:nvSpPr>
-        <p:spPr>
-          <a:xfrm>
-            <a:off x="365760" y="3429000"/>
-            <a:ext cx="1143000" cy="384048"/>
-          </a:xfrm>
-          <a:prstGeom prst="rect">
-            <a:avLst/>
-          </a:prstGeom>
-          <a:noFill/>
-          <a:ln/>
-        </p:spPr>
-        <p:txBody>
-          <a:bodyPr wrap="square" lIns="0" tIns="0" rIns="0" bIns="0" rtlCol="0" anchor="ctr"/>
-          <a:lstStyle/>
-          <a:p>
-            <a:pPr marL="0" indent="0" algn="ctr">
-              <a:buNone/>
-            </a:pPr>
-            <a:r>
-              <a:rPr lang="en-US" sz="900" b="1" dirty="0">
-                <a:solidFill>
-                  <a:srgbClr val="FFFFFF"/>
-                </a:solidFill>
-                <a:latin typeface="Calibri" pitchFamily="34" charset="0"/>
-                <a:ea typeface="Calibri" pitchFamily="34" charset="-122"/>
-                <a:cs typeface="Calibri" pitchFamily="34" charset="-120"/>
-              </a:rPr>
-              <a:t>[Tool 1]</a:t>
-            </a:r>
-            <a:endParaRPr lang="en-US" sz="900" dirty="0"/>
-          </a:p>
-        </p:txBody>
-      </p:sp>
-      <p:sp>
-        <p:nvSpPr>
-          <p:cNvPr id="31" name="Shape 29"/>
-          <p:cNvSpPr/>
-          <p:nvPr/>
-        </p:nvSpPr>
-        <p:spPr>
-          <a:xfrm>
-            <a:off x="1627632" y="3429000"/>
-            <a:ext cx="1143000" cy="384048"/>
-          </a:xfrm>
-          <a:prstGeom prst="roundRect">
-            <a:avLst>
-              <a:gd name="adj" fmla="val 19048"/>
-            </a:avLst>
-          </a:prstGeom>
-          <a:solidFill>
-            <a:srgbClr val="7C3AED"/>
-          </a:solidFill>
-          <a:ln w="12700">
-            <a:solidFill>
-              <a:srgbClr val="7C3AED"/>
-            </a:solidFill>
-            <a:prstDash val="solid"/>
-          </a:ln>
-        </p:spPr>
-        <p:txBody>
-          <a:bodyPr/>
-          <a:lstStyle/>
-          <a:p>
-            <a:endParaRPr lang="en-US"/>
-          </a:p>
-        </p:txBody>
-      </p:sp>
-      <p:sp>
-        <p:nvSpPr>
-          <p:cNvPr id="32" name="Text 30"/>
-          <p:cNvSpPr/>
-          <p:nvPr/>
-        </p:nvSpPr>
-        <p:spPr>
-          <a:xfrm>
-            <a:off x="1627632" y="3429000"/>
-            <a:ext cx="1143000" cy="384048"/>
-          </a:xfrm>
-          <a:prstGeom prst="rect">
-            <a:avLst/>
-          </a:prstGeom>
-          <a:noFill/>
-          <a:ln/>
-        </p:spPr>
-        <p:txBody>
-          <a:bodyPr wrap="square" lIns="0" tIns="0" rIns="0" bIns="0" rtlCol="0" anchor="ctr"/>
-          <a:lstStyle/>
-          <a:p>
-            <a:pPr marL="0" indent="0" algn="ctr">
-              <a:buNone/>
-            </a:pPr>
-            <a:r>
-              <a:rPr lang="en-US" sz="900" b="1" dirty="0">
-                <a:solidFill>
-                  <a:srgbClr val="FFFFFF"/>
-                </a:solidFill>
-                <a:latin typeface="Calibri" pitchFamily="34" charset="0"/>
-                <a:ea typeface="Calibri" pitchFamily="34" charset="-122"/>
-                <a:cs typeface="Calibri" pitchFamily="34" charset="-120"/>
-              </a:rPr>
-              <a:t>[Tool 2]</a:t>
-            </a:r>
-            <a:endParaRPr lang="en-US" sz="900" dirty="0"/>
-          </a:p>
-        </p:txBody>
-      </p:sp>
-      <p:sp>
-        <p:nvSpPr>
-          <p:cNvPr id="33" name="Shape 31"/>
-          <p:cNvSpPr/>
-          <p:nvPr/>
-        </p:nvSpPr>
-        <p:spPr>
-          <a:xfrm>
-            <a:off x="2889504" y="3429000"/>
-            <a:ext cx="1143000" cy="384048"/>
-          </a:xfrm>
-          <a:prstGeom prst="roundRect">
-            <a:avLst>
-              <a:gd name="adj" fmla="val 19048"/>
-            </a:avLst>
-          </a:prstGeom>
-          <a:solidFill>
-            <a:srgbClr val="F59E0B"/>
-          </a:solidFill>
-          <a:ln w="12700">
-            <a:solidFill>
-              <a:srgbClr val="F59E0B"/>
-            </a:solidFill>
-            <a:prstDash val="solid"/>
-          </a:ln>
-        </p:spPr>
-        <p:txBody>
-          <a:bodyPr/>
-          <a:lstStyle/>
-          <a:p>
-            <a:endParaRPr lang="en-US"/>
-          </a:p>
-        </p:txBody>
-      </p:sp>
-      <p:sp>
-        <p:nvSpPr>
-          <p:cNvPr id="34" name="Text 32"/>
-          <p:cNvSpPr/>
-          <p:nvPr/>
-        </p:nvSpPr>
-        <p:spPr>
-          <a:xfrm>
-            <a:off x="2889504" y="3429000"/>
-            <a:ext cx="1143000" cy="384048"/>
-          </a:xfrm>
-          <a:prstGeom prst="rect">
-            <a:avLst/>
-          </a:prstGeom>
-          <a:noFill/>
-          <a:ln/>
-        </p:spPr>
-        <p:txBody>
-          <a:bodyPr wrap="square" lIns="0" tIns="0" rIns="0" bIns="0" rtlCol="0" anchor="ctr"/>
-          <a:lstStyle/>
-          <a:p>
-            <a:pPr marL="0" indent="0" algn="ctr">
-              <a:buNone/>
-            </a:pPr>
-            <a:r>
-              <a:rPr lang="en-US" sz="900" b="1" dirty="0">
-                <a:solidFill>
-                  <a:srgbClr val="FFFFFF"/>
-                </a:solidFill>
-                <a:latin typeface="Calibri" pitchFamily="34" charset="0"/>
-                <a:ea typeface="Calibri" pitchFamily="34" charset="-122"/>
-                <a:cs typeface="Calibri" pitchFamily="34" charset="-120"/>
-              </a:rPr>
-              <a:t>[Tool 3]</a:t>
-            </a:r>
-            <a:endParaRPr lang="en-US" sz="900" dirty="0"/>
-          </a:p>
-        </p:txBody>
-      </p:sp>
-      <p:sp>
-        <p:nvSpPr>
-          <p:cNvPr id="35" name="Shape 33"/>
-          <p:cNvSpPr/>
-          <p:nvPr/>
-        </p:nvSpPr>
-        <p:spPr>
-          <a:xfrm>
-            <a:off x="4151376" y="3429000"/>
-            <a:ext cx="1143000" cy="384048"/>
-          </a:xfrm>
-          <a:prstGeom prst="roundRect">
-            <a:avLst>
-              <a:gd name="adj" fmla="val 19048"/>
-            </a:avLst>
-          </a:prstGeom>
-          <a:solidFill>
-            <a:srgbClr val="10B981"/>
-          </a:solidFill>
-          <a:ln w="12700">
-            <a:solidFill>
-              <a:srgbClr val="10B981"/>
-            </a:solidFill>
-            <a:prstDash val="solid"/>
-          </a:ln>
-        </p:spPr>
-        <p:txBody>
-          <a:bodyPr/>
-          <a:lstStyle/>
-          <a:p>
-            <a:endParaRPr lang="en-US"/>
-          </a:p>
-        </p:txBody>
-      </p:sp>
-      <p:sp>
-        <p:nvSpPr>
-          <p:cNvPr id="36" name="Text 34"/>
-          <p:cNvSpPr/>
-          <p:nvPr/>
-        </p:nvSpPr>
-        <p:spPr>
-          <a:xfrm>
-            <a:off x="4151376" y="3429000"/>
-            <a:ext cx="1143000" cy="384048"/>
-          </a:xfrm>
-          <a:prstGeom prst="rect">
-            <a:avLst/>
-          </a:prstGeom>
-          <a:noFill/>
-          <a:ln/>
-        </p:spPr>
-        <p:txBody>
-          <a:bodyPr wrap="square" lIns="0" tIns="0" rIns="0" bIns="0" rtlCol="0" anchor="ctr"/>
-          <a:lstStyle/>
-          <a:p>
-            <a:pPr marL="0" indent="0" algn="ctr">
-              <a:buNone/>
-            </a:pPr>
-            <a:r>
-              <a:rPr lang="en-US" sz="900" b="1" dirty="0">
-                <a:solidFill>
-                  <a:srgbClr val="FFFFFF"/>
-                </a:solidFill>
-                <a:latin typeface="Calibri" pitchFamily="34" charset="0"/>
-                <a:ea typeface="Calibri" pitchFamily="34" charset="-122"/>
-                <a:cs typeface="Calibri" pitchFamily="34" charset="-120"/>
-              </a:rPr>
-              <a:t>[Tool 4]</a:t>
-            </a:r>
-            <a:endParaRPr lang="en-US" sz="900" dirty="0"/>
-          </a:p>
-        </p:txBody>
-      </p:sp>
-      <p:sp>
-        <p:nvSpPr>
-          <p:cNvPr id="37" name="Shape 35"/>
-          <p:cNvSpPr/>
-          <p:nvPr/>
-        </p:nvSpPr>
-        <p:spPr>
-          <a:xfrm>
-            <a:off x="5413248" y="3429000"/>
-            <a:ext cx="1143000" cy="384048"/>
-          </a:xfrm>
-          <a:prstGeom prst="roundRect">
-            <a:avLst>
-              <a:gd name="adj" fmla="val 19048"/>
-            </a:avLst>
-          </a:prstGeom>
-          <a:solidFill>
-            <a:srgbClr val="EF4444"/>
-          </a:solidFill>
-          <a:ln w="12700">
-            <a:solidFill>
-              <a:srgbClr val="EF4444"/>
-            </a:solidFill>
-            <a:prstDash val="solid"/>
-          </a:ln>
-        </p:spPr>
-        <p:txBody>
-          <a:bodyPr/>
-          <a:lstStyle/>
-          <a:p>
-            <a:endParaRPr lang="en-US"/>
-          </a:p>
-        </p:txBody>
-      </p:sp>
-      <p:sp>
-        <p:nvSpPr>
-          <p:cNvPr id="38" name="Text 36"/>
-          <p:cNvSpPr/>
-          <p:nvPr/>
-        </p:nvSpPr>
-        <p:spPr>
-          <a:xfrm>
-            <a:off x="5413248" y="3429000"/>
-            <a:ext cx="1143000" cy="384048"/>
-          </a:xfrm>
-          <a:prstGeom prst="rect">
-            <a:avLst/>
-          </a:prstGeom>
-          <a:noFill/>
-          <a:ln/>
-        </p:spPr>
-        <p:txBody>
-          <a:bodyPr wrap="square" lIns="0" tIns="0" rIns="0" bIns="0" rtlCol="0" anchor="ctr"/>
-          <a:lstStyle/>
-          <a:p>
-            <a:pPr marL="0" indent="0" algn="ctr">
-              <a:buNone/>
-            </a:pPr>
-            <a:r>
-              <a:rPr lang="en-US" sz="900" b="1" dirty="0">
-                <a:solidFill>
-                  <a:srgbClr val="FFFFFF"/>
-                </a:solidFill>
-                <a:latin typeface="Calibri" pitchFamily="34" charset="0"/>
-                <a:ea typeface="Calibri" pitchFamily="34" charset="-122"/>
-                <a:cs typeface="Calibri" pitchFamily="34" charset="-120"/>
-              </a:rPr>
-              <a:t>[Tool 5]</a:t>
-            </a:r>
-            <a:endParaRPr lang="en-US" sz="900" dirty="0"/>
-          </a:p>
-        </p:txBody>
-      </p:sp>
-      <p:sp>
-        <p:nvSpPr>
-          <p:cNvPr id="39" name="Shape 37"/>
-          <p:cNvSpPr/>
-          <p:nvPr/>
-        </p:nvSpPr>
-        <p:spPr>
-          <a:xfrm>
-            <a:off x="6675120" y="3429000"/>
-            <a:ext cx="1143000" cy="384048"/>
-          </a:xfrm>
-          <a:prstGeom prst="roundRect">
-            <a:avLst>
-              <a:gd name="adj" fmla="val 19048"/>
-            </a:avLst>
-          </a:prstGeom>
-          <a:solidFill>
-            <a:srgbClr val="24292E"/>
-          </a:solidFill>
-          <a:ln w="12700">
-            <a:solidFill>
-              <a:srgbClr val="24292E"/>
-            </a:solidFill>
-            <a:prstDash val="solid"/>
-          </a:ln>
-        </p:spPr>
-        <p:txBody>
-          <a:bodyPr/>
-          <a:lstStyle/>
-          <a:p>
-            <a:endParaRPr lang="en-US"/>
-          </a:p>
-        </p:txBody>
-      </p:sp>
-      <p:sp>
-        <p:nvSpPr>
-          <p:cNvPr id="40" name="Text 38"/>
-          <p:cNvSpPr/>
-          <p:nvPr/>
-        </p:nvSpPr>
-        <p:spPr>
-          <a:xfrm>
-            <a:off x="6675120" y="3429000"/>
-            <a:ext cx="1143000" cy="384048"/>
-          </a:xfrm>
-          <a:prstGeom prst="rect">
-            <a:avLst/>
-          </a:prstGeom>
-          <a:noFill/>
-          <a:ln/>
-        </p:spPr>
-        <p:txBody>
-          <a:bodyPr wrap="square" lIns="0" tIns="0" rIns="0" bIns="0" rtlCol="0" anchor="ctr"/>
-          <a:lstStyle/>
-          <a:p>
-            <a:pPr marL="0" indent="0" algn="ctr">
-              <a:buNone/>
-            </a:pPr>
-            <a:r>
-              <a:rPr lang="en-US" sz="900" b="1" dirty="0">
-                <a:solidFill>
-                  <a:srgbClr val="FFFFFF"/>
-                </a:solidFill>
-                <a:latin typeface="Calibri" pitchFamily="34" charset="0"/>
-                <a:ea typeface="Calibri" pitchFamily="34" charset="-122"/>
-                <a:cs typeface="Calibri" pitchFamily="34" charset="-120"/>
-              </a:rPr>
-              <a:t>[Tool 6]</a:t>
-            </a:r>
-            <a:endParaRPr lang="en-US" sz="900" dirty="0"/>
-          </a:p>
-        </p:txBody>
-      </p:sp>
-      <p:sp>
-        <p:nvSpPr>
-          <p:cNvPr id="41" name="Shape 39"/>
-          <p:cNvSpPr/>
-          <p:nvPr/>
-        </p:nvSpPr>
-        <p:spPr>
-          <a:xfrm>
-            <a:off x="7936992" y="3429000"/>
-            <a:ext cx="1143000" cy="384048"/>
-          </a:xfrm>
-          <a:prstGeom prst="roundRect">
-            <a:avLst>
-              <a:gd name="adj" fmla="val 19048"/>
-            </a:avLst>
-          </a:prstGeom>
-          <a:solidFill>
-            <a:srgbClr val="0052CC"/>
-          </a:solidFill>
-          <a:ln w="12700">
-            <a:solidFill>
-              <a:srgbClr val="0052CC"/>
-            </a:solidFill>
-            <a:prstDash val="solid"/>
-          </a:ln>
-        </p:spPr>
-        <p:txBody>
-          <a:bodyPr/>
-          <a:lstStyle/>
-          <a:p>
-            <a:endParaRPr lang="en-US"/>
-          </a:p>
-        </p:txBody>
-      </p:sp>
-      <p:sp>
-        <p:nvSpPr>
-          <p:cNvPr id="42" name="Text 40"/>
-          <p:cNvSpPr/>
-          <p:nvPr/>
-        </p:nvSpPr>
-        <p:spPr>
-          <a:xfrm>
-            <a:off x="7936992" y="3429000"/>
-            <a:ext cx="1143000" cy="384048"/>
-          </a:xfrm>
-          <a:prstGeom prst="rect">
-            <a:avLst/>
-          </a:prstGeom>
-          <a:noFill/>
-          <a:ln/>
-        </p:spPr>
-        <p:txBody>
-          <a:bodyPr wrap="square" lIns="0" tIns="0" rIns="0" bIns="0" rtlCol="0" anchor="ctr"/>
-          <a:lstStyle/>
-          <a:p>
-            <a:pPr marL="0" indent="0" algn="ctr">
-              <a:buNone/>
-            </a:pPr>
-            <a:r>
-              <a:rPr lang="en-US" sz="900" b="1" dirty="0">
-                <a:solidFill>
-                  <a:srgbClr val="FFFFFF"/>
-                </a:solidFill>
-                <a:latin typeface="Calibri" pitchFamily="34" charset="0"/>
-                <a:ea typeface="Calibri" pitchFamily="34" charset="-122"/>
-                <a:cs typeface="Calibri" pitchFamily="34" charset="-120"/>
-              </a:rPr>
-              <a:t>[Tool 7]</a:t>
+              <a:t>Dashboard, Admin Settings, </a:t>
+            </a:r>
+            <a:br>
+              <a:rPr lang="en-US" sz="900" dirty="0">
+                <a:solidFill>
+                  <a:srgbClr val="6B7280"/>
+                </a:solidFill>
+                <a:latin typeface="Calibri" pitchFamily="34" charset="0"/>
+                <a:ea typeface="Calibri" pitchFamily="34" charset="-122"/>
+                <a:cs typeface="Calibri" pitchFamily="34" charset="-120"/>
+              </a:rPr>
+            </a:br>
+            <a:r>
+              <a:rPr lang="en-US" sz="900" dirty="0">
+                <a:solidFill>
+                  <a:srgbClr val="6B7280"/>
+                </a:solidFill>
+                <a:latin typeface="Calibri" pitchFamily="34" charset="0"/>
+                <a:ea typeface="Calibri" pitchFamily="34" charset="-122"/>
+                <a:cs typeface="Calibri" pitchFamily="34" charset="-120"/>
+              </a:rPr>
+              <a:t>Product &amp; Inventory Operations,</a:t>
+            </a:r>
+            <a:br>
+              <a:rPr lang="en-US" sz="900" dirty="0">
+                <a:solidFill>
+                  <a:srgbClr val="6B7280"/>
+                </a:solidFill>
+                <a:latin typeface="Calibri" pitchFamily="34" charset="0"/>
+                <a:ea typeface="Calibri" pitchFamily="34" charset="-122"/>
+                <a:cs typeface="Calibri" pitchFamily="34" charset="-120"/>
+              </a:rPr>
+            </a:br>
+            <a:r>
+              <a:rPr lang="en-US" sz="900" dirty="0">
+                <a:solidFill>
+                  <a:srgbClr val="6B7280"/>
+                </a:solidFill>
+                <a:latin typeface="Calibri" pitchFamily="34" charset="0"/>
+                <a:ea typeface="Calibri" pitchFamily="34" charset="-122"/>
+                <a:cs typeface="Calibri" pitchFamily="34" charset="-120"/>
+              </a:rPr>
+              <a:t>Order Management &amp; Sales Analytics </a:t>
             </a:r>
             <a:endParaRPr lang="en-US" sz="900" dirty="0"/>
           </a:p>
@@ -7946,7 +8110,7 @@
                 <a:ea typeface="Calibri" pitchFamily="34" charset="-122"/>
                 <a:cs typeface="Calibri" pitchFamily="34" charset="-120"/>
               </a:rPr>
-              <a:t>[Wave / Execution Model Label]:</a:t>
+              <a:t>Wave-Based Execution:</a:t>
             </a:r>
             <a:endParaRPr lang="en-US" sz="1100" dirty="0"/>
           </a:p>
@@ -7985,9 +8149,992 @@
                 <a:ea typeface="Calibri" pitchFamily="34" charset="-122"/>
                 <a:cs typeface="Calibri" pitchFamily="34" charset="-120"/>
               </a:rPr>
-              <a:t>[Describe your sprint execution model in one or two sentences. What made it effective?]</a:t>
+              <a:t>Sprints 3, 4 and 5 ran a three-wave structure with explicit greenlight conditions, dependency chains, and hard deadlines – ensuring blockers surfaced early, not at the end of the sprint.</a:t>
             </a:r>
             <a:endParaRPr lang="en-US" sz="1000" dirty="0"/>
+          </a:p>
+        </p:txBody>
+      </p:sp>
+      <p:sp>
+        <p:nvSpPr>
+          <p:cNvPr id="48" name="TL_Track">
+            <a:extLst>
+              <a:ext uri="{FF2B5EF4-FFF2-40B4-BE49-F238E27FC236}">
+                <a16:creationId xmlns:a16="http://schemas.microsoft.com/office/drawing/2014/main" id="{1CCCF149-763F-A5B5-78E2-07C7C04ED3CE}"/>
+              </a:ext>
+            </a:extLst>
+          </p:cNvPr>
+          <p:cNvSpPr/>
+          <p:nvPr/>
+        </p:nvSpPr>
+        <p:spPr>
+          <a:xfrm>
+            <a:off x="355208" y="3360421"/>
+            <a:ext cx="8412480" cy="60960"/>
+          </a:xfrm>
+          <a:prstGeom prst="rect">
+            <a:avLst/>
+          </a:prstGeom>
+          <a:solidFill>
+            <a:srgbClr val="CBD5E1"/>
+          </a:solidFill>
+          <a:ln>
+            <a:noFill/>
+          </a:ln>
+        </p:spPr>
+        <p:txBody>
+          <a:bodyPr/>
+          <a:lstStyle/>
+          <a:p>
+            <a:endParaRPr lang="en-US"/>
+          </a:p>
+        </p:txBody>
+      </p:sp>
+      <p:sp>
+        <p:nvSpPr>
+          <p:cNvPr id="49" name="TL_S1_dot">
+            <a:extLst>
+              <a:ext uri="{FF2B5EF4-FFF2-40B4-BE49-F238E27FC236}">
+                <a16:creationId xmlns:a16="http://schemas.microsoft.com/office/drawing/2014/main" id="{477F04EF-DE87-4B33-6658-21185A3D22E9}"/>
+              </a:ext>
+            </a:extLst>
+          </p:cNvPr>
+          <p:cNvSpPr/>
+          <p:nvPr/>
+        </p:nvSpPr>
+        <p:spPr>
+          <a:xfrm>
+            <a:off x="355208" y="3329461"/>
+            <a:ext cx="121920" cy="121920"/>
+          </a:xfrm>
+          <a:prstGeom prst="ellipse">
+            <a:avLst/>
+          </a:prstGeom>
+          <a:solidFill>
+            <a:srgbClr val="1B2B5E"/>
+          </a:solidFill>
+          <a:ln>
+            <a:noFill/>
+          </a:ln>
+        </p:spPr>
+        <p:txBody>
+          <a:bodyPr/>
+          <a:lstStyle/>
+          <a:p>
+            <a:endParaRPr lang="en-US"/>
+          </a:p>
+        </p:txBody>
+      </p:sp>
+      <p:sp>
+        <p:nvSpPr>
+          <p:cNvPr id="50" name="TL_S1_lbl">
+            <a:extLst>
+              <a:ext uri="{FF2B5EF4-FFF2-40B4-BE49-F238E27FC236}">
+                <a16:creationId xmlns:a16="http://schemas.microsoft.com/office/drawing/2014/main" id="{D7DE4412-E18E-4B5A-6A3C-E5BEAF41DE50}"/>
+              </a:ext>
+            </a:extLst>
+          </p:cNvPr>
+          <p:cNvSpPr/>
+          <p:nvPr/>
+        </p:nvSpPr>
+        <p:spPr>
+          <a:xfrm>
+            <a:off x="263768" y="3200421"/>
+            <a:ext cx="457200" cy="120000"/>
+          </a:xfrm>
+          <a:prstGeom prst="rect">
+            <a:avLst/>
+          </a:prstGeom>
+          <a:noFill/>
+          <a:ln>
+            <a:noFill/>
+          </a:ln>
+        </p:spPr>
+        <p:txBody>
+          <a:bodyPr wrap="square" lIns="0" tIns="0" rIns="0" bIns="0" rtlCol="0" anchor="ctr"/>
+          <a:lstStyle/>
+          <a:p>
+            <a:pPr algn="ctr">
+              <a:buNone/>
+            </a:pPr>
+            <a:r>
+              <a:rPr lang="en-US" sz="700" b="1" dirty="0">
+                <a:solidFill>
+                  <a:srgbClr val="1B2B5E"/>
+                </a:solidFill>
+                <a:latin typeface="Calibri"/>
+              </a:rPr>
+              <a:t>S1</a:t>
+            </a:r>
+          </a:p>
+        </p:txBody>
+      </p:sp>
+      <p:sp>
+        <p:nvSpPr>
+          <p:cNvPr id="51" name="TL_S1_date">
+            <a:extLst>
+              <a:ext uri="{FF2B5EF4-FFF2-40B4-BE49-F238E27FC236}">
+                <a16:creationId xmlns:a16="http://schemas.microsoft.com/office/drawing/2014/main" id="{5E33277C-34EB-EF05-33F9-4D355904870E}"/>
+              </a:ext>
+            </a:extLst>
+          </p:cNvPr>
+          <p:cNvSpPr/>
+          <p:nvPr/>
+        </p:nvSpPr>
+        <p:spPr>
+          <a:xfrm>
+            <a:off x="172328" y="3470421"/>
+            <a:ext cx="640080" cy="110000"/>
+          </a:xfrm>
+          <a:prstGeom prst="rect">
+            <a:avLst/>
+          </a:prstGeom>
+          <a:noFill/>
+          <a:ln>
+            <a:noFill/>
+          </a:ln>
+        </p:spPr>
+        <p:txBody>
+          <a:bodyPr wrap="square" lIns="0" tIns="0" rIns="0" bIns="0" rtlCol="0" anchor="ctr"/>
+          <a:lstStyle/>
+          <a:p>
+            <a:pPr algn="ctr">
+              <a:buNone/>
+            </a:pPr>
+            <a:r>
+              <a:rPr lang="en-US" sz="600" dirty="0">
+                <a:solidFill>
+                  <a:srgbClr val="6B7280"/>
+                </a:solidFill>
+                <a:latin typeface="Calibri"/>
+              </a:rPr>
+              <a:t>Jan 31</a:t>
+            </a:r>
+          </a:p>
+        </p:txBody>
+      </p:sp>
+      <p:sp>
+        <p:nvSpPr>
+          <p:cNvPr id="52" name="TL_S2_dot">
+            <a:extLst>
+              <a:ext uri="{FF2B5EF4-FFF2-40B4-BE49-F238E27FC236}">
+                <a16:creationId xmlns:a16="http://schemas.microsoft.com/office/drawing/2014/main" id="{4B2D0CE8-F4C3-9462-2F85-D88E5E517431}"/>
+              </a:ext>
+            </a:extLst>
+          </p:cNvPr>
+          <p:cNvSpPr/>
+          <p:nvPr/>
+        </p:nvSpPr>
+        <p:spPr>
+          <a:xfrm>
+            <a:off x="1755128" y="3329461"/>
+            <a:ext cx="121920" cy="121920"/>
+          </a:xfrm>
+          <a:prstGeom prst="ellipse">
+            <a:avLst/>
+          </a:prstGeom>
+          <a:solidFill>
+            <a:srgbClr val="1B2B5E"/>
+          </a:solidFill>
+          <a:ln>
+            <a:noFill/>
+          </a:ln>
+        </p:spPr>
+        <p:txBody>
+          <a:bodyPr/>
+          <a:lstStyle/>
+          <a:p>
+            <a:endParaRPr lang="en-US"/>
+          </a:p>
+        </p:txBody>
+      </p:sp>
+      <p:sp>
+        <p:nvSpPr>
+          <p:cNvPr id="53" name="TL_S2_lbl">
+            <a:extLst>
+              <a:ext uri="{FF2B5EF4-FFF2-40B4-BE49-F238E27FC236}">
+                <a16:creationId xmlns:a16="http://schemas.microsoft.com/office/drawing/2014/main" id="{08BDC6FB-077B-87FC-60A1-3555F78C31D8}"/>
+              </a:ext>
+            </a:extLst>
+          </p:cNvPr>
+          <p:cNvSpPr/>
+          <p:nvPr/>
+        </p:nvSpPr>
+        <p:spPr>
+          <a:xfrm>
+            <a:off x="1663688" y="3200421"/>
+            <a:ext cx="457200" cy="120000"/>
+          </a:xfrm>
+          <a:prstGeom prst="rect">
+            <a:avLst/>
+          </a:prstGeom>
+          <a:noFill/>
+          <a:ln>
+            <a:noFill/>
+          </a:ln>
+        </p:spPr>
+        <p:txBody>
+          <a:bodyPr wrap="square" lIns="0" tIns="0" rIns="0" bIns="0" rtlCol="0" anchor="ctr"/>
+          <a:lstStyle/>
+          <a:p>
+            <a:pPr algn="ctr">
+              <a:buNone/>
+            </a:pPr>
+            <a:r>
+              <a:rPr lang="en-US" sz="700" b="1" dirty="0">
+                <a:solidFill>
+                  <a:srgbClr val="1B2B5E"/>
+                </a:solidFill>
+                <a:latin typeface="Calibri"/>
+              </a:rPr>
+              <a:t>S2</a:t>
+            </a:r>
+          </a:p>
+        </p:txBody>
+      </p:sp>
+      <p:sp>
+        <p:nvSpPr>
+          <p:cNvPr id="54" name="TL_S2_date">
+            <a:extLst>
+              <a:ext uri="{FF2B5EF4-FFF2-40B4-BE49-F238E27FC236}">
+                <a16:creationId xmlns:a16="http://schemas.microsoft.com/office/drawing/2014/main" id="{D74263D3-2CD9-4A83-C80B-67F88276B918}"/>
+              </a:ext>
+            </a:extLst>
+          </p:cNvPr>
+          <p:cNvSpPr/>
+          <p:nvPr/>
+        </p:nvSpPr>
+        <p:spPr>
+          <a:xfrm>
+            <a:off x="1572248" y="3470421"/>
+            <a:ext cx="640080" cy="110000"/>
+          </a:xfrm>
+          <a:prstGeom prst="rect">
+            <a:avLst/>
+          </a:prstGeom>
+          <a:noFill/>
+          <a:ln>
+            <a:noFill/>
+          </a:ln>
+        </p:spPr>
+        <p:txBody>
+          <a:bodyPr wrap="square" lIns="0" tIns="0" rIns="0" bIns="0" rtlCol="0" anchor="ctr"/>
+          <a:lstStyle/>
+          <a:p>
+            <a:pPr algn="ctr">
+              <a:buNone/>
+            </a:pPr>
+            <a:r>
+              <a:rPr lang="en-US" sz="600" dirty="0">
+                <a:solidFill>
+                  <a:srgbClr val="6B7280"/>
+                </a:solidFill>
+                <a:latin typeface="Calibri"/>
+              </a:rPr>
+              <a:t>Feb 14</a:t>
+            </a:r>
+          </a:p>
+        </p:txBody>
+      </p:sp>
+      <p:sp>
+        <p:nvSpPr>
+          <p:cNvPr id="55" name="TL_S3_dot">
+            <a:extLst>
+              <a:ext uri="{FF2B5EF4-FFF2-40B4-BE49-F238E27FC236}">
+                <a16:creationId xmlns:a16="http://schemas.microsoft.com/office/drawing/2014/main" id="{DB51A5CB-2961-6753-31BC-A87CFAF37128}"/>
+              </a:ext>
+            </a:extLst>
+          </p:cNvPr>
+          <p:cNvSpPr/>
+          <p:nvPr/>
+        </p:nvSpPr>
+        <p:spPr>
+          <a:xfrm>
+            <a:off x="3155048" y="3329461"/>
+            <a:ext cx="121920" cy="121920"/>
+          </a:xfrm>
+          <a:prstGeom prst="ellipse">
+            <a:avLst/>
+          </a:prstGeom>
+          <a:solidFill>
+            <a:srgbClr val="1B2B5E"/>
+          </a:solidFill>
+          <a:ln>
+            <a:noFill/>
+          </a:ln>
+        </p:spPr>
+        <p:txBody>
+          <a:bodyPr/>
+          <a:lstStyle/>
+          <a:p>
+            <a:endParaRPr lang="en-US"/>
+          </a:p>
+        </p:txBody>
+      </p:sp>
+      <p:sp>
+        <p:nvSpPr>
+          <p:cNvPr id="56" name="TL_S3_lbl">
+            <a:extLst>
+              <a:ext uri="{FF2B5EF4-FFF2-40B4-BE49-F238E27FC236}">
+                <a16:creationId xmlns:a16="http://schemas.microsoft.com/office/drawing/2014/main" id="{C4BFA7C0-CA77-165D-2795-5FA26D456F3E}"/>
+              </a:ext>
+            </a:extLst>
+          </p:cNvPr>
+          <p:cNvSpPr/>
+          <p:nvPr/>
+        </p:nvSpPr>
+        <p:spPr>
+          <a:xfrm>
+            <a:off x="3063608" y="3200421"/>
+            <a:ext cx="457200" cy="120000"/>
+          </a:xfrm>
+          <a:prstGeom prst="rect">
+            <a:avLst/>
+          </a:prstGeom>
+          <a:noFill/>
+          <a:ln>
+            <a:noFill/>
+          </a:ln>
+        </p:spPr>
+        <p:txBody>
+          <a:bodyPr wrap="square" lIns="0" tIns="0" rIns="0" bIns="0" rtlCol="0" anchor="ctr"/>
+          <a:lstStyle/>
+          <a:p>
+            <a:pPr algn="ctr">
+              <a:buNone/>
+            </a:pPr>
+            <a:r>
+              <a:rPr lang="en-US" sz="700" b="1" dirty="0">
+                <a:solidFill>
+                  <a:srgbClr val="1B2B5E"/>
+                </a:solidFill>
+                <a:latin typeface="Calibri"/>
+              </a:rPr>
+              <a:t>S3</a:t>
+            </a:r>
+          </a:p>
+        </p:txBody>
+      </p:sp>
+      <p:sp>
+        <p:nvSpPr>
+          <p:cNvPr id="57" name="TL_S3_date">
+            <a:extLst>
+              <a:ext uri="{FF2B5EF4-FFF2-40B4-BE49-F238E27FC236}">
+                <a16:creationId xmlns:a16="http://schemas.microsoft.com/office/drawing/2014/main" id="{EE407D33-F8A8-6D38-5BDC-B4A967AAECDC}"/>
+              </a:ext>
+            </a:extLst>
+          </p:cNvPr>
+          <p:cNvSpPr/>
+          <p:nvPr/>
+        </p:nvSpPr>
+        <p:spPr>
+          <a:xfrm>
+            <a:off x="2972168" y="3470421"/>
+            <a:ext cx="640080" cy="110000"/>
+          </a:xfrm>
+          <a:prstGeom prst="rect">
+            <a:avLst/>
+          </a:prstGeom>
+          <a:noFill/>
+          <a:ln>
+            <a:noFill/>
+          </a:ln>
+        </p:spPr>
+        <p:txBody>
+          <a:bodyPr wrap="square" lIns="0" tIns="0" rIns="0" bIns="0" rtlCol="0" anchor="ctr"/>
+          <a:lstStyle/>
+          <a:p>
+            <a:pPr algn="ctr">
+              <a:buNone/>
+            </a:pPr>
+            <a:r>
+              <a:rPr lang="en-US" sz="600" dirty="0">
+                <a:solidFill>
+                  <a:srgbClr val="6B7280"/>
+                </a:solidFill>
+                <a:latin typeface="Calibri"/>
+              </a:rPr>
+              <a:t>Feb 28</a:t>
+            </a:r>
+          </a:p>
+        </p:txBody>
+      </p:sp>
+      <p:sp>
+        <p:nvSpPr>
+          <p:cNvPr id="58" name="TL_Break_bar">
+            <a:extLst>
+              <a:ext uri="{FF2B5EF4-FFF2-40B4-BE49-F238E27FC236}">
+                <a16:creationId xmlns:a16="http://schemas.microsoft.com/office/drawing/2014/main" id="{EE14E628-AEDD-493F-857D-AD1B302B7EC6}"/>
+              </a:ext>
+            </a:extLst>
+          </p:cNvPr>
+          <p:cNvSpPr/>
+          <p:nvPr/>
+        </p:nvSpPr>
+        <p:spPr>
+          <a:xfrm>
+            <a:off x="3789448" y="3340421"/>
+            <a:ext cx="304800" cy="40000"/>
+          </a:xfrm>
+          <a:prstGeom prst="rect">
+            <a:avLst/>
+          </a:prstGeom>
+          <a:solidFill>
+            <a:srgbClr val="F59E0B"/>
+          </a:solidFill>
+          <a:ln>
+            <a:noFill/>
+          </a:ln>
+        </p:spPr>
+        <p:txBody>
+          <a:bodyPr/>
+          <a:lstStyle/>
+          <a:p>
+            <a:endParaRPr lang="en-US"/>
+          </a:p>
+        </p:txBody>
+      </p:sp>
+      <p:sp>
+        <p:nvSpPr>
+          <p:cNvPr id="59" name="TL_Break_lbl">
+            <a:extLst>
+              <a:ext uri="{FF2B5EF4-FFF2-40B4-BE49-F238E27FC236}">
+                <a16:creationId xmlns:a16="http://schemas.microsoft.com/office/drawing/2014/main" id="{3A655CB8-C811-9635-03C4-3B3FC877B822}"/>
+              </a:ext>
+            </a:extLst>
+          </p:cNvPr>
+          <p:cNvSpPr/>
+          <p:nvPr/>
+        </p:nvSpPr>
+        <p:spPr>
+          <a:xfrm>
+            <a:off x="3689448" y="3470421"/>
+            <a:ext cx="530000" cy="110000"/>
+          </a:xfrm>
+          <a:prstGeom prst="rect">
+            <a:avLst/>
+          </a:prstGeom>
+          <a:noFill/>
+          <a:ln>
+            <a:noFill/>
+          </a:ln>
+        </p:spPr>
+        <p:txBody>
+          <a:bodyPr wrap="square" lIns="0" tIns="0" rIns="0" bIns="0" rtlCol="0" anchor="ctr"/>
+          <a:lstStyle/>
+          <a:p>
+            <a:pPr algn="ctr">
+              <a:buNone/>
+            </a:pPr>
+            <a:r>
+              <a:rPr lang="en-US" sz="550" b="1" dirty="0">
+                <a:solidFill>
+                  <a:srgbClr val="F59E0B"/>
+                </a:solidFill>
+                <a:latin typeface="Calibri"/>
+              </a:rPr>
+              <a:t>Break</a:t>
+            </a:r>
+          </a:p>
+        </p:txBody>
+      </p:sp>
+      <p:sp>
+        <p:nvSpPr>
+          <p:cNvPr id="60" name="TL_S4_dot">
+            <a:extLst>
+              <a:ext uri="{FF2B5EF4-FFF2-40B4-BE49-F238E27FC236}">
+                <a16:creationId xmlns:a16="http://schemas.microsoft.com/office/drawing/2014/main" id="{548FEB90-9705-9621-11E8-5C5F044C83E9}"/>
+              </a:ext>
+            </a:extLst>
+          </p:cNvPr>
+          <p:cNvSpPr/>
+          <p:nvPr/>
+        </p:nvSpPr>
+        <p:spPr>
+          <a:xfrm>
+            <a:off x="4470008" y="3329461"/>
+            <a:ext cx="121920" cy="121920"/>
+          </a:xfrm>
+          <a:prstGeom prst="ellipse">
+            <a:avLst/>
+          </a:prstGeom>
+          <a:solidFill>
+            <a:srgbClr val="1B2B5E"/>
+          </a:solidFill>
+          <a:ln>
+            <a:noFill/>
+          </a:ln>
+        </p:spPr>
+        <p:txBody>
+          <a:bodyPr/>
+          <a:lstStyle/>
+          <a:p>
+            <a:endParaRPr lang="en-US"/>
+          </a:p>
+        </p:txBody>
+      </p:sp>
+      <p:sp>
+        <p:nvSpPr>
+          <p:cNvPr id="61" name="TL_S4_lbl">
+            <a:extLst>
+              <a:ext uri="{FF2B5EF4-FFF2-40B4-BE49-F238E27FC236}">
+                <a16:creationId xmlns:a16="http://schemas.microsoft.com/office/drawing/2014/main" id="{54987736-CD40-8D15-FE3C-791F5D12BE7F}"/>
+              </a:ext>
+            </a:extLst>
+          </p:cNvPr>
+          <p:cNvSpPr/>
+          <p:nvPr/>
+        </p:nvSpPr>
+        <p:spPr>
+          <a:xfrm>
+            <a:off x="4378568" y="3200421"/>
+            <a:ext cx="457200" cy="120000"/>
+          </a:xfrm>
+          <a:prstGeom prst="rect">
+            <a:avLst/>
+          </a:prstGeom>
+          <a:noFill/>
+          <a:ln>
+            <a:noFill/>
+          </a:ln>
+        </p:spPr>
+        <p:txBody>
+          <a:bodyPr wrap="square" lIns="0" tIns="0" rIns="0" bIns="0" rtlCol="0" anchor="ctr"/>
+          <a:lstStyle/>
+          <a:p>
+            <a:pPr algn="ctr">
+              <a:buNone/>
+            </a:pPr>
+            <a:r>
+              <a:rPr lang="en-US" sz="700" b="1" dirty="0">
+                <a:solidFill>
+                  <a:srgbClr val="1B2B5E"/>
+                </a:solidFill>
+                <a:latin typeface="Calibri"/>
+              </a:rPr>
+              <a:t>S4</a:t>
+            </a:r>
+          </a:p>
+        </p:txBody>
+      </p:sp>
+      <p:sp>
+        <p:nvSpPr>
+          <p:cNvPr id="62" name="TL_S4_date">
+            <a:extLst>
+              <a:ext uri="{FF2B5EF4-FFF2-40B4-BE49-F238E27FC236}">
+                <a16:creationId xmlns:a16="http://schemas.microsoft.com/office/drawing/2014/main" id="{460EDA01-7315-26DB-89D1-004B7E9EF140}"/>
+              </a:ext>
+            </a:extLst>
+          </p:cNvPr>
+          <p:cNvSpPr/>
+          <p:nvPr/>
+        </p:nvSpPr>
+        <p:spPr>
+          <a:xfrm>
+            <a:off x="4287128" y="3470421"/>
+            <a:ext cx="640080" cy="110000"/>
+          </a:xfrm>
+          <a:prstGeom prst="rect">
+            <a:avLst/>
+          </a:prstGeom>
+          <a:noFill/>
+          <a:ln>
+            <a:noFill/>
+          </a:ln>
+        </p:spPr>
+        <p:txBody>
+          <a:bodyPr wrap="square" lIns="0" tIns="0" rIns="0" bIns="0" rtlCol="0" anchor="ctr"/>
+          <a:lstStyle/>
+          <a:p>
+            <a:pPr algn="ctr">
+              <a:buNone/>
+            </a:pPr>
+            <a:r>
+              <a:rPr lang="en-US" sz="600" dirty="0">
+                <a:solidFill>
+                  <a:srgbClr val="6B7280"/>
+                </a:solidFill>
+                <a:latin typeface="Calibri"/>
+              </a:rPr>
+              <a:t>Mar 21</a:t>
+            </a:r>
+          </a:p>
+        </p:txBody>
+      </p:sp>
+      <p:sp>
+        <p:nvSpPr>
+          <p:cNvPr id="63" name="TL_S5_dot">
+            <a:extLst>
+              <a:ext uri="{FF2B5EF4-FFF2-40B4-BE49-F238E27FC236}">
+                <a16:creationId xmlns:a16="http://schemas.microsoft.com/office/drawing/2014/main" id="{43B6A58A-1D88-8581-31F5-7F46238AC892}"/>
+              </a:ext>
+            </a:extLst>
+          </p:cNvPr>
+          <p:cNvSpPr/>
+          <p:nvPr/>
+        </p:nvSpPr>
+        <p:spPr>
+          <a:xfrm>
+            <a:off x="5969768" y="3329461"/>
+            <a:ext cx="121920" cy="121920"/>
+          </a:xfrm>
+          <a:prstGeom prst="ellipse">
+            <a:avLst/>
+          </a:prstGeom>
+          <a:solidFill>
+            <a:srgbClr val="1B2B5E"/>
+          </a:solidFill>
+          <a:ln>
+            <a:noFill/>
+          </a:ln>
+        </p:spPr>
+        <p:txBody>
+          <a:bodyPr/>
+          <a:lstStyle/>
+          <a:p>
+            <a:endParaRPr lang="en-US"/>
+          </a:p>
+        </p:txBody>
+      </p:sp>
+      <p:sp>
+        <p:nvSpPr>
+          <p:cNvPr id="64" name="TL_S5_lbl">
+            <a:extLst>
+              <a:ext uri="{FF2B5EF4-FFF2-40B4-BE49-F238E27FC236}">
+                <a16:creationId xmlns:a16="http://schemas.microsoft.com/office/drawing/2014/main" id="{1F5A13EB-A0AF-DEA3-7EBA-DB9FDDDED293}"/>
+              </a:ext>
+            </a:extLst>
+          </p:cNvPr>
+          <p:cNvSpPr/>
+          <p:nvPr/>
+        </p:nvSpPr>
+        <p:spPr>
+          <a:xfrm>
+            <a:off x="5878328" y="3200421"/>
+            <a:ext cx="457200" cy="120000"/>
+          </a:xfrm>
+          <a:prstGeom prst="rect">
+            <a:avLst/>
+          </a:prstGeom>
+          <a:noFill/>
+          <a:ln>
+            <a:noFill/>
+          </a:ln>
+        </p:spPr>
+        <p:txBody>
+          <a:bodyPr wrap="square" lIns="0" tIns="0" rIns="0" bIns="0" rtlCol="0" anchor="ctr"/>
+          <a:lstStyle/>
+          <a:p>
+            <a:pPr algn="ctr">
+              <a:buNone/>
+            </a:pPr>
+            <a:r>
+              <a:rPr lang="en-US" sz="700" b="1" dirty="0">
+                <a:solidFill>
+                  <a:srgbClr val="1B2B5E"/>
+                </a:solidFill>
+                <a:latin typeface="Calibri"/>
+              </a:rPr>
+              <a:t>S5</a:t>
+            </a:r>
+          </a:p>
+        </p:txBody>
+      </p:sp>
+      <p:sp>
+        <p:nvSpPr>
+          <p:cNvPr id="65" name="TL_S5_date">
+            <a:extLst>
+              <a:ext uri="{FF2B5EF4-FFF2-40B4-BE49-F238E27FC236}">
+                <a16:creationId xmlns:a16="http://schemas.microsoft.com/office/drawing/2014/main" id="{42E47CFC-CF73-9158-6354-8FEDAE7CFDB2}"/>
+              </a:ext>
+            </a:extLst>
+          </p:cNvPr>
+          <p:cNvSpPr/>
+          <p:nvPr/>
+        </p:nvSpPr>
+        <p:spPr>
+          <a:xfrm>
+            <a:off x="5878328" y="3470421"/>
+            <a:ext cx="640080" cy="110000"/>
+          </a:xfrm>
+          <a:prstGeom prst="rect">
+            <a:avLst/>
+          </a:prstGeom>
+          <a:noFill/>
+          <a:ln>
+            <a:noFill/>
+          </a:ln>
+        </p:spPr>
+        <p:txBody>
+          <a:bodyPr wrap="square" lIns="0" tIns="0" rIns="0" bIns="0" rtlCol="0" anchor="ctr"/>
+          <a:lstStyle/>
+          <a:p>
+            <a:pPr algn="ctr">
+              <a:buNone/>
+            </a:pPr>
+            <a:r>
+              <a:rPr lang="en-US" sz="600" dirty="0">
+                <a:solidFill>
+                  <a:srgbClr val="6B7280"/>
+                </a:solidFill>
+                <a:latin typeface="Calibri"/>
+              </a:rPr>
+              <a:t>Apr 4</a:t>
+            </a:r>
+          </a:p>
+        </p:txBody>
+      </p:sp>
+      <p:sp>
+        <p:nvSpPr>
+          <p:cNvPr id="66" name="TL_P4_dot">
+            <a:extLst>
+              <a:ext uri="{FF2B5EF4-FFF2-40B4-BE49-F238E27FC236}">
+                <a16:creationId xmlns:a16="http://schemas.microsoft.com/office/drawing/2014/main" id="{1403EE6B-425C-68FF-FBBC-DA9065D1E352}"/>
+              </a:ext>
+            </a:extLst>
+          </p:cNvPr>
+          <p:cNvSpPr/>
+          <p:nvPr/>
+        </p:nvSpPr>
+        <p:spPr>
+          <a:xfrm>
+            <a:off x="8339448" y="3329461"/>
+            <a:ext cx="121920" cy="121920"/>
+          </a:xfrm>
+          <a:prstGeom prst="ellipse">
+            <a:avLst/>
+          </a:prstGeom>
+          <a:solidFill>
+            <a:srgbClr val="3BB77E"/>
+          </a:solidFill>
+          <a:ln>
+            <a:noFill/>
+          </a:ln>
+        </p:spPr>
+        <p:txBody>
+          <a:bodyPr/>
+          <a:lstStyle/>
+          <a:p>
+            <a:endParaRPr lang="en-US"/>
+          </a:p>
+        </p:txBody>
+      </p:sp>
+      <p:sp>
+        <p:nvSpPr>
+          <p:cNvPr id="67" name="TL_P4_date">
+            <a:extLst>
+              <a:ext uri="{FF2B5EF4-FFF2-40B4-BE49-F238E27FC236}">
+                <a16:creationId xmlns:a16="http://schemas.microsoft.com/office/drawing/2014/main" id="{8647019D-2240-6132-55CE-34C07FD5A3AD}"/>
+              </a:ext>
+            </a:extLst>
+          </p:cNvPr>
+          <p:cNvSpPr/>
+          <p:nvPr/>
+        </p:nvSpPr>
+        <p:spPr>
+          <a:xfrm>
+            <a:off x="8156448" y="3470421"/>
+            <a:ext cx="640080" cy="110000"/>
+          </a:xfrm>
+          <a:prstGeom prst="rect">
+            <a:avLst/>
+          </a:prstGeom>
+          <a:noFill/>
+          <a:ln>
+            <a:noFill/>
+          </a:ln>
+        </p:spPr>
+        <p:txBody>
+          <a:bodyPr wrap="square" lIns="0" tIns="0" rIns="0" bIns="0" rtlCol="0" anchor="ctr"/>
+          <a:lstStyle/>
+          <a:p>
+            <a:pPr algn="ctr">
+              <a:buNone/>
+            </a:pPr>
+            <a:r>
+              <a:rPr lang="en-US" sz="600" dirty="0">
+                <a:solidFill>
+                  <a:srgbClr val="3BB77E"/>
+                </a:solidFill>
+                <a:latin typeface="Calibri"/>
+              </a:rPr>
+              <a:t>Apr 18</a:t>
+            </a:r>
+          </a:p>
+        </p:txBody>
+      </p:sp>
+      <p:sp>
+        <p:nvSpPr>
+          <p:cNvPr id="68" name="TL_CF_diamond">
+            <a:extLst>
+              <a:ext uri="{FF2B5EF4-FFF2-40B4-BE49-F238E27FC236}">
+                <a16:creationId xmlns:a16="http://schemas.microsoft.com/office/drawing/2014/main" id="{1070B717-8419-287F-EF0B-0E237466906C}"/>
+              </a:ext>
+            </a:extLst>
+          </p:cNvPr>
+          <p:cNvSpPr/>
+          <p:nvPr/>
+        </p:nvSpPr>
+        <p:spPr>
+          <a:xfrm rot="2700000">
+            <a:off x="7039448" y="3298501"/>
+            <a:ext cx="182880" cy="182880"/>
+          </a:xfrm>
+          <a:prstGeom prst="rect">
+            <a:avLst/>
+          </a:prstGeom>
+          <a:solidFill>
+            <a:srgbClr val="EF4444"/>
+          </a:solidFill>
+          <a:ln>
+            <a:noFill/>
+          </a:ln>
+        </p:spPr>
+        <p:txBody>
+          <a:bodyPr/>
+          <a:lstStyle/>
+          <a:p>
+            <a:endParaRPr lang="en-US"/>
+          </a:p>
+        </p:txBody>
+      </p:sp>
+      <p:sp>
+        <p:nvSpPr>
+          <p:cNvPr id="69" name="TL_CF_date">
+            <a:extLst>
+              <a:ext uri="{FF2B5EF4-FFF2-40B4-BE49-F238E27FC236}">
+                <a16:creationId xmlns:a16="http://schemas.microsoft.com/office/drawing/2014/main" id="{7FE53BD2-3391-EE04-3FC1-61C00B533499}"/>
+              </a:ext>
+            </a:extLst>
+          </p:cNvPr>
+          <p:cNvSpPr/>
+          <p:nvPr/>
+        </p:nvSpPr>
+        <p:spPr>
+          <a:xfrm>
+            <a:off x="6971668" y="3559257"/>
+            <a:ext cx="365760" cy="110000"/>
+          </a:xfrm>
+          <a:prstGeom prst="rect">
+            <a:avLst/>
+          </a:prstGeom>
+          <a:noFill/>
+          <a:ln>
+            <a:noFill/>
+          </a:ln>
+        </p:spPr>
+        <p:txBody>
+          <a:bodyPr wrap="square" lIns="0" tIns="0" rIns="0" bIns="0" rtlCol="0" anchor="ctr"/>
+          <a:lstStyle/>
+          <a:p>
+            <a:pPr algn="ctr">
+              <a:buNone/>
+            </a:pPr>
+            <a:r>
+              <a:rPr lang="en-US" sz="600" dirty="0">
+                <a:solidFill>
+                  <a:srgbClr val="EF4444"/>
+                </a:solidFill>
+                <a:latin typeface="Calibri"/>
+              </a:rPr>
+              <a:t>Apr 17</a:t>
+            </a:r>
+            <a:br>
+              <a:rPr lang="en-US" sz="600" dirty="0">
+                <a:solidFill>
+                  <a:srgbClr val="EF4444"/>
+                </a:solidFill>
+                <a:latin typeface="Calibri"/>
+              </a:rPr>
+            </a:br>
+            <a:r>
+              <a:rPr lang="en-US" sz="600" dirty="0">
+                <a:solidFill>
+                  <a:srgbClr val="EF4444"/>
+                </a:solidFill>
+                <a:latin typeface="Calibri"/>
+              </a:rPr>
+              <a:t>Code Freeze</a:t>
+            </a:r>
+          </a:p>
+        </p:txBody>
+      </p:sp>
+      <p:sp>
+        <p:nvSpPr>
+          <p:cNvPr id="70" name="TL_Deploy_diamond">
+            <a:extLst>
+              <a:ext uri="{FF2B5EF4-FFF2-40B4-BE49-F238E27FC236}">
+                <a16:creationId xmlns:a16="http://schemas.microsoft.com/office/drawing/2014/main" id="{2E84DF80-0523-D79F-6C2F-94D93579CEAA}"/>
+              </a:ext>
+            </a:extLst>
+          </p:cNvPr>
+          <p:cNvSpPr/>
+          <p:nvPr/>
+        </p:nvSpPr>
+        <p:spPr>
+          <a:xfrm rot="2700000">
+            <a:off x="7689448" y="3298501"/>
+            <a:ext cx="182880" cy="182880"/>
+          </a:xfrm>
+          <a:prstGeom prst="rect">
+            <a:avLst/>
+          </a:prstGeom>
+          <a:solidFill>
+            <a:srgbClr val="3BB77E"/>
+          </a:solidFill>
+          <a:ln>
+            <a:noFill/>
+          </a:ln>
+        </p:spPr>
+        <p:txBody>
+          <a:bodyPr/>
+          <a:lstStyle/>
+          <a:p>
+            <a:endParaRPr lang="en-US"/>
+          </a:p>
+        </p:txBody>
+      </p:sp>
+      <p:sp>
+        <p:nvSpPr>
+          <p:cNvPr id="71" name="TL_Deploy_lbl">
+            <a:extLst>
+              <a:ext uri="{FF2B5EF4-FFF2-40B4-BE49-F238E27FC236}">
+                <a16:creationId xmlns:a16="http://schemas.microsoft.com/office/drawing/2014/main" id="{C95C77BA-0EB4-7A9A-451C-4AA6F11F6124}"/>
+              </a:ext>
+            </a:extLst>
+          </p:cNvPr>
+          <p:cNvSpPr/>
+          <p:nvPr/>
+        </p:nvSpPr>
+        <p:spPr>
+          <a:xfrm>
+            <a:off x="7554448" y="3590421"/>
+            <a:ext cx="457200" cy="110000"/>
+          </a:xfrm>
+          <a:prstGeom prst="rect">
+            <a:avLst/>
+          </a:prstGeom>
+          <a:noFill/>
+          <a:ln>
+            <a:noFill/>
+          </a:ln>
+        </p:spPr>
+        <p:txBody>
+          <a:bodyPr wrap="square" lIns="0" tIns="0" rIns="0" bIns="0" rtlCol="0" anchor="ctr"/>
+          <a:lstStyle/>
+          <a:p>
+            <a:pPr algn="ctr">
+              <a:buNone/>
+            </a:pPr>
+            <a:r>
+              <a:rPr lang="en-US" sz="600" b="1" dirty="0">
+                <a:solidFill>
+                  <a:srgbClr val="3BB77E"/>
+                </a:solidFill>
+                <a:latin typeface="Calibri"/>
+              </a:rPr>
+              <a:t>Deployed</a:t>
+            </a:r>
           </a:p>
         </p:txBody>
       </p:sp>
@@ -8096,7 +9243,7 @@
                 <a:ea typeface="Calibri" pitchFamily="34" charset="-122"/>
                 <a:cs typeface="Calibri" pitchFamily="34" charset="-120"/>
               </a:rPr>
-              <a:t>[Slide Title — e.g. System Architecture]</a:t>
+              <a:t>System Architecture</a:t>
             </a:r>
             <a:endParaRPr lang="en-US" sz="3200" dirty="0"/>
           </a:p>
@@ -8191,7 +9338,7 @@
                 <a:ea typeface="Calibri" pitchFamily="34" charset="-122"/>
                 <a:cs typeface="Calibri" pitchFamily="34" charset="-120"/>
               </a:rPr>
-              <a:t>[Layer 1]</a:t>
+              <a:t>Frontend</a:t>
             </a:r>
             <a:endParaRPr lang="en-US" sz="1800" dirty="0"/>
           </a:p>
@@ -8232,7 +9379,7 @@
           <a:bodyPr/>
           <a:lstStyle/>
           <a:p>
-            <a:endParaRPr lang="en-US"/>
+            <a:endParaRPr lang="en-US" dirty="0"/>
           </a:p>
         </p:txBody>
       </p:sp>
@@ -8269,7 +9416,7 @@
                 <a:ea typeface="Calibri" pitchFamily="34" charset="-122"/>
                 <a:cs typeface="Calibri" pitchFamily="34" charset="-120"/>
               </a:rPr>
-              <a:t>[Tech Name]</a:t>
+              <a:t>React </a:t>
             </a:r>
             <a:endParaRPr lang="en-US" sz="1200" dirty="0"/>
           </a:p>
@@ -8308,7 +9455,7 @@
                 <a:ea typeface="Calibri" pitchFamily="34" charset="-122"/>
                 <a:cs typeface="Calibri" pitchFamily="34" charset="-120"/>
               </a:rPr>
-              <a:t>[Key details about this layer]</a:t>
+              <a:t>SPA – Component Based – SimpleJWT auth </a:t>
             </a:r>
             <a:endParaRPr lang="en-US" sz="1000" dirty="0"/>
           </a:p>
@@ -8435,7 +9582,7 @@
                 <a:ea typeface="Calibri" pitchFamily="34" charset="-122"/>
                 <a:cs typeface="Calibri" pitchFamily="34" charset="-120"/>
               </a:rPr>
-              <a:t>[Layer 2]</a:t>
+              <a:t>Backend</a:t>
             </a:r>
             <a:endParaRPr lang="en-US" sz="1800" dirty="0"/>
           </a:p>
@@ -8513,7 +9660,7 @@
                 <a:ea typeface="Calibri" pitchFamily="34" charset="-122"/>
                 <a:cs typeface="Calibri" pitchFamily="34" charset="-120"/>
               </a:rPr>
-              <a:t>[Tech Name]</a:t>
+              <a:t>Django + DRF</a:t>
             </a:r>
             <a:endParaRPr lang="en-US" sz="1200" dirty="0"/>
           </a:p>
@@ -8552,7 +9699,7 @@
                 <a:ea typeface="Calibri" pitchFamily="34" charset="-122"/>
                 <a:cs typeface="Calibri" pitchFamily="34" charset="-120"/>
               </a:rPr>
-              <a:t>[Key details about this layer]</a:t>
+              <a:t>REST API – JWT auth – Business Logic</a:t>
             </a:r>
             <a:endParaRPr lang="en-US" sz="1000" dirty="0"/>
           </a:p>
@@ -8679,7 +9826,7 @@
                 <a:ea typeface="Calibri" pitchFamily="34" charset="-122"/>
                 <a:cs typeface="Calibri" pitchFamily="34" charset="-120"/>
               </a:rPr>
-              <a:t>[Layer 3]</a:t>
+              <a:t>Database</a:t>
             </a:r>
             <a:endParaRPr lang="en-US" sz="1800" dirty="0"/>
           </a:p>
@@ -8757,7 +9904,7 @@
                 <a:ea typeface="Calibri" pitchFamily="34" charset="-122"/>
                 <a:cs typeface="Calibri" pitchFamily="34" charset="-120"/>
               </a:rPr>
-              <a:t>[Tech Name]</a:t>
+              <a:t>MySQL 8.0</a:t>
             </a:r>
             <a:endParaRPr lang="en-US" sz="1200" dirty="0"/>
           </a:p>
@@ -8784,44 +9931,94 @@
           <a:bodyPr wrap="square" lIns="0" tIns="0" rIns="0" bIns="0" rtlCol="0" anchor="ctr"/>
           <a:lstStyle/>
           <a:p>
+            <a:r>
+              <a:rPr lang="en-US" sz="1000" dirty="0">
+                <a:solidFill>
+                  <a:srgbClr val="6B7280"/>
+                </a:solidFill>
+                <a:latin typeface="Calibri" pitchFamily="34" charset="0"/>
+                <a:ea typeface="Calibri" pitchFamily="34" charset="-122"/>
+                <a:cs typeface="Calibri" pitchFamily="34" charset="-120"/>
+              </a:rPr>
+              <a:t>Relational Schema – Seed Data – Migrations</a:t>
+            </a:r>
+            <a:endParaRPr lang="en-US" sz="1000" dirty="0"/>
+          </a:p>
+        </p:txBody>
+      </p:sp>
+      <p:sp>
+        <p:nvSpPr>
+          <p:cNvPr id="36" name="Text 26">
+            <a:extLst>
+              <a:ext uri="{FF2B5EF4-FFF2-40B4-BE49-F238E27FC236}">
+                <a16:creationId xmlns:a16="http://schemas.microsoft.com/office/drawing/2014/main" id="{3545F4A7-D330-1B9D-0994-91B21846D95C}"/>
+              </a:ext>
+            </a:extLst>
+          </p:cNvPr>
+          <p:cNvSpPr/>
+          <p:nvPr/>
+        </p:nvSpPr>
+        <p:spPr>
+          <a:xfrm>
+            <a:off x="457200" y="3118104"/>
+            <a:ext cx="2743200" cy="274320"/>
+          </a:xfrm>
+          <a:prstGeom prst="rect">
+            <a:avLst/>
+          </a:prstGeom>
+          <a:noFill/>
+          <a:ln/>
+        </p:spPr>
+        <p:txBody>
+          <a:bodyPr wrap="square" lIns="0" tIns="0" rIns="0" bIns="0" rtlCol="0" anchor="ctr"/>
+          <a:lstStyle/>
+          <a:p>
             <a:pPr marL="0" indent="0">
               <a:buNone/>
             </a:pPr>
             <a:r>
-              <a:rPr lang="en-US" sz="1000" dirty="0">
-                <a:solidFill>
-                  <a:srgbClr val="6B7280"/>
-                </a:solidFill>
-                <a:latin typeface="Calibri" pitchFamily="34" charset="0"/>
-                <a:ea typeface="Calibri" pitchFamily="34" charset="-122"/>
-                <a:cs typeface="Calibri" pitchFamily="34" charset="-120"/>
-              </a:rPr>
-              <a:t>[Key details about this layer]</a:t>
-            </a:r>
-            <a:endParaRPr lang="en-US" sz="1000" dirty="0"/>
-          </a:p>
-        </p:txBody>
-      </p:sp>
-      <p:sp>
-        <p:nvSpPr>
-          <p:cNvPr id="24" name="Shape 19"/>
-          <p:cNvSpPr/>
-          <p:nvPr/>
-        </p:nvSpPr>
-        <p:spPr>
-          <a:xfrm>
-            <a:off x="457200" y="3246120"/>
-            <a:ext cx="8321040" cy="1554480"/>
-          </a:xfrm>
-          <a:prstGeom prst="rect">
-            <a:avLst/>
+              <a:rPr lang="en-US" sz="1200" b="1" dirty="0">
+                <a:solidFill>
+                  <a:srgbClr val="1B2B5E"/>
+                </a:solidFill>
+                <a:latin typeface="Calibri" pitchFamily="34" charset="0"/>
+                <a:ea typeface="Calibri" pitchFamily="34" charset="-122"/>
+                <a:cs typeface="Calibri" pitchFamily="34" charset="-120"/>
+              </a:rPr>
+              <a:t>Tools &amp; Stack</a:t>
+            </a:r>
+            <a:endParaRPr lang="en-US" sz="1200" dirty="0"/>
+          </a:p>
+        </p:txBody>
+      </p:sp>
+      <p:sp>
+        <p:nvSpPr>
+          <p:cNvPr id="37" name="Shape 27">
+            <a:extLst>
+              <a:ext uri="{FF2B5EF4-FFF2-40B4-BE49-F238E27FC236}">
+                <a16:creationId xmlns:a16="http://schemas.microsoft.com/office/drawing/2014/main" id="{3147F519-2E5D-A4C9-5A7D-E5A6CC2699BA}"/>
+              </a:ext>
+            </a:extLst>
+          </p:cNvPr>
+          <p:cNvSpPr/>
+          <p:nvPr/>
+        </p:nvSpPr>
+        <p:spPr>
+          <a:xfrm>
+            <a:off x="457200" y="3483864"/>
+            <a:ext cx="1143000" cy="384048"/>
+          </a:xfrm>
+          <a:prstGeom prst="roundRect">
+            <a:avLst>
+              <a:gd name="adj" fmla="val 19048"/>
+            </a:avLst>
           </a:prstGeom>
           <a:solidFill>
-            <a:srgbClr val="1A1A2E"/>
+            <a:srgbClr val="0EA5E9"/>
           </a:solidFill>
           <a:ln w="12700">
             <a:solidFill>
-              <a:srgbClr val="1A1A2E"/>
+              <a:srgbClr val="0EA5E9"/>
             </a:solidFill>
             <a:prstDash val="solid"/>
           </a:ln>
@@ -8834,56 +10031,38 @@
           </a:p>
         </p:txBody>
       </p:sp>
-      <p:pic>
-        <p:nvPicPr>
-          <p:cNvPr id="25" name="Image 3" descr="preencoded.png"/>
-          <p:cNvPicPr>
-            <a:picLocks noChangeAspect="1"/>
-          </p:cNvPicPr>
-          <p:nvPr/>
-        </p:nvPicPr>
-        <p:blipFill>
-          <a:blip r:embed="rId6"/>
-          <a:stretch>
-            <a:fillRect/>
-          </a:stretch>
-        </p:blipFill>
-        <p:spPr>
-          <a:xfrm>
-            <a:off x="640080" y="3429000"/>
-            <a:ext cx="502920" cy="502920"/>
-          </a:xfrm>
-          <a:prstGeom prst="rect">
-            <a:avLst/>
-          </a:prstGeom>
-        </p:spPr>
-      </p:pic>
-      <p:sp>
-        <p:nvSpPr>
-          <p:cNvPr id="26" name="Text 20"/>
-          <p:cNvSpPr/>
-          <p:nvPr/>
-        </p:nvSpPr>
-        <p:spPr>
-          <a:xfrm>
-            <a:off x="1280160" y="3337560"/>
-            <a:ext cx="4572000" cy="320040"/>
-          </a:xfrm>
-          <a:prstGeom prst="rect">
-            <a:avLst/>
-          </a:prstGeom>
-          <a:noFill/>
-          <a:ln/>
-        </p:spPr>
-        <p:txBody>
-          <a:bodyPr wrap="square" lIns="0" tIns="0" rIns="0" bIns="0" rtlCol="0" anchor="ctr"/>
-          <a:lstStyle/>
-          <a:p>
-            <a:pPr marL="0" indent="0">
-              <a:buNone/>
-            </a:pPr>
-            <a:r>
-              <a:rPr lang="en-US" sz="1300" b="1" dirty="0">
+      <p:sp>
+        <p:nvSpPr>
+          <p:cNvPr id="38" name="Text 28">
+            <a:extLst>
+              <a:ext uri="{FF2B5EF4-FFF2-40B4-BE49-F238E27FC236}">
+                <a16:creationId xmlns:a16="http://schemas.microsoft.com/office/drawing/2014/main" id="{8B32E473-A0C8-943D-C576-5FA24971F600}"/>
+              </a:ext>
+            </a:extLst>
+          </p:cNvPr>
+          <p:cNvSpPr/>
+          <p:nvPr/>
+        </p:nvSpPr>
+        <p:spPr>
+          <a:xfrm>
+            <a:off x="457200" y="3483864"/>
+            <a:ext cx="1143000" cy="384048"/>
+          </a:xfrm>
+          <a:prstGeom prst="rect">
+            <a:avLst/>
+          </a:prstGeom>
+          <a:noFill/>
+          <a:ln/>
+        </p:spPr>
+        <p:txBody>
+          <a:bodyPr wrap="square" lIns="0" tIns="0" rIns="0" bIns="0" rtlCol="0" anchor="ctr"/>
+          <a:lstStyle/>
+          <a:p>
+            <a:pPr marL="0" indent="0" algn="ctr">
+              <a:buNone/>
+            </a:pPr>
+            <a:r>
+              <a:rPr lang="en-US" sz="900" b="1" dirty="0">
                 <a:solidFill>
                   <a:srgbClr val="FFFFFF"/>
                 </a:solidFill>
@@ -8891,34 +10070,40 @@
                 <a:ea typeface="Calibri" pitchFamily="34" charset="-122"/>
                 <a:cs typeface="Calibri" pitchFamily="34" charset="-120"/>
               </a:rPr>
-              <a:t>[CI/CD or Pipeline Title]</a:t>
-            </a:r>
-            <a:endParaRPr lang="en-US" sz="1300" dirty="0"/>
-          </a:p>
-        </p:txBody>
-      </p:sp>
-      <p:sp>
-        <p:nvSpPr>
-          <p:cNvPr id="27" name="Shape 21"/>
-          <p:cNvSpPr/>
-          <p:nvPr/>
-        </p:nvSpPr>
-        <p:spPr>
-          <a:xfrm>
-            <a:off x="1280160" y="3730752"/>
-            <a:ext cx="2286000" cy="804672"/>
+              <a:t>React</a:t>
+            </a:r>
+            <a:endParaRPr lang="en-US" sz="900" dirty="0"/>
+          </a:p>
+        </p:txBody>
+      </p:sp>
+      <p:sp>
+        <p:nvSpPr>
+          <p:cNvPr id="39" name="Shape 29">
+            <a:extLst>
+              <a:ext uri="{FF2B5EF4-FFF2-40B4-BE49-F238E27FC236}">
+                <a16:creationId xmlns:a16="http://schemas.microsoft.com/office/drawing/2014/main" id="{25C2880A-063F-0D86-5B8A-86946C98DF53}"/>
+              </a:ext>
+            </a:extLst>
+          </p:cNvPr>
+          <p:cNvSpPr/>
+          <p:nvPr/>
+        </p:nvSpPr>
+        <p:spPr>
+          <a:xfrm>
+            <a:off x="1719072" y="3483864"/>
+            <a:ext cx="1143000" cy="384048"/>
           </a:xfrm>
           <a:prstGeom prst="roundRect">
             <a:avLst>
-              <a:gd name="adj" fmla="val 7955"/>
+              <a:gd name="adj" fmla="val 19048"/>
             </a:avLst>
           </a:prstGeom>
           <a:solidFill>
-            <a:srgbClr val="1E293B"/>
+            <a:srgbClr val="7C3AED"/>
           </a:solidFill>
           <a:ln w="12700">
             <a:solidFill>
-              <a:srgbClr val="334155"/>
+              <a:srgbClr val="7C3AED"/>
             </a:solidFill>
             <a:prstDash val="solid"/>
           </a:ln>
@@ -8927,30 +10112,83 @@
           <a:bodyPr/>
           <a:lstStyle/>
           <a:p>
-            <a:endParaRPr lang="en-US"/>
-          </a:p>
-        </p:txBody>
-      </p:sp>
-      <p:sp>
-        <p:nvSpPr>
-          <p:cNvPr id="28" name="Shape 22"/>
-          <p:cNvSpPr/>
-          <p:nvPr/>
-        </p:nvSpPr>
-        <p:spPr>
-          <a:xfrm>
-            <a:off x="1417320" y="3822192"/>
-            <a:ext cx="201168" cy="201168"/>
-          </a:xfrm>
-          <a:prstGeom prst="ellipse">
-            <a:avLst/>
+            <a:endParaRPr lang="en-US" dirty="0"/>
+          </a:p>
+        </p:txBody>
+      </p:sp>
+      <p:sp>
+        <p:nvSpPr>
+          <p:cNvPr id="40" name="Text 30">
+            <a:extLst>
+              <a:ext uri="{FF2B5EF4-FFF2-40B4-BE49-F238E27FC236}">
+                <a16:creationId xmlns:a16="http://schemas.microsoft.com/office/drawing/2014/main" id="{9F5EE408-164A-6355-041D-E55A0A8D61CD}"/>
+              </a:ext>
+            </a:extLst>
+          </p:cNvPr>
+          <p:cNvSpPr/>
+          <p:nvPr/>
+        </p:nvSpPr>
+        <p:spPr>
+          <a:xfrm>
+            <a:off x="1719072" y="3483864"/>
+            <a:ext cx="1143000" cy="384048"/>
+          </a:xfrm>
+          <a:prstGeom prst="rect">
+            <a:avLst/>
+          </a:prstGeom>
+          <a:noFill/>
+          <a:ln/>
+        </p:spPr>
+        <p:txBody>
+          <a:bodyPr wrap="square" lIns="0" tIns="0" rIns="0" bIns="0" rtlCol="0" anchor="ctr"/>
+          <a:lstStyle/>
+          <a:p>
+            <a:pPr marL="0" indent="0" algn="ctr">
+              <a:buNone/>
+            </a:pPr>
+            <a:r>
+              <a:rPr lang="en-US" sz="900" b="1" dirty="0">
+                <a:solidFill>
+                  <a:srgbClr val="FFFFFF"/>
+                </a:solidFill>
+                <a:latin typeface="Calibri" pitchFamily="34" charset="0"/>
+                <a:ea typeface="Calibri" pitchFamily="34" charset="-122"/>
+                <a:cs typeface="Calibri" pitchFamily="34" charset="-120"/>
+              </a:rPr>
+              <a:t>Django + DRF</a:t>
+            </a:r>
+            <a:endParaRPr lang="en-US" sz="900" dirty="0"/>
+          </a:p>
+        </p:txBody>
+      </p:sp>
+      <p:sp>
+        <p:nvSpPr>
+          <p:cNvPr id="41" name="Shape 31">
+            <a:extLst>
+              <a:ext uri="{FF2B5EF4-FFF2-40B4-BE49-F238E27FC236}">
+                <a16:creationId xmlns:a16="http://schemas.microsoft.com/office/drawing/2014/main" id="{30D6B71B-78DE-DD02-83CC-6B57BE931B88}"/>
+              </a:ext>
+            </a:extLst>
+          </p:cNvPr>
+          <p:cNvSpPr/>
+          <p:nvPr/>
+        </p:nvSpPr>
+        <p:spPr>
+          <a:xfrm>
+            <a:off x="2980944" y="3483864"/>
+            <a:ext cx="1143000" cy="384048"/>
+          </a:xfrm>
+          <a:prstGeom prst="roundRect">
+            <a:avLst>
+              <a:gd name="adj" fmla="val 19048"/>
+            </a:avLst>
           </a:prstGeom>
           <a:solidFill>
-            <a:srgbClr val="3BB77E"/>
+            <a:srgbClr val="F59E0B"/>
           </a:solidFill>
           <a:ln w="12700">
             <a:solidFill>
-              <a:srgbClr val="3BB77E"/>
+              <a:srgbClr val="F59E0B"/>
             </a:solidFill>
             <a:prstDash val="solid"/>
           </a:ln>
@@ -8965,30 +10203,36 @@
       </p:sp>
       <p:sp>
         <p:nvSpPr>
-          <p:cNvPr id="29" name="Text 23"/>
-          <p:cNvSpPr/>
-          <p:nvPr/>
-        </p:nvSpPr>
-        <p:spPr>
-          <a:xfrm>
-            <a:off x="1664208" y="3803904"/>
-            <a:ext cx="1783080" cy="411480"/>
-          </a:xfrm>
-          <a:prstGeom prst="rect">
-            <a:avLst/>
-          </a:prstGeom>
-          <a:noFill/>
-          <a:ln/>
-        </p:spPr>
-        <p:txBody>
-          <a:bodyPr wrap="square" lIns="0" tIns="0" rIns="0" bIns="0" rtlCol="0" anchor="ctr"/>
-          <a:lstStyle/>
-          <a:p>
-            <a:pPr marL="0" indent="0">
-              <a:buNone/>
-            </a:pPr>
-            <a:r>
-              <a:rPr lang="en-US" sz="1000" dirty="0">
+          <p:cNvPr id="42" name="Text 32">
+            <a:extLst>
+              <a:ext uri="{FF2B5EF4-FFF2-40B4-BE49-F238E27FC236}">
+                <a16:creationId xmlns:a16="http://schemas.microsoft.com/office/drawing/2014/main" id="{D22F5ED8-79B6-015F-51FD-0E48C7BDE73A}"/>
+              </a:ext>
+            </a:extLst>
+          </p:cNvPr>
+          <p:cNvSpPr/>
+          <p:nvPr/>
+        </p:nvSpPr>
+        <p:spPr>
+          <a:xfrm>
+            <a:off x="2980944" y="3483864"/>
+            <a:ext cx="1143000" cy="384048"/>
+          </a:xfrm>
+          <a:prstGeom prst="rect">
+            <a:avLst/>
+          </a:prstGeom>
+          <a:noFill/>
+          <a:ln/>
+        </p:spPr>
+        <p:txBody>
+          <a:bodyPr wrap="square" lIns="0" tIns="0" rIns="0" bIns="0" rtlCol="0" anchor="ctr"/>
+          <a:lstStyle/>
+          <a:p>
+            <a:pPr marL="0" indent="0" algn="ctr">
+              <a:buNone/>
+            </a:pPr>
+            <a:r>
+              <a:rPr lang="en-US" sz="900" b="1" dirty="0">
                 <a:solidFill>
                   <a:srgbClr val="FFFFFF"/>
                 </a:solidFill>
@@ -8996,34 +10240,40 @@
                 <a:ea typeface="Calibri" pitchFamily="34" charset="-122"/>
                 <a:cs typeface="Calibri" pitchFamily="34" charset="-120"/>
               </a:rPr>
-              <a:t>[Pipeline Job 1]</a:t>
-            </a:r>
-            <a:endParaRPr lang="en-US" sz="1000" dirty="0"/>
-          </a:p>
-        </p:txBody>
-      </p:sp>
-      <p:sp>
-        <p:nvSpPr>
-          <p:cNvPr id="30" name="Shape 24"/>
-          <p:cNvSpPr/>
-          <p:nvPr/>
-        </p:nvSpPr>
-        <p:spPr>
-          <a:xfrm>
-            <a:off x="3749040" y="3730752"/>
-            <a:ext cx="2286000" cy="804672"/>
+              <a:t>MySQL 8.0</a:t>
+            </a:r>
+            <a:endParaRPr lang="en-US" sz="900" dirty="0"/>
+          </a:p>
+        </p:txBody>
+      </p:sp>
+      <p:sp>
+        <p:nvSpPr>
+          <p:cNvPr id="43" name="Shape 33">
+            <a:extLst>
+              <a:ext uri="{FF2B5EF4-FFF2-40B4-BE49-F238E27FC236}">
+                <a16:creationId xmlns:a16="http://schemas.microsoft.com/office/drawing/2014/main" id="{F45CFDEE-DFB0-CFE2-CDCC-B09F431D0B69}"/>
+              </a:ext>
+            </a:extLst>
+          </p:cNvPr>
+          <p:cNvSpPr/>
+          <p:nvPr/>
+        </p:nvSpPr>
+        <p:spPr>
+          <a:xfrm>
+            <a:off x="4242816" y="3483864"/>
+            <a:ext cx="1143000" cy="384048"/>
           </a:xfrm>
           <a:prstGeom prst="roundRect">
             <a:avLst>
-              <a:gd name="adj" fmla="val 7955"/>
+              <a:gd name="adj" fmla="val 19048"/>
             </a:avLst>
           </a:prstGeom>
           <a:solidFill>
-            <a:srgbClr val="1E293B"/>
+            <a:srgbClr val="10B981"/>
           </a:solidFill>
           <a:ln w="12700">
             <a:solidFill>
-              <a:srgbClr val="334155"/>
+              <a:srgbClr val="10B981"/>
             </a:solidFill>
             <a:prstDash val="solid"/>
           </a:ln>
@@ -9038,24 +10288,77 @@
       </p:sp>
       <p:sp>
         <p:nvSpPr>
-          <p:cNvPr id="31" name="Shape 25"/>
-          <p:cNvSpPr/>
-          <p:nvPr/>
-        </p:nvSpPr>
-        <p:spPr>
-          <a:xfrm>
-            <a:off x="3886200" y="3822192"/>
-            <a:ext cx="201168" cy="201168"/>
-          </a:xfrm>
-          <a:prstGeom prst="ellipse">
-            <a:avLst/>
+          <p:cNvPr id="44" name="Text 34">
+            <a:extLst>
+              <a:ext uri="{FF2B5EF4-FFF2-40B4-BE49-F238E27FC236}">
+                <a16:creationId xmlns:a16="http://schemas.microsoft.com/office/drawing/2014/main" id="{19B1A80C-B7B5-8794-A9B0-044330D1F530}"/>
+              </a:ext>
+            </a:extLst>
+          </p:cNvPr>
+          <p:cNvSpPr/>
+          <p:nvPr/>
+        </p:nvSpPr>
+        <p:spPr>
+          <a:xfrm>
+            <a:off x="4242816" y="3483864"/>
+            <a:ext cx="1143000" cy="384048"/>
+          </a:xfrm>
+          <a:prstGeom prst="rect">
+            <a:avLst/>
+          </a:prstGeom>
+          <a:noFill/>
+          <a:ln/>
+        </p:spPr>
+        <p:txBody>
+          <a:bodyPr wrap="square" lIns="0" tIns="0" rIns="0" bIns="0" rtlCol="0" anchor="ctr"/>
+          <a:lstStyle/>
+          <a:p>
+            <a:pPr marL="0" indent="0" algn="ctr">
+              <a:buNone/>
+            </a:pPr>
+            <a:r>
+              <a:rPr lang="en-US" sz="900" b="1" dirty="0">
+                <a:solidFill>
+                  <a:srgbClr val="FFFFFF"/>
+                </a:solidFill>
+                <a:latin typeface="Calibri" pitchFamily="34" charset="0"/>
+                <a:ea typeface="Calibri" pitchFamily="34" charset="-122"/>
+                <a:cs typeface="Calibri" pitchFamily="34" charset="-120"/>
+              </a:rPr>
+              <a:t>SimpleJWT</a:t>
+            </a:r>
+            <a:endParaRPr lang="en-US" sz="900" dirty="0"/>
+          </a:p>
+        </p:txBody>
+      </p:sp>
+      <p:sp>
+        <p:nvSpPr>
+          <p:cNvPr id="45" name="Shape 35">
+            <a:extLst>
+              <a:ext uri="{FF2B5EF4-FFF2-40B4-BE49-F238E27FC236}">
+                <a16:creationId xmlns:a16="http://schemas.microsoft.com/office/drawing/2014/main" id="{B8AB2B5F-FCFF-D1D1-7C01-277F786E86D0}"/>
+              </a:ext>
+            </a:extLst>
+          </p:cNvPr>
+          <p:cNvSpPr/>
+          <p:nvPr/>
+        </p:nvSpPr>
+        <p:spPr>
+          <a:xfrm>
+            <a:off x="5504688" y="3483864"/>
+            <a:ext cx="1143000" cy="384048"/>
+          </a:xfrm>
+          <a:prstGeom prst="roundRect">
+            <a:avLst>
+              <a:gd name="adj" fmla="val 19048"/>
+            </a:avLst>
           </a:prstGeom>
           <a:solidFill>
-            <a:srgbClr val="3BB77E"/>
+            <a:srgbClr val="EF4444"/>
           </a:solidFill>
           <a:ln w="12700">
             <a:solidFill>
-              <a:srgbClr val="3BB77E"/>
+              <a:srgbClr val="EF4444"/>
             </a:solidFill>
             <a:prstDash val="solid"/>
           </a:ln>
@@ -9070,30 +10373,36 @@
       </p:sp>
       <p:sp>
         <p:nvSpPr>
-          <p:cNvPr id="32" name="Text 26"/>
-          <p:cNvSpPr/>
-          <p:nvPr/>
-        </p:nvSpPr>
-        <p:spPr>
-          <a:xfrm>
-            <a:off x="4133088" y="3803904"/>
-            <a:ext cx="1783080" cy="411480"/>
-          </a:xfrm>
-          <a:prstGeom prst="rect">
-            <a:avLst/>
-          </a:prstGeom>
-          <a:noFill/>
-          <a:ln/>
-        </p:spPr>
-        <p:txBody>
-          <a:bodyPr wrap="square" lIns="0" tIns="0" rIns="0" bIns="0" rtlCol="0" anchor="ctr"/>
-          <a:lstStyle/>
-          <a:p>
-            <a:pPr marL="0" indent="0">
-              <a:buNone/>
-            </a:pPr>
-            <a:r>
-              <a:rPr lang="en-US" sz="1000" dirty="0">
+          <p:cNvPr id="46" name="Text 36">
+            <a:extLst>
+              <a:ext uri="{FF2B5EF4-FFF2-40B4-BE49-F238E27FC236}">
+                <a16:creationId xmlns:a16="http://schemas.microsoft.com/office/drawing/2014/main" id="{F2F0DAB4-C82E-7D4A-520F-84719874E228}"/>
+              </a:ext>
+            </a:extLst>
+          </p:cNvPr>
+          <p:cNvSpPr/>
+          <p:nvPr/>
+        </p:nvSpPr>
+        <p:spPr>
+          <a:xfrm>
+            <a:off x="5504688" y="3483864"/>
+            <a:ext cx="1143000" cy="384048"/>
+          </a:xfrm>
+          <a:prstGeom prst="rect">
+            <a:avLst/>
+          </a:prstGeom>
+          <a:noFill/>
+          <a:ln/>
+        </p:spPr>
+        <p:txBody>
+          <a:bodyPr wrap="square" lIns="0" tIns="0" rIns="0" bIns="0" rtlCol="0" anchor="ctr"/>
+          <a:lstStyle/>
+          <a:p>
+            <a:pPr marL="0" indent="0" algn="ctr">
+              <a:buNone/>
+            </a:pPr>
+            <a:r>
+              <a:rPr lang="en-US" sz="900" b="1" dirty="0">
                 <a:solidFill>
                   <a:srgbClr val="FFFFFF"/>
                 </a:solidFill>
@@ -9101,34 +10410,40 @@
                 <a:ea typeface="Calibri" pitchFamily="34" charset="-122"/>
                 <a:cs typeface="Calibri" pitchFamily="34" charset="-120"/>
               </a:rPr>
-              <a:t>[Pipeline Job 2]</a:t>
-            </a:r>
-            <a:endParaRPr lang="en-US" sz="1000" dirty="0"/>
-          </a:p>
-        </p:txBody>
-      </p:sp>
-      <p:sp>
-        <p:nvSpPr>
-          <p:cNvPr id="33" name="Shape 27"/>
-          <p:cNvSpPr/>
-          <p:nvPr/>
-        </p:nvSpPr>
-        <p:spPr>
-          <a:xfrm>
-            <a:off x="6217920" y="3730752"/>
-            <a:ext cx="2286000" cy="804672"/>
+              <a:t>Robot Framework</a:t>
+            </a:r>
+            <a:endParaRPr lang="en-US" sz="900" dirty="0"/>
+          </a:p>
+        </p:txBody>
+      </p:sp>
+      <p:sp>
+        <p:nvSpPr>
+          <p:cNvPr id="47" name="Shape 37">
+            <a:extLst>
+              <a:ext uri="{FF2B5EF4-FFF2-40B4-BE49-F238E27FC236}">
+                <a16:creationId xmlns:a16="http://schemas.microsoft.com/office/drawing/2014/main" id="{72C2E5DE-9A66-5162-EE5F-69011F9BD37B}"/>
+              </a:ext>
+            </a:extLst>
+          </p:cNvPr>
+          <p:cNvSpPr/>
+          <p:nvPr/>
+        </p:nvSpPr>
+        <p:spPr>
+          <a:xfrm>
+            <a:off x="6766560" y="3483864"/>
+            <a:ext cx="1143000" cy="384048"/>
           </a:xfrm>
           <a:prstGeom prst="roundRect">
             <a:avLst>
-              <a:gd name="adj" fmla="val 7955"/>
+              <a:gd name="adj" fmla="val 19048"/>
             </a:avLst>
           </a:prstGeom>
           <a:solidFill>
-            <a:srgbClr val="1E293B"/>
+            <a:srgbClr val="24292E"/>
           </a:solidFill>
           <a:ln w="12700">
             <a:solidFill>
-              <a:srgbClr val="334155"/>
+              <a:srgbClr val="24292E"/>
             </a:solidFill>
             <a:prstDash val="solid"/>
           </a:ln>
@@ -9143,27 +10458,85 @@
       </p:sp>
       <p:sp>
         <p:nvSpPr>
-          <p:cNvPr id="34" name="Shape 28"/>
-          <p:cNvSpPr/>
-          <p:nvPr/>
-        </p:nvSpPr>
-        <p:spPr>
-          <a:xfrm>
-            <a:off x="6355080" y="3822192"/>
-            <a:ext cx="201168" cy="201168"/>
-          </a:xfrm>
-          <a:prstGeom prst="ellipse">
+          <p:cNvPr id="48" name="Text 38">
+            <a:extLst>
+              <a:ext uri="{FF2B5EF4-FFF2-40B4-BE49-F238E27FC236}">
+                <a16:creationId xmlns:a16="http://schemas.microsoft.com/office/drawing/2014/main" id="{1BE0EB02-E007-CF5A-01E8-7F3444348EBE}"/>
+              </a:ext>
+            </a:extLst>
+          </p:cNvPr>
+          <p:cNvSpPr/>
+          <p:nvPr/>
+        </p:nvSpPr>
+        <p:spPr>
+          <a:xfrm>
+            <a:off x="6766560" y="3483864"/>
+            <a:ext cx="1143000" cy="384048"/>
+          </a:xfrm>
+          <a:prstGeom prst="rect">
+            <a:avLst/>
+          </a:prstGeom>
+          <a:noFill/>
+          <a:ln/>
+        </p:spPr>
+        <p:txBody>
+          <a:bodyPr wrap="square" lIns="0" tIns="0" rIns="0" bIns="0" rtlCol="0" anchor="ctr"/>
+          <a:lstStyle/>
+          <a:p>
+            <a:pPr marL="0" indent="0" algn="ctr">
+              <a:buNone/>
+            </a:pPr>
+            <a:r>
+              <a:rPr lang="en-US" sz="900" b="1" dirty="0">
+                <a:solidFill>
+                  <a:srgbClr val="FFFFFF"/>
+                </a:solidFill>
+                <a:latin typeface="Calibri" pitchFamily="34" charset="0"/>
+                <a:ea typeface="Calibri" pitchFamily="34" charset="-122"/>
+                <a:cs typeface="Calibri" pitchFamily="34" charset="-120"/>
+              </a:rPr>
+              <a:t>GitHub Actions</a:t>
+            </a:r>
+            <a:endParaRPr lang="en-US" sz="900" dirty="0"/>
+          </a:p>
+        </p:txBody>
+      </p:sp>
+      <p:sp>
+        <p:nvSpPr>
+          <p:cNvPr id="49" name="Shape 41">
+            <a:extLst>
+              <a:ext uri="{FF2B5EF4-FFF2-40B4-BE49-F238E27FC236}">
+                <a16:creationId xmlns:a16="http://schemas.microsoft.com/office/drawing/2014/main" id="{1F15D080-B377-3559-924F-7CCA873EE402}"/>
+              </a:ext>
+            </a:extLst>
+          </p:cNvPr>
+          <p:cNvSpPr/>
+          <p:nvPr/>
+        </p:nvSpPr>
+        <p:spPr>
+          <a:xfrm>
+            <a:off x="457200" y="3986784"/>
+            <a:ext cx="8412480" cy="822960"/>
+          </a:xfrm>
+          <a:prstGeom prst="rect">
             <a:avLst/>
           </a:prstGeom>
           <a:solidFill>
-            <a:srgbClr val="3BB77E"/>
+            <a:srgbClr val="EFF6FF"/>
           </a:solidFill>
           <a:ln w="12700">
             <a:solidFill>
-              <a:srgbClr val="3BB77E"/>
+              <a:srgbClr val="BFDBFE"/>
             </a:solidFill>
             <a:prstDash val="solid"/>
           </a:ln>
+          <a:effectLst>
+            <a:outerShdw blurRad="101600" dist="25400" dir="8100000" algn="bl" rotWithShape="0">
+              <a:srgbClr val="000000">
+                <a:alpha val="7000"/>
+              </a:srgbClr>
+            </a:outerShdw>
+          </a:effectLst>
         </p:spPr>
         <p:txBody>
           <a:bodyPr/>
@@ -9175,14 +10548,20 @@
       </p:sp>
       <p:sp>
         <p:nvSpPr>
-          <p:cNvPr id="35" name="Text 29"/>
-          <p:cNvSpPr/>
-          <p:nvPr/>
-        </p:nvSpPr>
-        <p:spPr>
-          <a:xfrm>
-            <a:off x="6601968" y="3803904"/>
-            <a:ext cx="1783080" cy="411480"/>
+          <p:cNvPr id="50" name="Text 42">
+            <a:extLst>
+              <a:ext uri="{FF2B5EF4-FFF2-40B4-BE49-F238E27FC236}">
+                <a16:creationId xmlns:a16="http://schemas.microsoft.com/office/drawing/2014/main" id="{B9FE8C25-4D56-BF65-B8EA-3B4E7BFACE55}"/>
+              </a:ext>
+            </a:extLst>
+          </p:cNvPr>
+          <p:cNvSpPr/>
+          <p:nvPr/>
+        </p:nvSpPr>
+        <p:spPr>
+          <a:xfrm>
+            <a:off x="685800" y="4096512"/>
+            <a:ext cx="2011680" cy="274320"/>
           </a:xfrm>
           <a:prstGeom prst="rect">
             <a:avLst/>
@@ -9198,15 +10577,60 @@
               <a:buNone/>
             </a:pPr>
             <a:r>
+              <a:rPr lang="en-US" sz="1100" b="1" dirty="0">
+                <a:solidFill>
+                  <a:srgbClr val="1B2B5E"/>
+                </a:solidFill>
+                <a:latin typeface="Calibri" pitchFamily="34" charset="0"/>
+                <a:ea typeface="Calibri" pitchFamily="34" charset="-122"/>
+                <a:cs typeface="Calibri" pitchFamily="34" charset="-120"/>
+              </a:rPr>
+              <a:t>[Placeholder]:</a:t>
+            </a:r>
+            <a:endParaRPr lang="en-US" sz="1100" dirty="0"/>
+          </a:p>
+        </p:txBody>
+      </p:sp>
+      <p:sp>
+        <p:nvSpPr>
+          <p:cNvPr id="51" name="Text 43">
+            <a:extLst>
+              <a:ext uri="{FF2B5EF4-FFF2-40B4-BE49-F238E27FC236}">
+                <a16:creationId xmlns:a16="http://schemas.microsoft.com/office/drawing/2014/main" id="{EC877A60-9AFB-EB56-4D7E-46673F6808BB}"/>
+              </a:ext>
+            </a:extLst>
+          </p:cNvPr>
+          <p:cNvSpPr/>
+          <p:nvPr/>
+        </p:nvSpPr>
+        <p:spPr>
+          <a:xfrm>
+            <a:off x="2697480" y="4096512"/>
+            <a:ext cx="5943600" cy="457200"/>
+          </a:xfrm>
+          <a:prstGeom prst="rect">
+            <a:avLst/>
+          </a:prstGeom>
+          <a:noFill/>
+          <a:ln/>
+        </p:spPr>
+        <p:txBody>
+          <a:bodyPr wrap="square" lIns="0" tIns="0" rIns="0" bIns="0" rtlCol="0" anchor="ctr"/>
+          <a:lstStyle/>
+          <a:p>
+            <a:pPr marL="0" indent="0">
+              <a:buNone/>
+            </a:pPr>
+            <a:r>
               <a:rPr lang="en-US" sz="1000" dirty="0">
                 <a:solidFill>
-                  <a:srgbClr val="FFFFFF"/>
-                </a:solidFill>
-                <a:latin typeface="Calibri" pitchFamily="34" charset="0"/>
-                <a:ea typeface="Calibri" pitchFamily="34" charset="-122"/>
-                <a:cs typeface="Calibri" pitchFamily="34" charset="-120"/>
-              </a:rPr>
-              <a:t>[Pipeline Job 3]</a:t>
+                  <a:srgbClr val="374151"/>
+                </a:solidFill>
+                <a:latin typeface="Calibri" pitchFamily="34" charset="0"/>
+                <a:ea typeface="Calibri" pitchFamily="34" charset="-122"/>
+                <a:cs typeface="Calibri" pitchFamily="34" charset="-120"/>
+              </a:rPr>
+              <a:t>Content is available here.</a:t>
             </a:r>
             <a:endParaRPr lang="en-US" sz="1000" dirty="0"/>
           </a:p>
@@ -9317,7 +10741,7 @@
                 <a:ea typeface="Calibri" pitchFamily="34" charset="-122"/>
                 <a:cs typeface="Calibri" pitchFamily="34" charset="-120"/>
               </a:rPr>
-              <a:t>[Slide Title — e.g. What [Project Name] Delivers]</a:t>
+              <a:t>What Orderly Delivers</a:t>
             </a:r>
             <a:endParaRPr lang="en-US" sz="3200" dirty="0"/>
           </a:p>
@@ -9358,7 +10782,7 @@
           <a:bodyPr/>
           <a:lstStyle/>
           <a:p>
-            <a:endParaRPr lang="en-US"/>
+            <a:endParaRPr lang="en-US" dirty="0"/>
           </a:p>
         </p:txBody>
       </p:sp>
@@ -9451,7 +10875,7 @@
                 <a:ea typeface="Calibri" pitchFamily="34" charset="-122"/>
                 <a:cs typeface="Calibri" pitchFamily="34" charset="-120"/>
               </a:rPr>
-              <a:t>[Feature 1]</a:t>
+              <a:t>Customer Ordering</a:t>
             </a:r>
             <a:endParaRPr lang="en-US" sz="1100" dirty="0"/>
           </a:p>
@@ -9487,10 +10911,9 @@
                   <a:srgbClr val="3BB77E"/>
                 </a:solidFill>
                 <a:latin typeface="Calibri" pitchFamily="34" charset="0"/>
-                <a:ea typeface="Calibri" pitchFamily="34" charset="-122"/>
-                <a:cs typeface="Calibri" pitchFamily="34" charset="-120"/>
-              </a:rPr>
-              <a:t>Owner: [Owner]</a:t>
+                <a:cs typeface="Calibri" pitchFamily="34" charset="-120"/>
+              </a:rPr>
+              <a:t>Orders placed in seconds</a:t>
             </a:r>
             <a:endParaRPr lang="en-US" sz="800" dirty="0"/>
           </a:p>
@@ -9529,7 +10952,7 @@
                 <a:ea typeface="Calibri" pitchFamily="34" charset="-122"/>
                 <a:cs typeface="Calibri" pitchFamily="34" charset="-120"/>
               </a:rPr>
-              <a:t>[Point A]  ·  [Point B]  ·  [Point C]</a:t>
+              <a:t>Self-service menu browsing  ·  Customize, Place &amp; cancel orders  ·  Real-time Order Status</a:t>
             </a:r>
             <a:endParaRPr lang="en-US" sz="900" dirty="0"/>
           </a:p>
@@ -9663,7 +11086,7 @@
                 <a:ea typeface="Calibri" pitchFamily="34" charset="-122"/>
                 <a:cs typeface="Calibri" pitchFamily="34" charset="-120"/>
               </a:rPr>
-              <a:t>[Feature 2]</a:t>
+              <a:t>Admin Dashboard</a:t>
             </a:r>
             <a:endParaRPr lang="en-US" sz="1100" dirty="0"/>
           </a:p>
@@ -9690,19 +11113,15 @@
           <a:bodyPr wrap="square" lIns="0" tIns="0" rIns="0" bIns="0" rtlCol="0" anchor="ctr"/>
           <a:lstStyle/>
           <a:p>
-            <a:pPr marL="0" indent="0">
-              <a:buNone/>
-            </a:pPr>
             <a:r>
               <a:rPr lang="en-US" sz="800" b="1" dirty="0">
                 <a:solidFill>
                   <a:srgbClr val="3BB77E"/>
                 </a:solidFill>
                 <a:latin typeface="Calibri" pitchFamily="34" charset="0"/>
-                <a:ea typeface="Calibri" pitchFamily="34" charset="-122"/>
-                <a:cs typeface="Calibri" pitchFamily="34" charset="-120"/>
-              </a:rPr>
-              <a:t>Owner: [Owner]</a:t>
+                <a:cs typeface="Calibri" pitchFamily="34" charset="-120"/>
+              </a:rPr>
+              <a:t>One hub for everything</a:t>
             </a:r>
             <a:endParaRPr lang="en-US" sz="800" dirty="0"/>
           </a:p>
@@ -9741,7 +11160,7 @@
                 <a:ea typeface="Calibri" pitchFamily="34" charset="-122"/>
                 <a:cs typeface="Calibri" pitchFamily="34" charset="-120"/>
               </a:rPr>
-              <a:t>[Point A]  ·  [Point B]  ·  [Point C]</a:t>
+              <a:t>Unified overview  ·  Quick access navigation  ·  Role-based Views</a:t>
             </a:r>
             <a:endParaRPr lang="en-US" sz="900" dirty="0"/>
           </a:p>
@@ -9875,7 +11294,7 @@
                 <a:ea typeface="Calibri" pitchFamily="34" charset="-122"/>
                 <a:cs typeface="Calibri" pitchFamily="34" charset="-120"/>
               </a:rPr>
-              <a:t>[Feature 3]</a:t>
+              <a:t>Product &amp; Inventory</a:t>
             </a:r>
             <a:endParaRPr lang="en-US" sz="1100" dirty="0"/>
           </a:p>
@@ -9902,19 +11321,15 @@
           <a:bodyPr wrap="square" lIns="0" tIns="0" rIns="0" bIns="0" rtlCol="0" anchor="ctr"/>
           <a:lstStyle/>
           <a:p>
-            <a:pPr marL="0" indent="0">
-              <a:buNone/>
-            </a:pPr>
             <a:r>
               <a:rPr lang="en-US" sz="800" b="1" dirty="0">
                 <a:solidFill>
                   <a:srgbClr val="3BB77E"/>
                 </a:solidFill>
                 <a:latin typeface="Calibri" pitchFamily="34" charset="0"/>
-                <a:ea typeface="Calibri" pitchFamily="34" charset="-122"/>
-                <a:cs typeface="Calibri" pitchFamily="34" charset="-120"/>
-              </a:rPr>
-              <a:t>Owner: [Owner]</a:t>
+                <a:cs typeface="Calibri" pitchFamily="34" charset="-120"/>
+              </a:rPr>
+              <a:t>Full control, no guesswork</a:t>
             </a:r>
             <a:endParaRPr lang="en-US" sz="800" dirty="0"/>
           </a:p>
@@ -9953,7 +11368,7 @@
                 <a:ea typeface="Calibri" pitchFamily="34" charset="-122"/>
                 <a:cs typeface="Calibri" pitchFamily="34" charset="-120"/>
               </a:rPr>
-              <a:t>[Point A]  ·  [Point B]  ·  [Point C]</a:t>
+              <a:t>Full CRUD management ·  Stock alerts  ·  Category Organization</a:t>
             </a:r>
             <a:endParaRPr lang="en-US" sz="900" dirty="0"/>
           </a:p>
@@ -10087,7 +11502,7 @@
                 <a:ea typeface="Calibri" pitchFamily="34" charset="-122"/>
                 <a:cs typeface="Calibri" pitchFamily="34" charset="-120"/>
               </a:rPr>
-              <a:t>[Feature 4]</a:t>
+              <a:t>Sales Summary</a:t>
             </a:r>
             <a:endParaRPr lang="en-US" sz="1100" dirty="0"/>
           </a:p>
@@ -10114,19 +11529,15 @@
           <a:bodyPr wrap="square" lIns="0" tIns="0" rIns="0" bIns="0" rtlCol="0" anchor="ctr"/>
           <a:lstStyle/>
           <a:p>
-            <a:pPr marL="0" indent="0">
-              <a:buNone/>
-            </a:pPr>
             <a:r>
               <a:rPr lang="en-US" sz="800" b="1" dirty="0">
                 <a:solidFill>
                   <a:srgbClr val="3BB77E"/>
                 </a:solidFill>
                 <a:latin typeface="Calibri" pitchFamily="34" charset="0"/>
-                <a:ea typeface="Calibri" pitchFamily="34" charset="-122"/>
-                <a:cs typeface="Calibri" pitchFamily="34" charset="-120"/>
-              </a:rPr>
-              <a:t>Owner: [Owner]</a:t>
+                <a:cs typeface="Calibri" pitchFamily="34" charset="-120"/>
+              </a:rPr>
+              <a:t>Revenue clarity &amp; Best Sellers at a glance</a:t>
             </a:r>
             <a:endParaRPr lang="en-US" sz="800" dirty="0"/>
           </a:p>
@@ -10165,7 +11576,7 @@
                 <a:ea typeface="Calibri" pitchFamily="34" charset="-122"/>
                 <a:cs typeface="Calibri" pitchFamily="34" charset="-120"/>
               </a:rPr>
-              <a:t>[Point A]  ·  [Point B]  ·  [Point C]</a:t>
+              <a:t>Revenue Trends ·  Order volume analytics  ·  Date range filtering</a:t>
             </a:r>
             <a:endParaRPr lang="en-US" sz="900" dirty="0"/>
           </a:p>
@@ -10299,7 +11710,7 @@
                 <a:ea typeface="Calibri" pitchFamily="34" charset="-122"/>
                 <a:cs typeface="Calibri" pitchFamily="34" charset="-120"/>
               </a:rPr>
-              <a:t>[Feature 5]</a:t>
+              <a:t>Admin Order Management</a:t>
             </a:r>
             <a:endParaRPr lang="en-US" sz="1100" dirty="0"/>
           </a:p>
@@ -10326,19 +11737,15 @@
           <a:bodyPr wrap="square" lIns="0" tIns="0" rIns="0" bIns="0" rtlCol="0" anchor="ctr"/>
           <a:lstStyle/>
           <a:p>
-            <a:pPr marL="0" indent="0">
-              <a:buNone/>
-            </a:pPr>
             <a:r>
               <a:rPr lang="en-US" sz="800" b="1" dirty="0">
                 <a:solidFill>
                   <a:srgbClr val="3BB77E"/>
                 </a:solidFill>
                 <a:latin typeface="Calibri" pitchFamily="34" charset="0"/>
-                <a:ea typeface="Calibri" pitchFamily="34" charset="-122"/>
-                <a:cs typeface="Calibri" pitchFamily="34" charset="-120"/>
-              </a:rPr>
-              <a:t>Owner: [Owner]</a:t>
+                <a:cs typeface="Calibri" pitchFamily="34" charset="-120"/>
+              </a:rPr>
+              <a:t>Nothing falls through the cracks</a:t>
             </a:r>
             <a:endParaRPr lang="en-US" sz="800" dirty="0"/>
           </a:p>
@@ -10377,7 +11784,7 @@
                 <a:ea typeface="Calibri" pitchFamily="34" charset="-122"/>
                 <a:cs typeface="Calibri" pitchFamily="34" charset="-120"/>
               </a:rPr>
-              <a:t>[Point A]  ·  [Point B]  ·  [Point C]</a:t>
+              <a:t>Full order history ·  Status management  ·  Customer detail view</a:t>
             </a:r>
             <a:endParaRPr lang="en-US" sz="900" dirty="0"/>
           </a:p>
@@ -10511,7 +11918,7 @@
                 <a:ea typeface="Calibri" pitchFamily="34" charset="-122"/>
                 <a:cs typeface="Calibri" pitchFamily="34" charset="-120"/>
               </a:rPr>
-              <a:t>[Feature 6]</a:t>
+              <a:t>Settings</a:t>
             </a:r>
             <a:endParaRPr lang="en-US" sz="1100" dirty="0"/>
           </a:p>
@@ -10538,19 +11945,15 @@
           <a:bodyPr wrap="square" lIns="0" tIns="0" rIns="0" bIns="0" rtlCol="0" anchor="ctr"/>
           <a:lstStyle/>
           <a:p>
-            <a:pPr marL="0" indent="0">
-              <a:buNone/>
-            </a:pPr>
             <a:r>
               <a:rPr lang="en-US" sz="800" b="1" dirty="0">
                 <a:solidFill>
                   <a:srgbClr val="3BB77E"/>
                 </a:solidFill>
                 <a:latin typeface="Calibri" pitchFamily="34" charset="0"/>
-                <a:ea typeface="Calibri" pitchFamily="34" charset="-122"/>
-                <a:cs typeface="Calibri" pitchFamily="34" charset="-120"/>
-              </a:rPr>
-              <a:t>Owner: [Owner]</a:t>
+                <a:cs typeface="Calibri" pitchFamily="34" charset="-120"/>
+              </a:rPr>
+              <a:t>Your business, your settings</a:t>
             </a:r>
             <a:endParaRPr lang="en-US" sz="800" dirty="0"/>
           </a:p>
@@ -10589,7 +11992,7 @@
                 <a:ea typeface="Calibri" pitchFamily="34" charset="-122"/>
                 <a:cs typeface="Calibri" pitchFamily="34" charset="-120"/>
               </a:rPr>
-              <a:t>[Point A]  ·  [Point B]  ·  [Point C]</a:t>
+              <a:t>Customer &amp; Business Profile Config ·  Preference Management  ·  Secure Updates</a:t>
             </a:r>
             <a:endParaRPr lang="en-US" sz="900" dirty="0"/>
           </a:p>
@@ -10700,7 +12103,7 @@
                 <a:ea typeface="Calibri" pitchFamily="34" charset="-122"/>
                 <a:cs typeface="Calibri" pitchFamily="34" charset="-120"/>
               </a:rPr>
-              <a:t>[Slide Title — e.g. What We're Proud Of]</a:t>
+              <a:t>What We're Proud Of</a:t>
             </a:r>
             <a:endParaRPr lang="en-US" sz="3200" dirty="0"/>
           </a:p>
@@ -10802,7 +12205,7 @@
                 <a:ea typeface="Calibri" pitchFamily="34" charset="-122"/>
                 <a:cs typeface="Calibri" pitchFamily="34" charset="-120"/>
               </a:rPr>
-              <a:t>[Highlight 1 Title]</a:t>
+              <a:t>API Contract discipline</a:t>
             </a:r>
             <a:endParaRPr lang="en-US" sz="1200" dirty="0"/>
           </a:p>
@@ -10838,10 +12241,9 @@
                   <a:srgbClr val="6B7280"/>
                 </a:solidFill>
                 <a:latin typeface="Calibri" pitchFamily="34" charset="0"/>
-                <a:ea typeface="Calibri" pitchFamily="34" charset="-122"/>
-                <a:cs typeface="Calibri" pitchFamily="34" charset="-120"/>
-              </a:rPr>
-              <a:t>[One to two sentences describing this highlight. What did you do and why does it matter?]</a:t>
+                <a:cs typeface="Calibri" pitchFamily="34" charset="-120"/>
+              </a:rPr>
+              <a:t>Tristin owned and maintained a living API contract throughout the project. Every endpoint wad documented and kept both frontend and backend in syn across all five sprints.</a:t>
             </a:r>
             <a:endParaRPr lang="en-US" sz="950" dirty="0"/>
           </a:p>
@@ -10940,10 +12342,9 @@
                   <a:srgbClr val="1B2B5E"/>
                 </a:solidFill>
                 <a:latin typeface="Calibri" pitchFamily="34" charset="0"/>
-                <a:ea typeface="Calibri" pitchFamily="34" charset="-122"/>
-                <a:cs typeface="Calibri" pitchFamily="34" charset="-120"/>
-              </a:rPr>
-              <a:t>[Highlight 2 Title]</a:t>
+                <a:cs typeface="Calibri" pitchFamily="34" charset="-120"/>
+              </a:rPr>
+              <a:t>Contribution Standards</a:t>
             </a:r>
             <a:endParaRPr lang="en-US" sz="1200" dirty="0"/>
           </a:p>
@@ -10958,7 +12359,7 @@
         <p:spPr>
           <a:xfrm>
             <a:off x="5321808" y="1810512"/>
-            <a:ext cx="3246120" cy="548640"/>
+            <a:ext cx="3291840" cy="548640"/>
           </a:xfrm>
           <a:prstGeom prst="rect">
             <a:avLst/>
@@ -10979,10 +12380,9 @@
                   <a:srgbClr val="6B7280"/>
                 </a:solidFill>
                 <a:latin typeface="Calibri" pitchFamily="34" charset="0"/>
-                <a:ea typeface="Calibri" pitchFamily="34" charset="-122"/>
-                <a:cs typeface="Calibri" pitchFamily="34" charset="-120"/>
-              </a:rPr>
-              <a:t>[One to two sentences describing this highlight. What did you do and why does it matter?]</a:t>
+                <a:cs typeface="Calibri" pitchFamily="34" charset="-120"/>
+              </a:rPr>
+              <a:t>From Sprint 1, the team operated with a defined branching strategy, PR checklist, and code review standards. No code merged to main without a completed review and testing, every sprint.</a:t>
             </a:r>
             <a:endParaRPr lang="en-US" sz="950" dirty="0"/>
           </a:p>
@@ -11084,7 +12484,7 @@
                 <a:ea typeface="Calibri" pitchFamily="34" charset="-122"/>
                 <a:cs typeface="Calibri" pitchFamily="34" charset="-120"/>
               </a:rPr>
-              <a:t>[Highlight 3 Title]</a:t>
+              <a:t>Team Support</a:t>
             </a:r>
             <a:endParaRPr lang="en-US" sz="1200" dirty="0"/>
           </a:p>
@@ -11123,7 +12523,7 @@
                 <a:ea typeface="Calibri" pitchFamily="34" charset="-122"/>
                 <a:cs typeface="Calibri" pitchFamily="34" charset="-120"/>
               </a:rPr>
-              <a:t>[One to two sentences describing this highlight. What did you do and why does it matter?]</a:t>
+              <a:t>When team members needed to step back, support was without hesitation. Ownership shifted seamlessly and the team finished stronger than it started. We all agree -- we were lucky to be our team.</a:t>
             </a:r>
             <a:endParaRPr lang="en-US" sz="950" dirty="0"/>
           </a:p>
@@ -11225,7 +12625,7 @@
                 <a:ea typeface="Calibri" pitchFamily="34" charset="-122"/>
                 <a:cs typeface="Calibri" pitchFamily="34" charset="-120"/>
               </a:rPr>
-              <a:t>[Highlight 4 Title]</a:t>
+              <a:t>Testing and CI Integration</a:t>
             </a:r>
             <a:endParaRPr lang="en-US" sz="1200" dirty="0"/>
           </a:p>
@@ -11366,7 +12766,7 @@
                 <a:ea typeface="Calibri" pitchFamily="34" charset="-122"/>
                 <a:cs typeface="Calibri" pitchFamily="34" charset="-120"/>
               </a:rPr>
-              <a:t>[Highlight 5 Title]</a:t>
+              <a:t>Placeholder</a:t>
             </a:r>
             <a:endParaRPr lang="en-US" sz="1200" dirty="0"/>
           </a:p>
@@ -11393,9 +12793,6 @@
           <a:bodyPr wrap="square" lIns="0" tIns="0" rIns="0" bIns="0" rtlCol="0" anchor="ctr"/>
           <a:lstStyle/>
           <a:p>
-            <a:pPr marL="0" indent="0">
-              <a:buNone/>
-            </a:pPr>
             <a:r>
               <a:rPr lang="en-US" sz="950" dirty="0">
                 <a:solidFill>
@@ -11405,7 +12802,7 @@
                 <a:ea typeface="Calibri" pitchFamily="34" charset="-122"/>
                 <a:cs typeface="Calibri" pitchFamily="34" charset="-120"/>
               </a:rPr>
-              <a:t>[One to two sentences describing this highlight. What did you do and why does it matter?]</a:t>
+              <a:t>[One to two sentences describing this highlight. What did you do and why does it?]</a:t>
             </a:r>
             <a:endParaRPr lang="en-US" sz="950" dirty="0"/>
           </a:p>
@@ -11507,7 +12904,7 @@
                 <a:ea typeface="Calibri" pitchFamily="34" charset="-122"/>
                 <a:cs typeface="Calibri" pitchFamily="34" charset="-120"/>
               </a:rPr>
-              <a:t>[Highlight 6 Title]</a:t>
+              <a:t>5 Sprint Reviews and Retrospectives</a:t>
             </a:r>
             <a:endParaRPr lang="en-US" sz="1200" dirty="0"/>
           </a:p>
@@ -11546,7 +12943,7 @@
                 <a:ea typeface="Calibri" pitchFamily="34" charset="-122"/>
                 <a:cs typeface="Calibri" pitchFamily="34" charset="-120"/>
               </a:rPr>
-              <a:t>[One to two sentences describing this highlight. What did you do and why does it matter?]</a:t>
+              <a:t>Every sprint closed with a formal review and retrospective. Process improvements were documented and actioned, not just noted, across all Sprints.</a:t>
             </a:r>
             <a:endParaRPr lang="en-US" sz="950" dirty="0"/>
           </a:p>
@@ -11657,7 +13054,7 @@
                 <a:ea typeface="Calibri" pitchFamily="34" charset="-122"/>
                 <a:cs typeface="Calibri" pitchFamily="34" charset="-120"/>
               </a:rPr>
-              <a:t>[Slide Title — e.g. Our QA Strategy]</a:t>
+              <a:t>Our QA Strategy</a:t>
             </a:r>
             <a:endParaRPr lang="en-US" sz="3200" dirty="0"/>
           </a:p>
@@ -11691,7 +13088,7 @@
           <a:bodyPr/>
           <a:lstStyle/>
           <a:p>
-            <a:endParaRPr lang="en-US"/>
+            <a:endParaRPr lang="en-US" dirty="0"/>
           </a:p>
         </p:txBody>
       </p:sp>
@@ -11749,10 +13146,9 @@
                   <a:srgbClr val="FFFFFF"/>
                 </a:solidFill>
                 <a:latin typeface="Calibri" pitchFamily="34" charset="0"/>
-                <a:ea typeface="Calibri" pitchFamily="34" charset="-122"/>
-                <a:cs typeface="Calibri" pitchFamily="34" charset="-120"/>
-              </a:rPr>
-              <a:t>[Test Type 1]</a:t>
+                <a:cs typeface="Calibri" pitchFamily="34" charset="-120"/>
+              </a:rPr>
+              <a:t>Unit Testing</a:t>
             </a:r>
             <a:endParaRPr lang="en-US" sz="1400" dirty="0"/>
           </a:p>
@@ -11830,7 +13226,7 @@
                 <a:ea typeface="Calibri" pitchFamily="34" charset="-122"/>
                 <a:cs typeface="Calibri" pitchFamily="34" charset="-120"/>
               </a:rPr>
-              <a:t>Tool: [Tool name]</a:t>
+              <a:t>Tool: PyTest</a:t>
             </a:r>
             <a:endParaRPr lang="en-US" sz="1000" dirty="0"/>
           </a:p>
@@ -11869,7 +13265,7 @@
                 <a:ea typeface="Calibri" pitchFamily="34" charset="-122"/>
                 <a:cs typeface="Calibri" pitchFamily="34" charset="-120"/>
               </a:rPr>
-              <a:t>[Test detail A]</a:t>
+              <a:t>Django model &amp; View tests</a:t>
             </a:r>
             <a:endParaRPr lang="en-US" sz="1000" dirty="0"/>
           </a:p>
@@ -11883,10 +13279,9 @@
                   <a:srgbClr val="374151"/>
                 </a:solidFill>
                 <a:latin typeface="Calibri" pitchFamily="34" charset="0"/>
-                <a:ea typeface="Calibri" pitchFamily="34" charset="-122"/>
-                <a:cs typeface="Calibri" pitchFamily="34" charset="-120"/>
-              </a:rPr>
-              <a:t>[Test detail B]</a:t>
+                <a:cs typeface="Calibri" pitchFamily="34" charset="-120"/>
+              </a:rPr>
+              <a:t>Isolated backend logic</a:t>
             </a:r>
             <a:endParaRPr lang="en-US" sz="1000" dirty="0"/>
           </a:p>
@@ -11900,10 +13295,9 @@
                   <a:srgbClr val="374151"/>
                 </a:solidFill>
                 <a:latin typeface="Calibri" pitchFamily="34" charset="0"/>
-                <a:ea typeface="Calibri" pitchFamily="34" charset="-122"/>
-                <a:cs typeface="Calibri" pitchFamily="34" charset="-120"/>
-              </a:rPr>
-              <a:t>[Test detail C]</a:t>
+                <a:cs typeface="Calibri" pitchFamily="34" charset="-120"/>
+              </a:rPr>
+              <a:t>Run on every PR via CI</a:t>
             </a:r>
             <a:endParaRPr lang="en-US" sz="1000" dirty="0"/>
           </a:p>
@@ -11998,7 +13392,7 @@
                 <a:ea typeface="Calibri" pitchFamily="34" charset="-122"/>
                 <a:cs typeface="Calibri" pitchFamily="34" charset="-120"/>
               </a:rPr>
-              <a:t>[Test Type 2]</a:t>
+              <a:t>Integration Testing</a:t>
             </a:r>
             <a:endParaRPr lang="en-US" sz="1400" dirty="0"/>
           </a:p>
@@ -12076,7 +13470,7 @@
                 <a:ea typeface="Calibri" pitchFamily="34" charset="-122"/>
                 <a:cs typeface="Calibri" pitchFamily="34" charset="-120"/>
               </a:rPr>
-              <a:t>Tool: [Tool name]</a:t>
+              <a:t>Tool: PyTest + DRF</a:t>
             </a:r>
             <a:endParaRPr lang="en-US" sz="1000" dirty="0"/>
           </a:p>
@@ -12115,7 +13509,7 @@
                 <a:ea typeface="Calibri" pitchFamily="34" charset="-122"/>
                 <a:cs typeface="Calibri" pitchFamily="34" charset="-120"/>
               </a:rPr>
-              <a:t>[Test detail A]</a:t>
+              <a:t>API endpoint validation</a:t>
             </a:r>
             <a:endParaRPr lang="en-US" sz="1000" dirty="0"/>
           </a:p>
@@ -12129,10 +13523,9 @@
                   <a:srgbClr val="374151"/>
                 </a:solidFill>
                 <a:latin typeface="Calibri" pitchFamily="34" charset="0"/>
-                <a:ea typeface="Calibri" pitchFamily="34" charset="-122"/>
-                <a:cs typeface="Calibri" pitchFamily="34" charset="-120"/>
-              </a:rPr>
-              <a:t>[Test detail B]</a:t>
+                <a:cs typeface="Calibri" pitchFamily="34" charset="-120"/>
+              </a:rPr>
+              <a:t>Auth &amp; Permission checks</a:t>
             </a:r>
             <a:endParaRPr lang="en-US" sz="1000" dirty="0"/>
           </a:p>
@@ -12146,10 +13539,9 @@
                   <a:srgbClr val="374151"/>
                 </a:solidFill>
                 <a:latin typeface="Calibri" pitchFamily="34" charset="0"/>
-                <a:ea typeface="Calibri" pitchFamily="34" charset="-122"/>
-                <a:cs typeface="Calibri" pitchFamily="34" charset="-120"/>
-              </a:rPr>
-              <a:t>[Test detail C]</a:t>
+                <a:cs typeface="Calibri" pitchFamily="34" charset="-120"/>
+              </a:rPr>
+              <a:t>Postman pre-merge verification</a:t>
             </a:r>
             <a:endParaRPr lang="en-US" sz="1000" dirty="0"/>
           </a:p>
@@ -12244,7 +13636,7 @@
                 <a:ea typeface="Calibri" pitchFamily="34" charset="-122"/>
                 <a:cs typeface="Calibri" pitchFamily="34" charset="-120"/>
               </a:rPr>
-              <a:t>[Test Type 3]</a:t>
+              <a:t>E2E Testing</a:t>
             </a:r>
             <a:endParaRPr lang="en-US" sz="1400" dirty="0"/>
           </a:p>
@@ -12322,7 +13714,7 @@
                 <a:ea typeface="Calibri" pitchFamily="34" charset="-122"/>
                 <a:cs typeface="Calibri" pitchFamily="34" charset="-120"/>
               </a:rPr>
-              <a:t>Tool: [Tool name]</a:t>
+              <a:t>Tool: Robot Framework + Selenium</a:t>
             </a:r>
             <a:endParaRPr lang="en-US" sz="1000" dirty="0"/>
           </a:p>
@@ -12361,7 +13753,7 @@
                 <a:ea typeface="Calibri" pitchFamily="34" charset="-122"/>
                 <a:cs typeface="Calibri" pitchFamily="34" charset="-120"/>
               </a:rPr>
-              <a:t>[Test detail A]</a:t>
+              <a:t>Full user flow automation</a:t>
             </a:r>
             <a:endParaRPr lang="en-US" sz="1000" dirty="0"/>
           </a:p>
@@ -12375,10 +13767,9 @@
                   <a:srgbClr val="374151"/>
                 </a:solidFill>
                 <a:latin typeface="Calibri" pitchFamily="34" charset="0"/>
-                <a:ea typeface="Calibri" pitchFamily="34" charset="-122"/>
-                <a:cs typeface="Calibri" pitchFamily="34" charset="-120"/>
-              </a:rPr>
-              <a:t>[Test detail B]</a:t>
+                <a:cs typeface="Calibri" pitchFamily="34" charset="-120"/>
+              </a:rPr>
+              <a:t>Customer + Admin journeys</a:t>
             </a:r>
             <a:endParaRPr lang="en-US" sz="1000" dirty="0"/>
           </a:p>
@@ -12392,10 +13783,9 @@
                   <a:srgbClr val="374151"/>
                 </a:solidFill>
                 <a:latin typeface="Calibri" pitchFamily="34" charset="0"/>
-                <a:ea typeface="Calibri" pitchFamily="34" charset="-122"/>
-                <a:cs typeface="Calibri" pitchFamily="34" charset="-120"/>
-              </a:rPr>
-              <a:t>[Test detail C]</a:t>
+                <a:cs typeface="Calibri" pitchFamily="34" charset="-120"/>
+              </a:rPr>
+              <a:t>Runs in GitHub Actions CI</a:t>
             </a:r>
             <a:endParaRPr lang="en-US" sz="1000" dirty="0"/>
           </a:p>
@@ -12497,7 +13887,7 @@
                 <a:ea typeface="Calibri" pitchFamily="34" charset="-122"/>
                 <a:cs typeface="Calibri" pitchFamily="34" charset="-120"/>
               </a:rPr>
-              <a:t>[QA Lead Name]</a:t>
+              <a:t>QA Lead: Kenny Bacdayan</a:t>
             </a:r>
             <a:endParaRPr lang="en-US" sz="1200" dirty="0"/>
           </a:p>
@@ -12536,7 +13926,38 @@
                 <a:ea typeface="Calibri" pitchFamily="34" charset="-122"/>
                 <a:cs typeface="Calibri" pitchFamily="34" charset="-120"/>
               </a:rPr>
-              <a:t>[One to two sentences about your QA lead's contributions, consistency, and what they owned across the project.]</a:t>
+              <a:t>Maintained the test suite across all five sprints. Authored the QA execution report, testing matrix, and test artifact documentation for project release. Thorough and consistent throughout.</a:t>
+            </a:r>
+            <a:br>
+              <a:rPr lang="en-US" sz="1000" dirty="0">
+                <a:solidFill>
+                  <a:srgbClr val="374151"/>
+                </a:solidFill>
+                <a:latin typeface="Calibri" pitchFamily="34" charset="0"/>
+                <a:ea typeface="Calibri" pitchFamily="34" charset="-122"/>
+                <a:cs typeface="Calibri" pitchFamily="34" charset="-120"/>
+              </a:rPr>
+            </a:br>
+            <a:br>
+              <a:rPr lang="en-US" sz="1000" dirty="0">
+                <a:solidFill>
+                  <a:srgbClr val="374151"/>
+                </a:solidFill>
+                <a:latin typeface="Calibri" pitchFamily="34" charset="0"/>
+                <a:ea typeface="Calibri" pitchFamily="34" charset="-122"/>
+                <a:cs typeface="Calibri" pitchFamily="34" charset="-120"/>
+              </a:rPr>
+            </a:br>
+            <a:r>
+              <a:rPr lang="en-US" sz="1000" dirty="0">
+                <a:solidFill>
+                  <a:srgbClr val="374151"/>
+                </a:solidFill>
+                <a:latin typeface="Calibri" pitchFamily="34" charset="0"/>
+                <a:ea typeface="Calibri" pitchFamily="34" charset="-122"/>
+                <a:cs typeface="Calibri" pitchFamily="34" charset="-120"/>
+              </a:rPr>
+              <a:t>Results: 90% test coverage achieved.</a:t>
             </a:r>
             <a:endParaRPr lang="en-US" sz="1000" dirty="0"/>
           </a:p>
@@ -12647,7 +14068,7 @@
                 <a:ea typeface="Calibri" pitchFamily="34" charset="-122"/>
                 <a:cs typeface="Calibri" pitchFamily="34" charset="-120"/>
               </a:rPr>
-              <a:t>[Slide Title — e.g. CI/CD Pipeline &amp; Deployment]</a:t>
+              <a:t>Deployment – Docker &amp; AWS</a:t>
             </a:r>
             <a:endParaRPr lang="en-US" sz="3200" dirty="0"/>
           </a:p>
@@ -12718,7 +14139,7 @@
                 <a:ea typeface="Calibri" pitchFamily="34" charset="-122"/>
                 <a:cs typeface="Calibri" pitchFamily="34" charset="-120"/>
               </a:rPr>
-              <a:t>[Step 1]</a:t>
+              <a:t>Containerize</a:t>
             </a:r>
             <a:endParaRPr lang="en-US" sz="950" dirty="0"/>
           </a:p>
@@ -12757,7 +14178,7 @@
                 <a:ea typeface="Calibri" pitchFamily="34" charset="-122"/>
                 <a:cs typeface="Calibri" pitchFamily="34" charset="-120"/>
               </a:rPr>
-              <a:t>[Description]</a:t>
+              <a:t>Docker bundles frontend &amp; backend</a:t>
             </a:r>
             <a:endParaRPr lang="en-US" sz="750" dirty="0"/>
           </a:p>
@@ -12860,7 +14281,7 @@
                 <a:ea typeface="Calibri" pitchFamily="34" charset="-122"/>
                 <a:cs typeface="Calibri" pitchFamily="34" charset="-120"/>
               </a:rPr>
-              <a:t>[Step 2]</a:t>
+              <a:t>Push to GitHub</a:t>
             </a:r>
             <a:endParaRPr lang="en-US" sz="950" dirty="0"/>
           </a:p>
@@ -12899,7 +14320,7 @@
                 <a:ea typeface="Calibri" pitchFamily="34" charset="-122"/>
                 <a:cs typeface="Calibri" pitchFamily="34" charset="-120"/>
               </a:rPr>
-              <a:t>[Description]</a:t>
+              <a:t>GitHub Actions triggers on push to main</a:t>
             </a:r>
             <a:endParaRPr lang="en-US" sz="750" dirty="0"/>
           </a:p>
@@ -13002,7 +14423,7 @@
                 <a:ea typeface="Calibri" pitchFamily="34" charset="-122"/>
                 <a:cs typeface="Calibri" pitchFamily="34" charset="-120"/>
               </a:rPr>
-              <a:t>[Step 3]</a:t>
+              <a:t>CI Passes</a:t>
             </a:r>
             <a:endParaRPr lang="en-US" sz="950" dirty="0"/>
           </a:p>
@@ -13041,7 +14462,7 @@
                 <a:ea typeface="Calibri" pitchFamily="34" charset="-122"/>
                 <a:cs typeface="Calibri" pitchFamily="34" charset="-120"/>
               </a:rPr>
-              <a:t>[Description]</a:t>
+              <a:t>PyTest, NPM, Robot Framework all green</a:t>
             </a:r>
             <a:endParaRPr lang="en-US" sz="750" dirty="0"/>
           </a:p>
@@ -13144,7 +14565,7 @@
                 <a:ea typeface="Calibri" pitchFamily="34" charset="-122"/>
                 <a:cs typeface="Calibri" pitchFamily="34" charset="-120"/>
               </a:rPr>
-              <a:t>[Step 4]</a:t>
+              <a:t>Deploy to EC2</a:t>
             </a:r>
             <a:endParaRPr lang="en-US" sz="950" dirty="0"/>
           </a:p>
@@ -13183,7 +14604,7 @@
                 <a:ea typeface="Calibri" pitchFamily="34" charset="-122"/>
                 <a:cs typeface="Calibri" pitchFamily="34" charset="-120"/>
               </a:rPr>
-              <a:t>[Description]</a:t>
+              <a:t>Docker containers run on AWS EC2 Instance</a:t>
             </a:r>
             <a:endParaRPr lang="en-US" sz="750" dirty="0"/>
           </a:p>
@@ -13286,7 +14707,7 @@
                 <a:ea typeface="Calibri" pitchFamily="34" charset="-122"/>
                 <a:cs typeface="Calibri" pitchFamily="34" charset="-120"/>
               </a:rPr>
-              <a:t>[Step 5]</a:t>
+              <a:t>Connect RDS</a:t>
             </a:r>
             <a:endParaRPr lang="en-US" sz="950" dirty="0"/>
           </a:p>
@@ -13325,7 +14746,7 @@
                 <a:ea typeface="Calibri" pitchFamily="34" charset="-122"/>
                 <a:cs typeface="Calibri" pitchFamily="34" charset="-120"/>
               </a:rPr>
-              <a:t>[Description]</a:t>
+              <a:t>MySQL 8.0 database on AWS RDS</a:t>
             </a:r>
             <a:endParaRPr lang="en-US" sz="750" dirty="0"/>
           </a:p>
@@ -13391,7 +14812,7 @@
           <a:bodyPr/>
           <a:lstStyle/>
           <a:p>
-            <a:endParaRPr lang="en-US"/>
+            <a:endParaRPr lang="en-US" dirty="0"/>
           </a:p>
         </p:txBody>
       </p:sp>
@@ -13428,7 +14849,7 @@
                 <a:ea typeface="Calibri" pitchFamily="34" charset="-122"/>
                 <a:cs typeface="Calibri" pitchFamily="34" charset="-120"/>
               </a:rPr>
-              <a:t>[Step 6]</a:t>
+              <a:t>Live on AWS</a:t>
             </a:r>
             <a:endParaRPr lang="en-US" sz="950" dirty="0"/>
           </a:p>
@@ -13467,7 +14888,28 @@
                 <a:ea typeface="Calibri" pitchFamily="34" charset="-122"/>
                 <a:cs typeface="Calibri" pitchFamily="34" charset="-120"/>
               </a:rPr>
-              <a:t>[Description]</a:t>
+              <a:t>App live at:</a:t>
+            </a:r>
+            <a:br>
+              <a:rPr lang="en-US" sz="750" dirty="0">
+                <a:solidFill>
+                  <a:srgbClr val="CBD5E1"/>
+                </a:solidFill>
+                <a:latin typeface="Calibri" pitchFamily="34" charset="0"/>
+                <a:ea typeface="Calibri" pitchFamily="34" charset="-122"/>
+                <a:cs typeface="Calibri" pitchFamily="34" charset="-120"/>
+              </a:rPr>
+            </a:br>
+            <a:r>
+              <a:rPr lang="en-US" sz="750" dirty="0">
+                <a:solidFill>
+                  <a:srgbClr val="CBD5E1"/>
+                </a:solidFill>
+                <a:latin typeface="Calibri" pitchFamily="34" charset="0"/>
+                <a:ea typeface="Calibri" pitchFamily="34" charset="-122"/>
+                <a:cs typeface="Calibri" pitchFamily="34" charset="-120"/>
+              </a:rPr>
+              <a:t>http://54.145.84.28:3000</a:t>
             </a:r>
             <a:endParaRPr lang="en-US" sz="750" dirty="0"/>
           </a:p>
@@ -13545,7 +14987,7 @@
                 <a:ea typeface="Calibri" pitchFamily="34" charset="-122"/>
                 <a:cs typeface="Calibri" pitchFamily="34" charset="-120"/>
               </a:rPr>
-              <a:t>[Callout Label — e.g. Seed Data]</a:t>
+              <a:t>[Callout Label — </a:t>
             </a:r>
             <a:endParaRPr lang="en-US" sz="1200" dirty="0"/>
           </a:p>
@@ -13701,7 +15143,7 @@
                 <a:ea typeface="Calibri" pitchFamily="34" charset="-122"/>
                 <a:cs typeface="Calibri" pitchFamily="34" charset="-120"/>
               </a:rPr>
-              <a:t>[Deployment Target Label]</a:t>
+              <a:t>Deployment Target</a:t>
             </a:r>
             <a:endParaRPr lang="en-US" sz="1200" dirty="0"/>
           </a:p>
@@ -13740,7 +15182,7 @@
                 <a:ea typeface="Calibri" pitchFamily="34" charset="-122"/>
                 <a:cs typeface="Calibri" pitchFamily="34" charset="-120"/>
               </a:rPr>
-              <a:t>[Hosting environment]</a:t>
+              <a:t>AWS EC2 (app) + AWS RDS (MySQL)</a:t>
             </a:r>
             <a:endParaRPr lang="en-US" sz="1000" dirty="0"/>
           </a:p>
@@ -13754,10 +15196,9 @@
                   <a:srgbClr val="374151"/>
                 </a:solidFill>
                 <a:latin typeface="Calibri" pitchFamily="34" charset="0"/>
-                <a:ea typeface="Calibri" pitchFamily="34" charset="-122"/>
-                <a:cs typeface="Calibri" pitchFamily="34" charset="-120"/>
-              </a:rPr>
-              <a:t>[Containerization or build detail]</a:t>
+                <a:cs typeface="Calibri" pitchFamily="34" charset="-120"/>
+              </a:rPr>
+              <a:t>Dockerized frontend &amp; backend</a:t>
             </a:r>
             <a:endParaRPr lang="en-US" sz="1000" dirty="0"/>
           </a:p>
@@ -13771,10 +15212,9 @@
                   <a:srgbClr val="374151"/>
                 </a:solidFill>
                 <a:latin typeface="Calibri" pitchFamily="34" charset="0"/>
-                <a:ea typeface="Calibri" pitchFamily="34" charset="-122"/>
-                <a:cs typeface="Calibri" pitchFamily="34" charset="-120"/>
-              </a:rPr>
-              <a:t>[Secrets management approach]</a:t>
+                <a:cs typeface="Calibri" pitchFamily="34" charset="-120"/>
+              </a:rPr>
+              <a:t>Environment Variables for secrets</a:t>
             </a:r>
             <a:endParaRPr lang="en-US" sz="1000" dirty="0"/>
           </a:p>
@@ -13827,22 +15267,19 @@
         </p:nvSpPr>
         <p:spPr>
           <a:xfrm>
-            <a:off x="548640" y="3749040"/>
-            <a:ext cx="1828800" cy="274320"/>
-          </a:xfrm>
-          <a:prstGeom prst="rect">
-            <a:avLst/>
-          </a:prstGeom>
-          <a:noFill/>
-          <a:ln/>
-        </p:spPr>
-        <p:txBody>
-          <a:bodyPr wrap="square" lIns="0" tIns="0" rIns="0" bIns="0" rtlCol="0" anchor="ctr"/>
-          <a:lstStyle/>
-          <a:p>
-            <a:pPr marL="0" indent="0">
-              <a:buNone/>
-            </a:pPr>
+            <a:off x="548639" y="3749040"/>
+            <a:ext cx="2839453" cy="274320"/>
+          </a:xfrm>
+          <a:prstGeom prst="rect">
+            <a:avLst/>
+          </a:prstGeom>
+          <a:noFill/>
+          <a:ln/>
+        </p:spPr>
+        <p:txBody>
+          <a:bodyPr wrap="square" lIns="0" tIns="0" rIns="0" bIns="0" rtlCol="0" anchor="ctr"/>
+          <a:lstStyle/>
+          <a:p>
             <a:r>
               <a:rPr lang="en-US" sz="1100" b="1" dirty="0">
                 <a:solidFill>
@@ -13852,7 +15289,7 @@
                 <a:ea typeface="Calibri" pitchFamily="34" charset="-122"/>
                 <a:cs typeface="Calibri" pitchFamily="34" charset="-120"/>
               </a:rPr>
-              <a:t>[Branch / Workflow Strategy Label]:</a:t>
+              <a:t>Link to Orderly: http://54.145.84.28:3000/</a:t>
             </a:r>
             <a:endParaRPr lang="en-US" sz="1100" dirty="0"/>
           </a:p>
@@ -13888,10 +15325,9 @@
                   <a:srgbClr val="374151"/>
                 </a:solidFill>
                 <a:latin typeface="Calibri" pitchFamily="34" charset="0"/>
-                <a:ea typeface="Calibri" pitchFamily="34" charset="-122"/>
-                <a:cs typeface="Calibri" pitchFamily="34" charset="-120"/>
-              </a:rPr>
-              <a:t>[Describe your branching or workflow strategy in one sentence. e.g. main (protected) → feature branches → PR required → merge after CI green.]</a:t>
+                <a:cs typeface="Calibri" pitchFamily="34" charset="-120"/>
+              </a:rPr>
+              <a:t>Deployed April 25, 2026. Application accessible via the link above. </a:t>
             </a:r>
             <a:endParaRPr lang="en-US" sz="1000" dirty="0"/>
           </a:p>

--- a/docs/Deliverables/Orderly_Slides.pptx
+++ b/docs/Deliverables/Orderly_Slides.pptx
@@ -5947,8 +5947,8 @@
         </p:nvSpPr>
         <p:spPr>
           <a:xfrm>
-            <a:off x="4846320" y="3703320"/>
-            <a:ext cx="914400" cy="914400"/>
+            <a:off x="4762195" y="3703320"/>
+            <a:ext cx="998525" cy="914400"/>
           </a:xfrm>
           <a:prstGeom prst="rect">
             <a:avLst/>
@@ -5972,6 +5972,16 @@
                 <a:cs typeface="Calibri" pitchFamily="34" charset="-120"/>
               </a:rPr>
               <a:t>15</a:t>
+            </a:r>
+            <a:r>
+              <a:rPr lang="en-US" sz="3600" b="1" dirty="0">
+                <a:solidFill>
+                  <a:srgbClr val="3BB77E"/>
+                </a:solidFill>
+                <a:latin typeface="Calibri" pitchFamily="34" charset="0"/>
+                <a:cs typeface="Calibri" pitchFamily="34" charset="-120"/>
+              </a:rPr>
+              <a:t>+</a:t>
             </a:r>
             <a:endParaRPr lang="en-US" sz="4800" dirty="0"/>
           </a:p>
@@ -8073,7 +8083,7 @@
           <a:bodyPr/>
           <a:lstStyle/>
           <a:p>
-            <a:endParaRPr lang="en-US"/>
+            <a:endParaRPr lang="en-US" dirty="0"/>
           </a:p>
         </p:txBody>
       </p:sp>
@@ -8085,8 +8095,8 @@
         </p:nvSpPr>
         <p:spPr>
           <a:xfrm>
-            <a:off x="594360" y="4041648"/>
-            <a:ext cx="2011680" cy="274320"/>
+            <a:off x="985508" y="4069080"/>
+            <a:ext cx="1783080" cy="274320"/>
           </a:xfrm>
           <a:prstGeom prst="rect">
             <a:avLst/>
@@ -8204,7 +8214,7 @@
         </p:nvSpPr>
         <p:spPr>
           <a:xfrm>
-            <a:off x="355208" y="3329461"/>
+            <a:off x="396240" y="3321625"/>
             <a:ext cx="121920" cy="121920"/>
           </a:xfrm>
           <a:prstGeom prst="ellipse">
@@ -8239,7 +8249,7 @@
         </p:nvSpPr>
         <p:spPr>
           <a:xfrm>
-            <a:off x="263768" y="3200421"/>
+            <a:off x="241134" y="3192834"/>
             <a:ext cx="457200" cy="120000"/>
           </a:xfrm>
           <a:prstGeom prst="rect">
@@ -8283,7 +8293,7 @@
         </p:nvSpPr>
         <p:spPr>
           <a:xfrm>
-            <a:off x="172328" y="3470421"/>
+            <a:off x="146273" y="3488341"/>
             <a:ext cx="640080" cy="110000"/>
           </a:xfrm>
           <a:prstGeom prst="rect">
@@ -8362,7 +8372,7 @@
         </p:nvSpPr>
         <p:spPr>
           <a:xfrm>
-            <a:off x="1663688" y="3200421"/>
+            <a:off x="1587488" y="3185813"/>
             <a:ext cx="457200" cy="120000"/>
           </a:xfrm>
           <a:prstGeom prst="rect">
@@ -8406,7 +8416,7 @@
         </p:nvSpPr>
         <p:spPr>
           <a:xfrm>
-            <a:off x="1572248" y="3470421"/>
+            <a:off x="1464961" y="3507430"/>
             <a:ext cx="640080" cy="110000"/>
           </a:xfrm>
           <a:prstGeom prst="rect">
@@ -8485,7 +8495,7 @@
         </p:nvSpPr>
         <p:spPr>
           <a:xfrm>
-            <a:off x="3063608" y="3200421"/>
+            <a:off x="2993080" y="3192834"/>
             <a:ext cx="457200" cy="120000"/>
           </a:xfrm>
           <a:prstGeom prst="rect">
@@ -8529,7 +8539,7 @@
         </p:nvSpPr>
         <p:spPr>
           <a:xfrm>
-            <a:off x="2972168" y="3470421"/>
+            <a:off x="2905968" y="3506750"/>
             <a:ext cx="640080" cy="110000"/>
           </a:xfrm>
           <a:prstGeom prst="rect">
@@ -8687,7 +8697,7 @@
         </p:nvSpPr>
         <p:spPr>
           <a:xfrm>
-            <a:off x="4378568" y="3200421"/>
+            <a:off x="4302368" y="3192834"/>
             <a:ext cx="457200" cy="120000"/>
           </a:xfrm>
           <a:prstGeom prst="rect">
@@ -8731,7 +8741,7 @@
         </p:nvSpPr>
         <p:spPr>
           <a:xfrm>
-            <a:off x="4287128" y="3470421"/>
+            <a:off x="4224656" y="3492379"/>
             <a:ext cx="640080" cy="110000"/>
           </a:xfrm>
           <a:prstGeom prst="rect">
@@ -8810,7 +8820,7 @@
         </p:nvSpPr>
         <p:spPr>
           <a:xfrm>
-            <a:off x="5878328" y="3200421"/>
+            <a:off x="5802128" y="3192834"/>
             <a:ext cx="457200" cy="120000"/>
           </a:xfrm>
           <a:prstGeom prst="rect">
@@ -8854,7 +8864,7 @@
         </p:nvSpPr>
         <p:spPr>
           <a:xfrm>
-            <a:off x="5878328" y="3470421"/>
+            <a:off x="5710688" y="3492379"/>
             <a:ext cx="640080" cy="110000"/>
           </a:xfrm>
           <a:prstGeom prst="rect">
@@ -8933,7 +8943,7 @@
         </p:nvSpPr>
         <p:spPr>
           <a:xfrm>
-            <a:off x="8156448" y="3470421"/>
+            <a:off x="8080368" y="3598670"/>
             <a:ext cx="640080" cy="110000"/>
           </a:xfrm>
           <a:prstGeom prst="rect">
@@ -8958,8 +8968,31 @@
                 </a:solidFill>
                 <a:latin typeface="Calibri"/>
               </a:rPr>
-              <a:t>Apr 18</a:t>
-            </a:r>
+              <a:t>April 30</a:t>
+            </a:r>
+            <a:br>
+              <a:rPr lang="en-US" sz="600" dirty="0">
+                <a:solidFill>
+                  <a:srgbClr val="3BB77E"/>
+                </a:solidFill>
+                <a:latin typeface="Calibri"/>
+              </a:rPr>
+            </a:br>
+            <a:r>
+              <a:rPr lang="en-US" sz="600" b="1" dirty="0">
+                <a:solidFill>
+                  <a:srgbClr val="3BB77E"/>
+                </a:solidFill>
+                <a:latin typeface="Calibri"/>
+              </a:rPr>
+              <a:t>Present</a:t>
+            </a:r>
+            <a:endParaRPr lang="en-US" sz="600" dirty="0">
+              <a:solidFill>
+                <a:srgbClr val="3BB77E"/>
+              </a:solidFill>
+              <a:latin typeface="Calibri"/>
+            </a:endParaRPr>
           </a:p>
         </p:txBody>
       </p:sp>
@@ -8977,7 +9010,7 @@
         </p:nvSpPr>
         <p:spPr>
           <a:xfrm rot="2700000">
-            <a:off x="7039448" y="3298501"/>
+            <a:off x="7411100" y="3288872"/>
             <a:ext cx="182880" cy="182880"/>
           </a:xfrm>
           <a:prstGeom prst="rect">
@@ -9012,8 +9045,8 @@
         </p:nvSpPr>
         <p:spPr>
           <a:xfrm>
-            <a:off x="6971668" y="3559257"/>
-            <a:ext cx="365760" cy="110000"/>
+            <a:off x="7232904" y="3558008"/>
+            <a:ext cx="530000" cy="213623"/>
           </a:xfrm>
           <a:prstGeom prst="rect">
             <a:avLst/>
@@ -9037,7 +9070,7 @@
                 </a:solidFill>
                 <a:latin typeface="Calibri"/>
               </a:rPr>
-              <a:t>Apr 17</a:t>
+              <a:t>Apr 24</a:t>
             </a:r>
             <a:br>
               <a:rPr lang="en-US" sz="600" dirty="0">
@@ -9073,7 +9106,7 @@
         </p:nvSpPr>
         <p:spPr>
           <a:xfrm rot="2700000">
-            <a:off x="7689448" y="3298501"/>
+            <a:off x="7852611" y="3298501"/>
             <a:ext cx="182880" cy="182880"/>
           </a:xfrm>
           <a:prstGeom prst="rect">
@@ -9108,7 +9141,7 @@
         </p:nvSpPr>
         <p:spPr>
           <a:xfrm>
-            <a:off x="7554448" y="3590421"/>
+            <a:off x="7715451" y="3565888"/>
             <a:ext cx="457200" cy="110000"/>
           </a:xfrm>
           <a:prstGeom prst="rect">
@@ -9138,6 +9171,121 @@
           </a:p>
         </p:txBody>
       </p:sp>
+      <p:sp>
+        <p:nvSpPr>
+          <p:cNvPr id="72" name="TL_S5_dot">
+            <a:extLst>
+              <a:ext uri="{FF2B5EF4-FFF2-40B4-BE49-F238E27FC236}">
+                <a16:creationId xmlns:a16="http://schemas.microsoft.com/office/drawing/2014/main" id="{0A944DAF-64E4-041E-08A4-655642322C1D}"/>
+              </a:ext>
+            </a:extLst>
+          </p:cNvPr>
+          <p:cNvSpPr/>
+          <p:nvPr/>
+        </p:nvSpPr>
+        <p:spPr>
+          <a:xfrm>
+            <a:off x="6916024" y="3343930"/>
+            <a:ext cx="121920" cy="121920"/>
+          </a:xfrm>
+          <a:prstGeom prst="ellipse">
+            <a:avLst/>
+          </a:prstGeom>
+          <a:solidFill>
+            <a:srgbClr val="1B2B5E"/>
+          </a:solidFill>
+          <a:ln>
+            <a:noFill/>
+          </a:ln>
+        </p:spPr>
+        <p:txBody>
+          <a:bodyPr/>
+          <a:lstStyle/>
+          <a:p>
+            <a:endParaRPr lang="en-US"/>
+          </a:p>
+        </p:txBody>
+      </p:sp>
+      <p:sp>
+        <p:nvSpPr>
+          <p:cNvPr id="74" name="TL_S5_lbl">
+            <a:extLst>
+              <a:ext uri="{FF2B5EF4-FFF2-40B4-BE49-F238E27FC236}">
+                <a16:creationId xmlns:a16="http://schemas.microsoft.com/office/drawing/2014/main" id="{69A61A27-5772-B1EF-6624-6788079957B8}"/>
+              </a:ext>
+            </a:extLst>
+          </p:cNvPr>
+          <p:cNvSpPr/>
+          <p:nvPr/>
+        </p:nvSpPr>
+        <p:spPr>
+          <a:xfrm>
+            <a:off x="6740946" y="3199423"/>
+            <a:ext cx="457200" cy="120000"/>
+          </a:xfrm>
+          <a:prstGeom prst="rect">
+            <a:avLst/>
+          </a:prstGeom>
+          <a:noFill/>
+          <a:ln>
+            <a:noFill/>
+          </a:ln>
+        </p:spPr>
+        <p:txBody>
+          <a:bodyPr wrap="square" lIns="0" tIns="0" rIns="0" bIns="0" rtlCol="0" anchor="ctr"/>
+          <a:lstStyle/>
+          <a:p>
+            <a:pPr algn="ctr">
+              <a:buNone/>
+            </a:pPr>
+            <a:r>
+              <a:rPr lang="en-US" sz="700" b="1" dirty="0">
+                <a:solidFill>
+                  <a:srgbClr val="1B2B5E"/>
+                </a:solidFill>
+                <a:latin typeface="Calibri"/>
+              </a:rPr>
+              <a:t>Phase 4</a:t>
+            </a:r>
+          </a:p>
+        </p:txBody>
+      </p:sp>
+      <p:pic>
+        <p:nvPicPr>
+          <p:cNvPr id="76" name="Graphic 75" descr="Wave outline">
+            <a:extLst>
+              <a:ext uri="{FF2B5EF4-FFF2-40B4-BE49-F238E27FC236}">
+                <a16:creationId xmlns:a16="http://schemas.microsoft.com/office/drawing/2014/main" id="{ED11D256-F13D-7D58-B7D0-DA72EBCA3FF1}"/>
+              </a:ext>
+            </a:extLst>
+          </p:cNvPr>
+          <p:cNvPicPr>
+            <a:picLocks noChangeAspect="1"/>
+          </p:cNvPicPr>
+          <p:nvPr/>
+        </p:nvPicPr>
+        <p:blipFill>
+          <a:blip>
+            <a:extLst>
+              <a:ext uri="{96DAC541-7B7A-43D3-8B79-37D633B846F1}">
+                <asvg:svgBlip xmlns:asvg="http://schemas.microsoft.com/office/drawing/2016/SVG/main" r:embed="rId3"/>
+              </a:ext>
+            </a:extLst>
+          </a:blip>
+          <a:stretch>
+            <a:fillRect/>
+          </a:stretch>
+        </p:blipFill>
+        <p:spPr>
+          <a:xfrm>
+            <a:off x="518160" y="4005561"/>
+            <a:ext cx="401357" cy="401357"/>
+          </a:xfrm>
+          <a:prstGeom prst="rect">
+            <a:avLst/>
+          </a:prstGeom>
+        </p:spPr>
+      </p:pic>
     </p:spTree>
   </p:cSld>
   <p:clrMapOvr>
@@ -9173,14 +9321,20 @@
       </p:grpSpPr>
       <p:sp>
         <p:nvSpPr>
-          <p:cNvPr id="2" name="Text 0"/>
-          <p:cNvSpPr/>
-          <p:nvPr/>
-        </p:nvSpPr>
-        <p:spPr>
-          <a:xfrm>
-            <a:off x="457200" y="164592"/>
-            <a:ext cx="8229600" cy="256032"/>
+          <p:cNvPr id="54" name="Text 0">
+            <a:extLst>
+              <a:ext uri="{FF2B5EF4-FFF2-40B4-BE49-F238E27FC236}">
+                <a16:creationId xmlns:a16="http://schemas.microsoft.com/office/drawing/2014/main" id="{0ED63F8C-5F5E-FC7F-D090-7DF1629F19BE}"/>
+              </a:ext>
+            </a:extLst>
+          </p:cNvPr>
+          <p:cNvSpPr/>
+          <p:nvPr/>
+        </p:nvSpPr>
+        <p:spPr>
+          <a:xfrm>
+            <a:off x="457200" y="256032"/>
+            <a:ext cx="3657600" cy="182880"/>
           </a:xfrm>
           <a:prstGeom prst="rect">
             <a:avLst/>
@@ -9196,69 +9350,621 @@
               <a:buNone/>
             </a:pPr>
             <a:r>
-              <a:rPr lang="en-US" sz="900" b="1" kern="0" spc="300" dirty="0">
-                <a:solidFill>
-                  <a:srgbClr val="3BB77E"/>
+              <a:rPr lang="en-US" sz="850" b="1" kern="0" spc="300" dirty="0">
+                <a:solidFill>
+                  <a:srgbClr val="1D9E75"/>
+                </a:solidFill>
+              </a:rPr>
+              <a:t>ARCHITECTURE &amp; DESIGN</a:t>
+            </a:r>
+            <a:endParaRPr lang="en-US" sz="850" dirty="0"/>
+          </a:p>
+        </p:txBody>
+      </p:sp>
+      <p:sp>
+        <p:nvSpPr>
+          <p:cNvPr id="55" name="Text 1">
+            <a:extLst>
+              <a:ext uri="{FF2B5EF4-FFF2-40B4-BE49-F238E27FC236}">
+                <a16:creationId xmlns:a16="http://schemas.microsoft.com/office/drawing/2014/main" id="{F5146563-6AAF-81EF-4D27-79F771B994A8}"/>
+              </a:ext>
+            </a:extLst>
+          </p:cNvPr>
+          <p:cNvSpPr/>
+          <p:nvPr/>
+        </p:nvSpPr>
+        <p:spPr>
+          <a:xfrm>
+            <a:off x="457200" y="475488"/>
+            <a:ext cx="8229600" cy="502920"/>
+          </a:xfrm>
+          <a:prstGeom prst="rect">
+            <a:avLst/>
+          </a:prstGeom>
+          <a:noFill/>
+          <a:ln/>
+        </p:spPr>
+        <p:txBody>
+          <a:bodyPr wrap="square" lIns="0" tIns="0" rIns="0" bIns="0" rtlCol="0" anchor="ctr"/>
+          <a:lstStyle/>
+          <a:p>
+            <a:pPr marL="0" indent="0" algn="l">
+              <a:buNone/>
+            </a:pPr>
+            <a:r>
+              <a:rPr lang="en-US" sz="3400" b="1" dirty="0">
+                <a:solidFill>
+                  <a:srgbClr val="0D1B3E"/>
                 </a:solidFill>
                 <a:latin typeface="Calibri" pitchFamily="34" charset="0"/>
                 <a:ea typeface="Calibri" pitchFamily="34" charset="-122"/>
                 <a:cs typeface="Calibri" pitchFamily="34" charset="-120"/>
               </a:rPr>
-              <a:t>ARCHITECTURE &amp; DESIGN</a:t>
-            </a:r>
-            <a:endParaRPr lang="en-US" sz="900" dirty="0"/>
-          </a:p>
-        </p:txBody>
-      </p:sp>
-      <p:sp>
-        <p:nvSpPr>
-          <p:cNvPr id="3" name="Text 1"/>
-          <p:cNvSpPr/>
-          <p:nvPr/>
-        </p:nvSpPr>
-        <p:spPr>
-          <a:xfrm>
-            <a:off x="457200" y="475488"/>
-            <a:ext cx="8229600" cy="658368"/>
-          </a:xfrm>
-          <a:prstGeom prst="rect">
-            <a:avLst/>
-          </a:prstGeom>
-          <a:noFill/>
-          <a:ln/>
-        </p:spPr>
-        <p:txBody>
-          <a:bodyPr wrap="square" lIns="0" tIns="0" rIns="0" bIns="0" rtlCol="0" anchor="ctr"/>
-          <a:lstStyle/>
-          <a:p>
-            <a:pPr marL="0" indent="0" algn="l">
-              <a:buNone/>
-            </a:pPr>
-            <a:r>
-              <a:rPr lang="en-US" sz="3200" b="1" dirty="0">
-                <a:solidFill>
-                  <a:srgbClr val="1B2B5E"/>
-                </a:solidFill>
-                <a:latin typeface="Calibri" pitchFamily="34" charset="0"/>
-                <a:ea typeface="Calibri" pitchFamily="34" charset="-122"/>
-                <a:cs typeface="Calibri" pitchFamily="34" charset="-120"/>
-              </a:rPr>
               <a:t>System Architecture</a:t>
             </a:r>
-            <a:endParaRPr lang="en-US" sz="3200" dirty="0"/>
-          </a:p>
-        </p:txBody>
-      </p:sp>
-      <p:sp>
-        <p:nvSpPr>
-          <p:cNvPr id="4" name="Shape 2"/>
-          <p:cNvSpPr/>
-          <p:nvPr/>
-        </p:nvSpPr>
-        <p:spPr>
-          <a:xfrm>
-            <a:off x="457200" y="1325880"/>
-            <a:ext cx="2560320" cy="594360"/>
+            <a:endParaRPr lang="en-US" sz="3400" dirty="0"/>
+          </a:p>
+        </p:txBody>
+      </p:sp>
+      <p:sp>
+        <p:nvSpPr>
+          <p:cNvPr id="56" name="Shape 2">
+            <a:extLst>
+              <a:ext uri="{FF2B5EF4-FFF2-40B4-BE49-F238E27FC236}">
+                <a16:creationId xmlns:a16="http://schemas.microsoft.com/office/drawing/2014/main" id="{676B14F0-D263-0BA7-854F-20FFC222ABB2}"/>
+              </a:ext>
+            </a:extLst>
+          </p:cNvPr>
+          <p:cNvSpPr/>
+          <p:nvPr/>
+        </p:nvSpPr>
+        <p:spPr>
+          <a:xfrm>
+            <a:off x="457200" y="1097280"/>
+            <a:ext cx="2606040" cy="502920"/>
+          </a:xfrm>
+          <a:prstGeom prst="rect">
+            <a:avLst/>
+          </a:prstGeom>
+          <a:solidFill>
+            <a:srgbClr val="00AEEF"/>
+          </a:solidFill>
+          <a:ln w="12700">
+            <a:solidFill>
+              <a:srgbClr val="00AEEF"/>
+            </a:solidFill>
+            <a:prstDash val="solid"/>
+          </a:ln>
+        </p:spPr>
+        <p:txBody>
+          <a:bodyPr/>
+          <a:lstStyle/>
+          <a:p>
+            <a:endParaRPr lang="en-US" dirty="0"/>
+          </a:p>
+        </p:txBody>
+      </p:sp>
+      <p:sp>
+        <p:nvSpPr>
+          <p:cNvPr id="58" name="Shape 4">
+            <a:extLst>
+              <a:ext uri="{FF2B5EF4-FFF2-40B4-BE49-F238E27FC236}">
+                <a16:creationId xmlns:a16="http://schemas.microsoft.com/office/drawing/2014/main" id="{EBC3BFA7-7A66-EB99-3554-A9064C3302A6}"/>
+              </a:ext>
+            </a:extLst>
+          </p:cNvPr>
+          <p:cNvSpPr/>
+          <p:nvPr/>
+        </p:nvSpPr>
+        <p:spPr>
+          <a:xfrm>
+            <a:off x="457200" y="1600200"/>
+            <a:ext cx="2606040" cy="685800"/>
+          </a:xfrm>
+          <a:prstGeom prst="rect">
+            <a:avLst/>
+          </a:prstGeom>
+          <a:solidFill>
+            <a:srgbClr val="FFFFFF"/>
+          </a:solidFill>
+          <a:ln w="6350">
+            <a:solidFill>
+              <a:srgbClr val="D8DCE5"/>
+            </a:solidFill>
+            <a:prstDash val="solid"/>
+          </a:ln>
+          <a:effectLst>
+            <a:outerShdw blurRad="101600" dist="25400" dir="16200000" algn="bl" rotWithShape="0">
+              <a:srgbClr val="000000">
+                <a:alpha val="8000"/>
+              </a:srgbClr>
+            </a:outerShdw>
+          </a:effectLst>
+        </p:spPr>
+        <p:txBody>
+          <a:bodyPr/>
+          <a:lstStyle/>
+          <a:p>
+            <a:endParaRPr lang="en-US"/>
+          </a:p>
+        </p:txBody>
+      </p:sp>
+      <p:sp>
+        <p:nvSpPr>
+          <p:cNvPr id="59" name="Text 5">
+            <a:extLst>
+              <a:ext uri="{FF2B5EF4-FFF2-40B4-BE49-F238E27FC236}">
+                <a16:creationId xmlns:a16="http://schemas.microsoft.com/office/drawing/2014/main" id="{B4D11A6C-CBFD-D6B4-7588-08295B98BCAF}"/>
+              </a:ext>
+            </a:extLst>
+          </p:cNvPr>
+          <p:cNvSpPr/>
+          <p:nvPr/>
+        </p:nvSpPr>
+        <p:spPr>
+          <a:xfrm>
+            <a:off x="566928" y="1664208"/>
+            <a:ext cx="2377440" cy="182880"/>
+          </a:xfrm>
+          <a:prstGeom prst="rect">
+            <a:avLst/>
+          </a:prstGeom>
+          <a:noFill/>
+          <a:ln/>
+        </p:spPr>
+        <p:txBody>
+          <a:bodyPr wrap="square" lIns="0" tIns="0" rIns="0" bIns="0" rtlCol="0" anchor="ctr"/>
+          <a:lstStyle/>
+          <a:p>
+            <a:pPr marL="0" indent="0">
+              <a:buNone/>
+            </a:pPr>
+            <a:r>
+              <a:rPr lang="en-US" sz="1100" b="1" dirty="0">
+                <a:solidFill>
+                  <a:srgbClr val="0D1B3E"/>
+                </a:solidFill>
+              </a:rPr>
+              <a:t>React</a:t>
+            </a:r>
+            <a:endParaRPr lang="en-US" sz="1100" dirty="0"/>
+          </a:p>
+        </p:txBody>
+      </p:sp>
+      <p:sp>
+        <p:nvSpPr>
+          <p:cNvPr id="60" name="Text 6">
+            <a:extLst>
+              <a:ext uri="{FF2B5EF4-FFF2-40B4-BE49-F238E27FC236}">
+                <a16:creationId xmlns:a16="http://schemas.microsoft.com/office/drawing/2014/main" id="{83598DC0-ED9D-E0C1-BFA7-5CBF331A01FB}"/>
+              </a:ext>
+            </a:extLst>
+          </p:cNvPr>
+          <p:cNvSpPr/>
+          <p:nvPr/>
+        </p:nvSpPr>
+        <p:spPr>
+          <a:xfrm>
+            <a:off x="566928" y="1847088"/>
+            <a:ext cx="2377440" cy="365760"/>
+          </a:xfrm>
+          <a:prstGeom prst="rect">
+            <a:avLst/>
+          </a:prstGeom>
+          <a:noFill/>
+          <a:ln/>
+        </p:spPr>
+        <p:txBody>
+          <a:bodyPr wrap="square" lIns="0" tIns="0" rIns="0" bIns="0" rtlCol="0" anchor="ctr"/>
+          <a:lstStyle/>
+          <a:p>
+            <a:pPr marL="0" indent="0">
+              <a:buNone/>
+            </a:pPr>
+            <a:r>
+              <a:rPr lang="en-US" sz="800" dirty="0">
+                <a:solidFill>
+                  <a:srgbClr val="475569"/>
+                </a:solidFill>
+              </a:rPr>
+              <a:t>SPA – Component Based – SimpleJWT auth</a:t>
+            </a:r>
+            <a:endParaRPr lang="en-US" sz="800" dirty="0"/>
+          </a:p>
+        </p:txBody>
+      </p:sp>
+      <p:sp>
+        <p:nvSpPr>
+          <p:cNvPr id="61" name="Shape 7">
+            <a:extLst>
+              <a:ext uri="{FF2B5EF4-FFF2-40B4-BE49-F238E27FC236}">
+                <a16:creationId xmlns:a16="http://schemas.microsoft.com/office/drawing/2014/main" id="{B2D9734B-5957-F413-0BB4-460C53BEB4B3}"/>
+              </a:ext>
+            </a:extLst>
+          </p:cNvPr>
+          <p:cNvSpPr/>
+          <p:nvPr/>
+        </p:nvSpPr>
+        <p:spPr>
+          <a:xfrm>
+            <a:off x="3291840" y="1097280"/>
+            <a:ext cx="2606040" cy="502920"/>
+          </a:xfrm>
+          <a:prstGeom prst="rect">
+            <a:avLst/>
+          </a:prstGeom>
+          <a:solidFill>
+            <a:srgbClr val="1B2A4A"/>
+          </a:solidFill>
+          <a:ln w="12700">
+            <a:solidFill>
+              <a:srgbClr val="1B2A4A"/>
+            </a:solidFill>
+            <a:prstDash val="solid"/>
+          </a:ln>
+        </p:spPr>
+        <p:txBody>
+          <a:bodyPr/>
+          <a:lstStyle/>
+          <a:p>
+            <a:endParaRPr lang="en-US"/>
+          </a:p>
+        </p:txBody>
+      </p:sp>
+      <p:sp>
+        <p:nvSpPr>
+          <p:cNvPr id="63" name="Shape 9">
+            <a:extLst>
+              <a:ext uri="{FF2B5EF4-FFF2-40B4-BE49-F238E27FC236}">
+                <a16:creationId xmlns:a16="http://schemas.microsoft.com/office/drawing/2014/main" id="{7EFB7336-A024-C2C3-7990-8EBA54522DA2}"/>
+              </a:ext>
+            </a:extLst>
+          </p:cNvPr>
+          <p:cNvSpPr/>
+          <p:nvPr/>
+        </p:nvSpPr>
+        <p:spPr>
+          <a:xfrm>
+            <a:off x="3291840" y="1600200"/>
+            <a:ext cx="2606040" cy="685800"/>
+          </a:xfrm>
+          <a:prstGeom prst="rect">
+            <a:avLst/>
+          </a:prstGeom>
+          <a:solidFill>
+            <a:srgbClr val="FFFFFF"/>
+          </a:solidFill>
+          <a:ln w="6350">
+            <a:solidFill>
+              <a:srgbClr val="D8DCE5"/>
+            </a:solidFill>
+            <a:prstDash val="solid"/>
+          </a:ln>
+          <a:effectLst>
+            <a:outerShdw blurRad="101600" dist="25400" dir="16200000" algn="bl" rotWithShape="0">
+              <a:srgbClr val="000000">
+                <a:alpha val="8000"/>
+              </a:srgbClr>
+            </a:outerShdw>
+          </a:effectLst>
+        </p:spPr>
+        <p:txBody>
+          <a:bodyPr/>
+          <a:lstStyle/>
+          <a:p>
+            <a:endParaRPr lang="en-US"/>
+          </a:p>
+        </p:txBody>
+      </p:sp>
+      <p:sp>
+        <p:nvSpPr>
+          <p:cNvPr id="64" name="Text 10">
+            <a:extLst>
+              <a:ext uri="{FF2B5EF4-FFF2-40B4-BE49-F238E27FC236}">
+                <a16:creationId xmlns:a16="http://schemas.microsoft.com/office/drawing/2014/main" id="{35D68F9F-F816-370D-5CD8-10DD0513BD7D}"/>
+              </a:ext>
+            </a:extLst>
+          </p:cNvPr>
+          <p:cNvSpPr/>
+          <p:nvPr/>
+        </p:nvSpPr>
+        <p:spPr>
+          <a:xfrm>
+            <a:off x="3401568" y="1664208"/>
+            <a:ext cx="2377440" cy="182880"/>
+          </a:xfrm>
+          <a:prstGeom prst="rect">
+            <a:avLst/>
+          </a:prstGeom>
+          <a:noFill/>
+          <a:ln/>
+        </p:spPr>
+        <p:txBody>
+          <a:bodyPr wrap="square" lIns="0" tIns="0" rIns="0" bIns="0" rtlCol="0" anchor="ctr"/>
+          <a:lstStyle/>
+          <a:p>
+            <a:pPr marL="0" indent="0">
+              <a:buNone/>
+            </a:pPr>
+            <a:r>
+              <a:rPr lang="en-US" sz="1100" b="1" dirty="0">
+                <a:solidFill>
+                  <a:srgbClr val="0D1B3E"/>
+                </a:solidFill>
+              </a:rPr>
+              <a:t>Django + DRF</a:t>
+            </a:r>
+            <a:endParaRPr lang="en-US" sz="1100" dirty="0"/>
+          </a:p>
+        </p:txBody>
+      </p:sp>
+      <p:sp>
+        <p:nvSpPr>
+          <p:cNvPr id="65" name="Text 11">
+            <a:extLst>
+              <a:ext uri="{FF2B5EF4-FFF2-40B4-BE49-F238E27FC236}">
+                <a16:creationId xmlns:a16="http://schemas.microsoft.com/office/drawing/2014/main" id="{F7F26A5F-C45C-A579-586A-1FAF380072BC}"/>
+              </a:ext>
+            </a:extLst>
+          </p:cNvPr>
+          <p:cNvSpPr/>
+          <p:nvPr/>
+        </p:nvSpPr>
+        <p:spPr>
+          <a:xfrm>
+            <a:off x="3401568" y="1847088"/>
+            <a:ext cx="2377440" cy="365760"/>
+          </a:xfrm>
+          <a:prstGeom prst="rect">
+            <a:avLst/>
+          </a:prstGeom>
+          <a:noFill/>
+          <a:ln/>
+        </p:spPr>
+        <p:txBody>
+          <a:bodyPr wrap="square" lIns="0" tIns="0" rIns="0" bIns="0" rtlCol="0" anchor="ctr"/>
+          <a:lstStyle/>
+          <a:p>
+            <a:pPr marL="0" indent="0">
+              <a:buNone/>
+            </a:pPr>
+            <a:r>
+              <a:rPr lang="en-US" sz="800" dirty="0">
+                <a:solidFill>
+                  <a:srgbClr val="475569"/>
+                </a:solidFill>
+              </a:rPr>
+              <a:t>REST API – JWT auth – Business Logic</a:t>
+            </a:r>
+            <a:endParaRPr lang="en-US" sz="800" dirty="0"/>
+          </a:p>
+        </p:txBody>
+      </p:sp>
+      <p:sp>
+        <p:nvSpPr>
+          <p:cNvPr id="66" name="Shape 12">
+            <a:extLst>
+              <a:ext uri="{FF2B5EF4-FFF2-40B4-BE49-F238E27FC236}">
+                <a16:creationId xmlns:a16="http://schemas.microsoft.com/office/drawing/2014/main" id="{8D96B1B9-9506-3AA8-66FD-91E72E83773B}"/>
+              </a:ext>
+            </a:extLst>
+          </p:cNvPr>
+          <p:cNvSpPr/>
+          <p:nvPr/>
+        </p:nvSpPr>
+        <p:spPr>
+          <a:xfrm>
+            <a:off x="6126480" y="1097280"/>
+            <a:ext cx="2606040" cy="502920"/>
+          </a:xfrm>
+          <a:prstGeom prst="rect">
+            <a:avLst/>
+          </a:prstGeom>
+          <a:solidFill>
+            <a:srgbClr val="1D9E75"/>
+          </a:solidFill>
+          <a:ln w="12700">
+            <a:solidFill>
+              <a:srgbClr val="1D9E75"/>
+            </a:solidFill>
+            <a:prstDash val="solid"/>
+          </a:ln>
+        </p:spPr>
+        <p:txBody>
+          <a:bodyPr/>
+          <a:lstStyle/>
+          <a:p>
+            <a:endParaRPr lang="en-US"/>
+          </a:p>
+        </p:txBody>
+      </p:sp>
+      <p:sp>
+        <p:nvSpPr>
+          <p:cNvPr id="68" name="Shape 14">
+            <a:extLst>
+              <a:ext uri="{FF2B5EF4-FFF2-40B4-BE49-F238E27FC236}">
+                <a16:creationId xmlns:a16="http://schemas.microsoft.com/office/drawing/2014/main" id="{F6DD4974-74DD-D34A-E0AD-6233A1EF3569}"/>
+              </a:ext>
+            </a:extLst>
+          </p:cNvPr>
+          <p:cNvSpPr/>
+          <p:nvPr/>
+        </p:nvSpPr>
+        <p:spPr>
+          <a:xfrm>
+            <a:off x="6126480" y="1600200"/>
+            <a:ext cx="2606040" cy="685800"/>
+          </a:xfrm>
+          <a:prstGeom prst="rect">
+            <a:avLst/>
+          </a:prstGeom>
+          <a:solidFill>
+            <a:srgbClr val="FFFFFF"/>
+          </a:solidFill>
+          <a:ln w="6350">
+            <a:solidFill>
+              <a:srgbClr val="D8DCE5"/>
+            </a:solidFill>
+            <a:prstDash val="solid"/>
+          </a:ln>
+          <a:effectLst>
+            <a:outerShdw blurRad="101600" dist="25400" dir="16200000" algn="bl" rotWithShape="0">
+              <a:srgbClr val="000000">
+                <a:alpha val="8000"/>
+              </a:srgbClr>
+            </a:outerShdw>
+          </a:effectLst>
+        </p:spPr>
+        <p:txBody>
+          <a:bodyPr/>
+          <a:lstStyle/>
+          <a:p>
+            <a:endParaRPr lang="en-US"/>
+          </a:p>
+        </p:txBody>
+      </p:sp>
+      <p:sp>
+        <p:nvSpPr>
+          <p:cNvPr id="69" name="Text 15">
+            <a:extLst>
+              <a:ext uri="{FF2B5EF4-FFF2-40B4-BE49-F238E27FC236}">
+                <a16:creationId xmlns:a16="http://schemas.microsoft.com/office/drawing/2014/main" id="{71EC4547-6D91-B66C-6231-30A49961B632}"/>
+              </a:ext>
+            </a:extLst>
+          </p:cNvPr>
+          <p:cNvSpPr/>
+          <p:nvPr/>
+        </p:nvSpPr>
+        <p:spPr>
+          <a:xfrm>
+            <a:off x="6236208" y="1664208"/>
+            <a:ext cx="2377440" cy="182880"/>
+          </a:xfrm>
+          <a:prstGeom prst="rect">
+            <a:avLst/>
+          </a:prstGeom>
+          <a:noFill/>
+          <a:ln/>
+        </p:spPr>
+        <p:txBody>
+          <a:bodyPr wrap="square" lIns="0" tIns="0" rIns="0" bIns="0" rtlCol="0" anchor="ctr"/>
+          <a:lstStyle/>
+          <a:p>
+            <a:pPr marL="0" indent="0">
+              <a:buNone/>
+            </a:pPr>
+            <a:r>
+              <a:rPr lang="en-US" sz="1100" b="1" dirty="0">
+                <a:solidFill>
+                  <a:srgbClr val="0D1B3E"/>
+                </a:solidFill>
+              </a:rPr>
+              <a:t>MySQL 8.0</a:t>
+            </a:r>
+            <a:endParaRPr lang="en-US" sz="1100" dirty="0"/>
+          </a:p>
+        </p:txBody>
+      </p:sp>
+      <p:sp>
+        <p:nvSpPr>
+          <p:cNvPr id="70" name="Text 16">
+            <a:extLst>
+              <a:ext uri="{FF2B5EF4-FFF2-40B4-BE49-F238E27FC236}">
+                <a16:creationId xmlns:a16="http://schemas.microsoft.com/office/drawing/2014/main" id="{441060B9-6EFC-7328-9A6E-8BF0C70E0791}"/>
+              </a:ext>
+            </a:extLst>
+          </p:cNvPr>
+          <p:cNvSpPr/>
+          <p:nvPr/>
+        </p:nvSpPr>
+        <p:spPr>
+          <a:xfrm>
+            <a:off x="6236208" y="1847088"/>
+            <a:ext cx="2377440" cy="365760"/>
+          </a:xfrm>
+          <a:prstGeom prst="rect">
+            <a:avLst/>
+          </a:prstGeom>
+          <a:noFill/>
+          <a:ln/>
+        </p:spPr>
+        <p:txBody>
+          <a:bodyPr wrap="square" lIns="0" tIns="0" rIns="0" bIns="0" rtlCol="0" anchor="ctr"/>
+          <a:lstStyle/>
+          <a:p>
+            <a:pPr marL="0" indent="0">
+              <a:buNone/>
+            </a:pPr>
+            <a:r>
+              <a:rPr lang="en-US" sz="800" dirty="0">
+                <a:solidFill>
+                  <a:srgbClr val="475569"/>
+                </a:solidFill>
+              </a:rPr>
+              <a:t>Relational Schema – Seed Data – Migrations</a:t>
+            </a:r>
+            <a:endParaRPr lang="en-US" sz="800" dirty="0"/>
+          </a:p>
+        </p:txBody>
+      </p:sp>
+      <p:sp>
+        <p:nvSpPr>
+          <p:cNvPr id="71" name="Text 17">
+            <a:extLst>
+              <a:ext uri="{FF2B5EF4-FFF2-40B4-BE49-F238E27FC236}">
+                <a16:creationId xmlns:a16="http://schemas.microsoft.com/office/drawing/2014/main" id="{C930D2EA-1438-FFF9-94B7-8764BD7E9D8A}"/>
+              </a:ext>
+            </a:extLst>
+          </p:cNvPr>
+          <p:cNvSpPr/>
+          <p:nvPr/>
+        </p:nvSpPr>
+        <p:spPr>
+          <a:xfrm>
+            <a:off x="457200" y="2395728"/>
+            <a:ext cx="2743200" cy="228600"/>
+          </a:xfrm>
+          <a:prstGeom prst="rect">
+            <a:avLst/>
+          </a:prstGeom>
+          <a:noFill/>
+          <a:ln/>
+        </p:spPr>
+        <p:txBody>
+          <a:bodyPr wrap="square" lIns="0" tIns="0" rIns="0" bIns="0" rtlCol="0" anchor="ctr"/>
+          <a:lstStyle/>
+          <a:p>
+            <a:pPr marL="0" indent="0">
+              <a:buNone/>
+            </a:pPr>
+            <a:r>
+              <a:rPr lang="en-US" sz="1100" b="1" dirty="0">
+                <a:solidFill>
+                  <a:srgbClr val="0D1B3E"/>
+                </a:solidFill>
+              </a:rPr>
+              <a:t>Tools &amp; Stack</a:t>
+            </a:r>
+            <a:endParaRPr lang="en-US" sz="1100" dirty="0"/>
+          </a:p>
+        </p:txBody>
+      </p:sp>
+      <p:sp>
+        <p:nvSpPr>
+          <p:cNvPr id="72" name="Shape 18">
+            <a:extLst>
+              <a:ext uri="{FF2B5EF4-FFF2-40B4-BE49-F238E27FC236}">
+                <a16:creationId xmlns:a16="http://schemas.microsoft.com/office/drawing/2014/main" id="{A2F16956-9D71-9F2F-72BB-534626206FC4}"/>
+              </a:ext>
+            </a:extLst>
+          </p:cNvPr>
+          <p:cNvSpPr/>
+          <p:nvPr/>
+        </p:nvSpPr>
+        <p:spPr>
+          <a:xfrm>
+            <a:off x="457200" y="2651760"/>
+            <a:ext cx="1316736" cy="274320"/>
           </a:xfrm>
           <a:prstGeom prst="rect">
             <a:avLst/>
@@ -9281,206 +9987,154 @@
           </a:p>
         </p:txBody>
       </p:sp>
-      <p:pic>
-        <p:nvPicPr>
-          <p:cNvPr id="5" name="Image 0" descr="preencoded.png"/>
-          <p:cNvPicPr>
-            <a:picLocks noChangeAspect="1"/>
-          </p:cNvPicPr>
-          <p:nvPr/>
-        </p:nvPicPr>
-        <p:blipFill>
-          <a:blip r:embed="rId3"/>
-          <a:stretch>
-            <a:fillRect/>
-          </a:stretch>
-        </p:blipFill>
-        <p:spPr>
-          <a:xfrm>
-            <a:off x="594360" y="1389888"/>
-            <a:ext cx="411480" cy="411480"/>
-          </a:xfrm>
-          <a:prstGeom prst="rect">
-            <a:avLst/>
-          </a:prstGeom>
-        </p:spPr>
-      </p:pic>
-      <p:sp>
-        <p:nvSpPr>
-          <p:cNvPr id="6" name="Text 3"/>
-          <p:cNvSpPr/>
-          <p:nvPr/>
-        </p:nvSpPr>
-        <p:spPr>
-          <a:xfrm>
-            <a:off x="1051560" y="1325880"/>
-            <a:ext cx="1828800" cy="594360"/>
-          </a:xfrm>
-          <a:prstGeom prst="rect">
-            <a:avLst/>
-          </a:prstGeom>
-          <a:noFill/>
-          <a:ln/>
-        </p:spPr>
-        <p:txBody>
-          <a:bodyPr wrap="square" lIns="0" tIns="0" rIns="0" bIns="0" rtlCol="0" anchor="ctr"/>
-          <a:lstStyle/>
-          <a:p>
-            <a:pPr marL="0" indent="0">
-              <a:buNone/>
-            </a:pPr>
-            <a:r>
-              <a:rPr lang="en-US" sz="1800" b="1" dirty="0">
+      <p:sp>
+        <p:nvSpPr>
+          <p:cNvPr id="73" name="Text 19">
+            <a:extLst>
+              <a:ext uri="{FF2B5EF4-FFF2-40B4-BE49-F238E27FC236}">
+                <a16:creationId xmlns:a16="http://schemas.microsoft.com/office/drawing/2014/main" id="{5809C058-CA4E-6880-0C64-9E8B95F9AC7E}"/>
+              </a:ext>
+            </a:extLst>
+          </p:cNvPr>
+          <p:cNvSpPr/>
+          <p:nvPr/>
+        </p:nvSpPr>
+        <p:spPr>
+          <a:xfrm>
+            <a:off x="457200" y="2651760"/>
+            <a:ext cx="1316736" cy="274320"/>
+          </a:xfrm>
+          <a:prstGeom prst="rect">
+            <a:avLst/>
+          </a:prstGeom>
+          <a:noFill/>
+          <a:ln/>
+        </p:spPr>
+        <p:txBody>
+          <a:bodyPr wrap="square" lIns="0" tIns="0" rIns="0" bIns="0" rtlCol="0" anchor="ctr"/>
+          <a:lstStyle/>
+          <a:p>
+            <a:pPr marL="0" indent="0" algn="ctr">
+              <a:buNone/>
+            </a:pPr>
+            <a:r>
+              <a:rPr lang="en-US" sz="850" b="1" dirty="0">
                 <a:solidFill>
                   <a:srgbClr val="FFFFFF"/>
                 </a:solidFill>
-                <a:latin typeface="Calibri" pitchFamily="34" charset="0"/>
-                <a:ea typeface="Calibri" pitchFamily="34" charset="-122"/>
-                <a:cs typeface="Calibri" pitchFamily="34" charset="-120"/>
-              </a:rPr>
-              <a:t>Frontend</a:t>
-            </a:r>
-            <a:endParaRPr lang="en-US" sz="1800" dirty="0"/>
-          </a:p>
-        </p:txBody>
-      </p:sp>
-      <p:sp>
-        <p:nvSpPr>
-          <p:cNvPr id="7" name="Shape 4"/>
-          <p:cNvSpPr/>
-          <p:nvPr/>
-        </p:nvSpPr>
-        <p:spPr>
-          <a:xfrm>
-            <a:off x="457200" y="1993392"/>
-            <a:ext cx="2560320" cy="1051560"/>
+              </a:rPr>
+              <a:t>React</a:t>
+            </a:r>
+            <a:endParaRPr lang="en-US" sz="850" dirty="0"/>
+          </a:p>
+        </p:txBody>
+      </p:sp>
+      <p:sp>
+        <p:nvSpPr>
+          <p:cNvPr id="74" name="Shape 20">
+            <a:extLst>
+              <a:ext uri="{FF2B5EF4-FFF2-40B4-BE49-F238E27FC236}">
+                <a16:creationId xmlns:a16="http://schemas.microsoft.com/office/drawing/2014/main" id="{AB515E14-E6BD-894E-9427-7587661A43DC}"/>
+              </a:ext>
+            </a:extLst>
+          </p:cNvPr>
+          <p:cNvSpPr/>
+          <p:nvPr/>
+        </p:nvSpPr>
+        <p:spPr>
+          <a:xfrm>
+            <a:off x="1865376" y="2651760"/>
+            <a:ext cx="1316736" cy="274320"/>
           </a:xfrm>
           <a:prstGeom prst="rect">
             <a:avLst/>
           </a:prstGeom>
           <a:solidFill>
-            <a:srgbClr val="FFFFFF"/>
+            <a:srgbClr val="4F46E5"/>
           </a:solidFill>
           <a:ln w="12700">
             <a:solidFill>
-              <a:srgbClr val="E5E7EB"/>
+              <a:srgbClr val="4F46E5"/>
             </a:solidFill>
             <a:prstDash val="solid"/>
           </a:ln>
-          <a:effectLst>
-            <a:outerShdw blurRad="101600" dist="25400" dir="8100000" algn="bl" rotWithShape="0">
-              <a:srgbClr val="000000">
-                <a:alpha val="7000"/>
-              </a:srgbClr>
-            </a:outerShdw>
-          </a:effectLst>
         </p:spPr>
         <p:txBody>
           <a:bodyPr/>
           <a:lstStyle/>
           <a:p>
-            <a:endParaRPr lang="en-US" dirty="0"/>
-          </a:p>
-        </p:txBody>
-      </p:sp>
-      <p:sp>
-        <p:nvSpPr>
-          <p:cNvPr id="8" name="Text 5"/>
-          <p:cNvSpPr/>
-          <p:nvPr/>
-        </p:nvSpPr>
-        <p:spPr>
-          <a:xfrm>
-            <a:off x="566928" y="2084832"/>
-            <a:ext cx="2377440" cy="292608"/>
-          </a:xfrm>
-          <a:prstGeom prst="rect">
-            <a:avLst/>
-          </a:prstGeom>
-          <a:noFill/>
-          <a:ln/>
-        </p:spPr>
-        <p:txBody>
-          <a:bodyPr wrap="square" lIns="0" tIns="0" rIns="0" bIns="0" rtlCol="0" anchor="ctr"/>
-          <a:lstStyle/>
-          <a:p>
-            <a:pPr marL="0" indent="0">
-              <a:buNone/>
-            </a:pPr>
-            <a:r>
-              <a:rPr lang="en-US" sz="1200" b="1" dirty="0">
-                <a:solidFill>
-                  <a:srgbClr val="1B2B5E"/>
-                </a:solidFill>
-                <a:latin typeface="Calibri" pitchFamily="34" charset="0"/>
-                <a:ea typeface="Calibri" pitchFamily="34" charset="-122"/>
-                <a:cs typeface="Calibri" pitchFamily="34" charset="-120"/>
-              </a:rPr>
-              <a:t>React </a:t>
-            </a:r>
-            <a:endParaRPr lang="en-US" sz="1200" dirty="0"/>
-          </a:p>
-        </p:txBody>
-      </p:sp>
-      <p:sp>
-        <p:nvSpPr>
-          <p:cNvPr id="9" name="Text 6"/>
-          <p:cNvSpPr/>
-          <p:nvPr/>
-        </p:nvSpPr>
-        <p:spPr>
-          <a:xfrm>
-            <a:off x="566928" y="2395728"/>
-            <a:ext cx="2377440" cy="548640"/>
-          </a:xfrm>
-          <a:prstGeom prst="rect">
-            <a:avLst/>
-          </a:prstGeom>
-          <a:noFill/>
-          <a:ln/>
-        </p:spPr>
-        <p:txBody>
-          <a:bodyPr wrap="square" lIns="0" tIns="0" rIns="0" bIns="0" rtlCol="0" anchor="ctr"/>
-          <a:lstStyle/>
-          <a:p>
-            <a:pPr marL="0" indent="0">
-              <a:buNone/>
-            </a:pPr>
-            <a:r>
-              <a:rPr lang="en-US" sz="1000" dirty="0">
-                <a:solidFill>
-                  <a:srgbClr val="6B7280"/>
-                </a:solidFill>
-                <a:latin typeface="Calibri" pitchFamily="34" charset="0"/>
-                <a:ea typeface="Calibri" pitchFamily="34" charset="-122"/>
-                <a:cs typeface="Calibri" pitchFamily="34" charset="-120"/>
-              </a:rPr>
-              <a:t>SPA – Component Based – SimpleJWT auth </a:t>
-            </a:r>
-            <a:endParaRPr lang="en-US" sz="1000" dirty="0"/>
-          </a:p>
-        </p:txBody>
-      </p:sp>
-      <p:sp>
-        <p:nvSpPr>
-          <p:cNvPr id="10" name="Shape 7"/>
-          <p:cNvSpPr/>
-          <p:nvPr/>
-        </p:nvSpPr>
-        <p:spPr>
-          <a:xfrm>
-            <a:off x="3017520" y="1554480"/>
-            <a:ext cx="274320" cy="91440"/>
+            <a:endParaRPr lang="en-US"/>
+          </a:p>
+        </p:txBody>
+      </p:sp>
+      <p:sp>
+        <p:nvSpPr>
+          <p:cNvPr id="75" name="Text 21">
+            <a:extLst>
+              <a:ext uri="{FF2B5EF4-FFF2-40B4-BE49-F238E27FC236}">
+                <a16:creationId xmlns:a16="http://schemas.microsoft.com/office/drawing/2014/main" id="{DE64E97A-3B1A-C421-8846-31A10A560D78}"/>
+              </a:ext>
+            </a:extLst>
+          </p:cNvPr>
+          <p:cNvSpPr/>
+          <p:nvPr/>
+        </p:nvSpPr>
+        <p:spPr>
+          <a:xfrm>
+            <a:off x="1865376" y="2651760"/>
+            <a:ext cx="1316736" cy="274320"/>
+          </a:xfrm>
+          <a:prstGeom prst="rect">
+            <a:avLst/>
+          </a:prstGeom>
+          <a:noFill/>
+          <a:ln/>
+        </p:spPr>
+        <p:txBody>
+          <a:bodyPr wrap="square" lIns="0" tIns="0" rIns="0" bIns="0" rtlCol="0" anchor="ctr"/>
+          <a:lstStyle/>
+          <a:p>
+            <a:pPr marL="0" indent="0" algn="ctr">
+              <a:buNone/>
+            </a:pPr>
+            <a:r>
+              <a:rPr lang="en-US" sz="850" b="1" dirty="0">
+                <a:solidFill>
+                  <a:srgbClr val="FFFFFF"/>
+                </a:solidFill>
+              </a:rPr>
+              <a:t>Django + DRF</a:t>
+            </a:r>
+            <a:endParaRPr lang="en-US" sz="850" dirty="0"/>
+          </a:p>
+        </p:txBody>
+      </p:sp>
+      <p:sp>
+        <p:nvSpPr>
+          <p:cNvPr id="76" name="Shape 22">
+            <a:extLst>
+              <a:ext uri="{FF2B5EF4-FFF2-40B4-BE49-F238E27FC236}">
+                <a16:creationId xmlns:a16="http://schemas.microsoft.com/office/drawing/2014/main" id="{232CA1A5-0633-5BA2-7FFE-C5F1C2A1DC9D}"/>
+              </a:ext>
+            </a:extLst>
+          </p:cNvPr>
+          <p:cNvSpPr/>
+          <p:nvPr/>
+        </p:nvSpPr>
+        <p:spPr>
+          <a:xfrm>
+            <a:off x="3273552" y="2651760"/>
+            <a:ext cx="1316736" cy="274320"/>
           </a:xfrm>
           <a:prstGeom prst="rect">
             <a:avLst/>
           </a:prstGeom>
           <a:solidFill>
-            <a:srgbClr val="CBD5E1"/>
+            <a:srgbClr val="F59E0B"/>
           </a:solidFill>
           <a:ln w="12700">
             <a:solidFill>
-              <a:srgbClr val="CBD5E1"/>
+              <a:srgbClr val="F59E0B"/>
             </a:solidFill>
             <a:prstDash val="solid"/>
           </a:ln>
@@ -9495,258 +10149,62 @@
       </p:sp>
       <p:sp>
         <p:nvSpPr>
-          <p:cNvPr id="11" name="Shape 8"/>
-          <p:cNvSpPr/>
-          <p:nvPr/>
-        </p:nvSpPr>
-        <p:spPr>
-          <a:xfrm>
-            <a:off x="3291840" y="1325880"/>
-            <a:ext cx="2560320" cy="594360"/>
-          </a:xfrm>
-          <a:prstGeom prst="rect">
-            <a:avLst/>
-          </a:prstGeom>
-          <a:solidFill>
-            <a:srgbClr val="1B2B5E"/>
-          </a:solidFill>
-          <a:ln w="12700">
-            <a:solidFill>
-              <a:srgbClr val="1B2B5E"/>
-            </a:solidFill>
-            <a:prstDash val="solid"/>
-          </a:ln>
-        </p:spPr>
-        <p:txBody>
-          <a:bodyPr/>
-          <a:lstStyle/>
-          <a:p>
-            <a:endParaRPr lang="en-US"/>
-          </a:p>
-        </p:txBody>
-      </p:sp>
-      <p:pic>
-        <p:nvPicPr>
-          <p:cNvPr id="12" name="Image 1" descr="preencoded.png"/>
-          <p:cNvPicPr>
-            <a:picLocks noChangeAspect="1"/>
-          </p:cNvPicPr>
-          <p:nvPr/>
-        </p:nvPicPr>
-        <p:blipFill>
-          <a:blip r:embed="rId4"/>
-          <a:stretch>
-            <a:fillRect/>
-          </a:stretch>
-        </p:blipFill>
-        <p:spPr>
-          <a:xfrm>
-            <a:off x="3429000" y="1389888"/>
-            <a:ext cx="411480" cy="411480"/>
-          </a:xfrm>
-          <a:prstGeom prst="rect">
-            <a:avLst/>
-          </a:prstGeom>
-        </p:spPr>
-      </p:pic>
-      <p:sp>
-        <p:nvSpPr>
-          <p:cNvPr id="13" name="Text 9"/>
-          <p:cNvSpPr/>
-          <p:nvPr/>
-        </p:nvSpPr>
-        <p:spPr>
-          <a:xfrm>
-            <a:off x="3886200" y="1325880"/>
-            <a:ext cx="1828800" cy="594360"/>
-          </a:xfrm>
-          <a:prstGeom prst="rect">
-            <a:avLst/>
-          </a:prstGeom>
-          <a:noFill/>
-          <a:ln/>
-        </p:spPr>
-        <p:txBody>
-          <a:bodyPr wrap="square" lIns="0" tIns="0" rIns="0" bIns="0" rtlCol="0" anchor="ctr"/>
-          <a:lstStyle/>
-          <a:p>
-            <a:pPr marL="0" indent="0">
-              <a:buNone/>
-            </a:pPr>
-            <a:r>
-              <a:rPr lang="en-US" sz="1800" b="1" dirty="0">
+          <p:cNvPr id="77" name="Text 23">
+            <a:extLst>
+              <a:ext uri="{FF2B5EF4-FFF2-40B4-BE49-F238E27FC236}">
+                <a16:creationId xmlns:a16="http://schemas.microsoft.com/office/drawing/2014/main" id="{9AA33D6C-B668-2A76-4517-0A27156C2070}"/>
+              </a:ext>
+            </a:extLst>
+          </p:cNvPr>
+          <p:cNvSpPr/>
+          <p:nvPr/>
+        </p:nvSpPr>
+        <p:spPr>
+          <a:xfrm>
+            <a:off x="3273552" y="2651760"/>
+            <a:ext cx="1316736" cy="274320"/>
+          </a:xfrm>
+          <a:prstGeom prst="rect">
+            <a:avLst/>
+          </a:prstGeom>
+          <a:noFill/>
+          <a:ln/>
+        </p:spPr>
+        <p:txBody>
+          <a:bodyPr wrap="square" lIns="0" tIns="0" rIns="0" bIns="0" rtlCol="0" anchor="ctr"/>
+          <a:lstStyle/>
+          <a:p>
+            <a:pPr marL="0" indent="0" algn="ctr">
+              <a:buNone/>
+            </a:pPr>
+            <a:r>
+              <a:rPr lang="en-US" sz="850" b="1" dirty="0">
                 <a:solidFill>
                   <a:srgbClr val="FFFFFF"/>
                 </a:solidFill>
-                <a:latin typeface="Calibri" pitchFamily="34" charset="0"/>
-                <a:ea typeface="Calibri" pitchFamily="34" charset="-122"/>
-                <a:cs typeface="Calibri" pitchFamily="34" charset="-120"/>
-              </a:rPr>
-              <a:t>Backend</a:t>
-            </a:r>
-            <a:endParaRPr lang="en-US" sz="1800" dirty="0"/>
-          </a:p>
-        </p:txBody>
-      </p:sp>
-      <p:sp>
-        <p:nvSpPr>
-          <p:cNvPr id="14" name="Shape 10"/>
-          <p:cNvSpPr/>
-          <p:nvPr/>
-        </p:nvSpPr>
-        <p:spPr>
-          <a:xfrm>
-            <a:off x="3291840" y="1993392"/>
-            <a:ext cx="2560320" cy="1051560"/>
-          </a:xfrm>
-          <a:prstGeom prst="rect">
-            <a:avLst/>
-          </a:prstGeom>
-          <a:solidFill>
-            <a:srgbClr val="FFFFFF"/>
-          </a:solidFill>
-          <a:ln w="12700">
-            <a:solidFill>
-              <a:srgbClr val="E5E7EB"/>
-            </a:solidFill>
-            <a:prstDash val="solid"/>
-          </a:ln>
-          <a:effectLst>
-            <a:outerShdw blurRad="101600" dist="25400" dir="8100000" algn="bl" rotWithShape="0">
-              <a:srgbClr val="000000">
-                <a:alpha val="7000"/>
-              </a:srgbClr>
-            </a:outerShdw>
-          </a:effectLst>
-        </p:spPr>
-        <p:txBody>
-          <a:bodyPr/>
-          <a:lstStyle/>
-          <a:p>
-            <a:endParaRPr lang="en-US"/>
-          </a:p>
-        </p:txBody>
-      </p:sp>
-      <p:sp>
-        <p:nvSpPr>
-          <p:cNvPr id="15" name="Text 11"/>
-          <p:cNvSpPr/>
-          <p:nvPr/>
-        </p:nvSpPr>
-        <p:spPr>
-          <a:xfrm>
-            <a:off x="3401568" y="2084832"/>
-            <a:ext cx="2377440" cy="292608"/>
-          </a:xfrm>
-          <a:prstGeom prst="rect">
-            <a:avLst/>
-          </a:prstGeom>
-          <a:noFill/>
-          <a:ln/>
-        </p:spPr>
-        <p:txBody>
-          <a:bodyPr wrap="square" lIns="0" tIns="0" rIns="0" bIns="0" rtlCol="0" anchor="ctr"/>
-          <a:lstStyle/>
-          <a:p>
-            <a:pPr marL="0" indent="0">
-              <a:buNone/>
-            </a:pPr>
-            <a:r>
-              <a:rPr lang="en-US" sz="1200" b="1" dirty="0">
-                <a:solidFill>
-                  <a:srgbClr val="1B2B5E"/>
-                </a:solidFill>
-                <a:latin typeface="Calibri" pitchFamily="34" charset="0"/>
-                <a:ea typeface="Calibri" pitchFamily="34" charset="-122"/>
-                <a:cs typeface="Calibri" pitchFamily="34" charset="-120"/>
-              </a:rPr>
-              <a:t>Django + DRF</a:t>
-            </a:r>
-            <a:endParaRPr lang="en-US" sz="1200" dirty="0"/>
-          </a:p>
-        </p:txBody>
-      </p:sp>
-      <p:sp>
-        <p:nvSpPr>
-          <p:cNvPr id="16" name="Text 12"/>
-          <p:cNvSpPr/>
-          <p:nvPr/>
-        </p:nvSpPr>
-        <p:spPr>
-          <a:xfrm>
-            <a:off x="3401568" y="2395728"/>
-            <a:ext cx="2377440" cy="548640"/>
-          </a:xfrm>
-          <a:prstGeom prst="rect">
-            <a:avLst/>
-          </a:prstGeom>
-          <a:noFill/>
-          <a:ln/>
-        </p:spPr>
-        <p:txBody>
-          <a:bodyPr wrap="square" lIns="0" tIns="0" rIns="0" bIns="0" rtlCol="0" anchor="ctr"/>
-          <a:lstStyle/>
-          <a:p>
-            <a:pPr marL="0" indent="0">
-              <a:buNone/>
-            </a:pPr>
-            <a:r>
-              <a:rPr lang="en-US" sz="1000" dirty="0">
-                <a:solidFill>
-                  <a:srgbClr val="6B7280"/>
-                </a:solidFill>
-                <a:latin typeface="Calibri" pitchFamily="34" charset="0"/>
-                <a:ea typeface="Calibri" pitchFamily="34" charset="-122"/>
-                <a:cs typeface="Calibri" pitchFamily="34" charset="-120"/>
-              </a:rPr>
-              <a:t>REST API – JWT auth – Business Logic</a:t>
-            </a:r>
-            <a:endParaRPr lang="en-US" sz="1000" dirty="0"/>
-          </a:p>
-        </p:txBody>
-      </p:sp>
-      <p:sp>
-        <p:nvSpPr>
-          <p:cNvPr id="17" name="Shape 13"/>
-          <p:cNvSpPr/>
-          <p:nvPr/>
-        </p:nvSpPr>
-        <p:spPr>
-          <a:xfrm>
-            <a:off x="5852160" y="1554480"/>
-            <a:ext cx="274320" cy="91440"/>
-          </a:xfrm>
-          <a:prstGeom prst="rect">
-            <a:avLst/>
-          </a:prstGeom>
-          <a:solidFill>
-            <a:srgbClr val="CBD5E1"/>
-          </a:solidFill>
-          <a:ln w="12700">
-            <a:solidFill>
-              <a:srgbClr val="CBD5E1"/>
-            </a:solidFill>
-            <a:prstDash val="solid"/>
-          </a:ln>
-        </p:spPr>
-        <p:txBody>
-          <a:bodyPr/>
-          <a:lstStyle/>
-          <a:p>
-            <a:endParaRPr lang="en-US"/>
-          </a:p>
-        </p:txBody>
-      </p:sp>
-      <p:sp>
-        <p:nvSpPr>
-          <p:cNvPr id="18" name="Shape 14"/>
-          <p:cNvSpPr/>
-          <p:nvPr/>
-        </p:nvSpPr>
-        <p:spPr>
-          <a:xfrm>
-            <a:off x="6126480" y="1325880"/>
-            <a:ext cx="2560320" cy="594360"/>
+              </a:rPr>
+              <a:t>MySQL 8.0</a:t>
+            </a:r>
+            <a:endParaRPr lang="en-US" sz="850" dirty="0"/>
+          </a:p>
+        </p:txBody>
+      </p:sp>
+      <p:sp>
+        <p:nvSpPr>
+          <p:cNvPr id="78" name="Shape 24">
+            <a:extLst>
+              <a:ext uri="{FF2B5EF4-FFF2-40B4-BE49-F238E27FC236}">
+                <a16:creationId xmlns:a16="http://schemas.microsoft.com/office/drawing/2014/main" id="{FE726050-0B2D-8B00-DAA5-753D9739BCF7}"/>
+              </a:ext>
+            </a:extLst>
+          </p:cNvPr>
+          <p:cNvSpPr/>
+          <p:nvPr/>
+        </p:nvSpPr>
+        <p:spPr>
+          <a:xfrm>
+            <a:off x="4681728" y="2651760"/>
+            <a:ext cx="1316736" cy="274320"/>
           </a:xfrm>
           <a:prstGeom prst="rect">
             <a:avLst/>
@@ -9769,189 +10227,12 @@
           </a:p>
         </p:txBody>
       </p:sp>
-      <p:pic>
-        <p:nvPicPr>
-          <p:cNvPr id="19" name="Image 2" descr="preencoded.png"/>
-          <p:cNvPicPr>
-            <a:picLocks noChangeAspect="1"/>
-          </p:cNvPicPr>
-          <p:nvPr/>
-        </p:nvPicPr>
-        <p:blipFill>
-          <a:blip r:embed="rId5"/>
-          <a:stretch>
-            <a:fillRect/>
-          </a:stretch>
-        </p:blipFill>
-        <p:spPr>
-          <a:xfrm>
-            <a:off x="6263640" y="1389888"/>
-            <a:ext cx="411480" cy="411480"/>
-          </a:xfrm>
-          <a:prstGeom prst="rect">
-            <a:avLst/>
-          </a:prstGeom>
-        </p:spPr>
-      </p:pic>
-      <p:sp>
-        <p:nvSpPr>
-          <p:cNvPr id="20" name="Text 15"/>
-          <p:cNvSpPr/>
-          <p:nvPr/>
-        </p:nvSpPr>
-        <p:spPr>
-          <a:xfrm>
-            <a:off x="6720840" y="1325880"/>
-            <a:ext cx="1828800" cy="594360"/>
-          </a:xfrm>
-          <a:prstGeom prst="rect">
-            <a:avLst/>
-          </a:prstGeom>
-          <a:noFill/>
-          <a:ln/>
-        </p:spPr>
-        <p:txBody>
-          <a:bodyPr wrap="square" lIns="0" tIns="0" rIns="0" bIns="0" rtlCol="0" anchor="ctr"/>
-          <a:lstStyle/>
-          <a:p>
-            <a:pPr marL="0" indent="0">
-              <a:buNone/>
-            </a:pPr>
-            <a:r>
-              <a:rPr lang="en-US" sz="1800" b="1" dirty="0">
-                <a:solidFill>
-                  <a:srgbClr val="FFFFFF"/>
-                </a:solidFill>
-                <a:latin typeface="Calibri" pitchFamily="34" charset="0"/>
-                <a:ea typeface="Calibri" pitchFamily="34" charset="-122"/>
-                <a:cs typeface="Calibri" pitchFamily="34" charset="-120"/>
-              </a:rPr>
-              <a:t>Database</a:t>
-            </a:r>
-            <a:endParaRPr lang="en-US" sz="1800" dirty="0"/>
-          </a:p>
-        </p:txBody>
-      </p:sp>
-      <p:sp>
-        <p:nvSpPr>
-          <p:cNvPr id="21" name="Shape 16"/>
-          <p:cNvSpPr/>
-          <p:nvPr/>
-        </p:nvSpPr>
-        <p:spPr>
-          <a:xfrm>
-            <a:off x="6126480" y="1993392"/>
-            <a:ext cx="2560320" cy="1051560"/>
-          </a:xfrm>
-          <a:prstGeom prst="rect">
-            <a:avLst/>
-          </a:prstGeom>
-          <a:solidFill>
-            <a:srgbClr val="FFFFFF"/>
-          </a:solidFill>
-          <a:ln w="12700">
-            <a:solidFill>
-              <a:srgbClr val="E5E7EB"/>
-            </a:solidFill>
-            <a:prstDash val="solid"/>
-          </a:ln>
-          <a:effectLst>
-            <a:outerShdw blurRad="101600" dist="25400" dir="8100000" algn="bl" rotWithShape="0">
-              <a:srgbClr val="000000">
-                <a:alpha val="7000"/>
-              </a:srgbClr>
-            </a:outerShdw>
-          </a:effectLst>
-        </p:spPr>
-        <p:txBody>
-          <a:bodyPr/>
-          <a:lstStyle/>
-          <a:p>
-            <a:endParaRPr lang="en-US"/>
-          </a:p>
-        </p:txBody>
-      </p:sp>
-      <p:sp>
-        <p:nvSpPr>
-          <p:cNvPr id="22" name="Text 17"/>
-          <p:cNvSpPr/>
-          <p:nvPr/>
-        </p:nvSpPr>
-        <p:spPr>
-          <a:xfrm>
-            <a:off x="6236208" y="2084832"/>
-            <a:ext cx="2377440" cy="292608"/>
-          </a:xfrm>
-          <a:prstGeom prst="rect">
-            <a:avLst/>
-          </a:prstGeom>
-          <a:noFill/>
-          <a:ln/>
-        </p:spPr>
-        <p:txBody>
-          <a:bodyPr wrap="square" lIns="0" tIns="0" rIns="0" bIns="0" rtlCol="0" anchor="ctr"/>
-          <a:lstStyle/>
-          <a:p>
-            <a:pPr marL="0" indent="0">
-              <a:buNone/>
-            </a:pPr>
-            <a:r>
-              <a:rPr lang="en-US" sz="1200" b="1" dirty="0">
-                <a:solidFill>
-                  <a:srgbClr val="1B2B5E"/>
-                </a:solidFill>
-                <a:latin typeface="Calibri" pitchFamily="34" charset="0"/>
-                <a:ea typeface="Calibri" pitchFamily="34" charset="-122"/>
-                <a:cs typeface="Calibri" pitchFamily="34" charset="-120"/>
-              </a:rPr>
-              <a:t>MySQL 8.0</a:t>
-            </a:r>
-            <a:endParaRPr lang="en-US" sz="1200" dirty="0"/>
-          </a:p>
-        </p:txBody>
-      </p:sp>
-      <p:sp>
-        <p:nvSpPr>
-          <p:cNvPr id="23" name="Text 18"/>
-          <p:cNvSpPr/>
-          <p:nvPr/>
-        </p:nvSpPr>
-        <p:spPr>
-          <a:xfrm>
-            <a:off x="6236208" y="2395728"/>
-            <a:ext cx="2377440" cy="548640"/>
-          </a:xfrm>
-          <a:prstGeom prst="rect">
-            <a:avLst/>
-          </a:prstGeom>
-          <a:noFill/>
-          <a:ln/>
-        </p:spPr>
-        <p:txBody>
-          <a:bodyPr wrap="square" lIns="0" tIns="0" rIns="0" bIns="0" rtlCol="0" anchor="ctr"/>
-          <a:lstStyle/>
-          <a:p>
-            <a:r>
-              <a:rPr lang="en-US" sz="1000" dirty="0">
-                <a:solidFill>
-                  <a:srgbClr val="6B7280"/>
-                </a:solidFill>
-                <a:latin typeface="Calibri" pitchFamily="34" charset="0"/>
-                <a:ea typeface="Calibri" pitchFamily="34" charset="-122"/>
-                <a:cs typeface="Calibri" pitchFamily="34" charset="-120"/>
-              </a:rPr>
-              <a:t>Relational Schema – Seed Data – Migrations</a:t>
-            </a:r>
-            <a:endParaRPr lang="en-US" sz="1000" dirty="0"/>
-          </a:p>
-        </p:txBody>
-      </p:sp>
-      <p:sp>
-        <p:nvSpPr>
-          <p:cNvPr id="36" name="Text 26">
+      <p:sp>
+        <p:nvSpPr>
+          <p:cNvPr id="79" name="Text 25">
             <a:extLst>
               <a:ext uri="{FF2B5EF4-FFF2-40B4-BE49-F238E27FC236}">
-                <a16:creationId xmlns:a16="http://schemas.microsoft.com/office/drawing/2014/main" id="{3545F4A7-D330-1B9D-0994-91B21846D95C}"/>
+                <a16:creationId xmlns:a16="http://schemas.microsoft.com/office/drawing/2014/main" id="{B37CC9EC-31A3-57C9-7CF6-4BE4D268AA31}"/>
               </a:ext>
             </a:extLst>
           </p:cNvPr>
@@ -9960,43 +10241,40 @@
         </p:nvSpPr>
         <p:spPr>
           <a:xfrm>
-            <a:off x="457200" y="3118104"/>
-            <a:ext cx="2743200" cy="274320"/>
-          </a:xfrm>
-          <a:prstGeom prst="rect">
-            <a:avLst/>
-          </a:prstGeom>
-          <a:noFill/>
-          <a:ln/>
-        </p:spPr>
-        <p:txBody>
-          <a:bodyPr wrap="square" lIns="0" tIns="0" rIns="0" bIns="0" rtlCol="0" anchor="ctr"/>
-          <a:lstStyle/>
-          <a:p>
-            <a:pPr marL="0" indent="0">
-              <a:buNone/>
-            </a:pPr>
-            <a:r>
-              <a:rPr lang="en-US" sz="1200" b="1" dirty="0">
-                <a:solidFill>
-                  <a:srgbClr val="1B2B5E"/>
-                </a:solidFill>
-                <a:latin typeface="Calibri" pitchFamily="34" charset="0"/>
-                <a:ea typeface="Calibri" pitchFamily="34" charset="-122"/>
-                <a:cs typeface="Calibri" pitchFamily="34" charset="-120"/>
-              </a:rPr>
-              <a:t>Tools &amp; Stack</a:t>
-            </a:r>
-            <a:endParaRPr lang="en-US" sz="1200" dirty="0"/>
-          </a:p>
-        </p:txBody>
-      </p:sp>
-      <p:sp>
-        <p:nvSpPr>
-          <p:cNvPr id="37" name="Shape 27">
+            <a:off x="4681728" y="2651760"/>
+            <a:ext cx="1316736" cy="274320"/>
+          </a:xfrm>
+          <a:prstGeom prst="rect">
+            <a:avLst/>
+          </a:prstGeom>
+          <a:noFill/>
+          <a:ln/>
+        </p:spPr>
+        <p:txBody>
+          <a:bodyPr wrap="square" lIns="0" tIns="0" rIns="0" bIns="0" rtlCol="0" anchor="ctr"/>
+          <a:lstStyle/>
+          <a:p>
+            <a:pPr marL="0" indent="0" algn="ctr">
+              <a:buNone/>
+            </a:pPr>
+            <a:r>
+              <a:rPr lang="en-US" sz="850" b="1" dirty="0">
+                <a:solidFill>
+                  <a:srgbClr val="FFFFFF"/>
+                </a:solidFill>
+              </a:rPr>
+              <a:t>SimpleJWT</a:t>
+            </a:r>
+            <a:endParaRPr lang="en-US" sz="850" dirty="0"/>
+          </a:p>
+        </p:txBody>
+      </p:sp>
+      <p:sp>
+        <p:nvSpPr>
+          <p:cNvPr id="80" name="Shape 26">
             <a:extLst>
               <a:ext uri="{FF2B5EF4-FFF2-40B4-BE49-F238E27FC236}">
-                <a16:creationId xmlns:a16="http://schemas.microsoft.com/office/drawing/2014/main" id="{3147F519-2E5D-A4C9-5A7D-E5A6CC2699BA}"/>
+                <a16:creationId xmlns:a16="http://schemas.microsoft.com/office/drawing/2014/main" id="{6D7A9168-37FC-EA77-327D-BE88EC86FCAA}"/>
               </a:ext>
             </a:extLst>
           </p:cNvPr>
@@ -10005,353 +10283,11 @@
         </p:nvSpPr>
         <p:spPr>
           <a:xfrm>
-            <a:off x="457200" y="3483864"/>
-            <a:ext cx="1143000" cy="384048"/>
-          </a:xfrm>
-          <a:prstGeom prst="roundRect">
-            <a:avLst>
-              <a:gd name="adj" fmla="val 19048"/>
-            </a:avLst>
-          </a:prstGeom>
-          <a:solidFill>
-            <a:srgbClr val="0EA5E9"/>
-          </a:solidFill>
-          <a:ln w="12700">
-            <a:solidFill>
-              <a:srgbClr val="0EA5E9"/>
-            </a:solidFill>
-            <a:prstDash val="solid"/>
-          </a:ln>
-        </p:spPr>
-        <p:txBody>
-          <a:bodyPr/>
-          <a:lstStyle/>
-          <a:p>
-            <a:endParaRPr lang="en-US"/>
-          </a:p>
-        </p:txBody>
-      </p:sp>
-      <p:sp>
-        <p:nvSpPr>
-          <p:cNvPr id="38" name="Text 28">
-            <a:extLst>
-              <a:ext uri="{FF2B5EF4-FFF2-40B4-BE49-F238E27FC236}">
-                <a16:creationId xmlns:a16="http://schemas.microsoft.com/office/drawing/2014/main" id="{8B32E473-A0C8-943D-C576-5FA24971F600}"/>
-              </a:ext>
-            </a:extLst>
-          </p:cNvPr>
-          <p:cNvSpPr/>
-          <p:nvPr/>
-        </p:nvSpPr>
-        <p:spPr>
-          <a:xfrm>
-            <a:off x="457200" y="3483864"/>
-            <a:ext cx="1143000" cy="384048"/>
-          </a:xfrm>
-          <a:prstGeom prst="rect">
-            <a:avLst/>
-          </a:prstGeom>
-          <a:noFill/>
-          <a:ln/>
-        </p:spPr>
-        <p:txBody>
-          <a:bodyPr wrap="square" lIns="0" tIns="0" rIns="0" bIns="0" rtlCol="0" anchor="ctr"/>
-          <a:lstStyle/>
-          <a:p>
-            <a:pPr marL="0" indent="0" algn="ctr">
-              <a:buNone/>
-            </a:pPr>
-            <a:r>
-              <a:rPr lang="en-US" sz="900" b="1" dirty="0">
-                <a:solidFill>
-                  <a:srgbClr val="FFFFFF"/>
-                </a:solidFill>
-                <a:latin typeface="Calibri" pitchFamily="34" charset="0"/>
-                <a:ea typeface="Calibri" pitchFamily="34" charset="-122"/>
-                <a:cs typeface="Calibri" pitchFamily="34" charset="-120"/>
-              </a:rPr>
-              <a:t>React</a:t>
-            </a:r>
-            <a:endParaRPr lang="en-US" sz="900" dirty="0"/>
-          </a:p>
-        </p:txBody>
-      </p:sp>
-      <p:sp>
-        <p:nvSpPr>
-          <p:cNvPr id="39" name="Shape 29">
-            <a:extLst>
-              <a:ext uri="{FF2B5EF4-FFF2-40B4-BE49-F238E27FC236}">
-                <a16:creationId xmlns:a16="http://schemas.microsoft.com/office/drawing/2014/main" id="{25C2880A-063F-0D86-5B8A-86946C98DF53}"/>
-              </a:ext>
-            </a:extLst>
-          </p:cNvPr>
-          <p:cNvSpPr/>
-          <p:nvPr/>
-        </p:nvSpPr>
-        <p:spPr>
-          <a:xfrm>
-            <a:off x="1719072" y="3483864"/>
-            <a:ext cx="1143000" cy="384048"/>
-          </a:xfrm>
-          <a:prstGeom prst="roundRect">
-            <a:avLst>
-              <a:gd name="adj" fmla="val 19048"/>
-            </a:avLst>
-          </a:prstGeom>
-          <a:solidFill>
-            <a:srgbClr val="7C3AED"/>
-          </a:solidFill>
-          <a:ln w="12700">
-            <a:solidFill>
-              <a:srgbClr val="7C3AED"/>
-            </a:solidFill>
-            <a:prstDash val="solid"/>
-          </a:ln>
-        </p:spPr>
-        <p:txBody>
-          <a:bodyPr/>
-          <a:lstStyle/>
-          <a:p>
-            <a:endParaRPr lang="en-US" dirty="0"/>
-          </a:p>
-        </p:txBody>
-      </p:sp>
-      <p:sp>
-        <p:nvSpPr>
-          <p:cNvPr id="40" name="Text 30">
-            <a:extLst>
-              <a:ext uri="{FF2B5EF4-FFF2-40B4-BE49-F238E27FC236}">
-                <a16:creationId xmlns:a16="http://schemas.microsoft.com/office/drawing/2014/main" id="{9F5EE408-164A-6355-041D-E55A0A8D61CD}"/>
-              </a:ext>
-            </a:extLst>
-          </p:cNvPr>
-          <p:cNvSpPr/>
-          <p:nvPr/>
-        </p:nvSpPr>
-        <p:spPr>
-          <a:xfrm>
-            <a:off x="1719072" y="3483864"/>
-            <a:ext cx="1143000" cy="384048"/>
-          </a:xfrm>
-          <a:prstGeom prst="rect">
-            <a:avLst/>
-          </a:prstGeom>
-          <a:noFill/>
-          <a:ln/>
-        </p:spPr>
-        <p:txBody>
-          <a:bodyPr wrap="square" lIns="0" tIns="0" rIns="0" bIns="0" rtlCol="0" anchor="ctr"/>
-          <a:lstStyle/>
-          <a:p>
-            <a:pPr marL="0" indent="0" algn="ctr">
-              <a:buNone/>
-            </a:pPr>
-            <a:r>
-              <a:rPr lang="en-US" sz="900" b="1" dirty="0">
-                <a:solidFill>
-                  <a:srgbClr val="FFFFFF"/>
-                </a:solidFill>
-                <a:latin typeface="Calibri" pitchFamily="34" charset="0"/>
-                <a:ea typeface="Calibri" pitchFamily="34" charset="-122"/>
-                <a:cs typeface="Calibri" pitchFamily="34" charset="-120"/>
-              </a:rPr>
-              <a:t>Django + DRF</a:t>
-            </a:r>
-            <a:endParaRPr lang="en-US" sz="900" dirty="0"/>
-          </a:p>
-        </p:txBody>
-      </p:sp>
-      <p:sp>
-        <p:nvSpPr>
-          <p:cNvPr id="41" name="Shape 31">
-            <a:extLst>
-              <a:ext uri="{FF2B5EF4-FFF2-40B4-BE49-F238E27FC236}">
-                <a16:creationId xmlns:a16="http://schemas.microsoft.com/office/drawing/2014/main" id="{30D6B71B-78DE-DD02-83CC-6B57BE931B88}"/>
-              </a:ext>
-            </a:extLst>
-          </p:cNvPr>
-          <p:cNvSpPr/>
-          <p:nvPr/>
-        </p:nvSpPr>
-        <p:spPr>
-          <a:xfrm>
-            <a:off x="2980944" y="3483864"/>
-            <a:ext cx="1143000" cy="384048"/>
-          </a:xfrm>
-          <a:prstGeom prst="roundRect">
-            <a:avLst>
-              <a:gd name="adj" fmla="val 19048"/>
-            </a:avLst>
-          </a:prstGeom>
-          <a:solidFill>
-            <a:srgbClr val="F59E0B"/>
-          </a:solidFill>
-          <a:ln w="12700">
-            <a:solidFill>
-              <a:srgbClr val="F59E0B"/>
-            </a:solidFill>
-            <a:prstDash val="solid"/>
-          </a:ln>
-        </p:spPr>
-        <p:txBody>
-          <a:bodyPr/>
-          <a:lstStyle/>
-          <a:p>
-            <a:endParaRPr lang="en-US"/>
-          </a:p>
-        </p:txBody>
-      </p:sp>
-      <p:sp>
-        <p:nvSpPr>
-          <p:cNvPr id="42" name="Text 32">
-            <a:extLst>
-              <a:ext uri="{FF2B5EF4-FFF2-40B4-BE49-F238E27FC236}">
-                <a16:creationId xmlns:a16="http://schemas.microsoft.com/office/drawing/2014/main" id="{D22F5ED8-79B6-015F-51FD-0E48C7BDE73A}"/>
-              </a:ext>
-            </a:extLst>
-          </p:cNvPr>
-          <p:cNvSpPr/>
-          <p:nvPr/>
-        </p:nvSpPr>
-        <p:spPr>
-          <a:xfrm>
-            <a:off x="2980944" y="3483864"/>
-            <a:ext cx="1143000" cy="384048"/>
-          </a:xfrm>
-          <a:prstGeom prst="rect">
-            <a:avLst/>
-          </a:prstGeom>
-          <a:noFill/>
-          <a:ln/>
-        </p:spPr>
-        <p:txBody>
-          <a:bodyPr wrap="square" lIns="0" tIns="0" rIns="0" bIns="0" rtlCol="0" anchor="ctr"/>
-          <a:lstStyle/>
-          <a:p>
-            <a:pPr marL="0" indent="0" algn="ctr">
-              <a:buNone/>
-            </a:pPr>
-            <a:r>
-              <a:rPr lang="en-US" sz="900" b="1" dirty="0">
-                <a:solidFill>
-                  <a:srgbClr val="FFFFFF"/>
-                </a:solidFill>
-                <a:latin typeface="Calibri" pitchFamily="34" charset="0"/>
-                <a:ea typeface="Calibri" pitchFamily="34" charset="-122"/>
-                <a:cs typeface="Calibri" pitchFamily="34" charset="-120"/>
-              </a:rPr>
-              <a:t>MySQL 8.0</a:t>
-            </a:r>
-            <a:endParaRPr lang="en-US" sz="900" dirty="0"/>
-          </a:p>
-        </p:txBody>
-      </p:sp>
-      <p:sp>
-        <p:nvSpPr>
-          <p:cNvPr id="43" name="Shape 33">
-            <a:extLst>
-              <a:ext uri="{FF2B5EF4-FFF2-40B4-BE49-F238E27FC236}">
-                <a16:creationId xmlns:a16="http://schemas.microsoft.com/office/drawing/2014/main" id="{F45CFDEE-DFB0-CFE2-CDCC-B09F431D0B69}"/>
-              </a:ext>
-            </a:extLst>
-          </p:cNvPr>
-          <p:cNvSpPr/>
-          <p:nvPr/>
-        </p:nvSpPr>
-        <p:spPr>
-          <a:xfrm>
-            <a:off x="4242816" y="3483864"/>
-            <a:ext cx="1143000" cy="384048"/>
-          </a:xfrm>
-          <a:prstGeom prst="roundRect">
-            <a:avLst>
-              <a:gd name="adj" fmla="val 19048"/>
-            </a:avLst>
-          </a:prstGeom>
-          <a:solidFill>
-            <a:srgbClr val="10B981"/>
-          </a:solidFill>
-          <a:ln w="12700">
-            <a:solidFill>
-              <a:srgbClr val="10B981"/>
-            </a:solidFill>
-            <a:prstDash val="solid"/>
-          </a:ln>
-        </p:spPr>
-        <p:txBody>
-          <a:bodyPr/>
-          <a:lstStyle/>
-          <a:p>
-            <a:endParaRPr lang="en-US"/>
-          </a:p>
-        </p:txBody>
-      </p:sp>
-      <p:sp>
-        <p:nvSpPr>
-          <p:cNvPr id="44" name="Text 34">
-            <a:extLst>
-              <a:ext uri="{FF2B5EF4-FFF2-40B4-BE49-F238E27FC236}">
-                <a16:creationId xmlns:a16="http://schemas.microsoft.com/office/drawing/2014/main" id="{19B1A80C-B7B5-8794-A9B0-044330D1F530}"/>
-              </a:ext>
-            </a:extLst>
-          </p:cNvPr>
-          <p:cNvSpPr/>
-          <p:nvPr/>
-        </p:nvSpPr>
-        <p:spPr>
-          <a:xfrm>
-            <a:off x="4242816" y="3483864"/>
-            <a:ext cx="1143000" cy="384048"/>
-          </a:xfrm>
-          <a:prstGeom prst="rect">
-            <a:avLst/>
-          </a:prstGeom>
-          <a:noFill/>
-          <a:ln/>
-        </p:spPr>
-        <p:txBody>
-          <a:bodyPr wrap="square" lIns="0" tIns="0" rIns="0" bIns="0" rtlCol="0" anchor="ctr"/>
-          <a:lstStyle/>
-          <a:p>
-            <a:pPr marL="0" indent="0" algn="ctr">
-              <a:buNone/>
-            </a:pPr>
-            <a:r>
-              <a:rPr lang="en-US" sz="900" b="1" dirty="0">
-                <a:solidFill>
-                  <a:srgbClr val="FFFFFF"/>
-                </a:solidFill>
-                <a:latin typeface="Calibri" pitchFamily="34" charset="0"/>
-                <a:ea typeface="Calibri" pitchFamily="34" charset="-122"/>
-                <a:cs typeface="Calibri" pitchFamily="34" charset="-120"/>
-              </a:rPr>
-              <a:t>SimpleJWT</a:t>
-            </a:r>
-            <a:endParaRPr lang="en-US" sz="900" dirty="0"/>
-          </a:p>
-        </p:txBody>
-      </p:sp>
-      <p:sp>
-        <p:nvSpPr>
-          <p:cNvPr id="45" name="Shape 35">
-            <a:extLst>
-              <a:ext uri="{FF2B5EF4-FFF2-40B4-BE49-F238E27FC236}">
-                <a16:creationId xmlns:a16="http://schemas.microsoft.com/office/drawing/2014/main" id="{B8AB2B5F-FCFF-D1D1-7C01-277F786E86D0}"/>
-              </a:ext>
-            </a:extLst>
-          </p:cNvPr>
-          <p:cNvSpPr/>
-          <p:nvPr/>
-        </p:nvSpPr>
-        <p:spPr>
-          <a:xfrm>
-            <a:off x="5504688" y="3483864"/>
-            <a:ext cx="1143000" cy="384048"/>
-          </a:xfrm>
-          <a:prstGeom prst="roundRect">
-            <a:avLst>
-              <a:gd name="adj" fmla="val 19048"/>
-            </a:avLst>
+            <a:off x="6089904" y="2651760"/>
+            <a:ext cx="1316736" cy="274320"/>
+          </a:xfrm>
+          <a:prstGeom prst="rect">
+            <a:avLst/>
           </a:prstGeom>
           <a:solidFill>
             <a:srgbClr val="EF4444"/>
@@ -10373,10 +10309,10 @@
       </p:sp>
       <p:sp>
         <p:nvSpPr>
-          <p:cNvPr id="46" name="Text 36">
+          <p:cNvPr id="81" name="Text 27">
             <a:extLst>
               <a:ext uri="{FF2B5EF4-FFF2-40B4-BE49-F238E27FC236}">
-                <a16:creationId xmlns:a16="http://schemas.microsoft.com/office/drawing/2014/main" id="{F2F0DAB4-C82E-7D4A-520F-84719874E228}"/>
+                <a16:creationId xmlns:a16="http://schemas.microsoft.com/office/drawing/2014/main" id="{A3E45DE9-E8C8-829F-7A0B-BDBC1E949230}"/>
               </a:ext>
             </a:extLst>
           </p:cNvPr>
@@ -10385,8 +10321,8 @@
         </p:nvSpPr>
         <p:spPr>
           <a:xfrm>
-            <a:off x="5504688" y="3483864"/>
-            <a:ext cx="1143000" cy="384048"/>
+            <a:off x="6089904" y="2651760"/>
+            <a:ext cx="1316736" cy="274320"/>
           </a:xfrm>
           <a:prstGeom prst="rect">
             <a:avLst/>
@@ -10402,26 +10338,23 @@
               <a:buNone/>
             </a:pPr>
             <a:r>
-              <a:rPr lang="en-US" sz="900" b="1" dirty="0">
+              <a:rPr lang="en-US" sz="850" b="1" dirty="0">
                 <a:solidFill>
                   <a:srgbClr val="FFFFFF"/>
                 </a:solidFill>
-                <a:latin typeface="Calibri" pitchFamily="34" charset="0"/>
-                <a:ea typeface="Calibri" pitchFamily="34" charset="-122"/>
-                <a:cs typeface="Calibri" pitchFamily="34" charset="-120"/>
               </a:rPr>
               <a:t>Robot Framework</a:t>
             </a:r>
-            <a:endParaRPr lang="en-US" sz="900" dirty="0"/>
-          </a:p>
-        </p:txBody>
-      </p:sp>
-      <p:sp>
-        <p:nvSpPr>
-          <p:cNvPr id="47" name="Shape 37">
+            <a:endParaRPr lang="en-US" sz="850" dirty="0"/>
+          </a:p>
+        </p:txBody>
+      </p:sp>
+      <p:sp>
+        <p:nvSpPr>
+          <p:cNvPr id="82" name="Shape 28">
             <a:extLst>
               <a:ext uri="{FF2B5EF4-FFF2-40B4-BE49-F238E27FC236}">
-                <a16:creationId xmlns:a16="http://schemas.microsoft.com/office/drawing/2014/main" id="{72C2E5DE-9A66-5162-EE5F-69011F9BD37B}"/>
+                <a16:creationId xmlns:a16="http://schemas.microsoft.com/office/drawing/2014/main" id="{1321C424-7357-A9D2-CA22-789D59CCA104}"/>
               </a:ext>
             </a:extLst>
           </p:cNvPr>
@@ -10430,20 +10363,18 @@
         </p:nvSpPr>
         <p:spPr>
           <a:xfrm>
-            <a:off x="6766560" y="3483864"/>
-            <a:ext cx="1143000" cy="384048"/>
-          </a:xfrm>
-          <a:prstGeom prst="roundRect">
-            <a:avLst>
-              <a:gd name="adj" fmla="val 19048"/>
-            </a:avLst>
+            <a:off x="7498080" y="2651760"/>
+            <a:ext cx="1316736" cy="274320"/>
+          </a:xfrm>
+          <a:prstGeom prst="rect">
+            <a:avLst/>
           </a:prstGeom>
           <a:solidFill>
-            <a:srgbClr val="24292E"/>
+            <a:srgbClr val="1E293B"/>
           </a:solidFill>
           <a:ln w="12700">
             <a:solidFill>
-              <a:srgbClr val="24292E"/>
+              <a:srgbClr val="1E293B"/>
             </a:solidFill>
             <a:prstDash val="solid"/>
           </a:ln>
@@ -10458,10 +10389,10 @@
       </p:sp>
       <p:sp>
         <p:nvSpPr>
-          <p:cNvPr id="48" name="Text 38">
+          <p:cNvPr id="83" name="Text 29">
             <a:extLst>
               <a:ext uri="{FF2B5EF4-FFF2-40B4-BE49-F238E27FC236}">
-                <a16:creationId xmlns:a16="http://schemas.microsoft.com/office/drawing/2014/main" id="{1BE0EB02-E007-CF5A-01E8-7F3444348EBE}"/>
+                <a16:creationId xmlns:a16="http://schemas.microsoft.com/office/drawing/2014/main" id="{903AA382-269C-750A-186D-FB57A216325F}"/>
               </a:ext>
             </a:extLst>
           </p:cNvPr>
@@ -10470,8 +10401,8 @@
         </p:nvSpPr>
         <p:spPr>
           <a:xfrm>
-            <a:off x="6766560" y="3483864"/>
-            <a:ext cx="1143000" cy="384048"/>
+            <a:off x="7498080" y="2651760"/>
+            <a:ext cx="1316736" cy="274320"/>
           </a:xfrm>
           <a:prstGeom prst="rect">
             <a:avLst/>
@@ -10487,26 +10418,23 @@
               <a:buNone/>
             </a:pPr>
             <a:r>
-              <a:rPr lang="en-US" sz="900" b="1" dirty="0">
+              <a:rPr lang="en-US" sz="850" b="1" dirty="0">
                 <a:solidFill>
                   <a:srgbClr val="FFFFFF"/>
                 </a:solidFill>
-                <a:latin typeface="Calibri" pitchFamily="34" charset="0"/>
-                <a:ea typeface="Calibri" pitchFamily="34" charset="-122"/>
-                <a:cs typeface="Calibri" pitchFamily="34" charset="-120"/>
               </a:rPr>
               <a:t>GitHub Actions</a:t>
             </a:r>
-            <a:endParaRPr lang="en-US" sz="900" dirty="0"/>
-          </a:p>
-        </p:txBody>
-      </p:sp>
-      <p:sp>
-        <p:nvSpPr>
-          <p:cNvPr id="49" name="Shape 41">
+            <a:endParaRPr lang="en-US" sz="850" dirty="0"/>
+          </a:p>
+        </p:txBody>
+      </p:sp>
+      <p:sp>
+        <p:nvSpPr>
+          <p:cNvPr id="84" name="Shape 30">
             <a:extLst>
               <a:ext uri="{FF2B5EF4-FFF2-40B4-BE49-F238E27FC236}">
-                <a16:creationId xmlns:a16="http://schemas.microsoft.com/office/drawing/2014/main" id="{1F15D080-B377-3559-924F-7CCA873EE402}"/>
+                <a16:creationId xmlns:a16="http://schemas.microsoft.com/office/drawing/2014/main" id="{F0AD0DFC-0761-9914-A2F1-85A08A290C2D}"/>
               </a:ext>
             </a:extLst>
           </p:cNvPr>
@@ -10515,25 +10443,25 @@
         </p:nvSpPr>
         <p:spPr>
           <a:xfrm>
-            <a:off x="457200" y="3986784"/>
-            <a:ext cx="8412480" cy="822960"/>
+            <a:off x="457200" y="3044952"/>
+            <a:ext cx="8229600" cy="1810512"/>
           </a:xfrm>
           <a:prstGeom prst="rect">
             <a:avLst/>
           </a:prstGeom>
           <a:solidFill>
-            <a:srgbClr val="EFF6FF"/>
+            <a:srgbClr val="FFFFFF"/>
           </a:solidFill>
-          <a:ln w="12700">
+          <a:ln w="6350">
             <a:solidFill>
-              <a:srgbClr val="BFDBFE"/>
+              <a:srgbClr val="D8DCE5"/>
             </a:solidFill>
             <a:prstDash val="solid"/>
           </a:ln>
           <a:effectLst>
-            <a:outerShdw blurRad="101600" dist="25400" dir="8100000" algn="bl" rotWithShape="0">
+            <a:outerShdw blurRad="101600" dist="25400" dir="16200000" algn="bl" rotWithShape="0">
               <a:srgbClr val="000000">
-                <a:alpha val="7000"/>
+                <a:alpha val="8000"/>
               </a:srgbClr>
             </a:outerShdw>
           </a:effectLst>
@@ -10548,10 +10476,10 @@
       </p:sp>
       <p:sp>
         <p:nvSpPr>
-          <p:cNvPr id="50" name="Text 42">
+          <p:cNvPr id="85" name="Text 31">
             <a:extLst>
               <a:ext uri="{FF2B5EF4-FFF2-40B4-BE49-F238E27FC236}">
-                <a16:creationId xmlns:a16="http://schemas.microsoft.com/office/drawing/2014/main" id="{B9FE8C25-4D56-BF65-B8EA-3B4E7BFACE55}"/>
+                <a16:creationId xmlns:a16="http://schemas.microsoft.com/office/drawing/2014/main" id="{BA8F7C36-9577-AF90-1C6E-97E95FD719E9}"/>
               </a:ext>
             </a:extLst>
           </p:cNvPr>
@@ -10560,8 +10488,8 @@
         </p:nvSpPr>
         <p:spPr>
           <a:xfrm>
-            <a:off x="685800" y="4096512"/>
-            <a:ext cx="2011680" cy="274320"/>
+            <a:off x="566928" y="3127248"/>
+            <a:ext cx="914400" cy="201168"/>
           </a:xfrm>
           <a:prstGeom prst="rect">
             <a:avLst/>
@@ -10579,13 +10507,10 @@
             <a:r>
               <a:rPr lang="en-US" sz="1100" b="1" dirty="0">
                 <a:solidFill>
-                  <a:srgbClr val="1B2B5E"/>
-                </a:solidFill>
-                <a:latin typeface="Calibri" pitchFamily="34" charset="0"/>
-                <a:ea typeface="Calibri" pitchFamily="34" charset="-122"/>
-                <a:cs typeface="Calibri" pitchFamily="34" charset="-120"/>
-              </a:rPr>
-              <a:t>[Placeholder]:</a:t>
+                  <a:srgbClr val="0D1B3E"/>
+                </a:solidFill>
+              </a:rPr>
+              <a:t>APIs</a:t>
             </a:r>
             <a:endParaRPr lang="en-US" sz="1100" dirty="0"/>
           </a:p>
@@ -10593,10 +10518,10 @@
       </p:sp>
       <p:sp>
         <p:nvSpPr>
-          <p:cNvPr id="51" name="Text 43">
+          <p:cNvPr id="86" name="Text 32">
             <a:extLst>
               <a:ext uri="{FF2B5EF4-FFF2-40B4-BE49-F238E27FC236}">
-                <a16:creationId xmlns:a16="http://schemas.microsoft.com/office/drawing/2014/main" id="{EC877A60-9AFB-EB56-4D7E-46673F6808BB}"/>
+                <a16:creationId xmlns:a16="http://schemas.microsoft.com/office/drawing/2014/main" id="{19457A24-0BD9-A653-DD2B-3DBAA8B5EABC}"/>
               </a:ext>
             </a:extLst>
           </p:cNvPr>
@@ -10605,8 +10530,8 @@
         </p:nvSpPr>
         <p:spPr>
           <a:xfrm>
-            <a:off x="2697480" y="4096512"/>
-            <a:ext cx="5943600" cy="457200"/>
+            <a:off x="566928" y="3319272"/>
+            <a:ext cx="7863840" cy="164592"/>
           </a:xfrm>
           <a:prstGeom prst="rect">
             <a:avLst/>
@@ -10622,17 +10547,2150 @@
               <a:buNone/>
             </a:pPr>
             <a:r>
-              <a:rPr lang="en-US" sz="1000" dirty="0">
-                <a:solidFill>
-                  <a:srgbClr val="374151"/>
+              <a:rPr lang="en-US" sz="750" dirty="0">
+                <a:solidFill>
+                  <a:srgbClr val="475569"/>
+                </a:solidFill>
+              </a:rPr>
+              <a:t>REST  ·  versioned at /api/v1/  ·  JWT-authenticated  ·  role-enforced (Customer / Business / Guest)</a:t>
+            </a:r>
+            <a:endParaRPr lang="en-US" sz="750" dirty="0"/>
+          </a:p>
+        </p:txBody>
+      </p:sp>
+      <p:sp>
+        <p:nvSpPr>
+          <p:cNvPr id="87" name="Shape 33">
+            <a:extLst>
+              <a:ext uri="{FF2B5EF4-FFF2-40B4-BE49-F238E27FC236}">
+                <a16:creationId xmlns:a16="http://schemas.microsoft.com/office/drawing/2014/main" id="{94A3EAB6-F583-6B6C-C67E-292FB36551E2}"/>
+              </a:ext>
+            </a:extLst>
+          </p:cNvPr>
+          <p:cNvSpPr/>
+          <p:nvPr/>
+        </p:nvSpPr>
+        <p:spPr>
+          <a:xfrm>
+            <a:off x="566928" y="3493008"/>
+            <a:ext cx="7644384" cy="9144"/>
+          </a:xfrm>
+          <a:prstGeom prst="rect">
+            <a:avLst/>
+          </a:prstGeom>
+          <a:solidFill>
+            <a:srgbClr val="D8DCE5"/>
+          </a:solidFill>
+          <a:ln w="12700">
+            <a:solidFill>
+              <a:srgbClr val="D8DCE5"/>
+            </a:solidFill>
+            <a:prstDash val="solid"/>
+          </a:ln>
+        </p:spPr>
+        <p:txBody>
+          <a:bodyPr/>
+          <a:lstStyle/>
+          <a:p>
+            <a:endParaRPr lang="en-US"/>
+          </a:p>
+        </p:txBody>
+      </p:sp>
+      <p:sp>
+        <p:nvSpPr>
+          <p:cNvPr id="88" name="Shape 34">
+            <a:extLst>
+              <a:ext uri="{FF2B5EF4-FFF2-40B4-BE49-F238E27FC236}">
+                <a16:creationId xmlns:a16="http://schemas.microsoft.com/office/drawing/2014/main" id="{0A1B6897-7E10-F9EA-0335-858DD3322E26}"/>
+              </a:ext>
+            </a:extLst>
+          </p:cNvPr>
+          <p:cNvSpPr/>
+          <p:nvPr/>
+        </p:nvSpPr>
+        <p:spPr>
+          <a:xfrm>
+            <a:off x="594360" y="3566160"/>
+            <a:ext cx="384048" cy="155448"/>
+          </a:xfrm>
+          <a:prstGeom prst="rect">
+            <a:avLst/>
+          </a:prstGeom>
+          <a:solidFill>
+            <a:srgbClr val="DCFCE7"/>
+          </a:solidFill>
+          <a:ln w="12700">
+            <a:solidFill>
+              <a:srgbClr val="DCFCE7"/>
+            </a:solidFill>
+            <a:prstDash val="solid"/>
+          </a:ln>
+        </p:spPr>
+        <p:txBody>
+          <a:bodyPr/>
+          <a:lstStyle/>
+          <a:p>
+            <a:endParaRPr lang="en-US"/>
+          </a:p>
+        </p:txBody>
+      </p:sp>
+      <p:sp>
+        <p:nvSpPr>
+          <p:cNvPr id="89" name="Text 35">
+            <a:extLst>
+              <a:ext uri="{FF2B5EF4-FFF2-40B4-BE49-F238E27FC236}">
+                <a16:creationId xmlns:a16="http://schemas.microsoft.com/office/drawing/2014/main" id="{04AC7289-1E1F-64DB-AAFA-0DC6A3097DB8}"/>
+              </a:ext>
+            </a:extLst>
+          </p:cNvPr>
+          <p:cNvSpPr/>
+          <p:nvPr/>
+        </p:nvSpPr>
+        <p:spPr>
+          <a:xfrm>
+            <a:off x="594360" y="3566160"/>
+            <a:ext cx="384048" cy="155448"/>
+          </a:xfrm>
+          <a:prstGeom prst="rect">
+            <a:avLst/>
+          </a:prstGeom>
+          <a:noFill/>
+          <a:ln/>
+        </p:spPr>
+        <p:txBody>
+          <a:bodyPr wrap="square" lIns="0" tIns="0" rIns="0" bIns="0" rtlCol="0" anchor="ctr"/>
+          <a:lstStyle/>
+          <a:p>
+            <a:pPr marL="0" indent="0" algn="ctr">
+              <a:buNone/>
+            </a:pPr>
+            <a:r>
+              <a:rPr lang="en-US" sz="600" b="1" dirty="0">
+                <a:solidFill>
+                  <a:srgbClr val="166534"/>
+                </a:solidFill>
+              </a:rPr>
+              <a:t>POST</a:t>
+            </a:r>
+            <a:endParaRPr lang="en-US" sz="600" dirty="0"/>
+          </a:p>
+        </p:txBody>
+      </p:sp>
+      <p:sp>
+        <p:nvSpPr>
+          <p:cNvPr id="90" name="Text 36">
+            <a:extLst>
+              <a:ext uri="{FF2B5EF4-FFF2-40B4-BE49-F238E27FC236}">
+                <a16:creationId xmlns:a16="http://schemas.microsoft.com/office/drawing/2014/main" id="{B609767F-9EF2-6E18-50C8-78A460291F32}"/>
+              </a:ext>
+            </a:extLst>
+          </p:cNvPr>
+          <p:cNvSpPr/>
+          <p:nvPr/>
+        </p:nvSpPr>
+        <p:spPr>
+          <a:xfrm>
+            <a:off x="2377440" y="3557016"/>
+            <a:ext cx="3108960" cy="164592"/>
+          </a:xfrm>
+          <a:prstGeom prst="rect">
+            <a:avLst/>
+          </a:prstGeom>
+          <a:noFill/>
+          <a:ln/>
+        </p:spPr>
+        <p:txBody>
+          <a:bodyPr wrap="square" lIns="0" tIns="0" rIns="0" bIns="0" rtlCol="0" anchor="ctr"/>
+          <a:lstStyle/>
+          <a:p>
+            <a:pPr marL="0" indent="0">
+              <a:buNone/>
+            </a:pPr>
+            <a:r>
+              <a:rPr lang="en-US" sz="800" dirty="0">
+                <a:solidFill>
+                  <a:srgbClr val="0D1B3E"/>
+                </a:solidFill>
+                <a:latin typeface="Courier New" pitchFamily="34" charset="0"/>
+                <a:ea typeface="Courier New" pitchFamily="34" charset="-122"/>
+                <a:cs typeface="Courier New" pitchFamily="34" charset="-120"/>
+              </a:rPr>
+              <a:t>/api/v1/auth/login/</a:t>
+            </a:r>
+            <a:endParaRPr lang="en-US" sz="800" dirty="0"/>
+          </a:p>
+        </p:txBody>
+      </p:sp>
+      <p:sp>
+        <p:nvSpPr>
+          <p:cNvPr id="91" name="Text 37">
+            <a:extLst>
+              <a:ext uri="{FF2B5EF4-FFF2-40B4-BE49-F238E27FC236}">
+                <a16:creationId xmlns:a16="http://schemas.microsoft.com/office/drawing/2014/main" id="{3163E7E2-025C-33CE-5F81-D1CCB79C01B9}"/>
+              </a:ext>
+            </a:extLst>
+          </p:cNvPr>
+          <p:cNvSpPr/>
+          <p:nvPr/>
+        </p:nvSpPr>
+        <p:spPr>
+          <a:xfrm>
+            <a:off x="5486400" y="3557016"/>
+            <a:ext cx="2103120" cy="164592"/>
+          </a:xfrm>
+          <a:prstGeom prst="rect">
+            <a:avLst/>
+          </a:prstGeom>
+          <a:noFill/>
+          <a:ln/>
+        </p:spPr>
+        <p:txBody>
+          <a:bodyPr wrap="square" lIns="0" tIns="0" rIns="0" bIns="0" rtlCol="0" anchor="ctr"/>
+          <a:lstStyle/>
+          <a:p>
+            <a:pPr marL="0" indent="0">
+              <a:buNone/>
+            </a:pPr>
+            <a:r>
+              <a:rPr lang="en-US" sz="750" dirty="0">
+                <a:solidFill>
+                  <a:srgbClr val="475569"/>
+                </a:solidFill>
+              </a:rPr>
+              <a:t>Issues JWT access + refresh tokens</a:t>
+            </a:r>
+            <a:endParaRPr lang="en-US" sz="750" dirty="0"/>
+          </a:p>
+        </p:txBody>
+      </p:sp>
+      <p:sp>
+        <p:nvSpPr>
+          <p:cNvPr id="92" name="Shape 38">
+            <a:extLst>
+              <a:ext uri="{FF2B5EF4-FFF2-40B4-BE49-F238E27FC236}">
+                <a16:creationId xmlns:a16="http://schemas.microsoft.com/office/drawing/2014/main" id="{8F6E5A85-6DF8-E9CF-CEA9-C97B4201CAAD}"/>
+              </a:ext>
+            </a:extLst>
+          </p:cNvPr>
+          <p:cNvSpPr/>
+          <p:nvPr/>
+        </p:nvSpPr>
+        <p:spPr>
+          <a:xfrm>
+            <a:off x="7616952" y="3566160"/>
+            <a:ext cx="566928" cy="146304"/>
+          </a:xfrm>
+          <a:prstGeom prst="rect">
+            <a:avLst/>
+          </a:prstGeom>
+          <a:solidFill>
+            <a:srgbClr val="EDE9FE"/>
+          </a:solidFill>
+          <a:ln w="12700">
+            <a:solidFill>
+              <a:srgbClr val="EDE9FE"/>
+            </a:solidFill>
+            <a:prstDash val="solid"/>
+          </a:ln>
+        </p:spPr>
+        <p:txBody>
+          <a:bodyPr/>
+          <a:lstStyle/>
+          <a:p>
+            <a:endParaRPr lang="en-US"/>
+          </a:p>
+        </p:txBody>
+      </p:sp>
+      <p:sp>
+        <p:nvSpPr>
+          <p:cNvPr id="93" name="Text 39">
+            <a:extLst>
+              <a:ext uri="{FF2B5EF4-FFF2-40B4-BE49-F238E27FC236}">
+                <a16:creationId xmlns:a16="http://schemas.microsoft.com/office/drawing/2014/main" id="{FDC525ED-3C98-CF09-8CF1-FFF9FADB4C5F}"/>
+              </a:ext>
+            </a:extLst>
+          </p:cNvPr>
+          <p:cNvSpPr/>
+          <p:nvPr/>
+        </p:nvSpPr>
+        <p:spPr>
+          <a:xfrm>
+            <a:off x="7616952" y="3566160"/>
+            <a:ext cx="566928" cy="146304"/>
+          </a:xfrm>
+          <a:prstGeom prst="rect">
+            <a:avLst/>
+          </a:prstGeom>
+          <a:noFill/>
+          <a:ln/>
+        </p:spPr>
+        <p:txBody>
+          <a:bodyPr wrap="square" lIns="0" tIns="0" rIns="0" bIns="0" rtlCol="0" anchor="ctr"/>
+          <a:lstStyle/>
+          <a:p>
+            <a:pPr marL="0" indent="0" algn="ctr">
+              <a:buNone/>
+            </a:pPr>
+            <a:r>
+              <a:rPr lang="en-US" sz="650" b="1" dirty="0">
+                <a:solidFill>
+                  <a:srgbClr val="5B21B6"/>
+                </a:solidFill>
+              </a:rPr>
+              <a:t>JWT</a:t>
+            </a:r>
+            <a:endParaRPr lang="en-US" sz="650" dirty="0"/>
+          </a:p>
+        </p:txBody>
+      </p:sp>
+      <p:sp>
+        <p:nvSpPr>
+          <p:cNvPr id="94" name="Shape 40">
+            <a:extLst>
+              <a:ext uri="{FF2B5EF4-FFF2-40B4-BE49-F238E27FC236}">
+                <a16:creationId xmlns:a16="http://schemas.microsoft.com/office/drawing/2014/main" id="{ECDEEEB3-CD4F-5442-1EC6-7495E12F5701}"/>
+              </a:ext>
+            </a:extLst>
+          </p:cNvPr>
+          <p:cNvSpPr/>
+          <p:nvPr/>
+        </p:nvSpPr>
+        <p:spPr>
+          <a:xfrm>
+            <a:off x="566928" y="3758184"/>
+            <a:ext cx="7644384" cy="4572"/>
+          </a:xfrm>
+          <a:prstGeom prst="rect">
+            <a:avLst/>
+          </a:prstGeom>
+          <a:solidFill>
+            <a:srgbClr val="D8DCE5"/>
+          </a:solidFill>
+          <a:ln w="12700">
+            <a:solidFill>
+              <a:srgbClr val="D8DCE5"/>
+            </a:solidFill>
+            <a:prstDash val="solid"/>
+          </a:ln>
+        </p:spPr>
+        <p:txBody>
+          <a:bodyPr/>
+          <a:lstStyle/>
+          <a:p>
+            <a:endParaRPr lang="en-US"/>
+          </a:p>
+        </p:txBody>
+      </p:sp>
+      <p:sp>
+        <p:nvSpPr>
+          <p:cNvPr id="95" name="Shape 41">
+            <a:extLst>
+              <a:ext uri="{FF2B5EF4-FFF2-40B4-BE49-F238E27FC236}">
+                <a16:creationId xmlns:a16="http://schemas.microsoft.com/office/drawing/2014/main" id="{22A799A9-D15F-6154-4638-E3A4A4281F03}"/>
+              </a:ext>
+            </a:extLst>
+          </p:cNvPr>
+          <p:cNvSpPr/>
+          <p:nvPr/>
+        </p:nvSpPr>
+        <p:spPr>
+          <a:xfrm>
+            <a:off x="594360" y="3794760"/>
+            <a:ext cx="384048" cy="155448"/>
+          </a:xfrm>
+          <a:prstGeom prst="rect">
+            <a:avLst/>
+          </a:prstGeom>
+          <a:solidFill>
+            <a:srgbClr val="DBEAFE"/>
+          </a:solidFill>
+          <a:ln w="12700">
+            <a:solidFill>
+              <a:srgbClr val="DBEAFE"/>
+            </a:solidFill>
+            <a:prstDash val="solid"/>
+          </a:ln>
+        </p:spPr>
+        <p:txBody>
+          <a:bodyPr/>
+          <a:lstStyle/>
+          <a:p>
+            <a:endParaRPr lang="en-US"/>
+          </a:p>
+        </p:txBody>
+      </p:sp>
+      <p:sp>
+        <p:nvSpPr>
+          <p:cNvPr id="96" name="Text 42">
+            <a:extLst>
+              <a:ext uri="{FF2B5EF4-FFF2-40B4-BE49-F238E27FC236}">
+                <a16:creationId xmlns:a16="http://schemas.microsoft.com/office/drawing/2014/main" id="{66E6E10B-2BBD-9283-61C9-D4158D7270EF}"/>
+              </a:ext>
+            </a:extLst>
+          </p:cNvPr>
+          <p:cNvSpPr/>
+          <p:nvPr/>
+        </p:nvSpPr>
+        <p:spPr>
+          <a:xfrm>
+            <a:off x="594360" y="3794760"/>
+            <a:ext cx="384048" cy="155448"/>
+          </a:xfrm>
+          <a:prstGeom prst="rect">
+            <a:avLst/>
+          </a:prstGeom>
+          <a:noFill/>
+          <a:ln/>
+        </p:spPr>
+        <p:txBody>
+          <a:bodyPr wrap="square" lIns="0" tIns="0" rIns="0" bIns="0" rtlCol="0" anchor="ctr"/>
+          <a:lstStyle/>
+          <a:p>
+            <a:pPr marL="0" indent="0" algn="ctr">
+              <a:buNone/>
+            </a:pPr>
+            <a:r>
+              <a:rPr lang="en-US" sz="600" b="1" dirty="0">
+                <a:solidFill>
+                  <a:srgbClr val="1E40AF"/>
+                </a:solidFill>
+              </a:rPr>
+              <a:t>GET</a:t>
+            </a:r>
+            <a:endParaRPr lang="en-US" sz="600" dirty="0"/>
+          </a:p>
+        </p:txBody>
+      </p:sp>
+      <p:sp>
+        <p:nvSpPr>
+          <p:cNvPr id="97" name="Shape 43">
+            <a:extLst>
+              <a:ext uri="{FF2B5EF4-FFF2-40B4-BE49-F238E27FC236}">
+                <a16:creationId xmlns:a16="http://schemas.microsoft.com/office/drawing/2014/main" id="{09CBDFFA-6A6D-9BAA-3F0F-22C32C36EC03}"/>
+              </a:ext>
+            </a:extLst>
+          </p:cNvPr>
+          <p:cNvSpPr/>
+          <p:nvPr/>
+        </p:nvSpPr>
+        <p:spPr>
+          <a:xfrm>
+            <a:off x="1014984" y="3794760"/>
+            <a:ext cx="384048" cy="155448"/>
+          </a:xfrm>
+          <a:prstGeom prst="rect">
+            <a:avLst/>
+          </a:prstGeom>
+          <a:solidFill>
+            <a:srgbClr val="DCFCE7"/>
+          </a:solidFill>
+          <a:ln w="12700">
+            <a:solidFill>
+              <a:srgbClr val="DCFCE7"/>
+            </a:solidFill>
+            <a:prstDash val="solid"/>
+          </a:ln>
+        </p:spPr>
+        <p:txBody>
+          <a:bodyPr/>
+          <a:lstStyle/>
+          <a:p>
+            <a:endParaRPr lang="en-US"/>
+          </a:p>
+        </p:txBody>
+      </p:sp>
+      <p:sp>
+        <p:nvSpPr>
+          <p:cNvPr id="98" name="Text 44">
+            <a:extLst>
+              <a:ext uri="{FF2B5EF4-FFF2-40B4-BE49-F238E27FC236}">
+                <a16:creationId xmlns:a16="http://schemas.microsoft.com/office/drawing/2014/main" id="{F9151A57-E1AF-98AF-0931-D263620294D5}"/>
+              </a:ext>
+            </a:extLst>
+          </p:cNvPr>
+          <p:cNvSpPr/>
+          <p:nvPr/>
+        </p:nvSpPr>
+        <p:spPr>
+          <a:xfrm>
+            <a:off x="1014984" y="3794760"/>
+            <a:ext cx="384048" cy="155448"/>
+          </a:xfrm>
+          <a:prstGeom prst="rect">
+            <a:avLst/>
+          </a:prstGeom>
+          <a:noFill/>
+          <a:ln/>
+        </p:spPr>
+        <p:txBody>
+          <a:bodyPr wrap="square" lIns="0" tIns="0" rIns="0" bIns="0" rtlCol="0" anchor="ctr"/>
+          <a:lstStyle/>
+          <a:p>
+            <a:pPr marL="0" indent="0" algn="ctr">
+              <a:buNone/>
+            </a:pPr>
+            <a:r>
+              <a:rPr lang="en-US" sz="600" b="1" dirty="0">
+                <a:solidFill>
+                  <a:srgbClr val="166534"/>
+                </a:solidFill>
+              </a:rPr>
+              <a:t>POST</a:t>
+            </a:r>
+            <a:endParaRPr lang="en-US" sz="600" dirty="0"/>
+          </a:p>
+        </p:txBody>
+      </p:sp>
+      <p:sp>
+        <p:nvSpPr>
+          <p:cNvPr id="99" name="Shape 45">
+            <a:extLst>
+              <a:ext uri="{FF2B5EF4-FFF2-40B4-BE49-F238E27FC236}">
+                <a16:creationId xmlns:a16="http://schemas.microsoft.com/office/drawing/2014/main" id="{49E3D096-EB13-6C08-86BC-3A7AF54BA255}"/>
+              </a:ext>
+            </a:extLst>
+          </p:cNvPr>
+          <p:cNvSpPr/>
+          <p:nvPr/>
+        </p:nvSpPr>
+        <p:spPr>
+          <a:xfrm>
+            <a:off x="1435608" y="3794760"/>
+            <a:ext cx="384048" cy="155448"/>
+          </a:xfrm>
+          <a:prstGeom prst="rect">
+            <a:avLst/>
+          </a:prstGeom>
+          <a:solidFill>
+            <a:srgbClr val="FEF9C3"/>
+          </a:solidFill>
+          <a:ln w="12700">
+            <a:solidFill>
+              <a:srgbClr val="FEF9C3"/>
+            </a:solidFill>
+            <a:prstDash val="solid"/>
+          </a:ln>
+        </p:spPr>
+        <p:txBody>
+          <a:bodyPr/>
+          <a:lstStyle/>
+          <a:p>
+            <a:endParaRPr lang="en-US"/>
+          </a:p>
+        </p:txBody>
+      </p:sp>
+      <p:sp>
+        <p:nvSpPr>
+          <p:cNvPr id="100" name="Text 46">
+            <a:extLst>
+              <a:ext uri="{FF2B5EF4-FFF2-40B4-BE49-F238E27FC236}">
+                <a16:creationId xmlns:a16="http://schemas.microsoft.com/office/drawing/2014/main" id="{01FE61E5-280C-FBE2-4A05-2A825D9527A5}"/>
+              </a:ext>
+            </a:extLst>
+          </p:cNvPr>
+          <p:cNvSpPr/>
+          <p:nvPr/>
+        </p:nvSpPr>
+        <p:spPr>
+          <a:xfrm>
+            <a:off x="1435608" y="3794760"/>
+            <a:ext cx="384048" cy="155448"/>
+          </a:xfrm>
+          <a:prstGeom prst="rect">
+            <a:avLst/>
+          </a:prstGeom>
+          <a:noFill/>
+          <a:ln/>
+        </p:spPr>
+        <p:txBody>
+          <a:bodyPr wrap="square" lIns="0" tIns="0" rIns="0" bIns="0" rtlCol="0" anchor="ctr"/>
+          <a:lstStyle/>
+          <a:p>
+            <a:pPr marL="0" indent="0" algn="ctr">
+              <a:buNone/>
+            </a:pPr>
+            <a:r>
+              <a:rPr lang="en-US" sz="600" b="1" dirty="0">
+                <a:solidFill>
+                  <a:srgbClr val="854D0E"/>
+                </a:solidFill>
+              </a:rPr>
+              <a:t>PATCH</a:t>
+            </a:r>
+            <a:endParaRPr lang="en-US" sz="600" dirty="0"/>
+          </a:p>
+        </p:txBody>
+      </p:sp>
+      <p:sp>
+        <p:nvSpPr>
+          <p:cNvPr id="101" name="Shape 47">
+            <a:extLst>
+              <a:ext uri="{FF2B5EF4-FFF2-40B4-BE49-F238E27FC236}">
+                <a16:creationId xmlns:a16="http://schemas.microsoft.com/office/drawing/2014/main" id="{B5EDC3E9-9224-68C9-95B6-9AEDC291C570}"/>
+              </a:ext>
+            </a:extLst>
+          </p:cNvPr>
+          <p:cNvSpPr/>
+          <p:nvPr/>
+        </p:nvSpPr>
+        <p:spPr>
+          <a:xfrm>
+            <a:off x="1856232" y="3794760"/>
+            <a:ext cx="384048" cy="155448"/>
+          </a:xfrm>
+          <a:prstGeom prst="rect">
+            <a:avLst/>
+          </a:prstGeom>
+          <a:solidFill>
+            <a:srgbClr val="FEE2E2"/>
+          </a:solidFill>
+          <a:ln w="12700">
+            <a:solidFill>
+              <a:srgbClr val="FEE2E2"/>
+            </a:solidFill>
+            <a:prstDash val="solid"/>
+          </a:ln>
+        </p:spPr>
+        <p:txBody>
+          <a:bodyPr/>
+          <a:lstStyle/>
+          <a:p>
+            <a:endParaRPr lang="en-US"/>
+          </a:p>
+        </p:txBody>
+      </p:sp>
+      <p:sp>
+        <p:nvSpPr>
+          <p:cNvPr id="102" name="Text 48">
+            <a:extLst>
+              <a:ext uri="{FF2B5EF4-FFF2-40B4-BE49-F238E27FC236}">
+                <a16:creationId xmlns:a16="http://schemas.microsoft.com/office/drawing/2014/main" id="{9702F993-6D87-3782-D4D9-F7D89CB7074A}"/>
+              </a:ext>
+            </a:extLst>
+          </p:cNvPr>
+          <p:cNvSpPr/>
+          <p:nvPr/>
+        </p:nvSpPr>
+        <p:spPr>
+          <a:xfrm>
+            <a:off x="1856232" y="3794760"/>
+            <a:ext cx="384048" cy="155448"/>
+          </a:xfrm>
+          <a:prstGeom prst="rect">
+            <a:avLst/>
+          </a:prstGeom>
+          <a:noFill/>
+          <a:ln/>
+        </p:spPr>
+        <p:txBody>
+          <a:bodyPr wrap="square" lIns="0" tIns="0" rIns="0" bIns="0" rtlCol="0" anchor="ctr"/>
+          <a:lstStyle/>
+          <a:p>
+            <a:pPr marL="0" indent="0" algn="ctr">
+              <a:buNone/>
+            </a:pPr>
+            <a:r>
+              <a:rPr lang="en-US" sz="600" b="1" dirty="0">
+                <a:solidFill>
+                  <a:srgbClr val="991B1B"/>
+                </a:solidFill>
+              </a:rPr>
+              <a:t>DELETE</a:t>
+            </a:r>
+            <a:endParaRPr lang="en-US" sz="600" dirty="0"/>
+          </a:p>
+        </p:txBody>
+      </p:sp>
+      <p:sp>
+        <p:nvSpPr>
+          <p:cNvPr id="103" name="Text 49">
+            <a:extLst>
+              <a:ext uri="{FF2B5EF4-FFF2-40B4-BE49-F238E27FC236}">
+                <a16:creationId xmlns:a16="http://schemas.microsoft.com/office/drawing/2014/main" id="{1A0E1397-DD3D-7F2A-71B7-004B91A2AD50}"/>
+              </a:ext>
+            </a:extLst>
+          </p:cNvPr>
+          <p:cNvSpPr/>
+          <p:nvPr/>
+        </p:nvSpPr>
+        <p:spPr>
+          <a:xfrm>
+            <a:off x="2377440" y="3785616"/>
+            <a:ext cx="3108960" cy="164592"/>
+          </a:xfrm>
+          <a:prstGeom prst="rect">
+            <a:avLst/>
+          </a:prstGeom>
+          <a:noFill/>
+          <a:ln/>
+        </p:spPr>
+        <p:txBody>
+          <a:bodyPr wrap="square" lIns="0" tIns="0" rIns="0" bIns="0" rtlCol="0" anchor="ctr"/>
+          <a:lstStyle/>
+          <a:p>
+            <a:pPr marL="0" indent="0">
+              <a:buNone/>
+            </a:pPr>
+            <a:r>
+              <a:rPr lang="en-US" sz="800" dirty="0">
+                <a:solidFill>
+                  <a:srgbClr val="0D1B3E"/>
+                </a:solidFill>
+                <a:latin typeface="Courier New" pitchFamily="34" charset="0"/>
+                <a:ea typeface="Courier New" pitchFamily="34" charset="-122"/>
+                <a:cs typeface="Courier New" pitchFamily="34" charset="-120"/>
+              </a:rPr>
+              <a:t>/api/v1/products</a:t>
+            </a:r>
+            <a:endParaRPr lang="en-US" sz="800" dirty="0"/>
+          </a:p>
+        </p:txBody>
+      </p:sp>
+      <p:sp>
+        <p:nvSpPr>
+          <p:cNvPr id="104" name="Text 50">
+            <a:extLst>
+              <a:ext uri="{FF2B5EF4-FFF2-40B4-BE49-F238E27FC236}">
+                <a16:creationId xmlns:a16="http://schemas.microsoft.com/office/drawing/2014/main" id="{F7330509-530D-37DA-B38D-0BED5212275E}"/>
+              </a:ext>
+            </a:extLst>
+          </p:cNvPr>
+          <p:cNvSpPr/>
+          <p:nvPr/>
+        </p:nvSpPr>
+        <p:spPr>
+          <a:xfrm>
+            <a:off x="5486400" y="3785616"/>
+            <a:ext cx="2103120" cy="164592"/>
+          </a:xfrm>
+          <a:prstGeom prst="rect">
+            <a:avLst/>
+          </a:prstGeom>
+          <a:noFill/>
+          <a:ln/>
+        </p:spPr>
+        <p:txBody>
+          <a:bodyPr wrap="square" lIns="0" tIns="0" rIns="0" bIns="0" rtlCol="0" anchor="ctr"/>
+          <a:lstStyle/>
+          <a:p>
+            <a:pPr marL="0" indent="0">
+              <a:buNone/>
+            </a:pPr>
+            <a:r>
+              <a:rPr lang="en-US" sz="750" dirty="0">
+                <a:solidFill>
+                  <a:srgbClr val="475569"/>
+                </a:solidFill>
+              </a:rPr>
+              <a:t>Product catalog CRUD</a:t>
+            </a:r>
+            <a:endParaRPr lang="en-US" sz="750" dirty="0"/>
+          </a:p>
+        </p:txBody>
+      </p:sp>
+      <p:sp>
+        <p:nvSpPr>
+          <p:cNvPr id="105" name="Shape 51">
+            <a:extLst>
+              <a:ext uri="{FF2B5EF4-FFF2-40B4-BE49-F238E27FC236}">
+                <a16:creationId xmlns:a16="http://schemas.microsoft.com/office/drawing/2014/main" id="{55102050-6551-B591-E6FE-F9A79E59B1FA}"/>
+              </a:ext>
+            </a:extLst>
+          </p:cNvPr>
+          <p:cNvSpPr/>
+          <p:nvPr/>
+        </p:nvSpPr>
+        <p:spPr>
+          <a:xfrm>
+            <a:off x="7616952" y="3794760"/>
+            <a:ext cx="566928" cy="146304"/>
+          </a:xfrm>
+          <a:prstGeom prst="rect">
+            <a:avLst/>
+          </a:prstGeom>
+          <a:solidFill>
+            <a:srgbClr val="FCE7F3"/>
+          </a:solidFill>
+          <a:ln w="12700">
+            <a:solidFill>
+              <a:srgbClr val="FCE7F3"/>
+            </a:solidFill>
+            <a:prstDash val="solid"/>
+          </a:ln>
+        </p:spPr>
+        <p:txBody>
+          <a:bodyPr/>
+          <a:lstStyle/>
+          <a:p>
+            <a:endParaRPr lang="en-US"/>
+          </a:p>
+        </p:txBody>
+      </p:sp>
+      <p:sp>
+        <p:nvSpPr>
+          <p:cNvPr id="106" name="Text 52">
+            <a:extLst>
+              <a:ext uri="{FF2B5EF4-FFF2-40B4-BE49-F238E27FC236}">
+                <a16:creationId xmlns:a16="http://schemas.microsoft.com/office/drawing/2014/main" id="{53ED20F4-45FA-D7C0-18B4-CF34067C40F2}"/>
+              </a:ext>
+            </a:extLst>
+          </p:cNvPr>
+          <p:cNvSpPr/>
+          <p:nvPr/>
+        </p:nvSpPr>
+        <p:spPr>
+          <a:xfrm>
+            <a:off x="7616952" y="3794760"/>
+            <a:ext cx="566928" cy="146304"/>
+          </a:xfrm>
+          <a:prstGeom prst="rect">
+            <a:avLst/>
+          </a:prstGeom>
+          <a:noFill/>
+          <a:ln/>
+        </p:spPr>
+        <p:txBody>
+          <a:bodyPr wrap="square" lIns="0" tIns="0" rIns="0" bIns="0" rtlCol="0" anchor="ctr"/>
+          <a:lstStyle/>
+          <a:p>
+            <a:pPr marL="0" indent="0" algn="ctr">
+              <a:buNone/>
+            </a:pPr>
+            <a:r>
+              <a:rPr lang="en-US" sz="650" b="1" dirty="0">
+                <a:solidFill>
+                  <a:srgbClr val="9D174D"/>
+                </a:solidFill>
+              </a:rPr>
+              <a:t>Business</a:t>
+            </a:r>
+            <a:endParaRPr lang="en-US" sz="650" dirty="0"/>
+          </a:p>
+        </p:txBody>
+      </p:sp>
+      <p:sp>
+        <p:nvSpPr>
+          <p:cNvPr id="107" name="Shape 53">
+            <a:extLst>
+              <a:ext uri="{FF2B5EF4-FFF2-40B4-BE49-F238E27FC236}">
+                <a16:creationId xmlns:a16="http://schemas.microsoft.com/office/drawing/2014/main" id="{22BEFB21-BDB9-D420-B134-07A41A0B5C56}"/>
+              </a:ext>
+            </a:extLst>
+          </p:cNvPr>
+          <p:cNvSpPr/>
+          <p:nvPr/>
+        </p:nvSpPr>
+        <p:spPr>
+          <a:xfrm>
+            <a:off x="566928" y="3986784"/>
+            <a:ext cx="7644384" cy="4572"/>
+          </a:xfrm>
+          <a:prstGeom prst="rect">
+            <a:avLst/>
+          </a:prstGeom>
+          <a:solidFill>
+            <a:srgbClr val="D8DCE5"/>
+          </a:solidFill>
+          <a:ln w="12700">
+            <a:solidFill>
+              <a:srgbClr val="D8DCE5"/>
+            </a:solidFill>
+            <a:prstDash val="solid"/>
+          </a:ln>
+        </p:spPr>
+        <p:txBody>
+          <a:bodyPr/>
+          <a:lstStyle/>
+          <a:p>
+            <a:endParaRPr lang="en-US"/>
+          </a:p>
+        </p:txBody>
+      </p:sp>
+      <p:sp>
+        <p:nvSpPr>
+          <p:cNvPr id="108" name="Shape 54">
+            <a:extLst>
+              <a:ext uri="{FF2B5EF4-FFF2-40B4-BE49-F238E27FC236}">
+                <a16:creationId xmlns:a16="http://schemas.microsoft.com/office/drawing/2014/main" id="{2AD27C57-55CF-4D4A-5F60-1A4C14161599}"/>
+              </a:ext>
+            </a:extLst>
+          </p:cNvPr>
+          <p:cNvSpPr/>
+          <p:nvPr/>
+        </p:nvSpPr>
+        <p:spPr>
+          <a:xfrm>
+            <a:off x="594360" y="4023360"/>
+            <a:ext cx="384048" cy="155448"/>
+          </a:xfrm>
+          <a:prstGeom prst="rect">
+            <a:avLst/>
+          </a:prstGeom>
+          <a:solidFill>
+            <a:srgbClr val="DCFCE7"/>
+          </a:solidFill>
+          <a:ln w="12700">
+            <a:solidFill>
+              <a:srgbClr val="DCFCE7"/>
+            </a:solidFill>
+            <a:prstDash val="solid"/>
+          </a:ln>
+        </p:spPr>
+        <p:txBody>
+          <a:bodyPr/>
+          <a:lstStyle/>
+          <a:p>
+            <a:endParaRPr lang="en-US"/>
+          </a:p>
+        </p:txBody>
+      </p:sp>
+      <p:sp>
+        <p:nvSpPr>
+          <p:cNvPr id="109" name="Text 55">
+            <a:extLst>
+              <a:ext uri="{FF2B5EF4-FFF2-40B4-BE49-F238E27FC236}">
+                <a16:creationId xmlns:a16="http://schemas.microsoft.com/office/drawing/2014/main" id="{83A63171-8F3A-B36D-10E0-FEECEEF0DA36}"/>
+              </a:ext>
+            </a:extLst>
+          </p:cNvPr>
+          <p:cNvSpPr/>
+          <p:nvPr/>
+        </p:nvSpPr>
+        <p:spPr>
+          <a:xfrm>
+            <a:off x="594360" y="4023360"/>
+            <a:ext cx="384048" cy="155448"/>
+          </a:xfrm>
+          <a:prstGeom prst="rect">
+            <a:avLst/>
+          </a:prstGeom>
+          <a:noFill/>
+          <a:ln/>
+        </p:spPr>
+        <p:txBody>
+          <a:bodyPr wrap="square" lIns="0" tIns="0" rIns="0" bIns="0" rtlCol="0" anchor="ctr"/>
+          <a:lstStyle/>
+          <a:p>
+            <a:pPr marL="0" indent="0" algn="ctr">
+              <a:buNone/>
+            </a:pPr>
+            <a:r>
+              <a:rPr lang="en-US" sz="600" b="1" dirty="0">
+                <a:solidFill>
+                  <a:srgbClr val="166534"/>
+                </a:solidFill>
+              </a:rPr>
+              <a:t>POST</a:t>
+            </a:r>
+            <a:endParaRPr lang="en-US" sz="600" dirty="0"/>
+          </a:p>
+        </p:txBody>
+      </p:sp>
+      <p:sp>
+        <p:nvSpPr>
+          <p:cNvPr id="110" name="Shape 56">
+            <a:extLst>
+              <a:ext uri="{FF2B5EF4-FFF2-40B4-BE49-F238E27FC236}">
+                <a16:creationId xmlns:a16="http://schemas.microsoft.com/office/drawing/2014/main" id="{34088CE7-1B7B-FCA6-8415-FFF852D63C79}"/>
+              </a:ext>
+            </a:extLst>
+          </p:cNvPr>
+          <p:cNvSpPr/>
+          <p:nvPr/>
+        </p:nvSpPr>
+        <p:spPr>
+          <a:xfrm>
+            <a:off x="1014984" y="4023360"/>
+            <a:ext cx="384048" cy="155448"/>
+          </a:xfrm>
+          <a:prstGeom prst="rect">
+            <a:avLst/>
+          </a:prstGeom>
+          <a:solidFill>
+            <a:srgbClr val="FEF9C3"/>
+          </a:solidFill>
+          <a:ln w="12700">
+            <a:solidFill>
+              <a:srgbClr val="FEF9C3"/>
+            </a:solidFill>
+            <a:prstDash val="solid"/>
+          </a:ln>
+        </p:spPr>
+        <p:txBody>
+          <a:bodyPr/>
+          <a:lstStyle/>
+          <a:p>
+            <a:endParaRPr lang="en-US"/>
+          </a:p>
+        </p:txBody>
+      </p:sp>
+      <p:sp>
+        <p:nvSpPr>
+          <p:cNvPr id="111" name="Text 57">
+            <a:extLst>
+              <a:ext uri="{FF2B5EF4-FFF2-40B4-BE49-F238E27FC236}">
+                <a16:creationId xmlns:a16="http://schemas.microsoft.com/office/drawing/2014/main" id="{796D6AAB-0A35-DB23-900B-6B5C6A8094BC}"/>
+              </a:ext>
+            </a:extLst>
+          </p:cNvPr>
+          <p:cNvSpPr/>
+          <p:nvPr/>
+        </p:nvSpPr>
+        <p:spPr>
+          <a:xfrm>
+            <a:off x="1014984" y="4023360"/>
+            <a:ext cx="384048" cy="155448"/>
+          </a:xfrm>
+          <a:prstGeom prst="rect">
+            <a:avLst/>
+          </a:prstGeom>
+          <a:noFill/>
+          <a:ln/>
+        </p:spPr>
+        <p:txBody>
+          <a:bodyPr wrap="square" lIns="0" tIns="0" rIns="0" bIns="0" rtlCol="0" anchor="ctr"/>
+          <a:lstStyle/>
+          <a:p>
+            <a:pPr marL="0" indent="0" algn="ctr">
+              <a:buNone/>
+            </a:pPr>
+            <a:r>
+              <a:rPr lang="en-US" sz="600" b="1" dirty="0">
+                <a:solidFill>
+                  <a:srgbClr val="854D0E"/>
+                </a:solidFill>
+              </a:rPr>
+              <a:t>PATCH</a:t>
+            </a:r>
+            <a:endParaRPr lang="en-US" sz="600" dirty="0"/>
+          </a:p>
+        </p:txBody>
+      </p:sp>
+      <p:sp>
+        <p:nvSpPr>
+          <p:cNvPr id="112" name="Text 58">
+            <a:extLst>
+              <a:ext uri="{FF2B5EF4-FFF2-40B4-BE49-F238E27FC236}">
+                <a16:creationId xmlns:a16="http://schemas.microsoft.com/office/drawing/2014/main" id="{22406778-BE24-CBC7-9499-129184F0B620}"/>
+              </a:ext>
+            </a:extLst>
+          </p:cNvPr>
+          <p:cNvSpPr/>
+          <p:nvPr/>
+        </p:nvSpPr>
+        <p:spPr>
+          <a:xfrm>
+            <a:off x="2377440" y="4014216"/>
+            <a:ext cx="3108960" cy="164592"/>
+          </a:xfrm>
+          <a:prstGeom prst="rect">
+            <a:avLst/>
+          </a:prstGeom>
+          <a:noFill/>
+          <a:ln/>
+        </p:spPr>
+        <p:txBody>
+          <a:bodyPr wrap="square" lIns="0" tIns="0" rIns="0" bIns="0" rtlCol="0" anchor="ctr"/>
+          <a:lstStyle/>
+          <a:p>
+            <a:pPr marL="0" indent="0">
+              <a:buNone/>
+            </a:pPr>
+            <a:r>
+              <a:rPr lang="en-US" sz="800" dirty="0">
+                <a:solidFill>
+                  <a:srgbClr val="0D1B3E"/>
+                </a:solidFill>
+                <a:latin typeface="Courier New" pitchFamily="34" charset="0"/>
+                <a:ea typeface="Courier New" pitchFamily="34" charset="-122"/>
+                <a:cs typeface="Courier New" pitchFamily="34" charset="-120"/>
+              </a:rPr>
+              <a:t>/api/v1/orders / orders/{id}/submit</a:t>
+            </a:r>
+            <a:endParaRPr lang="en-US" sz="800" dirty="0"/>
+          </a:p>
+        </p:txBody>
+      </p:sp>
+      <p:sp>
+        <p:nvSpPr>
+          <p:cNvPr id="113" name="Text 59">
+            <a:extLst>
+              <a:ext uri="{FF2B5EF4-FFF2-40B4-BE49-F238E27FC236}">
+                <a16:creationId xmlns:a16="http://schemas.microsoft.com/office/drawing/2014/main" id="{84E0BC9E-1DD7-83E3-0380-FB3D045BA6F5}"/>
+              </a:ext>
+            </a:extLst>
+          </p:cNvPr>
+          <p:cNvSpPr/>
+          <p:nvPr/>
+        </p:nvSpPr>
+        <p:spPr>
+          <a:xfrm>
+            <a:off x="5486400" y="4014216"/>
+            <a:ext cx="2103120" cy="164592"/>
+          </a:xfrm>
+          <a:prstGeom prst="rect">
+            <a:avLst/>
+          </a:prstGeom>
+          <a:noFill/>
+          <a:ln/>
+        </p:spPr>
+        <p:txBody>
+          <a:bodyPr wrap="square" lIns="0" tIns="0" rIns="0" bIns="0" rtlCol="0" anchor="ctr"/>
+          <a:lstStyle/>
+          <a:p>
+            <a:pPr marL="0" indent="0">
+              <a:buNone/>
+            </a:pPr>
+            <a:r>
+              <a:rPr lang="en-US" sz="750" dirty="0">
+                <a:solidFill>
+                  <a:srgbClr val="475569"/>
+                </a:solidFill>
+              </a:rPr>
+              <a:t>Create &amp; submit customer orders</a:t>
+            </a:r>
+            <a:endParaRPr lang="en-US" sz="750" dirty="0"/>
+          </a:p>
+        </p:txBody>
+      </p:sp>
+      <p:sp>
+        <p:nvSpPr>
+          <p:cNvPr id="114" name="Shape 60">
+            <a:extLst>
+              <a:ext uri="{FF2B5EF4-FFF2-40B4-BE49-F238E27FC236}">
+                <a16:creationId xmlns:a16="http://schemas.microsoft.com/office/drawing/2014/main" id="{82F255E5-95AC-EF2F-6BC2-D8E07200E946}"/>
+              </a:ext>
+            </a:extLst>
+          </p:cNvPr>
+          <p:cNvSpPr/>
+          <p:nvPr/>
+        </p:nvSpPr>
+        <p:spPr>
+          <a:xfrm>
+            <a:off x="7616952" y="4023360"/>
+            <a:ext cx="566928" cy="146304"/>
+          </a:xfrm>
+          <a:prstGeom prst="rect">
+            <a:avLst/>
+          </a:prstGeom>
+          <a:solidFill>
+            <a:srgbClr val="E0F2FE"/>
+          </a:solidFill>
+          <a:ln w="12700">
+            <a:solidFill>
+              <a:srgbClr val="E0F2FE"/>
+            </a:solidFill>
+            <a:prstDash val="solid"/>
+          </a:ln>
+        </p:spPr>
+        <p:txBody>
+          <a:bodyPr/>
+          <a:lstStyle/>
+          <a:p>
+            <a:endParaRPr lang="en-US"/>
+          </a:p>
+        </p:txBody>
+      </p:sp>
+      <p:sp>
+        <p:nvSpPr>
+          <p:cNvPr id="115" name="Text 61">
+            <a:extLst>
+              <a:ext uri="{FF2B5EF4-FFF2-40B4-BE49-F238E27FC236}">
+                <a16:creationId xmlns:a16="http://schemas.microsoft.com/office/drawing/2014/main" id="{A1786989-BAF8-992E-8BAC-8C5D2C45BE3D}"/>
+              </a:ext>
+            </a:extLst>
+          </p:cNvPr>
+          <p:cNvSpPr/>
+          <p:nvPr/>
+        </p:nvSpPr>
+        <p:spPr>
+          <a:xfrm>
+            <a:off x="7616952" y="4023360"/>
+            <a:ext cx="566928" cy="146304"/>
+          </a:xfrm>
+          <a:prstGeom prst="rect">
+            <a:avLst/>
+          </a:prstGeom>
+          <a:noFill/>
+          <a:ln/>
+        </p:spPr>
+        <p:txBody>
+          <a:bodyPr wrap="square" lIns="0" tIns="0" rIns="0" bIns="0" rtlCol="0" anchor="ctr"/>
+          <a:lstStyle/>
+          <a:p>
+            <a:pPr marL="0" indent="0" algn="ctr">
+              <a:buNone/>
+            </a:pPr>
+            <a:r>
+              <a:rPr lang="en-US" sz="650" b="1" dirty="0">
+                <a:solidFill>
+                  <a:srgbClr val="0369A1"/>
+                </a:solidFill>
+              </a:rPr>
+              <a:t>Customer</a:t>
+            </a:r>
+            <a:endParaRPr lang="en-US" sz="650" dirty="0"/>
+          </a:p>
+        </p:txBody>
+      </p:sp>
+      <p:sp>
+        <p:nvSpPr>
+          <p:cNvPr id="116" name="Shape 62">
+            <a:extLst>
+              <a:ext uri="{FF2B5EF4-FFF2-40B4-BE49-F238E27FC236}">
+                <a16:creationId xmlns:a16="http://schemas.microsoft.com/office/drawing/2014/main" id="{6C755F24-346E-66E1-DCAA-3F847CE21DAB}"/>
+              </a:ext>
+            </a:extLst>
+          </p:cNvPr>
+          <p:cNvSpPr/>
+          <p:nvPr/>
+        </p:nvSpPr>
+        <p:spPr>
+          <a:xfrm>
+            <a:off x="566928" y="4215384"/>
+            <a:ext cx="7644384" cy="4572"/>
+          </a:xfrm>
+          <a:prstGeom prst="rect">
+            <a:avLst/>
+          </a:prstGeom>
+          <a:solidFill>
+            <a:srgbClr val="D8DCE5"/>
+          </a:solidFill>
+          <a:ln w="12700">
+            <a:solidFill>
+              <a:srgbClr val="D8DCE5"/>
+            </a:solidFill>
+            <a:prstDash val="solid"/>
+          </a:ln>
+        </p:spPr>
+        <p:txBody>
+          <a:bodyPr/>
+          <a:lstStyle/>
+          <a:p>
+            <a:endParaRPr lang="en-US"/>
+          </a:p>
+        </p:txBody>
+      </p:sp>
+      <p:sp>
+        <p:nvSpPr>
+          <p:cNvPr id="117" name="Shape 63">
+            <a:extLst>
+              <a:ext uri="{FF2B5EF4-FFF2-40B4-BE49-F238E27FC236}">
+                <a16:creationId xmlns:a16="http://schemas.microsoft.com/office/drawing/2014/main" id="{5809A4CB-4E70-10AD-3D2D-8B2EF7F16552}"/>
+              </a:ext>
+            </a:extLst>
+          </p:cNvPr>
+          <p:cNvSpPr/>
+          <p:nvPr/>
+        </p:nvSpPr>
+        <p:spPr>
+          <a:xfrm>
+            <a:off x="594360" y="4251960"/>
+            <a:ext cx="384048" cy="155448"/>
+          </a:xfrm>
+          <a:prstGeom prst="rect">
+            <a:avLst/>
+          </a:prstGeom>
+          <a:solidFill>
+            <a:srgbClr val="DBEAFE"/>
+          </a:solidFill>
+          <a:ln w="12700">
+            <a:solidFill>
+              <a:srgbClr val="DBEAFE"/>
+            </a:solidFill>
+            <a:prstDash val="solid"/>
+          </a:ln>
+        </p:spPr>
+        <p:txBody>
+          <a:bodyPr/>
+          <a:lstStyle/>
+          <a:p>
+            <a:endParaRPr lang="en-US"/>
+          </a:p>
+        </p:txBody>
+      </p:sp>
+      <p:sp>
+        <p:nvSpPr>
+          <p:cNvPr id="118" name="Text 64">
+            <a:extLst>
+              <a:ext uri="{FF2B5EF4-FFF2-40B4-BE49-F238E27FC236}">
+                <a16:creationId xmlns:a16="http://schemas.microsoft.com/office/drawing/2014/main" id="{36050456-8F91-047A-0B91-3247737479CB}"/>
+              </a:ext>
+            </a:extLst>
+          </p:cNvPr>
+          <p:cNvSpPr/>
+          <p:nvPr/>
+        </p:nvSpPr>
+        <p:spPr>
+          <a:xfrm>
+            <a:off x="594360" y="4251960"/>
+            <a:ext cx="384048" cy="155448"/>
+          </a:xfrm>
+          <a:prstGeom prst="rect">
+            <a:avLst/>
+          </a:prstGeom>
+          <a:noFill/>
+          <a:ln/>
+        </p:spPr>
+        <p:txBody>
+          <a:bodyPr wrap="square" lIns="0" tIns="0" rIns="0" bIns="0" rtlCol="0" anchor="ctr"/>
+          <a:lstStyle/>
+          <a:p>
+            <a:pPr marL="0" indent="0" algn="ctr">
+              <a:buNone/>
+            </a:pPr>
+            <a:r>
+              <a:rPr lang="en-US" sz="600" b="1" dirty="0">
+                <a:solidFill>
+                  <a:srgbClr val="1E40AF"/>
+                </a:solidFill>
+              </a:rPr>
+              <a:t>GET</a:t>
+            </a:r>
+            <a:endParaRPr lang="en-US" sz="600" dirty="0"/>
+          </a:p>
+        </p:txBody>
+      </p:sp>
+      <p:sp>
+        <p:nvSpPr>
+          <p:cNvPr id="119" name="Text 65">
+            <a:extLst>
+              <a:ext uri="{FF2B5EF4-FFF2-40B4-BE49-F238E27FC236}">
+                <a16:creationId xmlns:a16="http://schemas.microsoft.com/office/drawing/2014/main" id="{613754F3-CE12-F1B4-E18F-A874546F7BCB}"/>
+              </a:ext>
+            </a:extLst>
+          </p:cNvPr>
+          <p:cNvSpPr/>
+          <p:nvPr/>
+        </p:nvSpPr>
+        <p:spPr>
+          <a:xfrm>
+            <a:off x="2377440" y="4242816"/>
+            <a:ext cx="3108960" cy="164592"/>
+          </a:xfrm>
+          <a:prstGeom prst="rect">
+            <a:avLst/>
+          </a:prstGeom>
+          <a:noFill/>
+          <a:ln/>
+        </p:spPr>
+        <p:txBody>
+          <a:bodyPr wrap="square" lIns="0" tIns="0" rIns="0" bIns="0" rtlCol="0" anchor="ctr"/>
+          <a:lstStyle/>
+          <a:p>
+            <a:pPr marL="0" indent="0">
+              <a:buNone/>
+            </a:pPr>
+            <a:r>
+              <a:rPr lang="en-US" sz="800" dirty="0">
+                <a:solidFill>
+                  <a:srgbClr val="0D1B3E"/>
+                </a:solidFill>
+                <a:latin typeface="Courier New" pitchFamily="34" charset="0"/>
+                <a:ea typeface="Courier New" pitchFamily="34" charset="-122"/>
+                <a:cs typeface="Courier New" pitchFamily="34" charset="-120"/>
+              </a:rPr>
+              <a:t>/api/v1/reports/sales · /low-stock</a:t>
+            </a:r>
+            <a:endParaRPr lang="en-US" sz="800" dirty="0"/>
+          </a:p>
+        </p:txBody>
+      </p:sp>
+      <p:sp>
+        <p:nvSpPr>
+          <p:cNvPr id="120" name="Text 66">
+            <a:extLst>
+              <a:ext uri="{FF2B5EF4-FFF2-40B4-BE49-F238E27FC236}">
+                <a16:creationId xmlns:a16="http://schemas.microsoft.com/office/drawing/2014/main" id="{37FD6A23-CAC1-3A13-7191-B6EC0462E2ED}"/>
+              </a:ext>
+            </a:extLst>
+          </p:cNvPr>
+          <p:cNvSpPr/>
+          <p:nvPr/>
+        </p:nvSpPr>
+        <p:spPr>
+          <a:xfrm>
+            <a:off x="5486400" y="4242816"/>
+            <a:ext cx="2103120" cy="164592"/>
+          </a:xfrm>
+          <a:prstGeom prst="rect">
+            <a:avLst/>
+          </a:prstGeom>
+          <a:noFill/>
+          <a:ln/>
+        </p:spPr>
+        <p:txBody>
+          <a:bodyPr wrap="square" lIns="0" tIns="0" rIns="0" bIns="0" rtlCol="0" anchor="ctr"/>
+          <a:lstStyle/>
+          <a:p>
+            <a:pPr marL="0" indent="0">
+              <a:buNone/>
+            </a:pPr>
+            <a:r>
+              <a:rPr lang="en-US" sz="750" dirty="0">
+                <a:solidFill>
+                  <a:srgbClr val="475569"/>
+                </a:solidFill>
+              </a:rPr>
+              <a:t>Sales summary &amp; low-stock report</a:t>
+            </a:r>
+            <a:endParaRPr lang="en-US" sz="750" dirty="0"/>
+          </a:p>
+        </p:txBody>
+      </p:sp>
+      <p:sp>
+        <p:nvSpPr>
+          <p:cNvPr id="121" name="Shape 67">
+            <a:extLst>
+              <a:ext uri="{FF2B5EF4-FFF2-40B4-BE49-F238E27FC236}">
+                <a16:creationId xmlns:a16="http://schemas.microsoft.com/office/drawing/2014/main" id="{A8E36612-C5A2-7B1C-651C-5D99284C8336}"/>
+              </a:ext>
+            </a:extLst>
+          </p:cNvPr>
+          <p:cNvSpPr/>
+          <p:nvPr/>
+        </p:nvSpPr>
+        <p:spPr>
+          <a:xfrm>
+            <a:off x="7616952" y="4251960"/>
+            <a:ext cx="566928" cy="146304"/>
+          </a:xfrm>
+          <a:prstGeom prst="rect">
+            <a:avLst/>
+          </a:prstGeom>
+          <a:solidFill>
+            <a:srgbClr val="FCE7F3"/>
+          </a:solidFill>
+          <a:ln w="12700">
+            <a:solidFill>
+              <a:srgbClr val="FCE7F3"/>
+            </a:solidFill>
+            <a:prstDash val="solid"/>
+          </a:ln>
+        </p:spPr>
+        <p:txBody>
+          <a:bodyPr/>
+          <a:lstStyle/>
+          <a:p>
+            <a:endParaRPr lang="en-US"/>
+          </a:p>
+        </p:txBody>
+      </p:sp>
+      <p:sp>
+        <p:nvSpPr>
+          <p:cNvPr id="122" name="Text 68">
+            <a:extLst>
+              <a:ext uri="{FF2B5EF4-FFF2-40B4-BE49-F238E27FC236}">
+                <a16:creationId xmlns:a16="http://schemas.microsoft.com/office/drawing/2014/main" id="{CCAE7DCB-9FDA-78B6-4BD5-5CF09AFCC3AD}"/>
+              </a:ext>
+            </a:extLst>
+          </p:cNvPr>
+          <p:cNvSpPr/>
+          <p:nvPr/>
+        </p:nvSpPr>
+        <p:spPr>
+          <a:xfrm>
+            <a:off x="7616952" y="4251960"/>
+            <a:ext cx="566928" cy="146304"/>
+          </a:xfrm>
+          <a:prstGeom prst="rect">
+            <a:avLst/>
+          </a:prstGeom>
+          <a:noFill/>
+          <a:ln/>
+        </p:spPr>
+        <p:txBody>
+          <a:bodyPr wrap="square" lIns="0" tIns="0" rIns="0" bIns="0" rtlCol="0" anchor="ctr"/>
+          <a:lstStyle/>
+          <a:p>
+            <a:pPr marL="0" indent="0" algn="ctr">
+              <a:buNone/>
+            </a:pPr>
+            <a:r>
+              <a:rPr lang="en-US" sz="650" b="1" dirty="0">
+                <a:solidFill>
+                  <a:srgbClr val="9D174D"/>
+                </a:solidFill>
+              </a:rPr>
+              <a:t>Business</a:t>
+            </a:r>
+            <a:endParaRPr lang="en-US" sz="650" dirty="0"/>
+          </a:p>
+        </p:txBody>
+      </p:sp>
+      <p:sp>
+        <p:nvSpPr>
+          <p:cNvPr id="123" name="Shape 69">
+            <a:extLst>
+              <a:ext uri="{FF2B5EF4-FFF2-40B4-BE49-F238E27FC236}">
+                <a16:creationId xmlns:a16="http://schemas.microsoft.com/office/drawing/2014/main" id="{9EEC8C0A-526A-D655-6CF6-6B349AE30FF8}"/>
+              </a:ext>
+            </a:extLst>
+          </p:cNvPr>
+          <p:cNvSpPr/>
+          <p:nvPr/>
+        </p:nvSpPr>
+        <p:spPr>
+          <a:xfrm>
+            <a:off x="566928" y="4443984"/>
+            <a:ext cx="7644384" cy="4572"/>
+          </a:xfrm>
+          <a:prstGeom prst="rect">
+            <a:avLst/>
+          </a:prstGeom>
+          <a:solidFill>
+            <a:srgbClr val="D8DCE5"/>
+          </a:solidFill>
+          <a:ln w="12700">
+            <a:solidFill>
+              <a:srgbClr val="D8DCE5"/>
+            </a:solidFill>
+            <a:prstDash val="solid"/>
+          </a:ln>
+        </p:spPr>
+        <p:txBody>
+          <a:bodyPr/>
+          <a:lstStyle/>
+          <a:p>
+            <a:endParaRPr lang="en-US"/>
+          </a:p>
+        </p:txBody>
+      </p:sp>
+      <p:sp>
+        <p:nvSpPr>
+          <p:cNvPr id="124" name="Shape 70">
+            <a:extLst>
+              <a:ext uri="{FF2B5EF4-FFF2-40B4-BE49-F238E27FC236}">
+                <a16:creationId xmlns:a16="http://schemas.microsoft.com/office/drawing/2014/main" id="{535D7817-7D64-D97A-6AAD-705C0722798A}"/>
+              </a:ext>
+            </a:extLst>
+          </p:cNvPr>
+          <p:cNvSpPr/>
+          <p:nvPr/>
+        </p:nvSpPr>
+        <p:spPr>
+          <a:xfrm>
+            <a:off x="594360" y="4480560"/>
+            <a:ext cx="384048" cy="155448"/>
+          </a:xfrm>
+          <a:prstGeom prst="rect">
+            <a:avLst/>
+          </a:prstGeom>
+          <a:solidFill>
+            <a:srgbClr val="DBEAFE"/>
+          </a:solidFill>
+          <a:ln w="12700">
+            <a:solidFill>
+              <a:srgbClr val="DBEAFE"/>
+            </a:solidFill>
+            <a:prstDash val="solid"/>
+          </a:ln>
+        </p:spPr>
+        <p:txBody>
+          <a:bodyPr/>
+          <a:lstStyle/>
+          <a:p>
+            <a:endParaRPr lang="en-US"/>
+          </a:p>
+        </p:txBody>
+      </p:sp>
+      <p:sp>
+        <p:nvSpPr>
+          <p:cNvPr id="125" name="Text 71">
+            <a:extLst>
+              <a:ext uri="{FF2B5EF4-FFF2-40B4-BE49-F238E27FC236}">
+                <a16:creationId xmlns:a16="http://schemas.microsoft.com/office/drawing/2014/main" id="{B954FC77-8A2C-6F9D-4739-F92CA1848B36}"/>
+              </a:ext>
+            </a:extLst>
+          </p:cNvPr>
+          <p:cNvSpPr/>
+          <p:nvPr/>
+        </p:nvSpPr>
+        <p:spPr>
+          <a:xfrm>
+            <a:off x="594360" y="4480560"/>
+            <a:ext cx="384048" cy="155448"/>
+          </a:xfrm>
+          <a:prstGeom prst="rect">
+            <a:avLst/>
+          </a:prstGeom>
+          <a:noFill/>
+          <a:ln/>
+        </p:spPr>
+        <p:txBody>
+          <a:bodyPr wrap="square" lIns="0" tIns="0" rIns="0" bIns="0" rtlCol="0" anchor="ctr"/>
+          <a:lstStyle/>
+          <a:p>
+            <a:pPr marL="0" indent="0" algn="ctr">
+              <a:buNone/>
+            </a:pPr>
+            <a:r>
+              <a:rPr lang="en-US" sz="600" b="1" dirty="0">
+                <a:solidFill>
+                  <a:srgbClr val="1E40AF"/>
+                </a:solidFill>
+              </a:rPr>
+              <a:t>GET</a:t>
+            </a:r>
+            <a:endParaRPr lang="en-US" sz="600" dirty="0"/>
+          </a:p>
+        </p:txBody>
+      </p:sp>
+      <p:sp>
+        <p:nvSpPr>
+          <p:cNvPr id="126" name="Shape 72">
+            <a:extLst>
+              <a:ext uri="{FF2B5EF4-FFF2-40B4-BE49-F238E27FC236}">
+                <a16:creationId xmlns:a16="http://schemas.microsoft.com/office/drawing/2014/main" id="{B8A23C5C-5655-7697-0B84-3B08AD56D60D}"/>
+              </a:ext>
+            </a:extLst>
+          </p:cNvPr>
+          <p:cNvSpPr/>
+          <p:nvPr/>
+        </p:nvSpPr>
+        <p:spPr>
+          <a:xfrm>
+            <a:off x="1014984" y="4480560"/>
+            <a:ext cx="384048" cy="155448"/>
+          </a:xfrm>
+          <a:prstGeom prst="rect">
+            <a:avLst/>
+          </a:prstGeom>
+          <a:solidFill>
+            <a:srgbClr val="FEF9C3"/>
+          </a:solidFill>
+          <a:ln w="12700">
+            <a:solidFill>
+              <a:srgbClr val="FEF9C3"/>
+            </a:solidFill>
+            <a:prstDash val="solid"/>
+          </a:ln>
+        </p:spPr>
+        <p:txBody>
+          <a:bodyPr/>
+          <a:lstStyle/>
+          <a:p>
+            <a:endParaRPr lang="en-US"/>
+          </a:p>
+        </p:txBody>
+      </p:sp>
+      <p:sp>
+        <p:nvSpPr>
+          <p:cNvPr id="127" name="Text 73">
+            <a:extLst>
+              <a:ext uri="{FF2B5EF4-FFF2-40B4-BE49-F238E27FC236}">
+                <a16:creationId xmlns:a16="http://schemas.microsoft.com/office/drawing/2014/main" id="{1BC303F5-C5C9-87FD-FCC1-79C831A73428}"/>
+              </a:ext>
+            </a:extLst>
+          </p:cNvPr>
+          <p:cNvSpPr/>
+          <p:nvPr/>
+        </p:nvSpPr>
+        <p:spPr>
+          <a:xfrm>
+            <a:off x="1014984" y="4480560"/>
+            <a:ext cx="384048" cy="155448"/>
+          </a:xfrm>
+          <a:prstGeom prst="rect">
+            <a:avLst/>
+          </a:prstGeom>
+          <a:noFill/>
+          <a:ln/>
+        </p:spPr>
+        <p:txBody>
+          <a:bodyPr wrap="square" lIns="0" tIns="0" rIns="0" bIns="0" rtlCol="0" anchor="ctr"/>
+          <a:lstStyle/>
+          <a:p>
+            <a:pPr marL="0" indent="0" algn="ctr">
+              <a:buNone/>
+            </a:pPr>
+            <a:r>
+              <a:rPr lang="en-US" sz="600" b="1" dirty="0">
+                <a:solidFill>
+                  <a:srgbClr val="854D0E"/>
+                </a:solidFill>
+              </a:rPr>
+              <a:t>PATCH</a:t>
+            </a:r>
+            <a:endParaRPr lang="en-US" sz="600" dirty="0"/>
+          </a:p>
+        </p:txBody>
+      </p:sp>
+      <p:sp>
+        <p:nvSpPr>
+          <p:cNvPr id="128" name="Text 74">
+            <a:extLst>
+              <a:ext uri="{FF2B5EF4-FFF2-40B4-BE49-F238E27FC236}">
+                <a16:creationId xmlns:a16="http://schemas.microsoft.com/office/drawing/2014/main" id="{D40BAF5E-D2D0-61B3-F45F-BACB19BF6F75}"/>
+              </a:ext>
+            </a:extLst>
+          </p:cNvPr>
+          <p:cNvSpPr/>
+          <p:nvPr/>
+        </p:nvSpPr>
+        <p:spPr>
+          <a:xfrm>
+            <a:off x="2377440" y="4471416"/>
+            <a:ext cx="3108960" cy="164592"/>
+          </a:xfrm>
+          <a:prstGeom prst="rect">
+            <a:avLst/>
+          </a:prstGeom>
+          <a:noFill/>
+          <a:ln/>
+        </p:spPr>
+        <p:txBody>
+          <a:bodyPr wrap="square" lIns="0" tIns="0" rIns="0" bIns="0" rtlCol="0" anchor="ctr"/>
+          <a:lstStyle/>
+          <a:p>
+            <a:pPr marL="0" indent="0">
+              <a:buNone/>
+            </a:pPr>
+            <a:r>
+              <a:rPr lang="en-US" sz="800" dirty="0">
+                <a:solidFill>
+                  <a:srgbClr val="0D1B3E"/>
+                </a:solidFill>
+                <a:latin typeface="Courier New" pitchFamily="34" charset="0"/>
+                <a:ea typeface="Courier New" pitchFamily="34" charset="-122"/>
+                <a:cs typeface="Courier New" pitchFamily="34" charset="-120"/>
+              </a:rPr>
+              <a:t>/api/v1/inventory</a:t>
+            </a:r>
+            <a:endParaRPr lang="en-US" sz="800" dirty="0"/>
+          </a:p>
+        </p:txBody>
+      </p:sp>
+      <p:sp>
+        <p:nvSpPr>
+          <p:cNvPr id="129" name="Text 75">
+            <a:extLst>
+              <a:ext uri="{FF2B5EF4-FFF2-40B4-BE49-F238E27FC236}">
+                <a16:creationId xmlns:a16="http://schemas.microsoft.com/office/drawing/2014/main" id="{751945C9-FDB8-AC24-9108-0B3C1AB42352}"/>
+              </a:ext>
+            </a:extLst>
+          </p:cNvPr>
+          <p:cNvSpPr/>
+          <p:nvPr/>
+        </p:nvSpPr>
+        <p:spPr>
+          <a:xfrm>
+            <a:off x="5486400" y="4471416"/>
+            <a:ext cx="2103120" cy="164592"/>
+          </a:xfrm>
+          <a:prstGeom prst="rect">
+            <a:avLst/>
+          </a:prstGeom>
+          <a:noFill/>
+          <a:ln/>
+        </p:spPr>
+        <p:txBody>
+          <a:bodyPr wrap="square" lIns="0" tIns="0" rIns="0" bIns="0" rtlCol="0" anchor="ctr"/>
+          <a:lstStyle/>
+          <a:p>
+            <a:pPr marL="0" indent="0">
+              <a:buNone/>
+            </a:pPr>
+            <a:r>
+              <a:rPr lang="en-US" sz="750" dirty="0">
+                <a:solidFill>
+                  <a:srgbClr val="475569"/>
+                </a:solidFill>
+              </a:rPr>
+              <a:t>Stock view &amp; update</a:t>
+            </a:r>
+            <a:endParaRPr lang="en-US" sz="750" dirty="0"/>
+          </a:p>
+        </p:txBody>
+      </p:sp>
+      <p:sp>
+        <p:nvSpPr>
+          <p:cNvPr id="130" name="Shape 76">
+            <a:extLst>
+              <a:ext uri="{FF2B5EF4-FFF2-40B4-BE49-F238E27FC236}">
+                <a16:creationId xmlns:a16="http://schemas.microsoft.com/office/drawing/2014/main" id="{79294ED0-1490-BAB6-EB7D-AAB272CBF309}"/>
+              </a:ext>
+            </a:extLst>
+          </p:cNvPr>
+          <p:cNvSpPr/>
+          <p:nvPr/>
+        </p:nvSpPr>
+        <p:spPr>
+          <a:xfrm>
+            <a:off x="7616952" y="4480560"/>
+            <a:ext cx="566928" cy="146304"/>
+          </a:xfrm>
+          <a:prstGeom prst="rect">
+            <a:avLst/>
+          </a:prstGeom>
+          <a:solidFill>
+            <a:srgbClr val="FCE7F3"/>
+          </a:solidFill>
+          <a:ln w="12700">
+            <a:solidFill>
+              <a:srgbClr val="FCE7F3"/>
+            </a:solidFill>
+            <a:prstDash val="solid"/>
+          </a:ln>
+        </p:spPr>
+        <p:txBody>
+          <a:bodyPr/>
+          <a:lstStyle/>
+          <a:p>
+            <a:endParaRPr lang="en-US"/>
+          </a:p>
+        </p:txBody>
+      </p:sp>
+      <p:sp>
+        <p:nvSpPr>
+          <p:cNvPr id="131" name="Text 77">
+            <a:extLst>
+              <a:ext uri="{FF2B5EF4-FFF2-40B4-BE49-F238E27FC236}">
+                <a16:creationId xmlns:a16="http://schemas.microsoft.com/office/drawing/2014/main" id="{F42900C4-AB74-841B-A461-F22695D84B63}"/>
+              </a:ext>
+            </a:extLst>
+          </p:cNvPr>
+          <p:cNvSpPr/>
+          <p:nvPr/>
+        </p:nvSpPr>
+        <p:spPr>
+          <a:xfrm>
+            <a:off x="7616952" y="4480560"/>
+            <a:ext cx="566928" cy="146304"/>
+          </a:xfrm>
+          <a:prstGeom prst="rect">
+            <a:avLst/>
+          </a:prstGeom>
+          <a:noFill/>
+          <a:ln/>
+        </p:spPr>
+        <p:txBody>
+          <a:bodyPr wrap="square" lIns="0" tIns="0" rIns="0" bIns="0" rtlCol="0" anchor="ctr"/>
+          <a:lstStyle/>
+          <a:p>
+            <a:pPr marL="0" indent="0" algn="ctr">
+              <a:buNone/>
+            </a:pPr>
+            <a:r>
+              <a:rPr lang="en-US" sz="650" b="1" dirty="0">
+                <a:solidFill>
+                  <a:srgbClr val="9D174D"/>
+                </a:solidFill>
+              </a:rPr>
+              <a:t>Business</a:t>
+            </a:r>
+            <a:endParaRPr lang="en-US" sz="650" dirty="0"/>
+          </a:p>
+        </p:txBody>
+      </p:sp>
+      <p:sp>
+        <p:nvSpPr>
+          <p:cNvPr id="132" name="Shape 78">
+            <a:extLst>
+              <a:ext uri="{FF2B5EF4-FFF2-40B4-BE49-F238E27FC236}">
+                <a16:creationId xmlns:a16="http://schemas.microsoft.com/office/drawing/2014/main" id="{D5385CB1-DA2C-D9EA-1AF8-269A37AEDD4E}"/>
+              </a:ext>
+            </a:extLst>
+          </p:cNvPr>
+          <p:cNvSpPr/>
+          <p:nvPr/>
+        </p:nvSpPr>
+        <p:spPr>
+          <a:xfrm>
+            <a:off x="457200" y="4718304"/>
+            <a:ext cx="8229600" cy="228600"/>
+          </a:xfrm>
+          <a:prstGeom prst="rect">
+            <a:avLst/>
+          </a:prstGeom>
+          <a:solidFill>
+            <a:srgbClr val="1E293B"/>
+          </a:solidFill>
+          <a:ln w="12700">
+            <a:solidFill>
+              <a:srgbClr val="1E293B"/>
+            </a:solidFill>
+            <a:prstDash val="solid"/>
+          </a:ln>
+        </p:spPr>
+        <p:txBody>
+          <a:bodyPr/>
+          <a:lstStyle/>
+          <a:p>
+            <a:endParaRPr lang="en-US"/>
+          </a:p>
+        </p:txBody>
+      </p:sp>
+      <p:sp>
+        <p:nvSpPr>
+          <p:cNvPr id="133" name="Text 79">
+            <a:extLst>
+              <a:ext uri="{FF2B5EF4-FFF2-40B4-BE49-F238E27FC236}">
+                <a16:creationId xmlns:a16="http://schemas.microsoft.com/office/drawing/2014/main" id="{00EA5CE6-2BC6-830B-FB71-9CDF206C8D7A}"/>
+              </a:ext>
+            </a:extLst>
+          </p:cNvPr>
+          <p:cNvSpPr/>
+          <p:nvPr/>
+        </p:nvSpPr>
+        <p:spPr>
+          <a:xfrm>
+            <a:off x="594360" y="4718304"/>
+            <a:ext cx="7955280" cy="228600"/>
+          </a:xfrm>
+          <a:prstGeom prst="rect">
+            <a:avLst/>
+          </a:prstGeom>
+          <a:noFill/>
+          <a:ln/>
+        </p:spPr>
+        <p:txBody>
+          <a:bodyPr wrap="square" lIns="0" tIns="0" rIns="0" bIns="0" rtlCol="0" anchor="ctr"/>
+          <a:lstStyle/>
+          <a:p>
+            <a:pPr marL="0" indent="0">
+              <a:buNone/>
+            </a:pPr>
+            <a:r>
+              <a:rPr lang="en-US" sz="750" dirty="0">
+                <a:solidFill>
+                  <a:srgbClr val="94A3B8"/>
+                </a:solidFill>
+                <a:latin typeface="Courier New" pitchFamily="34" charset="0"/>
+                <a:ea typeface="Courier New" pitchFamily="34" charset="-122"/>
+                <a:cs typeface="Courier New" pitchFamily="34" charset="-120"/>
+              </a:rPr>
+              <a:t>Consistent error format across all endpoints:  { "error": "ERROR_TYPE",  "message": "Human readable message" }</a:t>
+            </a:r>
+            <a:endParaRPr lang="en-US" sz="750" dirty="0"/>
+          </a:p>
+        </p:txBody>
+      </p:sp>
+      <p:pic>
+        <p:nvPicPr>
+          <p:cNvPr id="134" name="Image 0" descr="preencoded.png">
+            <a:extLst>
+              <a:ext uri="{FF2B5EF4-FFF2-40B4-BE49-F238E27FC236}">
+                <a16:creationId xmlns:a16="http://schemas.microsoft.com/office/drawing/2014/main" id="{38837380-42F9-96A3-E8FD-18F5F89CC834}"/>
+              </a:ext>
+            </a:extLst>
+          </p:cNvPr>
+          <p:cNvPicPr>
+            <a:picLocks noChangeAspect="1"/>
+          </p:cNvPicPr>
+          <p:nvPr/>
+        </p:nvPicPr>
+        <p:blipFill>
+          <a:blip r:embed="rId3"/>
+          <a:stretch>
+            <a:fillRect/>
+          </a:stretch>
+        </p:blipFill>
+        <p:spPr>
+          <a:xfrm>
+            <a:off x="566928" y="1161288"/>
+            <a:ext cx="411480" cy="411480"/>
+          </a:xfrm>
+          <a:prstGeom prst="rect">
+            <a:avLst/>
+          </a:prstGeom>
+        </p:spPr>
+      </p:pic>
+      <p:sp>
+        <p:nvSpPr>
+          <p:cNvPr id="136" name="TextBox 135">
+            <a:extLst>
+              <a:ext uri="{FF2B5EF4-FFF2-40B4-BE49-F238E27FC236}">
+                <a16:creationId xmlns:a16="http://schemas.microsoft.com/office/drawing/2014/main" id="{11EC5FDD-B0D9-EAD4-BDF4-4E2CD71479C6}"/>
+              </a:ext>
+            </a:extLst>
+          </p:cNvPr>
+          <p:cNvSpPr txBox="1"/>
+          <p:nvPr/>
+        </p:nvSpPr>
+        <p:spPr>
+          <a:xfrm>
+            <a:off x="978408" y="1174218"/>
+            <a:ext cx="1889490" cy="369332"/>
+          </a:xfrm>
+          <a:prstGeom prst="rect">
+            <a:avLst/>
+          </a:prstGeom>
+          <a:noFill/>
+        </p:spPr>
+        <p:txBody>
+          <a:bodyPr wrap="square">
+            <a:spAutoFit/>
+          </a:bodyPr>
+          <a:lstStyle/>
+          <a:p>
+            <a:pPr marL="0" indent="0">
+              <a:buNone/>
+            </a:pPr>
+            <a:r>
+              <a:rPr lang="en-US" sz="1800" b="1" dirty="0">
+                <a:solidFill>
+                  <a:srgbClr val="FFFFFF"/>
                 </a:solidFill>
                 <a:latin typeface="Calibri" pitchFamily="34" charset="0"/>
                 <a:ea typeface="Calibri" pitchFamily="34" charset="-122"/>
                 <a:cs typeface="Calibri" pitchFamily="34" charset="-120"/>
               </a:rPr>
-              <a:t>Content is available here.</a:t>
-            </a:r>
-            <a:endParaRPr lang="en-US" sz="1000" dirty="0"/>
+              <a:t>Frontend</a:t>
+            </a:r>
+            <a:endParaRPr lang="en-US" sz="1800" dirty="0"/>
+          </a:p>
+        </p:txBody>
+      </p:sp>
+      <p:pic>
+        <p:nvPicPr>
+          <p:cNvPr id="137" name="Image 1" descr="preencoded.png">
+            <a:extLst>
+              <a:ext uri="{FF2B5EF4-FFF2-40B4-BE49-F238E27FC236}">
+                <a16:creationId xmlns:a16="http://schemas.microsoft.com/office/drawing/2014/main" id="{057A1AF1-7F29-47B7-3658-D06CBF7CF0F8}"/>
+              </a:ext>
+            </a:extLst>
+          </p:cNvPr>
+          <p:cNvPicPr>
+            <a:picLocks noChangeAspect="1"/>
+          </p:cNvPicPr>
+          <p:nvPr/>
+        </p:nvPicPr>
+        <p:blipFill>
+          <a:blip r:embed="rId4"/>
+          <a:stretch>
+            <a:fillRect/>
+          </a:stretch>
+        </p:blipFill>
+        <p:spPr>
+          <a:xfrm>
+            <a:off x="3401568" y="1138428"/>
+            <a:ext cx="411480" cy="411480"/>
+          </a:xfrm>
+          <a:prstGeom prst="rect">
+            <a:avLst/>
+          </a:prstGeom>
+        </p:spPr>
+      </p:pic>
+      <p:sp>
+        <p:nvSpPr>
+          <p:cNvPr id="139" name="TextBox 138">
+            <a:extLst>
+              <a:ext uri="{FF2B5EF4-FFF2-40B4-BE49-F238E27FC236}">
+                <a16:creationId xmlns:a16="http://schemas.microsoft.com/office/drawing/2014/main" id="{1EFB3F96-2788-182F-B032-629103756E21}"/>
+              </a:ext>
+            </a:extLst>
+          </p:cNvPr>
+          <p:cNvSpPr txBox="1"/>
+          <p:nvPr/>
+        </p:nvSpPr>
+        <p:spPr>
+          <a:xfrm>
+            <a:off x="3796864" y="1159502"/>
+            <a:ext cx="1403968" cy="369332"/>
+          </a:xfrm>
+          <a:prstGeom prst="rect">
+            <a:avLst/>
+          </a:prstGeom>
+          <a:noFill/>
+        </p:spPr>
+        <p:txBody>
+          <a:bodyPr wrap="square">
+            <a:spAutoFit/>
+          </a:bodyPr>
+          <a:lstStyle/>
+          <a:p>
+            <a:pPr marL="0" indent="0">
+              <a:buNone/>
+            </a:pPr>
+            <a:r>
+              <a:rPr lang="en-US" sz="1800" b="1" dirty="0">
+                <a:solidFill>
+                  <a:srgbClr val="FFFFFF"/>
+                </a:solidFill>
+                <a:latin typeface="Calibri" pitchFamily="34" charset="0"/>
+                <a:ea typeface="Calibri" pitchFamily="34" charset="-122"/>
+                <a:cs typeface="Calibri" pitchFamily="34" charset="-120"/>
+              </a:rPr>
+              <a:t>Backend</a:t>
+            </a:r>
+            <a:endParaRPr lang="en-US" sz="1800" dirty="0"/>
+          </a:p>
+        </p:txBody>
+      </p:sp>
+      <p:pic>
+        <p:nvPicPr>
+          <p:cNvPr id="140" name="Image 2" descr="preencoded.png">
+            <a:extLst>
+              <a:ext uri="{FF2B5EF4-FFF2-40B4-BE49-F238E27FC236}">
+                <a16:creationId xmlns:a16="http://schemas.microsoft.com/office/drawing/2014/main" id="{3A3278C3-39A8-3709-EF2D-8202190E5340}"/>
+              </a:ext>
+            </a:extLst>
+          </p:cNvPr>
+          <p:cNvPicPr>
+            <a:picLocks noChangeAspect="1"/>
+          </p:cNvPicPr>
+          <p:nvPr/>
+        </p:nvPicPr>
+        <p:blipFill>
+          <a:blip r:embed="rId5"/>
+          <a:stretch>
+            <a:fillRect/>
+          </a:stretch>
+        </p:blipFill>
+        <p:spPr>
+          <a:xfrm>
+            <a:off x="6236208" y="1138428"/>
+            <a:ext cx="411480" cy="411480"/>
+          </a:xfrm>
+          <a:prstGeom prst="rect">
+            <a:avLst/>
+          </a:prstGeom>
+        </p:spPr>
+      </p:pic>
+      <p:sp>
+        <p:nvSpPr>
+          <p:cNvPr id="142" name="TextBox 141">
+            <a:extLst>
+              <a:ext uri="{FF2B5EF4-FFF2-40B4-BE49-F238E27FC236}">
+                <a16:creationId xmlns:a16="http://schemas.microsoft.com/office/drawing/2014/main" id="{CB338483-EAD8-9A1F-4488-80B03E769FEB}"/>
+              </a:ext>
+            </a:extLst>
+          </p:cNvPr>
+          <p:cNvSpPr txBox="1"/>
+          <p:nvPr/>
+        </p:nvSpPr>
+        <p:spPr>
+          <a:xfrm>
+            <a:off x="6639515" y="1166360"/>
+            <a:ext cx="1420152" cy="369332"/>
+          </a:xfrm>
+          <a:prstGeom prst="rect">
+            <a:avLst/>
+          </a:prstGeom>
+          <a:noFill/>
+        </p:spPr>
+        <p:txBody>
+          <a:bodyPr wrap="square">
+            <a:spAutoFit/>
+          </a:bodyPr>
+          <a:lstStyle/>
+          <a:p>
+            <a:pPr marL="0" indent="0">
+              <a:buNone/>
+            </a:pPr>
+            <a:r>
+              <a:rPr lang="en-US" sz="1800" b="1" dirty="0">
+                <a:solidFill>
+                  <a:srgbClr val="FFFFFF"/>
+                </a:solidFill>
+                <a:latin typeface="Calibri" pitchFamily="34" charset="0"/>
+                <a:ea typeface="Calibri" pitchFamily="34" charset="-122"/>
+                <a:cs typeface="Calibri" pitchFamily="34" charset="-120"/>
+              </a:rPr>
+              <a:t>Database</a:t>
+            </a:r>
+            <a:endParaRPr lang="en-US" sz="1800" dirty="0"/>
           </a:p>
         </p:txBody>
       </p:sp>
@@ -13148,7 +15206,7 @@
                 <a:latin typeface="Calibri" pitchFamily="34" charset="0"/>
                 <a:cs typeface="Calibri" pitchFamily="34" charset="-120"/>
               </a:rPr>
-              <a:t>Unit Testing</a:t>
+              <a:t>Frontend Component Testing</a:t>
             </a:r>
             <a:endParaRPr lang="en-US" sz="1400" dirty="0"/>
           </a:p>
@@ -13226,7 +15284,7 @@
                 <a:ea typeface="Calibri" pitchFamily="34" charset="-122"/>
                 <a:cs typeface="Calibri" pitchFamily="34" charset="-120"/>
               </a:rPr>
-              <a:t>Tool: PyTest</a:t>
+              <a:t>Tool: Jest + React</a:t>
             </a:r>
             <a:endParaRPr lang="en-US" sz="1000" dirty="0"/>
           </a:p>
@@ -13265,9 +15323,8 @@
                 <a:ea typeface="Calibri" pitchFamily="34" charset="-122"/>
                 <a:cs typeface="Calibri" pitchFamily="34" charset="-120"/>
               </a:rPr>
-              <a:t>Django model &amp; View tests</a:t>
-            </a:r>
-            <a:endParaRPr lang="en-US" sz="1000" dirty="0"/>
+              <a:t>626 Automated test passed</a:t>
+            </a:r>
           </a:p>
           <a:p>
             <a:pPr marL="0" indent="0">
@@ -13281,9 +15338,8 @@
                 <a:latin typeface="Calibri" pitchFamily="34" charset="0"/>
                 <a:cs typeface="Calibri" pitchFamily="34" charset="-120"/>
               </a:rPr>
-              <a:t>Isolated backend logic</a:t>
-            </a:r>
-            <a:endParaRPr lang="en-US" sz="1000" dirty="0"/>
+              <a:t>54 Test Suites passing</a:t>
+            </a:r>
           </a:p>
           <a:p>
             <a:pPr marL="0" indent="0">
@@ -13297,7 +15353,22 @@
                 <a:latin typeface="Calibri" pitchFamily="34" charset="0"/>
                 <a:cs typeface="Calibri" pitchFamily="34" charset="-120"/>
               </a:rPr>
-              <a:t>Run on every PR via CI</a:t>
+              <a:t>90%+ Test Coverage</a:t>
+            </a:r>
+          </a:p>
+          <a:p>
+            <a:pPr marL="0" indent="0">
+              <a:buNone/>
+            </a:pPr>
+            <a:r>
+              <a:rPr lang="en-US" sz="1000" dirty="0">
+                <a:solidFill>
+                  <a:srgbClr val="374151"/>
+                </a:solidFill>
+                <a:latin typeface="Calibri" pitchFamily="34" charset="0"/>
+                <a:cs typeface="Calibri" pitchFamily="34" charset="-120"/>
+              </a:rPr>
+              <a:t>UI, Routing, Validation, Admin pages tested</a:t>
             </a:r>
             <a:endParaRPr lang="en-US" sz="1000" dirty="0"/>
           </a:p>
@@ -13392,7 +15463,7 @@
                 <a:ea typeface="Calibri" pitchFamily="34" charset="-122"/>
                 <a:cs typeface="Calibri" pitchFamily="34" charset="-120"/>
               </a:rPr>
-              <a:t>Integration Testing</a:t>
+              <a:t>Backend/API Testing</a:t>
             </a:r>
             <a:endParaRPr lang="en-US" sz="1400" dirty="0"/>
           </a:p>
@@ -13509,7 +15580,7 @@
                 <a:ea typeface="Calibri" pitchFamily="34" charset="-122"/>
                 <a:cs typeface="Calibri" pitchFamily="34" charset="-120"/>
               </a:rPr>
-              <a:t>API endpoint validation</a:t>
+              <a:t>301 Automated tests passed</a:t>
             </a:r>
             <a:endParaRPr lang="en-US" sz="1000" dirty="0"/>
           </a:p>
@@ -13525,9 +15596,8 @@
                 <a:latin typeface="Calibri" pitchFamily="34" charset="0"/>
                 <a:cs typeface="Calibri" pitchFamily="34" charset="-120"/>
               </a:rPr>
-              <a:t>Auth &amp; Permission checks</a:t>
-            </a:r>
-            <a:endParaRPr lang="en-US" sz="1000" dirty="0"/>
+              <a:t>90%+ Backend Test Coverage</a:t>
+            </a:r>
           </a:p>
           <a:p>
             <a:pPr marL="0" indent="0">
@@ -13541,7 +15611,22 @@
                 <a:latin typeface="Calibri" pitchFamily="34" charset="0"/>
                 <a:cs typeface="Calibri" pitchFamily="34" charset="-120"/>
               </a:rPr>
-              <a:t>Postman pre-merge verification</a:t>
+              <a:t>API Validation, RBAC, Inventory tested</a:t>
+            </a:r>
+          </a:p>
+          <a:p>
+            <a:pPr marL="0" indent="0">
+              <a:buNone/>
+            </a:pPr>
+            <a:r>
+              <a:rPr lang="en-US" sz="1000" dirty="0">
+                <a:solidFill>
+                  <a:srgbClr val="374151"/>
+                </a:solidFill>
+                <a:latin typeface="Calibri" pitchFamily="34" charset="0"/>
+                <a:cs typeface="Calibri" pitchFamily="34" charset="-120"/>
+              </a:rPr>
+              <a:t>Contract and Edge-Case coverage</a:t>
             </a:r>
             <a:endParaRPr lang="en-US" sz="1000" dirty="0"/>
           </a:p>
@@ -13636,7 +15721,7 @@
                 <a:ea typeface="Calibri" pitchFamily="34" charset="-122"/>
                 <a:cs typeface="Calibri" pitchFamily="34" charset="-120"/>
               </a:rPr>
-              <a:t>E2E Testing</a:t>
+              <a:t>End-to-End Testing</a:t>
             </a:r>
             <a:endParaRPr lang="en-US" sz="1400" dirty="0"/>
           </a:p>
@@ -13714,7 +15799,7 @@
                 <a:ea typeface="Calibri" pitchFamily="34" charset="-122"/>
                 <a:cs typeface="Calibri" pitchFamily="34" charset="-120"/>
               </a:rPr>
-              <a:t>Tool: Robot Framework + Selenium</a:t>
+              <a:t>Tool: Robot Framework</a:t>
             </a:r>
             <a:endParaRPr lang="en-US" sz="1000" dirty="0"/>
           </a:p>
@@ -13753,9 +15838,8 @@
                 <a:ea typeface="Calibri" pitchFamily="34" charset="-122"/>
                 <a:cs typeface="Calibri" pitchFamily="34" charset="-120"/>
               </a:rPr>
-              <a:t>Full user flow automation</a:t>
-            </a:r>
-            <a:endParaRPr lang="en-US" sz="1000" dirty="0"/>
+              <a:t>166 Automated Tests passed</a:t>
+            </a:r>
           </a:p>
           <a:p>
             <a:pPr marL="0" indent="0">
@@ -13769,25 +15853,26 @@
                 <a:latin typeface="Calibri" pitchFamily="34" charset="0"/>
                 <a:cs typeface="Calibri" pitchFamily="34" charset="-120"/>
               </a:rPr>
-              <a:t>Customer + Admin journeys</a:t>
-            </a:r>
-            <a:endParaRPr lang="en-US" sz="1000" dirty="0"/>
+              <a:t>Critical Customer Workflows validated</a:t>
+            </a:r>
           </a:p>
           <a:p>
             <a:pPr marL="0" indent="0">
               <a:buNone/>
             </a:pPr>
             <a:r>
-              <a:rPr lang="en-US" sz="1000" dirty="0">
-                <a:solidFill>
-                  <a:srgbClr val="374151"/>
-                </a:solidFill>
-                <a:latin typeface="Calibri" pitchFamily="34" charset="0"/>
-                <a:cs typeface="Calibri" pitchFamily="34" charset="-120"/>
-              </a:rPr>
-              <a:t>Runs in GitHub Actions CI</a:t>
-            </a:r>
-            <a:endParaRPr lang="en-US" sz="1000" dirty="0"/>
+              <a:rPr lang="en-US" sz="1000" dirty="0"/>
+              <a:t>Admin Workflows and Regression coverage</a:t>
+            </a:r>
+          </a:p>
+          <a:p>
+            <a:pPr marL="0" indent="0">
+              <a:buNone/>
+            </a:pPr>
+            <a:r>
+              <a:rPr lang="en-US" sz="1000" dirty="0"/>
+              <a:t>100% pass rate</a:t>
+            </a:r>
           </a:p>
         </p:txBody>
       </p:sp>
@@ -13863,7 +15948,7 @@
         <p:spPr>
           <a:xfrm>
             <a:off x="1115568" y="3611880"/>
-            <a:ext cx="3657600" cy="292608"/>
+            <a:ext cx="3657600" cy="221285"/>
           </a:xfrm>
           <a:prstGeom prst="rect">
             <a:avLst/>
@@ -13902,7 +15987,7 @@
         <p:spPr>
           <a:xfrm>
             <a:off x="1115568" y="3931920"/>
-            <a:ext cx="7315200" cy="685800"/>
+            <a:ext cx="7315200" cy="736092"/>
           </a:xfrm>
           <a:prstGeom prst="rect">
             <a:avLst/>
@@ -13926,7 +16011,23 @@
                 <a:ea typeface="Calibri" pitchFamily="34" charset="-122"/>
                 <a:cs typeface="Calibri" pitchFamily="34" charset="-120"/>
               </a:rPr>
-              <a:t>Maintained the test suite across all five sprints. Authored the QA execution report, testing matrix, and test artifact documentation for project release. Thorough and consistent throughout.</a:t>
+              <a:t>Lead  the quality assurance strategy and test suite across all five sprints. Authored test plans, test cases, acceptance coverage reports, automated test coverage, and CI regression validation. Owned end-to-end QA coordination and helped drive release readiness with no critical defects open. </a:t>
+            </a:r>
+          </a:p>
+          <a:p>
+            <a:pPr marL="0" indent="0">
+              <a:buNone/>
+            </a:pPr>
+            <a:r>
+              <a:rPr lang="en-US" sz="1000" dirty="0">
+                <a:solidFill>
+                  <a:srgbClr val="374151"/>
+                </a:solidFill>
+                <a:latin typeface="Calibri" pitchFamily="34" charset="0"/>
+                <a:ea typeface="Calibri" pitchFamily="34" charset="-122"/>
+                <a:cs typeface="Calibri" pitchFamily="34" charset="-120"/>
+              </a:rPr>
+              <a:t>Thorough and consistent throughout.</a:t>
             </a:r>
             <a:br>
               <a:rPr lang="en-US" sz="1000" dirty="0">
@@ -14962,22 +17063,19 @@
         </p:nvSpPr>
         <p:spPr>
           <a:xfrm>
-            <a:off x="548640" y="2423160"/>
-            <a:ext cx="1828800" cy="274320"/>
-          </a:xfrm>
-          <a:prstGeom prst="rect">
-            <a:avLst/>
-          </a:prstGeom>
-          <a:noFill/>
-          <a:ln/>
-        </p:spPr>
-        <p:txBody>
-          <a:bodyPr wrap="square" lIns="0" tIns="0" rIns="0" bIns="0" rtlCol="0" anchor="ctr"/>
-          <a:lstStyle/>
-          <a:p>
-            <a:pPr marL="0" indent="0">
-              <a:buNone/>
-            </a:pPr>
+            <a:off x="548639" y="2423160"/>
+            <a:ext cx="1982419" cy="274320"/>
+          </a:xfrm>
+          <a:prstGeom prst="rect">
+            <a:avLst/>
+          </a:prstGeom>
+          <a:noFill/>
+          <a:ln/>
+        </p:spPr>
+        <p:txBody>
+          <a:bodyPr wrap="square" lIns="0" tIns="0" rIns="0" bIns="0" rtlCol="0" anchor="ctr"/>
+          <a:lstStyle/>
+          <a:p>
             <a:r>
               <a:rPr lang="en-US" sz="1200" b="1" dirty="0">
                 <a:solidFill>
@@ -14987,7 +17085,7 @@
                 <a:ea typeface="Calibri" pitchFamily="34" charset="-122"/>
                 <a:cs typeface="Calibri" pitchFamily="34" charset="-120"/>
               </a:rPr>
-              <a:t>[Callout Label — </a:t>
+              <a:t>Run It Yourself:</a:t>
             </a:r>
             <a:endParaRPr lang="en-US" sz="1200" dirty="0"/>
           </a:p>
@@ -15014,9 +17112,6 @@
           <a:bodyPr wrap="square" lIns="0" tIns="0" rIns="0" bIns="0" rtlCol="0" anchor="ctr"/>
           <a:lstStyle/>
           <a:p>
-            <a:pPr marL="0" indent="0">
-              <a:buNone/>
-            </a:pPr>
             <a:r>
               <a:rPr lang="en-US" sz="1100" dirty="0">
                 <a:solidFill>
@@ -15026,7 +17121,7 @@
                 <a:ea typeface="Consolas" pitchFamily="34" charset="-122"/>
                 <a:cs typeface="Consolas" pitchFamily="34" charset="-120"/>
               </a:rPr>
-              <a:t>[command or technical detail goes here]</a:t>
+              <a:t>git clone + docker-compose up</a:t>
             </a:r>
             <a:endParaRPr lang="en-US" sz="1100" dirty="0"/>
           </a:p>
@@ -15053,9 +17148,6 @@
           <a:bodyPr wrap="square" lIns="0" tIns="0" rIns="0" bIns="0" rtlCol="0" anchor="ctr"/>
           <a:lstStyle/>
           <a:p>
-            <a:pPr marL="0" indent="0">
-              <a:buNone/>
-            </a:pPr>
             <a:r>
               <a:rPr lang="en-US" sz="950" dirty="0">
                 <a:solidFill>
@@ -15065,7 +17157,7 @@
                 <a:ea typeface="Calibri" pitchFamily="34" charset="-122"/>
                 <a:cs typeface="Calibri" pitchFamily="34" charset="-120"/>
               </a:rPr>
-              <a:t>[One sentence explaining what this command/detail does and why it matters.]</a:t>
+              <a:t>The full application runs locally in minutes. Clone the repo, run Docker Compose, and the stack is live.</a:t>
             </a:r>
             <a:endParaRPr lang="en-US" sz="950" dirty="0"/>
           </a:p>
@@ -15316,6 +17408,38 @@
           <a:bodyPr wrap="square" lIns="0" tIns="0" rIns="0" bIns="0" rtlCol="0" anchor="ctr"/>
           <a:lstStyle/>
           <a:p>
+            <a:r>
+              <a:rPr lang="en-US" sz="1000" dirty="0">
+                <a:solidFill>
+                  <a:srgbClr val="374151"/>
+                </a:solidFill>
+                <a:latin typeface="Calibri" pitchFamily="34" charset="0"/>
+                <a:cs typeface="Calibri" pitchFamily="34" charset="-120"/>
+              </a:rPr>
+              <a:t>Deployed April 25, 2026.</a:t>
+            </a:r>
+            <a:br>
+              <a:rPr lang="en-US" sz="1000" dirty="0">
+                <a:solidFill>
+                  <a:srgbClr val="374151"/>
+                </a:solidFill>
+                <a:latin typeface="Calibri" pitchFamily="34" charset="0"/>
+                <a:cs typeface="Calibri" pitchFamily="34" charset="-120"/>
+              </a:rPr>
+            </a:br>
+            <a:r>
+              <a:rPr lang="en-US" sz="1000" dirty="0">
+                <a:solidFill>
+                  <a:srgbClr val="374151"/>
+                </a:solidFill>
+                <a:latin typeface="Calibri" pitchFamily="34" charset="0"/>
+                <a:cs typeface="Calibri" pitchFamily="34" charset="-120"/>
+              </a:rPr>
+              <a:t>AWS deployment is live and functional. Image rendering requires a final polish pass -- the local build is the recommended demo environment and reflects the full, complete experience.</a:t>
+            </a:r>
+            <a:endParaRPr lang="en-US" sz="1000" dirty="0"/>
+          </a:p>
+          <a:p>
             <a:pPr marL="0" indent="0">
               <a:buNone/>
             </a:pPr>
@@ -15327,7 +17451,7 @@
                 <a:latin typeface="Calibri" pitchFamily="34" charset="0"/>
                 <a:cs typeface="Calibri" pitchFamily="34" charset="-120"/>
               </a:rPr>
-              <a:t>Deployed April 25, 2026. Application accessible via the link above. </a:t>
+              <a:t> </a:t>
             </a:r>
             <a:endParaRPr lang="en-US" sz="1000" dirty="0"/>
           </a:p>

--- a/docs/Deliverables/Orderly_Slides.pptx
+++ b/docs/Deliverables/Orderly_Slides.pptx
@@ -5,25 +5,27 @@
     <p:sldMasterId id="2147483648" r:id="rId1"/>
   </p:sldMasterIdLst>
   <p:notesMasterIdLst>
-    <p:notesMasterId r:id="rId18"/>
+    <p:notesMasterId r:id="rId20"/>
   </p:notesMasterIdLst>
   <p:sldIdLst>
     <p:sldId id="256" r:id="rId2"/>
     <p:sldId id="257" r:id="rId3"/>
     <p:sldId id="259" r:id="rId4"/>
     <p:sldId id="258" r:id="rId5"/>
-    <p:sldId id="261" r:id="rId6"/>
-    <p:sldId id="262" r:id="rId7"/>
-    <p:sldId id="269" r:id="rId8"/>
-    <p:sldId id="270" r:id="rId9"/>
-    <p:sldId id="271" r:id="rId10"/>
-    <p:sldId id="260" r:id="rId11"/>
-    <p:sldId id="264" r:id="rId12"/>
-    <p:sldId id="263" r:id="rId13"/>
-    <p:sldId id="265" r:id="rId14"/>
-    <p:sldId id="266" r:id="rId15"/>
-    <p:sldId id="267" r:id="rId16"/>
-    <p:sldId id="268" r:id="rId17"/>
+    <p:sldId id="272" r:id="rId6"/>
+    <p:sldId id="273" r:id="rId7"/>
+    <p:sldId id="261" r:id="rId8"/>
+    <p:sldId id="262" r:id="rId9"/>
+    <p:sldId id="269" r:id="rId10"/>
+    <p:sldId id="270" r:id="rId11"/>
+    <p:sldId id="271" r:id="rId12"/>
+    <p:sldId id="260" r:id="rId13"/>
+    <p:sldId id="264" r:id="rId14"/>
+    <p:sldId id="263" r:id="rId15"/>
+    <p:sldId id="265" r:id="rId16"/>
+    <p:sldId id="266" r:id="rId17"/>
+    <p:sldId id="267" r:id="rId18"/>
+    <p:sldId id="268" r:id="rId19"/>
   </p:sldIdLst>
   <p:sldSz cx="9144000" cy="5143500" type="screen16x9"/>
   <p:notesSz cx="5143500" cy="9144000"/>
@@ -348,7 +350,13 @@
   <p:cSld>
     <p:spTree>
       <p:nvGrpSpPr>
-        <p:cNvPr id="1" name=""/>
+        <p:cNvPr id="1" name="">
+          <a:extLst>
+            <a:ext uri="{FF2B5EF4-FFF2-40B4-BE49-F238E27FC236}">
+              <a16:creationId xmlns:a16="http://schemas.microsoft.com/office/drawing/2014/main" id="{845BCE08-5870-D4A2-0392-DE47257989B7}"/>
+            </a:ext>
+          </a:extLst>
+        </p:cNvPr>
         <p:cNvGrpSpPr/>
         <p:nvPr/>
       </p:nvGrpSpPr>
@@ -362,7 +370,13 @@
       </p:grpSpPr>
       <p:sp>
         <p:nvSpPr>
-          <p:cNvPr id="2" name="Slide Image Placeholder 1"/>
+          <p:cNvPr id="2" name="Slide Image Placeholder 1">
+            <a:extLst>
+              <a:ext uri="{FF2B5EF4-FFF2-40B4-BE49-F238E27FC236}">
+                <a16:creationId xmlns:a16="http://schemas.microsoft.com/office/drawing/2014/main" id="{A9CEBB60-46CF-369D-877E-0174F5153AEA}"/>
+              </a:ext>
+            </a:extLst>
+          </p:cNvPr>
           <p:cNvSpPr>
             <a:spLocks noGrp="1" noRot="1" noChangeAspect="1"/>
           </p:cNvSpPr>
@@ -381,7 +395,13 @@
       </p:sp>
       <p:sp>
         <p:nvSpPr>
-          <p:cNvPr id="3" name="Notes Placeholder 2"/>
+          <p:cNvPr id="3" name="Notes Placeholder 2">
+            <a:extLst>
+              <a:ext uri="{FF2B5EF4-FFF2-40B4-BE49-F238E27FC236}">
+                <a16:creationId xmlns:a16="http://schemas.microsoft.com/office/drawing/2014/main" id="{F720D29F-F877-2DB6-3517-EDFF9567A65D}"/>
+              </a:ext>
+            </a:extLst>
+          </p:cNvPr>
           <p:cNvSpPr>
             <a:spLocks noGrp="1"/>
           </p:cNvSpPr>
@@ -396,14 +416,20 @@
           <a:p>
             <a:r>
               <a:rPr lang="en-US" dirty="0"/>
-              <a:t>TRISTIN</a:t>
-            </a:r>
-          </a:p>
-        </p:txBody>
-      </p:sp>
-      <p:sp>
-        <p:nvSpPr>
-          <p:cNvPr id="4" name="Slide Number Placeholder 3"/>
+              <a:t>Kim</a:t>
+            </a:r>
+          </a:p>
+        </p:txBody>
+      </p:sp>
+      <p:sp>
+        <p:nvSpPr>
+          <p:cNvPr id="4" name="Slide Number Placeholder 3">
+            <a:extLst>
+              <a:ext uri="{FF2B5EF4-FFF2-40B4-BE49-F238E27FC236}">
+                <a16:creationId xmlns:a16="http://schemas.microsoft.com/office/drawing/2014/main" id="{6D69AD2B-CEEE-2FBB-15BC-B1BFC90C3E52}"/>
+              </a:ext>
+            </a:extLst>
+          </p:cNvPr>
           <p:cNvSpPr>
             <a:spLocks noGrp="1"/>
           </p:cNvSpPr>
@@ -427,7 +453,7 @@
     </p:spTree>
     <p:extLst>
       <p:ext uri="{BB962C8B-B14F-4D97-AF65-F5344CB8AC3E}">
-        <p14:creationId xmlns:p14="http://schemas.microsoft.com/office/powerpoint/2010/main" val="1024086991"/>
+        <p14:creationId xmlns:p14="http://schemas.microsoft.com/office/powerpoint/2010/main" val="2521439591"/>
       </p:ext>
     </p:extLst>
   </p:cSld>
@@ -442,7 +468,13 @@
   <p:cSld>
     <p:spTree>
       <p:nvGrpSpPr>
-        <p:cNvPr id="1" name=""/>
+        <p:cNvPr id="1" name="">
+          <a:extLst>
+            <a:ext uri="{FF2B5EF4-FFF2-40B4-BE49-F238E27FC236}">
+              <a16:creationId xmlns:a16="http://schemas.microsoft.com/office/drawing/2014/main" id="{0E1F97C8-49CB-4741-C080-08FE9BDF8466}"/>
+            </a:ext>
+          </a:extLst>
+        </p:cNvPr>
         <p:cNvGrpSpPr/>
         <p:nvPr/>
       </p:nvGrpSpPr>
@@ -456,7 +488,13 @@
       </p:grpSpPr>
       <p:sp>
         <p:nvSpPr>
-          <p:cNvPr id="2" name="Slide Image Placeholder 1"/>
+          <p:cNvPr id="2" name="Slide Image Placeholder 1">
+            <a:extLst>
+              <a:ext uri="{FF2B5EF4-FFF2-40B4-BE49-F238E27FC236}">
+                <a16:creationId xmlns:a16="http://schemas.microsoft.com/office/drawing/2014/main" id="{13765F94-B72F-3FFB-B242-FE36CD4251A4}"/>
+              </a:ext>
+            </a:extLst>
+          </p:cNvPr>
           <p:cNvSpPr>
             <a:spLocks noGrp="1" noRot="1" noChangeAspect="1"/>
           </p:cNvSpPr>
@@ -475,7 +513,13 @@
       </p:sp>
       <p:sp>
         <p:nvSpPr>
-          <p:cNvPr id="3" name="Notes Placeholder 2"/>
+          <p:cNvPr id="3" name="Notes Placeholder 2">
+            <a:extLst>
+              <a:ext uri="{FF2B5EF4-FFF2-40B4-BE49-F238E27FC236}">
+                <a16:creationId xmlns:a16="http://schemas.microsoft.com/office/drawing/2014/main" id="{0BD5F05F-3AC1-3A38-DADF-E47159D2A990}"/>
+              </a:ext>
+            </a:extLst>
+          </p:cNvPr>
           <p:cNvSpPr>
             <a:spLocks noGrp="1"/>
           </p:cNvSpPr>
@@ -490,14 +534,20 @@
           <a:p>
             <a:r>
               <a:rPr lang="en-US" dirty="0"/>
-              <a:t>Tristin</a:t>
-            </a:r>
-          </a:p>
-        </p:txBody>
-      </p:sp>
-      <p:sp>
-        <p:nvSpPr>
-          <p:cNvPr id="4" name="Slide Number Placeholder 3"/>
+              <a:t>Kim</a:t>
+            </a:r>
+          </a:p>
+        </p:txBody>
+      </p:sp>
+      <p:sp>
+        <p:nvSpPr>
+          <p:cNvPr id="4" name="Slide Number Placeholder 3">
+            <a:extLst>
+              <a:ext uri="{FF2B5EF4-FFF2-40B4-BE49-F238E27FC236}">
+                <a16:creationId xmlns:a16="http://schemas.microsoft.com/office/drawing/2014/main" id="{D0A18B05-99CA-48B4-9FA3-6606A4957466}"/>
+              </a:ext>
+            </a:extLst>
+          </p:cNvPr>
           <p:cNvSpPr>
             <a:spLocks noGrp="1"/>
           </p:cNvSpPr>
@@ -521,7 +571,7 @@
     </p:spTree>
     <p:extLst>
       <p:ext uri="{BB962C8B-B14F-4D97-AF65-F5344CB8AC3E}">
-        <p14:creationId xmlns:p14="http://schemas.microsoft.com/office/powerpoint/2010/main" val="1024086991"/>
+        <p14:creationId xmlns:p14="http://schemas.microsoft.com/office/powerpoint/2010/main" val="1222704768"/>
       </p:ext>
     </p:extLst>
   </p:cSld>
@@ -584,7 +634,7 @@
           <a:p>
             <a:r>
               <a:rPr lang="en-US" dirty="0"/>
-              <a:t>Kenny</a:t>
+              <a:t>TRISTIN</a:t>
             </a:r>
           </a:p>
         </p:txBody>
@@ -678,7 +728,7 @@
           <a:p>
             <a:r>
               <a:rPr lang="en-US" dirty="0"/>
-              <a:t>Caleb</a:t>
+              <a:t>Tristin</a:t>
             </a:r>
           </a:p>
         </p:txBody>
@@ -772,7 +822,7 @@
           <a:p>
             <a:r>
               <a:rPr lang="en-US" dirty="0"/>
-              <a:t>Rachel</a:t>
+              <a:t>Kenny</a:t>
             </a:r>
           </a:p>
         </p:txBody>
@@ -866,7 +916,7 @@
           <a:p>
             <a:r>
               <a:rPr lang="en-US" dirty="0"/>
-              <a:t>Serina</a:t>
+              <a:t>Caleb</a:t>
             </a:r>
           </a:p>
         </p:txBody>
@@ -960,7 +1010,7 @@
           <a:p>
             <a:r>
               <a:rPr lang="en-US" dirty="0"/>
-              <a:t>Serina</a:t>
+              <a:t>Rachel</a:t>
             </a:r>
           </a:p>
         </p:txBody>
@@ -983,6 +1033,194 @@
             <a:fld id="{F7021451-1387-4CA6-816F-3879F97B5CBC}" type="slidenum">
               <a:rPr lang="en-US"/>
               <a:t>16</a:t>
+            </a:fld>
+            <a:endParaRPr lang="en-US"/>
+          </a:p>
+        </p:txBody>
+      </p:sp>
+    </p:spTree>
+    <p:extLst>
+      <p:ext uri="{BB962C8B-B14F-4D97-AF65-F5344CB8AC3E}">
+        <p14:creationId xmlns:p14="http://schemas.microsoft.com/office/powerpoint/2010/main" val="1024086991"/>
+      </p:ext>
+    </p:extLst>
+  </p:cSld>
+  <p:clrMapOvr>
+    <a:masterClrMapping/>
+  </p:clrMapOvr>
+</p:notes>
+</file>
+
+<file path=ppt/notesSlides/notesSlide17.xml><?xml version="1.0" encoding="utf-8"?>
+<p:notes xmlns:a="http://schemas.openxmlformats.org/drawingml/2006/main" xmlns:r="http://schemas.openxmlformats.org/officeDocument/2006/relationships" xmlns:p="http://schemas.openxmlformats.org/presentationml/2006/main">
+  <p:cSld>
+    <p:spTree>
+      <p:nvGrpSpPr>
+        <p:cNvPr id="1" name=""/>
+        <p:cNvGrpSpPr/>
+        <p:nvPr/>
+      </p:nvGrpSpPr>
+      <p:grpSpPr>
+        <a:xfrm>
+          <a:off x="0" y="0"/>
+          <a:ext cx="0" cy="0"/>
+          <a:chOff x="0" y="0"/>
+          <a:chExt cx="0" cy="0"/>
+        </a:xfrm>
+      </p:grpSpPr>
+      <p:sp>
+        <p:nvSpPr>
+          <p:cNvPr id="2" name="Slide Image Placeholder 1"/>
+          <p:cNvSpPr>
+            <a:spLocks noGrp="1" noRot="1" noChangeAspect="1"/>
+          </p:cNvSpPr>
+          <p:nvPr>
+            <p:ph type="sldImg"/>
+          </p:nvPr>
+        </p:nvSpPr>
+        <p:spPr/>
+        <p:txBody>
+          <a:bodyPr/>
+          <a:lstStyle/>
+          <a:p>
+            <a:endParaRPr lang="en-US"/>
+          </a:p>
+        </p:txBody>
+      </p:sp>
+      <p:sp>
+        <p:nvSpPr>
+          <p:cNvPr id="3" name="Notes Placeholder 2"/>
+          <p:cNvSpPr>
+            <a:spLocks noGrp="1"/>
+          </p:cNvSpPr>
+          <p:nvPr>
+            <p:ph type="body" idx="1"/>
+          </p:nvPr>
+        </p:nvSpPr>
+        <p:spPr/>
+        <p:txBody>
+          <a:bodyPr/>
+          <a:lstStyle/>
+          <a:p>
+            <a:r>
+              <a:rPr lang="en-US" dirty="0"/>
+              <a:t>Serina</a:t>
+            </a:r>
+          </a:p>
+        </p:txBody>
+      </p:sp>
+      <p:sp>
+        <p:nvSpPr>
+          <p:cNvPr id="4" name="Slide Number Placeholder 3"/>
+          <p:cNvSpPr>
+            <a:spLocks noGrp="1"/>
+          </p:cNvSpPr>
+          <p:nvPr>
+            <p:ph type="sldNum" sz="quarter" idx="10"/>
+          </p:nvPr>
+        </p:nvSpPr>
+        <p:spPr/>
+        <p:txBody>
+          <a:bodyPr/>
+          <a:lstStyle/>
+          <a:p>
+            <a:fld id="{F7021451-1387-4CA6-816F-3879F97B5CBC}" type="slidenum">
+              <a:rPr lang="en-US"/>
+              <a:t>17</a:t>
+            </a:fld>
+            <a:endParaRPr lang="en-US"/>
+          </a:p>
+        </p:txBody>
+      </p:sp>
+    </p:spTree>
+    <p:extLst>
+      <p:ext uri="{BB962C8B-B14F-4D97-AF65-F5344CB8AC3E}">
+        <p14:creationId xmlns:p14="http://schemas.microsoft.com/office/powerpoint/2010/main" val="1024086991"/>
+      </p:ext>
+    </p:extLst>
+  </p:cSld>
+  <p:clrMapOvr>
+    <a:masterClrMapping/>
+  </p:clrMapOvr>
+</p:notes>
+</file>
+
+<file path=ppt/notesSlides/notesSlide18.xml><?xml version="1.0" encoding="utf-8"?>
+<p:notes xmlns:a="http://schemas.openxmlformats.org/drawingml/2006/main" xmlns:r="http://schemas.openxmlformats.org/officeDocument/2006/relationships" xmlns:p="http://schemas.openxmlformats.org/presentationml/2006/main">
+  <p:cSld>
+    <p:spTree>
+      <p:nvGrpSpPr>
+        <p:cNvPr id="1" name=""/>
+        <p:cNvGrpSpPr/>
+        <p:nvPr/>
+      </p:nvGrpSpPr>
+      <p:grpSpPr>
+        <a:xfrm>
+          <a:off x="0" y="0"/>
+          <a:ext cx="0" cy="0"/>
+          <a:chOff x="0" y="0"/>
+          <a:chExt cx="0" cy="0"/>
+        </a:xfrm>
+      </p:grpSpPr>
+      <p:sp>
+        <p:nvSpPr>
+          <p:cNvPr id="2" name="Slide Image Placeholder 1"/>
+          <p:cNvSpPr>
+            <a:spLocks noGrp="1" noRot="1" noChangeAspect="1"/>
+          </p:cNvSpPr>
+          <p:nvPr>
+            <p:ph type="sldImg"/>
+          </p:nvPr>
+        </p:nvSpPr>
+        <p:spPr/>
+        <p:txBody>
+          <a:bodyPr/>
+          <a:lstStyle/>
+          <a:p>
+            <a:endParaRPr lang="en-US"/>
+          </a:p>
+        </p:txBody>
+      </p:sp>
+      <p:sp>
+        <p:nvSpPr>
+          <p:cNvPr id="3" name="Notes Placeholder 2"/>
+          <p:cNvSpPr>
+            <a:spLocks noGrp="1"/>
+          </p:cNvSpPr>
+          <p:nvPr>
+            <p:ph type="body" idx="1"/>
+          </p:nvPr>
+        </p:nvSpPr>
+        <p:spPr/>
+        <p:txBody>
+          <a:bodyPr/>
+          <a:lstStyle/>
+          <a:p>
+            <a:r>
+              <a:rPr lang="en-US" dirty="0"/>
+              <a:t>Serina</a:t>
+            </a:r>
+          </a:p>
+        </p:txBody>
+      </p:sp>
+      <p:sp>
+        <p:nvSpPr>
+          <p:cNvPr id="4" name="Slide Number Placeholder 3"/>
+          <p:cNvSpPr>
+            <a:spLocks noGrp="1"/>
+          </p:cNvSpPr>
+          <p:nvPr>
+            <p:ph type="sldNum" sz="quarter" idx="10"/>
+          </p:nvPr>
+        </p:nvSpPr>
+        <p:spPr/>
+        <p:txBody>
+          <a:bodyPr/>
+          <a:lstStyle/>
+          <a:p>
+            <a:fld id="{F7021451-1387-4CA6-816F-3879F97B5CBC}" type="slidenum">
+              <a:rPr lang="en-US"/>
+              <a:t>18</a:t>
             </a:fld>
             <a:endParaRPr lang="en-US"/>
           </a:p>
@@ -1809,7 +2047,13 @@
   <p:cSld>
     <p:spTree>
       <p:nvGrpSpPr>
-        <p:cNvPr id="1" name=""/>
+        <p:cNvPr id="1" name="">
+          <a:extLst>
+            <a:ext uri="{FF2B5EF4-FFF2-40B4-BE49-F238E27FC236}">
+              <a16:creationId xmlns:a16="http://schemas.microsoft.com/office/drawing/2014/main" id="{C03EFC71-D3EF-62C9-F514-B1DECA46A5AD}"/>
+            </a:ext>
+          </a:extLst>
+        </p:cNvPr>
         <p:cNvGrpSpPr/>
         <p:nvPr/>
       </p:nvGrpSpPr>
@@ -1823,7 +2067,13 @@
       </p:grpSpPr>
       <p:sp>
         <p:nvSpPr>
-          <p:cNvPr id="2" name="Slide Image Placeholder 1"/>
+          <p:cNvPr id="2" name="Slide Image Placeholder 1">
+            <a:extLst>
+              <a:ext uri="{FF2B5EF4-FFF2-40B4-BE49-F238E27FC236}">
+                <a16:creationId xmlns:a16="http://schemas.microsoft.com/office/drawing/2014/main" id="{A8DEC32F-F70E-F27D-912B-F0BF686019EC}"/>
+              </a:ext>
+            </a:extLst>
+          </p:cNvPr>
           <p:cNvSpPr>
             <a:spLocks noGrp="1" noRot="1" noChangeAspect="1"/>
           </p:cNvSpPr>
@@ -1842,7 +2092,13 @@
       </p:sp>
       <p:sp>
         <p:nvSpPr>
-          <p:cNvPr id="3" name="Notes Placeholder 2"/>
+          <p:cNvPr id="3" name="Notes Placeholder 2">
+            <a:extLst>
+              <a:ext uri="{FF2B5EF4-FFF2-40B4-BE49-F238E27FC236}">
+                <a16:creationId xmlns:a16="http://schemas.microsoft.com/office/drawing/2014/main" id="{F7C33A61-3977-F9A5-EB8D-E09495503881}"/>
+              </a:ext>
+            </a:extLst>
+          </p:cNvPr>
           <p:cNvSpPr>
             <a:spLocks noGrp="1"/>
           </p:cNvSpPr>
@@ -1857,14 +2113,20 @@
           <a:p>
             <a:r>
               <a:rPr lang="en-US" dirty="0"/>
-              <a:t>Rachel</a:t>
-            </a:r>
-          </a:p>
-        </p:txBody>
-      </p:sp>
-      <p:sp>
-        <p:nvSpPr>
-          <p:cNvPr id="4" name="Slide Number Placeholder 3"/>
+              <a:t>KIM!</a:t>
+            </a:r>
+          </a:p>
+        </p:txBody>
+      </p:sp>
+      <p:sp>
+        <p:nvSpPr>
+          <p:cNvPr id="4" name="Slide Number Placeholder 3">
+            <a:extLst>
+              <a:ext uri="{FF2B5EF4-FFF2-40B4-BE49-F238E27FC236}">
+                <a16:creationId xmlns:a16="http://schemas.microsoft.com/office/drawing/2014/main" id="{35C08A93-D3B1-553D-59F7-C75B65EB15EF}"/>
+              </a:ext>
+            </a:extLst>
+          </p:cNvPr>
           <p:cNvSpPr>
             <a:spLocks noGrp="1"/>
           </p:cNvSpPr>
@@ -1888,7 +2150,7 @@
     </p:spTree>
     <p:extLst>
       <p:ext uri="{BB962C8B-B14F-4D97-AF65-F5344CB8AC3E}">
-        <p14:creationId xmlns:p14="http://schemas.microsoft.com/office/powerpoint/2010/main" val="1024086991"/>
+        <p14:creationId xmlns:p14="http://schemas.microsoft.com/office/powerpoint/2010/main" val="3554595471"/>
       </p:ext>
     </p:extLst>
   </p:cSld>
@@ -1899,6 +2161,124 @@
 </file>
 
 <file path=ppt/notesSlides/notesSlide6.xml><?xml version="1.0" encoding="utf-8"?>
+<p:notes xmlns:a="http://schemas.openxmlformats.org/drawingml/2006/main" xmlns:r="http://schemas.openxmlformats.org/officeDocument/2006/relationships" xmlns:p="http://schemas.openxmlformats.org/presentationml/2006/main">
+  <p:cSld>
+    <p:spTree>
+      <p:nvGrpSpPr>
+        <p:cNvPr id="1" name="">
+          <a:extLst>
+            <a:ext uri="{FF2B5EF4-FFF2-40B4-BE49-F238E27FC236}">
+              <a16:creationId xmlns:a16="http://schemas.microsoft.com/office/drawing/2014/main" id="{A05697F1-FF6F-4CDB-30EF-033C349BC010}"/>
+            </a:ext>
+          </a:extLst>
+        </p:cNvPr>
+        <p:cNvGrpSpPr/>
+        <p:nvPr/>
+      </p:nvGrpSpPr>
+      <p:grpSpPr>
+        <a:xfrm>
+          <a:off x="0" y="0"/>
+          <a:ext cx="0" cy="0"/>
+          <a:chOff x="0" y="0"/>
+          <a:chExt cx="0" cy="0"/>
+        </a:xfrm>
+      </p:grpSpPr>
+      <p:sp>
+        <p:nvSpPr>
+          <p:cNvPr id="2" name="Slide Image Placeholder 1">
+            <a:extLst>
+              <a:ext uri="{FF2B5EF4-FFF2-40B4-BE49-F238E27FC236}">
+                <a16:creationId xmlns:a16="http://schemas.microsoft.com/office/drawing/2014/main" id="{4C11898E-722F-11D0-8A99-9047D15CD202}"/>
+              </a:ext>
+            </a:extLst>
+          </p:cNvPr>
+          <p:cNvSpPr>
+            <a:spLocks noGrp="1" noRot="1" noChangeAspect="1"/>
+          </p:cNvSpPr>
+          <p:nvPr>
+            <p:ph type="sldImg"/>
+          </p:nvPr>
+        </p:nvSpPr>
+        <p:spPr/>
+        <p:txBody>
+          <a:bodyPr/>
+          <a:lstStyle/>
+          <a:p>
+            <a:endParaRPr lang="en-US"/>
+          </a:p>
+        </p:txBody>
+      </p:sp>
+      <p:sp>
+        <p:nvSpPr>
+          <p:cNvPr id="3" name="Notes Placeholder 2">
+            <a:extLst>
+              <a:ext uri="{FF2B5EF4-FFF2-40B4-BE49-F238E27FC236}">
+                <a16:creationId xmlns:a16="http://schemas.microsoft.com/office/drawing/2014/main" id="{69E28768-93E5-C1DD-D817-9A47E54D9034}"/>
+              </a:ext>
+            </a:extLst>
+          </p:cNvPr>
+          <p:cNvSpPr>
+            <a:spLocks noGrp="1"/>
+          </p:cNvSpPr>
+          <p:nvPr>
+            <p:ph type="body" idx="1"/>
+          </p:nvPr>
+        </p:nvSpPr>
+        <p:spPr/>
+        <p:txBody>
+          <a:bodyPr/>
+          <a:lstStyle/>
+          <a:p>
+            <a:r>
+              <a:rPr lang="en-US" dirty="0"/>
+              <a:t>KIM!</a:t>
+            </a:r>
+          </a:p>
+        </p:txBody>
+      </p:sp>
+      <p:sp>
+        <p:nvSpPr>
+          <p:cNvPr id="4" name="Slide Number Placeholder 3">
+            <a:extLst>
+              <a:ext uri="{FF2B5EF4-FFF2-40B4-BE49-F238E27FC236}">
+                <a16:creationId xmlns:a16="http://schemas.microsoft.com/office/drawing/2014/main" id="{08CE45D6-9F3E-D6F6-C871-6BF3A3BF1AB4}"/>
+              </a:ext>
+            </a:extLst>
+          </p:cNvPr>
+          <p:cNvSpPr>
+            <a:spLocks noGrp="1"/>
+          </p:cNvSpPr>
+          <p:nvPr>
+            <p:ph type="sldNum" sz="quarter" idx="10"/>
+          </p:nvPr>
+        </p:nvSpPr>
+        <p:spPr/>
+        <p:txBody>
+          <a:bodyPr/>
+          <a:lstStyle/>
+          <a:p>
+            <a:fld id="{F7021451-1387-4CA6-816F-3879F97B5CBC}" type="slidenum">
+              <a:rPr lang="en-US"/>
+              <a:t>6</a:t>
+            </a:fld>
+            <a:endParaRPr lang="en-US"/>
+          </a:p>
+        </p:txBody>
+      </p:sp>
+    </p:spTree>
+    <p:extLst>
+      <p:ext uri="{BB962C8B-B14F-4D97-AF65-F5344CB8AC3E}">
+        <p14:creationId xmlns:p14="http://schemas.microsoft.com/office/powerpoint/2010/main" val="160731018"/>
+      </p:ext>
+    </p:extLst>
+  </p:cSld>
+  <p:clrMapOvr>
+    <a:masterClrMapping/>
+  </p:clrMapOvr>
+</p:notes>
+</file>
+
+<file path=ppt/notesSlides/notesSlide7.xml><?xml version="1.0" encoding="utf-8"?>
 <p:notes xmlns:a="http://schemas.openxmlformats.org/drawingml/2006/main" xmlns:r="http://schemas.openxmlformats.org/officeDocument/2006/relationships" xmlns:p="http://schemas.openxmlformats.org/presentationml/2006/main">
   <p:cSld>
     <p:spTree>
@@ -1951,7 +2331,7 @@
           <a:p>
             <a:r>
               <a:rPr lang="en-US" dirty="0"/>
-              <a:t>Kim</a:t>
+              <a:t>Rachel</a:t>
             </a:r>
           </a:p>
         </p:txBody>
@@ -1973,7 +2353,7 @@
           <a:p>
             <a:fld id="{F7021451-1387-4CA6-816F-3879F97B5CBC}" type="slidenum">
               <a:rPr lang="en-US"/>
-              <a:t>6</a:t>
+              <a:t>7</a:t>
             </a:fld>
             <a:endParaRPr lang="en-US"/>
           </a:p>
@@ -1992,7 +2372,101 @@
 </p:notes>
 </file>
 
-<file path=ppt/notesSlides/notesSlide7.xml><?xml version="1.0" encoding="utf-8"?>
+<file path=ppt/notesSlides/notesSlide8.xml><?xml version="1.0" encoding="utf-8"?>
+<p:notes xmlns:a="http://schemas.openxmlformats.org/drawingml/2006/main" xmlns:r="http://schemas.openxmlformats.org/officeDocument/2006/relationships" xmlns:p="http://schemas.openxmlformats.org/presentationml/2006/main">
+  <p:cSld>
+    <p:spTree>
+      <p:nvGrpSpPr>
+        <p:cNvPr id="1" name=""/>
+        <p:cNvGrpSpPr/>
+        <p:nvPr/>
+      </p:nvGrpSpPr>
+      <p:grpSpPr>
+        <a:xfrm>
+          <a:off x="0" y="0"/>
+          <a:ext cx="0" cy="0"/>
+          <a:chOff x="0" y="0"/>
+          <a:chExt cx="0" cy="0"/>
+        </a:xfrm>
+      </p:grpSpPr>
+      <p:sp>
+        <p:nvSpPr>
+          <p:cNvPr id="2" name="Slide Image Placeholder 1"/>
+          <p:cNvSpPr>
+            <a:spLocks noGrp="1" noRot="1" noChangeAspect="1"/>
+          </p:cNvSpPr>
+          <p:nvPr>
+            <p:ph type="sldImg"/>
+          </p:nvPr>
+        </p:nvSpPr>
+        <p:spPr/>
+        <p:txBody>
+          <a:bodyPr/>
+          <a:lstStyle/>
+          <a:p>
+            <a:endParaRPr lang="en-US"/>
+          </a:p>
+        </p:txBody>
+      </p:sp>
+      <p:sp>
+        <p:nvSpPr>
+          <p:cNvPr id="3" name="Notes Placeholder 2"/>
+          <p:cNvSpPr>
+            <a:spLocks noGrp="1"/>
+          </p:cNvSpPr>
+          <p:nvPr>
+            <p:ph type="body" idx="1"/>
+          </p:nvPr>
+        </p:nvSpPr>
+        <p:spPr/>
+        <p:txBody>
+          <a:bodyPr/>
+          <a:lstStyle/>
+          <a:p>
+            <a:r>
+              <a:rPr lang="en-US" dirty="0"/>
+              <a:t>Kim</a:t>
+            </a:r>
+          </a:p>
+        </p:txBody>
+      </p:sp>
+      <p:sp>
+        <p:nvSpPr>
+          <p:cNvPr id="4" name="Slide Number Placeholder 3"/>
+          <p:cNvSpPr>
+            <a:spLocks noGrp="1"/>
+          </p:cNvSpPr>
+          <p:nvPr>
+            <p:ph type="sldNum" sz="quarter" idx="10"/>
+          </p:nvPr>
+        </p:nvSpPr>
+        <p:spPr/>
+        <p:txBody>
+          <a:bodyPr/>
+          <a:lstStyle/>
+          <a:p>
+            <a:fld id="{F7021451-1387-4CA6-816F-3879F97B5CBC}" type="slidenum">
+              <a:rPr lang="en-US"/>
+              <a:t>8</a:t>
+            </a:fld>
+            <a:endParaRPr lang="en-US"/>
+          </a:p>
+        </p:txBody>
+      </p:sp>
+    </p:spTree>
+    <p:extLst>
+      <p:ext uri="{BB962C8B-B14F-4D97-AF65-F5344CB8AC3E}">
+        <p14:creationId xmlns:p14="http://schemas.microsoft.com/office/powerpoint/2010/main" val="1024086991"/>
+      </p:ext>
+    </p:extLst>
+  </p:cSld>
+  <p:clrMapOvr>
+    <a:masterClrMapping/>
+  </p:clrMapOvr>
+</p:notes>
+</file>
+
+<file path=ppt/notesSlides/notesSlide9.xml><?xml version="1.0" encoding="utf-8"?>
 <p:notes xmlns:a="http://schemas.openxmlformats.org/drawingml/2006/main" xmlns:r="http://schemas.openxmlformats.org/officeDocument/2006/relationships" xmlns:p="http://schemas.openxmlformats.org/presentationml/2006/main">
   <p:cSld>
     <p:spTree>
@@ -2091,7 +2565,7 @@
           <a:p>
             <a:fld id="{F7021451-1387-4CA6-816F-3879F97B5CBC}" type="slidenum">
               <a:rPr lang="en-US"/>
-              <a:t>7</a:t>
+              <a:t>9</a:t>
             </a:fld>
             <a:endParaRPr lang="en-US"/>
           </a:p>
@@ -2101,242 +2575,6 @@
     <p:extLst>
       <p:ext uri="{BB962C8B-B14F-4D97-AF65-F5344CB8AC3E}">
         <p14:creationId xmlns:p14="http://schemas.microsoft.com/office/powerpoint/2010/main" val="1642399735"/>
-      </p:ext>
-    </p:extLst>
-  </p:cSld>
-  <p:clrMapOvr>
-    <a:masterClrMapping/>
-  </p:clrMapOvr>
-</p:notes>
-</file>
-
-<file path=ppt/notesSlides/notesSlide8.xml><?xml version="1.0" encoding="utf-8"?>
-<p:notes xmlns:a="http://schemas.openxmlformats.org/drawingml/2006/main" xmlns:r="http://schemas.openxmlformats.org/officeDocument/2006/relationships" xmlns:p="http://schemas.openxmlformats.org/presentationml/2006/main">
-  <p:cSld>
-    <p:spTree>
-      <p:nvGrpSpPr>
-        <p:cNvPr id="1" name="">
-          <a:extLst>
-            <a:ext uri="{FF2B5EF4-FFF2-40B4-BE49-F238E27FC236}">
-              <a16:creationId xmlns:a16="http://schemas.microsoft.com/office/drawing/2014/main" id="{845BCE08-5870-D4A2-0392-DE47257989B7}"/>
-            </a:ext>
-          </a:extLst>
-        </p:cNvPr>
-        <p:cNvGrpSpPr/>
-        <p:nvPr/>
-      </p:nvGrpSpPr>
-      <p:grpSpPr>
-        <a:xfrm>
-          <a:off x="0" y="0"/>
-          <a:ext cx="0" cy="0"/>
-          <a:chOff x="0" y="0"/>
-          <a:chExt cx="0" cy="0"/>
-        </a:xfrm>
-      </p:grpSpPr>
-      <p:sp>
-        <p:nvSpPr>
-          <p:cNvPr id="2" name="Slide Image Placeholder 1">
-            <a:extLst>
-              <a:ext uri="{FF2B5EF4-FFF2-40B4-BE49-F238E27FC236}">
-                <a16:creationId xmlns:a16="http://schemas.microsoft.com/office/drawing/2014/main" id="{A9CEBB60-46CF-369D-877E-0174F5153AEA}"/>
-              </a:ext>
-            </a:extLst>
-          </p:cNvPr>
-          <p:cNvSpPr>
-            <a:spLocks noGrp="1" noRot="1" noChangeAspect="1"/>
-          </p:cNvSpPr>
-          <p:nvPr>
-            <p:ph type="sldImg"/>
-          </p:nvPr>
-        </p:nvSpPr>
-        <p:spPr/>
-        <p:txBody>
-          <a:bodyPr/>
-          <a:lstStyle/>
-          <a:p>
-            <a:endParaRPr lang="en-US"/>
-          </a:p>
-        </p:txBody>
-      </p:sp>
-      <p:sp>
-        <p:nvSpPr>
-          <p:cNvPr id="3" name="Notes Placeholder 2">
-            <a:extLst>
-              <a:ext uri="{FF2B5EF4-FFF2-40B4-BE49-F238E27FC236}">
-                <a16:creationId xmlns:a16="http://schemas.microsoft.com/office/drawing/2014/main" id="{F720D29F-F877-2DB6-3517-EDFF9567A65D}"/>
-              </a:ext>
-            </a:extLst>
-          </p:cNvPr>
-          <p:cNvSpPr>
-            <a:spLocks noGrp="1"/>
-          </p:cNvSpPr>
-          <p:nvPr>
-            <p:ph type="body" idx="1"/>
-          </p:nvPr>
-        </p:nvSpPr>
-        <p:spPr/>
-        <p:txBody>
-          <a:bodyPr/>
-          <a:lstStyle/>
-          <a:p>
-            <a:r>
-              <a:rPr lang="en-US" dirty="0"/>
-              <a:t>Kim</a:t>
-            </a:r>
-          </a:p>
-        </p:txBody>
-      </p:sp>
-      <p:sp>
-        <p:nvSpPr>
-          <p:cNvPr id="4" name="Slide Number Placeholder 3">
-            <a:extLst>
-              <a:ext uri="{FF2B5EF4-FFF2-40B4-BE49-F238E27FC236}">
-                <a16:creationId xmlns:a16="http://schemas.microsoft.com/office/drawing/2014/main" id="{6D69AD2B-CEEE-2FBB-15BC-B1BFC90C3E52}"/>
-              </a:ext>
-            </a:extLst>
-          </p:cNvPr>
-          <p:cNvSpPr>
-            <a:spLocks noGrp="1"/>
-          </p:cNvSpPr>
-          <p:nvPr>
-            <p:ph type="sldNum" sz="quarter" idx="10"/>
-          </p:nvPr>
-        </p:nvSpPr>
-        <p:spPr/>
-        <p:txBody>
-          <a:bodyPr/>
-          <a:lstStyle/>
-          <a:p>
-            <a:fld id="{F7021451-1387-4CA6-816F-3879F97B5CBC}" type="slidenum">
-              <a:rPr lang="en-US"/>
-              <a:t>8</a:t>
-            </a:fld>
-            <a:endParaRPr lang="en-US"/>
-          </a:p>
-        </p:txBody>
-      </p:sp>
-    </p:spTree>
-    <p:extLst>
-      <p:ext uri="{BB962C8B-B14F-4D97-AF65-F5344CB8AC3E}">
-        <p14:creationId xmlns:p14="http://schemas.microsoft.com/office/powerpoint/2010/main" val="2521439591"/>
-      </p:ext>
-    </p:extLst>
-  </p:cSld>
-  <p:clrMapOvr>
-    <a:masterClrMapping/>
-  </p:clrMapOvr>
-</p:notes>
-</file>
-
-<file path=ppt/notesSlides/notesSlide9.xml><?xml version="1.0" encoding="utf-8"?>
-<p:notes xmlns:a="http://schemas.openxmlformats.org/drawingml/2006/main" xmlns:r="http://schemas.openxmlformats.org/officeDocument/2006/relationships" xmlns:p="http://schemas.openxmlformats.org/presentationml/2006/main">
-  <p:cSld>
-    <p:spTree>
-      <p:nvGrpSpPr>
-        <p:cNvPr id="1" name="">
-          <a:extLst>
-            <a:ext uri="{FF2B5EF4-FFF2-40B4-BE49-F238E27FC236}">
-              <a16:creationId xmlns:a16="http://schemas.microsoft.com/office/drawing/2014/main" id="{0E1F97C8-49CB-4741-C080-08FE9BDF8466}"/>
-            </a:ext>
-          </a:extLst>
-        </p:cNvPr>
-        <p:cNvGrpSpPr/>
-        <p:nvPr/>
-      </p:nvGrpSpPr>
-      <p:grpSpPr>
-        <a:xfrm>
-          <a:off x="0" y="0"/>
-          <a:ext cx="0" cy="0"/>
-          <a:chOff x="0" y="0"/>
-          <a:chExt cx="0" cy="0"/>
-        </a:xfrm>
-      </p:grpSpPr>
-      <p:sp>
-        <p:nvSpPr>
-          <p:cNvPr id="2" name="Slide Image Placeholder 1">
-            <a:extLst>
-              <a:ext uri="{FF2B5EF4-FFF2-40B4-BE49-F238E27FC236}">
-                <a16:creationId xmlns:a16="http://schemas.microsoft.com/office/drawing/2014/main" id="{13765F94-B72F-3FFB-B242-FE36CD4251A4}"/>
-              </a:ext>
-            </a:extLst>
-          </p:cNvPr>
-          <p:cNvSpPr>
-            <a:spLocks noGrp="1" noRot="1" noChangeAspect="1"/>
-          </p:cNvSpPr>
-          <p:nvPr>
-            <p:ph type="sldImg"/>
-          </p:nvPr>
-        </p:nvSpPr>
-        <p:spPr/>
-        <p:txBody>
-          <a:bodyPr/>
-          <a:lstStyle/>
-          <a:p>
-            <a:endParaRPr lang="en-US"/>
-          </a:p>
-        </p:txBody>
-      </p:sp>
-      <p:sp>
-        <p:nvSpPr>
-          <p:cNvPr id="3" name="Notes Placeholder 2">
-            <a:extLst>
-              <a:ext uri="{FF2B5EF4-FFF2-40B4-BE49-F238E27FC236}">
-                <a16:creationId xmlns:a16="http://schemas.microsoft.com/office/drawing/2014/main" id="{0BD5F05F-3AC1-3A38-DADF-E47159D2A990}"/>
-              </a:ext>
-            </a:extLst>
-          </p:cNvPr>
-          <p:cNvSpPr>
-            <a:spLocks noGrp="1"/>
-          </p:cNvSpPr>
-          <p:nvPr>
-            <p:ph type="body" idx="1"/>
-          </p:nvPr>
-        </p:nvSpPr>
-        <p:spPr/>
-        <p:txBody>
-          <a:bodyPr/>
-          <a:lstStyle/>
-          <a:p>
-            <a:r>
-              <a:rPr lang="en-US" dirty="0"/>
-              <a:t>Kim</a:t>
-            </a:r>
-          </a:p>
-        </p:txBody>
-      </p:sp>
-      <p:sp>
-        <p:nvSpPr>
-          <p:cNvPr id="4" name="Slide Number Placeholder 3">
-            <a:extLst>
-              <a:ext uri="{FF2B5EF4-FFF2-40B4-BE49-F238E27FC236}">
-                <a16:creationId xmlns:a16="http://schemas.microsoft.com/office/drawing/2014/main" id="{D0A18B05-99CA-48B4-9FA3-6606A4957466}"/>
-              </a:ext>
-            </a:extLst>
-          </p:cNvPr>
-          <p:cNvSpPr>
-            <a:spLocks noGrp="1"/>
-          </p:cNvSpPr>
-          <p:nvPr>
-            <p:ph type="sldNum" sz="quarter" idx="10"/>
-          </p:nvPr>
-        </p:nvSpPr>
-        <p:spPr/>
-        <p:txBody>
-          <a:bodyPr/>
-          <a:lstStyle/>
-          <a:p>
-            <a:fld id="{F7021451-1387-4CA6-816F-3879F97B5CBC}" type="slidenum">
-              <a:rPr lang="en-US"/>
-              <a:t>9</a:t>
-            </a:fld>
-            <a:endParaRPr lang="en-US"/>
-          </a:p>
-        </p:txBody>
-      </p:sp>
-    </p:spTree>
-    <p:extLst>
-      <p:ext uri="{BB962C8B-B14F-4D97-AF65-F5344CB8AC3E}">
-        <p14:creationId xmlns:p14="http://schemas.microsoft.com/office/powerpoint/2010/main" val="1222704768"/>
       </p:ext>
     </p:extLst>
   </p:cSld>
@@ -2934,6 +3172,1952 @@
 
 <file path=ppt/slides/slide10.xml><?xml version="1.0" encoding="utf-8"?>
 <p:sld xmlns:a="http://schemas.openxmlformats.org/drawingml/2006/main" xmlns:r="http://schemas.openxmlformats.org/officeDocument/2006/relationships" xmlns:p="http://schemas.openxmlformats.org/presentationml/2006/main">
+  <p:cSld>
+    <p:bg>
+      <p:bgPr>
+        <a:solidFill>
+          <a:srgbClr val="F4F6FB"/>
+        </a:solidFill>
+        <a:effectLst/>
+      </p:bgPr>
+    </p:bg>
+    <p:spTree>
+      <p:nvGrpSpPr>
+        <p:cNvPr id="1" name="">
+          <a:extLst>
+            <a:ext uri="{FF2B5EF4-FFF2-40B4-BE49-F238E27FC236}">
+              <a16:creationId xmlns:a16="http://schemas.microsoft.com/office/drawing/2014/main" id="{C78CB47F-8D70-0381-08E3-BC912EE20E66}"/>
+            </a:ext>
+          </a:extLst>
+        </p:cNvPr>
+        <p:cNvGrpSpPr/>
+        <p:nvPr/>
+      </p:nvGrpSpPr>
+      <p:grpSpPr>
+        <a:xfrm>
+          <a:off x="0" y="0"/>
+          <a:ext cx="0" cy="0"/>
+          <a:chOff x="0" y="0"/>
+          <a:chExt cx="0" cy="0"/>
+        </a:xfrm>
+      </p:grpSpPr>
+      <p:sp>
+        <p:nvSpPr>
+          <p:cNvPr id="2" name="Text 0">
+            <a:extLst>
+              <a:ext uri="{FF2B5EF4-FFF2-40B4-BE49-F238E27FC236}">
+                <a16:creationId xmlns:a16="http://schemas.microsoft.com/office/drawing/2014/main" id="{7C50509C-14BC-71D6-0205-203A60195B9A}"/>
+              </a:ext>
+            </a:extLst>
+          </p:cNvPr>
+          <p:cNvSpPr/>
+          <p:nvPr/>
+        </p:nvSpPr>
+        <p:spPr>
+          <a:xfrm>
+            <a:off x="457200" y="256032"/>
+            <a:ext cx="5486400" cy="182880"/>
+          </a:xfrm>
+          <a:prstGeom prst="rect">
+            <a:avLst/>
+          </a:prstGeom>
+          <a:noFill/>
+          <a:ln/>
+        </p:spPr>
+        <p:txBody>
+          <a:bodyPr wrap="square" lIns="0" tIns="0" rIns="0" bIns="0" rtlCol="0" anchor="ctr"/>
+          <a:lstStyle/>
+          <a:p>
+            <a:pPr marL="0" indent="0" algn="l">
+              <a:buNone/>
+            </a:pPr>
+            <a:r>
+              <a:rPr lang="en-US" sz="850" b="1" kern="0" spc="300" dirty="0">
+                <a:solidFill>
+                  <a:srgbClr val="1D9E75"/>
+                </a:solidFill>
+              </a:rPr>
+              <a:t>FRONTEND &amp; USER EXPERIENCE</a:t>
+            </a:r>
+            <a:endParaRPr lang="en-US" sz="850" dirty="0"/>
+          </a:p>
+        </p:txBody>
+      </p:sp>
+      <p:sp>
+        <p:nvSpPr>
+          <p:cNvPr id="3" name="Text 1">
+            <a:extLst>
+              <a:ext uri="{FF2B5EF4-FFF2-40B4-BE49-F238E27FC236}">
+                <a16:creationId xmlns:a16="http://schemas.microsoft.com/office/drawing/2014/main" id="{72477F2A-9A91-DF02-ECA3-856BF2B56D9D}"/>
+              </a:ext>
+            </a:extLst>
+          </p:cNvPr>
+          <p:cNvSpPr/>
+          <p:nvPr/>
+        </p:nvSpPr>
+        <p:spPr>
+          <a:xfrm>
+            <a:off x="457200" y="457200"/>
+            <a:ext cx="6858000" cy="502920"/>
+          </a:xfrm>
+          <a:prstGeom prst="rect">
+            <a:avLst/>
+          </a:prstGeom>
+          <a:noFill/>
+          <a:ln/>
+        </p:spPr>
+        <p:txBody>
+          <a:bodyPr wrap="square" lIns="0" tIns="0" rIns="0" bIns="0" rtlCol="0" anchor="ctr"/>
+          <a:lstStyle/>
+          <a:p>
+            <a:pPr marL="0" indent="0" algn="l">
+              <a:buNone/>
+            </a:pPr>
+            <a:r>
+              <a:rPr lang="en-US" sz="3400" b="1" dirty="0">
+                <a:solidFill>
+                  <a:srgbClr val="0D1B3E"/>
+                </a:solidFill>
+                <a:latin typeface="Calibri" pitchFamily="34" charset="0"/>
+                <a:ea typeface="Calibri" pitchFamily="34" charset="-122"/>
+                <a:cs typeface="Calibri" pitchFamily="34" charset="-120"/>
+              </a:rPr>
+              <a:t>In Action</a:t>
+            </a:r>
+            <a:endParaRPr lang="en-US" sz="3400" dirty="0"/>
+          </a:p>
+        </p:txBody>
+      </p:sp>
+      <p:sp>
+        <p:nvSpPr>
+          <p:cNvPr id="4" name="Text 2">
+            <a:extLst>
+              <a:ext uri="{FF2B5EF4-FFF2-40B4-BE49-F238E27FC236}">
+                <a16:creationId xmlns:a16="http://schemas.microsoft.com/office/drawing/2014/main" id="{ED845693-C0A8-64FA-BDBC-DDBAFE2EED6F}"/>
+              </a:ext>
+            </a:extLst>
+          </p:cNvPr>
+          <p:cNvSpPr/>
+          <p:nvPr/>
+        </p:nvSpPr>
+        <p:spPr>
+          <a:xfrm>
+            <a:off x="7132320" y="493776"/>
+            <a:ext cx="1554480" cy="182880"/>
+          </a:xfrm>
+          <a:prstGeom prst="rect">
+            <a:avLst/>
+          </a:prstGeom>
+          <a:noFill/>
+          <a:ln/>
+        </p:spPr>
+        <p:txBody>
+          <a:bodyPr wrap="square" lIns="0" tIns="0" rIns="0" bIns="0" rtlCol="0" anchor="ctr"/>
+          <a:lstStyle/>
+          <a:p>
+            <a:pPr marL="0" indent="0" algn="r">
+              <a:buNone/>
+            </a:pPr>
+            <a:r>
+              <a:rPr lang="en-US" sz="800" dirty="0">
+                <a:solidFill>
+                  <a:srgbClr val="94A3B8"/>
+                </a:solidFill>
+              </a:rPr>
+              <a:t>Rachel Mizer</a:t>
+            </a:r>
+            <a:endParaRPr lang="en-US" sz="800" dirty="0"/>
+          </a:p>
+        </p:txBody>
+      </p:sp>
+      <p:sp>
+        <p:nvSpPr>
+          <p:cNvPr id="5" name="Text 3">
+            <a:extLst>
+              <a:ext uri="{FF2B5EF4-FFF2-40B4-BE49-F238E27FC236}">
+                <a16:creationId xmlns:a16="http://schemas.microsoft.com/office/drawing/2014/main" id="{C1FFC6B1-0702-0D9E-C770-64B80A4F3810}"/>
+              </a:ext>
+            </a:extLst>
+          </p:cNvPr>
+          <p:cNvSpPr/>
+          <p:nvPr/>
+        </p:nvSpPr>
+        <p:spPr>
+          <a:xfrm>
+            <a:off x="7132320" y="658368"/>
+            <a:ext cx="1554480" cy="146304"/>
+          </a:xfrm>
+          <a:prstGeom prst="rect">
+            <a:avLst/>
+          </a:prstGeom>
+          <a:noFill/>
+          <a:ln/>
+        </p:spPr>
+        <p:txBody>
+          <a:bodyPr wrap="square" lIns="0" tIns="0" rIns="0" bIns="0" rtlCol="0" anchor="ctr"/>
+          <a:lstStyle/>
+          <a:p>
+            <a:pPr marL="0" indent="0" algn="r">
+              <a:buNone/>
+            </a:pPr>
+            <a:r>
+              <a:rPr lang="en-US" sz="700" b="1" dirty="0">
+                <a:solidFill>
+                  <a:srgbClr val="1D9E75"/>
+                </a:solidFill>
+              </a:rPr>
+              <a:t>Frontend &amp; UI/UX Lead</a:t>
+            </a:r>
+            <a:endParaRPr lang="en-US" sz="700" dirty="0"/>
+          </a:p>
+        </p:txBody>
+      </p:sp>
+      <p:sp>
+        <p:nvSpPr>
+          <p:cNvPr id="6" name="Shape 4">
+            <a:extLst>
+              <a:ext uri="{FF2B5EF4-FFF2-40B4-BE49-F238E27FC236}">
+                <a16:creationId xmlns:a16="http://schemas.microsoft.com/office/drawing/2014/main" id="{5E9ED67E-F45A-8B1D-7770-63BD7DCCC72F}"/>
+              </a:ext>
+            </a:extLst>
+          </p:cNvPr>
+          <p:cNvSpPr/>
+          <p:nvPr/>
+        </p:nvSpPr>
+        <p:spPr>
+          <a:xfrm>
+            <a:off x="457200" y="1024128"/>
+            <a:ext cx="8229600" cy="10973"/>
+          </a:xfrm>
+          <a:prstGeom prst="rect">
+            <a:avLst/>
+          </a:prstGeom>
+          <a:solidFill>
+            <a:srgbClr val="D8DCE5"/>
+          </a:solidFill>
+          <a:ln w="12700">
+            <a:solidFill>
+              <a:srgbClr val="D8DCE5"/>
+            </a:solidFill>
+            <a:prstDash val="solid"/>
+          </a:ln>
+        </p:spPr>
+        <p:txBody>
+          <a:bodyPr/>
+          <a:lstStyle/>
+          <a:p>
+            <a:endParaRPr lang="en-US"/>
+          </a:p>
+        </p:txBody>
+      </p:sp>
+      <p:sp>
+        <p:nvSpPr>
+          <p:cNvPr id="7" name="Shape 5">
+            <a:extLst>
+              <a:ext uri="{FF2B5EF4-FFF2-40B4-BE49-F238E27FC236}">
+                <a16:creationId xmlns:a16="http://schemas.microsoft.com/office/drawing/2014/main" id="{B23F636C-F194-B1B2-5248-CCA191C36108}"/>
+              </a:ext>
+            </a:extLst>
+          </p:cNvPr>
+          <p:cNvSpPr/>
+          <p:nvPr/>
+        </p:nvSpPr>
+        <p:spPr>
+          <a:xfrm>
+            <a:off x="457200" y="1115568"/>
+            <a:ext cx="4023360" cy="310896"/>
+          </a:xfrm>
+          <a:prstGeom prst="rect">
+            <a:avLst/>
+          </a:prstGeom>
+          <a:solidFill>
+            <a:srgbClr val="00AEEF"/>
+          </a:solidFill>
+          <a:ln w="12700">
+            <a:solidFill>
+              <a:srgbClr val="00AEEF"/>
+            </a:solidFill>
+            <a:prstDash val="solid"/>
+          </a:ln>
+        </p:spPr>
+        <p:txBody>
+          <a:bodyPr/>
+          <a:lstStyle/>
+          <a:p>
+            <a:endParaRPr lang="en-US"/>
+          </a:p>
+        </p:txBody>
+      </p:sp>
+      <p:sp>
+        <p:nvSpPr>
+          <p:cNvPr id="8" name="Text 6">
+            <a:extLst>
+              <a:ext uri="{FF2B5EF4-FFF2-40B4-BE49-F238E27FC236}">
+                <a16:creationId xmlns:a16="http://schemas.microsoft.com/office/drawing/2014/main" id="{56B45CEA-7587-5151-C26A-D31600DFCEC6}"/>
+              </a:ext>
+            </a:extLst>
+          </p:cNvPr>
+          <p:cNvSpPr/>
+          <p:nvPr/>
+        </p:nvSpPr>
+        <p:spPr>
+          <a:xfrm>
+            <a:off x="566928" y="1115568"/>
+            <a:ext cx="3749040" cy="182880"/>
+          </a:xfrm>
+          <a:prstGeom prst="rect">
+            <a:avLst/>
+          </a:prstGeom>
+          <a:noFill/>
+          <a:ln/>
+        </p:spPr>
+        <p:txBody>
+          <a:bodyPr wrap="square" lIns="0" tIns="0" rIns="0" bIns="0" rtlCol="0" anchor="ctr"/>
+          <a:lstStyle/>
+          <a:p>
+            <a:pPr marL="0" indent="0">
+              <a:buNone/>
+            </a:pPr>
+            <a:r>
+              <a:rPr lang="en-US" sz="1200" b="1" dirty="0">
+                <a:solidFill>
+                  <a:srgbClr val="FFFFFF"/>
+                </a:solidFill>
+              </a:rPr>
+              <a:t>Customer Storefront</a:t>
+            </a:r>
+            <a:endParaRPr lang="en-US" sz="1200" dirty="0"/>
+          </a:p>
+        </p:txBody>
+      </p:sp>
+      <p:sp>
+        <p:nvSpPr>
+          <p:cNvPr id="9" name="Text 7">
+            <a:extLst>
+              <a:ext uri="{FF2B5EF4-FFF2-40B4-BE49-F238E27FC236}">
+                <a16:creationId xmlns:a16="http://schemas.microsoft.com/office/drawing/2014/main" id="{EA765D42-820A-09FA-DF64-848172D63AC2}"/>
+              </a:ext>
+            </a:extLst>
+          </p:cNvPr>
+          <p:cNvSpPr/>
+          <p:nvPr/>
+        </p:nvSpPr>
+        <p:spPr>
+          <a:xfrm>
+            <a:off x="566928" y="1280160"/>
+            <a:ext cx="3749040" cy="128016"/>
+          </a:xfrm>
+          <a:prstGeom prst="rect">
+            <a:avLst/>
+          </a:prstGeom>
+          <a:noFill/>
+          <a:ln/>
+        </p:spPr>
+        <p:txBody>
+          <a:bodyPr wrap="square" lIns="0" tIns="0" rIns="0" bIns="0" rtlCol="0" anchor="ctr"/>
+          <a:lstStyle/>
+          <a:p>
+            <a:pPr marL="0" indent="0">
+              <a:buNone/>
+            </a:pPr>
+            <a:r>
+              <a:rPr lang="en-US" sz="750" dirty="0">
+                <a:solidFill>
+                  <a:srgbClr val="CADCFC"/>
+                </a:solidFill>
+              </a:rPr>
+              <a:t>Product browsing · cart · checkout flow</a:t>
+            </a:r>
+            <a:endParaRPr lang="en-US" sz="750" dirty="0"/>
+          </a:p>
+        </p:txBody>
+      </p:sp>
+      <p:sp>
+        <p:nvSpPr>
+          <p:cNvPr id="10" name="Shape 8">
+            <a:extLst>
+              <a:ext uri="{FF2B5EF4-FFF2-40B4-BE49-F238E27FC236}">
+                <a16:creationId xmlns:a16="http://schemas.microsoft.com/office/drawing/2014/main" id="{8C917F27-14DA-8C83-B1A5-E78AA36A60B7}"/>
+              </a:ext>
+            </a:extLst>
+          </p:cNvPr>
+          <p:cNvSpPr/>
+          <p:nvPr/>
+        </p:nvSpPr>
+        <p:spPr>
+          <a:xfrm>
+            <a:off x="457200" y="1463040"/>
+            <a:ext cx="4023360" cy="3291840"/>
+          </a:xfrm>
+          <a:prstGeom prst="rect">
+            <a:avLst/>
+          </a:prstGeom>
+          <a:solidFill>
+            <a:srgbClr val="F0F2F6"/>
+          </a:solidFill>
+          <a:ln w="12700">
+            <a:solidFill>
+              <a:srgbClr val="D8DCE5"/>
+            </a:solidFill>
+            <a:prstDash val="solid"/>
+          </a:ln>
+        </p:spPr>
+        <p:txBody>
+          <a:bodyPr/>
+          <a:lstStyle/>
+          <a:p>
+            <a:endParaRPr lang="en-US"/>
+          </a:p>
+        </p:txBody>
+      </p:sp>
+      <p:sp>
+        <p:nvSpPr>
+          <p:cNvPr id="11" name="Shape 9">
+            <a:extLst>
+              <a:ext uri="{FF2B5EF4-FFF2-40B4-BE49-F238E27FC236}">
+                <a16:creationId xmlns:a16="http://schemas.microsoft.com/office/drawing/2014/main" id="{3FEBC012-4308-97DD-5009-8BF9C19E27C6}"/>
+              </a:ext>
+            </a:extLst>
+          </p:cNvPr>
+          <p:cNvSpPr/>
+          <p:nvPr/>
+        </p:nvSpPr>
+        <p:spPr>
+          <a:xfrm>
+            <a:off x="594360" y="1600200"/>
+            <a:ext cx="3749040" cy="3017520"/>
+          </a:xfrm>
+          <a:prstGeom prst="rect">
+            <a:avLst/>
+          </a:prstGeom>
+          <a:solidFill>
+            <a:srgbClr val="E8EAF0"/>
+          </a:solidFill>
+          <a:ln w="6350">
+            <a:solidFill>
+              <a:srgbClr val="C8CDD8"/>
+            </a:solidFill>
+            <a:prstDash val="dash"/>
+          </a:ln>
+        </p:spPr>
+        <p:txBody>
+          <a:bodyPr/>
+          <a:lstStyle/>
+          <a:p>
+            <a:endParaRPr lang="en-US"/>
+          </a:p>
+        </p:txBody>
+      </p:sp>
+      <p:sp>
+        <p:nvSpPr>
+          <p:cNvPr id="12" name="Text 10">
+            <a:extLst>
+              <a:ext uri="{FF2B5EF4-FFF2-40B4-BE49-F238E27FC236}">
+                <a16:creationId xmlns:a16="http://schemas.microsoft.com/office/drawing/2014/main" id="{2E5D196A-7700-476E-E796-63DE69745D2F}"/>
+              </a:ext>
+            </a:extLst>
+          </p:cNvPr>
+          <p:cNvSpPr/>
+          <p:nvPr/>
+        </p:nvSpPr>
+        <p:spPr>
+          <a:xfrm>
+            <a:off x="640080" y="2743200"/>
+            <a:ext cx="3657600" cy="457200"/>
+          </a:xfrm>
+          <a:prstGeom prst="rect">
+            <a:avLst/>
+          </a:prstGeom>
+          <a:noFill/>
+          <a:ln/>
+        </p:spPr>
+        <p:txBody>
+          <a:bodyPr wrap="square" lIns="0" tIns="0" rIns="0" bIns="0" rtlCol="0" anchor="ctr"/>
+          <a:lstStyle/>
+          <a:p>
+            <a:pPr marL="0" indent="0" algn="ctr">
+              <a:buNone/>
+            </a:pPr>
+            <a:r>
+              <a:rPr lang="en-US" sz="900" i="1" dirty="0">
+                <a:solidFill>
+                  <a:srgbClr val="94A3B8"/>
+                </a:solidFill>
+              </a:rPr>
+              <a:t>[ Replace with storefront screenshot ]</a:t>
+            </a:r>
+            <a:endParaRPr lang="en-US" sz="900" dirty="0"/>
+          </a:p>
+        </p:txBody>
+      </p:sp>
+      <p:sp>
+        <p:nvSpPr>
+          <p:cNvPr id="13" name="Shape 11">
+            <a:extLst>
+              <a:ext uri="{FF2B5EF4-FFF2-40B4-BE49-F238E27FC236}">
+                <a16:creationId xmlns:a16="http://schemas.microsoft.com/office/drawing/2014/main" id="{340814F4-496C-EAA8-4B0F-7BDA8947CF45}"/>
+              </a:ext>
+            </a:extLst>
+          </p:cNvPr>
+          <p:cNvSpPr/>
+          <p:nvPr/>
+        </p:nvSpPr>
+        <p:spPr>
+          <a:xfrm>
+            <a:off x="3840480" y="1508760"/>
+            <a:ext cx="594360" cy="201168"/>
+          </a:xfrm>
+          <a:prstGeom prst="rect">
+            <a:avLst/>
+          </a:prstGeom>
+          <a:solidFill>
+            <a:srgbClr val="00AEEF"/>
+          </a:solidFill>
+          <a:ln w="12700">
+            <a:solidFill>
+              <a:srgbClr val="00AEEF"/>
+            </a:solidFill>
+            <a:prstDash val="solid"/>
+          </a:ln>
+        </p:spPr>
+        <p:txBody>
+          <a:bodyPr/>
+          <a:lstStyle/>
+          <a:p>
+            <a:endParaRPr lang="en-US"/>
+          </a:p>
+        </p:txBody>
+      </p:sp>
+      <p:sp>
+        <p:nvSpPr>
+          <p:cNvPr id="14" name="Text 12">
+            <a:extLst>
+              <a:ext uri="{FF2B5EF4-FFF2-40B4-BE49-F238E27FC236}">
+                <a16:creationId xmlns:a16="http://schemas.microsoft.com/office/drawing/2014/main" id="{865BE1E0-8588-870B-9933-4749E70EB23D}"/>
+              </a:ext>
+            </a:extLst>
+          </p:cNvPr>
+          <p:cNvSpPr/>
+          <p:nvPr/>
+        </p:nvSpPr>
+        <p:spPr>
+          <a:xfrm>
+            <a:off x="3840480" y="1508760"/>
+            <a:ext cx="594360" cy="201168"/>
+          </a:xfrm>
+          <a:prstGeom prst="rect">
+            <a:avLst/>
+          </a:prstGeom>
+          <a:noFill/>
+          <a:ln/>
+        </p:spPr>
+        <p:txBody>
+          <a:bodyPr wrap="square" lIns="0" tIns="0" rIns="0" bIns="0" rtlCol="0" anchor="ctr"/>
+          <a:lstStyle/>
+          <a:p>
+            <a:pPr marL="0" indent="0" algn="ctr">
+              <a:buNone/>
+            </a:pPr>
+            <a:r>
+              <a:rPr lang="en-US" sz="750" b="1" dirty="0">
+                <a:solidFill>
+                  <a:srgbClr val="FFFFFF"/>
+                </a:solidFill>
+              </a:rPr>
+              <a:t>UI</a:t>
+            </a:r>
+            <a:endParaRPr lang="en-US" sz="750" dirty="0"/>
+          </a:p>
+        </p:txBody>
+      </p:sp>
+      <p:sp>
+        <p:nvSpPr>
+          <p:cNvPr id="15" name="Shape 13">
+            <a:extLst>
+              <a:ext uri="{FF2B5EF4-FFF2-40B4-BE49-F238E27FC236}">
+                <a16:creationId xmlns:a16="http://schemas.microsoft.com/office/drawing/2014/main" id="{9084282C-6F12-24E5-FF4E-5192AA414B44}"/>
+              </a:ext>
+            </a:extLst>
+          </p:cNvPr>
+          <p:cNvSpPr/>
+          <p:nvPr/>
+        </p:nvSpPr>
+        <p:spPr>
+          <a:xfrm>
+            <a:off x="4617720" y="1115568"/>
+            <a:ext cx="4023360" cy="310896"/>
+          </a:xfrm>
+          <a:prstGeom prst="rect">
+            <a:avLst/>
+          </a:prstGeom>
+          <a:solidFill>
+            <a:srgbClr val="1B2A4A"/>
+          </a:solidFill>
+          <a:ln w="12700">
+            <a:solidFill>
+              <a:srgbClr val="1B2A4A"/>
+            </a:solidFill>
+            <a:prstDash val="solid"/>
+          </a:ln>
+        </p:spPr>
+        <p:txBody>
+          <a:bodyPr/>
+          <a:lstStyle/>
+          <a:p>
+            <a:endParaRPr lang="en-US"/>
+          </a:p>
+        </p:txBody>
+      </p:sp>
+      <p:sp>
+        <p:nvSpPr>
+          <p:cNvPr id="16" name="Text 14">
+            <a:extLst>
+              <a:ext uri="{FF2B5EF4-FFF2-40B4-BE49-F238E27FC236}">
+                <a16:creationId xmlns:a16="http://schemas.microsoft.com/office/drawing/2014/main" id="{30A772D7-CD43-7F75-F9BC-DE7CEF34071E}"/>
+              </a:ext>
+            </a:extLst>
+          </p:cNvPr>
+          <p:cNvSpPr/>
+          <p:nvPr/>
+        </p:nvSpPr>
+        <p:spPr>
+          <a:xfrm>
+            <a:off x="4727448" y="1115568"/>
+            <a:ext cx="3749040" cy="182880"/>
+          </a:xfrm>
+          <a:prstGeom prst="rect">
+            <a:avLst/>
+          </a:prstGeom>
+          <a:noFill/>
+          <a:ln/>
+        </p:spPr>
+        <p:txBody>
+          <a:bodyPr wrap="square" lIns="0" tIns="0" rIns="0" bIns="0" rtlCol="0" anchor="ctr"/>
+          <a:lstStyle/>
+          <a:p>
+            <a:pPr marL="0" indent="0">
+              <a:buNone/>
+            </a:pPr>
+            <a:r>
+              <a:rPr lang="en-US" sz="1200" b="1" dirty="0">
+                <a:solidFill>
+                  <a:srgbClr val="FFFFFF"/>
+                </a:solidFill>
+              </a:rPr>
+              <a:t>Admin Dashboard</a:t>
+            </a:r>
+            <a:endParaRPr lang="en-US" sz="1200" dirty="0"/>
+          </a:p>
+        </p:txBody>
+      </p:sp>
+      <p:sp>
+        <p:nvSpPr>
+          <p:cNvPr id="17" name="Text 15">
+            <a:extLst>
+              <a:ext uri="{FF2B5EF4-FFF2-40B4-BE49-F238E27FC236}">
+                <a16:creationId xmlns:a16="http://schemas.microsoft.com/office/drawing/2014/main" id="{A48C89B8-9DEF-7118-AC62-22B947264B8C}"/>
+              </a:ext>
+            </a:extLst>
+          </p:cNvPr>
+          <p:cNvSpPr/>
+          <p:nvPr/>
+        </p:nvSpPr>
+        <p:spPr>
+          <a:xfrm>
+            <a:off x="4727448" y="1280160"/>
+            <a:ext cx="3749040" cy="128016"/>
+          </a:xfrm>
+          <a:prstGeom prst="rect">
+            <a:avLst/>
+          </a:prstGeom>
+          <a:noFill/>
+          <a:ln/>
+        </p:spPr>
+        <p:txBody>
+          <a:bodyPr wrap="square" lIns="0" tIns="0" rIns="0" bIns="0" rtlCol="0" anchor="ctr"/>
+          <a:lstStyle/>
+          <a:p>
+            <a:pPr marL="0" indent="0">
+              <a:buNone/>
+            </a:pPr>
+            <a:r>
+              <a:rPr lang="en-US" sz="750" dirty="0">
+                <a:solidFill>
+                  <a:srgbClr val="CADCFC"/>
+                </a:solidFill>
+              </a:rPr>
+              <a:t>Navigation · role-restricted views · admin layout</a:t>
+            </a:r>
+            <a:endParaRPr lang="en-US" sz="750" dirty="0"/>
+          </a:p>
+        </p:txBody>
+      </p:sp>
+      <p:sp>
+        <p:nvSpPr>
+          <p:cNvPr id="18" name="Shape 16">
+            <a:extLst>
+              <a:ext uri="{FF2B5EF4-FFF2-40B4-BE49-F238E27FC236}">
+                <a16:creationId xmlns:a16="http://schemas.microsoft.com/office/drawing/2014/main" id="{FBB93498-50D6-DAEE-4104-E70F6EC952C6}"/>
+              </a:ext>
+            </a:extLst>
+          </p:cNvPr>
+          <p:cNvSpPr/>
+          <p:nvPr/>
+        </p:nvSpPr>
+        <p:spPr>
+          <a:xfrm>
+            <a:off x="4617720" y="1463040"/>
+            <a:ext cx="4023360" cy="3291840"/>
+          </a:xfrm>
+          <a:prstGeom prst="rect">
+            <a:avLst/>
+          </a:prstGeom>
+          <a:solidFill>
+            <a:srgbClr val="F0F2F6"/>
+          </a:solidFill>
+          <a:ln w="12700">
+            <a:solidFill>
+              <a:srgbClr val="D8DCE5"/>
+            </a:solidFill>
+            <a:prstDash val="solid"/>
+          </a:ln>
+        </p:spPr>
+        <p:txBody>
+          <a:bodyPr/>
+          <a:lstStyle/>
+          <a:p>
+            <a:endParaRPr lang="en-US"/>
+          </a:p>
+        </p:txBody>
+      </p:sp>
+      <p:sp>
+        <p:nvSpPr>
+          <p:cNvPr id="19" name="Shape 17">
+            <a:extLst>
+              <a:ext uri="{FF2B5EF4-FFF2-40B4-BE49-F238E27FC236}">
+                <a16:creationId xmlns:a16="http://schemas.microsoft.com/office/drawing/2014/main" id="{C4117A1C-4189-6FAF-D682-FD687B9E9117}"/>
+              </a:ext>
+            </a:extLst>
+          </p:cNvPr>
+          <p:cNvSpPr/>
+          <p:nvPr/>
+        </p:nvSpPr>
+        <p:spPr>
+          <a:xfrm>
+            <a:off x="4754880" y="1600200"/>
+            <a:ext cx="3749040" cy="3017520"/>
+          </a:xfrm>
+          <a:prstGeom prst="rect">
+            <a:avLst/>
+          </a:prstGeom>
+          <a:solidFill>
+            <a:srgbClr val="E8EAF0"/>
+          </a:solidFill>
+          <a:ln w="6350">
+            <a:solidFill>
+              <a:srgbClr val="C8CDD8"/>
+            </a:solidFill>
+            <a:prstDash val="dash"/>
+          </a:ln>
+        </p:spPr>
+        <p:txBody>
+          <a:bodyPr/>
+          <a:lstStyle/>
+          <a:p>
+            <a:endParaRPr lang="en-US"/>
+          </a:p>
+        </p:txBody>
+      </p:sp>
+      <p:sp>
+        <p:nvSpPr>
+          <p:cNvPr id="20" name="Text 18">
+            <a:extLst>
+              <a:ext uri="{FF2B5EF4-FFF2-40B4-BE49-F238E27FC236}">
+                <a16:creationId xmlns:a16="http://schemas.microsoft.com/office/drawing/2014/main" id="{63063F1F-B93E-FB4D-A89B-E5C82E0F0364}"/>
+              </a:ext>
+            </a:extLst>
+          </p:cNvPr>
+          <p:cNvSpPr/>
+          <p:nvPr/>
+        </p:nvSpPr>
+        <p:spPr>
+          <a:xfrm>
+            <a:off x="4800600" y="2743200"/>
+            <a:ext cx="3657600" cy="457200"/>
+          </a:xfrm>
+          <a:prstGeom prst="rect">
+            <a:avLst/>
+          </a:prstGeom>
+          <a:noFill/>
+          <a:ln/>
+        </p:spPr>
+        <p:txBody>
+          <a:bodyPr wrap="square" lIns="0" tIns="0" rIns="0" bIns="0" rtlCol="0" anchor="ctr"/>
+          <a:lstStyle/>
+          <a:p>
+            <a:pPr marL="0" indent="0" algn="ctr">
+              <a:buNone/>
+            </a:pPr>
+            <a:r>
+              <a:rPr lang="en-US" sz="900" i="1" dirty="0">
+                <a:solidFill>
+                  <a:srgbClr val="94A3B8"/>
+                </a:solidFill>
+              </a:rPr>
+              <a:t>[ Replace with admin dashboard screenshot ]</a:t>
+            </a:r>
+            <a:endParaRPr lang="en-US" sz="900" dirty="0"/>
+          </a:p>
+        </p:txBody>
+      </p:sp>
+      <p:sp>
+        <p:nvSpPr>
+          <p:cNvPr id="21" name="Shape 19">
+            <a:extLst>
+              <a:ext uri="{FF2B5EF4-FFF2-40B4-BE49-F238E27FC236}">
+                <a16:creationId xmlns:a16="http://schemas.microsoft.com/office/drawing/2014/main" id="{218ECAA6-03F3-57E4-E01C-50B74917703E}"/>
+              </a:ext>
+            </a:extLst>
+          </p:cNvPr>
+          <p:cNvSpPr/>
+          <p:nvPr/>
+        </p:nvSpPr>
+        <p:spPr>
+          <a:xfrm>
+            <a:off x="8001000" y="1508760"/>
+            <a:ext cx="594360" cy="201168"/>
+          </a:xfrm>
+          <a:prstGeom prst="rect">
+            <a:avLst/>
+          </a:prstGeom>
+          <a:solidFill>
+            <a:srgbClr val="1B2A4A"/>
+          </a:solidFill>
+          <a:ln w="12700">
+            <a:solidFill>
+              <a:srgbClr val="1B2A4A"/>
+            </a:solidFill>
+            <a:prstDash val="solid"/>
+          </a:ln>
+        </p:spPr>
+        <p:txBody>
+          <a:bodyPr/>
+          <a:lstStyle/>
+          <a:p>
+            <a:endParaRPr lang="en-US"/>
+          </a:p>
+        </p:txBody>
+      </p:sp>
+      <p:sp>
+        <p:nvSpPr>
+          <p:cNvPr id="22" name="Text 20">
+            <a:extLst>
+              <a:ext uri="{FF2B5EF4-FFF2-40B4-BE49-F238E27FC236}">
+                <a16:creationId xmlns:a16="http://schemas.microsoft.com/office/drawing/2014/main" id="{BF22A46F-730B-7A46-5FC8-065F292800DB}"/>
+              </a:ext>
+            </a:extLst>
+          </p:cNvPr>
+          <p:cNvSpPr/>
+          <p:nvPr/>
+        </p:nvSpPr>
+        <p:spPr>
+          <a:xfrm>
+            <a:off x="8001000" y="1508760"/>
+            <a:ext cx="594360" cy="201168"/>
+          </a:xfrm>
+          <a:prstGeom prst="rect">
+            <a:avLst/>
+          </a:prstGeom>
+          <a:noFill/>
+          <a:ln/>
+        </p:spPr>
+        <p:txBody>
+          <a:bodyPr wrap="square" lIns="0" tIns="0" rIns="0" bIns="0" rtlCol="0" anchor="ctr"/>
+          <a:lstStyle/>
+          <a:p>
+            <a:pPr marL="0" indent="0" algn="ctr">
+              <a:buNone/>
+            </a:pPr>
+            <a:r>
+              <a:rPr lang="en-US" sz="750" b="1" dirty="0">
+                <a:solidFill>
+                  <a:srgbClr val="FFFFFF"/>
+                </a:solidFill>
+              </a:rPr>
+              <a:t>UI</a:t>
+            </a:r>
+            <a:endParaRPr lang="en-US" sz="750" dirty="0"/>
+          </a:p>
+        </p:txBody>
+      </p:sp>
+      <p:sp>
+        <p:nvSpPr>
+          <p:cNvPr id="23" name="Shape 21">
+            <a:extLst>
+              <a:ext uri="{FF2B5EF4-FFF2-40B4-BE49-F238E27FC236}">
+                <a16:creationId xmlns:a16="http://schemas.microsoft.com/office/drawing/2014/main" id="{FCCCEEE9-7BE8-F449-BE69-5C3CBEA17F51}"/>
+              </a:ext>
+            </a:extLst>
+          </p:cNvPr>
+          <p:cNvSpPr/>
+          <p:nvPr/>
+        </p:nvSpPr>
+        <p:spPr>
+          <a:xfrm>
+            <a:off x="457200" y="4828032"/>
+            <a:ext cx="8229600" cy="201168"/>
+          </a:xfrm>
+          <a:prstGeom prst="rect">
+            <a:avLst/>
+          </a:prstGeom>
+          <a:solidFill>
+            <a:srgbClr val="F8FAFC"/>
+          </a:solidFill>
+          <a:ln w="6350">
+            <a:solidFill>
+              <a:srgbClr val="D8DCE5"/>
+            </a:solidFill>
+            <a:prstDash val="solid"/>
+          </a:ln>
+        </p:spPr>
+        <p:txBody>
+          <a:bodyPr/>
+          <a:lstStyle/>
+          <a:p>
+            <a:endParaRPr lang="en-US"/>
+          </a:p>
+        </p:txBody>
+      </p:sp>
+      <p:sp>
+        <p:nvSpPr>
+          <p:cNvPr id="24" name="Text 22">
+            <a:extLst>
+              <a:ext uri="{FF2B5EF4-FFF2-40B4-BE49-F238E27FC236}">
+                <a16:creationId xmlns:a16="http://schemas.microsoft.com/office/drawing/2014/main" id="{9CEA55B8-302A-302A-86F4-5D9F250A11EB}"/>
+              </a:ext>
+            </a:extLst>
+          </p:cNvPr>
+          <p:cNvSpPr/>
+          <p:nvPr/>
+        </p:nvSpPr>
+        <p:spPr>
+          <a:xfrm>
+            <a:off x="566928" y="4828032"/>
+            <a:ext cx="8010144" cy="201168"/>
+          </a:xfrm>
+          <a:prstGeom prst="rect">
+            <a:avLst/>
+          </a:prstGeom>
+          <a:noFill/>
+          <a:ln/>
+        </p:spPr>
+        <p:txBody>
+          <a:bodyPr wrap="square" lIns="0" tIns="0" rIns="0" bIns="0" rtlCol="0" anchor="ctr"/>
+          <a:lstStyle/>
+          <a:p>
+            <a:pPr marL="0" indent="0" algn="ctr">
+              <a:buNone/>
+            </a:pPr>
+            <a:r>
+              <a:rPr lang="en-US" sz="750" dirty="0">
+                <a:solidFill>
+                  <a:srgbClr val="475569"/>
+                </a:solidFill>
+              </a:rPr>
+              <a:t>React SPA  ·  SimpleJWT authentication  ·  Role-enforced routing  ·  Component-based architecture</a:t>
+            </a:r>
+            <a:endParaRPr lang="en-US" sz="750" dirty="0"/>
+          </a:p>
+        </p:txBody>
+      </p:sp>
+    </p:spTree>
+    <p:extLst>
+      <p:ext uri="{BB962C8B-B14F-4D97-AF65-F5344CB8AC3E}">
+        <p14:creationId xmlns:p14="http://schemas.microsoft.com/office/powerpoint/2010/main" val="3381649134"/>
+      </p:ext>
+    </p:extLst>
+  </p:cSld>
+  <p:clrMapOvr>
+    <a:masterClrMapping/>
+  </p:clrMapOvr>
+</p:sld>
+</file>
+
+<file path=ppt/slides/slide11.xml><?xml version="1.0" encoding="utf-8"?>
+<p:sld xmlns:a="http://schemas.openxmlformats.org/drawingml/2006/main" xmlns:r="http://schemas.openxmlformats.org/officeDocument/2006/relationships" xmlns:p="http://schemas.openxmlformats.org/presentationml/2006/main">
+  <p:cSld>
+    <p:bg>
+      <p:bgPr>
+        <a:solidFill>
+          <a:srgbClr val="F4F6FB"/>
+        </a:solidFill>
+        <a:effectLst/>
+      </p:bgPr>
+    </p:bg>
+    <p:spTree>
+      <p:nvGrpSpPr>
+        <p:cNvPr id="1" name="">
+          <a:extLst>
+            <a:ext uri="{FF2B5EF4-FFF2-40B4-BE49-F238E27FC236}">
+              <a16:creationId xmlns:a16="http://schemas.microsoft.com/office/drawing/2014/main" id="{D457BC8D-BFBA-CCF8-24BD-47EF05531F3E}"/>
+            </a:ext>
+          </a:extLst>
+        </p:cNvPr>
+        <p:cNvGrpSpPr/>
+        <p:nvPr/>
+      </p:nvGrpSpPr>
+      <p:grpSpPr>
+        <a:xfrm>
+          <a:off x="0" y="0"/>
+          <a:ext cx="0" cy="0"/>
+          <a:chOff x="0" y="0"/>
+          <a:chExt cx="0" cy="0"/>
+        </a:xfrm>
+      </p:grpSpPr>
+      <p:sp>
+        <p:nvSpPr>
+          <p:cNvPr id="2" name="Text 0">
+            <a:extLst>
+              <a:ext uri="{FF2B5EF4-FFF2-40B4-BE49-F238E27FC236}">
+                <a16:creationId xmlns:a16="http://schemas.microsoft.com/office/drawing/2014/main" id="{146EC5CC-763D-01E7-C0C4-064543FD66B8}"/>
+              </a:ext>
+            </a:extLst>
+          </p:cNvPr>
+          <p:cNvSpPr/>
+          <p:nvPr/>
+        </p:nvSpPr>
+        <p:spPr>
+          <a:xfrm>
+            <a:off x="457200" y="256032"/>
+            <a:ext cx="5486400" cy="182880"/>
+          </a:xfrm>
+          <a:prstGeom prst="rect">
+            <a:avLst/>
+          </a:prstGeom>
+          <a:noFill/>
+          <a:ln/>
+        </p:spPr>
+        <p:txBody>
+          <a:bodyPr wrap="square" lIns="0" tIns="0" rIns="0" bIns="0" rtlCol="0" anchor="ctr"/>
+          <a:lstStyle/>
+          <a:p>
+            <a:pPr marL="0" indent="0" algn="l">
+              <a:buNone/>
+            </a:pPr>
+            <a:r>
+              <a:rPr lang="en-US" sz="850" b="1" kern="0" spc="300" dirty="0">
+                <a:solidFill>
+                  <a:srgbClr val="1D9E75"/>
+                </a:solidFill>
+              </a:rPr>
+              <a:t>FRONTEND &amp; USER EXPERIENCE</a:t>
+            </a:r>
+            <a:endParaRPr lang="en-US" sz="850" dirty="0"/>
+          </a:p>
+        </p:txBody>
+      </p:sp>
+      <p:sp>
+        <p:nvSpPr>
+          <p:cNvPr id="3" name="Text 1">
+            <a:extLst>
+              <a:ext uri="{FF2B5EF4-FFF2-40B4-BE49-F238E27FC236}">
+                <a16:creationId xmlns:a16="http://schemas.microsoft.com/office/drawing/2014/main" id="{9C905C9F-C73E-C869-E79F-756CBD393CAA}"/>
+              </a:ext>
+            </a:extLst>
+          </p:cNvPr>
+          <p:cNvSpPr/>
+          <p:nvPr/>
+        </p:nvSpPr>
+        <p:spPr>
+          <a:xfrm>
+            <a:off x="457200" y="457200"/>
+            <a:ext cx="6858000" cy="502920"/>
+          </a:xfrm>
+          <a:prstGeom prst="rect">
+            <a:avLst/>
+          </a:prstGeom>
+          <a:noFill/>
+          <a:ln/>
+        </p:spPr>
+        <p:txBody>
+          <a:bodyPr wrap="square" lIns="0" tIns="0" rIns="0" bIns="0" rtlCol="0" anchor="ctr"/>
+          <a:lstStyle/>
+          <a:p>
+            <a:pPr marL="0" indent="0" algn="l">
+              <a:buNone/>
+            </a:pPr>
+            <a:r>
+              <a:rPr lang="en-US" sz="3400" b="1" dirty="0">
+                <a:solidFill>
+                  <a:srgbClr val="0D1B3E"/>
+                </a:solidFill>
+                <a:latin typeface="Calibri" pitchFamily="34" charset="0"/>
+                <a:ea typeface="Calibri" pitchFamily="34" charset="-122"/>
+                <a:cs typeface="Calibri" pitchFamily="34" charset="-120"/>
+              </a:rPr>
+              <a:t>In Action</a:t>
+            </a:r>
+            <a:endParaRPr lang="en-US" sz="3400" dirty="0"/>
+          </a:p>
+        </p:txBody>
+      </p:sp>
+      <p:sp>
+        <p:nvSpPr>
+          <p:cNvPr id="4" name="Text 2">
+            <a:extLst>
+              <a:ext uri="{FF2B5EF4-FFF2-40B4-BE49-F238E27FC236}">
+                <a16:creationId xmlns:a16="http://schemas.microsoft.com/office/drawing/2014/main" id="{BC428D9C-7277-C59B-9075-E55F8DC87A9F}"/>
+              </a:ext>
+            </a:extLst>
+          </p:cNvPr>
+          <p:cNvSpPr/>
+          <p:nvPr/>
+        </p:nvSpPr>
+        <p:spPr>
+          <a:xfrm>
+            <a:off x="7132320" y="493776"/>
+            <a:ext cx="1554480" cy="182880"/>
+          </a:xfrm>
+          <a:prstGeom prst="rect">
+            <a:avLst/>
+          </a:prstGeom>
+          <a:noFill/>
+          <a:ln/>
+        </p:spPr>
+        <p:txBody>
+          <a:bodyPr wrap="square" lIns="0" tIns="0" rIns="0" bIns="0" rtlCol="0" anchor="ctr"/>
+          <a:lstStyle/>
+          <a:p>
+            <a:pPr marL="0" indent="0" algn="r">
+              <a:buNone/>
+            </a:pPr>
+            <a:r>
+              <a:rPr lang="en-US" sz="800" dirty="0">
+                <a:solidFill>
+                  <a:srgbClr val="94A3B8"/>
+                </a:solidFill>
+              </a:rPr>
+              <a:t>Rachel Mizer</a:t>
+            </a:r>
+            <a:endParaRPr lang="en-US" sz="800" dirty="0"/>
+          </a:p>
+        </p:txBody>
+      </p:sp>
+      <p:sp>
+        <p:nvSpPr>
+          <p:cNvPr id="5" name="Text 3">
+            <a:extLst>
+              <a:ext uri="{FF2B5EF4-FFF2-40B4-BE49-F238E27FC236}">
+                <a16:creationId xmlns:a16="http://schemas.microsoft.com/office/drawing/2014/main" id="{E5959F35-87FB-6DB4-717A-438CD9105E79}"/>
+              </a:ext>
+            </a:extLst>
+          </p:cNvPr>
+          <p:cNvSpPr/>
+          <p:nvPr/>
+        </p:nvSpPr>
+        <p:spPr>
+          <a:xfrm>
+            <a:off x="7132320" y="658368"/>
+            <a:ext cx="1554480" cy="146304"/>
+          </a:xfrm>
+          <a:prstGeom prst="rect">
+            <a:avLst/>
+          </a:prstGeom>
+          <a:noFill/>
+          <a:ln/>
+        </p:spPr>
+        <p:txBody>
+          <a:bodyPr wrap="square" lIns="0" tIns="0" rIns="0" bIns="0" rtlCol="0" anchor="ctr"/>
+          <a:lstStyle/>
+          <a:p>
+            <a:pPr marL="0" indent="0" algn="r">
+              <a:buNone/>
+            </a:pPr>
+            <a:r>
+              <a:rPr lang="en-US" sz="700" b="1" dirty="0">
+                <a:solidFill>
+                  <a:srgbClr val="1D9E75"/>
+                </a:solidFill>
+              </a:rPr>
+              <a:t>Frontend &amp; UI/UX Lead</a:t>
+            </a:r>
+            <a:endParaRPr lang="en-US" sz="700" dirty="0"/>
+          </a:p>
+        </p:txBody>
+      </p:sp>
+      <p:sp>
+        <p:nvSpPr>
+          <p:cNvPr id="6" name="Shape 4">
+            <a:extLst>
+              <a:ext uri="{FF2B5EF4-FFF2-40B4-BE49-F238E27FC236}">
+                <a16:creationId xmlns:a16="http://schemas.microsoft.com/office/drawing/2014/main" id="{CA98978A-6AEE-11F9-36B0-36CD29514E22}"/>
+              </a:ext>
+            </a:extLst>
+          </p:cNvPr>
+          <p:cNvSpPr/>
+          <p:nvPr/>
+        </p:nvSpPr>
+        <p:spPr>
+          <a:xfrm>
+            <a:off x="457200" y="1024128"/>
+            <a:ext cx="8229600" cy="10973"/>
+          </a:xfrm>
+          <a:prstGeom prst="rect">
+            <a:avLst/>
+          </a:prstGeom>
+          <a:solidFill>
+            <a:srgbClr val="D8DCE5"/>
+          </a:solidFill>
+          <a:ln w="12700">
+            <a:solidFill>
+              <a:srgbClr val="D8DCE5"/>
+            </a:solidFill>
+            <a:prstDash val="solid"/>
+          </a:ln>
+        </p:spPr>
+        <p:txBody>
+          <a:bodyPr/>
+          <a:lstStyle/>
+          <a:p>
+            <a:endParaRPr lang="en-US"/>
+          </a:p>
+        </p:txBody>
+      </p:sp>
+      <p:sp>
+        <p:nvSpPr>
+          <p:cNvPr id="7" name="Shape 5">
+            <a:extLst>
+              <a:ext uri="{FF2B5EF4-FFF2-40B4-BE49-F238E27FC236}">
+                <a16:creationId xmlns:a16="http://schemas.microsoft.com/office/drawing/2014/main" id="{E6F04FCE-5078-FE1D-61C2-CE148AB9F06B}"/>
+              </a:ext>
+            </a:extLst>
+          </p:cNvPr>
+          <p:cNvSpPr/>
+          <p:nvPr/>
+        </p:nvSpPr>
+        <p:spPr>
+          <a:xfrm>
+            <a:off x="457200" y="1115568"/>
+            <a:ext cx="4023360" cy="310896"/>
+          </a:xfrm>
+          <a:prstGeom prst="rect">
+            <a:avLst/>
+          </a:prstGeom>
+          <a:solidFill>
+            <a:srgbClr val="00AEEF"/>
+          </a:solidFill>
+          <a:ln w="12700">
+            <a:solidFill>
+              <a:srgbClr val="00AEEF"/>
+            </a:solidFill>
+            <a:prstDash val="solid"/>
+          </a:ln>
+        </p:spPr>
+        <p:txBody>
+          <a:bodyPr/>
+          <a:lstStyle/>
+          <a:p>
+            <a:endParaRPr lang="en-US"/>
+          </a:p>
+        </p:txBody>
+      </p:sp>
+      <p:sp>
+        <p:nvSpPr>
+          <p:cNvPr id="8" name="Text 6">
+            <a:extLst>
+              <a:ext uri="{FF2B5EF4-FFF2-40B4-BE49-F238E27FC236}">
+                <a16:creationId xmlns:a16="http://schemas.microsoft.com/office/drawing/2014/main" id="{1EAFD97D-9CE5-261C-E95A-7F1F11EF29AC}"/>
+              </a:ext>
+            </a:extLst>
+          </p:cNvPr>
+          <p:cNvSpPr/>
+          <p:nvPr/>
+        </p:nvSpPr>
+        <p:spPr>
+          <a:xfrm>
+            <a:off x="566928" y="1115568"/>
+            <a:ext cx="3749040" cy="182880"/>
+          </a:xfrm>
+          <a:prstGeom prst="rect">
+            <a:avLst/>
+          </a:prstGeom>
+          <a:noFill/>
+          <a:ln/>
+        </p:spPr>
+        <p:txBody>
+          <a:bodyPr wrap="square" lIns="0" tIns="0" rIns="0" bIns="0" rtlCol="0" anchor="ctr"/>
+          <a:lstStyle/>
+          <a:p>
+            <a:pPr marL="0" indent="0">
+              <a:buNone/>
+            </a:pPr>
+            <a:r>
+              <a:rPr lang="en-US" sz="1200" b="1" dirty="0">
+                <a:solidFill>
+                  <a:srgbClr val="FFFFFF"/>
+                </a:solidFill>
+              </a:rPr>
+              <a:t>Customer Profile</a:t>
+            </a:r>
+            <a:endParaRPr lang="en-US" sz="1200" dirty="0"/>
+          </a:p>
+        </p:txBody>
+      </p:sp>
+      <p:sp>
+        <p:nvSpPr>
+          <p:cNvPr id="9" name="Text 7">
+            <a:extLst>
+              <a:ext uri="{FF2B5EF4-FFF2-40B4-BE49-F238E27FC236}">
+                <a16:creationId xmlns:a16="http://schemas.microsoft.com/office/drawing/2014/main" id="{54876047-AC9D-617B-8BF7-8E37EC4C737B}"/>
+              </a:ext>
+            </a:extLst>
+          </p:cNvPr>
+          <p:cNvSpPr/>
+          <p:nvPr/>
+        </p:nvSpPr>
+        <p:spPr>
+          <a:xfrm>
+            <a:off x="566928" y="1280160"/>
+            <a:ext cx="3749040" cy="128016"/>
+          </a:xfrm>
+          <a:prstGeom prst="rect">
+            <a:avLst/>
+          </a:prstGeom>
+          <a:noFill/>
+          <a:ln/>
+        </p:spPr>
+        <p:txBody>
+          <a:bodyPr wrap="square" lIns="0" tIns="0" rIns="0" bIns="0" rtlCol="0" anchor="ctr"/>
+          <a:lstStyle/>
+          <a:p>
+            <a:pPr marL="0" indent="0">
+              <a:buNone/>
+            </a:pPr>
+            <a:r>
+              <a:rPr lang="en-US" sz="750" dirty="0">
+                <a:solidFill>
+                  <a:srgbClr val="CADCFC"/>
+                </a:solidFill>
+              </a:rPr>
+              <a:t>Account management · order history · profile editing</a:t>
+            </a:r>
+            <a:endParaRPr lang="en-US" sz="750" dirty="0"/>
+          </a:p>
+        </p:txBody>
+      </p:sp>
+      <p:sp>
+        <p:nvSpPr>
+          <p:cNvPr id="10" name="Shape 8">
+            <a:extLst>
+              <a:ext uri="{FF2B5EF4-FFF2-40B4-BE49-F238E27FC236}">
+                <a16:creationId xmlns:a16="http://schemas.microsoft.com/office/drawing/2014/main" id="{9576614E-FABB-25E3-41EE-F3210F876B1C}"/>
+              </a:ext>
+            </a:extLst>
+          </p:cNvPr>
+          <p:cNvSpPr/>
+          <p:nvPr/>
+        </p:nvSpPr>
+        <p:spPr>
+          <a:xfrm>
+            <a:off x="457200" y="1463040"/>
+            <a:ext cx="4023360" cy="3291840"/>
+          </a:xfrm>
+          <a:prstGeom prst="rect">
+            <a:avLst/>
+          </a:prstGeom>
+          <a:solidFill>
+            <a:srgbClr val="F0F2F6"/>
+          </a:solidFill>
+          <a:ln w="12700">
+            <a:solidFill>
+              <a:srgbClr val="D8DCE5"/>
+            </a:solidFill>
+            <a:prstDash val="solid"/>
+          </a:ln>
+        </p:spPr>
+        <p:txBody>
+          <a:bodyPr/>
+          <a:lstStyle/>
+          <a:p>
+            <a:endParaRPr lang="en-US"/>
+          </a:p>
+        </p:txBody>
+      </p:sp>
+      <p:sp>
+        <p:nvSpPr>
+          <p:cNvPr id="11" name="Shape 9">
+            <a:extLst>
+              <a:ext uri="{FF2B5EF4-FFF2-40B4-BE49-F238E27FC236}">
+                <a16:creationId xmlns:a16="http://schemas.microsoft.com/office/drawing/2014/main" id="{917259BF-657C-8EE6-96BA-05357B738E0D}"/>
+              </a:ext>
+            </a:extLst>
+          </p:cNvPr>
+          <p:cNvSpPr/>
+          <p:nvPr/>
+        </p:nvSpPr>
+        <p:spPr>
+          <a:xfrm>
+            <a:off x="594360" y="1600200"/>
+            <a:ext cx="3749040" cy="3017520"/>
+          </a:xfrm>
+          <a:prstGeom prst="rect">
+            <a:avLst/>
+          </a:prstGeom>
+          <a:solidFill>
+            <a:srgbClr val="E8EAF0"/>
+          </a:solidFill>
+          <a:ln w="6350">
+            <a:solidFill>
+              <a:srgbClr val="C8CDD8"/>
+            </a:solidFill>
+            <a:prstDash val="dash"/>
+          </a:ln>
+        </p:spPr>
+        <p:txBody>
+          <a:bodyPr/>
+          <a:lstStyle/>
+          <a:p>
+            <a:endParaRPr lang="en-US"/>
+          </a:p>
+        </p:txBody>
+      </p:sp>
+      <p:sp>
+        <p:nvSpPr>
+          <p:cNvPr id="12" name="Text 10">
+            <a:extLst>
+              <a:ext uri="{FF2B5EF4-FFF2-40B4-BE49-F238E27FC236}">
+                <a16:creationId xmlns:a16="http://schemas.microsoft.com/office/drawing/2014/main" id="{13282C6B-E67A-03AC-345A-AE28AD86EC5A}"/>
+              </a:ext>
+            </a:extLst>
+          </p:cNvPr>
+          <p:cNvSpPr/>
+          <p:nvPr/>
+        </p:nvSpPr>
+        <p:spPr>
+          <a:xfrm>
+            <a:off x="640080" y="2743200"/>
+            <a:ext cx="3657600" cy="457200"/>
+          </a:xfrm>
+          <a:prstGeom prst="rect">
+            <a:avLst/>
+          </a:prstGeom>
+          <a:noFill/>
+          <a:ln/>
+        </p:spPr>
+        <p:txBody>
+          <a:bodyPr wrap="square" lIns="0" tIns="0" rIns="0" bIns="0" rtlCol="0" anchor="ctr"/>
+          <a:lstStyle/>
+          <a:p>
+            <a:pPr marL="0" indent="0" algn="ctr">
+              <a:buNone/>
+            </a:pPr>
+            <a:r>
+              <a:rPr lang="en-US" sz="900" i="1" dirty="0">
+                <a:solidFill>
+                  <a:srgbClr val="94A3B8"/>
+                </a:solidFill>
+              </a:rPr>
+              <a:t>[ Replace with customer profile screenshot ]</a:t>
+            </a:r>
+            <a:endParaRPr lang="en-US" sz="900" dirty="0"/>
+          </a:p>
+        </p:txBody>
+      </p:sp>
+      <p:sp>
+        <p:nvSpPr>
+          <p:cNvPr id="13" name="Shape 11">
+            <a:extLst>
+              <a:ext uri="{FF2B5EF4-FFF2-40B4-BE49-F238E27FC236}">
+                <a16:creationId xmlns:a16="http://schemas.microsoft.com/office/drawing/2014/main" id="{E806DC52-004B-0DC6-C0F7-08DEB3CAC32F}"/>
+              </a:ext>
+            </a:extLst>
+          </p:cNvPr>
+          <p:cNvSpPr/>
+          <p:nvPr/>
+        </p:nvSpPr>
+        <p:spPr>
+          <a:xfrm>
+            <a:off x="3840480" y="1508760"/>
+            <a:ext cx="594360" cy="201168"/>
+          </a:xfrm>
+          <a:prstGeom prst="rect">
+            <a:avLst/>
+          </a:prstGeom>
+          <a:solidFill>
+            <a:srgbClr val="00AEEF"/>
+          </a:solidFill>
+          <a:ln w="12700">
+            <a:solidFill>
+              <a:srgbClr val="00AEEF"/>
+            </a:solidFill>
+            <a:prstDash val="solid"/>
+          </a:ln>
+        </p:spPr>
+        <p:txBody>
+          <a:bodyPr/>
+          <a:lstStyle/>
+          <a:p>
+            <a:endParaRPr lang="en-US"/>
+          </a:p>
+        </p:txBody>
+      </p:sp>
+      <p:sp>
+        <p:nvSpPr>
+          <p:cNvPr id="14" name="Text 12">
+            <a:extLst>
+              <a:ext uri="{FF2B5EF4-FFF2-40B4-BE49-F238E27FC236}">
+                <a16:creationId xmlns:a16="http://schemas.microsoft.com/office/drawing/2014/main" id="{52AAD1CF-74BB-B14C-3E05-6517FA0E2688}"/>
+              </a:ext>
+            </a:extLst>
+          </p:cNvPr>
+          <p:cNvSpPr/>
+          <p:nvPr/>
+        </p:nvSpPr>
+        <p:spPr>
+          <a:xfrm>
+            <a:off x="3840480" y="1508760"/>
+            <a:ext cx="594360" cy="201168"/>
+          </a:xfrm>
+          <a:prstGeom prst="rect">
+            <a:avLst/>
+          </a:prstGeom>
+          <a:noFill/>
+          <a:ln/>
+        </p:spPr>
+        <p:txBody>
+          <a:bodyPr wrap="square" lIns="0" tIns="0" rIns="0" bIns="0" rtlCol="0" anchor="ctr"/>
+          <a:lstStyle/>
+          <a:p>
+            <a:pPr marL="0" indent="0" algn="ctr">
+              <a:buNone/>
+            </a:pPr>
+            <a:r>
+              <a:rPr lang="en-US" sz="750" b="1" dirty="0">
+                <a:solidFill>
+                  <a:srgbClr val="FFFFFF"/>
+                </a:solidFill>
+              </a:rPr>
+              <a:t>UI</a:t>
+            </a:r>
+            <a:endParaRPr lang="en-US" sz="750" dirty="0"/>
+          </a:p>
+        </p:txBody>
+      </p:sp>
+      <p:sp>
+        <p:nvSpPr>
+          <p:cNvPr id="15" name="Shape 13">
+            <a:extLst>
+              <a:ext uri="{FF2B5EF4-FFF2-40B4-BE49-F238E27FC236}">
+                <a16:creationId xmlns:a16="http://schemas.microsoft.com/office/drawing/2014/main" id="{C33899B5-0D41-059C-FAC1-16B8F779C19B}"/>
+              </a:ext>
+            </a:extLst>
+          </p:cNvPr>
+          <p:cNvSpPr/>
+          <p:nvPr/>
+        </p:nvSpPr>
+        <p:spPr>
+          <a:xfrm>
+            <a:off x="4617720" y="1115568"/>
+            <a:ext cx="4023360" cy="310896"/>
+          </a:xfrm>
+          <a:prstGeom prst="rect">
+            <a:avLst/>
+          </a:prstGeom>
+          <a:solidFill>
+            <a:srgbClr val="1D9E75"/>
+          </a:solidFill>
+          <a:ln w="12700">
+            <a:solidFill>
+              <a:srgbClr val="1D9E75"/>
+            </a:solidFill>
+            <a:prstDash val="solid"/>
+          </a:ln>
+        </p:spPr>
+        <p:txBody>
+          <a:bodyPr/>
+          <a:lstStyle/>
+          <a:p>
+            <a:endParaRPr lang="en-US"/>
+          </a:p>
+        </p:txBody>
+      </p:sp>
+      <p:sp>
+        <p:nvSpPr>
+          <p:cNvPr id="16" name="Text 14">
+            <a:extLst>
+              <a:ext uri="{FF2B5EF4-FFF2-40B4-BE49-F238E27FC236}">
+                <a16:creationId xmlns:a16="http://schemas.microsoft.com/office/drawing/2014/main" id="{CEC263B7-12AC-A817-26B6-F018BD8AD547}"/>
+              </a:ext>
+            </a:extLst>
+          </p:cNvPr>
+          <p:cNvSpPr/>
+          <p:nvPr/>
+        </p:nvSpPr>
+        <p:spPr>
+          <a:xfrm>
+            <a:off x="4727448" y="1115568"/>
+            <a:ext cx="3749040" cy="182880"/>
+          </a:xfrm>
+          <a:prstGeom prst="rect">
+            <a:avLst/>
+          </a:prstGeom>
+          <a:noFill/>
+          <a:ln/>
+        </p:spPr>
+        <p:txBody>
+          <a:bodyPr wrap="square" lIns="0" tIns="0" rIns="0" bIns="0" rtlCol="0" anchor="ctr"/>
+          <a:lstStyle/>
+          <a:p>
+            <a:pPr marL="0" indent="0">
+              <a:buNone/>
+            </a:pPr>
+            <a:r>
+              <a:rPr lang="en-US" sz="1200" b="1" dirty="0">
+                <a:solidFill>
+                  <a:srgbClr val="FFFFFF"/>
+                </a:solidFill>
+              </a:rPr>
+              <a:t>Business Tools</a:t>
+            </a:r>
+            <a:endParaRPr lang="en-US" sz="1200" dirty="0"/>
+          </a:p>
+        </p:txBody>
+      </p:sp>
+      <p:sp>
+        <p:nvSpPr>
+          <p:cNvPr id="17" name="Text 15">
+            <a:extLst>
+              <a:ext uri="{FF2B5EF4-FFF2-40B4-BE49-F238E27FC236}">
+                <a16:creationId xmlns:a16="http://schemas.microsoft.com/office/drawing/2014/main" id="{C939F9CF-AEF4-E267-602B-6AA72F5165C8}"/>
+              </a:ext>
+            </a:extLst>
+          </p:cNvPr>
+          <p:cNvSpPr/>
+          <p:nvPr/>
+        </p:nvSpPr>
+        <p:spPr>
+          <a:xfrm>
+            <a:off x="4727448" y="1280160"/>
+            <a:ext cx="3749040" cy="128016"/>
+          </a:xfrm>
+          <a:prstGeom prst="rect">
+            <a:avLst/>
+          </a:prstGeom>
+          <a:noFill/>
+          <a:ln/>
+        </p:spPr>
+        <p:txBody>
+          <a:bodyPr wrap="square" lIns="0" tIns="0" rIns="0" bIns="0" rtlCol="0" anchor="ctr"/>
+          <a:lstStyle/>
+          <a:p>
+            <a:pPr marL="0" indent="0">
+              <a:buNone/>
+            </a:pPr>
+            <a:r>
+              <a:rPr lang="en-US" sz="750" dirty="0">
+                <a:solidFill>
+                  <a:srgbClr val="CADCFC"/>
+                </a:solidFill>
+              </a:rPr>
+              <a:t>Product &amp; inventory management · sales dashboard</a:t>
+            </a:r>
+            <a:endParaRPr lang="en-US" sz="750" dirty="0"/>
+          </a:p>
+        </p:txBody>
+      </p:sp>
+      <p:sp>
+        <p:nvSpPr>
+          <p:cNvPr id="18" name="Shape 16">
+            <a:extLst>
+              <a:ext uri="{FF2B5EF4-FFF2-40B4-BE49-F238E27FC236}">
+                <a16:creationId xmlns:a16="http://schemas.microsoft.com/office/drawing/2014/main" id="{04068518-4647-49A4-BC81-4DFC9E23F16B}"/>
+              </a:ext>
+            </a:extLst>
+          </p:cNvPr>
+          <p:cNvSpPr/>
+          <p:nvPr/>
+        </p:nvSpPr>
+        <p:spPr>
+          <a:xfrm>
+            <a:off x="4617720" y="1463040"/>
+            <a:ext cx="4023360" cy="3291840"/>
+          </a:xfrm>
+          <a:prstGeom prst="rect">
+            <a:avLst/>
+          </a:prstGeom>
+          <a:solidFill>
+            <a:srgbClr val="F0F2F6"/>
+          </a:solidFill>
+          <a:ln w="12700">
+            <a:solidFill>
+              <a:srgbClr val="D8DCE5"/>
+            </a:solidFill>
+            <a:prstDash val="solid"/>
+          </a:ln>
+        </p:spPr>
+        <p:txBody>
+          <a:bodyPr/>
+          <a:lstStyle/>
+          <a:p>
+            <a:endParaRPr lang="en-US"/>
+          </a:p>
+        </p:txBody>
+      </p:sp>
+      <p:sp>
+        <p:nvSpPr>
+          <p:cNvPr id="19" name="Shape 17">
+            <a:extLst>
+              <a:ext uri="{FF2B5EF4-FFF2-40B4-BE49-F238E27FC236}">
+                <a16:creationId xmlns:a16="http://schemas.microsoft.com/office/drawing/2014/main" id="{FDAA8B83-4B30-DE7B-9135-F58F382796CE}"/>
+              </a:ext>
+            </a:extLst>
+          </p:cNvPr>
+          <p:cNvSpPr/>
+          <p:nvPr/>
+        </p:nvSpPr>
+        <p:spPr>
+          <a:xfrm>
+            <a:off x="4754880" y="1600200"/>
+            <a:ext cx="3749040" cy="3017520"/>
+          </a:xfrm>
+          <a:prstGeom prst="rect">
+            <a:avLst/>
+          </a:prstGeom>
+          <a:solidFill>
+            <a:srgbClr val="E8EAF0"/>
+          </a:solidFill>
+          <a:ln w="6350">
+            <a:solidFill>
+              <a:srgbClr val="C8CDD8"/>
+            </a:solidFill>
+            <a:prstDash val="dash"/>
+          </a:ln>
+        </p:spPr>
+        <p:txBody>
+          <a:bodyPr/>
+          <a:lstStyle/>
+          <a:p>
+            <a:endParaRPr lang="en-US"/>
+          </a:p>
+        </p:txBody>
+      </p:sp>
+      <p:sp>
+        <p:nvSpPr>
+          <p:cNvPr id="20" name="Text 18">
+            <a:extLst>
+              <a:ext uri="{FF2B5EF4-FFF2-40B4-BE49-F238E27FC236}">
+                <a16:creationId xmlns:a16="http://schemas.microsoft.com/office/drawing/2014/main" id="{2941B7A8-4096-F865-7C9F-5213710FACFF}"/>
+              </a:ext>
+            </a:extLst>
+          </p:cNvPr>
+          <p:cNvSpPr/>
+          <p:nvPr/>
+        </p:nvSpPr>
+        <p:spPr>
+          <a:xfrm>
+            <a:off x="4800600" y="2743200"/>
+            <a:ext cx="3657600" cy="457200"/>
+          </a:xfrm>
+          <a:prstGeom prst="rect">
+            <a:avLst/>
+          </a:prstGeom>
+          <a:noFill/>
+          <a:ln/>
+        </p:spPr>
+        <p:txBody>
+          <a:bodyPr wrap="square" lIns="0" tIns="0" rIns="0" bIns="0" rtlCol="0" anchor="ctr"/>
+          <a:lstStyle/>
+          <a:p>
+            <a:pPr marL="0" indent="0" algn="ctr">
+              <a:buNone/>
+            </a:pPr>
+            <a:r>
+              <a:rPr lang="en-US" sz="900" i="1" dirty="0">
+                <a:solidFill>
+                  <a:srgbClr val="94A3B8"/>
+                </a:solidFill>
+              </a:rPr>
+              <a:t>[ Replace with business settings screenshot ]</a:t>
+            </a:r>
+            <a:endParaRPr lang="en-US" sz="900" dirty="0"/>
+          </a:p>
+        </p:txBody>
+      </p:sp>
+      <p:sp>
+        <p:nvSpPr>
+          <p:cNvPr id="21" name="Shape 19">
+            <a:extLst>
+              <a:ext uri="{FF2B5EF4-FFF2-40B4-BE49-F238E27FC236}">
+                <a16:creationId xmlns:a16="http://schemas.microsoft.com/office/drawing/2014/main" id="{D9828094-89E8-272E-D765-C5F1878062D7}"/>
+              </a:ext>
+            </a:extLst>
+          </p:cNvPr>
+          <p:cNvSpPr/>
+          <p:nvPr/>
+        </p:nvSpPr>
+        <p:spPr>
+          <a:xfrm>
+            <a:off x="8001000" y="1508760"/>
+            <a:ext cx="594360" cy="201168"/>
+          </a:xfrm>
+          <a:prstGeom prst="rect">
+            <a:avLst/>
+          </a:prstGeom>
+          <a:solidFill>
+            <a:srgbClr val="1D9E75"/>
+          </a:solidFill>
+          <a:ln w="12700">
+            <a:solidFill>
+              <a:srgbClr val="1D9E75"/>
+            </a:solidFill>
+            <a:prstDash val="solid"/>
+          </a:ln>
+        </p:spPr>
+        <p:txBody>
+          <a:bodyPr/>
+          <a:lstStyle/>
+          <a:p>
+            <a:endParaRPr lang="en-US"/>
+          </a:p>
+        </p:txBody>
+      </p:sp>
+      <p:sp>
+        <p:nvSpPr>
+          <p:cNvPr id="22" name="Text 20">
+            <a:extLst>
+              <a:ext uri="{FF2B5EF4-FFF2-40B4-BE49-F238E27FC236}">
+                <a16:creationId xmlns:a16="http://schemas.microsoft.com/office/drawing/2014/main" id="{32A83AD3-6F18-7300-924A-DBCB92CD26E8}"/>
+              </a:ext>
+            </a:extLst>
+          </p:cNvPr>
+          <p:cNvSpPr/>
+          <p:nvPr/>
+        </p:nvSpPr>
+        <p:spPr>
+          <a:xfrm>
+            <a:off x="8001000" y="1508760"/>
+            <a:ext cx="594360" cy="201168"/>
+          </a:xfrm>
+          <a:prstGeom prst="rect">
+            <a:avLst/>
+          </a:prstGeom>
+          <a:noFill/>
+          <a:ln/>
+        </p:spPr>
+        <p:txBody>
+          <a:bodyPr wrap="square" lIns="0" tIns="0" rIns="0" bIns="0" rtlCol="0" anchor="ctr"/>
+          <a:lstStyle/>
+          <a:p>
+            <a:pPr marL="0" indent="0" algn="ctr">
+              <a:buNone/>
+            </a:pPr>
+            <a:r>
+              <a:rPr lang="en-US" sz="750" b="1" dirty="0">
+                <a:solidFill>
+                  <a:srgbClr val="FFFFFF"/>
+                </a:solidFill>
+              </a:rPr>
+              <a:t>UI</a:t>
+            </a:r>
+            <a:endParaRPr lang="en-US" sz="750" dirty="0"/>
+          </a:p>
+        </p:txBody>
+      </p:sp>
+      <p:sp>
+        <p:nvSpPr>
+          <p:cNvPr id="23" name="Shape 21">
+            <a:extLst>
+              <a:ext uri="{FF2B5EF4-FFF2-40B4-BE49-F238E27FC236}">
+                <a16:creationId xmlns:a16="http://schemas.microsoft.com/office/drawing/2014/main" id="{E16DF484-6009-023B-41D1-CCA84D58930C}"/>
+              </a:ext>
+            </a:extLst>
+          </p:cNvPr>
+          <p:cNvSpPr/>
+          <p:nvPr/>
+        </p:nvSpPr>
+        <p:spPr>
+          <a:xfrm>
+            <a:off x="457200" y="4828032"/>
+            <a:ext cx="8229600" cy="201168"/>
+          </a:xfrm>
+          <a:prstGeom prst="rect">
+            <a:avLst/>
+          </a:prstGeom>
+          <a:solidFill>
+            <a:srgbClr val="F8FAFC"/>
+          </a:solidFill>
+          <a:ln w="6350">
+            <a:solidFill>
+              <a:srgbClr val="D8DCE5"/>
+            </a:solidFill>
+            <a:prstDash val="solid"/>
+          </a:ln>
+        </p:spPr>
+        <p:txBody>
+          <a:bodyPr/>
+          <a:lstStyle/>
+          <a:p>
+            <a:endParaRPr lang="en-US"/>
+          </a:p>
+        </p:txBody>
+      </p:sp>
+      <p:sp>
+        <p:nvSpPr>
+          <p:cNvPr id="24" name="Text 22">
+            <a:extLst>
+              <a:ext uri="{FF2B5EF4-FFF2-40B4-BE49-F238E27FC236}">
+                <a16:creationId xmlns:a16="http://schemas.microsoft.com/office/drawing/2014/main" id="{950FDA77-E641-ED75-F586-4D39E349E52F}"/>
+              </a:ext>
+            </a:extLst>
+          </p:cNvPr>
+          <p:cNvSpPr/>
+          <p:nvPr/>
+        </p:nvSpPr>
+        <p:spPr>
+          <a:xfrm>
+            <a:off x="566928" y="4828032"/>
+            <a:ext cx="8010144" cy="201168"/>
+          </a:xfrm>
+          <a:prstGeom prst="rect">
+            <a:avLst/>
+          </a:prstGeom>
+          <a:noFill/>
+          <a:ln/>
+        </p:spPr>
+        <p:txBody>
+          <a:bodyPr wrap="square" lIns="0" tIns="0" rIns="0" bIns="0" rtlCol="0" anchor="ctr"/>
+          <a:lstStyle/>
+          <a:p>
+            <a:pPr marL="0" indent="0" algn="ctr">
+              <a:buNone/>
+            </a:pPr>
+            <a:r>
+              <a:rPr lang="en-US" sz="750" dirty="0">
+                <a:solidFill>
+                  <a:srgbClr val="475569"/>
+                </a:solidFill>
+              </a:rPr>
+              <a:t>Branding consistent across all views  ·  Loading, error &amp; empty states on every page  ·  77+ automated tests passing</a:t>
+            </a:r>
+            <a:endParaRPr lang="en-US" sz="750" dirty="0"/>
+          </a:p>
+        </p:txBody>
+      </p:sp>
+    </p:spTree>
+    <p:extLst>
+      <p:ext uri="{BB962C8B-B14F-4D97-AF65-F5344CB8AC3E}">
+        <p14:creationId xmlns:p14="http://schemas.microsoft.com/office/powerpoint/2010/main" val="1831737831"/>
+      </p:ext>
+    </p:extLst>
+  </p:cSld>
+  <p:clrMapOvr>
+    <a:masterClrMapping/>
+  </p:clrMapOvr>
+</p:sld>
+</file>
+
+<file path=ppt/slides/slide12.xml><?xml version="1.0" encoding="utf-8"?>
+<p:sld xmlns:a="http://schemas.openxmlformats.org/drawingml/2006/main" xmlns:r="http://schemas.openxmlformats.org/officeDocument/2006/relationships" xmlns:p="http://schemas.openxmlformats.org/presentationml/2006/main">
   <p:cSld name="Slide 5">
     <p:bg>
       <p:bgPr>
@@ -6424,7 +8608,7 @@
 </p:sld>
 </file>
 
-<file path=ppt/slides/slide11.xml><?xml version="1.0" encoding="utf-8"?>
+<file path=ppt/slides/slide13.xml><?xml version="1.0" encoding="utf-8"?>
 <p:sld xmlns:a="http://schemas.openxmlformats.org/drawingml/2006/main" xmlns:r="http://schemas.openxmlformats.org/officeDocument/2006/relationships" xmlns:p="http://schemas.openxmlformats.org/presentationml/2006/main">
   <p:cSld name="Slide 9">
     <p:bg>
@@ -7901,7 +10085,7 @@
 </p:sld>
 </file>
 
-<file path=ppt/slides/slide12.xml><?xml version="1.0" encoding="utf-8"?>
+<file path=ppt/slides/slide14.xml><?xml version="1.0" encoding="utf-8"?>
 <p:sld xmlns:a="http://schemas.openxmlformats.org/drawingml/2006/main" xmlns:r="http://schemas.openxmlformats.org/officeDocument/2006/relationships" xmlns:p="http://schemas.openxmlformats.org/presentationml/2006/main">
   <p:cSld name="Slide 8">
     <p:bg>
@@ -9042,7 +11226,7 @@
 </p:sld>
 </file>
 
-<file path=ppt/slides/slide13.xml><?xml version="1.0" encoding="utf-8"?>
+<file path=ppt/slides/slide15.xml><?xml version="1.0" encoding="utf-8"?>
 <p:sld xmlns:a="http://schemas.openxmlformats.org/drawingml/2006/main" xmlns:r="http://schemas.openxmlformats.org/officeDocument/2006/relationships" xmlns:p="http://schemas.openxmlformats.org/presentationml/2006/main">
   <p:cSld name="Slide 10">
     <p:bg>
@@ -10095,7 +12279,7 @@
 </p:sld>
 </file>
 
-<file path=ppt/slides/slide14.xml><?xml version="1.0" encoding="utf-8"?>
+<file path=ppt/slides/slide16.xml><?xml version="1.0" encoding="utf-8"?>
 <p:sld xmlns:a="http://schemas.openxmlformats.org/drawingml/2006/main" xmlns:r="http://schemas.openxmlformats.org/officeDocument/2006/relationships" xmlns:p="http://schemas.openxmlformats.org/presentationml/2006/main">
   <p:cSld name="Slide 11">
     <p:bg>
@@ -11125,7 +13309,7 @@
 </p:sld>
 </file>
 
-<file path=ppt/slides/slide15.xml><?xml version="1.0" encoding="utf-8"?>
+<file path=ppt/slides/slide17.xml><?xml version="1.0" encoding="utf-8"?>
 <p:sld xmlns:a="http://schemas.openxmlformats.org/drawingml/2006/main" xmlns:r="http://schemas.openxmlformats.org/officeDocument/2006/relationships" xmlns:p="http://schemas.openxmlformats.org/presentationml/2006/main">
   <p:cSld name="Slide 12">
     <p:bg>
@@ -11675,7 +13859,7 @@
 </p:sld>
 </file>
 
-<file path=ppt/slides/slide16.xml><?xml version="1.0" encoding="utf-8"?>
+<file path=ppt/slides/slide18.xml><?xml version="1.0" encoding="utf-8"?>
 <p:sld xmlns:a="http://schemas.openxmlformats.org/drawingml/2006/main" xmlns:r="http://schemas.openxmlformats.org/officeDocument/2006/relationships" xmlns:p="http://schemas.openxmlformats.org/presentationml/2006/main">
   <p:cSld name="Slide 13">
     <p:bg>
@@ -16183,6 +18367,94 @@
 
 <file path=ppt/slides/slide5.xml><?xml version="1.0" encoding="utf-8"?>
 <p:sld xmlns:a="http://schemas.openxmlformats.org/drawingml/2006/main" xmlns:r="http://schemas.openxmlformats.org/officeDocument/2006/relationships" xmlns:p="http://schemas.openxmlformats.org/presentationml/2006/main">
+  <p:cSld>
+    <p:bg>
+      <p:bgPr>
+        <a:solidFill>
+          <a:srgbClr val="F4F6FB"/>
+        </a:solidFill>
+        <a:effectLst/>
+      </p:bgPr>
+    </p:bg>
+    <p:spTree>
+      <p:nvGrpSpPr>
+        <p:cNvPr id="1" name="">
+          <a:extLst>
+            <a:ext uri="{FF2B5EF4-FFF2-40B4-BE49-F238E27FC236}">
+              <a16:creationId xmlns:a16="http://schemas.microsoft.com/office/drawing/2014/main" id="{5359BEB2-9215-8B8D-E090-AD03FB545775}"/>
+            </a:ext>
+          </a:extLst>
+        </p:cNvPr>
+        <p:cNvGrpSpPr/>
+        <p:nvPr/>
+      </p:nvGrpSpPr>
+      <p:grpSpPr>
+        <a:xfrm>
+          <a:off x="0" y="0"/>
+          <a:ext cx="0" cy="0"/>
+          <a:chOff x="0" y="0"/>
+          <a:chExt cx="0" cy="0"/>
+        </a:xfrm>
+      </p:grpSpPr>
+    </p:spTree>
+    <p:extLst>
+      <p:ext uri="{BB962C8B-B14F-4D97-AF65-F5344CB8AC3E}">
+        <p14:creationId xmlns:p14="http://schemas.microsoft.com/office/powerpoint/2010/main" val="2724840136"/>
+      </p:ext>
+    </p:extLst>
+  </p:cSld>
+  <p:clrMapOvr>
+    <a:masterClrMapping/>
+  </p:clrMapOvr>
+</p:sld>
+</file>
+
+<file path=ppt/slides/slide6.xml><?xml version="1.0" encoding="utf-8"?>
+<p:sld xmlns:a="http://schemas.openxmlformats.org/drawingml/2006/main" xmlns:r="http://schemas.openxmlformats.org/officeDocument/2006/relationships" xmlns:p="http://schemas.openxmlformats.org/presentationml/2006/main">
+  <p:cSld>
+    <p:bg>
+      <p:bgPr>
+        <a:solidFill>
+          <a:srgbClr val="F4F6FB"/>
+        </a:solidFill>
+        <a:effectLst/>
+      </p:bgPr>
+    </p:bg>
+    <p:spTree>
+      <p:nvGrpSpPr>
+        <p:cNvPr id="1" name="">
+          <a:extLst>
+            <a:ext uri="{FF2B5EF4-FFF2-40B4-BE49-F238E27FC236}">
+              <a16:creationId xmlns:a16="http://schemas.microsoft.com/office/drawing/2014/main" id="{DD892FEC-689E-C197-FC36-20F23A9D2D3C}"/>
+            </a:ext>
+          </a:extLst>
+        </p:cNvPr>
+        <p:cNvGrpSpPr/>
+        <p:nvPr/>
+      </p:nvGrpSpPr>
+      <p:grpSpPr>
+        <a:xfrm>
+          <a:off x="0" y="0"/>
+          <a:ext cx="0" cy="0"/>
+          <a:chOff x="0" y="0"/>
+          <a:chExt cx="0" cy="0"/>
+        </a:xfrm>
+      </p:grpSpPr>
+    </p:spTree>
+    <p:extLst>
+      <p:ext uri="{BB962C8B-B14F-4D97-AF65-F5344CB8AC3E}">
+        <p14:creationId xmlns:p14="http://schemas.microsoft.com/office/powerpoint/2010/main" val="1464961274"/>
+      </p:ext>
+    </p:extLst>
+  </p:cSld>
+  <p:clrMapOvr>
+    <a:masterClrMapping/>
+  </p:clrMapOvr>
+</p:sld>
+</file>
+
+<file path=ppt/slides/slide7.xml><?xml version="1.0" encoding="utf-8"?>
+<p:sld xmlns:a="http://schemas.openxmlformats.org/drawingml/2006/main" xmlns:r="http://schemas.openxmlformats.org/officeDocument/2006/relationships" xmlns:p="http://schemas.openxmlformats.org/presentationml/2006/main">
   <p:cSld name="Slide 6">
     <p:bg>
       <p:bgPr>
@@ -17627,7 +19899,7 @@
 </p:sld>
 </file>
 
-<file path=ppt/slides/slide6.xml><?xml version="1.0" encoding="utf-8"?>
+<file path=ppt/slides/slide8.xml><?xml version="1.0" encoding="utf-8"?>
 <p:sld xmlns:a="http://schemas.openxmlformats.org/drawingml/2006/main" xmlns:r="http://schemas.openxmlformats.org/officeDocument/2006/relationships" xmlns:p="http://schemas.openxmlformats.org/presentationml/2006/main">
   <p:cSld name="Slide 7">
     <p:bg>
@@ -18525,7 +20797,7 @@
                 <a:ea typeface="Calibri" pitchFamily="34" charset="-122"/>
                 <a:cs typeface="Calibri" pitchFamily="34" charset="-120"/>
               </a:rPr>
-              <a:t>5 Sprint Reviews and Retrospectives</a:t>
+              <a:t>Content</a:t>
             </a:r>
             <a:endParaRPr lang="en-US" sz="1200" dirty="0"/>
           </a:p>
@@ -18564,7 +20836,7 @@
                 <a:ea typeface="Calibri" pitchFamily="34" charset="-122"/>
                 <a:cs typeface="Calibri" pitchFamily="34" charset="-120"/>
               </a:rPr>
-              <a:t>Every sprint closed with a formal review and retrospective. Process improvements were documented and actioned, not just noted, across all Sprints.</a:t>
+              <a:t>Content</a:t>
             </a:r>
             <a:endParaRPr lang="en-US" sz="950" dirty="0"/>
           </a:p>
@@ -18662,7 +20934,7 @@
 </p:sld>
 </file>
 
-<file path=ppt/slides/slide7.xml><?xml version="1.0" encoding="utf-8"?>
+<file path=ppt/slides/slide9.xml><?xml version="1.0" encoding="utf-8"?>
 <p:sld xmlns:a="http://schemas.openxmlformats.org/drawingml/2006/main" xmlns:r="http://schemas.openxmlformats.org/officeDocument/2006/relationships" xmlns:p="http://schemas.openxmlformats.org/presentationml/2006/main">
   <p:cSld>
     <p:bg>
@@ -20776,1952 +23048,6 @@
     <p:extLst>
       <p:ext uri="{BB962C8B-B14F-4D97-AF65-F5344CB8AC3E}">
         <p14:creationId xmlns:p14="http://schemas.microsoft.com/office/powerpoint/2010/main" val="1843236855"/>
-      </p:ext>
-    </p:extLst>
-  </p:cSld>
-  <p:clrMapOvr>
-    <a:masterClrMapping/>
-  </p:clrMapOvr>
-</p:sld>
-</file>
-
-<file path=ppt/slides/slide8.xml><?xml version="1.0" encoding="utf-8"?>
-<p:sld xmlns:a="http://schemas.openxmlformats.org/drawingml/2006/main" xmlns:r="http://schemas.openxmlformats.org/officeDocument/2006/relationships" xmlns:p="http://schemas.openxmlformats.org/presentationml/2006/main">
-  <p:cSld>
-    <p:bg>
-      <p:bgPr>
-        <a:solidFill>
-          <a:srgbClr val="F4F6FB"/>
-        </a:solidFill>
-        <a:effectLst/>
-      </p:bgPr>
-    </p:bg>
-    <p:spTree>
-      <p:nvGrpSpPr>
-        <p:cNvPr id="1" name="">
-          <a:extLst>
-            <a:ext uri="{FF2B5EF4-FFF2-40B4-BE49-F238E27FC236}">
-              <a16:creationId xmlns:a16="http://schemas.microsoft.com/office/drawing/2014/main" id="{C78CB47F-8D70-0381-08E3-BC912EE20E66}"/>
-            </a:ext>
-          </a:extLst>
-        </p:cNvPr>
-        <p:cNvGrpSpPr/>
-        <p:nvPr/>
-      </p:nvGrpSpPr>
-      <p:grpSpPr>
-        <a:xfrm>
-          <a:off x="0" y="0"/>
-          <a:ext cx="0" cy="0"/>
-          <a:chOff x="0" y="0"/>
-          <a:chExt cx="0" cy="0"/>
-        </a:xfrm>
-      </p:grpSpPr>
-      <p:sp>
-        <p:nvSpPr>
-          <p:cNvPr id="2" name="Text 0">
-            <a:extLst>
-              <a:ext uri="{FF2B5EF4-FFF2-40B4-BE49-F238E27FC236}">
-                <a16:creationId xmlns:a16="http://schemas.microsoft.com/office/drawing/2014/main" id="{7C50509C-14BC-71D6-0205-203A60195B9A}"/>
-              </a:ext>
-            </a:extLst>
-          </p:cNvPr>
-          <p:cNvSpPr/>
-          <p:nvPr/>
-        </p:nvSpPr>
-        <p:spPr>
-          <a:xfrm>
-            <a:off x="457200" y="256032"/>
-            <a:ext cx="5486400" cy="182880"/>
-          </a:xfrm>
-          <a:prstGeom prst="rect">
-            <a:avLst/>
-          </a:prstGeom>
-          <a:noFill/>
-          <a:ln/>
-        </p:spPr>
-        <p:txBody>
-          <a:bodyPr wrap="square" lIns="0" tIns="0" rIns="0" bIns="0" rtlCol="0" anchor="ctr"/>
-          <a:lstStyle/>
-          <a:p>
-            <a:pPr marL="0" indent="0" algn="l">
-              <a:buNone/>
-            </a:pPr>
-            <a:r>
-              <a:rPr lang="en-US" sz="850" b="1" kern="0" spc="300" dirty="0">
-                <a:solidFill>
-                  <a:srgbClr val="1D9E75"/>
-                </a:solidFill>
-              </a:rPr>
-              <a:t>FRONTEND &amp; USER EXPERIENCE</a:t>
-            </a:r>
-            <a:endParaRPr lang="en-US" sz="850" dirty="0"/>
-          </a:p>
-        </p:txBody>
-      </p:sp>
-      <p:sp>
-        <p:nvSpPr>
-          <p:cNvPr id="3" name="Text 1">
-            <a:extLst>
-              <a:ext uri="{FF2B5EF4-FFF2-40B4-BE49-F238E27FC236}">
-                <a16:creationId xmlns:a16="http://schemas.microsoft.com/office/drawing/2014/main" id="{72477F2A-9A91-DF02-ECA3-856BF2B56D9D}"/>
-              </a:ext>
-            </a:extLst>
-          </p:cNvPr>
-          <p:cNvSpPr/>
-          <p:nvPr/>
-        </p:nvSpPr>
-        <p:spPr>
-          <a:xfrm>
-            <a:off x="457200" y="457200"/>
-            <a:ext cx="6858000" cy="502920"/>
-          </a:xfrm>
-          <a:prstGeom prst="rect">
-            <a:avLst/>
-          </a:prstGeom>
-          <a:noFill/>
-          <a:ln/>
-        </p:spPr>
-        <p:txBody>
-          <a:bodyPr wrap="square" lIns="0" tIns="0" rIns="0" bIns="0" rtlCol="0" anchor="ctr"/>
-          <a:lstStyle/>
-          <a:p>
-            <a:pPr marL="0" indent="0" algn="l">
-              <a:buNone/>
-            </a:pPr>
-            <a:r>
-              <a:rPr lang="en-US" sz="3400" b="1" dirty="0">
-                <a:solidFill>
-                  <a:srgbClr val="0D1B3E"/>
-                </a:solidFill>
-                <a:latin typeface="Calibri" pitchFamily="34" charset="0"/>
-                <a:ea typeface="Calibri" pitchFamily="34" charset="-122"/>
-                <a:cs typeface="Calibri" pitchFamily="34" charset="-120"/>
-              </a:rPr>
-              <a:t>In Action</a:t>
-            </a:r>
-            <a:endParaRPr lang="en-US" sz="3400" dirty="0"/>
-          </a:p>
-        </p:txBody>
-      </p:sp>
-      <p:sp>
-        <p:nvSpPr>
-          <p:cNvPr id="4" name="Text 2">
-            <a:extLst>
-              <a:ext uri="{FF2B5EF4-FFF2-40B4-BE49-F238E27FC236}">
-                <a16:creationId xmlns:a16="http://schemas.microsoft.com/office/drawing/2014/main" id="{ED845693-C0A8-64FA-BDBC-DDBAFE2EED6F}"/>
-              </a:ext>
-            </a:extLst>
-          </p:cNvPr>
-          <p:cNvSpPr/>
-          <p:nvPr/>
-        </p:nvSpPr>
-        <p:spPr>
-          <a:xfrm>
-            <a:off x="7132320" y="493776"/>
-            <a:ext cx="1554480" cy="182880"/>
-          </a:xfrm>
-          <a:prstGeom prst="rect">
-            <a:avLst/>
-          </a:prstGeom>
-          <a:noFill/>
-          <a:ln/>
-        </p:spPr>
-        <p:txBody>
-          <a:bodyPr wrap="square" lIns="0" tIns="0" rIns="0" bIns="0" rtlCol="0" anchor="ctr"/>
-          <a:lstStyle/>
-          <a:p>
-            <a:pPr marL="0" indent="0" algn="r">
-              <a:buNone/>
-            </a:pPr>
-            <a:r>
-              <a:rPr lang="en-US" sz="800" dirty="0">
-                <a:solidFill>
-                  <a:srgbClr val="94A3B8"/>
-                </a:solidFill>
-              </a:rPr>
-              <a:t>Rachel Mizer</a:t>
-            </a:r>
-            <a:endParaRPr lang="en-US" sz="800" dirty="0"/>
-          </a:p>
-        </p:txBody>
-      </p:sp>
-      <p:sp>
-        <p:nvSpPr>
-          <p:cNvPr id="5" name="Text 3">
-            <a:extLst>
-              <a:ext uri="{FF2B5EF4-FFF2-40B4-BE49-F238E27FC236}">
-                <a16:creationId xmlns:a16="http://schemas.microsoft.com/office/drawing/2014/main" id="{C1FFC6B1-0702-0D9E-C770-64B80A4F3810}"/>
-              </a:ext>
-            </a:extLst>
-          </p:cNvPr>
-          <p:cNvSpPr/>
-          <p:nvPr/>
-        </p:nvSpPr>
-        <p:spPr>
-          <a:xfrm>
-            <a:off x="7132320" y="658368"/>
-            <a:ext cx="1554480" cy="146304"/>
-          </a:xfrm>
-          <a:prstGeom prst="rect">
-            <a:avLst/>
-          </a:prstGeom>
-          <a:noFill/>
-          <a:ln/>
-        </p:spPr>
-        <p:txBody>
-          <a:bodyPr wrap="square" lIns="0" tIns="0" rIns="0" bIns="0" rtlCol="0" anchor="ctr"/>
-          <a:lstStyle/>
-          <a:p>
-            <a:pPr marL="0" indent="0" algn="r">
-              <a:buNone/>
-            </a:pPr>
-            <a:r>
-              <a:rPr lang="en-US" sz="700" b="1" dirty="0">
-                <a:solidFill>
-                  <a:srgbClr val="1D9E75"/>
-                </a:solidFill>
-              </a:rPr>
-              <a:t>Frontend &amp; UI/UX Lead</a:t>
-            </a:r>
-            <a:endParaRPr lang="en-US" sz="700" dirty="0"/>
-          </a:p>
-        </p:txBody>
-      </p:sp>
-      <p:sp>
-        <p:nvSpPr>
-          <p:cNvPr id="6" name="Shape 4">
-            <a:extLst>
-              <a:ext uri="{FF2B5EF4-FFF2-40B4-BE49-F238E27FC236}">
-                <a16:creationId xmlns:a16="http://schemas.microsoft.com/office/drawing/2014/main" id="{5E9ED67E-F45A-8B1D-7770-63BD7DCCC72F}"/>
-              </a:ext>
-            </a:extLst>
-          </p:cNvPr>
-          <p:cNvSpPr/>
-          <p:nvPr/>
-        </p:nvSpPr>
-        <p:spPr>
-          <a:xfrm>
-            <a:off x="457200" y="1024128"/>
-            <a:ext cx="8229600" cy="10973"/>
-          </a:xfrm>
-          <a:prstGeom prst="rect">
-            <a:avLst/>
-          </a:prstGeom>
-          <a:solidFill>
-            <a:srgbClr val="D8DCE5"/>
-          </a:solidFill>
-          <a:ln w="12700">
-            <a:solidFill>
-              <a:srgbClr val="D8DCE5"/>
-            </a:solidFill>
-            <a:prstDash val="solid"/>
-          </a:ln>
-        </p:spPr>
-        <p:txBody>
-          <a:bodyPr/>
-          <a:lstStyle/>
-          <a:p>
-            <a:endParaRPr lang="en-US"/>
-          </a:p>
-        </p:txBody>
-      </p:sp>
-      <p:sp>
-        <p:nvSpPr>
-          <p:cNvPr id="7" name="Shape 5">
-            <a:extLst>
-              <a:ext uri="{FF2B5EF4-FFF2-40B4-BE49-F238E27FC236}">
-                <a16:creationId xmlns:a16="http://schemas.microsoft.com/office/drawing/2014/main" id="{B23F636C-F194-B1B2-5248-CCA191C36108}"/>
-              </a:ext>
-            </a:extLst>
-          </p:cNvPr>
-          <p:cNvSpPr/>
-          <p:nvPr/>
-        </p:nvSpPr>
-        <p:spPr>
-          <a:xfrm>
-            <a:off x="457200" y="1115568"/>
-            <a:ext cx="4023360" cy="310896"/>
-          </a:xfrm>
-          <a:prstGeom prst="rect">
-            <a:avLst/>
-          </a:prstGeom>
-          <a:solidFill>
-            <a:srgbClr val="00AEEF"/>
-          </a:solidFill>
-          <a:ln w="12700">
-            <a:solidFill>
-              <a:srgbClr val="00AEEF"/>
-            </a:solidFill>
-            <a:prstDash val="solid"/>
-          </a:ln>
-        </p:spPr>
-        <p:txBody>
-          <a:bodyPr/>
-          <a:lstStyle/>
-          <a:p>
-            <a:endParaRPr lang="en-US"/>
-          </a:p>
-        </p:txBody>
-      </p:sp>
-      <p:sp>
-        <p:nvSpPr>
-          <p:cNvPr id="8" name="Text 6">
-            <a:extLst>
-              <a:ext uri="{FF2B5EF4-FFF2-40B4-BE49-F238E27FC236}">
-                <a16:creationId xmlns:a16="http://schemas.microsoft.com/office/drawing/2014/main" id="{56B45CEA-7587-5151-C26A-D31600DFCEC6}"/>
-              </a:ext>
-            </a:extLst>
-          </p:cNvPr>
-          <p:cNvSpPr/>
-          <p:nvPr/>
-        </p:nvSpPr>
-        <p:spPr>
-          <a:xfrm>
-            <a:off x="566928" y="1115568"/>
-            <a:ext cx="3749040" cy="182880"/>
-          </a:xfrm>
-          <a:prstGeom prst="rect">
-            <a:avLst/>
-          </a:prstGeom>
-          <a:noFill/>
-          <a:ln/>
-        </p:spPr>
-        <p:txBody>
-          <a:bodyPr wrap="square" lIns="0" tIns="0" rIns="0" bIns="0" rtlCol="0" anchor="ctr"/>
-          <a:lstStyle/>
-          <a:p>
-            <a:pPr marL="0" indent="0">
-              <a:buNone/>
-            </a:pPr>
-            <a:r>
-              <a:rPr lang="en-US" sz="1200" b="1" dirty="0">
-                <a:solidFill>
-                  <a:srgbClr val="FFFFFF"/>
-                </a:solidFill>
-              </a:rPr>
-              <a:t>Customer Storefront</a:t>
-            </a:r>
-            <a:endParaRPr lang="en-US" sz="1200" dirty="0"/>
-          </a:p>
-        </p:txBody>
-      </p:sp>
-      <p:sp>
-        <p:nvSpPr>
-          <p:cNvPr id="9" name="Text 7">
-            <a:extLst>
-              <a:ext uri="{FF2B5EF4-FFF2-40B4-BE49-F238E27FC236}">
-                <a16:creationId xmlns:a16="http://schemas.microsoft.com/office/drawing/2014/main" id="{EA765D42-820A-09FA-DF64-848172D63AC2}"/>
-              </a:ext>
-            </a:extLst>
-          </p:cNvPr>
-          <p:cNvSpPr/>
-          <p:nvPr/>
-        </p:nvSpPr>
-        <p:spPr>
-          <a:xfrm>
-            <a:off x="566928" y="1280160"/>
-            <a:ext cx="3749040" cy="128016"/>
-          </a:xfrm>
-          <a:prstGeom prst="rect">
-            <a:avLst/>
-          </a:prstGeom>
-          <a:noFill/>
-          <a:ln/>
-        </p:spPr>
-        <p:txBody>
-          <a:bodyPr wrap="square" lIns="0" tIns="0" rIns="0" bIns="0" rtlCol="0" anchor="ctr"/>
-          <a:lstStyle/>
-          <a:p>
-            <a:pPr marL="0" indent="0">
-              <a:buNone/>
-            </a:pPr>
-            <a:r>
-              <a:rPr lang="en-US" sz="750" dirty="0">
-                <a:solidFill>
-                  <a:srgbClr val="CADCFC"/>
-                </a:solidFill>
-              </a:rPr>
-              <a:t>Product browsing · cart · checkout flow</a:t>
-            </a:r>
-            <a:endParaRPr lang="en-US" sz="750" dirty="0"/>
-          </a:p>
-        </p:txBody>
-      </p:sp>
-      <p:sp>
-        <p:nvSpPr>
-          <p:cNvPr id="10" name="Shape 8">
-            <a:extLst>
-              <a:ext uri="{FF2B5EF4-FFF2-40B4-BE49-F238E27FC236}">
-                <a16:creationId xmlns:a16="http://schemas.microsoft.com/office/drawing/2014/main" id="{8C917F27-14DA-8C83-B1A5-E78AA36A60B7}"/>
-              </a:ext>
-            </a:extLst>
-          </p:cNvPr>
-          <p:cNvSpPr/>
-          <p:nvPr/>
-        </p:nvSpPr>
-        <p:spPr>
-          <a:xfrm>
-            <a:off x="457200" y="1463040"/>
-            <a:ext cx="4023360" cy="3291840"/>
-          </a:xfrm>
-          <a:prstGeom prst="rect">
-            <a:avLst/>
-          </a:prstGeom>
-          <a:solidFill>
-            <a:srgbClr val="F0F2F6"/>
-          </a:solidFill>
-          <a:ln w="12700">
-            <a:solidFill>
-              <a:srgbClr val="D8DCE5"/>
-            </a:solidFill>
-            <a:prstDash val="solid"/>
-          </a:ln>
-        </p:spPr>
-        <p:txBody>
-          <a:bodyPr/>
-          <a:lstStyle/>
-          <a:p>
-            <a:endParaRPr lang="en-US"/>
-          </a:p>
-        </p:txBody>
-      </p:sp>
-      <p:sp>
-        <p:nvSpPr>
-          <p:cNvPr id="11" name="Shape 9">
-            <a:extLst>
-              <a:ext uri="{FF2B5EF4-FFF2-40B4-BE49-F238E27FC236}">
-                <a16:creationId xmlns:a16="http://schemas.microsoft.com/office/drawing/2014/main" id="{3FEBC012-4308-97DD-5009-8BF9C19E27C6}"/>
-              </a:ext>
-            </a:extLst>
-          </p:cNvPr>
-          <p:cNvSpPr/>
-          <p:nvPr/>
-        </p:nvSpPr>
-        <p:spPr>
-          <a:xfrm>
-            <a:off x="594360" y="1600200"/>
-            <a:ext cx="3749040" cy="3017520"/>
-          </a:xfrm>
-          <a:prstGeom prst="rect">
-            <a:avLst/>
-          </a:prstGeom>
-          <a:solidFill>
-            <a:srgbClr val="E8EAF0"/>
-          </a:solidFill>
-          <a:ln w="6350">
-            <a:solidFill>
-              <a:srgbClr val="C8CDD8"/>
-            </a:solidFill>
-            <a:prstDash val="dash"/>
-          </a:ln>
-        </p:spPr>
-        <p:txBody>
-          <a:bodyPr/>
-          <a:lstStyle/>
-          <a:p>
-            <a:endParaRPr lang="en-US"/>
-          </a:p>
-        </p:txBody>
-      </p:sp>
-      <p:sp>
-        <p:nvSpPr>
-          <p:cNvPr id="12" name="Text 10">
-            <a:extLst>
-              <a:ext uri="{FF2B5EF4-FFF2-40B4-BE49-F238E27FC236}">
-                <a16:creationId xmlns:a16="http://schemas.microsoft.com/office/drawing/2014/main" id="{2E5D196A-7700-476E-E796-63DE69745D2F}"/>
-              </a:ext>
-            </a:extLst>
-          </p:cNvPr>
-          <p:cNvSpPr/>
-          <p:nvPr/>
-        </p:nvSpPr>
-        <p:spPr>
-          <a:xfrm>
-            <a:off x="640080" y="2743200"/>
-            <a:ext cx="3657600" cy="457200"/>
-          </a:xfrm>
-          <a:prstGeom prst="rect">
-            <a:avLst/>
-          </a:prstGeom>
-          <a:noFill/>
-          <a:ln/>
-        </p:spPr>
-        <p:txBody>
-          <a:bodyPr wrap="square" lIns="0" tIns="0" rIns="0" bIns="0" rtlCol="0" anchor="ctr"/>
-          <a:lstStyle/>
-          <a:p>
-            <a:pPr marL="0" indent="0" algn="ctr">
-              <a:buNone/>
-            </a:pPr>
-            <a:r>
-              <a:rPr lang="en-US" sz="900" i="1" dirty="0">
-                <a:solidFill>
-                  <a:srgbClr val="94A3B8"/>
-                </a:solidFill>
-              </a:rPr>
-              <a:t>[ Replace with storefront screenshot ]</a:t>
-            </a:r>
-            <a:endParaRPr lang="en-US" sz="900" dirty="0"/>
-          </a:p>
-        </p:txBody>
-      </p:sp>
-      <p:sp>
-        <p:nvSpPr>
-          <p:cNvPr id="13" name="Shape 11">
-            <a:extLst>
-              <a:ext uri="{FF2B5EF4-FFF2-40B4-BE49-F238E27FC236}">
-                <a16:creationId xmlns:a16="http://schemas.microsoft.com/office/drawing/2014/main" id="{340814F4-496C-EAA8-4B0F-7BDA8947CF45}"/>
-              </a:ext>
-            </a:extLst>
-          </p:cNvPr>
-          <p:cNvSpPr/>
-          <p:nvPr/>
-        </p:nvSpPr>
-        <p:spPr>
-          <a:xfrm>
-            <a:off x="3840480" y="1508760"/>
-            <a:ext cx="594360" cy="201168"/>
-          </a:xfrm>
-          <a:prstGeom prst="rect">
-            <a:avLst/>
-          </a:prstGeom>
-          <a:solidFill>
-            <a:srgbClr val="00AEEF"/>
-          </a:solidFill>
-          <a:ln w="12700">
-            <a:solidFill>
-              <a:srgbClr val="00AEEF"/>
-            </a:solidFill>
-            <a:prstDash val="solid"/>
-          </a:ln>
-        </p:spPr>
-        <p:txBody>
-          <a:bodyPr/>
-          <a:lstStyle/>
-          <a:p>
-            <a:endParaRPr lang="en-US"/>
-          </a:p>
-        </p:txBody>
-      </p:sp>
-      <p:sp>
-        <p:nvSpPr>
-          <p:cNvPr id="14" name="Text 12">
-            <a:extLst>
-              <a:ext uri="{FF2B5EF4-FFF2-40B4-BE49-F238E27FC236}">
-                <a16:creationId xmlns:a16="http://schemas.microsoft.com/office/drawing/2014/main" id="{865BE1E0-8588-870B-9933-4749E70EB23D}"/>
-              </a:ext>
-            </a:extLst>
-          </p:cNvPr>
-          <p:cNvSpPr/>
-          <p:nvPr/>
-        </p:nvSpPr>
-        <p:spPr>
-          <a:xfrm>
-            <a:off x="3840480" y="1508760"/>
-            <a:ext cx="594360" cy="201168"/>
-          </a:xfrm>
-          <a:prstGeom prst="rect">
-            <a:avLst/>
-          </a:prstGeom>
-          <a:noFill/>
-          <a:ln/>
-        </p:spPr>
-        <p:txBody>
-          <a:bodyPr wrap="square" lIns="0" tIns="0" rIns="0" bIns="0" rtlCol="0" anchor="ctr"/>
-          <a:lstStyle/>
-          <a:p>
-            <a:pPr marL="0" indent="0" algn="ctr">
-              <a:buNone/>
-            </a:pPr>
-            <a:r>
-              <a:rPr lang="en-US" sz="750" b="1" dirty="0">
-                <a:solidFill>
-                  <a:srgbClr val="FFFFFF"/>
-                </a:solidFill>
-              </a:rPr>
-              <a:t>UI</a:t>
-            </a:r>
-            <a:endParaRPr lang="en-US" sz="750" dirty="0"/>
-          </a:p>
-        </p:txBody>
-      </p:sp>
-      <p:sp>
-        <p:nvSpPr>
-          <p:cNvPr id="15" name="Shape 13">
-            <a:extLst>
-              <a:ext uri="{FF2B5EF4-FFF2-40B4-BE49-F238E27FC236}">
-                <a16:creationId xmlns:a16="http://schemas.microsoft.com/office/drawing/2014/main" id="{9084282C-6F12-24E5-FF4E-5192AA414B44}"/>
-              </a:ext>
-            </a:extLst>
-          </p:cNvPr>
-          <p:cNvSpPr/>
-          <p:nvPr/>
-        </p:nvSpPr>
-        <p:spPr>
-          <a:xfrm>
-            <a:off x="4617720" y="1115568"/>
-            <a:ext cx="4023360" cy="310896"/>
-          </a:xfrm>
-          <a:prstGeom prst="rect">
-            <a:avLst/>
-          </a:prstGeom>
-          <a:solidFill>
-            <a:srgbClr val="1B2A4A"/>
-          </a:solidFill>
-          <a:ln w="12700">
-            <a:solidFill>
-              <a:srgbClr val="1B2A4A"/>
-            </a:solidFill>
-            <a:prstDash val="solid"/>
-          </a:ln>
-        </p:spPr>
-        <p:txBody>
-          <a:bodyPr/>
-          <a:lstStyle/>
-          <a:p>
-            <a:endParaRPr lang="en-US"/>
-          </a:p>
-        </p:txBody>
-      </p:sp>
-      <p:sp>
-        <p:nvSpPr>
-          <p:cNvPr id="16" name="Text 14">
-            <a:extLst>
-              <a:ext uri="{FF2B5EF4-FFF2-40B4-BE49-F238E27FC236}">
-                <a16:creationId xmlns:a16="http://schemas.microsoft.com/office/drawing/2014/main" id="{30A772D7-CD43-7F75-F9BC-DE7CEF34071E}"/>
-              </a:ext>
-            </a:extLst>
-          </p:cNvPr>
-          <p:cNvSpPr/>
-          <p:nvPr/>
-        </p:nvSpPr>
-        <p:spPr>
-          <a:xfrm>
-            <a:off x="4727448" y="1115568"/>
-            <a:ext cx="3749040" cy="182880"/>
-          </a:xfrm>
-          <a:prstGeom prst="rect">
-            <a:avLst/>
-          </a:prstGeom>
-          <a:noFill/>
-          <a:ln/>
-        </p:spPr>
-        <p:txBody>
-          <a:bodyPr wrap="square" lIns="0" tIns="0" rIns="0" bIns="0" rtlCol="0" anchor="ctr"/>
-          <a:lstStyle/>
-          <a:p>
-            <a:pPr marL="0" indent="0">
-              <a:buNone/>
-            </a:pPr>
-            <a:r>
-              <a:rPr lang="en-US" sz="1200" b="1" dirty="0">
-                <a:solidFill>
-                  <a:srgbClr val="FFFFFF"/>
-                </a:solidFill>
-              </a:rPr>
-              <a:t>Admin Dashboard</a:t>
-            </a:r>
-            <a:endParaRPr lang="en-US" sz="1200" dirty="0"/>
-          </a:p>
-        </p:txBody>
-      </p:sp>
-      <p:sp>
-        <p:nvSpPr>
-          <p:cNvPr id="17" name="Text 15">
-            <a:extLst>
-              <a:ext uri="{FF2B5EF4-FFF2-40B4-BE49-F238E27FC236}">
-                <a16:creationId xmlns:a16="http://schemas.microsoft.com/office/drawing/2014/main" id="{A48C89B8-9DEF-7118-AC62-22B947264B8C}"/>
-              </a:ext>
-            </a:extLst>
-          </p:cNvPr>
-          <p:cNvSpPr/>
-          <p:nvPr/>
-        </p:nvSpPr>
-        <p:spPr>
-          <a:xfrm>
-            <a:off x="4727448" y="1280160"/>
-            <a:ext cx="3749040" cy="128016"/>
-          </a:xfrm>
-          <a:prstGeom prst="rect">
-            <a:avLst/>
-          </a:prstGeom>
-          <a:noFill/>
-          <a:ln/>
-        </p:spPr>
-        <p:txBody>
-          <a:bodyPr wrap="square" lIns="0" tIns="0" rIns="0" bIns="0" rtlCol="0" anchor="ctr"/>
-          <a:lstStyle/>
-          <a:p>
-            <a:pPr marL="0" indent="0">
-              <a:buNone/>
-            </a:pPr>
-            <a:r>
-              <a:rPr lang="en-US" sz="750" dirty="0">
-                <a:solidFill>
-                  <a:srgbClr val="CADCFC"/>
-                </a:solidFill>
-              </a:rPr>
-              <a:t>Navigation · role-restricted views · admin layout</a:t>
-            </a:r>
-            <a:endParaRPr lang="en-US" sz="750" dirty="0"/>
-          </a:p>
-        </p:txBody>
-      </p:sp>
-      <p:sp>
-        <p:nvSpPr>
-          <p:cNvPr id="18" name="Shape 16">
-            <a:extLst>
-              <a:ext uri="{FF2B5EF4-FFF2-40B4-BE49-F238E27FC236}">
-                <a16:creationId xmlns:a16="http://schemas.microsoft.com/office/drawing/2014/main" id="{FBB93498-50D6-DAEE-4104-E70F6EC952C6}"/>
-              </a:ext>
-            </a:extLst>
-          </p:cNvPr>
-          <p:cNvSpPr/>
-          <p:nvPr/>
-        </p:nvSpPr>
-        <p:spPr>
-          <a:xfrm>
-            <a:off x="4617720" y="1463040"/>
-            <a:ext cx="4023360" cy="3291840"/>
-          </a:xfrm>
-          <a:prstGeom prst="rect">
-            <a:avLst/>
-          </a:prstGeom>
-          <a:solidFill>
-            <a:srgbClr val="F0F2F6"/>
-          </a:solidFill>
-          <a:ln w="12700">
-            <a:solidFill>
-              <a:srgbClr val="D8DCE5"/>
-            </a:solidFill>
-            <a:prstDash val="solid"/>
-          </a:ln>
-        </p:spPr>
-        <p:txBody>
-          <a:bodyPr/>
-          <a:lstStyle/>
-          <a:p>
-            <a:endParaRPr lang="en-US"/>
-          </a:p>
-        </p:txBody>
-      </p:sp>
-      <p:sp>
-        <p:nvSpPr>
-          <p:cNvPr id="19" name="Shape 17">
-            <a:extLst>
-              <a:ext uri="{FF2B5EF4-FFF2-40B4-BE49-F238E27FC236}">
-                <a16:creationId xmlns:a16="http://schemas.microsoft.com/office/drawing/2014/main" id="{C4117A1C-4189-6FAF-D682-FD687B9E9117}"/>
-              </a:ext>
-            </a:extLst>
-          </p:cNvPr>
-          <p:cNvSpPr/>
-          <p:nvPr/>
-        </p:nvSpPr>
-        <p:spPr>
-          <a:xfrm>
-            <a:off x="4754880" y="1600200"/>
-            <a:ext cx="3749040" cy="3017520"/>
-          </a:xfrm>
-          <a:prstGeom prst="rect">
-            <a:avLst/>
-          </a:prstGeom>
-          <a:solidFill>
-            <a:srgbClr val="E8EAF0"/>
-          </a:solidFill>
-          <a:ln w="6350">
-            <a:solidFill>
-              <a:srgbClr val="C8CDD8"/>
-            </a:solidFill>
-            <a:prstDash val="dash"/>
-          </a:ln>
-        </p:spPr>
-        <p:txBody>
-          <a:bodyPr/>
-          <a:lstStyle/>
-          <a:p>
-            <a:endParaRPr lang="en-US"/>
-          </a:p>
-        </p:txBody>
-      </p:sp>
-      <p:sp>
-        <p:nvSpPr>
-          <p:cNvPr id="20" name="Text 18">
-            <a:extLst>
-              <a:ext uri="{FF2B5EF4-FFF2-40B4-BE49-F238E27FC236}">
-                <a16:creationId xmlns:a16="http://schemas.microsoft.com/office/drawing/2014/main" id="{63063F1F-B93E-FB4D-A89B-E5C82E0F0364}"/>
-              </a:ext>
-            </a:extLst>
-          </p:cNvPr>
-          <p:cNvSpPr/>
-          <p:nvPr/>
-        </p:nvSpPr>
-        <p:spPr>
-          <a:xfrm>
-            <a:off x="4800600" y="2743200"/>
-            <a:ext cx="3657600" cy="457200"/>
-          </a:xfrm>
-          <a:prstGeom prst="rect">
-            <a:avLst/>
-          </a:prstGeom>
-          <a:noFill/>
-          <a:ln/>
-        </p:spPr>
-        <p:txBody>
-          <a:bodyPr wrap="square" lIns="0" tIns="0" rIns="0" bIns="0" rtlCol="0" anchor="ctr"/>
-          <a:lstStyle/>
-          <a:p>
-            <a:pPr marL="0" indent="0" algn="ctr">
-              <a:buNone/>
-            </a:pPr>
-            <a:r>
-              <a:rPr lang="en-US" sz="900" i="1" dirty="0">
-                <a:solidFill>
-                  <a:srgbClr val="94A3B8"/>
-                </a:solidFill>
-              </a:rPr>
-              <a:t>[ Replace with admin dashboard screenshot ]</a:t>
-            </a:r>
-            <a:endParaRPr lang="en-US" sz="900" dirty="0"/>
-          </a:p>
-        </p:txBody>
-      </p:sp>
-      <p:sp>
-        <p:nvSpPr>
-          <p:cNvPr id="21" name="Shape 19">
-            <a:extLst>
-              <a:ext uri="{FF2B5EF4-FFF2-40B4-BE49-F238E27FC236}">
-                <a16:creationId xmlns:a16="http://schemas.microsoft.com/office/drawing/2014/main" id="{218ECAA6-03F3-57E4-E01C-50B74917703E}"/>
-              </a:ext>
-            </a:extLst>
-          </p:cNvPr>
-          <p:cNvSpPr/>
-          <p:nvPr/>
-        </p:nvSpPr>
-        <p:spPr>
-          <a:xfrm>
-            <a:off x="8001000" y="1508760"/>
-            <a:ext cx="594360" cy="201168"/>
-          </a:xfrm>
-          <a:prstGeom prst="rect">
-            <a:avLst/>
-          </a:prstGeom>
-          <a:solidFill>
-            <a:srgbClr val="1B2A4A"/>
-          </a:solidFill>
-          <a:ln w="12700">
-            <a:solidFill>
-              <a:srgbClr val="1B2A4A"/>
-            </a:solidFill>
-            <a:prstDash val="solid"/>
-          </a:ln>
-        </p:spPr>
-        <p:txBody>
-          <a:bodyPr/>
-          <a:lstStyle/>
-          <a:p>
-            <a:endParaRPr lang="en-US"/>
-          </a:p>
-        </p:txBody>
-      </p:sp>
-      <p:sp>
-        <p:nvSpPr>
-          <p:cNvPr id="22" name="Text 20">
-            <a:extLst>
-              <a:ext uri="{FF2B5EF4-FFF2-40B4-BE49-F238E27FC236}">
-                <a16:creationId xmlns:a16="http://schemas.microsoft.com/office/drawing/2014/main" id="{BF22A46F-730B-7A46-5FC8-065F292800DB}"/>
-              </a:ext>
-            </a:extLst>
-          </p:cNvPr>
-          <p:cNvSpPr/>
-          <p:nvPr/>
-        </p:nvSpPr>
-        <p:spPr>
-          <a:xfrm>
-            <a:off x="8001000" y="1508760"/>
-            <a:ext cx="594360" cy="201168"/>
-          </a:xfrm>
-          <a:prstGeom prst="rect">
-            <a:avLst/>
-          </a:prstGeom>
-          <a:noFill/>
-          <a:ln/>
-        </p:spPr>
-        <p:txBody>
-          <a:bodyPr wrap="square" lIns="0" tIns="0" rIns="0" bIns="0" rtlCol="0" anchor="ctr"/>
-          <a:lstStyle/>
-          <a:p>
-            <a:pPr marL="0" indent="0" algn="ctr">
-              <a:buNone/>
-            </a:pPr>
-            <a:r>
-              <a:rPr lang="en-US" sz="750" b="1" dirty="0">
-                <a:solidFill>
-                  <a:srgbClr val="FFFFFF"/>
-                </a:solidFill>
-              </a:rPr>
-              <a:t>UI</a:t>
-            </a:r>
-            <a:endParaRPr lang="en-US" sz="750" dirty="0"/>
-          </a:p>
-        </p:txBody>
-      </p:sp>
-      <p:sp>
-        <p:nvSpPr>
-          <p:cNvPr id="23" name="Shape 21">
-            <a:extLst>
-              <a:ext uri="{FF2B5EF4-FFF2-40B4-BE49-F238E27FC236}">
-                <a16:creationId xmlns:a16="http://schemas.microsoft.com/office/drawing/2014/main" id="{FCCCEEE9-7BE8-F449-BE69-5C3CBEA17F51}"/>
-              </a:ext>
-            </a:extLst>
-          </p:cNvPr>
-          <p:cNvSpPr/>
-          <p:nvPr/>
-        </p:nvSpPr>
-        <p:spPr>
-          <a:xfrm>
-            <a:off x="457200" y="4828032"/>
-            <a:ext cx="8229600" cy="201168"/>
-          </a:xfrm>
-          <a:prstGeom prst="rect">
-            <a:avLst/>
-          </a:prstGeom>
-          <a:solidFill>
-            <a:srgbClr val="F8FAFC"/>
-          </a:solidFill>
-          <a:ln w="6350">
-            <a:solidFill>
-              <a:srgbClr val="D8DCE5"/>
-            </a:solidFill>
-            <a:prstDash val="solid"/>
-          </a:ln>
-        </p:spPr>
-        <p:txBody>
-          <a:bodyPr/>
-          <a:lstStyle/>
-          <a:p>
-            <a:endParaRPr lang="en-US"/>
-          </a:p>
-        </p:txBody>
-      </p:sp>
-      <p:sp>
-        <p:nvSpPr>
-          <p:cNvPr id="24" name="Text 22">
-            <a:extLst>
-              <a:ext uri="{FF2B5EF4-FFF2-40B4-BE49-F238E27FC236}">
-                <a16:creationId xmlns:a16="http://schemas.microsoft.com/office/drawing/2014/main" id="{9CEA55B8-302A-302A-86F4-5D9F250A11EB}"/>
-              </a:ext>
-            </a:extLst>
-          </p:cNvPr>
-          <p:cNvSpPr/>
-          <p:nvPr/>
-        </p:nvSpPr>
-        <p:spPr>
-          <a:xfrm>
-            <a:off x="566928" y="4828032"/>
-            <a:ext cx="8010144" cy="201168"/>
-          </a:xfrm>
-          <a:prstGeom prst="rect">
-            <a:avLst/>
-          </a:prstGeom>
-          <a:noFill/>
-          <a:ln/>
-        </p:spPr>
-        <p:txBody>
-          <a:bodyPr wrap="square" lIns="0" tIns="0" rIns="0" bIns="0" rtlCol="0" anchor="ctr"/>
-          <a:lstStyle/>
-          <a:p>
-            <a:pPr marL="0" indent="0" algn="ctr">
-              <a:buNone/>
-            </a:pPr>
-            <a:r>
-              <a:rPr lang="en-US" sz="750" dirty="0">
-                <a:solidFill>
-                  <a:srgbClr val="475569"/>
-                </a:solidFill>
-              </a:rPr>
-              <a:t>React SPA  ·  SimpleJWT authentication  ·  Role-enforced routing  ·  Component-based architecture</a:t>
-            </a:r>
-            <a:endParaRPr lang="en-US" sz="750" dirty="0"/>
-          </a:p>
-        </p:txBody>
-      </p:sp>
-    </p:spTree>
-    <p:extLst>
-      <p:ext uri="{BB962C8B-B14F-4D97-AF65-F5344CB8AC3E}">
-        <p14:creationId xmlns:p14="http://schemas.microsoft.com/office/powerpoint/2010/main" val="3381649134"/>
-      </p:ext>
-    </p:extLst>
-  </p:cSld>
-  <p:clrMapOvr>
-    <a:masterClrMapping/>
-  </p:clrMapOvr>
-</p:sld>
-</file>
-
-<file path=ppt/slides/slide9.xml><?xml version="1.0" encoding="utf-8"?>
-<p:sld xmlns:a="http://schemas.openxmlformats.org/drawingml/2006/main" xmlns:r="http://schemas.openxmlformats.org/officeDocument/2006/relationships" xmlns:p="http://schemas.openxmlformats.org/presentationml/2006/main">
-  <p:cSld>
-    <p:bg>
-      <p:bgPr>
-        <a:solidFill>
-          <a:srgbClr val="F4F6FB"/>
-        </a:solidFill>
-        <a:effectLst/>
-      </p:bgPr>
-    </p:bg>
-    <p:spTree>
-      <p:nvGrpSpPr>
-        <p:cNvPr id="1" name="">
-          <a:extLst>
-            <a:ext uri="{FF2B5EF4-FFF2-40B4-BE49-F238E27FC236}">
-              <a16:creationId xmlns:a16="http://schemas.microsoft.com/office/drawing/2014/main" id="{D457BC8D-BFBA-CCF8-24BD-47EF05531F3E}"/>
-            </a:ext>
-          </a:extLst>
-        </p:cNvPr>
-        <p:cNvGrpSpPr/>
-        <p:nvPr/>
-      </p:nvGrpSpPr>
-      <p:grpSpPr>
-        <a:xfrm>
-          <a:off x="0" y="0"/>
-          <a:ext cx="0" cy="0"/>
-          <a:chOff x="0" y="0"/>
-          <a:chExt cx="0" cy="0"/>
-        </a:xfrm>
-      </p:grpSpPr>
-      <p:sp>
-        <p:nvSpPr>
-          <p:cNvPr id="2" name="Text 0">
-            <a:extLst>
-              <a:ext uri="{FF2B5EF4-FFF2-40B4-BE49-F238E27FC236}">
-                <a16:creationId xmlns:a16="http://schemas.microsoft.com/office/drawing/2014/main" id="{146EC5CC-763D-01E7-C0C4-064543FD66B8}"/>
-              </a:ext>
-            </a:extLst>
-          </p:cNvPr>
-          <p:cNvSpPr/>
-          <p:nvPr/>
-        </p:nvSpPr>
-        <p:spPr>
-          <a:xfrm>
-            <a:off x="457200" y="256032"/>
-            <a:ext cx="5486400" cy="182880"/>
-          </a:xfrm>
-          <a:prstGeom prst="rect">
-            <a:avLst/>
-          </a:prstGeom>
-          <a:noFill/>
-          <a:ln/>
-        </p:spPr>
-        <p:txBody>
-          <a:bodyPr wrap="square" lIns="0" tIns="0" rIns="0" bIns="0" rtlCol="0" anchor="ctr"/>
-          <a:lstStyle/>
-          <a:p>
-            <a:pPr marL="0" indent="0" algn="l">
-              <a:buNone/>
-            </a:pPr>
-            <a:r>
-              <a:rPr lang="en-US" sz="850" b="1" kern="0" spc="300" dirty="0">
-                <a:solidFill>
-                  <a:srgbClr val="1D9E75"/>
-                </a:solidFill>
-              </a:rPr>
-              <a:t>FRONTEND &amp; USER EXPERIENCE</a:t>
-            </a:r>
-            <a:endParaRPr lang="en-US" sz="850" dirty="0"/>
-          </a:p>
-        </p:txBody>
-      </p:sp>
-      <p:sp>
-        <p:nvSpPr>
-          <p:cNvPr id="3" name="Text 1">
-            <a:extLst>
-              <a:ext uri="{FF2B5EF4-FFF2-40B4-BE49-F238E27FC236}">
-                <a16:creationId xmlns:a16="http://schemas.microsoft.com/office/drawing/2014/main" id="{9C905C9F-C73E-C869-E79F-756CBD393CAA}"/>
-              </a:ext>
-            </a:extLst>
-          </p:cNvPr>
-          <p:cNvSpPr/>
-          <p:nvPr/>
-        </p:nvSpPr>
-        <p:spPr>
-          <a:xfrm>
-            <a:off x="457200" y="457200"/>
-            <a:ext cx="6858000" cy="502920"/>
-          </a:xfrm>
-          <a:prstGeom prst="rect">
-            <a:avLst/>
-          </a:prstGeom>
-          <a:noFill/>
-          <a:ln/>
-        </p:spPr>
-        <p:txBody>
-          <a:bodyPr wrap="square" lIns="0" tIns="0" rIns="0" bIns="0" rtlCol="0" anchor="ctr"/>
-          <a:lstStyle/>
-          <a:p>
-            <a:pPr marL="0" indent="0" algn="l">
-              <a:buNone/>
-            </a:pPr>
-            <a:r>
-              <a:rPr lang="en-US" sz="3400" b="1" dirty="0">
-                <a:solidFill>
-                  <a:srgbClr val="0D1B3E"/>
-                </a:solidFill>
-                <a:latin typeface="Calibri" pitchFamily="34" charset="0"/>
-                <a:ea typeface="Calibri" pitchFamily="34" charset="-122"/>
-                <a:cs typeface="Calibri" pitchFamily="34" charset="-120"/>
-              </a:rPr>
-              <a:t>In Action</a:t>
-            </a:r>
-            <a:endParaRPr lang="en-US" sz="3400" dirty="0"/>
-          </a:p>
-        </p:txBody>
-      </p:sp>
-      <p:sp>
-        <p:nvSpPr>
-          <p:cNvPr id="4" name="Text 2">
-            <a:extLst>
-              <a:ext uri="{FF2B5EF4-FFF2-40B4-BE49-F238E27FC236}">
-                <a16:creationId xmlns:a16="http://schemas.microsoft.com/office/drawing/2014/main" id="{BC428D9C-7277-C59B-9075-E55F8DC87A9F}"/>
-              </a:ext>
-            </a:extLst>
-          </p:cNvPr>
-          <p:cNvSpPr/>
-          <p:nvPr/>
-        </p:nvSpPr>
-        <p:spPr>
-          <a:xfrm>
-            <a:off x="7132320" y="493776"/>
-            <a:ext cx="1554480" cy="182880"/>
-          </a:xfrm>
-          <a:prstGeom prst="rect">
-            <a:avLst/>
-          </a:prstGeom>
-          <a:noFill/>
-          <a:ln/>
-        </p:spPr>
-        <p:txBody>
-          <a:bodyPr wrap="square" lIns="0" tIns="0" rIns="0" bIns="0" rtlCol="0" anchor="ctr"/>
-          <a:lstStyle/>
-          <a:p>
-            <a:pPr marL="0" indent="0" algn="r">
-              <a:buNone/>
-            </a:pPr>
-            <a:r>
-              <a:rPr lang="en-US" sz="800" dirty="0">
-                <a:solidFill>
-                  <a:srgbClr val="94A3B8"/>
-                </a:solidFill>
-              </a:rPr>
-              <a:t>Rachel Mizer</a:t>
-            </a:r>
-            <a:endParaRPr lang="en-US" sz="800" dirty="0"/>
-          </a:p>
-        </p:txBody>
-      </p:sp>
-      <p:sp>
-        <p:nvSpPr>
-          <p:cNvPr id="5" name="Text 3">
-            <a:extLst>
-              <a:ext uri="{FF2B5EF4-FFF2-40B4-BE49-F238E27FC236}">
-                <a16:creationId xmlns:a16="http://schemas.microsoft.com/office/drawing/2014/main" id="{E5959F35-87FB-6DB4-717A-438CD9105E79}"/>
-              </a:ext>
-            </a:extLst>
-          </p:cNvPr>
-          <p:cNvSpPr/>
-          <p:nvPr/>
-        </p:nvSpPr>
-        <p:spPr>
-          <a:xfrm>
-            <a:off x="7132320" y="658368"/>
-            <a:ext cx="1554480" cy="146304"/>
-          </a:xfrm>
-          <a:prstGeom prst="rect">
-            <a:avLst/>
-          </a:prstGeom>
-          <a:noFill/>
-          <a:ln/>
-        </p:spPr>
-        <p:txBody>
-          <a:bodyPr wrap="square" lIns="0" tIns="0" rIns="0" bIns="0" rtlCol="0" anchor="ctr"/>
-          <a:lstStyle/>
-          <a:p>
-            <a:pPr marL="0" indent="0" algn="r">
-              <a:buNone/>
-            </a:pPr>
-            <a:r>
-              <a:rPr lang="en-US" sz="700" b="1" dirty="0">
-                <a:solidFill>
-                  <a:srgbClr val="1D9E75"/>
-                </a:solidFill>
-              </a:rPr>
-              <a:t>Frontend &amp; UI/UX Lead</a:t>
-            </a:r>
-            <a:endParaRPr lang="en-US" sz="700" dirty="0"/>
-          </a:p>
-        </p:txBody>
-      </p:sp>
-      <p:sp>
-        <p:nvSpPr>
-          <p:cNvPr id="6" name="Shape 4">
-            <a:extLst>
-              <a:ext uri="{FF2B5EF4-FFF2-40B4-BE49-F238E27FC236}">
-                <a16:creationId xmlns:a16="http://schemas.microsoft.com/office/drawing/2014/main" id="{CA98978A-6AEE-11F9-36B0-36CD29514E22}"/>
-              </a:ext>
-            </a:extLst>
-          </p:cNvPr>
-          <p:cNvSpPr/>
-          <p:nvPr/>
-        </p:nvSpPr>
-        <p:spPr>
-          <a:xfrm>
-            <a:off x="457200" y="1024128"/>
-            <a:ext cx="8229600" cy="10973"/>
-          </a:xfrm>
-          <a:prstGeom prst="rect">
-            <a:avLst/>
-          </a:prstGeom>
-          <a:solidFill>
-            <a:srgbClr val="D8DCE5"/>
-          </a:solidFill>
-          <a:ln w="12700">
-            <a:solidFill>
-              <a:srgbClr val="D8DCE5"/>
-            </a:solidFill>
-            <a:prstDash val="solid"/>
-          </a:ln>
-        </p:spPr>
-        <p:txBody>
-          <a:bodyPr/>
-          <a:lstStyle/>
-          <a:p>
-            <a:endParaRPr lang="en-US"/>
-          </a:p>
-        </p:txBody>
-      </p:sp>
-      <p:sp>
-        <p:nvSpPr>
-          <p:cNvPr id="7" name="Shape 5">
-            <a:extLst>
-              <a:ext uri="{FF2B5EF4-FFF2-40B4-BE49-F238E27FC236}">
-                <a16:creationId xmlns:a16="http://schemas.microsoft.com/office/drawing/2014/main" id="{E6F04FCE-5078-FE1D-61C2-CE148AB9F06B}"/>
-              </a:ext>
-            </a:extLst>
-          </p:cNvPr>
-          <p:cNvSpPr/>
-          <p:nvPr/>
-        </p:nvSpPr>
-        <p:spPr>
-          <a:xfrm>
-            <a:off x="457200" y="1115568"/>
-            <a:ext cx="4023360" cy="310896"/>
-          </a:xfrm>
-          <a:prstGeom prst="rect">
-            <a:avLst/>
-          </a:prstGeom>
-          <a:solidFill>
-            <a:srgbClr val="00AEEF"/>
-          </a:solidFill>
-          <a:ln w="12700">
-            <a:solidFill>
-              <a:srgbClr val="00AEEF"/>
-            </a:solidFill>
-            <a:prstDash val="solid"/>
-          </a:ln>
-        </p:spPr>
-        <p:txBody>
-          <a:bodyPr/>
-          <a:lstStyle/>
-          <a:p>
-            <a:endParaRPr lang="en-US"/>
-          </a:p>
-        </p:txBody>
-      </p:sp>
-      <p:sp>
-        <p:nvSpPr>
-          <p:cNvPr id="8" name="Text 6">
-            <a:extLst>
-              <a:ext uri="{FF2B5EF4-FFF2-40B4-BE49-F238E27FC236}">
-                <a16:creationId xmlns:a16="http://schemas.microsoft.com/office/drawing/2014/main" id="{1EAFD97D-9CE5-261C-E95A-7F1F11EF29AC}"/>
-              </a:ext>
-            </a:extLst>
-          </p:cNvPr>
-          <p:cNvSpPr/>
-          <p:nvPr/>
-        </p:nvSpPr>
-        <p:spPr>
-          <a:xfrm>
-            <a:off x="566928" y="1115568"/>
-            <a:ext cx="3749040" cy="182880"/>
-          </a:xfrm>
-          <a:prstGeom prst="rect">
-            <a:avLst/>
-          </a:prstGeom>
-          <a:noFill/>
-          <a:ln/>
-        </p:spPr>
-        <p:txBody>
-          <a:bodyPr wrap="square" lIns="0" tIns="0" rIns="0" bIns="0" rtlCol="0" anchor="ctr"/>
-          <a:lstStyle/>
-          <a:p>
-            <a:pPr marL="0" indent="0">
-              <a:buNone/>
-            </a:pPr>
-            <a:r>
-              <a:rPr lang="en-US" sz="1200" b="1" dirty="0">
-                <a:solidFill>
-                  <a:srgbClr val="FFFFFF"/>
-                </a:solidFill>
-              </a:rPr>
-              <a:t>Customer Profile</a:t>
-            </a:r>
-            <a:endParaRPr lang="en-US" sz="1200" dirty="0"/>
-          </a:p>
-        </p:txBody>
-      </p:sp>
-      <p:sp>
-        <p:nvSpPr>
-          <p:cNvPr id="9" name="Text 7">
-            <a:extLst>
-              <a:ext uri="{FF2B5EF4-FFF2-40B4-BE49-F238E27FC236}">
-                <a16:creationId xmlns:a16="http://schemas.microsoft.com/office/drawing/2014/main" id="{54876047-AC9D-617B-8BF7-8E37EC4C737B}"/>
-              </a:ext>
-            </a:extLst>
-          </p:cNvPr>
-          <p:cNvSpPr/>
-          <p:nvPr/>
-        </p:nvSpPr>
-        <p:spPr>
-          <a:xfrm>
-            <a:off x="566928" y="1280160"/>
-            <a:ext cx="3749040" cy="128016"/>
-          </a:xfrm>
-          <a:prstGeom prst="rect">
-            <a:avLst/>
-          </a:prstGeom>
-          <a:noFill/>
-          <a:ln/>
-        </p:spPr>
-        <p:txBody>
-          <a:bodyPr wrap="square" lIns="0" tIns="0" rIns="0" bIns="0" rtlCol="0" anchor="ctr"/>
-          <a:lstStyle/>
-          <a:p>
-            <a:pPr marL="0" indent="0">
-              <a:buNone/>
-            </a:pPr>
-            <a:r>
-              <a:rPr lang="en-US" sz="750" dirty="0">
-                <a:solidFill>
-                  <a:srgbClr val="CADCFC"/>
-                </a:solidFill>
-              </a:rPr>
-              <a:t>Account management · order history · profile editing</a:t>
-            </a:r>
-            <a:endParaRPr lang="en-US" sz="750" dirty="0"/>
-          </a:p>
-        </p:txBody>
-      </p:sp>
-      <p:sp>
-        <p:nvSpPr>
-          <p:cNvPr id="10" name="Shape 8">
-            <a:extLst>
-              <a:ext uri="{FF2B5EF4-FFF2-40B4-BE49-F238E27FC236}">
-                <a16:creationId xmlns:a16="http://schemas.microsoft.com/office/drawing/2014/main" id="{9576614E-FABB-25E3-41EE-F3210F876B1C}"/>
-              </a:ext>
-            </a:extLst>
-          </p:cNvPr>
-          <p:cNvSpPr/>
-          <p:nvPr/>
-        </p:nvSpPr>
-        <p:spPr>
-          <a:xfrm>
-            <a:off x="457200" y="1463040"/>
-            <a:ext cx="4023360" cy="3291840"/>
-          </a:xfrm>
-          <a:prstGeom prst="rect">
-            <a:avLst/>
-          </a:prstGeom>
-          <a:solidFill>
-            <a:srgbClr val="F0F2F6"/>
-          </a:solidFill>
-          <a:ln w="12700">
-            <a:solidFill>
-              <a:srgbClr val="D8DCE5"/>
-            </a:solidFill>
-            <a:prstDash val="solid"/>
-          </a:ln>
-        </p:spPr>
-        <p:txBody>
-          <a:bodyPr/>
-          <a:lstStyle/>
-          <a:p>
-            <a:endParaRPr lang="en-US"/>
-          </a:p>
-        </p:txBody>
-      </p:sp>
-      <p:sp>
-        <p:nvSpPr>
-          <p:cNvPr id="11" name="Shape 9">
-            <a:extLst>
-              <a:ext uri="{FF2B5EF4-FFF2-40B4-BE49-F238E27FC236}">
-                <a16:creationId xmlns:a16="http://schemas.microsoft.com/office/drawing/2014/main" id="{917259BF-657C-8EE6-96BA-05357B738E0D}"/>
-              </a:ext>
-            </a:extLst>
-          </p:cNvPr>
-          <p:cNvSpPr/>
-          <p:nvPr/>
-        </p:nvSpPr>
-        <p:spPr>
-          <a:xfrm>
-            <a:off x="594360" y="1600200"/>
-            <a:ext cx="3749040" cy="3017520"/>
-          </a:xfrm>
-          <a:prstGeom prst="rect">
-            <a:avLst/>
-          </a:prstGeom>
-          <a:solidFill>
-            <a:srgbClr val="E8EAF0"/>
-          </a:solidFill>
-          <a:ln w="6350">
-            <a:solidFill>
-              <a:srgbClr val="C8CDD8"/>
-            </a:solidFill>
-            <a:prstDash val="dash"/>
-          </a:ln>
-        </p:spPr>
-        <p:txBody>
-          <a:bodyPr/>
-          <a:lstStyle/>
-          <a:p>
-            <a:endParaRPr lang="en-US"/>
-          </a:p>
-        </p:txBody>
-      </p:sp>
-      <p:sp>
-        <p:nvSpPr>
-          <p:cNvPr id="12" name="Text 10">
-            <a:extLst>
-              <a:ext uri="{FF2B5EF4-FFF2-40B4-BE49-F238E27FC236}">
-                <a16:creationId xmlns:a16="http://schemas.microsoft.com/office/drawing/2014/main" id="{13282C6B-E67A-03AC-345A-AE28AD86EC5A}"/>
-              </a:ext>
-            </a:extLst>
-          </p:cNvPr>
-          <p:cNvSpPr/>
-          <p:nvPr/>
-        </p:nvSpPr>
-        <p:spPr>
-          <a:xfrm>
-            <a:off x="640080" y="2743200"/>
-            <a:ext cx="3657600" cy="457200"/>
-          </a:xfrm>
-          <a:prstGeom prst="rect">
-            <a:avLst/>
-          </a:prstGeom>
-          <a:noFill/>
-          <a:ln/>
-        </p:spPr>
-        <p:txBody>
-          <a:bodyPr wrap="square" lIns="0" tIns="0" rIns="0" bIns="0" rtlCol="0" anchor="ctr"/>
-          <a:lstStyle/>
-          <a:p>
-            <a:pPr marL="0" indent="0" algn="ctr">
-              <a:buNone/>
-            </a:pPr>
-            <a:r>
-              <a:rPr lang="en-US" sz="900" i="1" dirty="0">
-                <a:solidFill>
-                  <a:srgbClr val="94A3B8"/>
-                </a:solidFill>
-              </a:rPr>
-              <a:t>[ Replace with customer profile screenshot ]</a:t>
-            </a:r>
-            <a:endParaRPr lang="en-US" sz="900" dirty="0"/>
-          </a:p>
-        </p:txBody>
-      </p:sp>
-      <p:sp>
-        <p:nvSpPr>
-          <p:cNvPr id="13" name="Shape 11">
-            <a:extLst>
-              <a:ext uri="{FF2B5EF4-FFF2-40B4-BE49-F238E27FC236}">
-                <a16:creationId xmlns:a16="http://schemas.microsoft.com/office/drawing/2014/main" id="{E806DC52-004B-0DC6-C0F7-08DEB3CAC32F}"/>
-              </a:ext>
-            </a:extLst>
-          </p:cNvPr>
-          <p:cNvSpPr/>
-          <p:nvPr/>
-        </p:nvSpPr>
-        <p:spPr>
-          <a:xfrm>
-            <a:off x="3840480" y="1508760"/>
-            <a:ext cx="594360" cy="201168"/>
-          </a:xfrm>
-          <a:prstGeom prst="rect">
-            <a:avLst/>
-          </a:prstGeom>
-          <a:solidFill>
-            <a:srgbClr val="00AEEF"/>
-          </a:solidFill>
-          <a:ln w="12700">
-            <a:solidFill>
-              <a:srgbClr val="00AEEF"/>
-            </a:solidFill>
-            <a:prstDash val="solid"/>
-          </a:ln>
-        </p:spPr>
-        <p:txBody>
-          <a:bodyPr/>
-          <a:lstStyle/>
-          <a:p>
-            <a:endParaRPr lang="en-US"/>
-          </a:p>
-        </p:txBody>
-      </p:sp>
-      <p:sp>
-        <p:nvSpPr>
-          <p:cNvPr id="14" name="Text 12">
-            <a:extLst>
-              <a:ext uri="{FF2B5EF4-FFF2-40B4-BE49-F238E27FC236}">
-                <a16:creationId xmlns:a16="http://schemas.microsoft.com/office/drawing/2014/main" id="{52AAD1CF-74BB-B14C-3E05-6517FA0E2688}"/>
-              </a:ext>
-            </a:extLst>
-          </p:cNvPr>
-          <p:cNvSpPr/>
-          <p:nvPr/>
-        </p:nvSpPr>
-        <p:spPr>
-          <a:xfrm>
-            <a:off x="3840480" y="1508760"/>
-            <a:ext cx="594360" cy="201168"/>
-          </a:xfrm>
-          <a:prstGeom prst="rect">
-            <a:avLst/>
-          </a:prstGeom>
-          <a:noFill/>
-          <a:ln/>
-        </p:spPr>
-        <p:txBody>
-          <a:bodyPr wrap="square" lIns="0" tIns="0" rIns="0" bIns="0" rtlCol="0" anchor="ctr"/>
-          <a:lstStyle/>
-          <a:p>
-            <a:pPr marL="0" indent="0" algn="ctr">
-              <a:buNone/>
-            </a:pPr>
-            <a:r>
-              <a:rPr lang="en-US" sz="750" b="1" dirty="0">
-                <a:solidFill>
-                  <a:srgbClr val="FFFFFF"/>
-                </a:solidFill>
-              </a:rPr>
-              <a:t>UI</a:t>
-            </a:r>
-            <a:endParaRPr lang="en-US" sz="750" dirty="0"/>
-          </a:p>
-        </p:txBody>
-      </p:sp>
-      <p:sp>
-        <p:nvSpPr>
-          <p:cNvPr id="15" name="Shape 13">
-            <a:extLst>
-              <a:ext uri="{FF2B5EF4-FFF2-40B4-BE49-F238E27FC236}">
-                <a16:creationId xmlns:a16="http://schemas.microsoft.com/office/drawing/2014/main" id="{C33899B5-0D41-059C-FAC1-16B8F779C19B}"/>
-              </a:ext>
-            </a:extLst>
-          </p:cNvPr>
-          <p:cNvSpPr/>
-          <p:nvPr/>
-        </p:nvSpPr>
-        <p:spPr>
-          <a:xfrm>
-            <a:off x="4617720" y="1115568"/>
-            <a:ext cx="4023360" cy="310896"/>
-          </a:xfrm>
-          <a:prstGeom prst="rect">
-            <a:avLst/>
-          </a:prstGeom>
-          <a:solidFill>
-            <a:srgbClr val="1D9E75"/>
-          </a:solidFill>
-          <a:ln w="12700">
-            <a:solidFill>
-              <a:srgbClr val="1D9E75"/>
-            </a:solidFill>
-            <a:prstDash val="solid"/>
-          </a:ln>
-        </p:spPr>
-        <p:txBody>
-          <a:bodyPr/>
-          <a:lstStyle/>
-          <a:p>
-            <a:endParaRPr lang="en-US"/>
-          </a:p>
-        </p:txBody>
-      </p:sp>
-      <p:sp>
-        <p:nvSpPr>
-          <p:cNvPr id="16" name="Text 14">
-            <a:extLst>
-              <a:ext uri="{FF2B5EF4-FFF2-40B4-BE49-F238E27FC236}">
-                <a16:creationId xmlns:a16="http://schemas.microsoft.com/office/drawing/2014/main" id="{CEC263B7-12AC-A817-26B6-F018BD8AD547}"/>
-              </a:ext>
-            </a:extLst>
-          </p:cNvPr>
-          <p:cNvSpPr/>
-          <p:nvPr/>
-        </p:nvSpPr>
-        <p:spPr>
-          <a:xfrm>
-            <a:off x="4727448" y="1115568"/>
-            <a:ext cx="3749040" cy="182880"/>
-          </a:xfrm>
-          <a:prstGeom prst="rect">
-            <a:avLst/>
-          </a:prstGeom>
-          <a:noFill/>
-          <a:ln/>
-        </p:spPr>
-        <p:txBody>
-          <a:bodyPr wrap="square" lIns="0" tIns="0" rIns="0" bIns="0" rtlCol="0" anchor="ctr"/>
-          <a:lstStyle/>
-          <a:p>
-            <a:pPr marL="0" indent="0">
-              <a:buNone/>
-            </a:pPr>
-            <a:r>
-              <a:rPr lang="en-US" sz="1200" b="1" dirty="0">
-                <a:solidFill>
-                  <a:srgbClr val="FFFFFF"/>
-                </a:solidFill>
-              </a:rPr>
-              <a:t>Business Tools</a:t>
-            </a:r>
-            <a:endParaRPr lang="en-US" sz="1200" dirty="0"/>
-          </a:p>
-        </p:txBody>
-      </p:sp>
-      <p:sp>
-        <p:nvSpPr>
-          <p:cNvPr id="17" name="Text 15">
-            <a:extLst>
-              <a:ext uri="{FF2B5EF4-FFF2-40B4-BE49-F238E27FC236}">
-                <a16:creationId xmlns:a16="http://schemas.microsoft.com/office/drawing/2014/main" id="{C939F9CF-AEF4-E267-602B-6AA72F5165C8}"/>
-              </a:ext>
-            </a:extLst>
-          </p:cNvPr>
-          <p:cNvSpPr/>
-          <p:nvPr/>
-        </p:nvSpPr>
-        <p:spPr>
-          <a:xfrm>
-            <a:off x="4727448" y="1280160"/>
-            <a:ext cx="3749040" cy="128016"/>
-          </a:xfrm>
-          <a:prstGeom prst="rect">
-            <a:avLst/>
-          </a:prstGeom>
-          <a:noFill/>
-          <a:ln/>
-        </p:spPr>
-        <p:txBody>
-          <a:bodyPr wrap="square" lIns="0" tIns="0" rIns="0" bIns="0" rtlCol="0" anchor="ctr"/>
-          <a:lstStyle/>
-          <a:p>
-            <a:pPr marL="0" indent="0">
-              <a:buNone/>
-            </a:pPr>
-            <a:r>
-              <a:rPr lang="en-US" sz="750" dirty="0">
-                <a:solidFill>
-                  <a:srgbClr val="CADCFC"/>
-                </a:solidFill>
-              </a:rPr>
-              <a:t>Product &amp; inventory management · sales dashboard</a:t>
-            </a:r>
-            <a:endParaRPr lang="en-US" sz="750" dirty="0"/>
-          </a:p>
-        </p:txBody>
-      </p:sp>
-      <p:sp>
-        <p:nvSpPr>
-          <p:cNvPr id="18" name="Shape 16">
-            <a:extLst>
-              <a:ext uri="{FF2B5EF4-FFF2-40B4-BE49-F238E27FC236}">
-                <a16:creationId xmlns:a16="http://schemas.microsoft.com/office/drawing/2014/main" id="{04068518-4647-49A4-BC81-4DFC9E23F16B}"/>
-              </a:ext>
-            </a:extLst>
-          </p:cNvPr>
-          <p:cNvSpPr/>
-          <p:nvPr/>
-        </p:nvSpPr>
-        <p:spPr>
-          <a:xfrm>
-            <a:off x="4617720" y="1463040"/>
-            <a:ext cx="4023360" cy="3291840"/>
-          </a:xfrm>
-          <a:prstGeom prst="rect">
-            <a:avLst/>
-          </a:prstGeom>
-          <a:solidFill>
-            <a:srgbClr val="F0F2F6"/>
-          </a:solidFill>
-          <a:ln w="12700">
-            <a:solidFill>
-              <a:srgbClr val="D8DCE5"/>
-            </a:solidFill>
-            <a:prstDash val="solid"/>
-          </a:ln>
-        </p:spPr>
-        <p:txBody>
-          <a:bodyPr/>
-          <a:lstStyle/>
-          <a:p>
-            <a:endParaRPr lang="en-US"/>
-          </a:p>
-        </p:txBody>
-      </p:sp>
-      <p:sp>
-        <p:nvSpPr>
-          <p:cNvPr id="19" name="Shape 17">
-            <a:extLst>
-              <a:ext uri="{FF2B5EF4-FFF2-40B4-BE49-F238E27FC236}">
-                <a16:creationId xmlns:a16="http://schemas.microsoft.com/office/drawing/2014/main" id="{FDAA8B83-4B30-DE7B-9135-F58F382796CE}"/>
-              </a:ext>
-            </a:extLst>
-          </p:cNvPr>
-          <p:cNvSpPr/>
-          <p:nvPr/>
-        </p:nvSpPr>
-        <p:spPr>
-          <a:xfrm>
-            <a:off x="4754880" y="1600200"/>
-            <a:ext cx="3749040" cy="3017520"/>
-          </a:xfrm>
-          <a:prstGeom prst="rect">
-            <a:avLst/>
-          </a:prstGeom>
-          <a:solidFill>
-            <a:srgbClr val="E8EAF0"/>
-          </a:solidFill>
-          <a:ln w="6350">
-            <a:solidFill>
-              <a:srgbClr val="C8CDD8"/>
-            </a:solidFill>
-            <a:prstDash val="dash"/>
-          </a:ln>
-        </p:spPr>
-        <p:txBody>
-          <a:bodyPr/>
-          <a:lstStyle/>
-          <a:p>
-            <a:endParaRPr lang="en-US"/>
-          </a:p>
-        </p:txBody>
-      </p:sp>
-      <p:sp>
-        <p:nvSpPr>
-          <p:cNvPr id="20" name="Text 18">
-            <a:extLst>
-              <a:ext uri="{FF2B5EF4-FFF2-40B4-BE49-F238E27FC236}">
-                <a16:creationId xmlns:a16="http://schemas.microsoft.com/office/drawing/2014/main" id="{2941B7A8-4096-F865-7C9F-5213710FACFF}"/>
-              </a:ext>
-            </a:extLst>
-          </p:cNvPr>
-          <p:cNvSpPr/>
-          <p:nvPr/>
-        </p:nvSpPr>
-        <p:spPr>
-          <a:xfrm>
-            <a:off x="4800600" y="2743200"/>
-            <a:ext cx="3657600" cy="457200"/>
-          </a:xfrm>
-          <a:prstGeom prst="rect">
-            <a:avLst/>
-          </a:prstGeom>
-          <a:noFill/>
-          <a:ln/>
-        </p:spPr>
-        <p:txBody>
-          <a:bodyPr wrap="square" lIns="0" tIns="0" rIns="0" bIns="0" rtlCol="0" anchor="ctr"/>
-          <a:lstStyle/>
-          <a:p>
-            <a:pPr marL="0" indent="0" algn="ctr">
-              <a:buNone/>
-            </a:pPr>
-            <a:r>
-              <a:rPr lang="en-US" sz="900" i="1" dirty="0">
-                <a:solidFill>
-                  <a:srgbClr val="94A3B8"/>
-                </a:solidFill>
-              </a:rPr>
-              <a:t>[ Replace with business settings screenshot ]</a:t>
-            </a:r>
-            <a:endParaRPr lang="en-US" sz="900" dirty="0"/>
-          </a:p>
-        </p:txBody>
-      </p:sp>
-      <p:sp>
-        <p:nvSpPr>
-          <p:cNvPr id="21" name="Shape 19">
-            <a:extLst>
-              <a:ext uri="{FF2B5EF4-FFF2-40B4-BE49-F238E27FC236}">
-                <a16:creationId xmlns:a16="http://schemas.microsoft.com/office/drawing/2014/main" id="{D9828094-89E8-272E-D765-C5F1878062D7}"/>
-              </a:ext>
-            </a:extLst>
-          </p:cNvPr>
-          <p:cNvSpPr/>
-          <p:nvPr/>
-        </p:nvSpPr>
-        <p:spPr>
-          <a:xfrm>
-            <a:off x="8001000" y="1508760"/>
-            <a:ext cx="594360" cy="201168"/>
-          </a:xfrm>
-          <a:prstGeom prst="rect">
-            <a:avLst/>
-          </a:prstGeom>
-          <a:solidFill>
-            <a:srgbClr val="1D9E75"/>
-          </a:solidFill>
-          <a:ln w="12700">
-            <a:solidFill>
-              <a:srgbClr val="1D9E75"/>
-            </a:solidFill>
-            <a:prstDash val="solid"/>
-          </a:ln>
-        </p:spPr>
-        <p:txBody>
-          <a:bodyPr/>
-          <a:lstStyle/>
-          <a:p>
-            <a:endParaRPr lang="en-US"/>
-          </a:p>
-        </p:txBody>
-      </p:sp>
-      <p:sp>
-        <p:nvSpPr>
-          <p:cNvPr id="22" name="Text 20">
-            <a:extLst>
-              <a:ext uri="{FF2B5EF4-FFF2-40B4-BE49-F238E27FC236}">
-                <a16:creationId xmlns:a16="http://schemas.microsoft.com/office/drawing/2014/main" id="{32A83AD3-6F18-7300-924A-DBCB92CD26E8}"/>
-              </a:ext>
-            </a:extLst>
-          </p:cNvPr>
-          <p:cNvSpPr/>
-          <p:nvPr/>
-        </p:nvSpPr>
-        <p:spPr>
-          <a:xfrm>
-            <a:off x="8001000" y="1508760"/>
-            <a:ext cx="594360" cy="201168"/>
-          </a:xfrm>
-          <a:prstGeom prst="rect">
-            <a:avLst/>
-          </a:prstGeom>
-          <a:noFill/>
-          <a:ln/>
-        </p:spPr>
-        <p:txBody>
-          <a:bodyPr wrap="square" lIns="0" tIns="0" rIns="0" bIns="0" rtlCol="0" anchor="ctr"/>
-          <a:lstStyle/>
-          <a:p>
-            <a:pPr marL="0" indent="0" algn="ctr">
-              <a:buNone/>
-            </a:pPr>
-            <a:r>
-              <a:rPr lang="en-US" sz="750" b="1" dirty="0">
-                <a:solidFill>
-                  <a:srgbClr val="FFFFFF"/>
-                </a:solidFill>
-              </a:rPr>
-              <a:t>UI</a:t>
-            </a:r>
-            <a:endParaRPr lang="en-US" sz="750" dirty="0"/>
-          </a:p>
-        </p:txBody>
-      </p:sp>
-      <p:sp>
-        <p:nvSpPr>
-          <p:cNvPr id="23" name="Shape 21">
-            <a:extLst>
-              <a:ext uri="{FF2B5EF4-FFF2-40B4-BE49-F238E27FC236}">
-                <a16:creationId xmlns:a16="http://schemas.microsoft.com/office/drawing/2014/main" id="{E16DF484-6009-023B-41D1-CCA84D58930C}"/>
-              </a:ext>
-            </a:extLst>
-          </p:cNvPr>
-          <p:cNvSpPr/>
-          <p:nvPr/>
-        </p:nvSpPr>
-        <p:spPr>
-          <a:xfrm>
-            <a:off x="457200" y="4828032"/>
-            <a:ext cx="8229600" cy="201168"/>
-          </a:xfrm>
-          <a:prstGeom prst="rect">
-            <a:avLst/>
-          </a:prstGeom>
-          <a:solidFill>
-            <a:srgbClr val="F8FAFC"/>
-          </a:solidFill>
-          <a:ln w="6350">
-            <a:solidFill>
-              <a:srgbClr val="D8DCE5"/>
-            </a:solidFill>
-            <a:prstDash val="solid"/>
-          </a:ln>
-        </p:spPr>
-        <p:txBody>
-          <a:bodyPr/>
-          <a:lstStyle/>
-          <a:p>
-            <a:endParaRPr lang="en-US"/>
-          </a:p>
-        </p:txBody>
-      </p:sp>
-      <p:sp>
-        <p:nvSpPr>
-          <p:cNvPr id="24" name="Text 22">
-            <a:extLst>
-              <a:ext uri="{FF2B5EF4-FFF2-40B4-BE49-F238E27FC236}">
-                <a16:creationId xmlns:a16="http://schemas.microsoft.com/office/drawing/2014/main" id="{950FDA77-E641-ED75-F586-4D39E349E52F}"/>
-              </a:ext>
-            </a:extLst>
-          </p:cNvPr>
-          <p:cNvSpPr/>
-          <p:nvPr/>
-        </p:nvSpPr>
-        <p:spPr>
-          <a:xfrm>
-            <a:off x="566928" y="4828032"/>
-            <a:ext cx="8010144" cy="201168"/>
-          </a:xfrm>
-          <a:prstGeom prst="rect">
-            <a:avLst/>
-          </a:prstGeom>
-          <a:noFill/>
-          <a:ln/>
-        </p:spPr>
-        <p:txBody>
-          <a:bodyPr wrap="square" lIns="0" tIns="0" rIns="0" bIns="0" rtlCol="0" anchor="ctr"/>
-          <a:lstStyle/>
-          <a:p>
-            <a:pPr marL="0" indent="0" algn="ctr">
-              <a:buNone/>
-            </a:pPr>
-            <a:r>
-              <a:rPr lang="en-US" sz="750" dirty="0">
-                <a:solidFill>
-                  <a:srgbClr val="475569"/>
-                </a:solidFill>
-              </a:rPr>
-              <a:t>Branding consistent across all views  ·  Loading, error &amp; empty states on every page  ·  77+ automated tests passing</a:t>
-            </a:r>
-            <a:endParaRPr lang="en-US" sz="750" dirty="0"/>
-          </a:p>
-        </p:txBody>
-      </p:sp>
-    </p:spTree>
-    <p:extLst>
-      <p:ext uri="{BB962C8B-B14F-4D97-AF65-F5344CB8AC3E}">
-        <p14:creationId xmlns:p14="http://schemas.microsoft.com/office/powerpoint/2010/main" val="1831737831"/>
       </p:ext>
     </p:extLst>
   </p:cSld>

--- a/docs/Deliverables/Orderly_Slides.pptx
+++ b/docs/Deliverables/Orderly_Slides.pptx
@@ -28090,8 +28090,8 @@
         </p:nvSpPr>
         <p:spPr>
           <a:xfrm>
-            <a:off x="7132320" y="658368"/>
-            <a:ext cx="1554480" cy="146304"/>
+            <a:off x="6959150" y="658368"/>
+            <a:ext cx="1727650" cy="128016"/>
           </a:xfrm>
           <a:prstGeom prst="rect">
             <a:avLst/>
@@ -28112,7 +28112,7 @@
                   <a:srgbClr val="1D9E75"/>
                 </a:solidFill>
               </a:rPr>
-              <a:t>Product Owner</a:t>
+              <a:t>Product Owner | Full Stack Developer</a:t>
             </a:r>
             <a:endParaRPr lang="en-US" sz="700" dirty="0"/>
           </a:p>
@@ -28508,7 +28508,7 @@
         </p:nvSpPr>
         <p:spPr>
           <a:xfrm>
-            <a:off x="4462272" y="1097280"/>
+            <a:off x="4800600" y="1097280"/>
             <a:ext cx="3886200" cy="347472"/>
           </a:xfrm>
           <a:prstGeom prst="rect">
@@ -28546,7 +28546,7 @@
         </p:nvSpPr>
         <p:spPr>
           <a:xfrm>
-            <a:off x="4572000" y="1097280"/>
+            <a:off x="4910328" y="1097280"/>
             <a:ext cx="3657600" cy="347472"/>
           </a:xfrm>
           <a:prstGeom prst="rect">
@@ -29256,7 +29256,7 @@
         </p:nvSpPr>
         <p:spPr>
           <a:xfrm>
-            <a:off x="4462272" y="1536192"/>
+            <a:off x="4800600" y="1536192"/>
             <a:ext cx="3886200" cy="731520"/>
           </a:xfrm>
           <a:prstGeom prst="rect">
@@ -29301,7 +29301,7 @@
         </p:nvSpPr>
         <p:spPr>
           <a:xfrm>
-            <a:off x="4462272" y="1536192"/>
+            <a:off x="4800600" y="1536192"/>
             <a:ext cx="45720" cy="731520"/>
           </a:xfrm>
           <a:prstGeom prst="rect">
@@ -29339,7 +29339,7 @@
         </p:nvSpPr>
         <p:spPr>
           <a:xfrm>
-            <a:off x="4599432" y="1618488"/>
+            <a:off x="4937760" y="1618488"/>
             <a:ext cx="3611880" cy="182880"/>
           </a:xfrm>
           <a:prstGeom prst="rect">
@@ -29381,7 +29381,7 @@
         </p:nvSpPr>
         <p:spPr>
           <a:xfrm>
-            <a:off x="4599432" y="1819656"/>
+            <a:off x="4937760" y="1819656"/>
             <a:ext cx="3611880" cy="365760"/>
           </a:xfrm>
           <a:prstGeom prst="rect">
@@ -29423,7 +29423,7 @@
         </p:nvSpPr>
         <p:spPr>
           <a:xfrm>
-            <a:off x="4462272" y="2331720"/>
+            <a:off x="4800600" y="2331720"/>
             <a:ext cx="3886200" cy="731520"/>
           </a:xfrm>
           <a:prstGeom prst="rect">
@@ -29468,7 +29468,7 @@
         </p:nvSpPr>
         <p:spPr>
           <a:xfrm>
-            <a:off x="4462272" y="2331720"/>
+            <a:off x="4800600" y="2331720"/>
             <a:ext cx="45720" cy="731520"/>
           </a:xfrm>
           <a:prstGeom prst="rect">
@@ -29506,7 +29506,7 @@
         </p:nvSpPr>
         <p:spPr>
           <a:xfrm>
-            <a:off x="4599432" y="2414016"/>
+            <a:off x="4937760" y="2414016"/>
             <a:ext cx="3611880" cy="182880"/>
           </a:xfrm>
           <a:prstGeom prst="rect">
@@ -29548,7 +29548,7 @@
         </p:nvSpPr>
         <p:spPr>
           <a:xfrm>
-            <a:off x="4599432" y="2615184"/>
+            <a:off x="4937760" y="2615184"/>
             <a:ext cx="3611880" cy="365760"/>
           </a:xfrm>
           <a:prstGeom prst="rect">
@@ -29590,7 +29590,7 @@
         </p:nvSpPr>
         <p:spPr>
           <a:xfrm>
-            <a:off x="4462272" y="3127248"/>
+            <a:off x="4800600" y="3127248"/>
             <a:ext cx="3886200" cy="731520"/>
           </a:xfrm>
           <a:prstGeom prst="rect">
@@ -29635,7 +29635,7 @@
         </p:nvSpPr>
         <p:spPr>
           <a:xfrm>
-            <a:off x="4462272" y="3127248"/>
+            <a:off x="4800600" y="3127248"/>
             <a:ext cx="45720" cy="731520"/>
           </a:xfrm>
           <a:prstGeom prst="rect">
@@ -29673,7 +29673,7 @@
         </p:nvSpPr>
         <p:spPr>
           <a:xfrm>
-            <a:off x="4599432" y="3209544"/>
+            <a:off x="4937760" y="3209544"/>
             <a:ext cx="3611880" cy="182880"/>
           </a:xfrm>
           <a:prstGeom prst="rect">
@@ -29715,7 +29715,7 @@
         </p:nvSpPr>
         <p:spPr>
           <a:xfrm>
-            <a:off x="4599432" y="3410712"/>
+            <a:off x="4937760" y="3410712"/>
             <a:ext cx="3611880" cy="365760"/>
           </a:xfrm>
           <a:prstGeom prst="rect">
@@ -29757,7 +29757,7 @@
         </p:nvSpPr>
         <p:spPr>
           <a:xfrm>
-            <a:off x="4462272" y="3922776"/>
+            <a:off x="4800600" y="3922776"/>
             <a:ext cx="3886200" cy="731520"/>
           </a:xfrm>
           <a:prstGeom prst="rect">
@@ -29802,7 +29802,7 @@
         </p:nvSpPr>
         <p:spPr>
           <a:xfrm>
-            <a:off x="4462272" y="3922776"/>
+            <a:off x="4800600" y="3922776"/>
             <a:ext cx="45720" cy="731520"/>
           </a:xfrm>
           <a:prstGeom prst="rect">
@@ -29840,7 +29840,7 @@
         </p:nvSpPr>
         <p:spPr>
           <a:xfrm>
-            <a:off x="4599432" y="4005072"/>
+            <a:off x="4937760" y="4005072"/>
             <a:ext cx="3611880" cy="182880"/>
           </a:xfrm>
           <a:prstGeom prst="rect">
@@ -29882,7 +29882,7 @@
         </p:nvSpPr>
         <p:spPr>
           <a:xfrm>
-            <a:off x="4599432" y="4206240"/>
+            <a:off x="4937760" y="4206240"/>
             <a:ext cx="3611880" cy="365760"/>
           </a:xfrm>
           <a:prstGeom prst="rect">

--- a/docs/Deliverables/Orderly_Slides.pptx
+++ b/docs/Deliverables/Orderly_Slides.pptx
@@ -316,6 +316,79 @@
               <a:rPr lang="en-US" dirty="0"/>
               <a:t>: What is it? (Serina continues..)</a:t>
             </a:r>
+            <a:br>
+              <a:rPr lang="en-US" dirty="0"/>
+            </a:br>
+            <a:br>
+              <a:rPr lang="en-US" dirty="0"/>
+            </a:br>
+            <a:r>
+              <a:rPr lang="en-US" dirty="0"/>
+              <a:t>Hello, and Welcome!</a:t>
+            </a:r>
+            <a:br>
+              <a:rPr lang="en-US" dirty="0"/>
+            </a:br>
+            <a:endParaRPr lang="en-US" dirty="0"/>
+          </a:p>
+          <a:p>
+            <a:r>
+              <a:rPr lang="en-US" dirty="0"/>
+              <a:t>Today marks a huge milestone for our Team and we are excited to both share and showcase our collective efforts brought together by a team dedicated to putting our best efforts forward towards developing our software, Orderly.</a:t>
+            </a:r>
+          </a:p>
+          <a:p>
+            <a:endParaRPr lang="en-US" dirty="0"/>
+          </a:p>
+          <a:p>
+            <a:r>
+              <a:rPr lang="en-US" dirty="0"/>
+              <a:t>My name is Serina, and I am both the Project Manager and SCRUM Master for a team of 6 academic developers. </a:t>
+            </a:r>
+          </a:p>
+          <a:p>
+            <a:endParaRPr lang="en-US" dirty="0"/>
+          </a:p>
+          <a:p>
+            <a:r>
+              <a:rPr lang="en-US" dirty="0"/>
+              <a:t>As the PM, I served as the Main facilitator for our software development process. My role was to keep us aligned, moving, and accountable – from our very first planning meeting to shipping version 1.0.0 this week. </a:t>
+            </a:r>
+            <a:br>
+              <a:rPr lang="en-US" dirty="0"/>
+            </a:br>
+            <a:br>
+              <a:rPr lang="en-US" dirty="0"/>
+            </a:br>
+            <a:r>
+              <a:rPr lang="en-US" dirty="0"/>
+              <a:t>But </a:t>
+            </a:r>
+            <a:r>
+              <a:rPr lang="en-US" b="1" dirty="0"/>
+              <a:t>before</a:t>
+            </a:r>
+            <a:r>
+              <a:rPr lang="en-US" b="0" dirty="0"/>
+              <a:t> I talk about </a:t>
+            </a:r>
+            <a:r>
+              <a:rPr lang="en-US" b="0" i="1" dirty="0"/>
+              <a:t>how</a:t>
+            </a:r>
+            <a:r>
+              <a:rPr lang="en-US" b="0" i="0" dirty="0"/>
+              <a:t> we built it – let me tell you </a:t>
+            </a:r>
+            <a:r>
+              <a:rPr lang="en-US" b="0" i="1" dirty="0"/>
+              <a:t>what </a:t>
+            </a:r>
+            <a:r>
+              <a:rPr lang="en-US" b="0" i="0" dirty="0"/>
+              <a:t>we built…</a:t>
+            </a:r>
+            <a:endParaRPr lang="en-US" dirty="0"/>
           </a:p>
         </p:txBody>
       </p:sp>
@@ -1076,6 +1149,227 @@
               <a:rPr lang="en-US" b="0" dirty="0"/>
               <a:t>(Next Slide, whole team ready on standby)</a:t>
             </a:r>
+          </a:p>
+          <a:p>
+            <a:endParaRPr lang="en-US" b="0" dirty="0"/>
+          </a:p>
+          <a:p>
+            <a:r>
+              <a:rPr lang="en-US" dirty="0"/>
+              <a:t>Before I open the floor for questions, I want to close with what this experience </a:t>
+            </a:r>
+            <a:r>
+              <a:rPr lang="en-US" i="1" dirty="0"/>
+              <a:t>actually</a:t>
+            </a:r>
+            <a:r>
+              <a:rPr lang="en-US" dirty="0"/>
+              <a:t> taught us.</a:t>
+            </a:r>
+          </a:p>
+          <a:p>
+            <a:endParaRPr lang="en-US" dirty="0"/>
+          </a:p>
+          <a:p>
+            <a:r>
+              <a:rPr lang="en-US" b="1" dirty="0"/>
+              <a:t>Dependency-first planning </a:t>
+            </a:r>
+            <a:r>
+              <a:rPr lang="en-US" dirty="0"/>
+              <a:t>changed how we worked. </a:t>
+            </a:r>
+          </a:p>
+          <a:p>
+            <a:r>
+              <a:rPr lang="en-US" dirty="0"/>
+              <a:t>Early in the project, we learned the hard way that when one piece arrives late… everything downstream stalls. </a:t>
+            </a:r>
+          </a:p>
+          <a:p>
+            <a:endParaRPr lang="en-US" b="1" dirty="0"/>
+          </a:p>
+          <a:p>
+            <a:r>
+              <a:rPr lang="en-US" b="1" dirty="0"/>
+              <a:t>.. Wave-based delivery </a:t>
+            </a:r>
+            <a:r>
+              <a:rPr lang="en-US" dirty="0"/>
+              <a:t>fixed that — and it's something I'll carry into every project I manage going forward</a:t>
+            </a:r>
+            <a:r>
+              <a:rPr lang="en-US" b="1" dirty="0"/>
+              <a:t>, </a:t>
+            </a:r>
+          </a:p>
+          <a:p>
+            <a:r>
+              <a:rPr lang="en-US" b="1" dirty="0"/>
+              <a:t>or at the very least…</a:t>
+            </a:r>
+            <a:r>
+              <a:rPr lang="en-US" dirty="0"/>
+              <a:t> having a contingency plan for dependencies.</a:t>
+            </a:r>
+            <a:br>
+              <a:rPr lang="en-US" dirty="0"/>
+            </a:br>
+            <a:endParaRPr lang="en-US" dirty="0"/>
+          </a:p>
+          <a:p>
+            <a:r>
+              <a:rPr lang="en-US" b="1" dirty="0"/>
+              <a:t>Vocabulary matters more than we expected</a:t>
+            </a:r>
+            <a:r>
+              <a:rPr lang="en-US" dirty="0"/>
+              <a:t>. Understanding the language of APIs, endpoints, and contracts earlier would have saved us real time across the team. </a:t>
+            </a:r>
+          </a:p>
+          <a:p>
+            <a:r>
+              <a:rPr lang="en-US" dirty="0"/>
+              <a:t>Communication only works when everyone is speaking the </a:t>
+            </a:r>
+            <a:r>
+              <a:rPr lang="en-US" b="1" dirty="0"/>
+              <a:t>same</a:t>
+            </a:r>
+            <a:r>
+              <a:rPr lang="en-US" dirty="0"/>
+              <a:t> language.</a:t>
+            </a:r>
+          </a:p>
+          <a:p>
+            <a:endParaRPr lang="en-US" dirty="0"/>
+          </a:p>
+          <a:p>
+            <a:r>
+              <a:rPr lang="en-US" dirty="0"/>
+              <a:t>Importantly, </a:t>
+            </a:r>
+            <a:r>
+              <a:rPr lang="en-US" i="1" dirty="0"/>
+              <a:t>Collaborative development is a skill </a:t>
+            </a:r>
+            <a:r>
+              <a:rPr lang="en-US" dirty="0"/>
+              <a:t>— and it's one we built </a:t>
+            </a:r>
+            <a:r>
+              <a:rPr lang="en-US" b="1" dirty="0"/>
+              <a:t>sprint over sprint</a:t>
+            </a:r>
+            <a:r>
+              <a:rPr lang="en-US" dirty="0"/>
+              <a:t>. </a:t>
+            </a:r>
+          </a:p>
+          <a:p>
+            <a:r>
+              <a:rPr lang="en-US" dirty="0"/>
+              <a:t>Better PR habits, better check-ins, better handoffs. It didn't happen overnight, but </a:t>
+            </a:r>
+            <a:r>
+              <a:rPr lang="en-US" b="1" i="1" dirty="0"/>
+              <a:t>it</a:t>
+            </a:r>
+            <a:r>
+              <a:rPr lang="en-US" dirty="0"/>
+              <a:t> </a:t>
+            </a:r>
+            <a:r>
+              <a:rPr lang="en-US" b="1" i="1" dirty="0"/>
+              <a:t>happened</a:t>
+            </a:r>
+            <a:r>
+              <a:rPr lang="en-US" dirty="0"/>
+              <a:t>.</a:t>
+            </a:r>
+          </a:p>
+          <a:p>
+            <a:endParaRPr lang="en-US" dirty="0"/>
+          </a:p>
+          <a:p>
+            <a:r>
+              <a:rPr lang="en-US" dirty="0"/>
+              <a:t>And lastly, Agile works when the team owns it. </a:t>
+            </a:r>
+          </a:p>
+          <a:p>
+            <a:r>
+              <a:rPr lang="en-US" dirty="0"/>
+              <a:t>We didn't just note our retrospective actions. We </a:t>
+            </a:r>
+            <a:r>
+              <a:rPr lang="en-US" b="1" dirty="0"/>
+              <a:t>acted on </a:t>
+            </a:r>
+            <a:r>
+              <a:rPr lang="en-US" dirty="0"/>
+              <a:t>them. Every sprint closed </a:t>
+            </a:r>
+            <a:r>
+              <a:rPr lang="en-US" i="1" dirty="0"/>
+              <a:t>better than</a:t>
+            </a:r>
+            <a:r>
+              <a:rPr lang="en-US" dirty="0"/>
+              <a:t> the one before it.</a:t>
+            </a:r>
+          </a:p>
+          <a:p>
+            <a:endParaRPr lang="en-US" dirty="0"/>
+          </a:p>
+          <a:p>
+            <a:r>
+              <a:rPr lang="en-US" dirty="0"/>
+              <a:t>We built something real. A platform that looks, works, and ships like professional software. </a:t>
+            </a:r>
+          </a:p>
+          <a:p>
+            <a:r>
+              <a:rPr lang="en-US" dirty="0"/>
+              <a:t>And we built it together — as </a:t>
+            </a:r>
+            <a:r>
+              <a:rPr lang="en-US" b="1" dirty="0"/>
+              <a:t>academic</a:t>
+            </a:r>
+            <a:r>
+              <a:rPr lang="en-US" dirty="0"/>
+              <a:t> </a:t>
+            </a:r>
+            <a:r>
+              <a:rPr lang="en-US" i="1" dirty="0"/>
+              <a:t>software developers</a:t>
+            </a:r>
+            <a:r>
+              <a:rPr lang="en-US" dirty="0"/>
+              <a:t>. 👏</a:t>
+            </a:r>
+          </a:p>
+          <a:p>
+            <a:endParaRPr lang="en-US" dirty="0"/>
+          </a:p>
+          <a:p>
+            <a:r>
+              <a:rPr lang="en-US" dirty="0"/>
+              <a:t>Thank you. </a:t>
+            </a:r>
+          </a:p>
+          <a:p>
+            <a:r>
+              <a:rPr lang="en-US" dirty="0"/>
+              <a:t>We'll now open the floor for questions — before we bring everything together with a demo, </a:t>
+            </a:r>
+          </a:p>
+          <a:p>
+            <a:r>
+              <a:rPr lang="en-US" dirty="0"/>
+              <a:t>built and delivered by your team of dedicated Project Capstone students.</a:t>
+            </a:r>
             <a:endParaRPr lang="en-US" b="1" dirty="0"/>
           </a:p>
         </p:txBody>
@@ -1871,6 +2165,73 @@
               <a:rPr lang="en-US" dirty="0"/>
               <a:t>To share what our team development delivered and how we scoped it all out!</a:t>
             </a:r>
+          </a:p>
+          <a:p>
+            <a:endParaRPr lang="en-US" dirty="0"/>
+          </a:p>
+          <a:p>
+            <a:r>
+              <a:rPr lang="en-US" b="1" u="sng" dirty="0"/>
+              <a:t>Script</a:t>
+            </a:r>
+            <a:r>
+              <a:rPr lang="en-US" dirty="0"/>
+              <a:t>:</a:t>
+            </a:r>
+          </a:p>
+          <a:p>
+            <a:r>
+              <a:rPr lang="en-US" dirty="0"/>
+              <a:t>So let me walk you through how we actually built this.</a:t>
+            </a:r>
+          </a:p>
+          <a:p>
+            <a:endParaRPr lang="en-US" dirty="0"/>
+          </a:p>
+          <a:p>
+            <a:r>
+              <a:rPr lang="en-US" dirty="0"/>
+              <a:t>We followed an Agile Scrum methodology across five two-week sprints, running from January through April. Each sprint had a clear focus — we started with Foundation, laying out our architecture, standards, and development environment. From there we built up our data layer, then our engineering backbone, then the full customer experience, and finally the business admin tools.</a:t>
+            </a:r>
+          </a:p>
+          <a:p>
+            <a:endParaRPr lang="en-US" dirty="0"/>
+          </a:p>
+          <a:p>
+            <a:r>
+              <a:rPr lang="en-US" dirty="0"/>
+              <a:t>The timeline on this slide tells that story. </a:t>
+            </a:r>
+          </a:p>
+          <a:p>
+            <a:r>
+              <a:rPr lang="en-US" dirty="0"/>
+              <a:t>You can see the sprint milestones, our spring break, and then the final push — code freeze on April 24th, deployed on the 25th, and here we are today.</a:t>
+            </a:r>
+          </a:p>
+          <a:p>
+            <a:endParaRPr lang="en-US" dirty="0"/>
+          </a:p>
+          <a:p>
+            <a:r>
+              <a:rPr lang="en-US" dirty="0"/>
+              <a:t>Fourteen weeks. Five sprint reviews and retrospectives. Over thirty team meetings. Two Trello boards. One product development plan.</a:t>
+            </a:r>
+          </a:p>
+          <a:p>
+            <a:r>
+              <a:rPr lang="en-US" dirty="0"/>
+              <a:t>…Iteratively built, from the ground up.</a:t>
+            </a:r>
+          </a:p>
+          <a:p>
+            <a:r>
+              <a:rPr lang="en-US" dirty="0"/>
+              <a:t>I'll now hand it over to Kim, our Product Owner, to walk you through what we delivered.</a:t>
+            </a:r>
+          </a:p>
+          <a:p>
+            <a:endParaRPr lang="en-US" dirty="0"/>
           </a:p>
         </p:txBody>
       </p:sp>

--- a/docs/Deliverables/Orderly_Slides.pptx
+++ b/docs/Deliverables/Orderly_Slides.pptx
@@ -1579,6 +1579,118 @@
               </a:rPr>
               <a:t>How Agile brought forward our sprint structure (Serina)</a:t>
             </a:r>
+          </a:p>
+          <a:p>
+            <a:endParaRPr lang="en-US" sz="1200" b="0" i="0" kern="1200" dirty="0">
+              <a:solidFill>
+                <a:schemeClr val="tx1"/>
+              </a:solidFill>
+              <a:effectLst/>
+              <a:latin typeface="+mn-lt"/>
+              <a:ea typeface="+mn-ea"/>
+              <a:cs typeface="+mn-cs"/>
+            </a:endParaRPr>
+          </a:p>
+          <a:p>
+            <a:r>
+              <a:rPr lang="en-US" dirty="0"/>
+              <a:t>So, what is Orderly?</a:t>
+            </a:r>
+          </a:p>
+          <a:p>
+            <a:endParaRPr lang="en-US" dirty="0"/>
+          </a:p>
+          <a:p>
+            <a:r>
+              <a:rPr lang="en-US" dirty="0"/>
+              <a:t>At its core, Orderly is a </a:t>
+            </a:r>
+            <a:r>
+              <a:rPr lang="en-US" b="1" dirty="0"/>
+              <a:t>centralized web application</a:t>
+            </a:r>
+            <a:r>
+              <a:rPr lang="en-US" dirty="0"/>
+              <a:t> built to streamline operations for small to mid-sized businesses. </a:t>
+            </a:r>
+          </a:p>
+          <a:p>
+            <a:r>
+              <a:rPr lang="en-US" dirty="0"/>
+              <a:t>And the reason we built it comes down to a very real problem.</a:t>
+            </a:r>
+          </a:p>
+          <a:p>
+            <a:endParaRPr lang="en-US" dirty="0"/>
+          </a:p>
+          <a:p>
+            <a:r>
+              <a:rPr lang="en-US" dirty="0"/>
+              <a:t>Small business owners are managing orders on paper, tracking inventory in spreadsheets, and piecing together tools that were never meant to work together. The result is manual processes, missed orders, and zero real-time visibility into what's actually happening in their business.</a:t>
+            </a:r>
+          </a:p>
+          <a:p>
+            <a:endParaRPr lang="en-US" dirty="0"/>
+          </a:p>
+          <a:p>
+            <a:r>
+              <a:rPr lang="en-US" dirty="0"/>
+              <a:t>So we asked ourselves — what would it look like if all of that lived in one place?</a:t>
+            </a:r>
+          </a:p>
+          <a:p>
+            <a:endParaRPr lang="en-US" dirty="0"/>
+          </a:p>
+          <a:p>
+            <a:r>
+              <a:rPr lang="en-US" dirty="0"/>
+              <a:t>Orderly is the answer to that question. A flexible, self-service ordering and business management platform </a:t>
+            </a:r>
+          </a:p>
+          <a:p>
+            <a:r>
+              <a:rPr lang="en-US" dirty="0"/>
+              <a:t>— with a customer-facing storefront and a full business admin portal, built together from the ground up.</a:t>
+            </a:r>
+          </a:p>
+          <a:p>
+            <a:endParaRPr lang="en-US" dirty="0"/>
+          </a:p>
+          <a:p>
+            <a:r>
+              <a:rPr lang="en-US" dirty="0"/>
+              <a:t>Five sprints. Six team members. Over fifteen user features delivered.</a:t>
+            </a:r>
+          </a:p>
+          <a:p>
+            <a:r>
+              <a:rPr lang="en-US" dirty="0"/>
+              <a:t>And speaking of sprints — let me walk you through exactly how we got here.</a:t>
+            </a:r>
+          </a:p>
+          <a:p>
+            <a:endParaRPr lang="en-US" sz="1200" b="0" i="0" kern="1200" dirty="0">
+              <a:solidFill>
+                <a:schemeClr val="tx1"/>
+              </a:solidFill>
+              <a:effectLst/>
+              <a:latin typeface="+mn-lt"/>
+              <a:ea typeface="+mn-ea"/>
+              <a:cs typeface="+mn-cs"/>
+            </a:endParaRPr>
+          </a:p>
+          <a:p>
+            <a:endParaRPr lang="en-US" sz="1200" b="0" i="0" kern="1200" dirty="0">
+              <a:solidFill>
+                <a:schemeClr val="tx1"/>
+              </a:solidFill>
+              <a:effectLst/>
+              <a:latin typeface="+mn-lt"/>
+              <a:ea typeface="+mn-ea"/>
+              <a:cs typeface="+mn-cs"/>
+            </a:endParaRPr>
+          </a:p>
+          <a:p>
             <a:endParaRPr lang="en-US" sz="1200" b="1" i="0" kern="1200" dirty="0">
               <a:solidFill>
                 <a:schemeClr val="tx1"/>
@@ -2215,14 +2327,87 @@
           <a:p>
             <a:r>
               <a:rPr lang="en-US" dirty="0"/>
-              <a:t>Fourteen weeks. Five sprint reviews and retrospectives. Over thirty team meetings. Two Trello boards. One product development plan.</a:t>
-            </a:r>
-          </a:p>
-          <a:p>
+              <a:t>Built across </a:t>
+            </a:r>
+            <a:r>
+              <a:rPr lang="en-US" b="1" dirty="0"/>
+              <a:t>Fourteen weeks </a:t>
+            </a:r>
             <a:r>
               <a:rPr lang="en-US" dirty="0"/>
-              <a:t>…Iteratively built, from the ground up.</a:t>
-            </a:r>
+              <a:t>through </a:t>
+            </a:r>
+            <a:r>
+              <a:rPr lang="en-US" b="1" dirty="0"/>
+              <a:t>Five sprint reviews</a:t>
+            </a:r>
+            <a:r>
+              <a:rPr lang="en-US" dirty="0"/>
+              <a:t> </a:t>
+            </a:r>
+            <a:r>
+              <a:rPr lang="en-US" i="1" dirty="0"/>
+              <a:t>and</a:t>
+            </a:r>
+            <a:r>
+              <a:rPr lang="en-US" dirty="0"/>
+              <a:t> </a:t>
+            </a:r>
+            <a:r>
+              <a:rPr lang="en-US" b="1" dirty="0"/>
+              <a:t>retrospectives</a:t>
+            </a:r>
+            <a:r>
+              <a:rPr lang="en-US" dirty="0"/>
+              <a:t>. </a:t>
+            </a:r>
+            <a:r>
+              <a:rPr lang="en-US" b="1" dirty="0"/>
+              <a:t>Facilitating over thirty </a:t>
+            </a:r>
+            <a:r>
+              <a:rPr lang="en-US" dirty="0"/>
+              <a:t>team meetings using </a:t>
+            </a:r>
+            <a:r>
+              <a:rPr lang="en-US" b="1" dirty="0"/>
+              <a:t>Two Kanban Trello boards </a:t>
+            </a:r>
+            <a:r>
+              <a:rPr lang="en-US" b="0" dirty="0"/>
+              <a:t>that served </a:t>
+            </a:r>
+            <a:r>
+              <a:rPr lang="en-US" dirty="0"/>
+              <a:t>as  our Team’s process organization. </a:t>
+            </a:r>
+            <a:br>
+              <a:rPr lang="en-US" dirty="0"/>
+            </a:br>
+            <a:r>
+              <a:rPr lang="en-US" dirty="0"/>
+              <a:t>All under one </a:t>
+            </a:r>
+            <a:r>
+              <a:rPr lang="en-US" b="1" dirty="0"/>
+              <a:t>product development plan</a:t>
+            </a:r>
+            <a:r>
+              <a:rPr lang="en-US" dirty="0"/>
+              <a:t>… </a:t>
+            </a:r>
+            <a:r>
+              <a:rPr lang="en-US" i="1" dirty="0"/>
+              <a:t>Iteratively built</a:t>
+            </a:r>
+            <a:r>
+              <a:rPr lang="en-US" dirty="0"/>
+              <a:t>, from the ground up.</a:t>
+            </a:r>
+            <a:br>
+              <a:rPr lang="en-US" dirty="0"/>
+            </a:br>
+            <a:endParaRPr lang="en-US" dirty="0"/>
           </a:p>
           <a:p>
             <a:r>
@@ -16896,13 +17081,13 @@
   <p:clrMapOvr>
     <a:masterClrMapping/>
   </p:clrMapOvr>
-  <mc:AlternateContent xmlns:mc="http://schemas.openxmlformats.org/markup-compatibility/2006">
-    <mc:Choice xmlns:p14="http://schemas.microsoft.com/office/powerpoint/2010/main" Requires="p14">
+  <mc:AlternateContent xmlns:mc="http://schemas.openxmlformats.org/markup-compatibility/2006" xmlns:p14="http://schemas.microsoft.com/office/powerpoint/2010/main">
+    <mc:Choice Requires="p14">
       <p:transition spd="slow" p14:dur="1750">
         <p:pull/>
       </p:transition>
     </mc:Choice>
-    <mc:Fallback>
+    <mc:Fallback xmlns="">
       <p:transition spd="slow">
         <p:pull/>
       </p:transition>

--- a/docs/Deliverables/Orderly_Slides.pptx
+++ b/docs/Deliverables/Orderly_Slides.pptx
@@ -5,7 +5,7 @@
     <p:sldMasterId id="2147483648" r:id="rId1"/>
   </p:sldMasterIdLst>
   <p:notesMasterIdLst>
-    <p:notesMasterId r:id="rId19"/>
+    <p:notesMasterId r:id="rId20"/>
   </p:notesMasterIdLst>
   <p:sldIdLst>
     <p:sldId id="256" r:id="rId2"/>
@@ -21,10 +21,11 @@
     <p:sldId id="260" r:id="rId12"/>
     <p:sldId id="264" r:id="rId13"/>
     <p:sldId id="263" r:id="rId14"/>
-    <p:sldId id="265" r:id="rId15"/>
-    <p:sldId id="266" r:id="rId16"/>
-    <p:sldId id="267" r:id="rId17"/>
-    <p:sldId id="268" r:id="rId18"/>
+    <p:sldId id="274" r:id="rId15"/>
+    <p:sldId id="265" r:id="rId16"/>
+    <p:sldId id="266" r:id="rId17"/>
+    <p:sldId id="267" r:id="rId18"/>
+    <p:sldId id="268" r:id="rId19"/>
   </p:sldIdLst>
   <p:sldSz cx="9144000" cy="5143500" type="screen16x9"/>
   <p:notesSz cx="5143500" cy="9144000"/>
@@ -905,13 +906,6 @@
           </p:nvPr>
         </p:nvSpPr>
         <p:spPr/>
-        <p:txBody>
-          <a:bodyPr/>
-          <a:lstStyle/>
-          <a:p>
-            <a:endParaRPr lang="en-US"/>
-          </a:p>
-        </p:txBody>
       </p:sp>
       <p:sp>
         <p:nvSpPr>
@@ -928,15 +922,7 @@
           <a:bodyPr/>
           <a:lstStyle/>
           <a:p>
-            <a:r>
-              <a:rPr lang="en-US" b="1" dirty="0"/>
-              <a:t>🟡 Up Next: </a:t>
-            </a:r>
-            <a:r>
-              <a:rPr lang="en-US" b="0" dirty="0"/>
-              <a:t>What does the future hold in upcoming development- (Caleb Continues..)</a:t>
-            </a:r>
-            <a:endParaRPr lang="en-US" b="1" dirty="0"/>
+            <a:endParaRPr lang="en-US" dirty="0"/>
           </a:p>
         </p:txBody>
       </p:sp>
@@ -1029,22 +1015,11 @@
           <a:p>
             <a:r>
               <a:rPr lang="en-US" b="1" dirty="0"/>
-              <a:t>⏭️ Up Next: </a:t>
+              <a:t>🟡 Up Next: </a:t>
             </a:r>
             <a:r>
               <a:rPr lang="en-US" b="0" dirty="0"/>
-              <a:t>Wrap UP (Serina)</a:t>
-            </a:r>
-            <a:br>
-              <a:rPr lang="en-US" b="0" dirty="0"/>
-            </a:br>
-            <a:r>
-              <a:rPr lang="en-US" b="0" dirty="0"/>
-              <a:t>Transition with ”Now back to our PM as she guides us through our final messages ”… </a:t>
-            </a:r>
-            <a:r>
-              <a:rPr lang="en-US" b="0" i="1" dirty="0"/>
-              <a:t>or something similar</a:t>
+              <a:t>What does the future hold in upcoming development- (Caleb Continues..)</a:t>
             </a:r>
             <a:endParaRPr lang="en-US" b="1" dirty="0"/>
           </a:p>
@@ -1139,236 +1114,22 @@
           <a:p>
             <a:r>
               <a:rPr lang="en-US" b="1" dirty="0"/>
-              <a:t>🟡 Up Next: “</a:t>
+              <a:t>⏭️ Up Next: </a:t>
+            </a:r>
+            <a:r>
+              <a:rPr lang="en-US" b="0" dirty="0"/>
+              <a:t>Wrap UP (Serina)</a:t>
+            </a:r>
+            <a:br>
+              <a:rPr lang="en-US" b="0" dirty="0"/>
+            </a:br>
+            <a:r>
+              <a:rPr lang="en-US" b="0" dirty="0"/>
+              <a:t>Transition with ”Now back to our PM as she guides us through our final messages ”… </a:t>
             </a:r>
             <a:r>
               <a:rPr lang="en-US" b="0" i="1" dirty="0"/>
-              <a:t>Before we present our demonstration, we have about ~_____ minutes for questions.” </a:t>
-            </a:r>
-            <a:r>
-              <a:rPr lang="en-US" b="0" dirty="0"/>
-              <a:t>(Next Slide, whole team ready on standby)</a:t>
-            </a:r>
-          </a:p>
-          <a:p>
-            <a:endParaRPr lang="en-US" b="0" dirty="0"/>
-          </a:p>
-          <a:p>
-            <a:r>
-              <a:rPr lang="en-US" dirty="0"/>
-              <a:t>Before I open the floor for questions, I want to close with what this experience </a:t>
-            </a:r>
-            <a:r>
-              <a:rPr lang="en-US" i="1" dirty="0"/>
-              <a:t>actually</a:t>
-            </a:r>
-            <a:r>
-              <a:rPr lang="en-US" dirty="0"/>
-              <a:t> taught us.</a:t>
-            </a:r>
-          </a:p>
-          <a:p>
-            <a:endParaRPr lang="en-US" dirty="0"/>
-          </a:p>
-          <a:p>
-            <a:r>
-              <a:rPr lang="en-US" b="1" dirty="0"/>
-              <a:t>Dependency-first planning </a:t>
-            </a:r>
-            <a:r>
-              <a:rPr lang="en-US" dirty="0"/>
-              <a:t>changed how we worked. </a:t>
-            </a:r>
-          </a:p>
-          <a:p>
-            <a:r>
-              <a:rPr lang="en-US" dirty="0"/>
-              <a:t>Early in the project, we learned the hard way that when one piece arrives late… everything downstream stalls. </a:t>
-            </a:r>
-          </a:p>
-          <a:p>
-            <a:endParaRPr lang="en-US" b="1" dirty="0"/>
-          </a:p>
-          <a:p>
-            <a:r>
-              <a:rPr lang="en-US" b="1" dirty="0"/>
-              <a:t>.. Wave-based delivery </a:t>
-            </a:r>
-            <a:r>
-              <a:rPr lang="en-US" dirty="0"/>
-              <a:t>fixed that — and it's something I'll carry into every project I manage going forward</a:t>
-            </a:r>
-            <a:r>
-              <a:rPr lang="en-US" b="1" dirty="0"/>
-              <a:t>, </a:t>
-            </a:r>
-          </a:p>
-          <a:p>
-            <a:r>
-              <a:rPr lang="en-US" b="1" dirty="0"/>
-              <a:t>or at the very least…</a:t>
-            </a:r>
-            <a:r>
-              <a:rPr lang="en-US" dirty="0"/>
-              <a:t> having a contingency plan for dependencies.</a:t>
-            </a:r>
-            <a:br>
-              <a:rPr lang="en-US" dirty="0"/>
-            </a:br>
-            <a:endParaRPr lang="en-US" dirty="0"/>
-          </a:p>
-          <a:p>
-            <a:r>
-              <a:rPr lang="en-US" b="1" dirty="0"/>
-              <a:t>Vocabulary matters more than we expected</a:t>
-            </a:r>
-            <a:r>
-              <a:rPr lang="en-US" dirty="0"/>
-              <a:t>. Understanding the language of APIs, endpoints, and contracts earlier would have saved us real time across the team. </a:t>
-            </a:r>
-          </a:p>
-          <a:p>
-            <a:r>
-              <a:rPr lang="en-US" dirty="0"/>
-              <a:t>Communication only works when everyone is speaking the </a:t>
-            </a:r>
-            <a:r>
-              <a:rPr lang="en-US" b="1" dirty="0"/>
-              <a:t>same</a:t>
-            </a:r>
-            <a:r>
-              <a:rPr lang="en-US" dirty="0"/>
-              <a:t> language.</a:t>
-            </a:r>
-          </a:p>
-          <a:p>
-            <a:endParaRPr lang="en-US" dirty="0"/>
-          </a:p>
-          <a:p>
-            <a:r>
-              <a:rPr lang="en-US" dirty="0"/>
-              <a:t>Importantly, </a:t>
-            </a:r>
-            <a:r>
-              <a:rPr lang="en-US" i="1" dirty="0"/>
-              <a:t>Collaborative development is a skill </a:t>
-            </a:r>
-            <a:r>
-              <a:rPr lang="en-US" dirty="0"/>
-              <a:t>— and it's one we built </a:t>
-            </a:r>
-            <a:r>
-              <a:rPr lang="en-US" b="1" dirty="0"/>
-              <a:t>sprint over sprint</a:t>
-            </a:r>
-            <a:r>
-              <a:rPr lang="en-US" dirty="0"/>
-              <a:t>. </a:t>
-            </a:r>
-          </a:p>
-          <a:p>
-            <a:r>
-              <a:rPr lang="en-US" dirty="0"/>
-              <a:t>Better PR habits, better check-ins, better handoffs. It didn't happen overnight, but </a:t>
-            </a:r>
-            <a:r>
-              <a:rPr lang="en-US" b="1" i="1" dirty="0"/>
-              <a:t>it</a:t>
-            </a:r>
-            <a:r>
-              <a:rPr lang="en-US" dirty="0"/>
-              <a:t> </a:t>
-            </a:r>
-            <a:r>
-              <a:rPr lang="en-US" b="1" i="1" dirty="0"/>
-              <a:t>happened</a:t>
-            </a:r>
-            <a:r>
-              <a:rPr lang="en-US" dirty="0"/>
-              <a:t>.</a:t>
-            </a:r>
-          </a:p>
-          <a:p>
-            <a:endParaRPr lang="en-US" dirty="0"/>
-          </a:p>
-          <a:p>
-            <a:r>
-              <a:rPr lang="en-US" dirty="0"/>
-              <a:t>And lastly, Agile works when the team owns it. </a:t>
-            </a:r>
-          </a:p>
-          <a:p>
-            <a:r>
-              <a:rPr lang="en-US" dirty="0"/>
-              <a:t>We didn't just note our retrospective actions. We </a:t>
-            </a:r>
-            <a:r>
-              <a:rPr lang="en-US" b="1" dirty="0"/>
-              <a:t>acted on </a:t>
-            </a:r>
-            <a:r>
-              <a:rPr lang="en-US" dirty="0"/>
-              <a:t>them. Every sprint closed </a:t>
-            </a:r>
-            <a:r>
-              <a:rPr lang="en-US" i="1" dirty="0"/>
-              <a:t>better than</a:t>
-            </a:r>
-            <a:r>
-              <a:rPr lang="en-US" dirty="0"/>
-              <a:t> the one before it.</a:t>
-            </a:r>
-          </a:p>
-          <a:p>
-            <a:endParaRPr lang="en-US" dirty="0"/>
-          </a:p>
-          <a:p>
-            <a:r>
-              <a:rPr lang="en-US" dirty="0"/>
-              <a:t>We built something real. A platform that looks, works, and ships like professional software. </a:t>
-            </a:r>
-          </a:p>
-          <a:p>
-            <a:r>
-              <a:rPr lang="en-US" dirty="0"/>
-              <a:t>And we built it together — as </a:t>
-            </a:r>
-            <a:r>
-              <a:rPr lang="en-US" b="1" dirty="0"/>
-              <a:t>academic</a:t>
-            </a:r>
-            <a:r>
-              <a:rPr lang="en-US" dirty="0"/>
-              <a:t> </a:t>
-            </a:r>
-            <a:r>
-              <a:rPr lang="en-US" i="1" dirty="0"/>
-              <a:t>software developers</a:t>
-            </a:r>
-            <a:r>
-              <a:rPr lang="en-US" dirty="0"/>
-              <a:t>. 👏</a:t>
-            </a:r>
-          </a:p>
-          <a:p>
-            <a:endParaRPr lang="en-US" dirty="0"/>
-          </a:p>
-          <a:p>
-            <a:r>
-              <a:rPr lang="en-US" dirty="0"/>
-              <a:t>Thank you. </a:t>
-            </a:r>
-          </a:p>
-          <a:p>
-            <a:r>
-              <a:rPr lang="en-US" dirty="0"/>
-              <a:t>We'll now open the floor for questions — before we bring everything together with a demo, </a:t>
-            </a:r>
-          </a:p>
-          <a:p>
-            <a:r>
-              <a:rPr lang="en-US" dirty="0"/>
-              <a:t>built and delivered by your team of dedicated Project Capstone students.</a:t>
+              <a:t>or something similar</a:t>
             </a:r>
             <a:endParaRPr lang="en-US" b="1" dirty="0"/>
           </a:p>
@@ -1462,9 +1223,239 @@
           <a:lstStyle/>
           <a:p>
             <a:r>
+              <a:rPr lang="en-US" b="1" dirty="0"/>
+              <a:t>🟡 Up Next: “</a:t>
+            </a:r>
+            <a:r>
+              <a:rPr lang="en-US" b="0" i="1" dirty="0"/>
+              <a:t>Before we present our demonstration, we have about ~_____ minutes for questions.” </a:t>
+            </a:r>
+            <a:r>
+              <a:rPr lang="en-US" b="0" dirty="0"/>
+              <a:t>(Next Slide, whole team ready on standby)</a:t>
+            </a:r>
+          </a:p>
+          <a:p>
+            <a:endParaRPr lang="en-US" b="0" dirty="0"/>
+          </a:p>
+          <a:p>
+            <a:r>
               <a:rPr lang="en-US" dirty="0"/>
-              <a:t>All team members should be prepared to step forward to answer any questions respectively</a:t>
-            </a:r>
+              <a:t>Before I open the floor for questions, I want to close with what this experience </a:t>
+            </a:r>
+            <a:r>
+              <a:rPr lang="en-US" i="1" dirty="0"/>
+              <a:t>actually</a:t>
+            </a:r>
+            <a:r>
+              <a:rPr lang="en-US" dirty="0"/>
+              <a:t> taught us.</a:t>
+            </a:r>
+          </a:p>
+          <a:p>
+            <a:endParaRPr lang="en-US" dirty="0"/>
+          </a:p>
+          <a:p>
+            <a:r>
+              <a:rPr lang="en-US" b="1" dirty="0"/>
+              <a:t>Dependency-first planning </a:t>
+            </a:r>
+            <a:r>
+              <a:rPr lang="en-US" dirty="0"/>
+              <a:t>changed how we worked. </a:t>
+            </a:r>
+          </a:p>
+          <a:p>
+            <a:r>
+              <a:rPr lang="en-US" dirty="0"/>
+              <a:t>Early in the project, we learned the hard way that when one piece arrives late… everything downstream stalls. </a:t>
+            </a:r>
+          </a:p>
+          <a:p>
+            <a:endParaRPr lang="en-US" b="1" dirty="0"/>
+          </a:p>
+          <a:p>
+            <a:r>
+              <a:rPr lang="en-US" b="1" dirty="0"/>
+              <a:t>.. Wave-based delivery </a:t>
+            </a:r>
+            <a:r>
+              <a:rPr lang="en-US" dirty="0"/>
+              <a:t>fixed that — and it's something I'll carry into every project I manage going forward</a:t>
+            </a:r>
+            <a:r>
+              <a:rPr lang="en-US" b="1" dirty="0"/>
+              <a:t>, </a:t>
+            </a:r>
+          </a:p>
+          <a:p>
+            <a:r>
+              <a:rPr lang="en-US" b="1" dirty="0"/>
+              <a:t>or at the very least…</a:t>
+            </a:r>
+            <a:r>
+              <a:rPr lang="en-US" dirty="0"/>
+              <a:t> having a contingency plan for dependencies.</a:t>
+            </a:r>
+            <a:br>
+              <a:rPr lang="en-US" dirty="0"/>
+            </a:br>
+            <a:endParaRPr lang="en-US" dirty="0"/>
+          </a:p>
+          <a:p>
+            <a:r>
+              <a:rPr lang="en-US" b="1" dirty="0"/>
+              <a:t>Vocabulary matters more than we expected</a:t>
+            </a:r>
+            <a:r>
+              <a:rPr lang="en-US" dirty="0"/>
+              <a:t>. Understanding the language of APIs, endpoints, and contracts earlier would have saved us real time across the team. </a:t>
+            </a:r>
+          </a:p>
+          <a:p>
+            <a:r>
+              <a:rPr lang="en-US" dirty="0"/>
+              <a:t>Communication only works when everyone is speaking the </a:t>
+            </a:r>
+            <a:r>
+              <a:rPr lang="en-US" b="1" dirty="0"/>
+              <a:t>same</a:t>
+            </a:r>
+            <a:r>
+              <a:rPr lang="en-US" dirty="0"/>
+              <a:t> language.</a:t>
+            </a:r>
+          </a:p>
+          <a:p>
+            <a:endParaRPr lang="en-US" dirty="0"/>
+          </a:p>
+          <a:p>
+            <a:r>
+              <a:rPr lang="en-US" dirty="0"/>
+              <a:t>Importantly, </a:t>
+            </a:r>
+            <a:r>
+              <a:rPr lang="en-US" i="1" dirty="0"/>
+              <a:t>Collaborative development is a skill </a:t>
+            </a:r>
+            <a:r>
+              <a:rPr lang="en-US" dirty="0"/>
+              <a:t>— and it's one we built </a:t>
+            </a:r>
+            <a:r>
+              <a:rPr lang="en-US" b="1" dirty="0"/>
+              <a:t>sprint over sprint</a:t>
+            </a:r>
+            <a:r>
+              <a:rPr lang="en-US" dirty="0"/>
+              <a:t>. </a:t>
+            </a:r>
+          </a:p>
+          <a:p>
+            <a:r>
+              <a:rPr lang="en-US" dirty="0"/>
+              <a:t>Better PR habits, better check-ins, better handoffs. It didn't happen overnight, but </a:t>
+            </a:r>
+            <a:r>
+              <a:rPr lang="en-US" b="1" i="1" dirty="0"/>
+              <a:t>it</a:t>
+            </a:r>
+            <a:r>
+              <a:rPr lang="en-US" dirty="0"/>
+              <a:t> </a:t>
+            </a:r>
+            <a:r>
+              <a:rPr lang="en-US" b="1" i="1" dirty="0"/>
+              <a:t>happened</a:t>
+            </a:r>
+            <a:r>
+              <a:rPr lang="en-US" dirty="0"/>
+              <a:t>.</a:t>
+            </a:r>
+          </a:p>
+          <a:p>
+            <a:endParaRPr lang="en-US" dirty="0"/>
+          </a:p>
+          <a:p>
+            <a:r>
+              <a:rPr lang="en-US" dirty="0"/>
+              <a:t>And lastly, Agile works when the team owns it. </a:t>
+            </a:r>
+          </a:p>
+          <a:p>
+            <a:r>
+              <a:rPr lang="en-US" dirty="0"/>
+              <a:t>We didn't just note our retrospective actions. We </a:t>
+            </a:r>
+            <a:r>
+              <a:rPr lang="en-US" b="1" dirty="0"/>
+              <a:t>acted on </a:t>
+            </a:r>
+            <a:r>
+              <a:rPr lang="en-US" dirty="0"/>
+              <a:t>them. Every sprint closed </a:t>
+            </a:r>
+            <a:r>
+              <a:rPr lang="en-US" i="1" dirty="0"/>
+              <a:t>better than</a:t>
+            </a:r>
+            <a:r>
+              <a:rPr lang="en-US" dirty="0"/>
+              <a:t> the one before it.</a:t>
+            </a:r>
+          </a:p>
+          <a:p>
+            <a:endParaRPr lang="en-US" dirty="0"/>
+          </a:p>
+          <a:p>
+            <a:r>
+              <a:rPr lang="en-US" dirty="0"/>
+              <a:t>We built something real. A platform that looks, works, and ships like professional software. </a:t>
+            </a:r>
+          </a:p>
+          <a:p>
+            <a:r>
+              <a:rPr lang="en-US" dirty="0"/>
+              <a:t>And we built it together — as </a:t>
+            </a:r>
+            <a:r>
+              <a:rPr lang="en-US" b="1" dirty="0"/>
+              <a:t>academic</a:t>
+            </a:r>
+            <a:r>
+              <a:rPr lang="en-US" dirty="0"/>
+              <a:t> </a:t>
+            </a:r>
+            <a:r>
+              <a:rPr lang="en-US" i="1" dirty="0"/>
+              <a:t>software developers</a:t>
+            </a:r>
+            <a:r>
+              <a:rPr lang="en-US" dirty="0"/>
+              <a:t>. 👏</a:t>
+            </a:r>
+          </a:p>
+          <a:p>
+            <a:endParaRPr lang="en-US" dirty="0"/>
+          </a:p>
+          <a:p>
+            <a:r>
+              <a:rPr lang="en-US" dirty="0"/>
+              <a:t>Thank you. </a:t>
+            </a:r>
+          </a:p>
+          <a:p>
+            <a:r>
+              <a:rPr lang="en-US" dirty="0"/>
+              <a:t>We'll now open the floor for questions — before we bring everything together with a demo, </a:t>
+            </a:r>
+          </a:p>
+          <a:p>
+            <a:r>
+              <a:rPr lang="en-US" dirty="0"/>
+              <a:t>built and delivered by your team of dedicated Project Capstone students.</a:t>
+            </a:r>
+            <a:endParaRPr lang="en-US" b="1" dirty="0"/>
           </a:p>
         </p:txBody>
       </p:sp>
@@ -1486,6 +1477,100 @@
             <a:fld id="{F7021451-1387-4CA6-816F-3879F97B5CBC}" type="slidenum">
               <a:rPr lang="en-US"/>
               <a:t>17</a:t>
+            </a:fld>
+            <a:endParaRPr lang="en-US"/>
+          </a:p>
+        </p:txBody>
+      </p:sp>
+    </p:spTree>
+    <p:extLst>
+      <p:ext uri="{BB962C8B-B14F-4D97-AF65-F5344CB8AC3E}">
+        <p14:creationId xmlns:p14="http://schemas.microsoft.com/office/powerpoint/2010/main" val="1024086991"/>
+      </p:ext>
+    </p:extLst>
+  </p:cSld>
+  <p:clrMapOvr>
+    <a:masterClrMapping/>
+  </p:clrMapOvr>
+</p:notes>
+</file>
+
+<file path=ppt/notesSlides/notesSlide18.xml><?xml version="1.0" encoding="utf-8"?>
+<p:notes xmlns:a="http://schemas.openxmlformats.org/drawingml/2006/main" xmlns:r="http://schemas.openxmlformats.org/officeDocument/2006/relationships" xmlns:p="http://schemas.openxmlformats.org/presentationml/2006/main">
+  <p:cSld>
+    <p:spTree>
+      <p:nvGrpSpPr>
+        <p:cNvPr id="1" name=""/>
+        <p:cNvGrpSpPr/>
+        <p:nvPr/>
+      </p:nvGrpSpPr>
+      <p:grpSpPr>
+        <a:xfrm>
+          <a:off x="0" y="0"/>
+          <a:ext cx="0" cy="0"/>
+          <a:chOff x="0" y="0"/>
+          <a:chExt cx="0" cy="0"/>
+        </a:xfrm>
+      </p:grpSpPr>
+      <p:sp>
+        <p:nvSpPr>
+          <p:cNvPr id="2" name="Slide Image Placeholder 1"/>
+          <p:cNvSpPr>
+            <a:spLocks noGrp="1" noRot="1" noChangeAspect="1"/>
+          </p:cNvSpPr>
+          <p:nvPr>
+            <p:ph type="sldImg"/>
+          </p:nvPr>
+        </p:nvSpPr>
+        <p:spPr/>
+        <p:txBody>
+          <a:bodyPr/>
+          <a:lstStyle/>
+          <a:p>
+            <a:endParaRPr lang="en-US"/>
+          </a:p>
+        </p:txBody>
+      </p:sp>
+      <p:sp>
+        <p:nvSpPr>
+          <p:cNvPr id="3" name="Notes Placeholder 2"/>
+          <p:cNvSpPr>
+            <a:spLocks noGrp="1"/>
+          </p:cNvSpPr>
+          <p:nvPr>
+            <p:ph type="body" idx="1"/>
+          </p:nvPr>
+        </p:nvSpPr>
+        <p:spPr/>
+        <p:txBody>
+          <a:bodyPr/>
+          <a:lstStyle/>
+          <a:p>
+            <a:r>
+              <a:rPr lang="en-US" dirty="0"/>
+              <a:t>All team members should be prepared to step forward to answer any questions respectively</a:t>
+            </a:r>
+          </a:p>
+        </p:txBody>
+      </p:sp>
+      <p:sp>
+        <p:nvSpPr>
+          <p:cNvPr id="4" name="Slide Number Placeholder 3"/>
+          <p:cNvSpPr>
+            <a:spLocks noGrp="1"/>
+          </p:cNvSpPr>
+          <p:nvPr>
+            <p:ph type="sldNum" sz="quarter" idx="10"/>
+          </p:nvPr>
+        </p:nvSpPr>
+        <p:spPr/>
+        <p:txBody>
+          <a:bodyPr/>
+          <a:lstStyle/>
+          <a:p>
+            <a:fld id="{F7021451-1387-4CA6-816F-3879F97B5CBC}" type="slidenum">
+              <a:rPr lang="en-US"/>
+              <a:t>18</a:t>
             </a:fld>
             <a:endParaRPr lang="en-US"/>
           </a:p>
@@ -10899,6 +10984,934 @@
 
 <file path=ppt/slides/slide14.xml><?xml version="1.0" encoding="utf-8"?>
 <p:sld xmlns:a="http://schemas.openxmlformats.org/drawingml/2006/main" xmlns:r="http://schemas.openxmlformats.org/officeDocument/2006/relationships" xmlns:p="http://schemas.openxmlformats.org/presentationml/2006/main">
+  <p:cSld>
+    <p:bg>
+      <p:bgPr>
+        <a:solidFill>
+          <a:srgbClr val="1A1A2E"/>
+        </a:solidFill>
+        <a:effectLst/>
+      </p:bgPr>
+    </p:bg>
+    <p:spTree>
+      <p:nvGrpSpPr>
+        <p:cNvPr id="1" name=""/>
+        <p:cNvGrpSpPr/>
+        <p:nvPr/>
+      </p:nvGrpSpPr>
+      <p:grpSpPr>
+        <a:xfrm>
+          <a:off x="0" y="0"/>
+          <a:ext cx="0" cy="0"/>
+          <a:chOff x="0" y="0"/>
+          <a:chExt cx="0" cy="0"/>
+        </a:xfrm>
+      </p:grpSpPr>
+      <p:sp>
+        <p:nvSpPr>
+          <p:cNvPr id="5" name="Shape 3"/>
+          <p:cNvSpPr/>
+          <p:nvPr/>
+        </p:nvSpPr>
+        <p:spPr>
+          <a:xfrm>
+            <a:off x="457200" y="1188720"/>
+            <a:ext cx="2606040" cy="2240280"/>
+          </a:xfrm>
+          <a:prstGeom prst="rect">
+            <a:avLst/>
+          </a:prstGeom>
+          <a:solidFill>
+            <a:srgbClr val="FFFFFF"/>
+          </a:solidFill>
+          <a:ln w="12700">
+            <a:solidFill>
+              <a:srgbClr val="FFFFFF"/>
+            </a:solidFill>
+            <a:prstDash val="solid"/>
+          </a:ln>
+          <a:effectLst>
+            <a:outerShdw blurRad="101600" dist="38100" dir="8100000" algn="bl" rotWithShape="0">
+              <a:srgbClr val="000000">
+                <a:alpha val="18000"/>
+              </a:srgbClr>
+            </a:outerShdw>
+          </a:effectLst>
+        </p:spPr>
+        <p:txBody>
+          <a:bodyPr/>
+          <a:lstStyle/>
+          <a:p>
+            <a:endParaRPr lang="en-US"/>
+          </a:p>
+        </p:txBody>
+      </p:sp>
+      <p:sp>
+        <p:nvSpPr>
+          <p:cNvPr id="6" name="Shape 4"/>
+          <p:cNvSpPr/>
+          <p:nvPr/>
+        </p:nvSpPr>
+        <p:spPr>
+          <a:xfrm>
+            <a:off x="457200" y="1188720"/>
+            <a:ext cx="2606040" cy="347472"/>
+          </a:xfrm>
+          <a:prstGeom prst="rect">
+            <a:avLst/>
+          </a:prstGeom>
+          <a:solidFill>
+            <a:srgbClr val="7C3AED"/>
+          </a:solidFill>
+          <a:ln w="12700">
+            <a:solidFill>
+              <a:srgbClr val="7C3AED"/>
+            </a:solidFill>
+            <a:prstDash val="solid"/>
+          </a:ln>
+        </p:spPr>
+        <p:txBody>
+          <a:bodyPr/>
+          <a:lstStyle/>
+          <a:p>
+            <a:endParaRPr lang="en-US"/>
+          </a:p>
+        </p:txBody>
+      </p:sp>
+      <p:pic>
+        <p:nvPicPr>
+          <p:cNvPr id="7" name="Image 0" descr="preencoded.png"/>
+          <p:cNvPicPr>
+            <a:picLocks noChangeAspect="1"/>
+          </p:cNvPicPr>
+          <p:nvPr/>
+        </p:nvPicPr>
+        <p:blipFill>
+          <a:blip r:embed="rId3"/>
+          <a:stretch>
+            <a:fillRect/>
+          </a:stretch>
+        </p:blipFill>
+        <p:spPr>
+          <a:xfrm>
+            <a:off x="594360" y="1252728"/>
+            <a:ext cx="219456" cy="219456"/>
+          </a:xfrm>
+          <a:prstGeom prst="rect">
+            <a:avLst/>
+          </a:prstGeom>
+        </p:spPr>
+      </p:pic>
+      <p:sp>
+        <p:nvSpPr>
+          <p:cNvPr id="8" name="Text 5"/>
+          <p:cNvSpPr/>
+          <p:nvPr/>
+        </p:nvSpPr>
+        <p:spPr>
+          <a:xfrm>
+            <a:off x="859536" y="1225296"/>
+            <a:ext cx="2148840" cy="292608"/>
+          </a:xfrm>
+          <a:prstGeom prst="rect">
+            <a:avLst/>
+          </a:prstGeom>
+          <a:noFill/>
+          <a:ln/>
+        </p:spPr>
+        <p:txBody>
+          <a:bodyPr wrap="square" lIns="0" tIns="0" rIns="0" bIns="0" rtlCol="0" anchor="ctr"/>
+          <a:lstStyle/>
+          <a:p>
+            <a:pPr marL="0" indent="0">
+              <a:buNone/>
+            </a:pPr>
+            <a:r>
+              <a:rPr lang="en-US" sz="1100" b="1" dirty="0">
+                <a:solidFill>
+                  <a:srgbClr val="FFFFFF"/>
+                </a:solidFill>
+                <a:latin typeface="Calibri" pitchFamily="34" charset="0"/>
+                <a:ea typeface="Calibri" pitchFamily="34" charset="-122"/>
+                <a:cs typeface="Calibri" pitchFamily="34" charset="-120"/>
+              </a:rPr>
+              <a:t>The Challenge</a:t>
+            </a:r>
+            <a:endParaRPr lang="en-US" sz="1100" dirty="0"/>
+          </a:p>
+        </p:txBody>
+      </p:sp>
+      <p:sp>
+        <p:nvSpPr>
+          <p:cNvPr id="9" name="Text 6"/>
+          <p:cNvSpPr/>
+          <p:nvPr/>
+        </p:nvSpPr>
+        <p:spPr>
+          <a:xfrm>
+            <a:off x="594360" y="1627632"/>
+            <a:ext cx="2331720" cy="1737360"/>
+          </a:xfrm>
+          <a:prstGeom prst="rect">
+            <a:avLst/>
+          </a:prstGeom>
+          <a:noFill/>
+          <a:ln/>
+        </p:spPr>
+        <p:txBody>
+          <a:bodyPr wrap="square" rtlCol="0" anchor="t"/>
+          <a:lstStyle/>
+          <a:p>
+            <a:pPr marL="0" indent="0">
+              <a:buNone/>
+            </a:pPr>
+            <a:r>
+              <a:rPr lang="en-US" sz="1000" b="1" dirty="0">
+                <a:solidFill>
+                  <a:srgbClr val="1A1A2E"/>
+                </a:solidFill>
+                <a:latin typeface="Calibri" pitchFamily="34" charset="0"/>
+                <a:ea typeface="Calibri" pitchFamily="34" charset="-122"/>
+                <a:cs typeface="Calibri" pitchFamily="34" charset="-120"/>
+              </a:rPr>
+              <a:t>Feature Area / Test Name
+</a:t>
+            </a:r>
+            <a:endParaRPr lang="en-US" sz="1000" dirty="0"/>
+          </a:p>
+          <a:p>
+            <a:pPr marL="0" indent="0">
+              <a:buNone/>
+            </a:pPr>
+            <a:r>
+              <a:rPr lang="en-US" sz="1000" dirty="0">
+                <a:solidFill>
+                  <a:srgbClr val="64748B"/>
+                </a:solidFill>
+                <a:latin typeface="Calibri" pitchFamily="34" charset="0"/>
+                <a:ea typeface="Calibri" pitchFamily="34" charset="-122"/>
+                <a:cs typeface="Calibri" pitchFamily="34" charset="-120"/>
+              </a:rPr>
+              <a:t>[Placeholder: Describe what this test was validating — e.g., role-based access control on admin routes, or end-to-end order submission flow.]</a:t>
+            </a:r>
+            <a:endParaRPr lang="en-US" sz="1000" dirty="0"/>
+          </a:p>
+        </p:txBody>
+      </p:sp>
+      <p:sp>
+        <p:nvSpPr>
+          <p:cNvPr id="10" name="Shape 7"/>
+          <p:cNvSpPr/>
+          <p:nvPr/>
+        </p:nvSpPr>
+        <p:spPr>
+          <a:xfrm>
+            <a:off x="3273552" y="1188720"/>
+            <a:ext cx="2606040" cy="2240280"/>
+          </a:xfrm>
+          <a:prstGeom prst="rect">
+            <a:avLst/>
+          </a:prstGeom>
+          <a:solidFill>
+            <a:srgbClr val="FFFFFF"/>
+          </a:solidFill>
+          <a:ln w="12700">
+            <a:solidFill>
+              <a:srgbClr val="FFFFFF"/>
+            </a:solidFill>
+            <a:prstDash val="solid"/>
+          </a:ln>
+          <a:effectLst>
+            <a:outerShdw blurRad="101600" dist="38100" dir="8100000" algn="bl" rotWithShape="0">
+              <a:srgbClr val="000000">
+                <a:alpha val="18000"/>
+              </a:srgbClr>
+            </a:outerShdw>
+          </a:effectLst>
+        </p:spPr>
+        <p:txBody>
+          <a:bodyPr/>
+          <a:lstStyle/>
+          <a:p>
+            <a:endParaRPr lang="en-US"/>
+          </a:p>
+        </p:txBody>
+      </p:sp>
+      <p:sp>
+        <p:nvSpPr>
+          <p:cNvPr id="11" name="Shape 8"/>
+          <p:cNvSpPr/>
+          <p:nvPr/>
+        </p:nvSpPr>
+        <p:spPr>
+          <a:xfrm>
+            <a:off x="3273552" y="1188720"/>
+            <a:ext cx="2606040" cy="347472"/>
+          </a:xfrm>
+          <a:prstGeom prst="rect">
+            <a:avLst/>
+          </a:prstGeom>
+          <a:solidFill>
+            <a:srgbClr val="1E3A5F"/>
+          </a:solidFill>
+          <a:ln w="12700">
+            <a:solidFill>
+              <a:srgbClr val="1E3A5F"/>
+            </a:solidFill>
+            <a:prstDash val="solid"/>
+          </a:ln>
+        </p:spPr>
+        <p:txBody>
+          <a:bodyPr/>
+          <a:lstStyle/>
+          <a:p>
+            <a:endParaRPr lang="en-US"/>
+          </a:p>
+        </p:txBody>
+      </p:sp>
+      <p:pic>
+        <p:nvPicPr>
+          <p:cNvPr id="12" name="Image 1" descr="preencoded.png"/>
+          <p:cNvPicPr>
+            <a:picLocks noChangeAspect="1"/>
+          </p:cNvPicPr>
+          <p:nvPr/>
+        </p:nvPicPr>
+        <p:blipFill>
+          <a:blip r:embed="rId4"/>
+          <a:stretch>
+            <a:fillRect/>
+          </a:stretch>
+        </p:blipFill>
+        <p:spPr>
+          <a:xfrm>
+            <a:off x="3410712" y="1252728"/>
+            <a:ext cx="219456" cy="219456"/>
+          </a:xfrm>
+          <a:prstGeom prst="rect">
+            <a:avLst/>
+          </a:prstGeom>
+        </p:spPr>
+      </p:pic>
+      <p:sp>
+        <p:nvSpPr>
+          <p:cNvPr id="13" name="Text 9"/>
+          <p:cNvSpPr/>
+          <p:nvPr/>
+        </p:nvSpPr>
+        <p:spPr>
+          <a:xfrm>
+            <a:off x="3675888" y="1225296"/>
+            <a:ext cx="2148840" cy="292608"/>
+          </a:xfrm>
+          <a:prstGeom prst="rect">
+            <a:avLst/>
+          </a:prstGeom>
+          <a:noFill/>
+          <a:ln/>
+        </p:spPr>
+        <p:txBody>
+          <a:bodyPr wrap="square" lIns="0" tIns="0" rIns="0" bIns="0" rtlCol="0" anchor="ctr"/>
+          <a:lstStyle/>
+          <a:p>
+            <a:pPr marL="0" indent="0">
+              <a:buNone/>
+            </a:pPr>
+            <a:r>
+              <a:rPr lang="en-US" sz="1100" b="1" dirty="0">
+                <a:solidFill>
+                  <a:srgbClr val="FFFFFF"/>
+                </a:solidFill>
+                <a:latin typeface="Calibri" pitchFamily="34" charset="0"/>
+                <a:ea typeface="Calibri" pitchFamily="34" charset="-122"/>
+                <a:cs typeface="Calibri" pitchFamily="34" charset="-120"/>
+              </a:rPr>
+              <a:t>How It Was Identified</a:t>
+            </a:r>
+            <a:endParaRPr lang="en-US" sz="1100" dirty="0"/>
+          </a:p>
+        </p:txBody>
+      </p:sp>
+      <p:sp>
+        <p:nvSpPr>
+          <p:cNvPr id="14" name="Text 10"/>
+          <p:cNvSpPr/>
+          <p:nvPr/>
+        </p:nvSpPr>
+        <p:spPr>
+          <a:xfrm>
+            <a:off x="3410712" y="1627632"/>
+            <a:ext cx="2331720" cy="1737360"/>
+          </a:xfrm>
+          <a:prstGeom prst="rect">
+            <a:avLst/>
+          </a:prstGeom>
+          <a:noFill/>
+          <a:ln/>
+        </p:spPr>
+        <p:txBody>
+          <a:bodyPr wrap="square" rtlCol="0" anchor="t"/>
+          <a:lstStyle/>
+          <a:p>
+            <a:pPr marL="0" indent="0">
+              <a:buNone/>
+            </a:pPr>
+            <a:r>
+              <a:rPr lang="en-US" sz="1000" b="1" dirty="0">
+                <a:solidFill>
+                  <a:srgbClr val="1A1A2E"/>
+                </a:solidFill>
+                <a:latin typeface="Calibri" pitchFamily="34" charset="0"/>
+                <a:ea typeface="Calibri" pitchFamily="34" charset="-122"/>
+                <a:cs typeface="Calibri" pitchFamily="34" charset="-120"/>
+              </a:rPr>
+              <a:t>Detection Method
+</a:t>
+            </a:r>
+            <a:endParaRPr lang="en-US" sz="1000" dirty="0"/>
+          </a:p>
+          <a:p>
+            <a:pPr marL="0" indent="0">
+              <a:buNone/>
+            </a:pPr>
+            <a:r>
+              <a:rPr lang="en-US" sz="1000" dirty="0">
+                <a:solidFill>
+                  <a:srgbClr val="64748B"/>
+                </a:solidFill>
+                <a:latin typeface="Calibri" pitchFamily="34" charset="0"/>
+                <a:ea typeface="Calibri" pitchFamily="34" charset="-122"/>
+                <a:cs typeface="Calibri" pitchFamily="34" charset="-120"/>
+              </a:rPr>
+              <a:t>[Placeholder: How was this caught? Automated test failure, manual QA pass, CI regression run, code review flag? 1–2 sentences on the moment of discovery.]</a:t>
+            </a:r>
+            <a:endParaRPr lang="en-US" sz="1000" dirty="0"/>
+          </a:p>
+        </p:txBody>
+      </p:sp>
+      <p:sp>
+        <p:nvSpPr>
+          <p:cNvPr id="15" name="Shape 11"/>
+          <p:cNvSpPr/>
+          <p:nvPr/>
+        </p:nvSpPr>
+        <p:spPr>
+          <a:xfrm>
+            <a:off x="6089904" y="1188720"/>
+            <a:ext cx="2606040" cy="2240280"/>
+          </a:xfrm>
+          <a:prstGeom prst="rect">
+            <a:avLst/>
+          </a:prstGeom>
+          <a:solidFill>
+            <a:srgbClr val="FFFFFF"/>
+          </a:solidFill>
+          <a:ln w="12700">
+            <a:solidFill>
+              <a:srgbClr val="FFFFFF"/>
+            </a:solidFill>
+            <a:prstDash val="solid"/>
+          </a:ln>
+          <a:effectLst>
+            <a:outerShdw blurRad="101600" dist="38100" dir="8100000" algn="bl" rotWithShape="0">
+              <a:srgbClr val="000000">
+                <a:alpha val="18000"/>
+              </a:srgbClr>
+            </a:outerShdw>
+          </a:effectLst>
+        </p:spPr>
+        <p:txBody>
+          <a:bodyPr/>
+          <a:lstStyle/>
+          <a:p>
+            <a:endParaRPr lang="en-US"/>
+          </a:p>
+        </p:txBody>
+      </p:sp>
+      <p:sp>
+        <p:nvSpPr>
+          <p:cNvPr id="16" name="Shape 12"/>
+          <p:cNvSpPr/>
+          <p:nvPr/>
+        </p:nvSpPr>
+        <p:spPr>
+          <a:xfrm>
+            <a:off x="6089904" y="1188720"/>
+            <a:ext cx="2606040" cy="347472"/>
+          </a:xfrm>
+          <a:prstGeom prst="rect">
+            <a:avLst/>
+          </a:prstGeom>
+          <a:solidFill>
+            <a:srgbClr val="009F6B"/>
+          </a:solidFill>
+          <a:ln w="12700">
+            <a:solidFill>
+              <a:srgbClr val="009F6B"/>
+            </a:solidFill>
+            <a:prstDash val="solid"/>
+          </a:ln>
+        </p:spPr>
+        <p:txBody>
+          <a:bodyPr/>
+          <a:lstStyle/>
+          <a:p>
+            <a:endParaRPr lang="en-US"/>
+          </a:p>
+        </p:txBody>
+      </p:sp>
+      <p:pic>
+        <p:nvPicPr>
+          <p:cNvPr id="17" name="Image 2" descr="preencoded.png"/>
+          <p:cNvPicPr>
+            <a:picLocks noChangeAspect="1"/>
+          </p:cNvPicPr>
+          <p:nvPr/>
+        </p:nvPicPr>
+        <p:blipFill>
+          <a:blip r:embed="rId5"/>
+          <a:stretch>
+            <a:fillRect/>
+          </a:stretch>
+        </p:blipFill>
+        <p:spPr>
+          <a:xfrm>
+            <a:off x="6227064" y="1252728"/>
+            <a:ext cx="219456" cy="219456"/>
+          </a:xfrm>
+          <a:prstGeom prst="rect">
+            <a:avLst/>
+          </a:prstGeom>
+        </p:spPr>
+      </p:pic>
+      <p:sp>
+        <p:nvSpPr>
+          <p:cNvPr id="18" name="Text 13"/>
+          <p:cNvSpPr/>
+          <p:nvPr/>
+        </p:nvSpPr>
+        <p:spPr>
+          <a:xfrm>
+            <a:off x="6492240" y="1225296"/>
+            <a:ext cx="2148840" cy="292608"/>
+          </a:xfrm>
+          <a:prstGeom prst="rect">
+            <a:avLst/>
+          </a:prstGeom>
+          <a:noFill/>
+          <a:ln/>
+        </p:spPr>
+        <p:txBody>
+          <a:bodyPr wrap="square" lIns="0" tIns="0" rIns="0" bIns="0" rtlCol="0" anchor="ctr"/>
+          <a:lstStyle/>
+          <a:p>
+            <a:pPr marL="0" indent="0">
+              <a:buNone/>
+            </a:pPr>
+            <a:r>
+              <a:rPr lang="en-US" sz="1100" b="1" dirty="0">
+                <a:solidFill>
+                  <a:srgbClr val="FFFFFF"/>
+                </a:solidFill>
+                <a:latin typeface="Calibri" pitchFamily="34" charset="0"/>
+                <a:ea typeface="Calibri" pitchFamily="34" charset="-122"/>
+                <a:cs typeface="Calibri" pitchFamily="34" charset="-120"/>
+              </a:rPr>
+              <a:t>Resolution &amp; Outcome</a:t>
+            </a:r>
+            <a:endParaRPr lang="en-US" sz="1100" dirty="0"/>
+          </a:p>
+        </p:txBody>
+      </p:sp>
+      <p:sp>
+        <p:nvSpPr>
+          <p:cNvPr id="19" name="Text 14"/>
+          <p:cNvSpPr/>
+          <p:nvPr/>
+        </p:nvSpPr>
+        <p:spPr>
+          <a:xfrm>
+            <a:off x="6227064" y="1627632"/>
+            <a:ext cx="2331720" cy="1737360"/>
+          </a:xfrm>
+          <a:prstGeom prst="rect">
+            <a:avLst/>
+          </a:prstGeom>
+          <a:noFill/>
+          <a:ln/>
+        </p:spPr>
+        <p:txBody>
+          <a:bodyPr wrap="square" rtlCol="0" anchor="t"/>
+          <a:lstStyle/>
+          <a:p>
+            <a:pPr marL="0" indent="0">
+              <a:buNone/>
+            </a:pPr>
+            <a:r>
+              <a:rPr lang="en-US" sz="1000" b="1" dirty="0">
+                <a:solidFill>
+                  <a:srgbClr val="1A1A2E"/>
+                </a:solidFill>
+                <a:latin typeface="Calibri" pitchFamily="34" charset="0"/>
+                <a:ea typeface="Calibri" pitchFamily="34" charset="-122"/>
+                <a:cs typeface="Calibri" pitchFamily="34" charset="-120"/>
+              </a:rPr>
+              <a:t>Team Collaboration
+</a:t>
+            </a:r>
+            <a:endParaRPr lang="en-US" sz="1000" dirty="0"/>
+          </a:p>
+          <a:p>
+            <a:pPr marL="0" indent="0">
+              <a:buNone/>
+            </a:pPr>
+            <a:r>
+              <a:rPr lang="en-US" sz="1000" dirty="0">
+                <a:solidFill>
+                  <a:srgbClr val="64748B"/>
+                </a:solidFill>
+                <a:latin typeface="Calibri" pitchFamily="34" charset="0"/>
+                <a:ea typeface="Calibri" pitchFamily="34" charset="-122"/>
+                <a:cs typeface="Calibri" pitchFamily="34" charset="-120"/>
+              </a:rPr>
+              <a:t>[Placeholder: Who flagged it, who fixed it, how it was verified. E.g., 'Kenny identified the failure, Tristin traced it to the API layer, Kim deployed the fix — retested and confirmed passing.']</a:t>
+            </a:r>
+            <a:endParaRPr lang="en-US" sz="1000" dirty="0"/>
+          </a:p>
+        </p:txBody>
+      </p:sp>
+      <p:sp>
+        <p:nvSpPr>
+          <p:cNvPr id="20" name="Shape 15"/>
+          <p:cNvSpPr/>
+          <p:nvPr/>
+        </p:nvSpPr>
+        <p:spPr>
+          <a:xfrm>
+            <a:off x="457200" y="3602736"/>
+            <a:ext cx="8321040" cy="1325880"/>
+          </a:xfrm>
+          <a:prstGeom prst="rect">
+            <a:avLst/>
+          </a:prstGeom>
+          <a:solidFill>
+            <a:srgbClr val="0D2137"/>
+          </a:solidFill>
+          <a:ln w="12700">
+            <a:solidFill>
+              <a:srgbClr val="0D2137"/>
+            </a:solidFill>
+            <a:prstDash val="solid"/>
+          </a:ln>
+        </p:spPr>
+        <p:txBody>
+          <a:bodyPr/>
+          <a:lstStyle/>
+          <a:p>
+            <a:endParaRPr lang="en-US"/>
+          </a:p>
+        </p:txBody>
+      </p:sp>
+      <p:sp>
+        <p:nvSpPr>
+          <p:cNvPr id="21" name="Shape 16"/>
+          <p:cNvSpPr/>
+          <p:nvPr/>
+        </p:nvSpPr>
+        <p:spPr>
+          <a:xfrm>
+            <a:off x="457200" y="3602736"/>
+            <a:ext cx="64008" cy="1325880"/>
+          </a:xfrm>
+          <a:prstGeom prst="rect">
+            <a:avLst/>
+          </a:prstGeom>
+          <a:solidFill>
+            <a:srgbClr val="00C896"/>
+          </a:solidFill>
+          <a:ln w="12700">
+            <a:solidFill>
+              <a:srgbClr val="00C896"/>
+            </a:solidFill>
+            <a:prstDash val="solid"/>
+          </a:ln>
+        </p:spPr>
+        <p:txBody>
+          <a:bodyPr/>
+          <a:lstStyle/>
+          <a:p>
+            <a:endParaRPr lang="en-US"/>
+          </a:p>
+        </p:txBody>
+      </p:sp>
+      <p:pic>
+        <p:nvPicPr>
+          <p:cNvPr id="22" name="Image 3" descr="preencoded.png"/>
+          <p:cNvPicPr>
+            <a:picLocks noChangeAspect="1"/>
+          </p:cNvPicPr>
+          <p:nvPr/>
+        </p:nvPicPr>
+        <p:blipFill>
+          <a:blip r:embed="rId6"/>
+          <a:stretch>
+            <a:fillRect/>
+          </a:stretch>
+        </p:blipFill>
+        <p:spPr>
+          <a:xfrm>
+            <a:off x="612648" y="4014216"/>
+            <a:ext cx="320040" cy="320040"/>
+          </a:xfrm>
+          <a:prstGeom prst="rect">
+            <a:avLst/>
+          </a:prstGeom>
+        </p:spPr>
+      </p:pic>
+      <p:sp>
+        <p:nvSpPr>
+          <p:cNvPr id="23" name="Text 17"/>
+          <p:cNvSpPr/>
+          <p:nvPr/>
+        </p:nvSpPr>
+        <p:spPr>
+          <a:xfrm>
+            <a:off x="1051560" y="3739896"/>
+            <a:ext cx="7498080" cy="1097280"/>
+          </a:xfrm>
+          <a:prstGeom prst="rect">
+            <a:avLst/>
+          </a:prstGeom>
+          <a:noFill/>
+          <a:ln/>
+        </p:spPr>
+        <p:txBody>
+          <a:bodyPr wrap="square" rtlCol="0" anchor="t"/>
+          <a:lstStyle/>
+          <a:p>
+            <a:pPr marL="0" indent="0">
+              <a:buNone/>
+            </a:pPr>
+            <a:r>
+              <a:rPr lang="en-US" sz="1100" b="1" dirty="0">
+                <a:solidFill>
+                  <a:srgbClr val="FFFFFF"/>
+                </a:solidFill>
+                <a:latin typeface="Calibri" pitchFamily="34" charset="0"/>
+                <a:ea typeface="Calibri" pitchFamily="34" charset="-122"/>
+                <a:cs typeface="Calibri" pitchFamily="34" charset="-120"/>
+              </a:rPr>
+              <a:t>[ Key Highlight Place Holder ]
+</a:t>
+            </a:r>
+            <a:endParaRPr lang="en-US" sz="1100" dirty="0"/>
+          </a:p>
+          <a:p>
+            <a:pPr marL="0" indent="0">
+              <a:buNone/>
+            </a:pPr>
+            <a:r>
+              <a:rPr lang="en-US" sz="950" i="1" dirty="0">
+                <a:solidFill>
+                  <a:srgbClr val="B0C4D8"/>
+                </a:solidFill>
+                <a:latin typeface="Calibri" pitchFamily="34" charset="0"/>
+                <a:ea typeface="Calibri" pitchFamily="34" charset="-122"/>
+                <a:cs typeface="Calibri" pitchFamily="34" charset="-120"/>
+              </a:rPr>
+              <a:t>"Quality assurance isn't just about coverage numbers — it's about catching the right things at the right time. [This sprint/This test] is an example of the team's process working exactly as intended."</a:t>
+            </a:r>
+            <a:endParaRPr lang="en-US" sz="1100" dirty="0"/>
+          </a:p>
+        </p:txBody>
+      </p:sp>
+      <p:sp>
+        <p:nvSpPr>
+          <p:cNvPr id="24" name="Text 0">
+            <a:extLst>
+              <a:ext uri="{FF2B5EF4-FFF2-40B4-BE49-F238E27FC236}">
+                <a16:creationId xmlns:a16="http://schemas.microsoft.com/office/drawing/2014/main" id="{CE4396FD-BDF5-670C-F4B3-30360F218813}"/>
+              </a:ext>
+            </a:extLst>
+          </p:cNvPr>
+          <p:cNvSpPr/>
+          <p:nvPr/>
+        </p:nvSpPr>
+        <p:spPr>
+          <a:xfrm>
+            <a:off x="457200" y="164592"/>
+            <a:ext cx="8229600" cy="256032"/>
+          </a:xfrm>
+          <a:prstGeom prst="rect">
+            <a:avLst/>
+          </a:prstGeom>
+          <a:noFill/>
+          <a:ln/>
+        </p:spPr>
+        <p:txBody>
+          <a:bodyPr wrap="square" lIns="0" tIns="0" rIns="0" bIns="0" rtlCol="0" anchor="ctr"/>
+          <a:lstStyle/>
+          <a:p>
+            <a:pPr marL="0" indent="0" algn="l">
+              <a:buNone/>
+            </a:pPr>
+            <a:r>
+              <a:rPr lang="en-US" sz="900" b="1" kern="0" spc="300" dirty="0">
+                <a:solidFill>
+                  <a:srgbClr val="3BB77E"/>
+                </a:solidFill>
+                <a:latin typeface="Calibri" pitchFamily="34" charset="0"/>
+                <a:ea typeface="Calibri" pitchFamily="34" charset="-122"/>
+                <a:cs typeface="Calibri" pitchFamily="34" charset="-120"/>
+              </a:rPr>
+              <a:t>TESTING &amp; QUALITY ASSURANCE</a:t>
+            </a:r>
+            <a:endParaRPr lang="en-US" sz="900" dirty="0"/>
+          </a:p>
+        </p:txBody>
+      </p:sp>
+      <p:sp>
+        <p:nvSpPr>
+          <p:cNvPr id="25" name="Text 1">
+            <a:extLst>
+              <a:ext uri="{FF2B5EF4-FFF2-40B4-BE49-F238E27FC236}">
+                <a16:creationId xmlns:a16="http://schemas.microsoft.com/office/drawing/2014/main" id="{59ADE286-38D8-DCFF-A976-DED8A4930314}"/>
+              </a:ext>
+            </a:extLst>
+          </p:cNvPr>
+          <p:cNvSpPr/>
+          <p:nvPr/>
+        </p:nvSpPr>
+        <p:spPr>
+          <a:xfrm>
+            <a:off x="457200" y="475488"/>
+            <a:ext cx="8229600" cy="658368"/>
+          </a:xfrm>
+          <a:prstGeom prst="rect">
+            <a:avLst/>
+          </a:prstGeom>
+          <a:noFill/>
+          <a:ln/>
+        </p:spPr>
+        <p:txBody>
+          <a:bodyPr wrap="square" lIns="0" tIns="0" rIns="0" bIns="0" rtlCol="0" anchor="ctr"/>
+          <a:lstStyle/>
+          <a:p>
+            <a:pPr marL="0" indent="0" algn="l">
+              <a:buNone/>
+            </a:pPr>
+            <a:r>
+              <a:rPr lang="en-US" sz="3200" b="1" dirty="0">
+                <a:solidFill>
+                  <a:schemeClr val="bg1"/>
+                </a:solidFill>
+                <a:latin typeface="Calibri" pitchFamily="34" charset="0"/>
+                <a:cs typeface="Calibri" pitchFamily="34" charset="-120"/>
+              </a:rPr>
+              <a:t>QA in Practice</a:t>
+            </a:r>
+            <a:endParaRPr lang="en-US" sz="3200" dirty="0">
+              <a:solidFill>
+                <a:schemeClr val="bg1"/>
+              </a:solidFill>
+            </a:endParaRPr>
+          </a:p>
+        </p:txBody>
+      </p:sp>
+      <p:sp>
+        <p:nvSpPr>
+          <p:cNvPr id="26" name="Text 2">
+            <a:extLst>
+              <a:ext uri="{FF2B5EF4-FFF2-40B4-BE49-F238E27FC236}">
+                <a16:creationId xmlns:a16="http://schemas.microsoft.com/office/drawing/2014/main" id="{B47AD6B9-62CE-F716-2950-4C29024360E0}"/>
+              </a:ext>
+            </a:extLst>
+          </p:cNvPr>
+          <p:cNvSpPr/>
+          <p:nvPr/>
+        </p:nvSpPr>
+        <p:spPr>
+          <a:xfrm>
+            <a:off x="7132320" y="493776"/>
+            <a:ext cx="1554480" cy="182880"/>
+          </a:xfrm>
+          <a:prstGeom prst="rect">
+            <a:avLst/>
+          </a:prstGeom>
+          <a:noFill/>
+          <a:ln/>
+        </p:spPr>
+        <p:txBody>
+          <a:bodyPr wrap="square" lIns="0" tIns="0" rIns="0" bIns="0" rtlCol="0" anchor="ctr"/>
+          <a:lstStyle/>
+          <a:p>
+            <a:pPr marL="0" indent="0" algn="r">
+              <a:buNone/>
+            </a:pPr>
+            <a:r>
+              <a:rPr lang="en-US" sz="800" dirty="0">
+                <a:solidFill>
+                  <a:srgbClr val="94A3B8"/>
+                </a:solidFill>
+              </a:rPr>
+              <a:t>Kenny Bacdayan</a:t>
+            </a:r>
+            <a:endParaRPr lang="en-US" sz="800" dirty="0"/>
+          </a:p>
+        </p:txBody>
+      </p:sp>
+      <p:sp>
+        <p:nvSpPr>
+          <p:cNvPr id="27" name="Text 3">
+            <a:extLst>
+              <a:ext uri="{FF2B5EF4-FFF2-40B4-BE49-F238E27FC236}">
+                <a16:creationId xmlns:a16="http://schemas.microsoft.com/office/drawing/2014/main" id="{E0AF6E58-2AB3-26D3-3F77-3015CBE22786}"/>
+              </a:ext>
+            </a:extLst>
+          </p:cNvPr>
+          <p:cNvSpPr/>
+          <p:nvPr/>
+        </p:nvSpPr>
+        <p:spPr>
+          <a:xfrm>
+            <a:off x="7132320" y="658368"/>
+            <a:ext cx="1554480" cy="146304"/>
+          </a:xfrm>
+          <a:prstGeom prst="rect">
+            <a:avLst/>
+          </a:prstGeom>
+          <a:noFill/>
+          <a:ln/>
+        </p:spPr>
+        <p:txBody>
+          <a:bodyPr wrap="square" lIns="0" tIns="0" rIns="0" bIns="0" rtlCol="0" anchor="ctr"/>
+          <a:lstStyle/>
+          <a:p>
+            <a:pPr marL="0" indent="0" algn="r">
+              <a:buNone/>
+            </a:pPr>
+            <a:r>
+              <a:rPr lang="en-US" sz="700" b="1" dirty="0">
+                <a:solidFill>
+                  <a:srgbClr val="1D9E75"/>
+                </a:solidFill>
+              </a:rPr>
+              <a:t>Quality Assurance &amp; Testing Lead</a:t>
+            </a:r>
+            <a:endParaRPr lang="en-US" sz="700" dirty="0"/>
+          </a:p>
+        </p:txBody>
+      </p:sp>
+    </p:spTree>
+  </p:cSld>
+  <p:clrMapOvr>
+    <a:masterClrMapping/>
+  </p:clrMapOvr>
+</p:sld>
+</file>
+
+<file path=ppt/slides/slide15.xml><?xml version="1.0" encoding="utf-8"?>
+<p:sld xmlns:a="http://schemas.openxmlformats.org/drawingml/2006/main" xmlns:r="http://schemas.openxmlformats.org/officeDocument/2006/relationships" xmlns:p="http://schemas.openxmlformats.org/presentationml/2006/main">
   <p:cSld name="Slide 10">
     <p:bg>
       <p:bgPr>
@@ -12520,7 +13533,7 @@
 </p:sld>
 </file>
 
-<file path=ppt/slides/slide15.xml><?xml version="1.0" encoding="utf-8"?>
+<file path=ppt/slides/slide16.xml><?xml version="1.0" encoding="utf-8"?>
 <p:sld xmlns:a="http://schemas.openxmlformats.org/drawingml/2006/main" xmlns:r="http://schemas.openxmlformats.org/officeDocument/2006/relationships" xmlns:p="http://schemas.openxmlformats.org/presentationml/2006/main">
   <p:cSld name="Slide 11">
     <p:bg>
@@ -14626,7 +15639,7 @@
 </p:sld>
 </file>
 
-<file path=ppt/slides/slide16.xml><?xml version="1.0" encoding="utf-8"?>
+<file path=ppt/slides/slide17.xml><?xml version="1.0" encoding="utf-8"?>
 <p:sld xmlns:a="http://schemas.openxmlformats.org/drawingml/2006/main" xmlns:r="http://schemas.openxmlformats.org/officeDocument/2006/relationships" xmlns:p="http://schemas.openxmlformats.org/presentationml/2006/main">
   <p:cSld name="Slide 12">
     <p:bg>
@@ -15836,7 +16849,7 @@
 </p:sld>
 </file>
 
-<file path=ppt/slides/slide17.xml><?xml version="1.0" encoding="utf-8"?>
+<file path=ppt/slides/slide18.xml><?xml version="1.0" encoding="utf-8"?>
 <p:sld xmlns:a="http://schemas.openxmlformats.org/drawingml/2006/main" xmlns:r="http://schemas.openxmlformats.org/officeDocument/2006/relationships" xmlns:p="http://schemas.openxmlformats.org/presentationml/2006/main">
   <p:cSld name="Slide 13">
     <p:bg>

--- a/docs/Deliverables/Orderly_Slides.pptx
+++ b/docs/Deliverables/Orderly_Slides.pptx
@@ -14379,7 +14379,7 @@
                   <a:srgbClr val="4A5568"/>
                 </a:solidFill>
               </a:rPr>
-              <a:t>Order confirmation and status emails — backend hooks are in place, delivery layer is next.</a:t>
+              <a:t>Order confirmation and status emails — backend hooks are in place; delivery layer is next.</a:t>
             </a:r>
             <a:endParaRPr lang="en-US" sz="800" dirty="0"/>
           </a:p>
@@ -15628,6 +15628,167 @@
               <a:t>A tenant model would let Orderly serve multiple businesses from a single deployment.</a:t>
             </a:r>
             <a:endParaRPr lang="en-US" sz="800" dirty="0"/>
+          </a:p>
+        </p:txBody>
+      </p:sp>
+      <p:sp>
+        <p:nvSpPr>
+          <p:cNvPr id="4" name="Shape 25">
+            <a:extLst>
+              <a:ext uri="{FF2B5EF4-FFF2-40B4-BE49-F238E27FC236}">
+                <a16:creationId xmlns:a16="http://schemas.microsoft.com/office/drawing/2014/main" id="{E07E6156-A9E1-AE60-C24F-52C501F161F8}"/>
+              </a:ext>
+            </a:extLst>
+          </p:cNvPr>
+          <p:cNvSpPr/>
+          <p:nvPr/>
+        </p:nvSpPr>
+        <p:spPr>
+          <a:xfrm>
+            <a:off x="6062472" y="2437811"/>
+            <a:ext cx="2377440" cy="6401"/>
+          </a:xfrm>
+          <a:prstGeom prst="rect">
+            <a:avLst/>
+          </a:prstGeom>
+          <a:solidFill>
+            <a:srgbClr val="E2E8F0"/>
+          </a:solidFill>
+          <a:ln w="12700">
+            <a:solidFill>
+              <a:srgbClr val="E2E8F0"/>
+            </a:solidFill>
+            <a:prstDash val="solid"/>
+          </a:ln>
+        </p:spPr>
+        <p:txBody>
+          <a:bodyPr/>
+          <a:lstStyle/>
+          <a:p>
+            <a:endParaRPr lang="en-US"/>
+          </a:p>
+        </p:txBody>
+      </p:sp>
+      <p:sp>
+        <p:nvSpPr>
+          <p:cNvPr id="5" name="Shape 26">
+            <a:extLst>
+              <a:ext uri="{FF2B5EF4-FFF2-40B4-BE49-F238E27FC236}">
+                <a16:creationId xmlns:a16="http://schemas.microsoft.com/office/drawing/2014/main" id="{D676D69A-290F-90AD-5C15-D40AC5CB6639}"/>
+              </a:ext>
+            </a:extLst>
+          </p:cNvPr>
+          <p:cNvSpPr/>
+          <p:nvPr/>
+        </p:nvSpPr>
+        <p:spPr>
+          <a:xfrm>
+            <a:off x="6062472" y="2495154"/>
+            <a:ext cx="444470" cy="111226"/>
+          </a:xfrm>
+          <a:prstGeom prst="rect">
+            <a:avLst/>
+          </a:prstGeom>
+          <a:solidFill>
+            <a:schemeClr val="accent6"/>
+          </a:solidFill>
+          <a:ln w="12700">
+            <a:solidFill>
+              <a:srgbClr val="1D9E75"/>
+            </a:solidFill>
+            <a:prstDash val="solid"/>
+          </a:ln>
+        </p:spPr>
+        <p:txBody>
+          <a:bodyPr/>
+          <a:lstStyle/>
+          <a:p>
+            <a:endParaRPr lang="en-US"/>
+          </a:p>
+        </p:txBody>
+      </p:sp>
+      <p:sp>
+        <p:nvSpPr>
+          <p:cNvPr id="6" name="Text 27">
+            <a:extLst>
+              <a:ext uri="{FF2B5EF4-FFF2-40B4-BE49-F238E27FC236}">
+                <a16:creationId xmlns:a16="http://schemas.microsoft.com/office/drawing/2014/main" id="{72175B81-B914-00A4-4E4E-38C1B6673292}"/>
+              </a:ext>
+            </a:extLst>
+          </p:cNvPr>
+          <p:cNvSpPr/>
+          <p:nvPr/>
+        </p:nvSpPr>
+        <p:spPr>
+          <a:xfrm>
+            <a:off x="6062472" y="2495154"/>
+            <a:ext cx="444470" cy="102461"/>
+          </a:xfrm>
+          <a:prstGeom prst="rect">
+            <a:avLst/>
+          </a:prstGeom>
+          <a:noFill/>
+          <a:ln/>
+        </p:spPr>
+        <p:txBody>
+          <a:bodyPr wrap="square" lIns="0" tIns="0" rIns="0" bIns="0" rtlCol="0" anchor="ctr"/>
+          <a:lstStyle/>
+          <a:p>
+            <a:pPr marL="0" indent="0" algn="ctr">
+              <a:buNone/>
+            </a:pPr>
+            <a:r>
+              <a:rPr lang="en-US" sz="650" b="1" dirty="0">
+                <a:solidFill>
+                  <a:srgbClr val="FFFFFF"/>
+                </a:solidFill>
+              </a:rPr>
+              <a:t>Update!</a:t>
+            </a:r>
+            <a:endParaRPr lang="en-US" sz="650" dirty="0"/>
+          </a:p>
+        </p:txBody>
+      </p:sp>
+      <p:sp>
+        <p:nvSpPr>
+          <p:cNvPr id="7" name="Text 28">
+            <a:extLst>
+              <a:ext uri="{FF2B5EF4-FFF2-40B4-BE49-F238E27FC236}">
+                <a16:creationId xmlns:a16="http://schemas.microsoft.com/office/drawing/2014/main" id="{9B17FE1C-0A8E-03DC-039C-525D7FAF4B75}"/>
+              </a:ext>
+            </a:extLst>
+          </p:cNvPr>
+          <p:cNvSpPr/>
+          <p:nvPr/>
+        </p:nvSpPr>
+        <p:spPr>
+          <a:xfrm>
+            <a:off x="6580094" y="2497847"/>
+            <a:ext cx="1859818" cy="135789"/>
+          </a:xfrm>
+          <a:prstGeom prst="rect">
+            <a:avLst/>
+          </a:prstGeom>
+          <a:noFill/>
+          <a:ln/>
+        </p:spPr>
+        <p:txBody>
+          <a:bodyPr wrap="square" lIns="0" tIns="0" rIns="0" bIns="0" rtlCol="0" anchor="t"/>
+          <a:lstStyle/>
+          <a:p>
+            <a:pPr marL="0" indent="0">
+              <a:buNone/>
+            </a:pPr>
+            <a:r>
+              <a:rPr lang="en-US" sz="700" dirty="0">
+                <a:solidFill>
+                  <a:schemeClr val="accent3">
+                    <a:lumMod val="50000"/>
+                  </a:schemeClr>
+                </a:solidFill>
+              </a:rPr>
+              <a:t>Deployment is LIVE. Requires minor image support</a:t>
+            </a:r>
           </a:p>
         </p:txBody>
       </p:sp>

--- a/docs/Deliverables/Orderly_Slides.pptx
+++ b/docs/Deliverables/Orderly_Slides.pptx
@@ -389,6 +389,69 @@
               <a:rPr lang="en-US" b="0" i="0" dirty="0"/>
               <a:t>we built…</a:t>
             </a:r>
+          </a:p>
+          <a:p>
+            <a:endParaRPr lang="en-US" b="0" i="0" dirty="0"/>
+          </a:p>
+          <a:p>
+            <a:endParaRPr lang="en-US" b="0" i="0" dirty="0"/>
+          </a:p>
+          <a:p>
+            <a:r>
+              <a:rPr lang="en-US" b="0" i="0" dirty="0"/>
+              <a:t>OR Tighten it up:</a:t>
+            </a:r>
+          </a:p>
+          <a:p>
+            <a:endParaRPr lang="en-US" b="0" i="0" dirty="0"/>
+          </a:p>
+          <a:p>
+            <a:r>
+              <a:rPr lang="en-US" dirty="0"/>
+              <a:t>Hello, and welcome!</a:t>
+            </a:r>
+          </a:p>
+          <a:p>
+            <a:r>
+              <a:rPr lang="en-US" dirty="0"/>
+              <a:t>Today is a big milestone for our team — and we're excited to share what we've built.</a:t>
+            </a:r>
+          </a:p>
+          <a:p>
+            <a:r>
+              <a:rPr lang="en-US" dirty="0"/>
+              <a:t>My name is Serina. I'm the Project Manager and Scrum Master for Team 7, a group of six student developers here at Wake Tech.</a:t>
+            </a:r>
+          </a:p>
+          <a:p>
+            <a:r>
+              <a:rPr lang="en-US" dirty="0"/>
+              <a:t>As PM, I was the main facilitator for our entire development process — keeping us aligned, moving, and accountable from our very first planning meeting all the way to shipping version 1.0.0 this week.</a:t>
+            </a:r>
+          </a:p>
+          <a:p>
+            <a:r>
+              <a:rPr lang="en-US" dirty="0"/>
+              <a:t>But before I talk about </a:t>
+            </a:r>
+            <a:r>
+              <a:rPr lang="en-US" i="1" dirty="0"/>
+              <a:t>how</a:t>
+            </a:r>
+            <a:r>
+              <a:rPr lang="en-US" dirty="0"/>
+              <a:t> we built it — let me tell you </a:t>
+            </a:r>
+            <a:r>
+              <a:rPr lang="en-US" i="1" dirty="0"/>
+              <a:t>what</a:t>
+            </a:r>
+            <a:r>
+              <a:rPr lang="en-US" dirty="0"/>
+              <a:t> we built.</a:t>
+            </a:r>
+          </a:p>
+          <a:p>
             <a:endParaRPr lang="en-US" dirty="0"/>
           </a:p>
         </p:txBody>
@@ -824,21 +887,64 @@
           <a:lstStyle/>
           <a:p>
             <a:r>
+              <a:rPr lang="en-US" dirty="0"/>
+              <a:t>To show how that worked in practice, here’s one example from our Role Based Access Control testing.</a:t>
+            </a:r>
+          </a:p>
+          <a:p>
+            <a:endParaRPr lang="en-US" dirty="0"/>
+          </a:p>
+          <a:p>
+            <a:r>
+              <a:rPr lang="en-US" dirty="0"/>
+              <a:t>During admin access validation, I identified a defect where logged-out users could directly access an admin route instead of being redirected to login, which introduced a security risk.</a:t>
+            </a:r>
+          </a:p>
+          <a:p>
+            <a:endParaRPr lang="en-US" dirty="0"/>
+          </a:p>
+          <a:p>
+            <a:r>
+              <a:rPr lang="en-US" dirty="0"/>
+              <a:t>I documented the issue through a bug report with reproduction steps and impact. The issue was traced to route protection logic and a fix was implemented. Afterward, I validated the solution through manual retesting and automated regression testing. Then, just as importantly, we added test cases and expanded coverage so the issue wouldn’t reappear.</a:t>
+            </a:r>
+          </a:p>
+          <a:p>
+            <a:endParaRPr lang="en-US" dirty="0"/>
+          </a:p>
+          <a:p>
+            <a:r>
+              <a:rPr lang="en-US" dirty="0"/>
+              <a:t>That reflects our QA workflow:</a:t>
+            </a:r>
+            <a:br>
+              <a:rPr lang="en-US" dirty="0"/>
+            </a:br>
+            <a:r>
               <a:rPr lang="en-US" b="1" dirty="0"/>
-              <a:t>⏭️ Up Next: </a:t>
-            </a:r>
-            <a:r>
-              <a:rPr lang="en-US" b="0" dirty="0"/>
-              <a:t>The Value of Feedback (Caleb)</a:t>
-            </a:r>
-            <a:br>
-              <a:rPr lang="en-US" b="0" dirty="0"/>
-            </a:br>
-            <a:r>
-              <a:rPr lang="en-US" b="0" dirty="0"/>
-              <a:t>Transition with ”Test Results served as valuable feedback amongst other sources within our development, let’s hear more about how”… </a:t>
-            </a:r>
-            <a:endParaRPr lang="en-US" b="1" dirty="0"/>
+              <a:t>Discover, Report, Fix, Retest, and Expand Test Coverage.</a:t>
+            </a:r>
+            <a:endParaRPr lang="en-US" dirty="0"/>
+          </a:p>
+          <a:p>
+            <a:r>
+              <a:rPr lang="en-US" dirty="0"/>
+              <a:t>For me, that captures how QA supported the project — not just identifying issues, but improving long-term reliability throughout development.</a:t>
+            </a:r>
+          </a:p>
+          <a:p>
+            <a:r>
+              <a:rPr lang="en-US" dirty="0"/>
+              <a:t>And with that, I’ll hand it over to Caleb, who will walk through </a:t>
+            </a:r>
+            <a:r>
+              <a:rPr lang="en-US" b="1" dirty="0"/>
+              <a:t>User Feedback</a:t>
+            </a:r>
+            <a:r>
+              <a:rPr lang="en-US" dirty="0"/>
+              <a:t>. Thank you.”</a:t>
+            </a:r>
           </a:p>
         </p:txBody>
       </p:sp>
@@ -922,7 +1028,103 @@
           <a:bodyPr/>
           <a:lstStyle/>
           <a:p>
+            <a:r>
+              <a:rPr lang="en-US" dirty="0"/>
+              <a:t>“Thanks, Tristan — and thanks everyone.</a:t>
+            </a:r>
+          </a:p>
+          <a:p>
+            <a:r>
+              <a:rPr lang="en-US" dirty="0"/>
+              <a:t>Hi, I’m Kenny, and I served as the QA Lead for our project.</a:t>
+            </a:r>
+          </a:p>
+          <a:p>
+            <a:r>
+              <a:rPr lang="en-US" dirty="0"/>
+              <a:t>My role focused on developing and executing our testing and quality assurance strategy across all sprints to help ensure the system was stable, functional, and release ready.</a:t>
+            </a:r>
+          </a:p>
+          <a:p>
             <a:endParaRPr lang="en-US" dirty="0"/>
+          </a:p>
+          <a:p>
+            <a:r>
+              <a:rPr lang="en-US" dirty="0"/>
+              <a:t>Our testing approach used three layers of validation: frontend testing, backend/API testing, and end-to-end regression testing.</a:t>
+            </a:r>
+          </a:p>
+          <a:p>
+            <a:r>
+              <a:rPr lang="en-US" dirty="0"/>
+              <a:t>On the frontend, I built automated component and integration tests using Jest and React Testing Library, where we executed over </a:t>
+            </a:r>
+            <a:r>
+              <a:rPr lang="en-US" b="1" dirty="0"/>
+              <a:t>600 automated tests</a:t>
+            </a:r>
+            <a:r>
+              <a:rPr lang="en-US" dirty="0"/>
+              <a:t>, maintaining over </a:t>
+            </a:r>
+            <a:r>
+              <a:rPr lang="en-US" b="1" dirty="0"/>
+              <a:t>90% test coverage</a:t>
+            </a:r>
+            <a:r>
+              <a:rPr lang="en-US" dirty="0"/>
+              <a:t> while validating UI behavior, routing, and admin functionality.</a:t>
+            </a:r>
+          </a:p>
+          <a:p>
+            <a:r>
+              <a:rPr lang="en-US" dirty="0"/>
+              <a:t>For backend and API testing, I developed over </a:t>
+            </a:r>
+            <a:r>
+              <a:rPr lang="en-US" b="1" dirty="0"/>
+              <a:t>300 automated tests</a:t>
+            </a:r>
+            <a:r>
+              <a:rPr lang="en-US" dirty="0"/>
+              <a:t>, also with </a:t>
+            </a:r>
+            <a:r>
+              <a:rPr lang="en-US" b="1" dirty="0"/>
+              <a:t>90%+ coverage</a:t>
+            </a:r>
+            <a:r>
+              <a:rPr lang="en-US" dirty="0"/>
+              <a:t>, covering validation, role-based access control, inventory logic, reporting endpoints, and edge-case scenarios.</a:t>
+            </a:r>
+          </a:p>
+          <a:p>
+            <a:r>
+              <a:rPr lang="en-US" dirty="0"/>
+              <a:t>For end-to-end testing, I built and ran </a:t>
+            </a:r>
+            <a:r>
+              <a:rPr lang="en-US" b="1" dirty="0"/>
+              <a:t>166 Robot Framework tests</a:t>
+            </a:r>
+            <a:r>
+              <a:rPr lang="en-US" dirty="0"/>
+              <a:t>, validating critical customer workflows, admin regression scenarios, and full system interactions, with a </a:t>
+            </a:r>
+            <a:r>
+              <a:rPr lang="en-US" b="1" dirty="0"/>
+              <a:t>100 percent pass rate</a:t>
+            </a:r>
+            <a:r>
+              <a:rPr lang="en-US" dirty="0"/>
+              <a:t>.</a:t>
+            </a:r>
+          </a:p>
+          <a:p>
+            <a:r>
+              <a:rPr lang="en-US" dirty="0"/>
+              <a:t>In addition to automation, I led QA coordination by creating test plans, test cases, testing matrices, acceptance coverage reports, and supporting CI regression validation to help drive release readiness with no critical defects open.</a:t>
+            </a:r>
           </a:p>
         </p:txBody>
       </p:sp>
@@ -1641,31 +1843,9 @@
           <a:lstStyle/>
           <a:p>
             <a:r>
-              <a:rPr lang="en-US" sz="1200" b="1" i="0" kern="1200" dirty="0">
-                <a:solidFill>
-                  <a:schemeClr val="tx1"/>
-                </a:solidFill>
-                <a:effectLst/>
-                <a:latin typeface="+mn-lt"/>
-                <a:ea typeface="+mn-ea"/>
-                <a:cs typeface="+mn-cs"/>
-              </a:rPr>
-              <a:t>🟡 UP NEXT: </a:t>
-            </a:r>
-            <a:r>
-              <a:rPr lang="en-US" sz="1200" b="0" i="0" kern="1200" dirty="0">
-                <a:solidFill>
-                  <a:schemeClr val="tx1"/>
-                </a:solidFill>
-                <a:effectLst/>
-                <a:latin typeface="+mn-lt"/>
-                <a:ea typeface="+mn-ea"/>
-                <a:cs typeface="+mn-cs"/>
-              </a:rPr>
-              <a:t>How Agile brought forward our sprint structure (Serina)</a:t>
-            </a:r>
-          </a:p>
-          <a:p>
+              <a:rPr lang="en-US" dirty="0"/>
+              <a:t>🟡 SERINA (continues..)</a:t>
+            </a:r>
             <a:endParaRPr lang="en-US" sz="1200" b="0" i="0" kern="1200" dirty="0">
               <a:solidFill>
                 <a:schemeClr val="tx1"/>
@@ -1677,83 +1857,6 @@
             </a:endParaRPr>
           </a:p>
           <a:p>
-            <a:r>
-              <a:rPr lang="en-US" dirty="0"/>
-              <a:t>So, what is Orderly?</a:t>
-            </a:r>
-          </a:p>
-          <a:p>
-            <a:endParaRPr lang="en-US" dirty="0"/>
-          </a:p>
-          <a:p>
-            <a:r>
-              <a:rPr lang="en-US" dirty="0"/>
-              <a:t>At its core, Orderly is a </a:t>
-            </a:r>
-            <a:r>
-              <a:rPr lang="en-US" b="1" dirty="0"/>
-              <a:t>centralized web application</a:t>
-            </a:r>
-            <a:r>
-              <a:rPr lang="en-US" dirty="0"/>
-              <a:t> built to streamline operations for small to mid-sized businesses. </a:t>
-            </a:r>
-          </a:p>
-          <a:p>
-            <a:r>
-              <a:rPr lang="en-US" dirty="0"/>
-              <a:t>And the reason we built it comes down to a very real problem.</a:t>
-            </a:r>
-          </a:p>
-          <a:p>
-            <a:endParaRPr lang="en-US" dirty="0"/>
-          </a:p>
-          <a:p>
-            <a:r>
-              <a:rPr lang="en-US" dirty="0"/>
-              <a:t>Small business owners are managing orders on paper, tracking inventory in spreadsheets, and piecing together tools that were never meant to work together. The result is manual processes, missed orders, and zero real-time visibility into what's actually happening in their business.</a:t>
-            </a:r>
-          </a:p>
-          <a:p>
-            <a:endParaRPr lang="en-US" dirty="0"/>
-          </a:p>
-          <a:p>
-            <a:r>
-              <a:rPr lang="en-US" dirty="0"/>
-              <a:t>So we asked ourselves — what would it look like if all of that lived in one place?</a:t>
-            </a:r>
-          </a:p>
-          <a:p>
-            <a:endParaRPr lang="en-US" dirty="0"/>
-          </a:p>
-          <a:p>
-            <a:r>
-              <a:rPr lang="en-US" dirty="0"/>
-              <a:t>Orderly is the answer to that question. A flexible, self-service ordering and business management platform </a:t>
-            </a:r>
-          </a:p>
-          <a:p>
-            <a:r>
-              <a:rPr lang="en-US" dirty="0"/>
-              <a:t>— with a customer-facing storefront and a full business admin portal, built together from the ground up.</a:t>
-            </a:r>
-          </a:p>
-          <a:p>
-            <a:endParaRPr lang="en-US" dirty="0"/>
-          </a:p>
-          <a:p>
-            <a:r>
-              <a:rPr lang="en-US" dirty="0"/>
-              <a:t>Five sprints. Six team members. Over fifteen user features delivered.</a:t>
-            </a:r>
-          </a:p>
-          <a:p>
-            <a:r>
-              <a:rPr lang="en-US" dirty="0"/>
-              <a:t>And speaking of sprints — let me walk you through exactly how we got here.</a:t>
-            </a:r>
-          </a:p>
-          <a:p>
             <a:endParaRPr lang="en-US" sz="1200" b="0" i="0" kern="1200" dirty="0">
               <a:solidFill>
                 <a:schemeClr val="tx1"/>
@@ -1765,6 +1868,179 @@
             </a:endParaRPr>
           </a:p>
           <a:p>
+            <a:r>
+              <a:rPr lang="en-US" dirty="0"/>
+              <a:t>So — what exactly </a:t>
+            </a:r>
+            <a:r>
+              <a:rPr lang="en-US" i="1" dirty="0"/>
+              <a:t>is</a:t>
+            </a:r>
+            <a:r>
+              <a:rPr lang="en-US" dirty="0"/>
+              <a:t> “Orderly”?</a:t>
+            </a:r>
+          </a:p>
+          <a:p>
+            <a:endParaRPr lang="en-US" dirty="0"/>
+          </a:p>
+          <a:p>
+            <a:r>
+              <a:rPr lang="en-US" dirty="0"/>
+              <a:t>At the start of this semester…</a:t>
+            </a:r>
+          </a:p>
+          <a:p>
+            <a:r>
+              <a:rPr lang="en-US" dirty="0"/>
+              <a:t>our class was surveyed, grouped, and handed a Software Requirements Specification developed by a previous cohort. </a:t>
+            </a:r>
+          </a:p>
+          <a:p>
+            <a:r>
+              <a:rPr lang="en-US" dirty="0"/>
+              <a:t>Our challenge was simple: make it happen.</a:t>
+            </a:r>
+          </a:p>
+          <a:p>
+            <a:endParaRPr lang="en-US" dirty="0"/>
+          </a:p>
+          <a:p>
+            <a:r>
+              <a:rPr lang="en-US" dirty="0"/>
+              <a:t>What we were handed was a vision for a centralized web application — </a:t>
+            </a:r>
+          </a:p>
+          <a:p>
+            <a:r>
+              <a:rPr lang="en-US" dirty="0"/>
+              <a:t>one designed to solve a very real problem for small to mid-sized businesses. </a:t>
+            </a:r>
+          </a:p>
+          <a:p>
+            <a:endParaRPr lang="en-US" dirty="0"/>
+          </a:p>
+          <a:p>
+            <a:r>
+              <a:rPr lang="en-US" dirty="0"/>
+              <a:t>Owners managing orders on paper, tracking inventory in spreadsheets, juggling tools that were never meant to work together. </a:t>
+            </a:r>
+          </a:p>
+          <a:p>
+            <a:r>
+              <a:rPr lang="en-US" dirty="0"/>
+              <a:t>Manual processes, missed orders, no real-time visibility.</a:t>
+            </a:r>
+          </a:p>
+          <a:p>
+            <a:endParaRPr lang="en-US" dirty="0"/>
+          </a:p>
+          <a:p>
+            <a:r>
+              <a:rPr lang="en-US" dirty="0"/>
+              <a:t>Our job was to take that vision off the page and build it.</a:t>
+            </a:r>
+          </a:p>
+          <a:p>
+            <a:endParaRPr lang="en-US" dirty="0"/>
+          </a:p>
+          <a:p>
+            <a:r>
+              <a:rPr lang="en-US" dirty="0"/>
+              <a:t>The final result? Our application that stands today.. Orderly. </a:t>
+            </a:r>
+          </a:p>
+          <a:p>
+            <a:r>
+              <a:rPr lang="en-US" dirty="0"/>
+              <a:t>A </a:t>
+            </a:r>
+            <a:r>
+              <a:rPr lang="en-US" i="1" dirty="0"/>
+              <a:t>flexible</a:t>
+            </a:r>
+            <a:r>
+              <a:rPr lang="en-US" dirty="0"/>
+              <a:t>, </a:t>
+            </a:r>
+            <a:r>
+              <a:rPr lang="en-US" b="1" dirty="0"/>
+              <a:t>self-service..</a:t>
+            </a:r>
+            <a:r>
+              <a:rPr lang="en-US" dirty="0"/>
+              <a:t> ordering and business management platform — </a:t>
+            </a:r>
+          </a:p>
+          <a:p>
+            <a:r>
+              <a:rPr lang="en-US" dirty="0"/>
+              <a:t>with a customer-facing storefront </a:t>
+            </a:r>
+            <a:r>
+              <a:rPr lang="en-US" i="1" dirty="0"/>
+              <a:t>and</a:t>
+            </a:r>
+            <a:r>
+              <a:rPr lang="en-US" dirty="0"/>
+              <a:t> a full business admin portal. </a:t>
+            </a:r>
+            <a:r>
+              <a:rPr lang="en-US" b="1" dirty="0"/>
+              <a:t>Built</a:t>
+            </a:r>
+            <a:r>
+              <a:rPr lang="en-US" dirty="0"/>
+              <a:t>: from the </a:t>
+            </a:r>
+            <a:r>
+              <a:rPr lang="en-US" i="1" dirty="0"/>
+              <a:t>ground</a:t>
+            </a:r>
+            <a:r>
+              <a:rPr lang="en-US" dirty="0"/>
+              <a:t> up.</a:t>
+            </a:r>
+          </a:p>
+          <a:p>
+            <a:endParaRPr lang="en-US" dirty="0"/>
+          </a:p>
+          <a:p>
+            <a:r>
+              <a:rPr lang="en-US" b="1" dirty="0"/>
+              <a:t>Five</a:t>
+            </a:r>
+            <a:r>
+              <a:rPr lang="en-US" dirty="0"/>
+              <a:t> sprints. </a:t>
+            </a:r>
+            <a:r>
+              <a:rPr lang="en-US" b="1" dirty="0"/>
+              <a:t>Six</a:t>
+            </a:r>
+            <a:r>
+              <a:rPr lang="en-US" dirty="0"/>
+              <a:t> team members. And over fifteen user features </a:t>
+            </a:r>
+            <a:r>
+              <a:rPr lang="en-US" b="1" dirty="0"/>
+              <a:t>delivered</a:t>
+            </a:r>
+            <a:r>
+              <a:rPr lang="en-US" dirty="0"/>
+              <a:t>.</a:t>
+            </a:r>
+          </a:p>
+          <a:p>
+            <a:endParaRPr lang="en-US" dirty="0"/>
+          </a:p>
+          <a:p>
+            <a:r>
+              <a:rPr lang="en-US" dirty="0"/>
+              <a:t>Let me walk you through exactly how we got there.</a:t>
+            </a:r>
+          </a:p>
+          <a:p>
             <a:endParaRPr lang="en-US" sz="1200" b="0" i="0" kern="1200" dirty="0">
               <a:solidFill>
                 <a:schemeClr val="tx1"/>
@@ -1774,6 +2050,29 @@
               <a:ea typeface="+mn-ea"/>
               <a:cs typeface="+mn-cs"/>
             </a:endParaRPr>
+          </a:p>
+          <a:p>
+            <a:pPr marL="0" marR="0" lvl="0" indent="0" algn="l" defTabSz="914400" rtl="0" eaLnBrk="1" fontAlgn="auto" latinLnBrk="0" hangingPunct="1">
+              <a:lnSpc>
+                <a:spcPct val="100000"/>
+              </a:lnSpc>
+              <a:spcBef>
+                <a:spcPts val="0"/>
+              </a:spcBef>
+              <a:spcAft>
+                <a:spcPts val="0"/>
+              </a:spcAft>
+              <a:buClrTx/>
+              <a:buSzTx/>
+              <a:buFontTx/>
+              <a:buNone/>
+              <a:tabLst/>
+              <a:defRPr/>
+            </a:pPr>
+            <a:r>
+              <a:rPr lang="en-US" dirty="0"/>
+              <a:t>🎬 NEXT  SLIDE.. 😌 ⏭️</a:t>
+            </a:r>
           </a:p>
           <a:p>
             <a:endParaRPr lang="en-US" sz="1200" b="1" i="0" kern="1200" dirty="0">
@@ -2349,22 +2648,9 @@
           <a:lstStyle/>
           <a:p>
             <a:r>
-              <a:rPr lang="en-US" b="1" dirty="0"/>
-              <a:t>⏭️ UP NEXT: </a:t>
-            </a:r>
-            <a:r>
               <a:rPr lang="en-US" dirty="0"/>
-              <a:t>KIM (following slide)</a:t>
-            </a:r>
-          </a:p>
-          <a:p>
-            <a:r>
-              <a:rPr lang="en-US" dirty="0"/>
-              <a:t>To share what our team development delivered and how we scoped it all out!</a:t>
-            </a:r>
-          </a:p>
-          <a:p>
-            <a:endParaRPr lang="en-US" dirty="0"/>
+              <a:t>🟡 SERINA (continues..)</a:t>
+            </a:r>
           </a:p>
           <a:p>
             <a:r>
@@ -2374,12 +2660,6 @@
             <a:r>
               <a:rPr lang="en-US" dirty="0"/>
               <a:t>:</a:t>
-            </a:r>
-          </a:p>
-          <a:p>
-            <a:r>
-              <a:rPr lang="en-US" dirty="0"/>
-              <a:t>So let me walk you through how we actually built this.</a:t>
             </a:r>
           </a:p>
           <a:p>
@@ -2497,7 +2777,68 @@
           <a:p>
             <a:r>
               <a:rPr lang="en-US" dirty="0"/>
-              <a:t>I'll now hand it over to Kim, our Product Owner, to walk you through what we delivered.</a:t>
+              <a:t>I'll now hand it over to Kim, our Product Owner, to walk you through </a:t>
+            </a:r>
+            <a:r>
+              <a:rPr lang="en-US" b="1" dirty="0"/>
+              <a:t>what</a:t>
+            </a:r>
+            <a:r>
+              <a:rPr lang="en-US" dirty="0"/>
+              <a:t> we delivered and </a:t>
+            </a:r>
+            <a:r>
+              <a:rPr lang="en-US" b="1" i="1" dirty="0"/>
+              <a:t>how.. </a:t>
+            </a:r>
+            <a:r>
+              <a:rPr lang="en-US" dirty="0"/>
+              <a:t> we scoped it all out!</a:t>
+            </a:r>
+          </a:p>
+          <a:p>
+            <a:endParaRPr lang="en-US" dirty="0"/>
+          </a:p>
+          <a:p>
+            <a:r>
+              <a:rPr lang="en-US" dirty="0"/>
+              <a:t>Kim, if you could please 🙂‍↔️</a:t>
+            </a:r>
+          </a:p>
+          <a:p>
+            <a:endParaRPr lang="en-US" dirty="0"/>
+          </a:p>
+          <a:p>
+            <a:r>
+              <a:rPr lang="en-US" b="1" dirty="0"/>
+              <a:t>⏭️ UP NEXT: </a:t>
+            </a:r>
+            <a:r>
+              <a:rPr lang="en-US" dirty="0"/>
+              <a:t>KIM </a:t>
+            </a:r>
+          </a:p>
+          <a:p>
+            <a:pPr marL="0" marR="0" lvl="0" indent="0" algn="l" defTabSz="914400" rtl="0" eaLnBrk="1" fontAlgn="auto" latinLnBrk="0" hangingPunct="1">
+              <a:lnSpc>
+                <a:spcPct val="100000"/>
+              </a:lnSpc>
+              <a:spcBef>
+                <a:spcPts val="0"/>
+              </a:spcBef>
+              <a:spcAft>
+                <a:spcPts val="0"/>
+              </a:spcAft>
+              <a:buClrTx/>
+              <a:buSzTx/>
+              <a:buFontTx/>
+              <a:buNone/>
+              <a:tabLst/>
+              <a:defRPr/>
+            </a:pPr>
+            <a:r>
+              <a:rPr lang="en-US" dirty="0"/>
+              <a:t>🎬 NEXT  SLIDE.. 😌 ⏭️</a:t>
             </a:r>
           </a:p>
           <a:p>
@@ -2594,20 +2935,338 @@
           <a:p>
             <a:r>
               <a:rPr lang="en-US" dirty="0"/>
-              <a:t>🟡 Kim</a:t>
-            </a:r>
+              <a:t>🟡 Kim –</a:t>
+            </a:r>
+            <a:r>
+              <a:rPr lang="en-US" i="0" dirty="0"/>
+              <a:t>✨ You got this!</a:t>
+            </a:r>
+            <a:endParaRPr lang="en-US" i="1" dirty="0"/>
+          </a:p>
+          <a:p>
+            <a:endParaRPr lang="en-US" dirty="0"/>
           </a:p>
           <a:p>
             <a:r>
               <a:rPr lang="en-US" dirty="0"/>
-              <a:t>Note: These are the key features! Highlight them and let them shine through. Then… </a:t>
-            </a:r>
-          </a:p>
-          <a:p>
+              <a:t>Hi…! I’m Kim Mayo. ✨</a:t>
+            </a:r>
+          </a:p>
+          <a:p>
+            <a:r>
+              <a:rPr lang="en-US" b="1" dirty="0"/>
+              <a:t>Product Owner </a:t>
+            </a:r>
             <a:r>
               <a:rPr lang="en-US" dirty="0"/>
-              <a:t>Transition into the next slide to talk about the Epics that brought them to life plus BONUS stats</a:t>
-            </a:r>
+              <a:t>and </a:t>
+            </a:r>
+            <a:r>
+              <a:rPr lang="en-US" b="1" dirty="0"/>
+              <a:t>Full Stack </a:t>
+            </a:r>
+            <a:r>
+              <a:rPr lang="en-US" dirty="0"/>
+              <a:t>Developer for </a:t>
+            </a:r>
+            <a:r>
+              <a:rPr lang="en-US" b="1" dirty="0"/>
+              <a:t>Orderly</a:t>
+            </a:r>
+            <a:r>
+              <a:rPr lang="en-US" dirty="0"/>
+              <a:t>.</a:t>
+            </a:r>
+          </a:p>
+          <a:p>
+            <a:endParaRPr lang="en-US" dirty="0"/>
+          </a:p>
+          <a:p>
+            <a:r>
+              <a:rPr lang="en-US" dirty="0"/>
+              <a:t>.. Let’s take a look at some of the </a:t>
+            </a:r>
+            <a:r>
+              <a:rPr lang="en-US" i="1" dirty="0"/>
+              <a:t>key features </a:t>
+            </a:r>
+            <a:r>
+              <a:rPr lang="en-US" dirty="0"/>
+              <a:t>that make up its system..</a:t>
+            </a:r>
+          </a:p>
+          <a:p>
+            <a:endParaRPr lang="en-US" dirty="0"/>
+          </a:p>
+          <a:p>
+            <a:r>
+              <a:rPr lang="en-US" dirty="0"/>
+              <a:t>Orderly is designed around </a:t>
+            </a:r>
+            <a:r>
+              <a:rPr lang="en-US" b="1" dirty="0"/>
+              <a:t>two</a:t>
+            </a:r>
+            <a:r>
+              <a:rPr lang="en-US" dirty="0"/>
+              <a:t> main types of users: </a:t>
+            </a:r>
+          </a:p>
+          <a:p>
+            <a:r>
+              <a:rPr lang="en-US" b="1" dirty="0"/>
+              <a:t>customers</a:t>
+            </a:r>
+            <a:r>
+              <a:rPr lang="en-US" dirty="0"/>
+              <a:t> </a:t>
+            </a:r>
+            <a:r>
+              <a:rPr lang="en-US" i="1" dirty="0"/>
+              <a:t>and</a:t>
+            </a:r>
+            <a:r>
+              <a:rPr lang="en-US" dirty="0"/>
+              <a:t> </a:t>
+            </a:r>
+            <a:r>
+              <a:rPr lang="en-US" b="1" dirty="0"/>
+              <a:t>business users</a:t>
+            </a:r>
+            <a:r>
+              <a:rPr lang="en-US" dirty="0"/>
+              <a:t>.</a:t>
+            </a:r>
+          </a:p>
+          <a:p>
+            <a:endParaRPr lang="en-US" dirty="0"/>
+          </a:p>
+          <a:p>
+            <a:r>
+              <a:rPr lang="en-US" dirty="0"/>
+              <a:t>Orderly allows customers to </a:t>
+            </a:r>
+            <a:r>
+              <a:rPr lang="en-US" b="1" dirty="0"/>
+              <a:t>browse products</a:t>
+            </a:r>
+            <a:r>
+              <a:rPr lang="en-US" dirty="0"/>
+              <a:t>, </a:t>
+            </a:r>
+            <a:r>
+              <a:rPr lang="en-US" i="1" dirty="0"/>
+              <a:t>customize items</a:t>
+            </a:r>
+            <a:r>
+              <a:rPr lang="en-US" dirty="0"/>
+              <a:t>, and </a:t>
+            </a:r>
+            <a:r>
+              <a:rPr lang="en-US" b="1" dirty="0"/>
+              <a:t>place orders</a:t>
+            </a:r>
+            <a:r>
+              <a:rPr lang="en-US" dirty="0"/>
+              <a:t> with real-time updates.</a:t>
+            </a:r>
+          </a:p>
+          <a:p>
+            <a:endParaRPr lang="en-US" dirty="0"/>
+          </a:p>
+          <a:p>
+            <a:r>
+              <a:rPr lang="en-US" dirty="0"/>
+              <a:t>For business users, we built an </a:t>
+            </a:r>
+            <a:r>
+              <a:rPr lang="en-US" b="1" dirty="0"/>
+              <a:t>admin dashboard</a:t>
+            </a:r>
+            <a:r>
+              <a:rPr lang="en-US" dirty="0"/>
+              <a:t> that provides a </a:t>
+            </a:r>
+            <a:r>
+              <a:rPr lang="en-US" i="1" dirty="0"/>
+              <a:t>centralized view </a:t>
+            </a:r>
+            <a:r>
+              <a:rPr lang="en-US" dirty="0"/>
+              <a:t>of the system, with </a:t>
+            </a:r>
+            <a:r>
+              <a:rPr lang="en-US" b="1" dirty="0"/>
+              <a:t>role-based access</a:t>
+            </a:r>
+            <a:r>
+              <a:rPr lang="en-US" dirty="0"/>
+              <a:t> and </a:t>
+            </a:r>
+            <a:r>
+              <a:rPr lang="en-US" i="1" dirty="0"/>
+              <a:t>quick</a:t>
+            </a:r>
+            <a:r>
+              <a:rPr lang="en-US" dirty="0"/>
+              <a:t> </a:t>
+            </a:r>
+            <a:r>
+              <a:rPr lang="en-US" b="1" dirty="0"/>
+              <a:t>navigation</a:t>
+            </a:r>
+            <a:r>
+              <a:rPr lang="en-US" dirty="0"/>
+              <a:t>.</a:t>
+            </a:r>
+          </a:p>
+          <a:p>
+            <a:r>
+              <a:rPr lang="en-US" b="1" dirty="0"/>
+              <a:t>Admins</a:t>
+            </a:r>
+            <a:r>
+              <a:rPr lang="en-US" dirty="0"/>
+              <a:t> can </a:t>
+            </a:r>
+            <a:r>
+              <a:rPr lang="en-US" i="1" dirty="0"/>
+              <a:t>manage products</a:t>
+            </a:r>
+            <a:r>
+              <a:rPr lang="en-US" dirty="0"/>
+              <a:t>, </a:t>
+            </a:r>
+            <a:r>
+              <a:rPr lang="en-US" b="1" dirty="0"/>
+              <a:t>inventory</a:t>
+            </a:r>
+            <a:r>
+              <a:rPr lang="en-US" dirty="0"/>
+              <a:t>, </a:t>
+            </a:r>
+            <a:r>
+              <a:rPr lang="en-US" i="1" dirty="0"/>
+              <a:t>and..</a:t>
+            </a:r>
+            <a:r>
+              <a:rPr lang="en-US" dirty="0"/>
+              <a:t> orders, including </a:t>
+            </a:r>
+            <a:r>
+              <a:rPr lang="en-US" i="1" dirty="0"/>
+              <a:t>updating</a:t>
+            </a:r>
+            <a:r>
+              <a:rPr lang="en-US" dirty="0"/>
+              <a:t> </a:t>
+            </a:r>
+            <a:r>
+              <a:rPr lang="en-US" b="1" dirty="0"/>
+              <a:t>stock levels </a:t>
+            </a:r>
+            <a:r>
+              <a:rPr lang="en-US" dirty="0"/>
+              <a:t>and </a:t>
+            </a:r>
+            <a:r>
+              <a:rPr lang="en-US" i="1" dirty="0"/>
+              <a:t>tracking</a:t>
+            </a:r>
+            <a:r>
+              <a:rPr lang="en-US" dirty="0"/>
+              <a:t> </a:t>
+            </a:r>
+            <a:r>
+              <a:rPr lang="en-US" b="1" dirty="0"/>
+              <a:t>order activity</a:t>
+            </a:r>
+            <a:r>
+              <a:rPr lang="en-US" dirty="0"/>
+              <a:t>.</a:t>
+            </a:r>
+          </a:p>
+          <a:p>
+            <a:endParaRPr lang="en-US" dirty="0"/>
+          </a:p>
+          <a:p>
+            <a:r>
+              <a:rPr lang="en-US" dirty="0"/>
+              <a:t>We also included a sales dashboard </a:t>
+            </a:r>
+          </a:p>
+          <a:p>
+            <a:r>
+              <a:rPr lang="en-US" dirty="0"/>
+              <a:t>… to provide insights like </a:t>
+            </a:r>
+            <a:r>
+              <a:rPr lang="en-US" b="1" dirty="0"/>
+              <a:t>revenue and order trends</a:t>
+            </a:r>
+            <a:r>
+              <a:rPr lang="en-US" dirty="0"/>
+              <a:t>, helping to support </a:t>
+            </a:r>
+            <a:r>
+              <a:rPr lang="en-US" b="1" dirty="0"/>
+              <a:t>better</a:t>
+            </a:r>
+            <a:r>
+              <a:rPr lang="en-US" dirty="0"/>
+              <a:t> </a:t>
+            </a:r>
+            <a:r>
+              <a:rPr lang="en-US" i="1" dirty="0"/>
+              <a:t>business decisions ✨</a:t>
+            </a:r>
+          </a:p>
+          <a:p>
+            <a:endParaRPr lang="en-US" i="1" dirty="0"/>
+          </a:p>
+          <a:p>
+            <a:r>
+              <a:rPr lang="en-US" dirty="0"/>
+              <a:t>Now that we’ve looked at what </a:t>
+            </a:r>
+            <a:r>
+              <a:rPr lang="en-US" b="1" dirty="0"/>
+              <a:t>Orderly does from a </a:t>
+            </a:r>
+            <a:r>
+              <a:rPr lang="en-US" i="1" dirty="0"/>
+              <a:t>user perspective</a:t>
+            </a:r>
+            <a:r>
+              <a:rPr lang="en-US" dirty="0"/>
+              <a:t>,</a:t>
+            </a:r>
+          </a:p>
+          <a:p>
+            <a:r>
+              <a:rPr lang="en-US" dirty="0"/>
+              <a:t>let’s… talk about the </a:t>
+            </a:r>
+            <a:r>
+              <a:rPr lang="en-US" b="1" dirty="0"/>
+              <a:t>Epic planning </a:t>
+            </a:r>
+            <a:r>
+              <a:rPr lang="en-US" dirty="0"/>
+              <a:t>that brought them to life...!</a:t>
+            </a:r>
+          </a:p>
+          <a:p>
+            <a:endParaRPr lang="en-US" dirty="0"/>
+          </a:p>
+          <a:p>
+            <a:r>
+              <a:rPr lang="en-US" dirty="0"/>
+              <a:t>🎬 NEXT  SLIDE.. 😌 ⏭️</a:t>
+            </a:r>
+          </a:p>
+          <a:p>
+            <a:endParaRPr lang="en-US" dirty="0"/>
           </a:p>
         </p:txBody>
       </p:sp>
@@ -2718,22 +3377,269 @@
           <a:p>
             <a:r>
               <a:rPr lang="en-US" dirty="0"/>
-              <a:t>🟡 KIM:</a:t>
-            </a:r>
-            <a:br>
+              <a:t>🟡 KIM: -</a:t>
+            </a:r>
+            <a:r>
+              <a:rPr lang="en-US" i="1" dirty="0"/>
+              <a:t>breathe- 🍃</a:t>
+            </a:r>
+            <a:endParaRPr lang="en-US" dirty="0"/>
+          </a:p>
+          <a:p>
+            <a:endParaRPr lang="en-US" dirty="0"/>
+          </a:p>
+          <a:p>
+            <a:r>
               <a:rPr lang="en-US" dirty="0"/>
-            </a:br>
+              <a:t>Orderly is a </a:t>
+            </a:r>
+            <a:r>
+              <a:rPr lang="en-US" b="1" dirty="0"/>
+              <a:t>full-stack</a:t>
+            </a:r>
             <a:r>
               <a:rPr lang="en-US" dirty="0"/>
-              <a:t>The previous slide listed out the key features. </a:t>
-            </a:r>
-            <a:br>
+              <a:t> system..</a:t>
+            </a:r>
+          </a:p>
+          <a:p>
+            <a:r>
+              <a:rPr lang="en-US" i="1" dirty="0"/>
+              <a:t>Designed</a:t>
+            </a:r>
+            <a:r>
               <a:rPr lang="en-US" dirty="0"/>
-            </a:br>
+              <a:t> to be both: </a:t>
+            </a:r>
+            <a:r>
+              <a:rPr lang="en-US" b="1" dirty="0"/>
+              <a:t>flexible</a:t>
+            </a:r>
             <a:r>
               <a:rPr lang="en-US" dirty="0"/>
-              <a:t>Transition into this slide and focus on the Epics that were delivered + Bonus Stats ✨</a:t>
-            </a:r>
+              <a:t> </a:t>
+            </a:r>
+            <a:r>
+              <a:rPr lang="en-US" i="1" dirty="0"/>
+              <a:t>and</a:t>
+            </a:r>
+            <a:r>
+              <a:rPr lang="en-US" dirty="0"/>
+              <a:t> </a:t>
+            </a:r>
+            <a:r>
+              <a:rPr lang="en-US" b="1" dirty="0"/>
+              <a:t>scalable</a:t>
+            </a:r>
+            <a:r>
+              <a:rPr lang="en-US" dirty="0"/>
+              <a:t>.</a:t>
+            </a:r>
+          </a:p>
+          <a:p>
+            <a:endParaRPr lang="en-US" dirty="0"/>
+          </a:p>
+          <a:p>
+            <a:r>
+              <a:rPr lang="en-US" dirty="0"/>
+              <a:t>We worked across four major epics and delivered </a:t>
+            </a:r>
+            <a:r>
+              <a:rPr lang="en-US" b="1" dirty="0"/>
+              <a:t>over </a:t>
+            </a:r>
+            <a:r>
+              <a:rPr lang="en-US" dirty="0"/>
+              <a:t>25 user stories..</a:t>
+            </a:r>
+          </a:p>
+          <a:p>
+            <a:r>
+              <a:rPr lang="en-US" dirty="0"/>
+              <a:t>supporting both: </a:t>
+            </a:r>
+            <a:r>
+              <a:rPr lang="en-US" b="1" dirty="0"/>
+              <a:t>customers</a:t>
+            </a:r>
+            <a:r>
+              <a:rPr lang="en-US" dirty="0"/>
+              <a:t> </a:t>
+            </a:r>
+            <a:r>
+              <a:rPr lang="en-US" i="1" dirty="0"/>
+              <a:t>and</a:t>
+            </a:r>
+            <a:r>
+              <a:rPr lang="en-US" dirty="0"/>
+              <a:t> </a:t>
+            </a:r>
+            <a:r>
+              <a:rPr lang="en-US" b="1" dirty="0"/>
+              <a:t>business users</a:t>
+            </a:r>
+            <a:r>
+              <a:rPr lang="en-US" dirty="0"/>
+              <a:t>.</a:t>
+            </a:r>
+          </a:p>
+          <a:p>
+            <a:endParaRPr lang="en-US" dirty="0"/>
+          </a:p>
+          <a:p>
+            <a:r>
+              <a:rPr lang="en-US" dirty="0"/>
+              <a:t>As a team—</a:t>
+            </a:r>
+          </a:p>
+          <a:p>
+            <a:r>
+              <a:rPr lang="en-US" dirty="0"/>
+              <a:t>we made over 800 code commits</a:t>
+            </a:r>
+          </a:p>
+          <a:p>
+            <a:r>
+              <a:rPr lang="en-US" dirty="0"/>
+              <a:t>.. reflecting </a:t>
+            </a:r>
+            <a:r>
+              <a:rPr lang="en-US" i="1" dirty="0"/>
+              <a:t>strong collaboration </a:t>
+            </a:r>
+            <a:r>
+              <a:rPr lang="en-US" b="1" dirty="0"/>
+              <a:t>throughout</a:t>
+            </a:r>
+            <a:r>
+              <a:rPr lang="en-US" dirty="0"/>
+              <a:t> the project.</a:t>
+            </a:r>
+          </a:p>
+          <a:p>
+            <a:endParaRPr lang="en-US" dirty="0"/>
+          </a:p>
+          <a:p>
+            <a:r>
+              <a:rPr lang="en-US" dirty="0"/>
+              <a:t>We also developed </a:t>
+            </a:r>
+            <a:r>
+              <a:rPr lang="en-US" b="1" dirty="0"/>
+              <a:t>over 50</a:t>
+            </a:r>
+            <a:r>
+              <a:rPr lang="en-US" dirty="0"/>
+              <a:t> </a:t>
+            </a:r>
+            <a:r>
+              <a:rPr lang="en-US" i="0" dirty="0"/>
+              <a:t>API endpoints </a:t>
+            </a:r>
+            <a:r>
+              <a:rPr lang="en-US" b="1" dirty="0"/>
+              <a:t>and,</a:t>
+            </a:r>
+            <a:endParaRPr lang="en-US" dirty="0"/>
+          </a:p>
+          <a:p>
+            <a:r>
+              <a:rPr lang="en-US" dirty="0"/>
+              <a:t>supported them with automated testing to ensure system reliability.</a:t>
+            </a:r>
+          </a:p>
+          <a:p>
+            <a:endParaRPr lang="en-US" dirty="0"/>
+          </a:p>
+          <a:p>
+            <a:r>
+              <a:rPr lang="en-US" i="1" dirty="0"/>
+              <a:t>Finally</a:t>
+            </a:r>
+            <a:r>
+              <a:rPr lang="en-US" dirty="0"/>
+              <a:t>, </a:t>
+            </a:r>
+          </a:p>
+          <a:p>
+            <a:r>
+              <a:rPr lang="en-US" dirty="0"/>
+              <a:t>we maintained a living backlog.. to keep development </a:t>
+            </a:r>
+            <a:r>
+              <a:rPr lang="en-US" i="1" dirty="0"/>
+              <a:t>aligned…</a:t>
+            </a:r>
+            <a:r>
+              <a:rPr lang="en-US" dirty="0"/>
+              <a:t> and up to date.</a:t>
+            </a:r>
+          </a:p>
+          <a:p>
+            <a:r>
+              <a:rPr lang="en-US" dirty="0"/>
+              <a:t> </a:t>
+            </a:r>
+          </a:p>
+          <a:p>
+            <a:pPr marL="0" marR="0" lvl="0" indent="0" algn="l" defTabSz="914400" rtl="0" eaLnBrk="1" fontAlgn="auto" latinLnBrk="0" hangingPunct="1">
+              <a:lnSpc>
+                <a:spcPct val="100000"/>
+              </a:lnSpc>
+              <a:spcBef>
+                <a:spcPts val="0"/>
+              </a:spcBef>
+              <a:spcAft>
+                <a:spcPts val="0"/>
+              </a:spcAft>
+              <a:buClrTx/>
+              <a:buSzTx/>
+              <a:buFontTx/>
+              <a:buNone/>
+              <a:tabLst/>
+              <a:defRPr/>
+            </a:pPr>
+            <a:r>
+              <a:rPr lang="en-US" dirty="0"/>
+              <a:t>With that said, Let’s take a step back and </a:t>
+            </a:r>
+            <a:r>
+              <a:rPr lang="en-US" b="1" dirty="0"/>
+              <a:t>look </a:t>
+            </a:r>
+            <a:r>
+              <a:rPr lang="en-US" dirty="0"/>
+              <a:t>at the overall scope of the project… </a:t>
+            </a:r>
+          </a:p>
+          <a:p>
+            <a:endParaRPr lang="en-US" dirty="0"/>
+          </a:p>
+          <a:p>
+            <a:pPr marL="0" marR="0" lvl="0" indent="0" algn="l" defTabSz="914400" rtl="0" eaLnBrk="1" fontAlgn="auto" latinLnBrk="0" hangingPunct="1">
+              <a:lnSpc>
+                <a:spcPct val="100000"/>
+              </a:lnSpc>
+              <a:spcBef>
+                <a:spcPts val="0"/>
+              </a:spcBef>
+              <a:spcAft>
+                <a:spcPts val="0"/>
+              </a:spcAft>
+              <a:buClrTx/>
+              <a:buSzTx/>
+              <a:buFontTx/>
+              <a:buNone/>
+              <a:tabLst/>
+              <a:defRPr/>
+            </a:pPr>
+            <a:r>
+              <a:rPr lang="en-US" dirty="0"/>
+              <a:t>🎬 NEXT  SLIDE.. 😌 ⏭️</a:t>
+            </a:r>
+          </a:p>
+          <a:p>
+            <a:endParaRPr lang="en-US" dirty="0"/>
           </a:p>
         </p:txBody>
       </p:sp>
@@ -2849,13 +3755,223 @@
           <a:lstStyle/>
           <a:p>
             <a:r>
+              <a:rPr lang="en-US" dirty="0"/>
+              <a:t>🟡 KIM: </a:t>
+            </a:r>
+            <a:r>
+              <a:rPr lang="en-US" dirty="0">
+                <a:solidFill>
+                  <a:schemeClr val="accent3"/>
+                </a:solidFill>
+              </a:rPr>
+              <a:t>--one more to go!--</a:t>
+            </a:r>
+          </a:p>
+          <a:p>
+            <a:endParaRPr lang="en-US" b="0" dirty="0"/>
+          </a:p>
+          <a:p>
+            <a:r>
+              <a:rPr lang="en-US" dirty="0"/>
+              <a:t>To make </a:t>
+            </a:r>
+            <a:r>
               <a:rPr lang="en-US" b="1" dirty="0"/>
-              <a:t>🟡 Up Next: </a:t>
-            </a:r>
-            <a:r>
-              <a:rPr lang="en-US" b="0" dirty="0"/>
-              <a:t>What we are proud of (Kim continues..)</a:t>
-            </a:r>
+              <a:t>all</a:t>
+            </a:r>
+            <a:r>
+              <a:rPr lang="en-US" dirty="0"/>
+              <a:t> of that possible..</a:t>
+            </a:r>
+          </a:p>
+          <a:p>
+            <a:r>
+              <a:rPr lang="en-US" dirty="0"/>
+              <a:t>we had to be </a:t>
+            </a:r>
+            <a:r>
+              <a:rPr lang="en-US" i="1" dirty="0"/>
+              <a:t>very</a:t>
+            </a:r>
+            <a:r>
+              <a:rPr lang="en-US" dirty="0"/>
+              <a:t> intentional about </a:t>
+            </a:r>
+            <a:r>
+              <a:rPr lang="en-US" i="1" dirty="0"/>
+              <a:t>how</a:t>
+            </a:r>
+            <a:r>
+              <a:rPr lang="en-US" dirty="0"/>
+              <a:t> we managed scope and made our product decisions.</a:t>
+            </a:r>
+          </a:p>
+          <a:p>
+            <a:endParaRPr lang="en-US" dirty="0"/>
+          </a:p>
+          <a:p>
+            <a:r>
+              <a:rPr lang="en-US" dirty="0"/>
+              <a:t>We kept the project </a:t>
+            </a:r>
+            <a:r>
+              <a:rPr lang="en-US" b="1" dirty="0"/>
+              <a:t>focused</a:t>
+            </a:r>
+            <a:r>
+              <a:rPr lang="en-US" dirty="0"/>
+              <a:t> </a:t>
+            </a:r>
+            <a:r>
+              <a:rPr lang="en-US" i="1" dirty="0"/>
+              <a:t>and</a:t>
+            </a:r>
+            <a:r>
+              <a:rPr lang="en-US" dirty="0"/>
+              <a:t> </a:t>
+            </a:r>
+            <a:r>
+              <a:rPr lang="en-US" b="1" dirty="0"/>
+              <a:t>deliverable</a:t>
+            </a:r>
+            <a:r>
+              <a:rPr lang="en-US" dirty="0"/>
+              <a:t> </a:t>
+            </a:r>
+            <a:r>
+              <a:rPr lang="en-US" i="1" dirty="0"/>
+              <a:t>throughout development</a:t>
+            </a:r>
+            <a:r>
+              <a:rPr lang="en-US" dirty="0"/>
+              <a:t>.</a:t>
+            </a:r>
+          </a:p>
+          <a:p>
+            <a:r>
+              <a:rPr lang="en-US" dirty="0"/>
+              <a:t>We used Moscow to ensure critical features were completed </a:t>
+            </a:r>
+            <a:r>
+              <a:rPr lang="en-US" b="1" dirty="0"/>
+              <a:t>first</a:t>
+            </a:r>
+            <a:r>
+              <a:rPr lang="en-US" dirty="0"/>
+              <a:t>.</a:t>
+            </a:r>
+          </a:p>
+          <a:p>
+            <a:r>
+              <a:rPr lang="en-US" dirty="0"/>
+              <a:t>Also, we </a:t>
+            </a:r>
+            <a:r>
+              <a:rPr lang="en-US" dirty="0" err="1"/>
+              <a:t>followed..a</a:t>
+            </a:r>
+            <a:r>
+              <a:rPr lang="en-US" dirty="0"/>
+              <a:t> wave-based approach-- completing backend APIs </a:t>
+            </a:r>
+            <a:r>
+              <a:rPr lang="en-US" i="1" dirty="0"/>
+              <a:t>before</a:t>
+            </a:r>
+            <a:r>
+              <a:rPr lang="en-US" dirty="0"/>
+              <a:t> frontend integration to </a:t>
+            </a:r>
+            <a:r>
+              <a:rPr lang="en-US" b="0" i="1" dirty="0"/>
+              <a:t>reduce: </a:t>
+            </a:r>
+            <a:r>
+              <a:rPr lang="en-US" b="1" i="0" dirty="0"/>
+              <a:t>blockers</a:t>
+            </a:r>
+            <a:r>
+              <a:rPr lang="en-US" dirty="0"/>
+              <a:t>.</a:t>
+            </a:r>
+          </a:p>
+          <a:p>
+            <a:endParaRPr lang="en-US" dirty="0"/>
+          </a:p>
+          <a:p>
+            <a:r>
+              <a:rPr lang="en-US" dirty="0"/>
+              <a:t>We made sure </a:t>
+            </a:r>
+            <a:r>
+              <a:rPr lang="en-US" i="1" dirty="0"/>
+              <a:t>every</a:t>
+            </a:r>
+            <a:r>
+              <a:rPr lang="en-US" dirty="0"/>
+              <a:t> feature had </a:t>
+            </a:r>
+            <a:r>
+              <a:rPr lang="en-US" b="1" dirty="0"/>
+              <a:t>clear requirements </a:t>
+            </a:r>
+            <a:r>
+              <a:rPr lang="en-US" dirty="0"/>
+              <a:t>before development even began.</a:t>
+            </a:r>
+          </a:p>
+          <a:p>
+            <a:endParaRPr lang="en-US" dirty="0"/>
+          </a:p>
+          <a:p>
+            <a:r>
+              <a:rPr lang="en-US" dirty="0"/>
+              <a:t>.. These decisions helped us stay organized to deliver a </a:t>
+            </a:r>
+            <a:r>
+              <a:rPr lang="en-US" b="1" dirty="0"/>
+              <a:t>complete</a:t>
+            </a:r>
+            <a:r>
+              <a:rPr lang="en-US" dirty="0"/>
+              <a:t> </a:t>
+            </a:r>
+            <a:r>
+              <a:rPr lang="en-US" b="1" dirty="0"/>
+              <a:t>system</a:t>
+            </a:r>
+            <a:r>
+              <a:rPr lang="en-US" dirty="0"/>
+              <a:t>.</a:t>
+            </a:r>
+          </a:p>
+          <a:p>
+            <a:endParaRPr lang="en-US" b="1" dirty="0"/>
+          </a:p>
+          <a:p>
+            <a:pPr marL="0" marR="0" lvl="0" indent="0" algn="l" defTabSz="914400" rtl="0" eaLnBrk="1" fontAlgn="auto" latinLnBrk="0" hangingPunct="1">
+              <a:lnSpc>
+                <a:spcPct val="100000"/>
+              </a:lnSpc>
+              <a:spcBef>
+                <a:spcPts val="0"/>
+              </a:spcBef>
+              <a:spcAft>
+                <a:spcPts val="0"/>
+              </a:spcAft>
+              <a:buClrTx/>
+              <a:buSzTx/>
+              <a:buFontTx/>
+              <a:buNone/>
+              <a:tabLst/>
+              <a:defRPr/>
+            </a:pPr>
+            <a:r>
+              <a:rPr lang="en-US" dirty="0"/>
+              <a:t>🎬 NEXT  SLIDE.. 😌 ⏭️</a:t>
+            </a:r>
+          </a:p>
+          <a:p>
             <a:endParaRPr lang="en-US" b="1" dirty="0"/>
           </a:p>
         </p:txBody>
@@ -2954,6 +4070,58 @@
           <a:lstStyle/>
           <a:p>
             <a:r>
+              <a:rPr lang="en-US" dirty="0"/>
+              <a:t>🟡 KIM: </a:t>
+            </a:r>
+          </a:p>
+          <a:p>
+            <a:endParaRPr lang="en-US" b="1" dirty="0"/>
+          </a:p>
+          <a:p>
+            <a:r>
+              <a:rPr lang="en-US" dirty="0"/>
+              <a:t>Beyond how we built the system, we also want to highlight what stood out in how we worked as a team.</a:t>
+            </a:r>
+          </a:p>
+          <a:p>
+            <a:r>
+              <a:rPr lang="en-US" dirty="0"/>
+              <a:t>One of our biggest strengths was maintaining a clear API contract, which kept the frontend and backend aligned.</a:t>
+            </a:r>
+          </a:p>
+          <a:p>
+            <a:r>
+              <a:rPr lang="en-US" dirty="0"/>
+              <a:t>We also followed strong development practices, including code reviews and testing before merging changes.</a:t>
+            </a:r>
+          </a:p>
+          <a:p>
+            <a:r>
+              <a:rPr lang="en-US" dirty="0"/>
+              <a:t>Our team collaborated closely, supporting each other and adapting quickly when needed.</a:t>
+            </a:r>
+          </a:p>
+          <a:p>
+            <a:r>
+              <a:rPr lang="en-US" dirty="0"/>
+              <a:t>From a personal standpoint, I worked across both the backend and frontend, contributing to API development and frontend integration. I also helped ensure that features worked together end-to-end, focusing on connecting components and maintaining consistency across the system.</a:t>
+            </a:r>
+          </a:p>
+          <a:p>
+            <a:r>
+              <a:rPr lang="en-US" dirty="0"/>
+              <a:t>Overall, what we’re most proud of is that this idea became a reality—a complete platform with both a customer-facing interface and an admin portal that work together seamlessly.</a:t>
+            </a:r>
+            <a:endParaRPr lang="en-US" b="1" dirty="0"/>
+          </a:p>
+          <a:p>
+            <a:endParaRPr lang="en-US" b="1" dirty="0"/>
+          </a:p>
+          <a:p>
+            <a:endParaRPr lang="en-US" b="1" dirty="0"/>
+          </a:p>
+          <a:p>
+            <a:r>
               <a:rPr lang="en-US" b="1" dirty="0"/>
               <a:t>⏭️ Up Next: </a:t>
             </a:r>
@@ -2968,6 +4136,37 @@
               <a:rPr lang="en-US" b="0" dirty="0"/>
               <a:t>Transition with ”A Product that Actually feels like one…” into User Experience</a:t>
             </a:r>
+          </a:p>
+          <a:p>
+            <a:endParaRPr lang="en-US" b="0" dirty="0"/>
+          </a:p>
+          <a:p>
+            <a:endParaRPr lang="en-US" b="0" dirty="0"/>
+          </a:p>
+          <a:p>
+            <a:pPr marL="0" marR="0" lvl="0" indent="0" algn="l" defTabSz="914400" rtl="0" eaLnBrk="1" fontAlgn="auto" latinLnBrk="0" hangingPunct="1">
+              <a:lnSpc>
+                <a:spcPct val="100000"/>
+              </a:lnSpc>
+              <a:spcBef>
+                <a:spcPts val="0"/>
+              </a:spcBef>
+              <a:spcAft>
+                <a:spcPts val="0"/>
+              </a:spcAft>
+              <a:buClrTx/>
+              <a:buSzTx/>
+              <a:buFontTx/>
+              <a:buNone/>
+              <a:tabLst/>
+              <a:defRPr/>
+            </a:pPr>
+            <a:r>
+              <a:rPr lang="en-US" dirty="0"/>
+              <a:t>🎬 NEXT  SLIDE.. 😌 ⏭️</a:t>
+            </a:r>
+          </a:p>
+          <a:p>
             <a:endParaRPr lang="en-US" b="1" dirty="0"/>
           </a:p>
         </p:txBody>
@@ -11009,7 +12208,13 @@
       </p:grpSpPr>
       <p:sp>
         <p:nvSpPr>
-          <p:cNvPr id="5" name="Shape 3"/>
+          <p:cNvPr id="2" name="Shape 3">
+            <a:extLst>
+              <a:ext uri="{FF2B5EF4-FFF2-40B4-BE49-F238E27FC236}">
+                <a16:creationId xmlns:a16="http://schemas.microsoft.com/office/drawing/2014/main" id="{F49C1F25-058A-FA60-9447-591175FD1CAF}"/>
+              </a:ext>
+            </a:extLst>
+          </p:cNvPr>
           <p:cNvSpPr/>
           <p:nvPr/>
         </p:nvSpPr>
@@ -11048,7 +12253,13 @@
       </p:sp>
       <p:sp>
         <p:nvSpPr>
-          <p:cNvPr id="6" name="Shape 4"/>
+          <p:cNvPr id="3" name="Shape 4">
+            <a:extLst>
+              <a:ext uri="{FF2B5EF4-FFF2-40B4-BE49-F238E27FC236}">
+                <a16:creationId xmlns:a16="http://schemas.microsoft.com/office/drawing/2014/main" id="{64B1D373-E15C-7AFC-6EBB-9BD2546B576E}"/>
+              </a:ext>
+            </a:extLst>
+          </p:cNvPr>
           <p:cNvSpPr/>
           <p:nvPr/>
         </p:nvSpPr>
@@ -11080,7 +12291,13 @@
       </p:sp>
       <p:pic>
         <p:nvPicPr>
-          <p:cNvPr id="7" name="Image 0" descr="preencoded.png"/>
+          <p:cNvPr id="4" name="Image 0" descr="preencoded.png">
+            <a:extLst>
+              <a:ext uri="{FF2B5EF4-FFF2-40B4-BE49-F238E27FC236}">
+                <a16:creationId xmlns:a16="http://schemas.microsoft.com/office/drawing/2014/main" id="{598252FF-5FFC-8096-A8A6-69EA63847B8D}"/>
+              </a:ext>
+            </a:extLst>
+          </p:cNvPr>
           <p:cNvPicPr>
             <a:picLocks noChangeAspect="1"/>
           </p:cNvPicPr>
@@ -11104,7 +12321,13 @@
       </p:pic>
       <p:sp>
         <p:nvSpPr>
-          <p:cNvPr id="8" name="Text 5"/>
+          <p:cNvPr id="28" name="Text 5">
+            <a:extLst>
+              <a:ext uri="{FF2B5EF4-FFF2-40B4-BE49-F238E27FC236}">
+                <a16:creationId xmlns:a16="http://schemas.microsoft.com/office/drawing/2014/main" id="{9D4AE993-7C31-7A57-642C-9B1E6E83F744}"/>
+              </a:ext>
+            </a:extLst>
+          </p:cNvPr>
           <p:cNvSpPr/>
           <p:nvPr/>
         </p:nvSpPr>
@@ -11135,7 +12358,7 @@
                 <a:ea typeface="Calibri" pitchFamily="34" charset="-122"/>
                 <a:cs typeface="Calibri" pitchFamily="34" charset="-120"/>
               </a:rPr>
-              <a:t>The Challenge</a:t>
+              <a:t>Issue Discovered</a:t>
             </a:r>
             <a:endParaRPr lang="en-US" sz="1100" dirty="0"/>
           </a:p>
@@ -11143,7 +12366,13 @@
       </p:sp>
       <p:sp>
         <p:nvSpPr>
-          <p:cNvPr id="9" name="Text 6"/>
+          <p:cNvPr id="29" name="Text 6">
+            <a:extLst>
+              <a:ext uri="{FF2B5EF4-FFF2-40B4-BE49-F238E27FC236}">
+                <a16:creationId xmlns:a16="http://schemas.microsoft.com/office/drawing/2014/main" id="{9FB6D8C4-9FD3-6F27-81C3-1D4BFDCFBEC8}"/>
+              </a:ext>
+            </a:extLst>
+          </p:cNvPr>
           <p:cNvSpPr/>
           <p:nvPr/>
         </p:nvSpPr>
@@ -11174,10 +12403,22 @@
                 <a:ea typeface="Calibri" pitchFamily="34" charset="-122"/>
                 <a:cs typeface="Calibri" pitchFamily="34" charset="-120"/>
               </a:rPr>
-              <a:t>Feature Area / Test Name
-</a:t>
+              <a:t>Defect Summary</a:t>
             </a:r>
             <a:endParaRPr lang="en-US" sz="1000" dirty="0"/>
+          </a:p>
+          <a:p>
+            <a:pPr marL="0" indent="0">
+              <a:buNone/>
+            </a:pPr>
+            <a:endParaRPr lang="en-US" sz="1000" dirty="0">
+              <a:solidFill>
+                <a:srgbClr val="64748B"/>
+              </a:solidFill>
+              <a:latin typeface="Calibri" pitchFamily="34" charset="0"/>
+              <a:ea typeface="Calibri" pitchFamily="34" charset="-122"/>
+              <a:cs typeface="Calibri" pitchFamily="34" charset="-120"/>
+            </a:endParaRPr>
           </a:p>
           <a:p>
             <a:pPr marL="0" indent="0">
@@ -11192,15 +12433,49 @@
                 <a:ea typeface="Calibri" pitchFamily="34" charset="-122"/>
                 <a:cs typeface="Calibri" pitchFamily="34" charset="-120"/>
               </a:rPr>
-              <a:t>[Placeholder: Describe what this test was validating — e.g., role-based access control on admin routes, or end-to-end order submission flow.]</a:t>
-            </a:r>
-            <a:endParaRPr lang="en-US" sz="1000" dirty="0"/>
-          </a:p>
-        </p:txBody>
-      </p:sp>
-      <p:sp>
-        <p:nvSpPr>
-          <p:cNvPr id="10" name="Shape 7"/>
+              <a:t>During Admin RBAC testing, QA found logged-out users could access /admin/products instead of being redirected to login.</a:t>
+            </a:r>
+          </a:p>
+          <a:p>
+            <a:pPr marL="0" indent="0">
+              <a:buNone/>
+            </a:pPr>
+            <a:endParaRPr lang="en-US" sz="1000" dirty="0">
+              <a:solidFill>
+                <a:srgbClr val="64748B"/>
+              </a:solidFill>
+              <a:latin typeface="Calibri" pitchFamily="34" charset="0"/>
+              <a:ea typeface="Calibri" pitchFamily="34" charset="-122"/>
+              <a:cs typeface="Calibri" pitchFamily="34" charset="-120"/>
+            </a:endParaRPr>
+          </a:p>
+          <a:p>
+            <a:pPr marL="0" indent="0">
+              <a:buNone/>
+            </a:pPr>
+            <a:r>
+              <a:rPr lang="en-US" sz="1000" dirty="0">
+                <a:solidFill>
+                  <a:srgbClr val="64748B"/>
+                </a:solidFill>
+                <a:latin typeface="Calibri" pitchFamily="34" charset="0"/>
+                <a:ea typeface="Calibri" pitchFamily="34" charset="-122"/>
+                <a:cs typeface="Calibri" pitchFamily="34" charset="-120"/>
+              </a:rPr>
+              <a:t>A high-severity bug report was created with reproduction steps, expected vs actual behavior, and security impact.</a:t>
+            </a:r>
+          </a:p>
+        </p:txBody>
+      </p:sp>
+      <p:sp>
+        <p:nvSpPr>
+          <p:cNvPr id="30" name="Shape 7">
+            <a:extLst>
+              <a:ext uri="{FF2B5EF4-FFF2-40B4-BE49-F238E27FC236}">
+                <a16:creationId xmlns:a16="http://schemas.microsoft.com/office/drawing/2014/main" id="{1B270BB0-45AC-1B2A-2BD8-2AB04962D9D4}"/>
+              </a:ext>
+            </a:extLst>
+          </p:cNvPr>
           <p:cNvSpPr/>
           <p:nvPr/>
         </p:nvSpPr>
@@ -11239,7 +12514,13 @@
       </p:sp>
       <p:sp>
         <p:nvSpPr>
-          <p:cNvPr id="11" name="Shape 8"/>
+          <p:cNvPr id="31" name="Shape 8">
+            <a:extLst>
+              <a:ext uri="{FF2B5EF4-FFF2-40B4-BE49-F238E27FC236}">
+                <a16:creationId xmlns:a16="http://schemas.microsoft.com/office/drawing/2014/main" id="{F4DF9DEA-3D91-70D9-747D-235B9118308B}"/>
+              </a:ext>
+            </a:extLst>
+          </p:cNvPr>
           <p:cNvSpPr/>
           <p:nvPr/>
         </p:nvSpPr>
@@ -11271,7 +12552,13 @@
       </p:sp>
       <p:pic>
         <p:nvPicPr>
-          <p:cNvPr id="12" name="Image 1" descr="preencoded.png"/>
+          <p:cNvPr id="32" name="Image 1" descr="preencoded.png">
+            <a:extLst>
+              <a:ext uri="{FF2B5EF4-FFF2-40B4-BE49-F238E27FC236}">
+                <a16:creationId xmlns:a16="http://schemas.microsoft.com/office/drawing/2014/main" id="{9A042BE0-FDB7-72CC-4802-2D6903EF17B3}"/>
+              </a:ext>
+            </a:extLst>
+          </p:cNvPr>
           <p:cNvPicPr>
             <a:picLocks noChangeAspect="1"/>
           </p:cNvPicPr>
@@ -11295,7 +12582,13 @@
       </p:pic>
       <p:sp>
         <p:nvSpPr>
-          <p:cNvPr id="13" name="Text 9"/>
+          <p:cNvPr id="33" name="Text 9">
+            <a:extLst>
+              <a:ext uri="{FF2B5EF4-FFF2-40B4-BE49-F238E27FC236}">
+                <a16:creationId xmlns:a16="http://schemas.microsoft.com/office/drawing/2014/main" id="{64185BED-4976-0511-4611-335713A4BAEB}"/>
+              </a:ext>
+            </a:extLst>
+          </p:cNvPr>
           <p:cNvSpPr/>
           <p:nvPr/>
         </p:nvSpPr>
@@ -11326,7 +12619,7 @@
                 <a:ea typeface="Calibri" pitchFamily="34" charset="-122"/>
                 <a:cs typeface="Calibri" pitchFamily="34" charset="-120"/>
               </a:rPr>
-              <a:t>How It Was Identified</a:t>
+              <a:t>Detection &amp; Validation</a:t>
             </a:r>
             <a:endParaRPr lang="en-US" sz="1100" dirty="0"/>
           </a:p>
@@ -11334,7 +12627,13 @@
       </p:sp>
       <p:sp>
         <p:nvSpPr>
-          <p:cNvPr id="14" name="Text 10"/>
+          <p:cNvPr id="34" name="Text 10">
+            <a:extLst>
+              <a:ext uri="{FF2B5EF4-FFF2-40B4-BE49-F238E27FC236}">
+                <a16:creationId xmlns:a16="http://schemas.microsoft.com/office/drawing/2014/main" id="{D4782811-6061-26C2-C14A-DFC6578F4C33}"/>
+              </a:ext>
+            </a:extLst>
+          </p:cNvPr>
           <p:cNvSpPr/>
           <p:nvPr/>
         </p:nvSpPr>
@@ -11365,7 +12664,7 @@
                 <a:ea typeface="Calibri" pitchFamily="34" charset="-122"/>
                 <a:cs typeface="Calibri" pitchFamily="34" charset="-120"/>
               </a:rPr>
-              <a:t>Detection Method
+              <a:t>Validation Approach
 </a:t>
             </a:r>
             <a:endParaRPr lang="en-US" sz="1000" dirty="0"/>
@@ -11383,7 +12682,36 @@
                 <a:ea typeface="Calibri" pitchFamily="34" charset="-122"/>
                 <a:cs typeface="Calibri" pitchFamily="34" charset="-120"/>
               </a:rPr>
-              <a:t>[Placeholder: How was this caught? Automated test failure, manual QA pass, CI regression run, code review flag? 1–2 sentences on the moment of discovery.]</a:t>
+              <a:t>The issue was traced to route protection and access control logic.</a:t>
+            </a:r>
+          </a:p>
+          <a:p>
+            <a:pPr marL="0" indent="0">
+              <a:buNone/>
+            </a:pPr>
+            <a:endParaRPr lang="en-US" sz="1000" dirty="0">
+              <a:solidFill>
+                <a:srgbClr val="64748B"/>
+              </a:solidFill>
+              <a:latin typeface="Calibri" pitchFamily="34" charset="0"/>
+              <a:ea typeface="Calibri" pitchFamily="34" charset="-122"/>
+              <a:cs typeface="Calibri" pitchFamily="34" charset="-120"/>
+            </a:endParaRPr>
+          </a:p>
+          <a:p>
+            <a:pPr marL="0" indent="0">
+              <a:buNone/>
+            </a:pPr>
+            <a:r>
+              <a:rPr lang="en-US" sz="1000" dirty="0">
+                <a:solidFill>
+                  <a:srgbClr val="64748B"/>
+                </a:solidFill>
+                <a:latin typeface="Calibri" pitchFamily="34" charset="0"/>
+                <a:ea typeface="Calibri" pitchFamily="34" charset="-122"/>
+                <a:cs typeface="Calibri" pitchFamily="34" charset="-120"/>
+              </a:rPr>
+              <a:t>After the fix was implemented, it was validated through manual retesting and automated regression testing across unauthorized access scenarios.</a:t>
             </a:r>
             <a:endParaRPr lang="en-US" sz="1000" dirty="0"/>
           </a:p>
@@ -11391,7 +12719,13 @@
       </p:sp>
       <p:sp>
         <p:nvSpPr>
-          <p:cNvPr id="15" name="Shape 11"/>
+          <p:cNvPr id="35" name="Shape 11">
+            <a:extLst>
+              <a:ext uri="{FF2B5EF4-FFF2-40B4-BE49-F238E27FC236}">
+                <a16:creationId xmlns:a16="http://schemas.microsoft.com/office/drawing/2014/main" id="{513445BB-F97E-28E1-58BD-A1BB25BCD55E}"/>
+              </a:ext>
+            </a:extLst>
+          </p:cNvPr>
           <p:cNvSpPr/>
           <p:nvPr/>
         </p:nvSpPr>
@@ -11430,7 +12764,13 @@
       </p:sp>
       <p:sp>
         <p:nvSpPr>
-          <p:cNvPr id="16" name="Shape 12"/>
+          <p:cNvPr id="36" name="Shape 12">
+            <a:extLst>
+              <a:ext uri="{FF2B5EF4-FFF2-40B4-BE49-F238E27FC236}">
+                <a16:creationId xmlns:a16="http://schemas.microsoft.com/office/drawing/2014/main" id="{576FF371-7533-3EFA-9146-2F9C09E10D47}"/>
+              </a:ext>
+            </a:extLst>
+          </p:cNvPr>
           <p:cNvSpPr/>
           <p:nvPr/>
         </p:nvSpPr>
@@ -11456,13 +12796,19 @@
           <a:bodyPr/>
           <a:lstStyle/>
           <a:p>
-            <a:endParaRPr lang="en-US"/>
+            <a:endParaRPr lang="en-US" dirty="0"/>
           </a:p>
         </p:txBody>
       </p:sp>
       <p:pic>
         <p:nvPicPr>
-          <p:cNvPr id="17" name="Image 2" descr="preencoded.png"/>
+          <p:cNvPr id="37" name="Image 2" descr="preencoded.png">
+            <a:extLst>
+              <a:ext uri="{FF2B5EF4-FFF2-40B4-BE49-F238E27FC236}">
+                <a16:creationId xmlns:a16="http://schemas.microsoft.com/office/drawing/2014/main" id="{03DD63C0-768C-3BDE-D2FF-B43E0505E9F9}"/>
+              </a:ext>
+            </a:extLst>
+          </p:cNvPr>
           <p:cNvPicPr>
             <a:picLocks noChangeAspect="1"/>
           </p:cNvPicPr>
@@ -11486,7 +12832,13 @@
       </p:pic>
       <p:sp>
         <p:nvSpPr>
-          <p:cNvPr id="18" name="Text 13"/>
+          <p:cNvPr id="38" name="Text 13">
+            <a:extLst>
+              <a:ext uri="{FF2B5EF4-FFF2-40B4-BE49-F238E27FC236}">
+                <a16:creationId xmlns:a16="http://schemas.microsoft.com/office/drawing/2014/main" id="{F516D6C4-73F6-8776-FE15-C18B6C19FDEA}"/>
+              </a:ext>
+            </a:extLst>
+          </p:cNvPr>
           <p:cNvSpPr/>
           <p:nvPr/>
         </p:nvSpPr>
@@ -11517,7 +12869,7 @@
                 <a:ea typeface="Calibri" pitchFamily="34" charset="-122"/>
                 <a:cs typeface="Calibri" pitchFamily="34" charset="-120"/>
               </a:rPr>
-              <a:t>Resolution &amp; Outcome</a:t>
+              <a:t>Resolution &amp; Impact</a:t>
             </a:r>
             <a:endParaRPr lang="en-US" sz="1100" dirty="0"/>
           </a:p>
@@ -11525,7 +12877,13 @@
       </p:sp>
       <p:sp>
         <p:nvSpPr>
-          <p:cNvPr id="19" name="Text 14"/>
+          <p:cNvPr id="39" name="Text 14">
+            <a:extLst>
+              <a:ext uri="{FF2B5EF4-FFF2-40B4-BE49-F238E27FC236}">
+                <a16:creationId xmlns:a16="http://schemas.microsoft.com/office/drawing/2014/main" id="{9893E8BF-D703-D8D6-2F2C-3D7C4D3A0B65}"/>
+              </a:ext>
+            </a:extLst>
+          </p:cNvPr>
           <p:cNvSpPr/>
           <p:nvPr/>
         </p:nvSpPr>
@@ -11556,7 +12914,7 @@
                 <a:ea typeface="Calibri" pitchFamily="34" charset="-122"/>
                 <a:cs typeface="Calibri" pitchFamily="34" charset="-120"/>
               </a:rPr>
-              <a:t>Team Collaboration
+              <a:t>Outcome &amp; Coverage
 </a:t>
             </a:r>
             <a:endParaRPr lang="en-US" sz="1000" dirty="0"/>
@@ -11574,7 +12932,36 @@
                 <a:ea typeface="Calibri" pitchFamily="34" charset="-122"/>
                 <a:cs typeface="Calibri" pitchFamily="34" charset="-120"/>
               </a:rPr>
-              <a:t>[Placeholder: Who flagged it, who fixed it, how it was verified. E.g., 'Kenny identified the failure, Tristin traced it to the API layer, Kim deployed the fix — retested and confirmed passing.']</a:t>
+              <a:t>Unauthorized access was blocked and RBAC behavior was corrected.</a:t>
+            </a:r>
+          </a:p>
+          <a:p>
+            <a:pPr marL="0" indent="0">
+              <a:buNone/>
+            </a:pPr>
+            <a:endParaRPr lang="en-US" sz="1000" dirty="0">
+              <a:solidFill>
+                <a:srgbClr val="64748B"/>
+              </a:solidFill>
+              <a:latin typeface="Calibri" pitchFamily="34" charset="0"/>
+              <a:ea typeface="Calibri" pitchFamily="34" charset="-122"/>
+              <a:cs typeface="Calibri" pitchFamily="34" charset="-120"/>
+            </a:endParaRPr>
+          </a:p>
+          <a:p>
+            <a:pPr marL="0" indent="0">
+              <a:buNone/>
+            </a:pPr>
+            <a:r>
+              <a:rPr lang="en-US" sz="1000" dirty="0">
+                <a:solidFill>
+                  <a:srgbClr val="64748B"/>
+                </a:solidFill>
+                <a:latin typeface="Calibri" pitchFamily="34" charset="0"/>
+                <a:ea typeface="Calibri" pitchFamily="34" charset="-122"/>
+                <a:cs typeface="Calibri" pitchFamily="34" charset="-120"/>
+              </a:rPr>
+              <a:t>Regression coverage and related test cases were added to prevent recurrence and strengthen admin security validation.</a:t>
             </a:r>
             <a:endParaRPr lang="en-US" sz="1000" dirty="0"/>
           </a:p>
@@ -11582,7 +12969,13 @@
       </p:sp>
       <p:sp>
         <p:nvSpPr>
-          <p:cNvPr id="20" name="Shape 15"/>
+          <p:cNvPr id="40" name="Shape 15">
+            <a:extLst>
+              <a:ext uri="{FF2B5EF4-FFF2-40B4-BE49-F238E27FC236}">
+                <a16:creationId xmlns:a16="http://schemas.microsoft.com/office/drawing/2014/main" id="{5EACD248-E07A-DA59-CDD8-617291950ADF}"/>
+              </a:ext>
+            </a:extLst>
+          </p:cNvPr>
           <p:cNvSpPr/>
           <p:nvPr/>
         </p:nvSpPr>
@@ -11614,7 +13007,13 @@
       </p:sp>
       <p:sp>
         <p:nvSpPr>
-          <p:cNvPr id="21" name="Shape 16"/>
+          <p:cNvPr id="41" name="Shape 16">
+            <a:extLst>
+              <a:ext uri="{FF2B5EF4-FFF2-40B4-BE49-F238E27FC236}">
+                <a16:creationId xmlns:a16="http://schemas.microsoft.com/office/drawing/2014/main" id="{06077A62-C240-C626-EB9A-85D6D7FB7359}"/>
+              </a:ext>
+            </a:extLst>
+          </p:cNvPr>
           <p:cNvSpPr/>
           <p:nvPr/>
         </p:nvSpPr>
@@ -11646,7 +13045,13 @@
       </p:sp>
       <p:pic>
         <p:nvPicPr>
-          <p:cNvPr id="22" name="Image 3" descr="preencoded.png"/>
+          <p:cNvPr id="42" name="Image 3" descr="preencoded.png">
+            <a:extLst>
+              <a:ext uri="{FF2B5EF4-FFF2-40B4-BE49-F238E27FC236}">
+                <a16:creationId xmlns:a16="http://schemas.microsoft.com/office/drawing/2014/main" id="{9641A18C-4DE2-E9C3-FC54-11B47AC046F3}"/>
+              </a:ext>
+            </a:extLst>
+          </p:cNvPr>
           <p:cNvPicPr>
             <a:picLocks noChangeAspect="1"/>
           </p:cNvPicPr>
@@ -11670,7 +13075,13 @@
       </p:pic>
       <p:sp>
         <p:nvSpPr>
-          <p:cNvPr id="23" name="Text 17"/>
+          <p:cNvPr id="43" name="Text 17">
+            <a:extLst>
+              <a:ext uri="{FF2B5EF4-FFF2-40B4-BE49-F238E27FC236}">
+                <a16:creationId xmlns:a16="http://schemas.microsoft.com/office/drawing/2014/main" id="{6298B990-AD46-E759-765E-76B87E03ED5A}"/>
+              </a:ext>
+            </a:extLst>
+          </p:cNvPr>
           <p:cNvSpPr/>
           <p:nvPr/>
         </p:nvSpPr>
@@ -11701,10 +13112,21 @@
                 <a:ea typeface="Calibri" pitchFamily="34" charset="-122"/>
                 <a:cs typeface="Calibri" pitchFamily="34" charset="-120"/>
               </a:rPr>
-              <a:t>[ Key Highlight Place Holder ]
-</a:t>
-            </a:r>
-            <a:endParaRPr lang="en-US" sz="1100" dirty="0"/>
+              <a:t>Key QA Highlight: Security and Regression Validation</a:t>
+            </a:r>
+          </a:p>
+          <a:p>
+            <a:pPr marL="0" indent="0">
+              <a:buNone/>
+            </a:pPr>
+            <a:endParaRPr lang="en-US" sz="1100" b="1" i="1" dirty="0">
+              <a:solidFill>
+                <a:srgbClr val="FFFFFF"/>
+              </a:solidFill>
+              <a:latin typeface="Calibri" pitchFamily="34" charset="0"/>
+              <a:ea typeface="Calibri" pitchFamily="34" charset="-122"/>
+              <a:cs typeface="Calibri" pitchFamily="34" charset="-120"/>
+            </a:endParaRPr>
           </a:p>
           <a:p>
             <a:pPr marL="0" indent="0">
@@ -11719,51 +13141,79 @@
                 <a:ea typeface="Calibri" pitchFamily="34" charset="-122"/>
                 <a:cs typeface="Calibri" pitchFamily="34" charset="-120"/>
               </a:rPr>
-              <a:t>"Quality assurance isn't just about coverage numbers — it's about catching the right things at the right time. [This sprint/This test] is an example of the team's process working exactly as intended."</a:t>
-            </a:r>
-            <a:endParaRPr lang="en-US" sz="1100" dirty="0"/>
-          </a:p>
-        </p:txBody>
-      </p:sp>
-      <p:sp>
-        <p:nvSpPr>
-          <p:cNvPr id="24" name="Text 0">
-            <a:extLst>
-              <a:ext uri="{FF2B5EF4-FFF2-40B4-BE49-F238E27FC236}">
-                <a16:creationId xmlns:a16="http://schemas.microsoft.com/office/drawing/2014/main" id="{CE4396FD-BDF5-670C-F4B3-30360F218813}"/>
-              </a:ext>
-            </a:extLst>
-          </p:cNvPr>
-          <p:cNvSpPr/>
-          <p:nvPr/>
-        </p:nvSpPr>
-        <p:spPr>
-          <a:xfrm>
-            <a:off x="457200" y="164592"/>
-            <a:ext cx="8229600" cy="256032"/>
-          </a:xfrm>
-          <a:prstGeom prst="rect">
-            <a:avLst/>
-          </a:prstGeom>
-          <a:noFill/>
-          <a:ln/>
-        </p:spPr>
-        <p:txBody>
-          <a:bodyPr wrap="square" lIns="0" tIns="0" rIns="0" bIns="0" rtlCol="0" anchor="ctr"/>
-          <a:lstStyle/>
-          <a:p>
-            <a:pPr marL="0" indent="0" algn="l">
-              <a:buNone/>
-            </a:pPr>
-            <a:r>
-              <a:rPr lang="en-US" sz="900" b="1" kern="0" spc="300" dirty="0">
-                <a:solidFill>
-                  <a:srgbClr val="3BB77E"/>
+              <a:t>“Quality assurance is not just about testing expected behavior — it’s also about validating failure paths and catching risks before users do.”</a:t>
+            </a:r>
+          </a:p>
+          <a:p>
+            <a:pPr marL="0" indent="0">
+              <a:buNone/>
+            </a:pPr>
+            <a:endParaRPr lang="en-US" sz="950" i="1" dirty="0">
+              <a:solidFill>
+                <a:srgbClr val="B0C4D8"/>
+              </a:solidFill>
+              <a:latin typeface="Calibri" pitchFamily="34" charset="0"/>
+              <a:ea typeface="Calibri" pitchFamily="34" charset="-122"/>
+              <a:cs typeface="Calibri" pitchFamily="34" charset="-120"/>
+            </a:endParaRPr>
+          </a:p>
+          <a:p>
+            <a:pPr marL="0" indent="0">
+              <a:buNone/>
+            </a:pPr>
+            <a:r>
+              <a:rPr lang="en-US" sz="950" i="1" dirty="0">
+                <a:solidFill>
+                  <a:srgbClr val="B0C4D8"/>
                 </a:solidFill>
                 <a:latin typeface="Calibri" pitchFamily="34" charset="0"/>
                 <a:ea typeface="Calibri" pitchFamily="34" charset="-122"/>
                 <a:cs typeface="Calibri" pitchFamily="34" charset="-120"/>
               </a:rPr>
+              <a:t>Discover → Report → Fix → Retest → Document &amp; Expand Test Coverage</a:t>
+            </a:r>
+          </a:p>
+        </p:txBody>
+      </p:sp>
+      <p:sp>
+        <p:nvSpPr>
+          <p:cNvPr id="44" name="Text 0">
+            <a:extLst>
+              <a:ext uri="{FF2B5EF4-FFF2-40B4-BE49-F238E27FC236}">
+                <a16:creationId xmlns:a16="http://schemas.microsoft.com/office/drawing/2014/main" id="{C5C0EFD2-6E84-EEAA-2C5D-E7D613F3D090}"/>
+              </a:ext>
+            </a:extLst>
+          </p:cNvPr>
+          <p:cNvSpPr/>
+          <p:nvPr/>
+        </p:nvSpPr>
+        <p:spPr>
+          <a:xfrm>
+            <a:off x="457200" y="164592"/>
+            <a:ext cx="8229600" cy="256032"/>
+          </a:xfrm>
+          <a:prstGeom prst="rect">
+            <a:avLst/>
+          </a:prstGeom>
+          <a:noFill/>
+          <a:ln/>
+        </p:spPr>
+        <p:txBody>
+          <a:bodyPr wrap="square" lIns="0" tIns="0" rIns="0" bIns="0" rtlCol="0" anchor="ctr"/>
+          <a:lstStyle/>
+          <a:p>
+            <a:pPr marL="0" indent="0" algn="l">
+              <a:buNone/>
+            </a:pPr>
+            <a:r>
+              <a:rPr lang="en-US" sz="900" b="1" kern="0" spc="300" dirty="0">
+                <a:solidFill>
+                  <a:srgbClr val="3BB77E"/>
+                </a:solidFill>
+                <a:latin typeface="Calibri" pitchFamily="34" charset="0"/>
+                <a:ea typeface="Calibri" pitchFamily="34" charset="-122"/>
+                <a:cs typeface="Calibri" pitchFamily="34" charset="-120"/>
+              </a:rPr>
               <a:t>TESTING &amp; QUALITY ASSURANCE</a:t>
             </a:r>
             <a:endParaRPr lang="en-US" sz="900" dirty="0"/>
@@ -11772,10 +13222,10 @@
       </p:sp>
       <p:sp>
         <p:nvSpPr>
-          <p:cNvPr id="25" name="Text 1">
-            <a:extLst>
-              <a:ext uri="{FF2B5EF4-FFF2-40B4-BE49-F238E27FC236}">
-                <a16:creationId xmlns:a16="http://schemas.microsoft.com/office/drawing/2014/main" id="{59ADE286-38D8-DCFF-A976-DED8A4930314}"/>
+          <p:cNvPr id="45" name="Text 1">
+            <a:extLst>
+              <a:ext uri="{FF2B5EF4-FFF2-40B4-BE49-F238E27FC236}">
+                <a16:creationId xmlns:a16="http://schemas.microsoft.com/office/drawing/2014/main" id="{81365837-215A-0122-3E38-059B611400F7}"/>
               </a:ext>
             </a:extLst>
           </p:cNvPr>
@@ -11820,10 +13270,10 @@
       </p:sp>
       <p:sp>
         <p:nvSpPr>
-          <p:cNvPr id="26" name="Text 2">
-            <a:extLst>
-              <a:ext uri="{FF2B5EF4-FFF2-40B4-BE49-F238E27FC236}">
-                <a16:creationId xmlns:a16="http://schemas.microsoft.com/office/drawing/2014/main" id="{B47AD6B9-62CE-F716-2950-4C29024360E0}"/>
+          <p:cNvPr id="46" name="Text 2">
+            <a:extLst>
+              <a:ext uri="{FF2B5EF4-FFF2-40B4-BE49-F238E27FC236}">
+                <a16:creationId xmlns:a16="http://schemas.microsoft.com/office/drawing/2014/main" id="{4E3427C6-F076-33E2-8ADF-F1D0224A0826}"/>
               </a:ext>
             </a:extLst>
           </p:cNvPr>
@@ -11862,10 +13312,10 @@
       </p:sp>
       <p:sp>
         <p:nvSpPr>
-          <p:cNvPr id="27" name="Text 3">
-            <a:extLst>
-              <a:ext uri="{FF2B5EF4-FFF2-40B4-BE49-F238E27FC236}">
-                <a16:creationId xmlns:a16="http://schemas.microsoft.com/office/drawing/2014/main" id="{E0AF6E58-2AB3-26D3-3F77-3015CBE22786}"/>
+          <p:cNvPr id="47" name="Text 3">
+            <a:extLst>
+              <a:ext uri="{FF2B5EF4-FFF2-40B4-BE49-F238E27FC236}">
+                <a16:creationId xmlns:a16="http://schemas.microsoft.com/office/drawing/2014/main" id="{5C03824C-743E-5358-0AD7-FCF0A780E37E}"/>
               </a:ext>
             </a:extLst>
           </p:cNvPr>

--- a/docs/Deliverables/Orderly_Slides.pptx
+++ b/docs/Deliverables/Orderly_Slides.pptx
@@ -4452,17 +4452,6 @@
           <a:bodyPr/>
           <a:lstStyle/>
           <a:p>
-            <a:r>
-              <a:rPr lang="en-US" dirty="0"/>
-              <a:t>🟡 Kim –</a:t>
-            </a:r>
-            <a:r>
-              <a:rPr lang="en-US" i="0" dirty="0"/>
-              <a:t>✨ You got this!</a:t>
-            </a:r>
-            <a:endParaRPr lang="en-US" i="1" dirty="0"/>
-          </a:p>
-          <a:p>
             <a:endParaRPr lang="en-US" dirty="0"/>
           </a:p>
           <a:p>
@@ -4640,6 +4629,9 @@
             </a:r>
           </a:p>
           <a:p>
+            <a:endParaRPr lang="en-US" dirty="0"/>
+          </a:p>
+          <a:p>
             <a:r>
               <a:rPr lang="en-US" b="1" dirty="0"/>
               <a:t>Admins</a:t>
@@ -4744,36 +4736,7 @@
             <a:endParaRPr lang="en-US" i="1" dirty="0"/>
           </a:p>
           <a:p>
-            <a:r>
-              <a:rPr lang="en-US" dirty="0"/>
-              <a:t>Now that we’ve looked at what </a:t>
-            </a:r>
-            <a:r>
-              <a:rPr lang="en-US" b="1" dirty="0"/>
-              <a:t>Orderly does from a </a:t>
-            </a:r>
-            <a:r>
-              <a:rPr lang="en-US" i="1" dirty="0"/>
-              <a:t>user perspective</a:t>
-            </a:r>
-            <a:r>
-              <a:rPr lang="en-US" dirty="0"/>
-              <a:t>,</a:t>
-            </a:r>
-          </a:p>
-          <a:p>
-            <a:r>
-              <a:rPr lang="en-US" dirty="0"/>
-              <a:t>let’s… talk about the </a:t>
-            </a:r>
-            <a:r>
-              <a:rPr lang="en-US" b="1" dirty="0"/>
-              <a:t>Epic planning </a:t>
-            </a:r>
-            <a:r>
-              <a:rPr lang="en-US" dirty="0"/>
-              <a:t>that brought them to life...!</a:t>
-            </a:r>
+            <a:endParaRPr lang="en-US" dirty="0"/>
           </a:p>
           <a:p>
             <a:endParaRPr lang="en-US" dirty="0"/>
@@ -4894,241 +4857,529 @@
           <a:bodyPr/>
           <a:lstStyle/>
           <a:p>
-            <a:r>
-              <a:rPr lang="en-US" dirty="0"/>
-              <a:t>🟡 KIM: -</a:t>
-            </a:r>
-            <a:r>
-              <a:rPr lang="en-US" i="1" dirty="0"/>
-              <a:t>breathe- 🍃</a:t>
-            </a:r>
             <a:endParaRPr lang="en-US" dirty="0"/>
           </a:p>
           <a:p>
-            <a:endParaRPr lang="en-US" dirty="0"/>
-          </a:p>
-          <a:p>
-            <a:r>
-              <a:rPr lang="en-US" dirty="0"/>
-              <a:t>Orderly is a </a:t>
-            </a:r>
-            <a:r>
-              <a:rPr lang="en-US" b="1" dirty="0"/>
+            <a:r>
+              <a:rPr lang="en-US" sz="1200" kern="1200" dirty="0">
+                <a:solidFill>
+                  <a:schemeClr val="tx1"/>
+                </a:solidFill>
+                <a:effectLst/>
+                <a:latin typeface="+mn-lt"/>
+                <a:ea typeface="+mn-ea"/>
+                <a:cs typeface="+mn-cs"/>
+              </a:rPr>
+              <a:t>Now that we’ve looked at what Orderly does from a </a:t>
+            </a:r>
+            <a:r>
+              <a:rPr lang="en-US" sz="1200" b="1" kern="1200" dirty="0">
+                <a:solidFill>
+                  <a:schemeClr val="tx1"/>
+                </a:solidFill>
+                <a:effectLst/>
+                <a:latin typeface="+mn-lt"/>
+                <a:ea typeface="+mn-ea"/>
+                <a:cs typeface="+mn-cs"/>
+              </a:rPr>
+              <a:t>user perspective</a:t>
+            </a:r>
+            <a:r>
+              <a:rPr lang="en-US" sz="1200" kern="1200" dirty="0">
+                <a:solidFill>
+                  <a:schemeClr val="tx1"/>
+                </a:solidFill>
+                <a:effectLst/>
+                <a:latin typeface="+mn-lt"/>
+                <a:ea typeface="+mn-ea"/>
+                <a:cs typeface="+mn-cs"/>
+              </a:rPr>
+              <a:t>, let’s take a step back and look at the </a:t>
+            </a:r>
+            <a:r>
+              <a:rPr lang="en-US" sz="1200" b="1" kern="1200" dirty="0">
+                <a:solidFill>
+                  <a:schemeClr val="tx1"/>
+                </a:solidFill>
+                <a:effectLst/>
+                <a:latin typeface="+mn-lt"/>
+                <a:ea typeface="+mn-ea"/>
+                <a:cs typeface="+mn-cs"/>
+              </a:rPr>
+              <a:t>overall scope</a:t>
+            </a:r>
+            <a:r>
+              <a:rPr lang="en-US" sz="1200" kern="1200" dirty="0">
+                <a:solidFill>
+                  <a:schemeClr val="tx1"/>
+                </a:solidFill>
+                <a:effectLst/>
+                <a:latin typeface="+mn-lt"/>
+                <a:ea typeface="+mn-ea"/>
+                <a:cs typeface="+mn-cs"/>
+              </a:rPr>
+              <a:t> of the project.</a:t>
+            </a:r>
+          </a:p>
+          <a:p>
+            <a:endParaRPr lang="en-US" sz="1200" kern="1200" dirty="0">
+              <a:solidFill>
+                <a:schemeClr val="tx1"/>
+              </a:solidFill>
+              <a:effectLst/>
+              <a:latin typeface="+mn-lt"/>
+              <a:ea typeface="+mn-ea"/>
+              <a:cs typeface="+mn-cs"/>
+            </a:endParaRPr>
+          </a:p>
+          <a:p>
+            <a:r>
+              <a:rPr lang="en-US" sz="1200" b="1" kern="1200" dirty="0">
+                <a:solidFill>
+                  <a:schemeClr val="tx1"/>
+                </a:solidFill>
+                <a:effectLst/>
+                <a:latin typeface="+mn-lt"/>
+                <a:ea typeface="+mn-ea"/>
+                <a:cs typeface="+mn-cs"/>
+              </a:rPr>
+              <a:t>O</a:t>
+            </a:r>
+            <a:r>
+              <a:rPr lang="en-US" sz="1200" kern="1200" dirty="0">
+                <a:solidFill>
+                  <a:schemeClr val="tx1"/>
+                </a:solidFill>
+                <a:effectLst/>
+                <a:latin typeface="+mn-lt"/>
+                <a:ea typeface="+mn-ea"/>
+                <a:cs typeface="+mn-cs"/>
+              </a:rPr>
+              <a:t>rderly is a </a:t>
+            </a:r>
+            <a:r>
+              <a:rPr lang="en-US" sz="1200" b="1" kern="1200" dirty="0">
+                <a:solidFill>
+                  <a:schemeClr val="tx1"/>
+                </a:solidFill>
+                <a:effectLst/>
+                <a:latin typeface="+mn-lt"/>
+                <a:ea typeface="+mn-ea"/>
+                <a:cs typeface="+mn-cs"/>
+              </a:rPr>
               <a:t>full-stack</a:t>
             </a:r>
             <a:r>
-              <a:rPr lang="en-US" dirty="0"/>
-              <a:t> system..</a:t>
-            </a:r>
-          </a:p>
-          <a:p>
-            <a:r>
-              <a:rPr lang="en-US" i="1" dirty="0"/>
-              <a:t>Designed</a:t>
-            </a:r>
-            <a:r>
-              <a:rPr lang="en-US" dirty="0"/>
-              <a:t> to be both: </a:t>
-            </a:r>
-            <a:r>
-              <a:rPr lang="en-US" b="1" dirty="0"/>
+              <a:rPr lang="en-US" sz="1200" kern="1200" dirty="0">
+                <a:solidFill>
+                  <a:schemeClr val="tx1"/>
+                </a:solidFill>
+                <a:effectLst/>
+                <a:latin typeface="+mn-lt"/>
+                <a:ea typeface="+mn-ea"/>
+                <a:cs typeface="+mn-cs"/>
+              </a:rPr>
+              <a:t> system designed to be </a:t>
+            </a:r>
+            <a:r>
+              <a:rPr lang="en-US" sz="1200" b="1" kern="1200" dirty="0">
+                <a:solidFill>
+                  <a:schemeClr val="tx1"/>
+                </a:solidFill>
+                <a:effectLst/>
+                <a:latin typeface="+mn-lt"/>
+                <a:ea typeface="+mn-ea"/>
+                <a:cs typeface="+mn-cs"/>
+              </a:rPr>
               <a:t>flexible</a:t>
             </a:r>
             <a:r>
-              <a:rPr lang="en-US" dirty="0"/>
-              <a:t> </a:t>
-            </a:r>
-            <a:r>
-              <a:rPr lang="en-US" i="1" dirty="0"/>
-              <a:t>and</a:t>
-            </a:r>
-            <a:r>
-              <a:rPr lang="en-US" dirty="0"/>
-              <a:t> </a:t>
-            </a:r>
-            <a:r>
-              <a:rPr lang="en-US" b="1" dirty="0"/>
+              <a:rPr lang="en-US" sz="1200" kern="1200" dirty="0">
+                <a:solidFill>
+                  <a:schemeClr val="tx1"/>
+                </a:solidFill>
+                <a:effectLst/>
+                <a:latin typeface="+mn-lt"/>
+                <a:ea typeface="+mn-ea"/>
+                <a:cs typeface="+mn-cs"/>
+              </a:rPr>
+              <a:t> and </a:t>
+            </a:r>
+            <a:r>
+              <a:rPr lang="en-US" sz="1200" b="1" kern="1200" dirty="0">
+                <a:solidFill>
+                  <a:schemeClr val="tx1"/>
+                </a:solidFill>
+                <a:effectLst/>
+                <a:latin typeface="+mn-lt"/>
+                <a:ea typeface="+mn-ea"/>
+                <a:cs typeface="+mn-cs"/>
+              </a:rPr>
               <a:t>scalable</a:t>
             </a:r>
             <a:r>
-              <a:rPr lang="en-US" dirty="0"/>
+              <a:rPr lang="en-US" sz="1200" kern="1200" dirty="0">
+                <a:solidFill>
+                  <a:schemeClr val="tx1"/>
+                </a:solidFill>
+                <a:effectLst/>
+                <a:latin typeface="+mn-lt"/>
+                <a:ea typeface="+mn-ea"/>
+                <a:cs typeface="+mn-cs"/>
+              </a:rPr>
               <a:t>.</a:t>
             </a:r>
           </a:p>
           <a:p>
-            <a:endParaRPr lang="en-US" dirty="0"/>
-          </a:p>
-          <a:p>
-            <a:r>
-              <a:rPr lang="en-US" dirty="0"/>
-              <a:t>We worked across four major epics and delivered </a:t>
-            </a:r>
-            <a:r>
-              <a:rPr lang="en-US" b="1" dirty="0"/>
-              <a:t>over </a:t>
-            </a:r>
-            <a:r>
-              <a:rPr lang="en-US" dirty="0"/>
-              <a:t>25 user stories..</a:t>
-            </a:r>
-          </a:p>
-          <a:p>
-            <a:r>
-              <a:rPr lang="en-US" dirty="0"/>
-              <a:t>supporting both: </a:t>
-            </a:r>
-            <a:r>
-              <a:rPr lang="en-US" b="1" dirty="0"/>
+            <a:endParaRPr lang="en-US" sz="1200" kern="1200" dirty="0">
+              <a:solidFill>
+                <a:schemeClr val="tx1"/>
+              </a:solidFill>
+              <a:effectLst/>
+              <a:latin typeface="+mn-lt"/>
+              <a:ea typeface="+mn-ea"/>
+              <a:cs typeface="+mn-cs"/>
+            </a:endParaRPr>
+          </a:p>
+          <a:p>
+            <a:r>
+              <a:rPr lang="en-US" sz="1200" b="1" kern="1200" dirty="0">
+                <a:solidFill>
+                  <a:schemeClr val="tx1"/>
+                </a:solidFill>
+                <a:effectLst/>
+                <a:latin typeface="+mn-lt"/>
+                <a:ea typeface="+mn-ea"/>
+                <a:cs typeface="+mn-cs"/>
+              </a:rPr>
+              <a:t>W</a:t>
+            </a:r>
+            <a:r>
+              <a:rPr lang="en-US" sz="1200" kern="1200" dirty="0">
+                <a:solidFill>
+                  <a:schemeClr val="tx1"/>
+                </a:solidFill>
+                <a:effectLst/>
+                <a:latin typeface="+mn-lt"/>
+                <a:ea typeface="+mn-ea"/>
+                <a:cs typeface="+mn-cs"/>
+              </a:rPr>
+              <a:t>e worked across four major epics and delivered over </a:t>
+            </a:r>
+            <a:r>
+              <a:rPr lang="en-US" sz="1200" b="1" kern="1200" dirty="0">
+                <a:solidFill>
+                  <a:schemeClr val="tx1"/>
+                </a:solidFill>
+                <a:effectLst/>
+                <a:latin typeface="+mn-lt"/>
+                <a:ea typeface="+mn-ea"/>
+                <a:cs typeface="+mn-cs"/>
+              </a:rPr>
+              <a:t>25 user stories</a:t>
+            </a:r>
+            <a:r>
+              <a:rPr lang="en-US" sz="1200" kern="1200" dirty="0">
+                <a:solidFill>
+                  <a:schemeClr val="tx1"/>
+                </a:solidFill>
+                <a:effectLst/>
+                <a:latin typeface="+mn-lt"/>
+                <a:ea typeface="+mn-ea"/>
+                <a:cs typeface="+mn-cs"/>
+              </a:rPr>
+              <a:t> supporting both </a:t>
+            </a:r>
+            <a:r>
+              <a:rPr lang="en-US" sz="1200" b="1" kern="1200" dirty="0">
+                <a:solidFill>
+                  <a:schemeClr val="tx1"/>
+                </a:solidFill>
+                <a:effectLst/>
+                <a:latin typeface="+mn-lt"/>
+                <a:ea typeface="+mn-ea"/>
+                <a:cs typeface="+mn-cs"/>
+              </a:rPr>
               <a:t>customers</a:t>
             </a:r>
             <a:r>
-              <a:rPr lang="en-US" dirty="0"/>
-              <a:t> </a:t>
-            </a:r>
-            <a:r>
-              <a:rPr lang="en-US" i="1" dirty="0"/>
-              <a:t>and</a:t>
-            </a:r>
-            <a:r>
-              <a:rPr lang="en-US" dirty="0"/>
-              <a:t> </a:t>
-            </a:r>
-            <a:r>
-              <a:rPr lang="en-US" b="1" dirty="0"/>
-              <a:t>business users</a:t>
-            </a:r>
-            <a:r>
-              <a:rPr lang="en-US" dirty="0"/>
+              <a:rPr lang="en-US" sz="1200" kern="1200" dirty="0">
+                <a:solidFill>
+                  <a:schemeClr val="tx1"/>
+                </a:solidFill>
+                <a:effectLst/>
+                <a:latin typeface="+mn-lt"/>
+                <a:ea typeface="+mn-ea"/>
+                <a:cs typeface="+mn-cs"/>
+              </a:rPr>
+              <a:t> and </a:t>
+            </a:r>
+            <a:r>
+              <a:rPr lang="en-US" sz="1200" b="1" kern="1200" dirty="0">
+                <a:solidFill>
+                  <a:schemeClr val="tx1"/>
+                </a:solidFill>
+                <a:effectLst/>
+                <a:latin typeface="+mn-lt"/>
+                <a:ea typeface="+mn-ea"/>
+                <a:cs typeface="+mn-cs"/>
+              </a:rPr>
+              <a:t>business</a:t>
+            </a:r>
+            <a:r>
+              <a:rPr lang="en-US" sz="1200" kern="1200" dirty="0">
+                <a:solidFill>
+                  <a:schemeClr val="tx1"/>
+                </a:solidFill>
+                <a:effectLst/>
+                <a:latin typeface="+mn-lt"/>
+                <a:ea typeface="+mn-ea"/>
+                <a:cs typeface="+mn-cs"/>
+              </a:rPr>
+              <a:t> users.</a:t>
+            </a:r>
+          </a:p>
+          <a:p>
+            <a:endParaRPr lang="en-US" sz="1200" kern="1200" dirty="0">
+              <a:solidFill>
+                <a:schemeClr val="tx1"/>
+              </a:solidFill>
+              <a:effectLst/>
+              <a:latin typeface="+mn-lt"/>
+              <a:ea typeface="+mn-ea"/>
+              <a:cs typeface="+mn-cs"/>
+            </a:endParaRPr>
+          </a:p>
+          <a:p>
+            <a:r>
+              <a:rPr lang="en-US" sz="1200" kern="1200" dirty="0">
+                <a:solidFill>
+                  <a:schemeClr val="tx1"/>
+                </a:solidFill>
+                <a:effectLst/>
+                <a:latin typeface="+mn-lt"/>
+                <a:ea typeface="+mn-ea"/>
+                <a:cs typeface="+mn-cs"/>
+              </a:rPr>
+              <a:t>As a team, we made over </a:t>
+            </a:r>
+            <a:r>
+              <a:rPr lang="en-US" sz="1200" b="1" kern="1200" dirty="0">
+                <a:solidFill>
+                  <a:schemeClr val="tx1"/>
+                </a:solidFill>
+                <a:effectLst/>
+                <a:latin typeface="+mn-lt"/>
+                <a:ea typeface="+mn-ea"/>
+                <a:cs typeface="+mn-cs"/>
+              </a:rPr>
+              <a:t>800 code</a:t>
+            </a:r>
+            <a:r>
+              <a:rPr lang="en-US" sz="1200" kern="1200" dirty="0">
+                <a:solidFill>
+                  <a:schemeClr val="tx1"/>
+                </a:solidFill>
+                <a:effectLst/>
+                <a:latin typeface="+mn-lt"/>
+                <a:ea typeface="+mn-ea"/>
+                <a:cs typeface="+mn-cs"/>
+              </a:rPr>
+              <a:t> commits, reflecting strong </a:t>
+            </a:r>
+            <a:r>
+              <a:rPr lang="en-US" sz="1200" b="1" kern="1200" dirty="0">
+                <a:solidFill>
+                  <a:schemeClr val="tx1"/>
+                </a:solidFill>
+                <a:effectLst/>
+                <a:latin typeface="+mn-lt"/>
+                <a:ea typeface="+mn-ea"/>
+                <a:cs typeface="+mn-cs"/>
+              </a:rPr>
+              <a:t>collaboration</a:t>
+            </a:r>
+            <a:r>
+              <a:rPr lang="en-US" sz="1200" kern="1200" dirty="0">
+                <a:solidFill>
+                  <a:schemeClr val="tx1"/>
+                </a:solidFill>
+                <a:effectLst/>
+                <a:latin typeface="+mn-lt"/>
+                <a:ea typeface="+mn-ea"/>
+                <a:cs typeface="+mn-cs"/>
+              </a:rPr>
+              <a:t> throughout the project.</a:t>
+            </a:r>
+          </a:p>
+          <a:p>
+            <a:endParaRPr lang="en-US" sz="1200" kern="1200" dirty="0">
+              <a:solidFill>
+                <a:schemeClr val="tx1"/>
+              </a:solidFill>
+              <a:effectLst/>
+              <a:latin typeface="+mn-lt"/>
+              <a:ea typeface="+mn-ea"/>
+              <a:cs typeface="+mn-cs"/>
+            </a:endParaRPr>
+          </a:p>
+          <a:p>
+            <a:r>
+              <a:rPr lang="en-US" sz="1200" kern="1200" dirty="0">
+                <a:solidFill>
+                  <a:schemeClr val="tx1"/>
+                </a:solidFill>
+                <a:effectLst/>
+                <a:latin typeface="+mn-lt"/>
+                <a:ea typeface="+mn-ea"/>
+                <a:cs typeface="+mn-cs"/>
+              </a:rPr>
+              <a:t>We also developed over </a:t>
+            </a:r>
+            <a:r>
+              <a:rPr lang="en-US" sz="1200" b="1" kern="1200" dirty="0">
+                <a:solidFill>
+                  <a:schemeClr val="tx1"/>
+                </a:solidFill>
+                <a:effectLst/>
+                <a:latin typeface="+mn-lt"/>
+                <a:ea typeface="+mn-ea"/>
+                <a:cs typeface="+mn-cs"/>
+              </a:rPr>
+              <a:t>50 API endpoints</a:t>
+            </a:r>
+            <a:r>
+              <a:rPr lang="en-US" sz="1200" kern="1200" dirty="0">
+                <a:solidFill>
+                  <a:schemeClr val="tx1"/>
+                </a:solidFill>
+                <a:effectLst/>
+                <a:latin typeface="+mn-lt"/>
+                <a:ea typeface="+mn-ea"/>
+                <a:cs typeface="+mn-cs"/>
+              </a:rPr>
+              <a:t> and supported them with </a:t>
+            </a:r>
+            <a:r>
+              <a:rPr lang="en-US" sz="1200" b="1" kern="1200" dirty="0">
+                <a:solidFill>
+                  <a:schemeClr val="tx1"/>
+                </a:solidFill>
+                <a:effectLst/>
+                <a:latin typeface="+mn-lt"/>
+                <a:ea typeface="+mn-ea"/>
+                <a:cs typeface="+mn-cs"/>
+              </a:rPr>
+              <a:t>automated testing</a:t>
+            </a:r>
+            <a:r>
+              <a:rPr lang="en-US" sz="1200" kern="1200" dirty="0">
+                <a:solidFill>
+                  <a:schemeClr val="tx1"/>
+                </a:solidFill>
+                <a:effectLst/>
+                <a:latin typeface="+mn-lt"/>
+                <a:ea typeface="+mn-ea"/>
+                <a:cs typeface="+mn-cs"/>
+              </a:rPr>
+              <a:t> to ensure </a:t>
+            </a:r>
+            <a:r>
+              <a:rPr lang="en-US" sz="1200" b="1" kern="1200" dirty="0">
+                <a:solidFill>
+                  <a:schemeClr val="tx1"/>
+                </a:solidFill>
+                <a:effectLst/>
+                <a:latin typeface="+mn-lt"/>
+                <a:ea typeface="+mn-ea"/>
+                <a:cs typeface="+mn-cs"/>
+              </a:rPr>
+              <a:t>system reliability</a:t>
+            </a:r>
+            <a:r>
+              <a:rPr lang="en-US" sz="1200" kern="1200" dirty="0">
+                <a:solidFill>
+                  <a:schemeClr val="tx1"/>
+                </a:solidFill>
+                <a:effectLst/>
+                <a:latin typeface="+mn-lt"/>
+                <a:ea typeface="+mn-ea"/>
+                <a:cs typeface="+mn-cs"/>
+              </a:rPr>
               <a:t>.</a:t>
             </a:r>
           </a:p>
           <a:p>
-            <a:endParaRPr lang="en-US" dirty="0"/>
-          </a:p>
-          <a:p>
-            <a:r>
-              <a:rPr lang="en-US" dirty="0"/>
-              <a:t>As a team—</a:t>
-            </a:r>
-          </a:p>
-          <a:p>
-            <a:r>
-              <a:rPr lang="en-US" dirty="0"/>
-              <a:t>we made over 800 code commits</a:t>
-            </a:r>
-          </a:p>
-          <a:p>
-            <a:r>
-              <a:rPr lang="en-US" dirty="0"/>
-              <a:t>.. reflecting </a:t>
-            </a:r>
-            <a:r>
-              <a:rPr lang="en-US" i="1" dirty="0"/>
-              <a:t>strong collaboration </a:t>
-            </a:r>
-            <a:r>
-              <a:rPr lang="en-US" b="1" dirty="0"/>
-              <a:t>throughout</a:t>
-            </a:r>
-            <a:r>
-              <a:rPr lang="en-US" dirty="0"/>
-              <a:t> the project.</a:t>
-            </a:r>
-          </a:p>
-          <a:p>
-            <a:endParaRPr lang="en-US" dirty="0"/>
-          </a:p>
-          <a:p>
-            <a:r>
-              <a:rPr lang="en-US" dirty="0"/>
-              <a:t>We also developed </a:t>
-            </a:r>
-            <a:r>
-              <a:rPr lang="en-US" b="1" dirty="0"/>
-              <a:t>over 50</a:t>
-            </a:r>
-            <a:r>
-              <a:rPr lang="en-US" dirty="0"/>
-              <a:t> </a:t>
-            </a:r>
-            <a:r>
-              <a:rPr lang="en-US" i="0" dirty="0"/>
-              <a:t>API endpoints </a:t>
-            </a:r>
-            <a:r>
-              <a:rPr lang="en-US" b="1" dirty="0"/>
-              <a:t>and,</a:t>
-            </a:r>
-            <a:endParaRPr lang="en-US" dirty="0"/>
-          </a:p>
-          <a:p>
-            <a:r>
-              <a:rPr lang="en-US" dirty="0"/>
-              <a:t>supported them with automated testing to ensure system reliability.</a:t>
-            </a:r>
-          </a:p>
-          <a:p>
-            <a:endParaRPr lang="en-US" dirty="0"/>
-          </a:p>
-          <a:p>
-            <a:r>
-              <a:rPr lang="en-US" i="1" dirty="0"/>
-              <a:t>Finally</a:t>
-            </a:r>
-            <a:r>
-              <a:rPr lang="en-US" dirty="0"/>
-              <a:t>, </a:t>
-            </a:r>
-          </a:p>
-          <a:p>
-            <a:r>
-              <a:rPr lang="en-US" dirty="0"/>
-              <a:t>we maintained a living backlog.. to keep development </a:t>
-            </a:r>
-            <a:r>
-              <a:rPr lang="en-US" i="1" dirty="0"/>
-              <a:t>aligned…</a:t>
-            </a:r>
-            <a:r>
-              <a:rPr lang="en-US" dirty="0"/>
-              <a:t> and up to date.</a:t>
-            </a:r>
-          </a:p>
-          <a:p>
-            <a:r>
-              <a:rPr lang="en-US" dirty="0"/>
-              <a:t> </a:t>
-            </a:r>
-          </a:p>
-          <a:p>
-            <a:pPr marL="0" marR="0" lvl="0" indent="0" algn="l" defTabSz="914400" rtl="0" eaLnBrk="1" fontAlgn="auto" latinLnBrk="0" hangingPunct="1">
-              <a:lnSpc>
-                <a:spcPct val="100000"/>
-              </a:lnSpc>
-              <a:spcBef>
-                <a:spcPts val="0"/>
-              </a:spcBef>
-              <a:spcAft>
-                <a:spcPts val="0"/>
-              </a:spcAft>
-              <a:buClrTx/>
-              <a:buSzTx/>
-              <a:buFontTx/>
-              <a:buNone/>
-              <a:tabLst/>
-              <a:defRPr/>
-            </a:pPr>
-            <a:r>
-              <a:rPr lang="en-US" dirty="0"/>
-              <a:t>With that said, Let’s take a step back and </a:t>
-            </a:r>
-            <a:r>
-              <a:rPr lang="en-US" b="1" dirty="0"/>
-              <a:t>look </a:t>
-            </a:r>
-            <a:r>
-              <a:rPr lang="en-US" dirty="0"/>
-              <a:t>at the overall scope of the project… </a:t>
+            <a:endParaRPr lang="en-US" sz="1200" kern="1200" dirty="0">
+              <a:solidFill>
+                <a:schemeClr val="tx1"/>
+              </a:solidFill>
+              <a:effectLst/>
+              <a:latin typeface="+mn-lt"/>
+              <a:ea typeface="+mn-ea"/>
+              <a:cs typeface="+mn-cs"/>
+            </a:endParaRPr>
+          </a:p>
+          <a:p>
+            <a:r>
+              <a:rPr lang="en-US" sz="1200" kern="1200" dirty="0">
+                <a:solidFill>
+                  <a:schemeClr val="tx1"/>
+                </a:solidFill>
+                <a:effectLst/>
+                <a:latin typeface="+mn-lt"/>
+                <a:ea typeface="+mn-ea"/>
+                <a:cs typeface="+mn-cs"/>
+              </a:rPr>
+              <a:t>Finally, we maintained a living </a:t>
+            </a:r>
+            <a:r>
+              <a:rPr lang="en-US" sz="1200" b="1" kern="1200" dirty="0">
+                <a:solidFill>
+                  <a:schemeClr val="tx1"/>
+                </a:solidFill>
+                <a:effectLst/>
+                <a:latin typeface="+mn-lt"/>
+                <a:ea typeface="+mn-ea"/>
+                <a:cs typeface="+mn-cs"/>
+              </a:rPr>
+              <a:t>backlog</a:t>
+            </a:r>
+            <a:r>
+              <a:rPr lang="en-US" sz="1200" kern="1200" dirty="0">
+                <a:solidFill>
+                  <a:schemeClr val="tx1"/>
+                </a:solidFill>
+                <a:effectLst/>
+                <a:latin typeface="+mn-lt"/>
+                <a:ea typeface="+mn-ea"/>
+                <a:cs typeface="+mn-cs"/>
+              </a:rPr>
+              <a:t> to keep </a:t>
+            </a:r>
+            <a:r>
+              <a:rPr lang="en-US" sz="1200" b="1" kern="1200" dirty="0">
+                <a:solidFill>
+                  <a:schemeClr val="tx1"/>
+                </a:solidFill>
+                <a:effectLst/>
+                <a:latin typeface="+mn-lt"/>
+                <a:ea typeface="+mn-ea"/>
+                <a:cs typeface="+mn-cs"/>
+              </a:rPr>
+              <a:t>development align</a:t>
+            </a:r>
+            <a:r>
+              <a:rPr lang="en-US" sz="1200" kern="1200" dirty="0">
+                <a:solidFill>
+                  <a:schemeClr val="tx1"/>
+                </a:solidFill>
+                <a:effectLst/>
+                <a:latin typeface="+mn-lt"/>
+                <a:ea typeface="+mn-ea"/>
+                <a:cs typeface="+mn-cs"/>
+              </a:rPr>
+              <a:t>ed and up to date.</a:t>
             </a:r>
           </a:p>
           <a:p>
@@ -5273,196 +5524,565 @@
           <a:bodyPr/>
           <a:lstStyle/>
           <a:p>
-            <a:r>
-              <a:rPr lang="en-US" dirty="0"/>
-              <a:t>🟡 KIM: </a:t>
-            </a:r>
-            <a:r>
-              <a:rPr lang="en-US" dirty="0">
-                <a:solidFill>
-                  <a:schemeClr val="accent3"/>
-                </a:solidFill>
-              </a:rPr>
-              <a:t>--one more to go!--</a:t>
-            </a:r>
-          </a:p>
-          <a:p>
             <a:endParaRPr lang="en-US" b="0" dirty="0"/>
           </a:p>
           <a:p>
             <a:r>
-              <a:rPr lang="en-US" dirty="0"/>
-              <a:t>To make </a:t>
-            </a:r>
-            <a:r>
-              <a:rPr lang="en-US" b="1" dirty="0"/>
-              <a:t>all</a:t>
-            </a:r>
-            <a:r>
-              <a:rPr lang="en-US" dirty="0"/>
-              <a:t> of that possible..</a:t>
-            </a:r>
-          </a:p>
-          <a:p>
-            <a:r>
-              <a:rPr lang="en-US" dirty="0"/>
-              <a:t>we had to be </a:t>
-            </a:r>
-            <a:r>
-              <a:rPr lang="en-US" i="1" dirty="0"/>
-              <a:t>very</a:t>
-            </a:r>
-            <a:r>
-              <a:rPr lang="en-US" dirty="0"/>
-              <a:t> intentional about </a:t>
-            </a:r>
-            <a:r>
-              <a:rPr lang="en-US" i="1" dirty="0"/>
-              <a:t>how</a:t>
-            </a:r>
-            <a:r>
-              <a:rPr lang="en-US" dirty="0"/>
-              <a:t> we managed scope and made our product decisions.</a:t>
-            </a:r>
-          </a:p>
-          <a:p>
-            <a:endParaRPr lang="en-US" dirty="0"/>
-          </a:p>
-          <a:p>
-            <a:r>
-              <a:rPr lang="en-US" dirty="0"/>
+              <a:rPr lang="en-US" sz="1200" kern="1200" dirty="0">
+                <a:solidFill>
+                  <a:schemeClr val="tx1"/>
+                </a:solidFill>
+                <a:effectLst/>
+                <a:latin typeface="+mn-lt"/>
+                <a:ea typeface="+mn-ea"/>
+                <a:cs typeface="+mn-cs"/>
+              </a:rPr>
+              <a:t>To make all of that possible, we had to be </a:t>
+            </a:r>
+            <a:r>
+              <a:rPr lang="en-US" sz="1200" b="1" kern="1200" dirty="0">
+                <a:solidFill>
+                  <a:schemeClr val="tx1"/>
+                </a:solidFill>
+                <a:effectLst/>
+                <a:latin typeface="+mn-lt"/>
+                <a:ea typeface="+mn-ea"/>
+                <a:cs typeface="+mn-cs"/>
+              </a:rPr>
+              <a:t>very intentional</a:t>
+            </a:r>
+            <a:r>
+              <a:rPr lang="en-US" sz="1200" kern="1200" dirty="0">
+                <a:solidFill>
+                  <a:schemeClr val="tx1"/>
+                </a:solidFill>
+                <a:effectLst/>
+                <a:latin typeface="+mn-lt"/>
+                <a:ea typeface="+mn-ea"/>
+                <a:cs typeface="+mn-cs"/>
+              </a:rPr>
+              <a:t> about how we managed </a:t>
+            </a:r>
+            <a:r>
+              <a:rPr lang="en-US" sz="1200" b="1" kern="1200" dirty="0">
+                <a:solidFill>
+                  <a:schemeClr val="tx1"/>
+                </a:solidFill>
+                <a:effectLst/>
+                <a:latin typeface="+mn-lt"/>
+                <a:ea typeface="+mn-ea"/>
+                <a:cs typeface="+mn-cs"/>
+              </a:rPr>
+              <a:t>scope</a:t>
+            </a:r>
+            <a:r>
+              <a:rPr lang="en-US" sz="1200" kern="1200" dirty="0">
+                <a:solidFill>
+                  <a:schemeClr val="tx1"/>
+                </a:solidFill>
+                <a:effectLst/>
+                <a:latin typeface="+mn-lt"/>
+                <a:ea typeface="+mn-ea"/>
+                <a:cs typeface="+mn-cs"/>
+              </a:rPr>
+              <a:t> and made </a:t>
+            </a:r>
+            <a:r>
+              <a:rPr lang="en-US" sz="1200" b="1" kern="1200" dirty="0">
+                <a:solidFill>
+                  <a:schemeClr val="tx1"/>
+                </a:solidFill>
+                <a:effectLst/>
+                <a:latin typeface="+mn-lt"/>
+                <a:ea typeface="+mn-ea"/>
+                <a:cs typeface="+mn-cs"/>
+              </a:rPr>
+              <a:t>product decisions</a:t>
+            </a:r>
+            <a:r>
+              <a:rPr lang="en-US" sz="1200" kern="1200" dirty="0">
+                <a:solidFill>
+                  <a:schemeClr val="tx1"/>
+                </a:solidFill>
+                <a:effectLst/>
+                <a:latin typeface="+mn-lt"/>
+                <a:ea typeface="+mn-ea"/>
+                <a:cs typeface="+mn-cs"/>
+              </a:rPr>
+              <a:t>.</a:t>
+            </a:r>
+          </a:p>
+          <a:p>
+            <a:endParaRPr lang="en-US" sz="1200" kern="1200" dirty="0">
+              <a:solidFill>
+                <a:schemeClr val="tx1"/>
+              </a:solidFill>
+              <a:effectLst/>
+              <a:latin typeface="+mn-lt"/>
+              <a:ea typeface="+mn-ea"/>
+              <a:cs typeface="+mn-cs"/>
+            </a:endParaRPr>
+          </a:p>
+          <a:p>
+            <a:r>
+              <a:rPr lang="en-US" sz="1200" kern="1200" dirty="0">
+                <a:solidFill>
+                  <a:schemeClr val="tx1"/>
+                </a:solidFill>
+                <a:effectLst/>
+                <a:latin typeface="+mn-lt"/>
+                <a:ea typeface="+mn-ea"/>
+                <a:cs typeface="+mn-cs"/>
+              </a:rPr>
               <a:t>We kept the project </a:t>
             </a:r>
             <a:r>
-              <a:rPr lang="en-US" b="1" dirty="0"/>
+              <a:rPr lang="en-US" sz="1200" b="1" kern="1200" dirty="0">
+                <a:solidFill>
+                  <a:schemeClr val="tx1"/>
+                </a:solidFill>
+                <a:effectLst/>
+                <a:latin typeface="+mn-lt"/>
+                <a:ea typeface="+mn-ea"/>
+                <a:cs typeface="+mn-cs"/>
+              </a:rPr>
               <a:t>focused</a:t>
             </a:r>
             <a:r>
-              <a:rPr lang="en-US" dirty="0"/>
-              <a:t> </a:t>
-            </a:r>
-            <a:r>
-              <a:rPr lang="en-US" i="1" dirty="0"/>
-              <a:t>and</a:t>
-            </a:r>
-            <a:r>
-              <a:rPr lang="en-US" dirty="0"/>
-              <a:t> </a:t>
-            </a:r>
-            <a:r>
-              <a:rPr lang="en-US" b="1" dirty="0"/>
+              <a:rPr lang="en-US" sz="1200" kern="1200" dirty="0">
+                <a:solidFill>
+                  <a:schemeClr val="tx1"/>
+                </a:solidFill>
+                <a:effectLst/>
+                <a:latin typeface="+mn-lt"/>
+                <a:ea typeface="+mn-ea"/>
+                <a:cs typeface="+mn-cs"/>
+              </a:rPr>
+              <a:t> and </a:t>
+            </a:r>
+            <a:r>
+              <a:rPr lang="en-US" sz="1200" b="1" kern="1200" dirty="0">
+                <a:solidFill>
+                  <a:schemeClr val="tx1"/>
+                </a:solidFill>
+                <a:effectLst/>
+                <a:latin typeface="+mn-lt"/>
+                <a:ea typeface="+mn-ea"/>
+                <a:cs typeface="+mn-cs"/>
+              </a:rPr>
               <a:t>deliverable</a:t>
             </a:r>
             <a:r>
-              <a:rPr lang="en-US" dirty="0"/>
-              <a:t> </a:t>
-            </a:r>
-            <a:r>
-              <a:rPr lang="en-US" i="1" dirty="0"/>
-              <a:t>throughout development</a:t>
-            </a:r>
-            <a:r>
-              <a:rPr lang="en-US" dirty="0"/>
+              <a:rPr lang="en-US" sz="1200" kern="1200" dirty="0">
+                <a:solidFill>
+                  <a:schemeClr val="tx1"/>
+                </a:solidFill>
+                <a:effectLst/>
+                <a:latin typeface="+mn-lt"/>
+                <a:ea typeface="+mn-ea"/>
+                <a:cs typeface="+mn-cs"/>
+              </a:rPr>
+              <a:t> throughout development.</a:t>
+            </a:r>
+          </a:p>
+          <a:p>
+            <a:endParaRPr lang="en-US" sz="1200" kern="1200" dirty="0">
+              <a:solidFill>
+                <a:schemeClr val="tx1"/>
+              </a:solidFill>
+              <a:effectLst/>
+              <a:latin typeface="+mn-lt"/>
+              <a:ea typeface="+mn-ea"/>
+              <a:cs typeface="+mn-cs"/>
+            </a:endParaRPr>
+          </a:p>
+          <a:p>
+            <a:r>
+              <a:rPr lang="en-US" sz="1200" kern="1200" dirty="0">
+                <a:solidFill>
+                  <a:schemeClr val="tx1"/>
+                </a:solidFill>
+                <a:effectLst/>
+                <a:latin typeface="+mn-lt"/>
+                <a:ea typeface="+mn-ea"/>
+                <a:cs typeface="+mn-cs"/>
+              </a:rPr>
+              <a:t>We used </a:t>
+            </a:r>
+            <a:r>
+              <a:rPr lang="en-US" sz="1200" b="1" kern="1200" dirty="0">
+                <a:solidFill>
+                  <a:schemeClr val="tx1"/>
+                </a:solidFill>
+                <a:effectLst/>
+                <a:latin typeface="+mn-lt"/>
+                <a:ea typeface="+mn-ea"/>
+                <a:cs typeface="+mn-cs"/>
+              </a:rPr>
+              <a:t>Moscow</a:t>
+            </a:r>
+            <a:r>
+              <a:rPr lang="en-US" sz="1200" kern="1200" dirty="0">
+                <a:solidFill>
+                  <a:schemeClr val="tx1"/>
+                </a:solidFill>
+                <a:effectLst/>
+                <a:latin typeface="+mn-lt"/>
+                <a:ea typeface="+mn-ea"/>
+                <a:cs typeface="+mn-cs"/>
+              </a:rPr>
+              <a:t> to ensure </a:t>
+            </a:r>
+            <a:r>
+              <a:rPr lang="en-US" sz="1200" b="1" kern="1200" dirty="0">
+                <a:solidFill>
+                  <a:schemeClr val="tx1"/>
+                </a:solidFill>
+                <a:effectLst/>
+                <a:latin typeface="+mn-lt"/>
+                <a:ea typeface="+mn-ea"/>
+                <a:cs typeface="+mn-cs"/>
+              </a:rPr>
+              <a:t>critical features</a:t>
+            </a:r>
+            <a:r>
+              <a:rPr lang="en-US" sz="1200" kern="1200" dirty="0">
+                <a:solidFill>
+                  <a:schemeClr val="tx1"/>
+                </a:solidFill>
+                <a:effectLst/>
+                <a:latin typeface="+mn-lt"/>
+                <a:ea typeface="+mn-ea"/>
+                <a:cs typeface="+mn-cs"/>
+              </a:rPr>
+              <a:t> were completed </a:t>
+            </a:r>
+            <a:r>
+              <a:rPr lang="en-US" sz="1200" b="1" kern="1200" dirty="0">
+                <a:solidFill>
+                  <a:schemeClr val="tx1"/>
+                </a:solidFill>
+                <a:effectLst/>
+                <a:latin typeface="+mn-lt"/>
+                <a:ea typeface="+mn-ea"/>
+                <a:cs typeface="+mn-cs"/>
+              </a:rPr>
+              <a:t>first</a:t>
+            </a:r>
+            <a:r>
+              <a:rPr lang="en-US" sz="1200" kern="1200" dirty="0">
+                <a:solidFill>
+                  <a:schemeClr val="tx1"/>
+                </a:solidFill>
+                <a:effectLst/>
+                <a:latin typeface="+mn-lt"/>
+                <a:ea typeface="+mn-ea"/>
+                <a:cs typeface="+mn-cs"/>
+              </a:rPr>
               <a:t>.</a:t>
             </a:r>
           </a:p>
           <a:p>
-            <a:r>
-              <a:rPr lang="en-US" dirty="0"/>
-              <a:t>We used Moscow to ensure critical features were completed </a:t>
-            </a:r>
-            <a:r>
-              <a:rPr lang="en-US" b="1" dirty="0"/>
-              <a:t>first</a:t>
-            </a:r>
-            <a:r>
-              <a:rPr lang="en-US" dirty="0"/>
+            <a:endParaRPr lang="en-US" sz="1200" kern="1200" dirty="0">
+              <a:solidFill>
+                <a:schemeClr val="tx1"/>
+              </a:solidFill>
+              <a:effectLst/>
+              <a:latin typeface="+mn-lt"/>
+              <a:ea typeface="+mn-ea"/>
+              <a:cs typeface="+mn-cs"/>
+            </a:endParaRPr>
+          </a:p>
+          <a:p>
+            <a:r>
+              <a:rPr lang="en-US" sz="1200" kern="1200" dirty="0">
+                <a:solidFill>
+                  <a:schemeClr val="tx1"/>
+                </a:solidFill>
+                <a:effectLst/>
+                <a:latin typeface="+mn-lt"/>
+                <a:ea typeface="+mn-ea"/>
+                <a:cs typeface="+mn-cs"/>
+              </a:rPr>
+              <a:t>We also followed a </a:t>
+            </a:r>
+            <a:r>
+              <a:rPr lang="en-US" sz="1200" b="1" kern="1200" dirty="0">
+                <a:solidFill>
+                  <a:schemeClr val="tx1"/>
+                </a:solidFill>
+                <a:effectLst/>
+                <a:latin typeface="+mn-lt"/>
+                <a:ea typeface="+mn-ea"/>
+                <a:cs typeface="+mn-cs"/>
+              </a:rPr>
+              <a:t>wave-based</a:t>
+            </a:r>
+            <a:r>
+              <a:rPr lang="en-US" sz="1200" kern="1200" dirty="0">
+                <a:solidFill>
+                  <a:schemeClr val="tx1"/>
+                </a:solidFill>
+                <a:effectLst/>
+                <a:latin typeface="+mn-lt"/>
+                <a:ea typeface="+mn-ea"/>
+                <a:cs typeface="+mn-cs"/>
+              </a:rPr>
+              <a:t> approach, completing </a:t>
+            </a:r>
+            <a:r>
+              <a:rPr lang="en-US" sz="1200" b="1" kern="1200" dirty="0">
+                <a:solidFill>
+                  <a:schemeClr val="tx1"/>
+                </a:solidFill>
+                <a:effectLst/>
+                <a:latin typeface="+mn-lt"/>
+                <a:ea typeface="+mn-ea"/>
+                <a:cs typeface="+mn-cs"/>
+              </a:rPr>
+              <a:t>backend APIs</a:t>
+            </a:r>
+            <a:r>
+              <a:rPr lang="en-US" sz="1200" kern="1200" dirty="0">
+                <a:solidFill>
+                  <a:schemeClr val="tx1"/>
+                </a:solidFill>
+                <a:effectLst/>
+                <a:latin typeface="+mn-lt"/>
+                <a:ea typeface="+mn-ea"/>
+                <a:cs typeface="+mn-cs"/>
+              </a:rPr>
+              <a:t> before </a:t>
+            </a:r>
+            <a:r>
+              <a:rPr lang="en-US" sz="1200" b="1" kern="1200" dirty="0">
+                <a:solidFill>
+                  <a:schemeClr val="tx1"/>
+                </a:solidFill>
+                <a:effectLst/>
+                <a:latin typeface="+mn-lt"/>
+                <a:ea typeface="+mn-ea"/>
+                <a:cs typeface="+mn-cs"/>
+              </a:rPr>
+              <a:t>frontend</a:t>
+            </a:r>
+            <a:r>
+              <a:rPr lang="en-US" sz="1200" kern="1200" dirty="0">
+                <a:solidFill>
+                  <a:schemeClr val="tx1"/>
+                </a:solidFill>
+                <a:effectLst/>
+                <a:latin typeface="+mn-lt"/>
+                <a:ea typeface="+mn-ea"/>
+                <a:cs typeface="+mn-cs"/>
+              </a:rPr>
+              <a:t> integration to reduce </a:t>
+            </a:r>
+            <a:r>
+              <a:rPr lang="en-US" sz="1200" b="1" kern="1200" dirty="0">
+                <a:solidFill>
+                  <a:schemeClr val="tx1"/>
+                </a:solidFill>
+                <a:effectLst/>
+                <a:latin typeface="+mn-lt"/>
+                <a:ea typeface="+mn-ea"/>
+                <a:cs typeface="+mn-cs"/>
+              </a:rPr>
+              <a:t>blockers</a:t>
+            </a:r>
+            <a:r>
+              <a:rPr lang="en-US" sz="1200" kern="1200" dirty="0">
+                <a:solidFill>
+                  <a:schemeClr val="tx1"/>
+                </a:solidFill>
+                <a:effectLst/>
+                <a:latin typeface="+mn-lt"/>
+                <a:ea typeface="+mn-ea"/>
+                <a:cs typeface="+mn-cs"/>
+              </a:rPr>
               <a:t>.</a:t>
             </a:r>
           </a:p>
           <a:p>
-            <a:r>
-              <a:rPr lang="en-US" dirty="0"/>
-              <a:t>Also, we </a:t>
-            </a:r>
-            <a:r>
-              <a:rPr lang="en-US" dirty="0" err="1"/>
-              <a:t>followed..a</a:t>
-            </a:r>
-            <a:r>
-              <a:rPr lang="en-US" dirty="0"/>
-              <a:t> wave-based approach-- completing backend APIs </a:t>
-            </a:r>
-            <a:r>
-              <a:rPr lang="en-US" i="1" dirty="0"/>
-              <a:t>before</a:t>
-            </a:r>
-            <a:r>
-              <a:rPr lang="en-US" dirty="0"/>
-              <a:t> frontend integration to </a:t>
-            </a:r>
-            <a:r>
-              <a:rPr lang="en-US" b="0" i="1" dirty="0"/>
-              <a:t>reduce: </a:t>
-            </a:r>
-            <a:r>
-              <a:rPr lang="en-US" b="1" i="0" dirty="0"/>
-              <a:t>blockers</a:t>
-            </a:r>
-            <a:r>
-              <a:rPr lang="en-US" dirty="0"/>
+            <a:endParaRPr lang="en-US" sz="1200" kern="1200" dirty="0">
+              <a:solidFill>
+                <a:schemeClr val="tx1"/>
+              </a:solidFill>
+              <a:effectLst/>
+              <a:latin typeface="+mn-lt"/>
+              <a:ea typeface="+mn-ea"/>
+              <a:cs typeface="+mn-cs"/>
+            </a:endParaRPr>
+          </a:p>
+          <a:p>
+            <a:r>
+              <a:rPr lang="en-US" sz="1200" kern="1200" dirty="0">
+                <a:solidFill>
+                  <a:schemeClr val="tx1"/>
+                </a:solidFill>
+                <a:effectLst/>
+                <a:latin typeface="+mn-lt"/>
+                <a:ea typeface="+mn-ea"/>
+                <a:cs typeface="+mn-cs"/>
+              </a:rPr>
+              <a:t>We made sure every </a:t>
+            </a:r>
+            <a:r>
+              <a:rPr lang="en-US" sz="1200" b="1" kern="1200" dirty="0">
+                <a:solidFill>
+                  <a:schemeClr val="tx1"/>
+                </a:solidFill>
+                <a:effectLst/>
+                <a:latin typeface="+mn-lt"/>
+                <a:ea typeface="+mn-ea"/>
+                <a:cs typeface="+mn-cs"/>
+              </a:rPr>
+              <a:t>feature</a:t>
+            </a:r>
+            <a:r>
+              <a:rPr lang="en-US" sz="1200" kern="1200" dirty="0">
+                <a:solidFill>
+                  <a:schemeClr val="tx1"/>
+                </a:solidFill>
+                <a:effectLst/>
+                <a:latin typeface="+mn-lt"/>
+                <a:ea typeface="+mn-ea"/>
+                <a:cs typeface="+mn-cs"/>
+              </a:rPr>
+              <a:t> had clear </a:t>
+            </a:r>
+            <a:r>
+              <a:rPr lang="en-US" sz="1200" b="1" kern="1200" dirty="0">
+                <a:solidFill>
+                  <a:schemeClr val="tx1"/>
+                </a:solidFill>
+                <a:effectLst/>
+                <a:latin typeface="+mn-lt"/>
+                <a:ea typeface="+mn-ea"/>
+                <a:cs typeface="+mn-cs"/>
+              </a:rPr>
+              <a:t>requirements</a:t>
+            </a:r>
+            <a:r>
+              <a:rPr lang="en-US" sz="1200" kern="1200" dirty="0">
+                <a:solidFill>
+                  <a:schemeClr val="tx1"/>
+                </a:solidFill>
+                <a:effectLst/>
+                <a:latin typeface="+mn-lt"/>
+                <a:ea typeface="+mn-ea"/>
+                <a:cs typeface="+mn-cs"/>
+              </a:rPr>
+              <a:t> before </a:t>
+            </a:r>
+            <a:r>
+              <a:rPr lang="en-US" sz="1200" b="1" kern="1200" dirty="0">
+                <a:solidFill>
+                  <a:schemeClr val="tx1"/>
+                </a:solidFill>
+                <a:effectLst/>
+                <a:latin typeface="+mn-lt"/>
+                <a:ea typeface="+mn-ea"/>
+                <a:cs typeface="+mn-cs"/>
+              </a:rPr>
+              <a:t>development</a:t>
+            </a:r>
+            <a:r>
+              <a:rPr lang="en-US" sz="1200" kern="1200" dirty="0">
+                <a:solidFill>
+                  <a:schemeClr val="tx1"/>
+                </a:solidFill>
+                <a:effectLst/>
+                <a:latin typeface="+mn-lt"/>
+                <a:ea typeface="+mn-ea"/>
+                <a:cs typeface="+mn-cs"/>
+              </a:rPr>
+              <a:t> began.</a:t>
+            </a:r>
+          </a:p>
+          <a:p>
+            <a:endParaRPr lang="en-US" sz="1200" kern="1200" dirty="0">
+              <a:solidFill>
+                <a:schemeClr val="tx1"/>
+              </a:solidFill>
+              <a:effectLst/>
+              <a:latin typeface="+mn-lt"/>
+              <a:ea typeface="+mn-ea"/>
+              <a:cs typeface="+mn-cs"/>
+            </a:endParaRPr>
+          </a:p>
+          <a:p>
+            <a:r>
+              <a:rPr lang="en-US" sz="1200" kern="1200" dirty="0">
+                <a:solidFill>
+                  <a:schemeClr val="tx1"/>
+                </a:solidFill>
+                <a:effectLst/>
+                <a:latin typeface="+mn-lt"/>
+                <a:ea typeface="+mn-ea"/>
+                <a:cs typeface="+mn-cs"/>
+              </a:rPr>
+              <a:t>These decisions helped us stay </a:t>
+            </a:r>
+            <a:r>
+              <a:rPr lang="en-US" sz="1200" b="1" kern="1200" dirty="0">
+                <a:solidFill>
+                  <a:schemeClr val="tx1"/>
+                </a:solidFill>
+                <a:effectLst/>
+                <a:latin typeface="+mn-lt"/>
+                <a:ea typeface="+mn-ea"/>
+                <a:cs typeface="+mn-cs"/>
+              </a:rPr>
+              <a:t>organized</a:t>
+            </a:r>
+            <a:r>
+              <a:rPr lang="en-US" sz="1200" kern="1200" dirty="0">
+                <a:solidFill>
+                  <a:schemeClr val="tx1"/>
+                </a:solidFill>
+                <a:effectLst/>
+                <a:latin typeface="+mn-lt"/>
+                <a:ea typeface="+mn-ea"/>
+                <a:cs typeface="+mn-cs"/>
+              </a:rPr>
+              <a:t> and deliver a </a:t>
+            </a:r>
+            <a:r>
+              <a:rPr lang="en-US" sz="1200" b="1" kern="1200" dirty="0">
+                <a:solidFill>
+                  <a:schemeClr val="tx1"/>
+                </a:solidFill>
+                <a:effectLst/>
+                <a:latin typeface="+mn-lt"/>
+                <a:ea typeface="+mn-ea"/>
+                <a:cs typeface="+mn-cs"/>
+              </a:rPr>
+              <a:t>complete system</a:t>
+            </a:r>
+            <a:r>
+              <a:rPr lang="en-US" sz="1200" kern="1200" dirty="0">
+                <a:solidFill>
+                  <a:schemeClr val="tx1"/>
+                </a:solidFill>
+                <a:effectLst/>
+                <a:latin typeface="+mn-lt"/>
+                <a:ea typeface="+mn-ea"/>
+                <a:cs typeface="+mn-cs"/>
+              </a:rPr>
               <a:t>.</a:t>
             </a:r>
           </a:p>
           <a:p>
-            <a:endParaRPr lang="en-US" dirty="0"/>
-          </a:p>
-          <a:p>
-            <a:r>
-              <a:rPr lang="en-US" dirty="0"/>
-              <a:t>We made sure </a:t>
-            </a:r>
-            <a:r>
-              <a:rPr lang="en-US" i="1" dirty="0"/>
-              <a:t>every</a:t>
-            </a:r>
-            <a:r>
-              <a:rPr lang="en-US" dirty="0"/>
-              <a:t> feature had </a:t>
-            </a:r>
-            <a:r>
-              <a:rPr lang="en-US" b="1" dirty="0"/>
-              <a:t>clear requirements </a:t>
-            </a:r>
-            <a:r>
-              <a:rPr lang="en-US" dirty="0"/>
-              <a:t>before development even began.</a:t>
-            </a:r>
-          </a:p>
-          <a:p>
-            <a:endParaRPr lang="en-US" dirty="0"/>
-          </a:p>
-          <a:p>
-            <a:r>
-              <a:rPr lang="en-US" dirty="0"/>
-              <a:t>.. These decisions helped us stay organized to deliver a </a:t>
-            </a:r>
-            <a:r>
-              <a:rPr lang="en-US" b="1" dirty="0"/>
-              <a:t>complete</a:t>
-            </a:r>
-            <a:r>
-              <a:rPr lang="en-US" dirty="0"/>
-              <a:t> </a:t>
-            </a:r>
-            <a:r>
-              <a:rPr lang="en-US" b="1" dirty="0"/>
-              <a:t>system</a:t>
-            </a:r>
-            <a:r>
-              <a:rPr lang="en-US" dirty="0"/>
-              <a:t>.</a:t>
-            </a:r>
+            <a:endParaRPr lang="en-US" sz="1200" kern="1200" dirty="0">
+              <a:solidFill>
+                <a:schemeClr val="tx1"/>
+              </a:solidFill>
+              <a:effectLst/>
+              <a:latin typeface="+mn-lt"/>
+              <a:ea typeface="+mn-ea"/>
+              <a:cs typeface="+mn-cs"/>
+            </a:endParaRPr>
           </a:p>
           <a:p>
             <a:endParaRPr lang="en-US" b="1" dirty="0"/>
@@ -5588,66 +6208,921 @@
           <a:bodyPr/>
           <a:lstStyle/>
           <a:p>
-            <a:r>
-              <a:rPr lang="en-US" dirty="0"/>
-              <a:t>🟡 KIM: </a:t>
-            </a:r>
-          </a:p>
-          <a:p>
             <a:endParaRPr lang="en-US" b="1" dirty="0"/>
           </a:p>
           <a:p>
             <a:r>
-              <a:rPr lang="en-US" dirty="0"/>
-              <a:t>Beyond how we built the system, we also want to highlight what stood out in how we worked as a team.</a:t>
-            </a:r>
-          </a:p>
-          <a:p>
-            <a:r>
-              <a:rPr lang="en-US" dirty="0"/>
-              <a:t>One of our biggest strengths was maintaining a clear API contract, which kept the frontend and backend aligned.</a:t>
-            </a:r>
-          </a:p>
-          <a:p>
-            <a:r>
-              <a:rPr lang="en-US" dirty="0"/>
-              <a:t>We also followed strong development practices, including code reviews and testing before merging changes.</a:t>
-            </a:r>
-          </a:p>
-          <a:p>
-            <a:r>
-              <a:rPr lang="en-US" dirty="0"/>
-              <a:t>Our team collaborated closely, supporting each other and adapting quickly when needed.</a:t>
-            </a:r>
-          </a:p>
-          <a:p>
-            <a:r>
-              <a:rPr lang="en-US" dirty="0"/>
-              <a:t>From a personal standpoint, I worked across both the backend and frontend, contributing to API development and frontend integration. I also helped ensure that features worked together end-to-end, focusing on connecting components and maintaining consistency across the system.</a:t>
-            </a:r>
-          </a:p>
-          <a:p>
-            <a:r>
-              <a:rPr lang="en-US" dirty="0"/>
-              <a:t>Overall, what we’re most proud of is that this idea became a reality—a complete platform with both a customer-facing interface and an admin portal that work together seamlessly.</a:t>
-            </a:r>
+              <a:rPr lang="en-US" sz="1200" kern="1200" dirty="0">
+                <a:solidFill>
+                  <a:schemeClr val="tx1"/>
+                </a:solidFill>
+                <a:effectLst/>
+                <a:latin typeface="+mn-lt"/>
+                <a:ea typeface="+mn-ea"/>
+                <a:cs typeface="+mn-cs"/>
+              </a:rPr>
+              <a:t>Beyond </a:t>
+            </a:r>
+            <a:r>
+              <a:rPr lang="en-US" sz="1200" b="1" kern="1200" dirty="0">
+                <a:solidFill>
+                  <a:schemeClr val="tx1"/>
+                </a:solidFill>
+                <a:effectLst/>
+                <a:latin typeface="+mn-lt"/>
+                <a:ea typeface="+mn-ea"/>
+                <a:cs typeface="+mn-cs"/>
+              </a:rPr>
+              <a:t>how</a:t>
+            </a:r>
+            <a:r>
+              <a:rPr lang="en-US" sz="1200" kern="1200" dirty="0">
+                <a:solidFill>
+                  <a:schemeClr val="tx1"/>
+                </a:solidFill>
+                <a:effectLst/>
+                <a:latin typeface="+mn-lt"/>
+                <a:ea typeface="+mn-ea"/>
+                <a:cs typeface="+mn-cs"/>
+              </a:rPr>
+              <a:t> we built the system, we also want to </a:t>
+            </a:r>
+            <a:r>
+              <a:rPr lang="en-US" sz="1200" b="1" kern="1200" dirty="0">
+                <a:solidFill>
+                  <a:schemeClr val="tx1"/>
+                </a:solidFill>
+                <a:effectLst/>
+                <a:latin typeface="+mn-lt"/>
+                <a:ea typeface="+mn-ea"/>
+                <a:cs typeface="+mn-cs"/>
+              </a:rPr>
+              <a:t>highlight</a:t>
+            </a:r>
+            <a:r>
+              <a:rPr lang="en-US" sz="1200" kern="1200" dirty="0">
+                <a:solidFill>
+                  <a:schemeClr val="tx1"/>
+                </a:solidFill>
+                <a:effectLst/>
+                <a:latin typeface="+mn-lt"/>
+                <a:ea typeface="+mn-ea"/>
+                <a:cs typeface="+mn-cs"/>
+              </a:rPr>
+              <a:t> how we </a:t>
+            </a:r>
+            <a:r>
+              <a:rPr lang="en-US" sz="1200" b="1" kern="1200" dirty="0">
+                <a:solidFill>
+                  <a:schemeClr val="tx1"/>
+                </a:solidFill>
+                <a:effectLst/>
+                <a:latin typeface="+mn-lt"/>
+                <a:ea typeface="+mn-ea"/>
+                <a:cs typeface="+mn-cs"/>
+              </a:rPr>
+              <a:t>worked</a:t>
+            </a:r>
+            <a:r>
+              <a:rPr lang="en-US" sz="1200" kern="1200" dirty="0">
+                <a:solidFill>
+                  <a:schemeClr val="tx1"/>
+                </a:solidFill>
+                <a:effectLst/>
+                <a:latin typeface="+mn-lt"/>
+                <a:ea typeface="+mn-ea"/>
+                <a:cs typeface="+mn-cs"/>
+              </a:rPr>
+              <a:t> as a </a:t>
+            </a:r>
+            <a:r>
+              <a:rPr lang="en-US" sz="1200" b="1" kern="1200" dirty="0">
+                <a:solidFill>
+                  <a:schemeClr val="tx1"/>
+                </a:solidFill>
+                <a:effectLst/>
+                <a:latin typeface="+mn-lt"/>
+                <a:ea typeface="+mn-ea"/>
+                <a:cs typeface="+mn-cs"/>
+              </a:rPr>
+              <a:t>team</a:t>
+            </a:r>
+            <a:r>
+              <a:rPr lang="en-US" sz="1200" kern="1200" dirty="0">
+                <a:solidFill>
+                  <a:schemeClr val="tx1"/>
+                </a:solidFill>
+                <a:effectLst/>
+                <a:latin typeface="+mn-lt"/>
+                <a:ea typeface="+mn-ea"/>
+                <a:cs typeface="+mn-cs"/>
+              </a:rPr>
+              <a:t>.</a:t>
+            </a:r>
+          </a:p>
+          <a:p>
+            <a:endParaRPr lang="en-US" sz="1200" kern="1200" dirty="0">
+              <a:solidFill>
+                <a:schemeClr val="tx1"/>
+              </a:solidFill>
+              <a:effectLst/>
+              <a:latin typeface="+mn-lt"/>
+              <a:ea typeface="+mn-ea"/>
+              <a:cs typeface="+mn-cs"/>
+            </a:endParaRPr>
+          </a:p>
+          <a:p>
+            <a:r>
+              <a:rPr lang="en-US" sz="1200" kern="1200" dirty="0">
+                <a:solidFill>
+                  <a:schemeClr val="tx1"/>
+                </a:solidFill>
+                <a:effectLst/>
+                <a:latin typeface="+mn-lt"/>
+                <a:ea typeface="+mn-ea"/>
+                <a:cs typeface="+mn-cs"/>
+              </a:rPr>
+              <a:t>One of our biggest </a:t>
+            </a:r>
+            <a:r>
+              <a:rPr lang="en-US" sz="1200" b="1" kern="1200" dirty="0">
+                <a:solidFill>
+                  <a:schemeClr val="tx1"/>
+                </a:solidFill>
+                <a:effectLst/>
+                <a:latin typeface="+mn-lt"/>
+                <a:ea typeface="+mn-ea"/>
+                <a:cs typeface="+mn-cs"/>
+              </a:rPr>
+              <a:t>strengths</a:t>
+            </a:r>
+            <a:r>
+              <a:rPr lang="en-US" sz="1200" kern="1200" dirty="0">
+                <a:solidFill>
+                  <a:schemeClr val="tx1"/>
+                </a:solidFill>
+                <a:effectLst/>
+                <a:latin typeface="+mn-lt"/>
+                <a:ea typeface="+mn-ea"/>
+                <a:cs typeface="+mn-cs"/>
+              </a:rPr>
+              <a:t> was maintaining a </a:t>
+            </a:r>
+            <a:r>
+              <a:rPr lang="en-US" sz="1200" b="1" kern="1200" dirty="0">
+                <a:solidFill>
+                  <a:schemeClr val="tx1"/>
+                </a:solidFill>
+                <a:effectLst/>
+                <a:latin typeface="+mn-lt"/>
+                <a:ea typeface="+mn-ea"/>
+                <a:cs typeface="+mn-cs"/>
+              </a:rPr>
+              <a:t>clear API contract</a:t>
+            </a:r>
+            <a:r>
+              <a:rPr lang="en-US" sz="1200" kern="1200" dirty="0">
+                <a:solidFill>
+                  <a:schemeClr val="tx1"/>
+                </a:solidFill>
+                <a:effectLst/>
+                <a:latin typeface="+mn-lt"/>
+                <a:ea typeface="+mn-ea"/>
+                <a:cs typeface="+mn-cs"/>
+              </a:rPr>
+              <a:t>, which kept the frontend and backend </a:t>
+            </a:r>
+            <a:r>
+              <a:rPr lang="en-US" sz="1200" b="1" kern="1200" dirty="0">
+                <a:solidFill>
+                  <a:schemeClr val="tx1"/>
+                </a:solidFill>
+                <a:effectLst/>
+                <a:latin typeface="+mn-lt"/>
+                <a:ea typeface="+mn-ea"/>
+                <a:cs typeface="+mn-cs"/>
+              </a:rPr>
+              <a:t>aligned</a:t>
+            </a:r>
+            <a:r>
+              <a:rPr lang="en-US" sz="1200" kern="1200" dirty="0">
+                <a:solidFill>
+                  <a:schemeClr val="tx1"/>
+                </a:solidFill>
+                <a:effectLst/>
+                <a:latin typeface="+mn-lt"/>
+                <a:ea typeface="+mn-ea"/>
+                <a:cs typeface="+mn-cs"/>
+              </a:rPr>
+              <a:t>.</a:t>
+            </a:r>
+          </a:p>
+          <a:p>
+            <a:endParaRPr lang="en-US" sz="1200" kern="1200" dirty="0">
+              <a:solidFill>
+                <a:schemeClr val="tx1"/>
+              </a:solidFill>
+              <a:effectLst/>
+              <a:latin typeface="+mn-lt"/>
+              <a:ea typeface="+mn-ea"/>
+              <a:cs typeface="+mn-cs"/>
+            </a:endParaRPr>
+          </a:p>
+          <a:p>
+            <a:r>
+              <a:rPr lang="en-US" sz="1200" kern="1200" dirty="0">
+                <a:solidFill>
+                  <a:schemeClr val="tx1"/>
+                </a:solidFill>
+                <a:effectLst/>
+                <a:latin typeface="+mn-lt"/>
+                <a:ea typeface="+mn-ea"/>
+                <a:cs typeface="+mn-cs"/>
+              </a:rPr>
+              <a:t>We also followed strong development </a:t>
+            </a:r>
+            <a:r>
+              <a:rPr lang="en-US" sz="1200" b="1" kern="1200" dirty="0">
+                <a:solidFill>
+                  <a:schemeClr val="tx1"/>
+                </a:solidFill>
+                <a:effectLst/>
+                <a:latin typeface="+mn-lt"/>
+                <a:ea typeface="+mn-ea"/>
+                <a:cs typeface="+mn-cs"/>
+              </a:rPr>
+              <a:t>practices</a:t>
+            </a:r>
+            <a:r>
+              <a:rPr lang="en-US" sz="1200" kern="1200" dirty="0">
+                <a:solidFill>
+                  <a:schemeClr val="tx1"/>
+                </a:solidFill>
+                <a:effectLst/>
+                <a:latin typeface="+mn-lt"/>
+                <a:ea typeface="+mn-ea"/>
+                <a:cs typeface="+mn-cs"/>
+              </a:rPr>
+              <a:t>, including </a:t>
+            </a:r>
+            <a:r>
+              <a:rPr lang="en-US" sz="1200" b="1" kern="1200" dirty="0">
+                <a:solidFill>
+                  <a:schemeClr val="tx1"/>
+                </a:solidFill>
+                <a:effectLst/>
+                <a:latin typeface="+mn-lt"/>
+                <a:ea typeface="+mn-ea"/>
+                <a:cs typeface="+mn-cs"/>
+              </a:rPr>
+              <a:t>code reviews</a:t>
+            </a:r>
+            <a:r>
+              <a:rPr lang="en-US" sz="1200" kern="1200" dirty="0">
+                <a:solidFill>
+                  <a:schemeClr val="tx1"/>
+                </a:solidFill>
+                <a:effectLst/>
+                <a:latin typeface="+mn-lt"/>
+                <a:ea typeface="+mn-ea"/>
+                <a:cs typeface="+mn-cs"/>
+              </a:rPr>
+              <a:t> and </a:t>
+            </a:r>
+            <a:r>
+              <a:rPr lang="en-US" sz="1200" b="1" kern="1200" dirty="0">
+                <a:solidFill>
+                  <a:schemeClr val="tx1"/>
+                </a:solidFill>
+                <a:effectLst/>
+                <a:latin typeface="+mn-lt"/>
+                <a:ea typeface="+mn-ea"/>
+                <a:cs typeface="+mn-cs"/>
+              </a:rPr>
+              <a:t>testing</a:t>
+            </a:r>
+            <a:r>
+              <a:rPr lang="en-US" sz="1200" kern="1200" dirty="0">
+                <a:solidFill>
+                  <a:schemeClr val="tx1"/>
+                </a:solidFill>
+                <a:effectLst/>
+                <a:latin typeface="+mn-lt"/>
+                <a:ea typeface="+mn-ea"/>
+                <a:cs typeface="+mn-cs"/>
+              </a:rPr>
+              <a:t> </a:t>
+            </a:r>
+            <a:r>
+              <a:rPr lang="en-US" sz="1200" b="1" kern="1200" dirty="0">
+                <a:solidFill>
+                  <a:schemeClr val="tx1"/>
+                </a:solidFill>
+                <a:effectLst/>
+                <a:latin typeface="+mn-lt"/>
+                <a:ea typeface="+mn-ea"/>
+                <a:cs typeface="+mn-cs"/>
+              </a:rPr>
+              <a:t>before</a:t>
+            </a:r>
+            <a:r>
+              <a:rPr lang="en-US" sz="1200" kern="1200" dirty="0">
+                <a:solidFill>
+                  <a:schemeClr val="tx1"/>
+                </a:solidFill>
+                <a:effectLst/>
+                <a:latin typeface="+mn-lt"/>
+                <a:ea typeface="+mn-ea"/>
+                <a:cs typeface="+mn-cs"/>
+              </a:rPr>
+              <a:t> merging </a:t>
+            </a:r>
+            <a:r>
+              <a:rPr lang="en-US" sz="1200" b="1" kern="1200" dirty="0">
+                <a:solidFill>
+                  <a:schemeClr val="tx1"/>
+                </a:solidFill>
+                <a:effectLst/>
+                <a:latin typeface="+mn-lt"/>
+                <a:ea typeface="+mn-ea"/>
+                <a:cs typeface="+mn-cs"/>
+              </a:rPr>
+              <a:t>changes</a:t>
+            </a:r>
+            <a:r>
+              <a:rPr lang="en-US" sz="1200" kern="1200" dirty="0">
+                <a:solidFill>
+                  <a:schemeClr val="tx1"/>
+                </a:solidFill>
+                <a:effectLst/>
+                <a:latin typeface="+mn-lt"/>
+                <a:ea typeface="+mn-ea"/>
+                <a:cs typeface="+mn-cs"/>
+              </a:rPr>
+              <a:t>.</a:t>
+            </a:r>
+          </a:p>
+          <a:p>
+            <a:endParaRPr lang="en-US" sz="1200" kern="1200" dirty="0">
+              <a:solidFill>
+                <a:schemeClr val="tx1"/>
+              </a:solidFill>
+              <a:effectLst/>
+              <a:latin typeface="+mn-lt"/>
+              <a:ea typeface="+mn-ea"/>
+              <a:cs typeface="+mn-cs"/>
+            </a:endParaRPr>
+          </a:p>
+          <a:p>
+            <a:r>
+              <a:rPr lang="en-US" sz="1200" kern="1200" dirty="0">
+                <a:solidFill>
+                  <a:schemeClr val="tx1"/>
+                </a:solidFill>
+                <a:effectLst/>
+                <a:latin typeface="+mn-lt"/>
+                <a:ea typeface="+mn-ea"/>
+                <a:cs typeface="+mn-cs"/>
+              </a:rPr>
+              <a:t>Our team </a:t>
+            </a:r>
+            <a:r>
+              <a:rPr lang="en-US" sz="1200" b="1" kern="1200" dirty="0">
+                <a:solidFill>
+                  <a:schemeClr val="tx1"/>
+                </a:solidFill>
+                <a:effectLst/>
+                <a:latin typeface="+mn-lt"/>
+                <a:ea typeface="+mn-ea"/>
+                <a:cs typeface="+mn-cs"/>
+              </a:rPr>
+              <a:t>collaborated</a:t>
+            </a:r>
+            <a:r>
+              <a:rPr lang="en-US" sz="1200" kern="1200" dirty="0">
+                <a:solidFill>
+                  <a:schemeClr val="tx1"/>
+                </a:solidFill>
+                <a:effectLst/>
+                <a:latin typeface="+mn-lt"/>
+                <a:ea typeface="+mn-ea"/>
+                <a:cs typeface="+mn-cs"/>
+              </a:rPr>
+              <a:t> closely, </a:t>
+            </a:r>
+            <a:r>
+              <a:rPr lang="en-US" sz="1200" b="1" kern="1200" dirty="0">
+                <a:solidFill>
+                  <a:schemeClr val="tx1"/>
+                </a:solidFill>
+                <a:effectLst/>
+                <a:latin typeface="+mn-lt"/>
+                <a:ea typeface="+mn-ea"/>
+                <a:cs typeface="+mn-cs"/>
+              </a:rPr>
+              <a:t>supporting</a:t>
+            </a:r>
+            <a:r>
+              <a:rPr lang="en-US" sz="1200" kern="1200" dirty="0">
+                <a:solidFill>
+                  <a:schemeClr val="tx1"/>
+                </a:solidFill>
+                <a:effectLst/>
+                <a:latin typeface="+mn-lt"/>
+                <a:ea typeface="+mn-ea"/>
+                <a:cs typeface="+mn-cs"/>
+              </a:rPr>
+              <a:t> each other and </a:t>
+            </a:r>
+            <a:r>
+              <a:rPr lang="en-US" sz="1200" b="1" kern="1200" dirty="0">
+                <a:solidFill>
+                  <a:schemeClr val="tx1"/>
+                </a:solidFill>
+                <a:effectLst/>
+                <a:latin typeface="+mn-lt"/>
+                <a:ea typeface="+mn-ea"/>
+                <a:cs typeface="+mn-cs"/>
+              </a:rPr>
+              <a:t>adapting</a:t>
+            </a:r>
+            <a:r>
+              <a:rPr lang="en-US" sz="1200" kern="1200" dirty="0">
+                <a:solidFill>
+                  <a:schemeClr val="tx1"/>
+                </a:solidFill>
+                <a:effectLst/>
+                <a:latin typeface="+mn-lt"/>
+                <a:ea typeface="+mn-ea"/>
+                <a:cs typeface="+mn-cs"/>
+              </a:rPr>
+              <a:t> quickly when needed.</a:t>
+            </a:r>
+          </a:p>
+          <a:p>
+            <a:endParaRPr lang="en-US" sz="1200" kern="1200" dirty="0">
+              <a:solidFill>
+                <a:schemeClr val="tx1"/>
+              </a:solidFill>
+              <a:effectLst/>
+              <a:latin typeface="+mn-lt"/>
+              <a:ea typeface="+mn-ea"/>
+              <a:cs typeface="+mn-cs"/>
+            </a:endParaRPr>
+          </a:p>
+          <a:p>
+            <a:r>
+              <a:rPr lang="en-US" sz="1200" kern="1200" dirty="0">
+                <a:solidFill>
+                  <a:schemeClr val="tx1"/>
+                </a:solidFill>
+                <a:effectLst/>
+                <a:latin typeface="+mn-lt"/>
+                <a:ea typeface="+mn-ea"/>
+                <a:cs typeface="+mn-cs"/>
+              </a:rPr>
+              <a:t>From a </a:t>
+            </a:r>
+            <a:r>
+              <a:rPr lang="en-US" sz="1200" b="1" kern="1200" dirty="0">
+                <a:solidFill>
+                  <a:schemeClr val="tx1"/>
+                </a:solidFill>
+                <a:effectLst/>
+                <a:latin typeface="+mn-lt"/>
+                <a:ea typeface="+mn-ea"/>
+                <a:cs typeface="+mn-cs"/>
+              </a:rPr>
+              <a:t>personal standpoint</a:t>
+            </a:r>
+            <a:r>
+              <a:rPr lang="en-US" sz="1200" kern="1200" dirty="0">
+                <a:solidFill>
+                  <a:schemeClr val="tx1"/>
+                </a:solidFill>
+                <a:effectLst/>
+                <a:latin typeface="+mn-lt"/>
+                <a:ea typeface="+mn-ea"/>
+                <a:cs typeface="+mn-cs"/>
+              </a:rPr>
+              <a:t>, I worked across both the </a:t>
+            </a:r>
+            <a:r>
+              <a:rPr lang="en-US" sz="1200" b="1" kern="1200" dirty="0">
+                <a:solidFill>
+                  <a:schemeClr val="tx1"/>
+                </a:solidFill>
+                <a:effectLst/>
+                <a:latin typeface="+mn-lt"/>
+                <a:ea typeface="+mn-ea"/>
+                <a:cs typeface="+mn-cs"/>
+              </a:rPr>
+              <a:t>backend and frontend</a:t>
+            </a:r>
+            <a:r>
+              <a:rPr lang="en-US" sz="1200" kern="1200" dirty="0">
+                <a:solidFill>
+                  <a:schemeClr val="tx1"/>
+                </a:solidFill>
+                <a:effectLst/>
+                <a:latin typeface="+mn-lt"/>
+                <a:ea typeface="+mn-ea"/>
+                <a:cs typeface="+mn-cs"/>
+              </a:rPr>
+              <a:t>, contributing to </a:t>
+            </a:r>
+            <a:r>
+              <a:rPr lang="en-US" sz="1200" b="1" kern="1200" dirty="0">
+                <a:solidFill>
+                  <a:schemeClr val="tx1"/>
+                </a:solidFill>
+                <a:effectLst/>
+                <a:latin typeface="+mn-lt"/>
+                <a:ea typeface="+mn-ea"/>
+                <a:cs typeface="+mn-cs"/>
+              </a:rPr>
+              <a:t>API development</a:t>
+            </a:r>
+            <a:r>
+              <a:rPr lang="en-US" sz="1200" kern="1200" dirty="0">
+                <a:solidFill>
+                  <a:schemeClr val="tx1"/>
+                </a:solidFill>
+                <a:effectLst/>
+                <a:latin typeface="+mn-lt"/>
+                <a:ea typeface="+mn-ea"/>
+                <a:cs typeface="+mn-cs"/>
+              </a:rPr>
+              <a:t> and </a:t>
+            </a:r>
+            <a:r>
+              <a:rPr lang="en-US" sz="1200" b="1" kern="1200" dirty="0">
+                <a:solidFill>
+                  <a:schemeClr val="tx1"/>
+                </a:solidFill>
+                <a:effectLst/>
+                <a:latin typeface="+mn-lt"/>
+                <a:ea typeface="+mn-ea"/>
+                <a:cs typeface="+mn-cs"/>
+              </a:rPr>
+              <a:t>frontend integration</a:t>
+            </a:r>
+            <a:r>
+              <a:rPr lang="en-US" sz="1200" kern="1200" dirty="0">
+                <a:solidFill>
+                  <a:schemeClr val="tx1"/>
+                </a:solidFill>
+                <a:effectLst/>
+                <a:latin typeface="+mn-lt"/>
+                <a:ea typeface="+mn-ea"/>
+                <a:cs typeface="+mn-cs"/>
+              </a:rPr>
+              <a:t>. I also helped ensure that </a:t>
+            </a:r>
+            <a:r>
+              <a:rPr lang="en-US" sz="1200" b="1" kern="1200" dirty="0">
+                <a:solidFill>
+                  <a:schemeClr val="tx1"/>
+                </a:solidFill>
+                <a:effectLst/>
+                <a:latin typeface="+mn-lt"/>
+                <a:ea typeface="+mn-ea"/>
+                <a:cs typeface="+mn-cs"/>
+              </a:rPr>
+              <a:t>features</a:t>
+            </a:r>
+            <a:r>
+              <a:rPr lang="en-US" sz="1200" kern="1200" dirty="0">
+                <a:solidFill>
+                  <a:schemeClr val="tx1"/>
+                </a:solidFill>
+                <a:effectLst/>
+                <a:latin typeface="+mn-lt"/>
+                <a:ea typeface="+mn-ea"/>
+                <a:cs typeface="+mn-cs"/>
+              </a:rPr>
+              <a:t> worked together </a:t>
+            </a:r>
+            <a:r>
+              <a:rPr lang="en-US" sz="1200" b="1" kern="1200" dirty="0">
+                <a:solidFill>
+                  <a:schemeClr val="tx1"/>
+                </a:solidFill>
+                <a:effectLst/>
+                <a:latin typeface="+mn-lt"/>
+                <a:ea typeface="+mn-ea"/>
+                <a:cs typeface="+mn-cs"/>
+              </a:rPr>
+              <a:t>end-to-end</a:t>
+            </a:r>
+            <a:r>
+              <a:rPr lang="en-US" sz="1200" kern="1200" dirty="0">
+                <a:solidFill>
+                  <a:schemeClr val="tx1"/>
+                </a:solidFill>
+                <a:effectLst/>
+                <a:latin typeface="+mn-lt"/>
+                <a:ea typeface="+mn-ea"/>
+                <a:cs typeface="+mn-cs"/>
+              </a:rPr>
+              <a:t>, focusing on </a:t>
+            </a:r>
+            <a:r>
+              <a:rPr lang="en-US" sz="1200" b="1" kern="1200" dirty="0">
+                <a:solidFill>
+                  <a:schemeClr val="tx1"/>
+                </a:solidFill>
+                <a:effectLst/>
+                <a:latin typeface="+mn-lt"/>
+                <a:ea typeface="+mn-ea"/>
+                <a:cs typeface="+mn-cs"/>
+              </a:rPr>
+              <a:t>connecting components</a:t>
+            </a:r>
+            <a:r>
+              <a:rPr lang="en-US" sz="1200" kern="1200" dirty="0">
+                <a:solidFill>
+                  <a:schemeClr val="tx1"/>
+                </a:solidFill>
+                <a:effectLst/>
+                <a:latin typeface="+mn-lt"/>
+                <a:ea typeface="+mn-ea"/>
+                <a:cs typeface="+mn-cs"/>
+              </a:rPr>
+              <a:t> and </a:t>
+            </a:r>
+            <a:r>
+              <a:rPr lang="en-US" sz="1200" b="1" kern="1200" dirty="0">
+                <a:solidFill>
+                  <a:schemeClr val="tx1"/>
+                </a:solidFill>
+                <a:effectLst/>
+                <a:latin typeface="+mn-lt"/>
+                <a:ea typeface="+mn-ea"/>
+                <a:cs typeface="+mn-cs"/>
+              </a:rPr>
+              <a:t>maintaining consistency</a:t>
+            </a:r>
+            <a:r>
+              <a:rPr lang="en-US" sz="1200" kern="1200" dirty="0">
+                <a:solidFill>
+                  <a:schemeClr val="tx1"/>
+                </a:solidFill>
+                <a:effectLst/>
+                <a:latin typeface="+mn-lt"/>
+                <a:ea typeface="+mn-ea"/>
+                <a:cs typeface="+mn-cs"/>
+              </a:rPr>
+              <a:t> across the system.</a:t>
+            </a:r>
+          </a:p>
+          <a:p>
+            <a:endParaRPr lang="en-US" sz="1200" kern="1200" dirty="0">
+              <a:solidFill>
+                <a:schemeClr val="tx1"/>
+              </a:solidFill>
+              <a:effectLst/>
+              <a:latin typeface="+mn-lt"/>
+              <a:ea typeface="+mn-ea"/>
+              <a:cs typeface="+mn-cs"/>
+            </a:endParaRPr>
+          </a:p>
+          <a:p>
+            <a:r>
+              <a:rPr lang="en-US" sz="1200" kern="1200" dirty="0">
+                <a:solidFill>
+                  <a:schemeClr val="tx1"/>
+                </a:solidFill>
+                <a:effectLst/>
+                <a:latin typeface="+mn-lt"/>
+                <a:ea typeface="+mn-ea"/>
+                <a:cs typeface="+mn-cs"/>
+              </a:rPr>
+              <a:t>Overall, what we’re most </a:t>
+            </a:r>
+            <a:r>
+              <a:rPr lang="en-US" sz="1200" b="1" kern="1200" dirty="0">
+                <a:solidFill>
+                  <a:schemeClr val="tx1"/>
+                </a:solidFill>
+                <a:effectLst/>
+                <a:latin typeface="+mn-lt"/>
+                <a:ea typeface="+mn-ea"/>
+                <a:cs typeface="+mn-cs"/>
+              </a:rPr>
+              <a:t>proud</a:t>
+            </a:r>
+            <a:r>
+              <a:rPr lang="en-US" sz="1200" kern="1200" dirty="0">
+                <a:solidFill>
+                  <a:schemeClr val="tx1"/>
+                </a:solidFill>
+                <a:effectLst/>
+                <a:latin typeface="+mn-lt"/>
+                <a:ea typeface="+mn-ea"/>
+                <a:cs typeface="+mn-cs"/>
+              </a:rPr>
+              <a:t> of is that this </a:t>
+            </a:r>
+            <a:r>
+              <a:rPr lang="en-US" sz="1200" b="1" kern="1200" dirty="0">
+                <a:solidFill>
+                  <a:schemeClr val="tx1"/>
+                </a:solidFill>
+                <a:effectLst/>
+                <a:latin typeface="+mn-lt"/>
+                <a:ea typeface="+mn-ea"/>
+                <a:cs typeface="+mn-cs"/>
+              </a:rPr>
+              <a:t>idea</a:t>
+            </a:r>
+            <a:r>
+              <a:rPr lang="en-US" sz="1200" kern="1200" dirty="0">
+                <a:solidFill>
+                  <a:schemeClr val="tx1"/>
+                </a:solidFill>
+                <a:effectLst/>
+                <a:latin typeface="+mn-lt"/>
+                <a:ea typeface="+mn-ea"/>
+                <a:cs typeface="+mn-cs"/>
+              </a:rPr>
+              <a:t> became a </a:t>
+            </a:r>
+            <a:r>
+              <a:rPr lang="en-US" sz="1200" b="1" kern="1200" dirty="0">
+                <a:solidFill>
+                  <a:schemeClr val="tx1"/>
+                </a:solidFill>
+                <a:effectLst/>
+                <a:latin typeface="+mn-lt"/>
+                <a:ea typeface="+mn-ea"/>
+                <a:cs typeface="+mn-cs"/>
+              </a:rPr>
+              <a:t>reality</a:t>
+            </a:r>
+            <a:r>
+              <a:rPr lang="en-US" sz="1200" kern="1200" dirty="0">
+                <a:solidFill>
+                  <a:schemeClr val="tx1"/>
+                </a:solidFill>
+                <a:effectLst/>
+                <a:latin typeface="+mn-lt"/>
+                <a:ea typeface="+mn-ea"/>
+                <a:cs typeface="+mn-cs"/>
+              </a:rPr>
+              <a:t>—a </a:t>
+            </a:r>
+            <a:r>
+              <a:rPr lang="en-US" sz="1200" b="1" kern="1200" dirty="0">
+                <a:solidFill>
+                  <a:schemeClr val="tx1"/>
+                </a:solidFill>
+                <a:effectLst/>
+                <a:latin typeface="+mn-lt"/>
+                <a:ea typeface="+mn-ea"/>
+                <a:cs typeface="+mn-cs"/>
+              </a:rPr>
+              <a:t>complete platform</a:t>
+            </a:r>
+            <a:r>
+              <a:rPr lang="en-US" sz="1200" kern="1200" dirty="0">
+                <a:solidFill>
+                  <a:schemeClr val="tx1"/>
+                </a:solidFill>
+                <a:effectLst/>
+                <a:latin typeface="+mn-lt"/>
+                <a:ea typeface="+mn-ea"/>
+                <a:cs typeface="+mn-cs"/>
+              </a:rPr>
+              <a:t> with both a </a:t>
+            </a:r>
+            <a:r>
+              <a:rPr lang="en-US" sz="1200" b="1" kern="1200" dirty="0">
+                <a:solidFill>
+                  <a:schemeClr val="tx1"/>
+                </a:solidFill>
+                <a:effectLst/>
+                <a:latin typeface="+mn-lt"/>
+                <a:ea typeface="+mn-ea"/>
+                <a:cs typeface="+mn-cs"/>
+              </a:rPr>
+              <a:t>customer interface</a:t>
+            </a:r>
+            <a:r>
+              <a:rPr lang="en-US" sz="1200" kern="1200" dirty="0">
+                <a:solidFill>
+                  <a:schemeClr val="tx1"/>
+                </a:solidFill>
+                <a:effectLst/>
+                <a:latin typeface="+mn-lt"/>
+                <a:ea typeface="+mn-ea"/>
+                <a:cs typeface="+mn-cs"/>
+              </a:rPr>
+              <a:t> and an </a:t>
+            </a:r>
+            <a:r>
+              <a:rPr lang="en-US" sz="1200" b="1" kern="1200" dirty="0">
+                <a:solidFill>
+                  <a:schemeClr val="tx1"/>
+                </a:solidFill>
+                <a:effectLst/>
+                <a:latin typeface="+mn-lt"/>
+                <a:ea typeface="+mn-ea"/>
+                <a:cs typeface="+mn-cs"/>
+              </a:rPr>
+              <a:t>admin portal</a:t>
+            </a:r>
+            <a:r>
+              <a:rPr lang="en-US" sz="1200" kern="1200" dirty="0">
+                <a:solidFill>
+                  <a:schemeClr val="tx1"/>
+                </a:solidFill>
+                <a:effectLst/>
+                <a:latin typeface="+mn-lt"/>
+                <a:ea typeface="+mn-ea"/>
+                <a:cs typeface="+mn-cs"/>
+              </a:rPr>
+              <a:t> that work together </a:t>
+            </a:r>
+            <a:r>
+              <a:rPr lang="en-US" sz="1200" b="1" kern="1200" dirty="0">
+                <a:solidFill>
+                  <a:schemeClr val="tx1"/>
+                </a:solidFill>
+                <a:effectLst/>
+                <a:latin typeface="+mn-lt"/>
+                <a:ea typeface="+mn-ea"/>
+                <a:cs typeface="+mn-cs"/>
+              </a:rPr>
+              <a:t>seamlessly</a:t>
+            </a:r>
+            <a:r>
+              <a:rPr lang="en-US" sz="1200" kern="1200" dirty="0">
+                <a:solidFill>
+                  <a:schemeClr val="tx1"/>
+                </a:solidFill>
+                <a:effectLst/>
+                <a:latin typeface="+mn-lt"/>
+                <a:ea typeface="+mn-ea"/>
+                <a:cs typeface="+mn-cs"/>
+              </a:rPr>
+              <a:t>.</a:t>
+            </a:r>
+          </a:p>
+          <a:p>
+            <a:endParaRPr lang="en-US" sz="1200" kern="1200" dirty="0">
+              <a:solidFill>
+                <a:schemeClr val="tx1"/>
+              </a:solidFill>
+              <a:effectLst/>
+              <a:latin typeface="+mn-lt"/>
+              <a:ea typeface="+mn-ea"/>
+              <a:cs typeface="+mn-cs"/>
+            </a:endParaRPr>
+          </a:p>
+          <a:p>
+            <a:r>
+              <a:rPr lang="en-US" sz="1200" kern="1200" dirty="0">
+                <a:solidFill>
+                  <a:schemeClr val="tx1"/>
+                </a:solidFill>
+                <a:effectLst/>
+                <a:latin typeface="+mn-lt"/>
+                <a:ea typeface="+mn-ea"/>
+                <a:cs typeface="+mn-cs"/>
+              </a:rPr>
+              <a:t>Now, I’ll hand off to </a:t>
+            </a:r>
+            <a:r>
+              <a:rPr lang="en-US" sz="1200" b="1" kern="1200" dirty="0">
+                <a:solidFill>
+                  <a:schemeClr val="tx1"/>
+                </a:solidFill>
+                <a:effectLst/>
+                <a:latin typeface="+mn-lt"/>
+                <a:ea typeface="+mn-ea"/>
+                <a:cs typeface="+mn-cs"/>
+              </a:rPr>
+              <a:t>Rachel</a:t>
+            </a:r>
+            <a:r>
+              <a:rPr lang="en-US" sz="1200" kern="1200" dirty="0">
+                <a:solidFill>
+                  <a:schemeClr val="tx1"/>
+                </a:solidFill>
+                <a:effectLst/>
+                <a:latin typeface="+mn-lt"/>
+                <a:ea typeface="+mn-ea"/>
+                <a:cs typeface="+mn-cs"/>
+              </a:rPr>
+              <a:t>.</a:t>
+            </a:r>
+          </a:p>
+          <a:p>
             <a:endParaRPr lang="en-US" b="1" dirty="0"/>
           </a:p>
           <a:p>
             <a:endParaRPr lang="en-US" b="1" dirty="0"/>
-          </a:p>
-          <a:p>
-            <a:endParaRPr lang="en-US" b="1" dirty="0"/>
-          </a:p>
-          <a:p>
-            <a:r>
-              <a:rPr lang="en-US" b="1" dirty="0"/>
-              <a:t>⏭️ Up Next: </a:t>
-            </a:r>
-            <a:r>
-              <a:rPr lang="en-US" b="0" dirty="0"/>
-              <a:t>Frontend Development (Rachel!)</a:t>
-            </a:r>
           </a:p>
           <a:p>
             <a:endParaRPr lang="en-US" b="0" dirty="0"/>
